--- a/downloads/presentations/modules/arc-330.pptx
+++ b/downloads/presentations/modules/arc-330.pptx
@@ -615,7 +615,8 @@
               <a:t>Core Concepts
 Cloud computing provides remote infrastructure, platforms, and services that can host data pipelines, analytics environments, AI tools, and public health applications. Cloud deployment can improve scalability and resilience, but only when identity, access, logging, encryption, and governance are configured correctly.
 Containers package software and its dependencies so that it can run consistently across environments. Containers can improve reproducibility and deployment speed, but they must be scanned, patched, configured, and monitored. Container use does not remove the need for secure architecture.
-Identity and access management defines who or what can access systems, data, and actions. In AI workflows, IAM must include human users, service accounts, APIs, agents, and automation tools. Poorly designed access can expose sensitive data or allow unauthorized write-back to systems of record.</a:t>
+Identity and access management defines who or what can access systems, data, and actions. In AI workflows, IAM must include human users, service accounts, APIs, agents, and automation tools. Poorly designed access can expose sensitive data or allow unauthorized write-back to systems of record.
+Application guidance: Connect the concept to public health purpose, responsible use, required safeguards, documentation, and the next action a department should take.</a:t>
             </a:r>
             <a:endParaRPr lang="en-US" dirty="0"/>
           </a:p>
@@ -704,7 +705,8 @@
             <a:r>
               <a:rPr lang="en-US" dirty="0"/>
               <a:t>Public Health Example
-A public health agency may deploy an internal RAG assistant in a cloud environment so staff can search approved guidance and protocols. The tool may be low risk if it uses public documents, but it becomes higher risk if it retrieves sensitive policies, case notes, or internal operational documents. Secure deployment requires access controls, document-level permissions, logging, monitoring, backup, and a process for removing outdated content.</a:t>
+A public health agency may deploy an internal RAG assistant in a cloud environment so staff can search approved guidance and protocols. The tool may be low risk if it uses public documents, but it becomes higher risk if it retrieves sensitive policies, case notes, or internal operational documents. Secure deployment requires access controls, document-level permissions, logging, monitoring, backup, and a process for removing outdated content.
+Application guidance: Connect the concept to public health purpose, responsible use, required safeguards, documentation, and the next action a department should take.</a:t>
             </a:r>
             <a:endParaRPr lang="en-US" dirty="0"/>
           </a:p>
@@ -795,7 +797,8 @@
               <a:t>Technical Deep Dive
 Secure deployment begins with environment separation. Development, testing, staging, and production environments should be clearly separated so experimental tools do not affect operational systems. Sensitive production data should not be copied into lower environments unless approved controls are in place.
 Logging and monitoring are central to deployment safety. Agencies should know when systems are accessed, when APIs fail, when models produce errors, when unusual activity occurs, and when infrastructure changes are made. Logs should be protected because they can contain sensitive information.
-Secrets management is essential for AI integrations. API keys, database passwords, certificates, and tokens should not be embedded in code, prompts, shared documents, or configuration files that are not secured. A compromised secret can allow unauthorized access to data or actions across connected systems.</a:t>
+Secrets management is essential for AI integrations. API keys, database passwords, certificates, and tokens should not be embedded in code, prompts, shared documents, or configuration files that are not secured. A compromised secret can allow unauthorized access to data or actions across connected systems.
+Application guidance: Connect the concept to public health purpose, responsible use, required safeguards, documentation, and the next action a department should take.</a:t>
             </a:r>
             <a:endParaRPr lang="en-US" dirty="0"/>
           </a:p>
@@ -886,7 +889,8 @@
               <a:t>Risks, Failure Modes, and Guardrails
 A common failure mode is treating the topic as a technical detail rather than a public health control. When staff do not connect technical decisions to authority, workflow, equity, privacy, security, and accountability, the agency may adopt a tool that appears useful but cannot be sustained or defended.
 Another risk is relying on vendor claims without agency-defined evidence. Vendors may provide demonstrations, dashboards, or summary metrics that do not match the agency workflow or data environment. A guardrail is to require documentation, test results, acceptance criteria, and agency-controlled review.
-A third risk is failing to plan for change. Public health data, policies, systems, and emergencies change. Any technical approach must include monitoring, review, versioning, escalation, and retirement pathways so the agency can respond when assumptions no longer hold.</a:t>
+A third risk is failing to plan for change. Public health data, policies, systems, and emergencies change. Any technical approach must include monitoring, review, versioning, escalation, and retirement pathways so the agency can respond when assumptions no longer hold.
+Application guidance: Identify what could go wrong, who could be affected, what safeguards are needed, and what evidence should be reviewed before use expands.</a:t>
             </a:r>
             <a:endParaRPr lang="en-US" dirty="0"/>
           </a:p>
@@ -976,7 +980,8 @@
               <a:rPr lang="en-US" dirty="0"/>
               <a:t>Application to AI-Supported Workflows
 Generative AI, predictive analytics, RAG, automation, and agentic workflows all depend on the controls described in this module. The controls should be scaled to the risk of the use case. A tool that drafts internal training text may require lighter review than a tool that updates case records, prioritizes outreach, or supports public communication during an emergency.
-The module should be applied during readiness assessment, procurement, implementation planning, pilot testing, and post-deployment monitoring. Learners should document how the topic affects data, systems, users, safeguards, and decision-making for the selected workflow.</a:t>
+The module should be applied during readiness assessment, procurement, implementation planning, pilot testing, and post-deployment monitoring. Learners should document how the topic affects data, systems, users, safeguards, and decision-making for the selected workflow.
+Application guidance: Use the concept to clarify workflow changes, dependencies, staffing, procurement requirements, training needs, and implementation checkpoints.</a:t>
             </a:r>
             <a:endParaRPr lang="en-US" dirty="0"/>
           </a:p>
@@ -1067,7 +1072,8 @@
               <a:t>Reflection Questions
 Where does this topic appear in one current or proposed AI workflow in your agency?
 What decisions, data sources, users, or partners would be affected if this area is poorly designed?
-What evidence would governance reviewers need before approving the workflow?</a:t>
+What evidence would governance reviewers need before approving the workflow?
+Application guidance: Connect the concept to public health purpose, responsible use, required safeguards, documentation, and the next action a department should take.</a:t>
             </a:r>
             <a:endParaRPr lang="en-US" dirty="0"/>
           </a:p>
@@ -1157,7 +1163,8 @@
               <a:rPr lang="en-US" dirty="0"/>
               <a:t>Reflection Questions
 Which safeguards should be required before pilot testing?
-Who owns ongoing monitoring and review?</a:t>
+Who owns ongoing monitoring and review?
+Application guidance: Connect the concept to public health purpose, responsible use, required safeguards, documentation, and the next action a department should take.</a:t>
             </a:r>
             <a:endParaRPr lang="en-US" dirty="0"/>
           </a:p>
@@ -1247,7 +1254,8 @@
               <a:rPr lang="en-US" dirty="0"/>
               <a:t>Practical Exercise
 Create a secure deployment readiness worksheet for one real or realistic public health AI workflow. The artifact should describe the use case, affected users, data sources, system dependencies, risks, guardrails, review points, and unresolved questions.
-The exercise should produce a work product that could be used in a governance meeting, procurement review, implementation planning session, pilot evaluation, or monitoring review. Learners should document assumptions and identify which staff or partners need to be consulted.</a:t>
+The exercise should produce a work product that could be used in a governance meeting, procurement review, implementation planning session, pilot evaluation, or monitoring review. Learners should document assumptions and identify which staff or partners need to be consulted.
+Application guidance: Use the assignment to test whether you can explain the concept, apply it to a realistic public health situation, and identify what would need review before the work moves forward.</a:t>
             </a:r>
             <a:endParaRPr lang="en-US" dirty="0"/>
           </a:p>
@@ -1336,7 +1344,8 @@
             <a:r>
               <a:rPr lang="en-US" dirty="0"/>
               <a:t>Expected Artifact or Evidence
-The expected artifact is a completed secure deployment readiness worksheet. It should be specific to a public health workflow and should include technical dependencies, governance questions, human review expectations, monitoring indicators, and unresolved risks.</a:t>
+The expected artifact is a completed secure deployment readiness worksheet. It should be specific to a public health workflow and should include technical dependencies, governance questions, human review expectations, monitoring indicators, and unresolved risks.
+Application guidance: Connect the concept to public health purpose, responsible use, required safeguards, documentation, and the next action a department should take.</a:t>
             </a:r>
             <a:endParaRPr lang="en-US" dirty="0"/>
           </a:p>
@@ -1425,7 +1434,8 @@
             <a:r>
               <a:rPr lang="en-US" dirty="0"/>
               <a:t>Expected Assignment
-The expected artifact is a completed secure deployment readiness worksheet. It should be specific to a public health workflow and should include technical dependencies, governance questions, human review expectations, monitoring indicators, and unresolved risks.</a:t>
+The expected artifact is a completed secure deployment readiness worksheet. It should be specific to a public health workflow and should include technical dependencies, governance questions, human review expectations, monitoring indicators, and unresolved risks.
+Application guidance: Use the assignment to test whether you can explain the concept, apply it to a realistic public health situation, and identify what would need review before the work moves forward.</a:t>
             </a:r>
             <a:endParaRPr lang="en-US" dirty="0"/>
           </a:p>
@@ -1610,7 +1620,8 @@
 2. Which practice best supports responsible implementation?
 3. Which statement best describes a common failure mode?
 4. What should be included in the practical artifact for this module?
-5. When should the issue be escalated for governance or leadership review?</a:t>
+5. When should the issue be escalated for governance or leadership review?
+Application guidance: Use the assignment to test whether you can explain the concept, apply it to a realistic public health situation, and identify what would need review before the work moves forward.</a:t>
             </a:r>
             <a:endParaRPr lang="en-US" dirty="0"/>
           </a:p>
@@ -1703,7 +1714,8 @@
 NIST Cybersecurity Framework and cloud security guidance
 NIST Generative AI Profile: https://www.nist.gov/publications/artificial-intelligence-risk-management-framework-generative-artificial-intelligence
 CDC Public Health Data Strategy and Data Modernization resources: https://www.cdc.gov/public-health-data-strategy/php/about/index.html
-OWASP Top 10 for LLM Applications, when security or AI integrations are relevant</a:t>
+OWASP Top 10 for LLM Applications, when security or AI integrations are relevant
+Application guidance: Connect the concept to public health purpose, responsible use, required safeguards, documentation, and the next action a department should take.</a:t>
             </a:r>
             <a:endParaRPr lang="en-US" dirty="0"/>
           </a:p>
@@ -1792,7 +1804,8 @@
             <a:r>
               <a:rPr lang="en-US" dirty="0"/>
               <a:t>References and Resources
-Agency privacy, cybersecurity, data governance, procurement, and records management policies</a:t>
+Agency privacy, cybersecurity, data governance, procurement, and records management policies
+Application guidance: Connect the concept to public health purpose, responsible use, required safeguards, documentation, and the next action a department should take.</a:t>
             </a:r>
             <a:endParaRPr lang="en-US" dirty="0"/>
           </a:p>
@@ -2071,7 +2084,8 @@
 Identify the technical, operational, privacy, security, equity, and governance issues associated with the topic.
 Apply the topic to a real or realistic public health workflow, system, or implementation scenario.
 Recognize common failure modes that can affect safety, accuracy, trust, workflow fit, or sustainability.
-Identify practical guardrails that should be documented before implementation.</a:t>
+Identify practical guardrails that should be documented before implementation.
+Application guidance: Use the assignment to test whether you can explain the concept, apply it to a realistic public health situation, and identify what would need review before the work moves forward.</a:t>
             </a:r>
             <a:endParaRPr lang="en-US" dirty="0"/>
           </a:p>
@@ -2160,7 +2174,8 @@
             <a:r>
               <a:rPr lang="en-US" dirty="0"/>
               <a:t>Learning Objectives
-Produce a secure deployment readiness worksheet that can support readiness assessment, governance review, procurement, implementation, or monitoring.</a:t>
+Produce a secure deployment readiness worksheet that can support readiness assessment, governance review, procurement, implementation, or monitoring.
+Application guidance: Use the assignment to test whether you can explain the concept, apply it to a realistic public health situation, and identify what would need review before the work moves forward.</a:t>
             </a:r>
             <a:endParaRPr lang="en-US" dirty="0"/>
           </a:p>
@@ -2249,7 +2264,8 @@
             <a:r>
               <a:rPr lang="en-US" dirty="0"/>
               <a:t>Module Overview
-Many AI tools are deployed in cloud environments or packaged in containers that make applications easier to move, scale, and maintain. Public health staff do not need to become cloud engineers, but they need enough technical literacy to understand hosting, identity and access management, logging, encryption, secrets management, backup, disaster recovery, and secure deployment responsibilities. This module connects deployment choices to public health continuity, privacy, cybersecurity, and sustainability.</a:t>
+Many AI tools are deployed in cloud environments or packaged in containers that make applications easier to move, scale, and maintain. Public health staff do not need to become cloud engineers, but they need enough technical literacy to understand hosting, identity and access management, logging, encryption, secrets management, backup, disaster recovery, and secure deployment responsibilities. This module connects deployment choices to public health continuity, privacy, cybersecurity, and sustainability.
+Application guidance: Connect the concept to public health purpose, responsible use, required safeguards, documentation, and the next action a department should take.</a:t>
             </a:r>
             <a:endParaRPr lang="en-US" dirty="0"/>
           </a:p>
@@ -2338,7 +2354,8 @@
             <a:r>
               <a:rPr lang="en-US" dirty="0"/>
               <a:t>Jurisdiction and Agency Policy Note
-This national-level module is intended for training and planning purposes. It does not replace legal, privacy, procurement, civil rights, records, or agency policy review. Learners should confirm applicable requirements in their own jurisdiction and organization before implementing AI-supported workflows.</a:t>
+This national-level module is intended for training and planning purposes. It does not replace legal, privacy, procurement, civil rights, records, or agency policy review. Learners should confirm applicable requirements in their own jurisdiction and organization before implementing AI-supported workflows.
+Application guidance: Translate this concept into clear decision rights, review steps, documentation expectations, and escalation paths before an AI-supported workflow is approved.</a:t>
             </a:r>
             <a:endParaRPr lang="en-US" dirty="0"/>
           </a:p>
@@ -2428,7 +2445,8 @@
               <a:rPr lang="en-US" dirty="0"/>
               <a:t>Why This Topic Matters for Public Health AI
 Cloud, Containers, and Secure Deployment Basics matters because AI systems are embedded in public health programs, data systems, and decision processes rather than operating in isolation. The topic affects whether AI outputs are accurate, explainable, safe, equitable, secure, and sustainable. Agencies that ignore this area may create tools that work in a demonstration but fail in actual practice.
-The topic also affects accountability. Public health agencies must be able to explain how data are used, why a tool was approved, what evidence supports the workflow, who reviews outputs, and what happens when the system fails. These responsibilities become more important as AI tools move from experimentation into operational use.</a:t>
+The topic also affects accountability. Public health agencies must be able to explain how data are used, why a tool was approved, what evidence supports the workflow, who reviews outputs, and what happens when the system fails. These responsibilities become more important as AI tools move from experimentation into operational use.
+Application guidance: Connect the concept to public health purpose, responsible use, required safeguards, documentation, and the next action a department should take.</a:t>
             </a:r>
             <a:endParaRPr lang="en-US" dirty="0"/>
           </a:p>
@@ -3199,8 +3217,8 @@
         </p:nvSpPr>
         <p:spPr>
           <a:xfrm>
-            <a:off x="9966960" y="6537960"/>
-            <a:ext cx="1645920" cy="201168"/>
+            <a:off x="9646920" y="6537960"/>
+            <a:ext cx="1965960" cy="201168"/>
           </a:xfrm>
           <a:prstGeom prst="rect">
             <a:avLst/>
@@ -3224,7 +3242,7 @@
                 <a:ea typeface="Aptos" pitchFamily="34" charset="-122"/>
                 <a:cs typeface="Aptos" pitchFamily="34" charset="-120"/>
               </a:rPr>
-              <a:t>Â© Paula Soper</a:t>
+              <a:t>Copyright Paula Soper</a:t>
             </a:r>
             <a:endParaRPr lang="en-US" sz="800" dirty="0"/>
           </a:p>
@@ -3271,77 +3289,13 @@
       </p:sp>
       <p:sp>
         <p:nvSpPr>
-          <p:cNvPr id="8" name="Shape 6"/>
+          <p:cNvPr id="8" name="Text 6"/>
           <p:cNvSpPr/>
           <p:nvPr/>
         </p:nvSpPr>
         <p:spPr>
           <a:xfrm>
             <a:off x="640080" y="658368"/>
-            <a:ext cx="420624" cy="420624"/>
-          </a:xfrm>
-          <a:prstGeom prst="ellipse">
-            <a:avLst/>
-          </a:prstGeom>
-          <a:solidFill>
-            <a:srgbClr val="0068B7"/>
-          </a:solidFill>
-          <a:ln w="12700">
-            <a:solidFill>
-              <a:srgbClr val="0068B7"/>
-            </a:solidFill>
-            <a:prstDash val="solid"/>
-          </a:ln>
-        </p:spPr>
-      </p:sp>
-      <p:sp>
-        <p:nvSpPr>
-          <p:cNvPr id="9" name="Text 7"/>
-          <p:cNvSpPr/>
-          <p:nvPr/>
-        </p:nvSpPr>
-        <p:spPr>
-          <a:xfrm>
-            <a:off x="640080" y="731520"/>
-            <a:ext cx="420624" cy="164592"/>
-          </a:xfrm>
-          <a:prstGeom prst="rect">
-            <a:avLst/>
-          </a:prstGeom>
-          <a:noFill/>
-          <a:ln/>
-        </p:spPr>
-        <p:txBody>
-          <a:bodyPr wrap="square" lIns="0" tIns="0" rIns="0" bIns="0" rtlCol="0" anchor="ctr"/>
-          <a:lstStyle/>
-          <a:p>
-            <a:pPr algn="ctr" indent="0" marL="0">
-              <a:buNone/>
-            </a:pPr>
-            <a:r>
-              <a:rPr lang="en-US" sz="1100" b="1" dirty="0">
-                <a:solidFill>
-                  <a:srgbClr val="FFFFFF"/>
-                </a:solidFill>
-                <a:latin typeface="Aptos" pitchFamily="34" charset="0"/>
-                <a:ea typeface="Aptos" pitchFamily="34" charset="-122"/>
-                <a:cs typeface="Aptos" pitchFamily="34" charset="-120"/>
-              </a:rPr>
-              <a:t>5</a:t>
-            </a:r>
-            <a:endParaRPr lang="en-US" sz="1100" dirty="0"/>
-          </a:p>
-        </p:txBody>
-      </p:sp>
-      <p:sp>
-        <p:nvSpPr>
-          <p:cNvPr id="10" name="Text 8"/>
-          <p:cNvSpPr/>
-          <p:nvPr/>
-        </p:nvSpPr>
-        <p:spPr>
-          <a:xfrm>
-            <a:off x="640080" y="621792"/>
             <a:ext cx="10881360" cy="713232"/>
           </a:xfrm>
           <a:prstGeom prst="rect">
@@ -3376,14 +3330,14 @@
       </p:sp>
       <p:sp>
         <p:nvSpPr>
-          <p:cNvPr id="11" name="Text 9"/>
+          <p:cNvPr id="9" name="Text 7"/>
           <p:cNvSpPr/>
           <p:nvPr/>
         </p:nvSpPr>
         <p:spPr>
           <a:xfrm>
             <a:off x="868680" y="1508760"/>
-            <a:ext cx="6537960" cy="4160520"/>
+            <a:ext cx="6309360" cy="4160520"/>
           </a:xfrm>
           <a:prstGeom prst="rect">
             <a:avLst/>
@@ -3442,18 +3396,18 @@
       </p:sp>
       <p:sp>
         <p:nvSpPr>
-          <p:cNvPr id="12" name="Shape 10"/>
-          <p:cNvSpPr/>
-          <p:nvPr/>
-        </p:nvSpPr>
-        <p:spPr>
-          <a:xfrm>
-            <a:off x="7909560" y="1417320"/>
-            <a:ext cx="3154680" cy="1828800"/>
+          <p:cNvPr id="10" name="Shape 8"/>
+          <p:cNvSpPr/>
+          <p:nvPr/>
+        </p:nvSpPr>
+        <p:spPr>
+          <a:xfrm>
+            <a:off x="7635240" y="1325880"/>
+            <a:ext cx="3474720" cy="1325880"/>
           </a:xfrm>
           <a:prstGeom prst="roundRect">
             <a:avLst>
-              <a:gd name="adj" fmla="val 6000"/>
+              <a:gd name="adj" fmla="val 8276"/>
             </a:avLst>
           </a:prstGeom>
           <a:solidFill>
@@ -3469,14 +3423,14 @@
       </p:sp>
       <p:sp>
         <p:nvSpPr>
-          <p:cNvPr id="13" name="Text 11"/>
-          <p:cNvSpPr/>
-          <p:nvPr/>
-        </p:nvSpPr>
-        <p:spPr>
-          <a:xfrm>
-            <a:off x="8074152" y="1563624"/>
-            <a:ext cx="2825496" cy="256032"/>
+          <p:cNvPr id="11" name="Text 9"/>
+          <p:cNvSpPr/>
+          <p:nvPr/>
+        </p:nvSpPr>
+        <p:spPr>
+          <a:xfrm>
+            <a:off x="7799832" y="1472184"/>
+            <a:ext cx="3145536" cy="256032"/>
           </a:xfrm>
           <a:prstGeom prst="rect">
             <a:avLst/>
@@ -3500,7 +3454,7 @@
                 <a:ea typeface="Aptos" pitchFamily="34" charset="-122"/>
                 <a:cs typeface="Aptos" pitchFamily="34" charset="-120"/>
               </a:rPr>
-              <a:t>Key idea</a:t>
+              <a:t>Core concept</a:t>
             </a:r>
             <a:endParaRPr lang="en-US" sz="1300" dirty="0"/>
           </a:p>
@@ -3508,14 +3462,14 @@
       </p:sp>
       <p:sp>
         <p:nvSpPr>
-          <p:cNvPr id="14" name="Text 12"/>
-          <p:cNvSpPr/>
-          <p:nvPr/>
-        </p:nvSpPr>
-        <p:spPr>
-          <a:xfrm>
-            <a:off x="8074152" y="1920240"/>
-            <a:ext cx="2825496" cy="1188720"/>
+          <p:cNvPr id="12" name="Text 10"/>
+          <p:cNvSpPr/>
+          <p:nvPr/>
+        </p:nvSpPr>
+        <p:spPr>
+          <a:xfrm>
+            <a:off x="7799832" y="1828800"/>
+            <a:ext cx="3145536" cy="685800"/>
           </a:xfrm>
           <a:prstGeom prst="rect">
             <a:avLst/>
@@ -3549,18 +3503,159 @@
       </p:sp>
       <p:sp>
         <p:nvSpPr>
-          <p:cNvPr id="15" name="Shape 13"/>
-          <p:cNvSpPr/>
-          <p:nvPr/>
-        </p:nvSpPr>
-        <p:spPr>
-          <a:xfrm>
-            <a:off x="7909560" y="3520440"/>
-            <a:ext cx="3154680" cy="1737360"/>
+          <p:cNvPr id="13" name="Shape 11"/>
+          <p:cNvSpPr/>
+          <p:nvPr/>
+        </p:nvSpPr>
+        <p:spPr>
+          <a:xfrm>
+            <a:off x="7635240" y="2788920"/>
+            <a:ext cx="3474720" cy="1536192"/>
           </a:xfrm>
           <a:prstGeom prst="roundRect">
             <a:avLst>
-              <a:gd name="adj" fmla="val 6316"/>
+              <a:gd name="adj" fmla="val 7143"/>
+            </a:avLst>
+          </a:prstGeom>
+          <a:solidFill>
+            <a:srgbClr val="FFFFFF">
+              <a:alpha val="88000"/>
+            </a:srgbClr>
+          </a:solidFill>
+          <a:ln w="12700">
+            <a:solidFill>
+              <a:srgbClr val="D6E8F2"/>
+            </a:solidFill>
+            <a:prstDash val="solid"/>
+          </a:ln>
+        </p:spPr>
+      </p:sp>
+      <p:sp>
+        <p:nvSpPr>
+          <p:cNvPr id="14" name="Shape 12"/>
+          <p:cNvSpPr/>
+          <p:nvPr/>
+        </p:nvSpPr>
+        <p:spPr>
+          <a:xfrm>
+            <a:off x="8074152" y="3291840"/>
+            <a:ext cx="2596896" cy="749808"/>
+          </a:xfrm>
+          <a:prstGeom prst="rect">
+            <a:avLst/>
+          </a:prstGeom>
+          <a:solidFill>
+            <a:srgbClr val="EAF6F8"/>
+          </a:solidFill>
+          <a:ln w="12700">
+            <a:solidFill>
+              <a:srgbClr val="8ABBD8"/>
+            </a:solidFill>
+            <a:prstDash val="solid"/>
+          </a:ln>
+        </p:spPr>
+      </p:sp>
+      <p:sp>
+        <p:nvSpPr>
+          <p:cNvPr id="15" name="Shape 13"/>
+          <p:cNvSpPr/>
+          <p:nvPr/>
+        </p:nvSpPr>
+        <p:spPr>
+          <a:xfrm>
+            <a:off x="8202168" y="3721608"/>
+            <a:ext cx="2340864" cy="0"/>
+          </a:xfrm>
+          <a:prstGeom prst="line">
+            <a:avLst/>
+          </a:prstGeom>
+          <a:noFill/>
+          <a:ln w="19050">
+            <a:solidFill>
+              <a:srgbClr val="0068B7"/>
+            </a:solidFill>
+            <a:prstDash val="solid"/>
+          </a:ln>
+        </p:spPr>
+      </p:sp>
+      <p:sp>
+        <p:nvSpPr>
+          <p:cNvPr id="16" name="Shape 14"/>
+          <p:cNvSpPr/>
+          <p:nvPr/>
+        </p:nvSpPr>
+        <p:spPr>
+          <a:xfrm>
+            <a:off x="9198864" y="4206240"/>
+            <a:ext cx="347472" cy="347472"/>
+          </a:xfrm>
+          <a:prstGeom prst="ellipse">
+            <a:avLst/>
+          </a:prstGeom>
+          <a:solidFill>
+            <a:srgbClr val="2F8A28"/>
+          </a:solidFill>
+          <a:ln w="12700">
+            <a:solidFill>
+              <a:srgbClr val="2F8A28"/>
+            </a:solidFill>
+            <a:prstDash val="solid"/>
+          </a:ln>
+        </p:spPr>
+      </p:sp>
+      <p:sp>
+        <p:nvSpPr>
+          <p:cNvPr id="17" name="Text 15"/>
+          <p:cNvSpPr/>
+          <p:nvPr/>
+        </p:nvSpPr>
+        <p:spPr>
+          <a:xfrm>
+            <a:off x="7909560" y="3977640"/>
+            <a:ext cx="2926080" cy="182880"/>
+          </a:xfrm>
+          <a:prstGeom prst="rect">
+            <a:avLst/>
+          </a:prstGeom>
+          <a:noFill/>
+          <a:ln/>
+        </p:spPr>
+        <p:txBody>
+          <a:bodyPr wrap="square" lIns="0" tIns="0" rIns="0" bIns="0" rtlCol="0" anchor="ctr"/>
+          <a:lstStyle/>
+          <a:p>
+            <a:pPr algn="ctr" indent="0" marL="0">
+              <a:buNone/>
+            </a:pPr>
+            <a:r>
+              <a:rPr lang="en-US" sz="1000" dirty="0">
+                <a:solidFill>
+                  <a:srgbClr val="003A63"/>
+                </a:solidFill>
+                <a:latin typeface="Aptos" pitchFamily="34" charset="0"/>
+                <a:ea typeface="Aptos" pitchFamily="34" charset="-122"/>
+                <a:cs typeface="Aptos" pitchFamily="34" charset="-120"/>
+              </a:rPr>
+              <a:t>Concept to action</a:t>
+            </a:r>
+            <a:endParaRPr lang="en-US" sz="1000" dirty="0"/>
+          </a:p>
+        </p:txBody>
+      </p:sp>
+      <p:sp>
+        <p:nvSpPr>
+          <p:cNvPr id="18" name="Shape 16"/>
+          <p:cNvSpPr/>
+          <p:nvPr/>
+        </p:nvSpPr>
+        <p:spPr>
+          <a:xfrm>
+            <a:off x="7635240" y="4498848"/>
+            <a:ext cx="3474720" cy="1143000"/>
+          </a:xfrm>
+          <a:prstGeom prst="roundRect">
+            <a:avLst>
+              <a:gd name="adj" fmla="val 9600"/>
             </a:avLst>
           </a:prstGeom>
           <a:solidFill>
@@ -3576,14 +3671,14 @@
       </p:sp>
       <p:sp>
         <p:nvSpPr>
-          <p:cNvPr id="16" name="Text 14"/>
-          <p:cNvSpPr/>
-          <p:nvPr/>
-        </p:nvSpPr>
-        <p:spPr>
-          <a:xfrm>
-            <a:off x="8074152" y="3666744"/>
-            <a:ext cx="2825496" cy="256032"/>
+          <p:cNvPr id="19" name="Text 17"/>
+          <p:cNvSpPr/>
+          <p:nvPr/>
+        </p:nvSpPr>
+        <p:spPr>
+          <a:xfrm>
+            <a:off x="7799832" y="4645152"/>
+            <a:ext cx="3145536" cy="256032"/>
           </a:xfrm>
           <a:prstGeom prst="rect">
             <a:avLst/>
@@ -3607,7 +3702,7 @@
                 <a:ea typeface="Aptos" pitchFamily="34" charset="-122"/>
                 <a:cs typeface="Aptos" pitchFamily="34" charset="-120"/>
               </a:rPr>
-              <a:t>Use this for</a:t>
+              <a:t>Apply it</a:t>
             </a:r>
             <a:endParaRPr lang="en-US" sz="1300" dirty="0"/>
           </a:p>
@@ -3615,14 +3710,14 @@
       </p:sp>
       <p:sp>
         <p:nvSpPr>
-          <p:cNvPr id="17" name="Text 15"/>
-          <p:cNvSpPr/>
-          <p:nvPr/>
-        </p:nvSpPr>
-        <p:spPr>
-          <a:xfrm>
-            <a:off x="8074152" y="4023360"/>
-            <a:ext cx="2825496" cy="1097280"/>
+          <p:cNvPr id="20" name="Text 18"/>
+          <p:cNvSpPr/>
+          <p:nvPr/>
+        </p:nvSpPr>
+        <p:spPr>
+          <a:xfrm>
+            <a:off x="7799832" y="5001768"/>
+            <a:ext cx="3145536" cy="502920"/>
           </a:xfrm>
           <a:prstGeom prst="rect">
             <a:avLst/>
@@ -3648,7 +3743,7 @@
                 <a:ea typeface="Aptos" pitchFamily="34" charset="-122"/>
                 <a:cs typeface="Aptos" pitchFamily="34" charset="-120"/>
               </a:rPr>
-              <a:t>Connect the concept to public health decisions, safeguards, documentation, or implementation work.</a:t>
+              <a:t>Connect the concept to public health purpose, responsible use, required safeguards, documentation, and the next action a department should take.</a:t>
             </a:r>
             <a:endParaRPr lang="en-US" sz="1550" dirty="0"/>
           </a:p>
@@ -3822,8 +3917,8 @@
         </p:nvSpPr>
         <p:spPr>
           <a:xfrm>
-            <a:off x="9966960" y="6537960"/>
-            <a:ext cx="1645920" cy="201168"/>
+            <a:off x="9646920" y="6537960"/>
+            <a:ext cx="1965960" cy="201168"/>
           </a:xfrm>
           <a:prstGeom prst="rect">
             <a:avLst/>
@@ -3847,7 +3942,7 @@
                 <a:ea typeface="Aptos" pitchFamily="34" charset="-122"/>
                 <a:cs typeface="Aptos" pitchFamily="34" charset="-120"/>
               </a:rPr>
-              <a:t>Â© Paula Soper</a:t>
+              <a:t>Copyright Paula Soper</a:t>
             </a:r>
             <a:endParaRPr lang="en-US" sz="800" dirty="0"/>
           </a:p>
@@ -3894,77 +3989,13 @@
       </p:sp>
       <p:sp>
         <p:nvSpPr>
-          <p:cNvPr id="8" name="Shape 6"/>
+          <p:cNvPr id="8" name="Text 6"/>
           <p:cNvSpPr/>
           <p:nvPr/>
         </p:nvSpPr>
         <p:spPr>
           <a:xfrm>
             <a:off x="640080" y="658368"/>
-            <a:ext cx="420624" cy="420624"/>
-          </a:xfrm>
-          <a:prstGeom prst="ellipse">
-            <a:avLst/>
-          </a:prstGeom>
-          <a:solidFill>
-            <a:srgbClr val="0068B7"/>
-          </a:solidFill>
-          <a:ln w="12700">
-            <a:solidFill>
-              <a:srgbClr val="0068B7"/>
-            </a:solidFill>
-            <a:prstDash val="solid"/>
-          </a:ln>
-        </p:spPr>
-      </p:sp>
-      <p:sp>
-        <p:nvSpPr>
-          <p:cNvPr id="9" name="Text 7"/>
-          <p:cNvSpPr/>
-          <p:nvPr/>
-        </p:nvSpPr>
-        <p:spPr>
-          <a:xfrm>
-            <a:off x="640080" y="731520"/>
-            <a:ext cx="420624" cy="164592"/>
-          </a:xfrm>
-          <a:prstGeom prst="rect">
-            <a:avLst/>
-          </a:prstGeom>
-          <a:noFill/>
-          <a:ln/>
-        </p:spPr>
-        <p:txBody>
-          <a:bodyPr wrap="square" lIns="0" tIns="0" rIns="0" bIns="0" rtlCol="0" anchor="ctr"/>
-          <a:lstStyle/>
-          <a:p>
-            <a:pPr algn="ctr" indent="0" marL="0">
-              <a:buNone/>
-            </a:pPr>
-            <a:r>
-              <a:rPr lang="en-US" sz="1100" b="1" dirty="0">
-                <a:solidFill>
-                  <a:srgbClr val="FFFFFF"/>
-                </a:solidFill>
-                <a:latin typeface="Aptos" pitchFamily="34" charset="0"/>
-                <a:ea typeface="Aptos" pitchFamily="34" charset="-122"/>
-                <a:cs typeface="Aptos" pitchFamily="34" charset="-120"/>
-              </a:rPr>
-              <a:t>6</a:t>
-            </a:r>
-            <a:endParaRPr lang="en-US" sz="1100" dirty="0"/>
-          </a:p>
-        </p:txBody>
-      </p:sp>
-      <p:sp>
-        <p:nvSpPr>
-          <p:cNvPr id="10" name="Text 8"/>
-          <p:cNvSpPr/>
-          <p:nvPr/>
-        </p:nvSpPr>
-        <p:spPr>
-          <a:xfrm>
-            <a:off x="640080" y="621792"/>
             <a:ext cx="10881360" cy="713232"/>
           </a:xfrm>
           <a:prstGeom prst="rect">
@@ -3999,14 +4030,14 @@
       </p:sp>
       <p:sp>
         <p:nvSpPr>
-          <p:cNvPr id="11" name="Text 9"/>
+          <p:cNvPr id="9" name="Text 7"/>
           <p:cNvSpPr/>
           <p:nvPr/>
         </p:nvSpPr>
         <p:spPr>
           <a:xfrm>
             <a:off x="868680" y="1508760"/>
-            <a:ext cx="6537960" cy="4160520"/>
+            <a:ext cx="6309360" cy="4160520"/>
           </a:xfrm>
           <a:prstGeom prst="rect">
             <a:avLst/>
@@ -4065,18 +4096,18 @@
       </p:sp>
       <p:sp>
         <p:nvSpPr>
-          <p:cNvPr id="12" name="Shape 10"/>
-          <p:cNvSpPr/>
-          <p:nvPr/>
-        </p:nvSpPr>
-        <p:spPr>
-          <a:xfrm>
-            <a:off x="7909560" y="1417320"/>
-            <a:ext cx="3154680" cy="1828800"/>
+          <p:cNvPr id="10" name="Shape 8"/>
+          <p:cNvSpPr/>
+          <p:nvPr/>
+        </p:nvSpPr>
+        <p:spPr>
+          <a:xfrm>
+            <a:off x="7635240" y="1325880"/>
+            <a:ext cx="3474720" cy="1325880"/>
           </a:xfrm>
           <a:prstGeom prst="roundRect">
             <a:avLst>
-              <a:gd name="adj" fmla="val 6000"/>
+              <a:gd name="adj" fmla="val 8276"/>
             </a:avLst>
           </a:prstGeom>
           <a:solidFill>
@@ -4092,14 +4123,14 @@
       </p:sp>
       <p:sp>
         <p:nvSpPr>
-          <p:cNvPr id="13" name="Text 11"/>
-          <p:cNvSpPr/>
-          <p:nvPr/>
-        </p:nvSpPr>
-        <p:spPr>
-          <a:xfrm>
-            <a:off x="8074152" y="1563624"/>
-            <a:ext cx="2825496" cy="256032"/>
+          <p:cNvPr id="11" name="Text 9"/>
+          <p:cNvSpPr/>
+          <p:nvPr/>
+        </p:nvSpPr>
+        <p:spPr>
+          <a:xfrm>
+            <a:off x="7799832" y="1472184"/>
+            <a:ext cx="3145536" cy="256032"/>
           </a:xfrm>
           <a:prstGeom prst="rect">
             <a:avLst/>
@@ -4123,7 +4154,7 @@
                 <a:ea typeface="Aptos" pitchFamily="34" charset="-122"/>
                 <a:cs typeface="Aptos" pitchFamily="34" charset="-120"/>
               </a:rPr>
-              <a:t>Key idea</a:t>
+              <a:t>Core concept</a:t>
             </a:r>
             <a:endParaRPr lang="en-US" sz="1300" dirty="0"/>
           </a:p>
@@ -4131,14 +4162,14 @@
       </p:sp>
       <p:sp>
         <p:nvSpPr>
-          <p:cNvPr id="14" name="Text 12"/>
-          <p:cNvSpPr/>
-          <p:nvPr/>
-        </p:nvSpPr>
-        <p:spPr>
-          <a:xfrm>
-            <a:off x="8074152" y="1920240"/>
-            <a:ext cx="2825496" cy="1188720"/>
+          <p:cNvPr id="12" name="Text 10"/>
+          <p:cNvSpPr/>
+          <p:nvPr/>
+        </p:nvSpPr>
+        <p:spPr>
+          <a:xfrm>
+            <a:off x="7799832" y="1828800"/>
+            <a:ext cx="3145536" cy="685800"/>
           </a:xfrm>
           <a:prstGeom prst="rect">
             <a:avLst/>
@@ -4172,18 +4203,159 @@
       </p:sp>
       <p:sp>
         <p:nvSpPr>
-          <p:cNvPr id="15" name="Shape 13"/>
-          <p:cNvSpPr/>
-          <p:nvPr/>
-        </p:nvSpPr>
-        <p:spPr>
-          <a:xfrm>
-            <a:off x="7909560" y="3520440"/>
-            <a:ext cx="3154680" cy="1737360"/>
+          <p:cNvPr id="13" name="Shape 11"/>
+          <p:cNvSpPr/>
+          <p:nvPr/>
+        </p:nvSpPr>
+        <p:spPr>
+          <a:xfrm>
+            <a:off x="7635240" y="2788920"/>
+            <a:ext cx="3474720" cy="1536192"/>
           </a:xfrm>
           <a:prstGeom prst="roundRect">
             <a:avLst>
-              <a:gd name="adj" fmla="val 6316"/>
+              <a:gd name="adj" fmla="val 7143"/>
+            </a:avLst>
+          </a:prstGeom>
+          <a:solidFill>
+            <a:srgbClr val="FFFFFF">
+              <a:alpha val="88000"/>
+            </a:srgbClr>
+          </a:solidFill>
+          <a:ln w="12700">
+            <a:solidFill>
+              <a:srgbClr val="D6E8F2"/>
+            </a:solidFill>
+            <a:prstDash val="solid"/>
+          </a:ln>
+        </p:spPr>
+      </p:sp>
+      <p:sp>
+        <p:nvSpPr>
+          <p:cNvPr id="14" name="Shape 12"/>
+          <p:cNvSpPr/>
+          <p:nvPr/>
+        </p:nvSpPr>
+        <p:spPr>
+          <a:xfrm>
+            <a:off x="8074152" y="3291840"/>
+            <a:ext cx="2596896" cy="749808"/>
+          </a:xfrm>
+          <a:prstGeom prst="rect">
+            <a:avLst/>
+          </a:prstGeom>
+          <a:solidFill>
+            <a:srgbClr val="EAF6F8"/>
+          </a:solidFill>
+          <a:ln w="12700">
+            <a:solidFill>
+              <a:srgbClr val="8ABBD8"/>
+            </a:solidFill>
+            <a:prstDash val="solid"/>
+          </a:ln>
+        </p:spPr>
+      </p:sp>
+      <p:sp>
+        <p:nvSpPr>
+          <p:cNvPr id="15" name="Shape 13"/>
+          <p:cNvSpPr/>
+          <p:nvPr/>
+        </p:nvSpPr>
+        <p:spPr>
+          <a:xfrm>
+            <a:off x="8202168" y="3721608"/>
+            <a:ext cx="2340864" cy="0"/>
+          </a:xfrm>
+          <a:prstGeom prst="line">
+            <a:avLst/>
+          </a:prstGeom>
+          <a:noFill/>
+          <a:ln w="19050">
+            <a:solidFill>
+              <a:srgbClr val="0068B7"/>
+            </a:solidFill>
+            <a:prstDash val="solid"/>
+          </a:ln>
+        </p:spPr>
+      </p:sp>
+      <p:sp>
+        <p:nvSpPr>
+          <p:cNvPr id="16" name="Shape 14"/>
+          <p:cNvSpPr/>
+          <p:nvPr/>
+        </p:nvSpPr>
+        <p:spPr>
+          <a:xfrm>
+            <a:off x="9198864" y="4206240"/>
+            <a:ext cx="347472" cy="347472"/>
+          </a:xfrm>
+          <a:prstGeom prst="ellipse">
+            <a:avLst/>
+          </a:prstGeom>
+          <a:solidFill>
+            <a:srgbClr val="2F8A28"/>
+          </a:solidFill>
+          <a:ln w="12700">
+            <a:solidFill>
+              <a:srgbClr val="2F8A28"/>
+            </a:solidFill>
+            <a:prstDash val="solid"/>
+          </a:ln>
+        </p:spPr>
+      </p:sp>
+      <p:sp>
+        <p:nvSpPr>
+          <p:cNvPr id="17" name="Text 15"/>
+          <p:cNvSpPr/>
+          <p:nvPr/>
+        </p:nvSpPr>
+        <p:spPr>
+          <a:xfrm>
+            <a:off x="7909560" y="3977640"/>
+            <a:ext cx="2926080" cy="182880"/>
+          </a:xfrm>
+          <a:prstGeom prst="rect">
+            <a:avLst/>
+          </a:prstGeom>
+          <a:noFill/>
+          <a:ln/>
+        </p:spPr>
+        <p:txBody>
+          <a:bodyPr wrap="square" lIns="0" tIns="0" rIns="0" bIns="0" rtlCol="0" anchor="ctr"/>
+          <a:lstStyle/>
+          <a:p>
+            <a:pPr algn="ctr" indent="0" marL="0">
+              <a:buNone/>
+            </a:pPr>
+            <a:r>
+              <a:rPr lang="en-US" sz="1000" dirty="0">
+                <a:solidFill>
+                  <a:srgbClr val="003A63"/>
+                </a:solidFill>
+                <a:latin typeface="Aptos" pitchFamily="34" charset="0"/>
+                <a:ea typeface="Aptos" pitchFamily="34" charset="-122"/>
+                <a:cs typeface="Aptos" pitchFamily="34" charset="-120"/>
+              </a:rPr>
+              <a:t>Concept to action</a:t>
+            </a:r>
+            <a:endParaRPr lang="en-US" sz="1000" dirty="0"/>
+          </a:p>
+        </p:txBody>
+      </p:sp>
+      <p:sp>
+        <p:nvSpPr>
+          <p:cNvPr id="18" name="Shape 16"/>
+          <p:cNvSpPr/>
+          <p:nvPr/>
+        </p:nvSpPr>
+        <p:spPr>
+          <a:xfrm>
+            <a:off x="7635240" y="4498848"/>
+            <a:ext cx="3474720" cy="1143000"/>
+          </a:xfrm>
+          <a:prstGeom prst="roundRect">
+            <a:avLst>
+              <a:gd name="adj" fmla="val 9600"/>
             </a:avLst>
           </a:prstGeom>
           <a:solidFill>
@@ -4199,14 +4371,14 @@
       </p:sp>
       <p:sp>
         <p:nvSpPr>
-          <p:cNvPr id="16" name="Text 14"/>
-          <p:cNvSpPr/>
-          <p:nvPr/>
-        </p:nvSpPr>
-        <p:spPr>
-          <a:xfrm>
-            <a:off x="8074152" y="3666744"/>
-            <a:ext cx="2825496" cy="256032"/>
+          <p:cNvPr id="19" name="Text 17"/>
+          <p:cNvSpPr/>
+          <p:nvPr/>
+        </p:nvSpPr>
+        <p:spPr>
+          <a:xfrm>
+            <a:off x="7799832" y="4645152"/>
+            <a:ext cx="3145536" cy="256032"/>
           </a:xfrm>
           <a:prstGeom prst="rect">
             <a:avLst/>
@@ -4230,7 +4402,7 @@
                 <a:ea typeface="Aptos" pitchFamily="34" charset="-122"/>
                 <a:cs typeface="Aptos" pitchFamily="34" charset="-120"/>
               </a:rPr>
-              <a:t>Use this for</a:t>
+              <a:t>Apply it</a:t>
             </a:r>
             <a:endParaRPr lang="en-US" sz="1300" dirty="0"/>
           </a:p>
@@ -4238,14 +4410,14 @@
       </p:sp>
       <p:sp>
         <p:nvSpPr>
-          <p:cNvPr id="17" name="Text 15"/>
-          <p:cNvSpPr/>
-          <p:nvPr/>
-        </p:nvSpPr>
-        <p:spPr>
-          <a:xfrm>
-            <a:off x="8074152" y="4023360"/>
-            <a:ext cx="2825496" cy="1097280"/>
+          <p:cNvPr id="20" name="Text 18"/>
+          <p:cNvSpPr/>
+          <p:nvPr/>
+        </p:nvSpPr>
+        <p:spPr>
+          <a:xfrm>
+            <a:off x="7799832" y="5001768"/>
+            <a:ext cx="3145536" cy="502920"/>
           </a:xfrm>
           <a:prstGeom prst="rect">
             <a:avLst/>
@@ -4271,7 +4443,7 @@
                 <a:ea typeface="Aptos" pitchFamily="34" charset="-122"/>
                 <a:cs typeface="Aptos" pitchFamily="34" charset="-120"/>
               </a:rPr>
-              <a:t>Connect the concept to public health decisions, safeguards, documentation, or implementation work.</a:t>
+              <a:t>Connect the concept to public health purpose, responsible use, required safeguards, documentation, and the next action a department should take.</a:t>
             </a:r>
             <a:endParaRPr lang="en-US" sz="1550" dirty="0"/>
           </a:p>
@@ -4445,8 +4617,8 @@
         </p:nvSpPr>
         <p:spPr>
           <a:xfrm>
-            <a:off x="9966960" y="6537960"/>
-            <a:ext cx="1645920" cy="201168"/>
+            <a:off x="9646920" y="6537960"/>
+            <a:ext cx="1965960" cy="201168"/>
           </a:xfrm>
           <a:prstGeom prst="rect">
             <a:avLst/>
@@ -4470,7 +4642,7 @@
                 <a:ea typeface="Aptos" pitchFamily="34" charset="-122"/>
                 <a:cs typeface="Aptos" pitchFamily="34" charset="-120"/>
               </a:rPr>
-              <a:t>Â© Paula Soper</a:t>
+              <a:t>Copyright Paula Soper</a:t>
             </a:r>
             <a:endParaRPr lang="en-US" sz="800" dirty="0"/>
           </a:p>
@@ -4517,77 +4689,13 @@
       </p:sp>
       <p:sp>
         <p:nvSpPr>
-          <p:cNvPr id="8" name="Shape 6"/>
+          <p:cNvPr id="8" name="Text 6"/>
           <p:cNvSpPr/>
           <p:nvPr/>
         </p:nvSpPr>
         <p:spPr>
           <a:xfrm>
             <a:off x="640080" y="658368"/>
-            <a:ext cx="420624" cy="420624"/>
-          </a:xfrm>
-          <a:prstGeom prst="ellipse">
-            <a:avLst/>
-          </a:prstGeom>
-          <a:solidFill>
-            <a:srgbClr val="0068B7"/>
-          </a:solidFill>
-          <a:ln w="12700">
-            <a:solidFill>
-              <a:srgbClr val="0068B7"/>
-            </a:solidFill>
-            <a:prstDash val="solid"/>
-          </a:ln>
-        </p:spPr>
-      </p:sp>
-      <p:sp>
-        <p:nvSpPr>
-          <p:cNvPr id="9" name="Text 7"/>
-          <p:cNvSpPr/>
-          <p:nvPr/>
-        </p:nvSpPr>
-        <p:spPr>
-          <a:xfrm>
-            <a:off x="640080" y="731520"/>
-            <a:ext cx="420624" cy="164592"/>
-          </a:xfrm>
-          <a:prstGeom prst="rect">
-            <a:avLst/>
-          </a:prstGeom>
-          <a:noFill/>
-          <a:ln/>
-        </p:spPr>
-        <p:txBody>
-          <a:bodyPr wrap="square" lIns="0" tIns="0" rIns="0" bIns="0" rtlCol="0" anchor="ctr"/>
-          <a:lstStyle/>
-          <a:p>
-            <a:pPr algn="ctr" indent="0" marL="0">
-              <a:buNone/>
-            </a:pPr>
-            <a:r>
-              <a:rPr lang="en-US" sz="1100" b="1" dirty="0">
-                <a:solidFill>
-                  <a:srgbClr val="FFFFFF"/>
-                </a:solidFill>
-                <a:latin typeface="Aptos" pitchFamily="34" charset="0"/>
-                <a:ea typeface="Aptos" pitchFamily="34" charset="-122"/>
-                <a:cs typeface="Aptos" pitchFamily="34" charset="-120"/>
-              </a:rPr>
-              <a:t>7</a:t>
-            </a:r>
-            <a:endParaRPr lang="en-US" sz="1100" dirty="0"/>
-          </a:p>
-        </p:txBody>
-      </p:sp>
-      <p:sp>
-        <p:nvSpPr>
-          <p:cNvPr id="10" name="Text 8"/>
-          <p:cNvSpPr/>
-          <p:nvPr/>
-        </p:nvSpPr>
-        <p:spPr>
-          <a:xfrm>
-            <a:off x="640080" y="621792"/>
             <a:ext cx="10881360" cy="713232"/>
           </a:xfrm>
           <a:prstGeom prst="rect">
@@ -4622,14 +4730,14 @@
       </p:sp>
       <p:sp>
         <p:nvSpPr>
-          <p:cNvPr id="11" name="Text 9"/>
+          <p:cNvPr id="9" name="Text 7"/>
           <p:cNvSpPr/>
           <p:nvPr/>
         </p:nvSpPr>
         <p:spPr>
           <a:xfrm>
             <a:off x="868680" y="1508760"/>
-            <a:ext cx="6537960" cy="4160520"/>
+            <a:ext cx="6309360" cy="4160520"/>
           </a:xfrm>
           <a:prstGeom prst="rect">
             <a:avLst/>
@@ -4688,18 +4796,18 @@
       </p:sp>
       <p:sp>
         <p:nvSpPr>
-          <p:cNvPr id="12" name="Shape 10"/>
-          <p:cNvSpPr/>
-          <p:nvPr/>
-        </p:nvSpPr>
-        <p:spPr>
-          <a:xfrm>
-            <a:off x="7909560" y="1417320"/>
-            <a:ext cx="3154680" cy="1828800"/>
+          <p:cNvPr id="10" name="Shape 8"/>
+          <p:cNvSpPr/>
+          <p:nvPr/>
+        </p:nvSpPr>
+        <p:spPr>
+          <a:xfrm>
+            <a:off x="7635240" y="1325880"/>
+            <a:ext cx="3474720" cy="1325880"/>
           </a:xfrm>
           <a:prstGeom prst="roundRect">
             <a:avLst>
-              <a:gd name="adj" fmla="val 6000"/>
+              <a:gd name="adj" fmla="val 8276"/>
             </a:avLst>
           </a:prstGeom>
           <a:solidFill>
@@ -4715,14 +4823,14 @@
       </p:sp>
       <p:sp>
         <p:nvSpPr>
-          <p:cNvPr id="13" name="Text 11"/>
-          <p:cNvSpPr/>
-          <p:nvPr/>
-        </p:nvSpPr>
-        <p:spPr>
-          <a:xfrm>
-            <a:off x="8074152" y="1563624"/>
-            <a:ext cx="2825496" cy="256032"/>
+          <p:cNvPr id="11" name="Text 9"/>
+          <p:cNvSpPr/>
+          <p:nvPr/>
+        </p:nvSpPr>
+        <p:spPr>
+          <a:xfrm>
+            <a:off x="7799832" y="1472184"/>
+            <a:ext cx="3145536" cy="256032"/>
           </a:xfrm>
           <a:prstGeom prst="rect">
             <a:avLst/>
@@ -4746,7 +4854,7 @@
                 <a:ea typeface="Aptos" pitchFamily="34" charset="-122"/>
                 <a:cs typeface="Aptos" pitchFamily="34" charset="-120"/>
               </a:rPr>
-              <a:t>Key idea</a:t>
+              <a:t>Core concept</a:t>
             </a:r>
             <a:endParaRPr lang="en-US" sz="1300" dirty="0"/>
           </a:p>
@@ -4754,14 +4862,14 @@
       </p:sp>
       <p:sp>
         <p:nvSpPr>
-          <p:cNvPr id="14" name="Text 12"/>
-          <p:cNvSpPr/>
-          <p:nvPr/>
-        </p:nvSpPr>
-        <p:spPr>
-          <a:xfrm>
-            <a:off x="8074152" y="1920240"/>
-            <a:ext cx="2825496" cy="1188720"/>
+          <p:cNvPr id="12" name="Text 10"/>
+          <p:cNvSpPr/>
+          <p:nvPr/>
+        </p:nvSpPr>
+        <p:spPr>
+          <a:xfrm>
+            <a:off x="7799832" y="1828800"/>
+            <a:ext cx="3145536" cy="685800"/>
           </a:xfrm>
           <a:prstGeom prst="rect">
             <a:avLst/>
@@ -4795,18 +4903,159 @@
       </p:sp>
       <p:sp>
         <p:nvSpPr>
-          <p:cNvPr id="15" name="Shape 13"/>
-          <p:cNvSpPr/>
-          <p:nvPr/>
-        </p:nvSpPr>
-        <p:spPr>
-          <a:xfrm>
-            <a:off x="7909560" y="3520440"/>
-            <a:ext cx="3154680" cy="1737360"/>
+          <p:cNvPr id="13" name="Shape 11"/>
+          <p:cNvSpPr/>
+          <p:nvPr/>
+        </p:nvSpPr>
+        <p:spPr>
+          <a:xfrm>
+            <a:off x="7635240" y="2788920"/>
+            <a:ext cx="3474720" cy="1536192"/>
           </a:xfrm>
           <a:prstGeom prst="roundRect">
             <a:avLst>
-              <a:gd name="adj" fmla="val 6316"/>
+              <a:gd name="adj" fmla="val 7143"/>
+            </a:avLst>
+          </a:prstGeom>
+          <a:solidFill>
+            <a:srgbClr val="FFFFFF">
+              <a:alpha val="88000"/>
+            </a:srgbClr>
+          </a:solidFill>
+          <a:ln w="12700">
+            <a:solidFill>
+              <a:srgbClr val="D6E8F2"/>
+            </a:solidFill>
+            <a:prstDash val="solid"/>
+          </a:ln>
+        </p:spPr>
+      </p:sp>
+      <p:sp>
+        <p:nvSpPr>
+          <p:cNvPr id="14" name="Shape 12"/>
+          <p:cNvSpPr/>
+          <p:nvPr/>
+        </p:nvSpPr>
+        <p:spPr>
+          <a:xfrm>
+            <a:off x="8074152" y="3291840"/>
+            <a:ext cx="2596896" cy="749808"/>
+          </a:xfrm>
+          <a:prstGeom prst="rect">
+            <a:avLst/>
+          </a:prstGeom>
+          <a:solidFill>
+            <a:srgbClr val="EAF6F8"/>
+          </a:solidFill>
+          <a:ln w="12700">
+            <a:solidFill>
+              <a:srgbClr val="8ABBD8"/>
+            </a:solidFill>
+            <a:prstDash val="solid"/>
+          </a:ln>
+        </p:spPr>
+      </p:sp>
+      <p:sp>
+        <p:nvSpPr>
+          <p:cNvPr id="15" name="Shape 13"/>
+          <p:cNvSpPr/>
+          <p:nvPr/>
+        </p:nvSpPr>
+        <p:spPr>
+          <a:xfrm>
+            <a:off x="8202168" y="3721608"/>
+            <a:ext cx="2340864" cy="0"/>
+          </a:xfrm>
+          <a:prstGeom prst="line">
+            <a:avLst/>
+          </a:prstGeom>
+          <a:noFill/>
+          <a:ln w="19050">
+            <a:solidFill>
+              <a:srgbClr val="0068B7"/>
+            </a:solidFill>
+            <a:prstDash val="solid"/>
+          </a:ln>
+        </p:spPr>
+      </p:sp>
+      <p:sp>
+        <p:nvSpPr>
+          <p:cNvPr id="16" name="Shape 14"/>
+          <p:cNvSpPr/>
+          <p:nvPr/>
+        </p:nvSpPr>
+        <p:spPr>
+          <a:xfrm>
+            <a:off x="9198864" y="4206240"/>
+            <a:ext cx="347472" cy="347472"/>
+          </a:xfrm>
+          <a:prstGeom prst="ellipse">
+            <a:avLst/>
+          </a:prstGeom>
+          <a:solidFill>
+            <a:srgbClr val="2F8A28"/>
+          </a:solidFill>
+          <a:ln w="12700">
+            <a:solidFill>
+              <a:srgbClr val="2F8A28"/>
+            </a:solidFill>
+            <a:prstDash val="solid"/>
+          </a:ln>
+        </p:spPr>
+      </p:sp>
+      <p:sp>
+        <p:nvSpPr>
+          <p:cNvPr id="17" name="Text 15"/>
+          <p:cNvSpPr/>
+          <p:nvPr/>
+        </p:nvSpPr>
+        <p:spPr>
+          <a:xfrm>
+            <a:off x="7909560" y="3977640"/>
+            <a:ext cx="2926080" cy="182880"/>
+          </a:xfrm>
+          <a:prstGeom prst="rect">
+            <a:avLst/>
+          </a:prstGeom>
+          <a:noFill/>
+          <a:ln/>
+        </p:spPr>
+        <p:txBody>
+          <a:bodyPr wrap="square" lIns="0" tIns="0" rIns="0" bIns="0" rtlCol="0" anchor="ctr"/>
+          <a:lstStyle/>
+          <a:p>
+            <a:pPr algn="ctr" indent="0" marL="0">
+              <a:buNone/>
+            </a:pPr>
+            <a:r>
+              <a:rPr lang="en-US" sz="1000" dirty="0">
+                <a:solidFill>
+                  <a:srgbClr val="003A63"/>
+                </a:solidFill>
+                <a:latin typeface="Aptos" pitchFamily="34" charset="0"/>
+                <a:ea typeface="Aptos" pitchFamily="34" charset="-122"/>
+                <a:cs typeface="Aptos" pitchFamily="34" charset="-120"/>
+              </a:rPr>
+              <a:t>Concept to action</a:t>
+            </a:r>
+            <a:endParaRPr lang="en-US" sz="1000" dirty="0"/>
+          </a:p>
+        </p:txBody>
+      </p:sp>
+      <p:sp>
+        <p:nvSpPr>
+          <p:cNvPr id="18" name="Shape 16"/>
+          <p:cNvSpPr/>
+          <p:nvPr/>
+        </p:nvSpPr>
+        <p:spPr>
+          <a:xfrm>
+            <a:off x="7635240" y="4498848"/>
+            <a:ext cx="3474720" cy="1143000"/>
+          </a:xfrm>
+          <a:prstGeom prst="roundRect">
+            <a:avLst>
+              <a:gd name="adj" fmla="val 9600"/>
             </a:avLst>
           </a:prstGeom>
           <a:solidFill>
@@ -4822,14 +5071,14 @@
       </p:sp>
       <p:sp>
         <p:nvSpPr>
-          <p:cNvPr id="16" name="Text 14"/>
-          <p:cNvSpPr/>
-          <p:nvPr/>
-        </p:nvSpPr>
-        <p:spPr>
-          <a:xfrm>
-            <a:off x="8074152" y="3666744"/>
-            <a:ext cx="2825496" cy="256032"/>
+          <p:cNvPr id="19" name="Text 17"/>
+          <p:cNvSpPr/>
+          <p:nvPr/>
+        </p:nvSpPr>
+        <p:spPr>
+          <a:xfrm>
+            <a:off x="7799832" y="4645152"/>
+            <a:ext cx="3145536" cy="256032"/>
           </a:xfrm>
           <a:prstGeom prst="rect">
             <a:avLst/>
@@ -4853,7 +5102,7 @@
                 <a:ea typeface="Aptos" pitchFamily="34" charset="-122"/>
                 <a:cs typeface="Aptos" pitchFamily="34" charset="-120"/>
               </a:rPr>
-              <a:t>Use this for</a:t>
+              <a:t>Apply it</a:t>
             </a:r>
             <a:endParaRPr lang="en-US" sz="1300" dirty="0"/>
           </a:p>
@@ -4861,14 +5110,14 @@
       </p:sp>
       <p:sp>
         <p:nvSpPr>
-          <p:cNvPr id="17" name="Text 15"/>
-          <p:cNvSpPr/>
-          <p:nvPr/>
-        </p:nvSpPr>
-        <p:spPr>
-          <a:xfrm>
-            <a:off x="8074152" y="4023360"/>
-            <a:ext cx="2825496" cy="1097280"/>
+          <p:cNvPr id="20" name="Text 18"/>
+          <p:cNvSpPr/>
+          <p:nvPr/>
+        </p:nvSpPr>
+        <p:spPr>
+          <a:xfrm>
+            <a:off x="7799832" y="5001768"/>
+            <a:ext cx="3145536" cy="502920"/>
           </a:xfrm>
           <a:prstGeom prst="rect">
             <a:avLst/>
@@ -4894,7 +5143,7 @@
                 <a:ea typeface="Aptos" pitchFamily="34" charset="-122"/>
                 <a:cs typeface="Aptos" pitchFamily="34" charset="-120"/>
               </a:rPr>
-              <a:t>Connect the concept to public health decisions, safeguards, documentation, or implementation work.</a:t>
+              <a:t>Connect the concept to public health purpose, responsible use, required safeguards, documentation, and the next action a department should take.</a:t>
             </a:r>
             <a:endParaRPr lang="en-US" sz="1550" dirty="0"/>
           </a:p>
@@ -5068,8 +5317,8 @@
         </p:nvSpPr>
         <p:spPr>
           <a:xfrm>
-            <a:off x="9966960" y="6537960"/>
-            <a:ext cx="1645920" cy="201168"/>
+            <a:off x="9646920" y="6537960"/>
+            <a:ext cx="1965960" cy="201168"/>
           </a:xfrm>
           <a:prstGeom prst="rect">
             <a:avLst/>
@@ -5093,7 +5342,7 @@
                 <a:ea typeface="Aptos" pitchFamily="34" charset="-122"/>
                 <a:cs typeface="Aptos" pitchFamily="34" charset="-120"/>
               </a:rPr>
-              <a:t>Â© Paula Soper</a:t>
+              <a:t>Copyright Paula Soper</a:t>
             </a:r>
             <a:endParaRPr lang="en-US" sz="800" dirty="0"/>
           </a:p>
@@ -5140,77 +5389,13 @@
       </p:sp>
       <p:sp>
         <p:nvSpPr>
-          <p:cNvPr id="8" name="Shape 6"/>
+          <p:cNvPr id="8" name="Text 6"/>
           <p:cNvSpPr/>
           <p:nvPr/>
         </p:nvSpPr>
         <p:spPr>
           <a:xfrm>
             <a:off x="640080" y="658368"/>
-            <a:ext cx="420624" cy="420624"/>
-          </a:xfrm>
-          <a:prstGeom prst="ellipse">
-            <a:avLst/>
-          </a:prstGeom>
-          <a:solidFill>
-            <a:srgbClr val="0068B7"/>
-          </a:solidFill>
-          <a:ln w="12700">
-            <a:solidFill>
-              <a:srgbClr val="0068B7"/>
-            </a:solidFill>
-            <a:prstDash val="solid"/>
-          </a:ln>
-        </p:spPr>
-      </p:sp>
-      <p:sp>
-        <p:nvSpPr>
-          <p:cNvPr id="9" name="Text 7"/>
-          <p:cNvSpPr/>
-          <p:nvPr/>
-        </p:nvSpPr>
-        <p:spPr>
-          <a:xfrm>
-            <a:off x="640080" y="731520"/>
-            <a:ext cx="420624" cy="164592"/>
-          </a:xfrm>
-          <a:prstGeom prst="rect">
-            <a:avLst/>
-          </a:prstGeom>
-          <a:noFill/>
-          <a:ln/>
-        </p:spPr>
-        <p:txBody>
-          <a:bodyPr wrap="square" lIns="0" tIns="0" rIns="0" bIns="0" rtlCol="0" anchor="ctr"/>
-          <a:lstStyle/>
-          <a:p>
-            <a:pPr algn="ctr" indent="0" marL="0">
-              <a:buNone/>
-            </a:pPr>
-            <a:r>
-              <a:rPr lang="en-US" sz="1100" b="1" dirty="0">
-                <a:solidFill>
-                  <a:srgbClr val="FFFFFF"/>
-                </a:solidFill>
-                <a:latin typeface="Aptos" pitchFamily="34" charset="0"/>
-                <a:ea typeface="Aptos" pitchFamily="34" charset="-122"/>
-                <a:cs typeface="Aptos" pitchFamily="34" charset="-120"/>
-              </a:rPr>
-              <a:t>8</a:t>
-            </a:r>
-            <a:endParaRPr lang="en-US" sz="1100" dirty="0"/>
-          </a:p>
-        </p:txBody>
-      </p:sp>
-      <p:sp>
-        <p:nvSpPr>
-          <p:cNvPr id="10" name="Text 8"/>
-          <p:cNvSpPr/>
-          <p:nvPr/>
-        </p:nvSpPr>
-        <p:spPr>
-          <a:xfrm>
-            <a:off x="640080" y="621792"/>
             <a:ext cx="10881360" cy="713232"/>
           </a:xfrm>
           <a:prstGeom prst="rect">
@@ -5245,14 +5430,14 @@
       </p:sp>
       <p:sp>
         <p:nvSpPr>
-          <p:cNvPr id="11" name="Text 9"/>
+          <p:cNvPr id="9" name="Text 7"/>
           <p:cNvSpPr/>
           <p:nvPr/>
         </p:nvSpPr>
         <p:spPr>
           <a:xfrm>
             <a:off x="868680" y="1508760"/>
-            <a:ext cx="6537960" cy="4160520"/>
+            <a:ext cx="6309360" cy="4160520"/>
           </a:xfrm>
           <a:prstGeom prst="rect">
             <a:avLst/>
@@ -5311,18 +5496,18 @@
       </p:sp>
       <p:sp>
         <p:nvSpPr>
-          <p:cNvPr id="12" name="Shape 10"/>
-          <p:cNvSpPr/>
-          <p:nvPr/>
-        </p:nvSpPr>
-        <p:spPr>
-          <a:xfrm>
-            <a:off x="7909560" y="1417320"/>
-            <a:ext cx="3154680" cy="1828800"/>
+          <p:cNvPr id="10" name="Shape 8"/>
+          <p:cNvSpPr/>
+          <p:nvPr/>
+        </p:nvSpPr>
+        <p:spPr>
+          <a:xfrm>
+            <a:off x="7635240" y="1325880"/>
+            <a:ext cx="3474720" cy="1325880"/>
           </a:xfrm>
           <a:prstGeom prst="roundRect">
             <a:avLst>
-              <a:gd name="adj" fmla="val 6000"/>
+              <a:gd name="adj" fmla="val 8276"/>
             </a:avLst>
           </a:prstGeom>
           <a:solidFill>
@@ -5338,14 +5523,14 @@
       </p:sp>
       <p:sp>
         <p:nvSpPr>
-          <p:cNvPr id="13" name="Text 11"/>
-          <p:cNvSpPr/>
-          <p:nvPr/>
-        </p:nvSpPr>
-        <p:spPr>
-          <a:xfrm>
-            <a:off x="8074152" y="1563624"/>
-            <a:ext cx="2825496" cy="256032"/>
+          <p:cNvPr id="11" name="Text 9"/>
+          <p:cNvSpPr/>
+          <p:nvPr/>
+        </p:nvSpPr>
+        <p:spPr>
+          <a:xfrm>
+            <a:off x="7799832" y="1472184"/>
+            <a:ext cx="3145536" cy="256032"/>
           </a:xfrm>
           <a:prstGeom prst="rect">
             <a:avLst/>
@@ -5369,7 +5554,7 @@
                 <a:ea typeface="Aptos" pitchFamily="34" charset="-122"/>
                 <a:cs typeface="Aptos" pitchFamily="34" charset="-120"/>
               </a:rPr>
-              <a:t>Key idea</a:t>
+              <a:t>Risk check</a:t>
             </a:r>
             <a:endParaRPr lang="en-US" sz="1300" dirty="0"/>
           </a:p>
@@ -5377,14 +5562,14 @@
       </p:sp>
       <p:sp>
         <p:nvSpPr>
-          <p:cNvPr id="14" name="Text 12"/>
-          <p:cNvSpPr/>
-          <p:nvPr/>
-        </p:nvSpPr>
-        <p:spPr>
-          <a:xfrm>
-            <a:off x="8074152" y="1920240"/>
-            <a:ext cx="2825496" cy="1188720"/>
+          <p:cNvPr id="12" name="Text 10"/>
+          <p:cNvSpPr/>
+          <p:nvPr/>
+        </p:nvSpPr>
+        <p:spPr>
+          <a:xfrm>
+            <a:off x="7799832" y="1828800"/>
+            <a:ext cx="3145536" cy="685800"/>
           </a:xfrm>
           <a:prstGeom prst="rect">
             <a:avLst/>
@@ -5418,18 +5603,171 @@
       </p:sp>
       <p:sp>
         <p:nvSpPr>
-          <p:cNvPr id="15" name="Shape 13"/>
-          <p:cNvSpPr/>
-          <p:nvPr/>
-        </p:nvSpPr>
-        <p:spPr>
-          <a:xfrm>
-            <a:off x="7909560" y="3520440"/>
-            <a:ext cx="3154680" cy="1737360"/>
+          <p:cNvPr id="13" name="Shape 11"/>
+          <p:cNvSpPr/>
+          <p:nvPr/>
+        </p:nvSpPr>
+        <p:spPr>
+          <a:xfrm>
+            <a:off x="7635240" y="2788920"/>
+            <a:ext cx="3474720" cy="1536192"/>
           </a:xfrm>
           <a:prstGeom prst="roundRect">
             <a:avLst>
-              <a:gd name="adj" fmla="val 6316"/>
+              <a:gd name="adj" fmla="val 7143"/>
+            </a:avLst>
+          </a:prstGeom>
+          <a:solidFill>
+            <a:srgbClr val="FFFFFF">
+              <a:alpha val="88000"/>
+            </a:srgbClr>
+          </a:solidFill>
+          <a:ln w="12700">
+            <a:solidFill>
+              <a:srgbClr val="D6E8F2"/>
+            </a:solidFill>
+            <a:prstDash val="solid"/>
+          </a:ln>
+        </p:spPr>
+      </p:sp>
+      <p:sp>
+        <p:nvSpPr>
+          <p:cNvPr id="14" name="Shape 12"/>
+          <p:cNvSpPr/>
+          <p:nvPr/>
+        </p:nvSpPr>
+        <p:spPr>
+          <a:xfrm>
+            <a:off x="8046720" y="3108960"/>
+            <a:ext cx="2651760" cy="896112"/>
+          </a:xfrm>
+          <a:prstGeom prst="arc">
+            <a:avLst/>
+          </a:prstGeom>
+          <a:noFill/>
+          <a:ln w="25400">
+            <a:solidFill>
+              <a:srgbClr val="0068B7"/>
+            </a:solidFill>
+            <a:prstDash val="solid"/>
+          </a:ln>
+        </p:spPr>
+      </p:sp>
+      <p:sp>
+        <p:nvSpPr>
+          <p:cNvPr id="15" name="Text 13"/>
+          <p:cNvSpPr/>
+          <p:nvPr/>
+        </p:nvSpPr>
+        <p:spPr>
+          <a:xfrm>
+            <a:off x="7909560" y="3099816"/>
+            <a:ext cx="2926080" cy="256032"/>
+          </a:xfrm>
+          <a:prstGeom prst="rect">
+            <a:avLst/>
+          </a:prstGeom>
+          <a:noFill/>
+          <a:ln/>
+        </p:spPr>
+        <p:txBody>
+          <a:bodyPr wrap="square" lIns="0" tIns="0" rIns="0" bIns="0" rtlCol="0" anchor="ctr"/>
+          <a:lstStyle/>
+          <a:p>
+            <a:pPr algn="ctr" indent="0" marL="0">
+              <a:buNone/>
+            </a:pPr>
+            <a:r>
+              <a:rPr lang="en-US" sz="1500" b="1" dirty="0">
+                <a:solidFill>
+                  <a:srgbClr val="003A63"/>
+                </a:solidFill>
+                <a:latin typeface="Aptos" pitchFamily="34" charset="0"/>
+                <a:ea typeface="Aptos" pitchFamily="34" charset="-122"/>
+                <a:cs typeface="Aptos" pitchFamily="34" charset="-120"/>
+              </a:rPr>
+              <a:t>Risk</a:t>
+            </a:r>
+            <a:endParaRPr lang="en-US" sz="1500" dirty="0"/>
+          </a:p>
+        </p:txBody>
+      </p:sp>
+      <p:sp>
+        <p:nvSpPr>
+          <p:cNvPr id="16" name="Shape 14"/>
+          <p:cNvSpPr/>
+          <p:nvPr/>
+        </p:nvSpPr>
+        <p:spPr>
+          <a:xfrm>
+            <a:off x="8366760" y="3639312"/>
+            <a:ext cx="2011680" cy="0"/>
+          </a:xfrm>
+          <a:prstGeom prst="line">
+            <a:avLst/>
+          </a:prstGeom>
+          <a:noFill/>
+          <a:ln w="63500">
+            <a:solidFill>
+              <a:srgbClr val="2F8A28"/>
+            </a:solidFill>
+            <a:prstDash val="solid"/>
+          </a:ln>
+        </p:spPr>
+      </p:sp>
+      <p:sp>
+        <p:nvSpPr>
+          <p:cNvPr id="17" name="Text 15"/>
+          <p:cNvSpPr/>
+          <p:nvPr/>
+        </p:nvSpPr>
+        <p:spPr>
+          <a:xfrm>
+            <a:off x="7909560" y="3849624"/>
+            <a:ext cx="2926080" cy="164592"/>
+          </a:xfrm>
+          <a:prstGeom prst="rect">
+            <a:avLst/>
+          </a:prstGeom>
+          <a:noFill/>
+          <a:ln/>
+        </p:spPr>
+        <p:txBody>
+          <a:bodyPr wrap="square" lIns="0" tIns="0" rIns="0" bIns="0" rtlCol="0" anchor="ctr"/>
+          <a:lstStyle/>
+          <a:p>
+            <a:pPr algn="ctr" indent="0" marL="0">
+              <a:buNone/>
+            </a:pPr>
+            <a:r>
+              <a:rPr lang="en-US" sz="900" dirty="0">
+                <a:solidFill>
+                  <a:srgbClr val="003A63"/>
+                </a:solidFill>
+                <a:latin typeface="Aptos" pitchFamily="34" charset="0"/>
+                <a:ea typeface="Aptos" pitchFamily="34" charset="-122"/>
+                <a:cs typeface="Aptos" pitchFamily="34" charset="-120"/>
+              </a:rPr>
+              <a:t>Human review</a:t>
+            </a:r>
+            <a:endParaRPr lang="en-US" sz="900" dirty="0"/>
+          </a:p>
+        </p:txBody>
+      </p:sp>
+      <p:sp>
+        <p:nvSpPr>
+          <p:cNvPr id="18" name="Shape 16"/>
+          <p:cNvSpPr/>
+          <p:nvPr/>
+        </p:nvSpPr>
+        <p:spPr>
+          <a:xfrm>
+            <a:off x="7635240" y="4498848"/>
+            <a:ext cx="3474720" cy="1143000"/>
+          </a:xfrm>
+          <a:prstGeom prst="roundRect">
+            <a:avLst>
+              <a:gd name="adj" fmla="val 9600"/>
             </a:avLst>
           </a:prstGeom>
           <a:solidFill>
@@ -5445,14 +5783,14 @@
       </p:sp>
       <p:sp>
         <p:nvSpPr>
-          <p:cNvPr id="16" name="Text 14"/>
-          <p:cNvSpPr/>
-          <p:nvPr/>
-        </p:nvSpPr>
-        <p:spPr>
-          <a:xfrm>
-            <a:off x="8074152" y="3666744"/>
-            <a:ext cx="2825496" cy="256032"/>
+          <p:cNvPr id="19" name="Text 17"/>
+          <p:cNvSpPr/>
+          <p:nvPr/>
+        </p:nvSpPr>
+        <p:spPr>
+          <a:xfrm>
+            <a:off x="7799832" y="4645152"/>
+            <a:ext cx="3145536" cy="256032"/>
           </a:xfrm>
           <a:prstGeom prst="rect">
             <a:avLst/>
@@ -5476,7 +5814,7 @@
                 <a:ea typeface="Aptos" pitchFamily="34" charset="-122"/>
                 <a:cs typeface="Aptos" pitchFamily="34" charset="-120"/>
               </a:rPr>
-              <a:t>Use this for</a:t>
+              <a:t>Safeguard to plan</a:t>
             </a:r>
             <a:endParaRPr lang="en-US" sz="1300" dirty="0"/>
           </a:p>
@@ -5484,14 +5822,14 @@
       </p:sp>
       <p:sp>
         <p:nvSpPr>
-          <p:cNvPr id="17" name="Text 15"/>
-          <p:cNvSpPr/>
-          <p:nvPr/>
-        </p:nvSpPr>
-        <p:spPr>
-          <a:xfrm>
-            <a:off x="8074152" y="4023360"/>
-            <a:ext cx="2825496" cy="1097280"/>
+          <p:cNvPr id="20" name="Text 18"/>
+          <p:cNvSpPr/>
+          <p:nvPr/>
+        </p:nvSpPr>
+        <p:spPr>
+          <a:xfrm>
+            <a:off x="7799832" y="5001768"/>
+            <a:ext cx="3145536" cy="502920"/>
           </a:xfrm>
           <a:prstGeom prst="rect">
             <a:avLst/>
@@ -5517,7 +5855,7 @@
                 <a:ea typeface="Aptos" pitchFamily="34" charset="-122"/>
                 <a:cs typeface="Aptos" pitchFamily="34" charset="-120"/>
               </a:rPr>
-              <a:t>Connect the concept to public health decisions, safeguards, documentation, or implementation work.</a:t>
+              <a:t>Identify what could go wrong, who could be affected, what safeguards are needed, and what evidence should be reviewed before use expands.</a:t>
             </a:r>
             <a:endParaRPr lang="en-US" sz="1550" dirty="0"/>
           </a:p>
@@ -5691,8 +6029,8 @@
         </p:nvSpPr>
         <p:spPr>
           <a:xfrm>
-            <a:off x="9966960" y="6537960"/>
-            <a:ext cx="1645920" cy="201168"/>
+            <a:off x="9646920" y="6537960"/>
+            <a:ext cx="1965960" cy="201168"/>
           </a:xfrm>
           <a:prstGeom prst="rect">
             <a:avLst/>
@@ -5716,7 +6054,7 @@
                 <a:ea typeface="Aptos" pitchFamily="34" charset="-122"/>
                 <a:cs typeface="Aptos" pitchFamily="34" charset="-120"/>
               </a:rPr>
-              <a:t>Â© Paula Soper</a:t>
+              <a:t>Copyright Paula Soper</a:t>
             </a:r>
             <a:endParaRPr lang="en-US" sz="800" dirty="0"/>
           </a:p>
@@ -5763,17 +6101,262 @@
       </p:sp>
       <p:sp>
         <p:nvSpPr>
-          <p:cNvPr id="8" name="Shape 6"/>
+          <p:cNvPr id="8" name="Text 6"/>
           <p:cNvSpPr/>
           <p:nvPr/>
         </p:nvSpPr>
         <p:spPr>
           <a:xfrm>
             <a:off x="640080" y="658368"/>
-            <a:ext cx="420624" cy="420624"/>
-          </a:xfrm>
-          <a:prstGeom prst="ellipse">
-            <a:avLst/>
+            <a:ext cx="10881360" cy="713232"/>
+          </a:xfrm>
+          <a:prstGeom prst="rect">
+            <a:avLst/>
+          </a:prstGeom>
+          <a:noFill/>
+          <a:ln/>
+        </p:spPr>
+        <p:txBody>
+          <a:bodyPr wrap="square" lIns="0" tIns="0" rIns="0" bIns="0" rtlCol="0" anchor="ctr">
+            <a:normAutofit/>
+          </a:bodyPr>
+          <a:lstStyle/>
+          <a:p>
+            <a:pPr indent="0" marL="0">
+              <a:buNone/>
+            </a:pPr>
+            <a:r>
+              <a:rPr lang="en-US" sz="3400" b="1" dirty="0">
+                <a:solidFill>
+                  <a:srgbClr val="003A63"/>
+                </a:solidFill>
+                <a:latin typeface="Aptos Display" pitchFamily="34" charset="0"/>
+                <a:ea typeface="Aptos Display" pitchFamily="34" charset="-122"/>
+                <a:cs typeface="Aptos Display" pitchFamily="34" charset="-120"/>
+              </a:rPr>
+              <a:t>Application to AI-Supported Workflows</a:t>
+            </a:r>
+            <a:endParaRPr lang="en-US" sz="3400" dirty="0"/>
+          </a:p>
+        </p:txBody>
+      </p:sp>
+      <p:sp>
+        <p:nvSpPr>
+          <p:cNvPr id="9" name="Text 7"/>
+          <p:cNvSpPr/>
+          <p:nvPr/>
+        </p:nvSpPr>
+        <p:spPr>
+          <a:xfrm>
+            <a:off x="868680" y="1508760"/>
+            <a:ext cx="6309360" cy="4160520"/>
+          </a:xfrm>
+          <a:prstGeom prst="rect">
+            <a:avLst/>
+          </a:prstGeom>
+          <a:noFill/>
+          <a:ln/>
+        </p:spPr>
+        <p:txBody>
+          <a:bodyPr wrap="square" lIns="635" tIns="635" rIns="635" bIns="635" rtlCol="0" anchor="t">
+            <a:normAutofit/>
+          </a:bodyPr>
+          <a:lstStyle/>
+          <a:p>
+            <a:r>
+              <a:rPr lang="en-US" sz="2100" dirty="0">
+                <a:solidFill>
+                  <a:srgbClr val="17364A"/>
+                </a:solidFill>
+                <a:latin typeface="Aptos" pitchFamily="34" charset="0"/>
+                <a:ea typeface="Aptos" pitchFamily="34" charset="-122"/>
+                <a:cs typeface="Aptos" pitchFamily="34" charset="-120"/>
+              </a:rPr>
+              <a:t>Generative AI, predictive analytics, RAG, automation, and agentic workflows all depend on the controls.</a:t>
+            </a:r>
+            <a:endParaRPr lang="en-US" sz="2100" dirty="0"/>
+          </a:p>
+          <a:p>
+            <a:r>
+              <a:rPr lang="en-US" sz="2100" dirty="0">
+                <a:solidFill>
+                  <a:srgbClr val="17364A"/>
+                </a:solidFill>
+                <a:latin typeface="Aptos" pitchFamily="34" charset="0"/>
+                <a:ea typeface="Aptos" pitchFamily="34" charset="-122"/>
+                <a:cs typeface="Aptos" pitchFamily="34" charset="-120"/>
+              </a:rPr>
+              <a:t>The controls should be scaled to the risk of the use case.</a:t>
+            </a:r>
+            <a:endParaRPr lang="en-US" sz="2100" dirty="0"/>
+          </a:p>
+          <a:p>
+            <a:r>
+              <a:rPr lang="en-US" sz="2100" dirty="0">
+                <a:solidFill>
+                  <a:srgbClr val="17364A"/>
+                </a:solidFill>
+                <a:latin typeface="Aptos" pitchFamily="34" charset="0"/>
+                <a:ea typeface="Aptos" pitchFamily="34" charset="-122"/>
+                <a:cs typeface="Aptos" pitchFamily="34" charset="-120"/>
+              </a:rPr>
+              <a:t>A tool that drafts internal training text may require lighter review than a tool that updates case.</a:t>
+            </a:r>
+            <a:endParaRPr lang="en-US" sz="2100" dirty="0"/>
+          </a:p>
+        </p:txBody>
+      </p:sp>
+      <p:sp>
+        <p:nvSpPr>
+          <p:cNvPr id="10" name="Shape 8"/>
+          <p:cNvSpPr/>
+          <p:nvPr/>
+        </p:nvSpPr>
+        <p:spPr>
+          <a:xfrm>
+            <a:off x="7635240" y="1325880"/>
+            <a:ext cx="3474720" cy="1325880"/>
+          </a:xfrm>
+          <a:prstGeom prst="roundRect">
+            <a:avLst>
+              <a:gd name="adj" fmla="val 8276"/>
+            </a:avLst>
+          </a:prstGeom>
+          <a:solidFill>
+            <a:srgbClr val="EEF8ED"/>
+          </a:solidFill>
+          <a:ln w="12700">
+            <a:solidFill>
+              <a:srgbClr val="B9D7E6"/>
+            </a:solidFill>
+            <a:prstDash val="solid"/>
+          </a:ln>
+        </p:spPr>
+      </p:sp>
+      <p:sp>
+        <p:nvSpPr>
+          <p:cNvPr id="11" name="Text 9"/>
+          <p:cNvSpPr/>
+          <p:nvPr/>
+        </p:nvSpPr>
+        <p:spPr>
+          <a:xfrm>
+            <a:off x="7799832" y="1472184"/>
+            <a:ext cx="3145536" cy="256032"/>
+          </a:xfrm>
+          <a:prstGeom prst="rect">
+            <a:avLst/>
+          </a:prstGeom>
+          <a:noFill/>
+          <a:ln/>
+        </p:spPr>
+        <p:txBody>
+          <a:bodyPr wrap="square" lIns="0" tIns="0" rIns="0" bIns="0" rtlCol="0" anchor="ctr"/>
+          <a:lstStyle/>
+          <a:p>
+            <a:pPr indent="0" marL="0">
+              <a:buNone/>
+            </a:pPr>
+            <a:r>
+              <a:rPr lang="en-US" sz="1300" b="1" dirty="0">
+                <a:solidFill>
+                  <a:srgbClr val="0068B7"/>
+                </a:solidFill>
+                <a:latin typeface="Aptos" pitchFamily="34" charset="0"/>
+                <a:ea typeface="Aptos" pitchFamily="34" charset="-122"/>
+                <a:cs typeface="Aptos" pitchFamily="34" charset="-120"/>
+              </a:rPr>
+              <a:t>Implementation cue</a:t>
+            </a:r>
+            <a:endParaRPr lang="en-US" sz="1300" dirty="0"/>
+          </a:p>
+        </p:txBody>
+      </p:sp>
+      <p:sp>
+        <p:nvSpPr>
+          <p:cNvPr id="12" name="Text 10"/>
+          <p:cNvSpPr/>
+          <p:nvPr/>
+        </p:nvSpPr>
+        <p:spPr>
+          <a:xfrm>
+            <a:off x="7799832" y="1828800"/>
+            <a:ext cx="3145536" cy="685800"/>
+          </a:xfrm>
+          <a:prstGeom prst="rect">
+            <a:avLst/>
+          </a:prstGeom>
+          <a:noFill/>
+          <a:ln/>
+        </p:spPr>
+        <p:txBody>
+          <a:bodyPr wrap="square" lIns="0" tIns="0" rIns="0" bIns="0" rtlCol="0" anchor="t">
+            <a:normAutofit/>
+          </a:bodyPr>
+          <a:lstStyle/>
+          <a:p>
+            <a:pPr indent="0" marL="0">
+              <a:buNone/>
+            </a:pPr>
+            <a:r>
+              <a:rPr lang="en-US" sz="1550" dirty="0">
+                <a:solidFill>
+                  <a:srgbClr val="17364A"/>
+                </a:solidFill>
+                <a:latin typeface="Aptos" pitchFamily="34" charset="0"/>
+                <a:ea typeface="Aptos" pitchFamily="34" charset="-122"/>
+                <a:cs typeface="Aptos" pitchFamily="34" charset="-120"/>
+              </a:rPr>
+              <a:t>Generative AI, predictive analytics, RAG, automation, and agentic workflows all depend on the controls.</a:t>
+            </a:r>
+            <a:endParaRPr lang="en-US" sz="1550" dirty="0"/>
+          </a:p>
+        </p:txBody>
+      </p:sp>
+      <p:sp>
+        <p:nvSpPr>
+          <p:cNvPr id="13" name="Shape 11"/>
+          <p:cNvSpPr/>
+          <p:nvPr/>
+        </p:nvSpPr>
+        <p:spPr>
+          <a:xfrm>
+            <a:off x="7635240" y="2788920"/>
+            <a:ext cx="3474720" cy="1536192"/>
+          </a:xfrm>
+          <a:prstGeom prst="roundRect">
+            <a:avLst>
+              <a:gd name="adj" fmla="val 7143"/>
+            </a:avLst>
+          </a:prstGeom>
+          <a:solidFill>
+            <a:srgbClr val="FFFFFF">
+              <a:alpha val="88000"/>
+            </a:srgbClr>
+          </a:solidFill>
+          <a:ln w="12700">
+            <a:solidFill>
+              <a:srgbClr val="D6E8F2"/>
+            </a:solidFill>
+            <a:prstDash val="solid"/>
+          </a:ln>
+        </p:spPr>
+      </p:sp>
+      <p:sp>
+        <p:nvSpPr>
+          <p:cNvPr id="14" name="Shape 12"/>
+          <p:cNvSpPr/>
+          <p:nvPr/>
+        </p:nvSpPr>
+        <p:spPr>
+          <a:xfrm>
+            <a:off x="7927848" y="3319272"/>
+            <a:ext cx="792480" cy="749808"/>
+          </a:xfrm>
+          <a:prstGeom prst="roundRect">
+            <a:avLst>
+              <a:gd name="adj" fmla="val 14634"/>
+            </a:avLst>
           </a:prstGeom>
           <a:solidFill>
             <a:srgbClr val="0068B7"/>
@@ -5788,53 +6371,14 @@
       </p:sp>
       <p:sp>
         <p:nvSpPr>
-          <p:cNvPr id="9" name="Text 7"/>
-          <p:cNvSpPr/>
-          <p:nvPr/>
-        </p:nvSpPr>
-        <p:spPr>
-          <a:xfrm>
-            <a:off x="640080" y="731520"/>
-            <a:ext cx="420624" cy="164592"/>
-          </a:xfrm>
-          <a:prstGeom prst="rect">
-            <a:avLst/>
-          </a:prstGeom>
-          <a:noFill/>
-          <a:ln/>
-        </p:spPr>
-        <p:txBody>
-          <a:bodyPr wrap="square" lIns="0" tIns="0" rIns="0" bIns="0" rtlCol="0" anchor="ctr"/>
-          <a:lstStyle/>
-          <a:p>
-            <a:pPr algn="ctr" indent="0" marL="0">
-              <a:buNone/>
-            </a:pPr>
-            <a:r>
-              <a:rPr lang="en-US" sz="1100" b="1" dirty="0">
-                <a:solidFill>
-                  <a:srgbClr val="FFFFFF"/>
-                </a:solidFill>
-                <a:latin typeface="Aptos" pitchFamily="34" charset="0"/>
-                <a:ea typeface="Aptos" pitchFamily="34" charset="-122"/>
-                <a:cs typeface="Aptos" pitchFamily="34" charset="-120"/>
-              </a:rPr>
-              <a:t>9</a:t>
-            </a:r>
-            <a:endParaRPr lang="en-US" sz="1100" dirty="0"/>
-          </a:p>
-        </p:txBody>
-      </p:sp>
-      <p:sp>
-        <p:nvSpPr>
-          <p:cNvPr id="10" name="Text 8"/>
-          <p:cNvSpPr/>
-          <p:nvPr/>
-        </p:nvSpPr>
-        <p:spPr>
-          <a:xfrm>
-            <a:off x="640080" y="621792"/>
-            <a:ext cx="10881360" cy="713232"/>
+          <p:cNvPr id="15" name="Text 13"/>
+          <p:cNvSpPr/>
+          <p:nvPr/>
+        </p:nvSpPr>
+        <p:spPr>
+          <a:xfrm>
+            <a:off x="8001000" y="3511296"/>
+            <a:ext cx="646176" cy="310896"/>
           </a:xfrm>
           <a:prstGeom prst="rect">
             <a:avLst/>
@@ -5848,112 +6392,46 @@
           </a:bodyPr>
           <a:lstStyle/>
           <a:p>
-            <a:pPr indent="0" marL="0">
-              <a:buNone/>
-            </a:pPr>
-            <a:r>
-              <a:rPr lang="en-US" sz="3400" b="1" dirty="0">
-                <a:solidFill>
-                  <a:srgbClr val="003A63"/>
-                </a:solidFill>
-                <a:latin typeface="Aptos Display" pitchFamily="34" charset="0"/>
-                <a:ea typeface="Aptos Display" pitchFamily="34" charset="-122"/>
-                <a:cs typeface="Aptos Display" pitchFamily="34" charset="-120"/>
-              </a:rPr>
-              <a:t>Application to AI-Supported Workflows</a:t>
-            </a:r>
-            <a:endParaRPr lang="en-US" sz="3400" dirty="0"/>
-          </a:p>
-        </p:txBody>
-      </p:sp>
-      <p:sp>
-        <p:nvSpPr>
-          <p:cNvPr id="11" name="Text 9"/>
-          <p:cNvSpPr/>
-          <p:nvPr/>
-        </p:nvSpPr>
-        <p:spPr>
-          <a:xfrm>
-            <a:off x="868680" y="1508760"/>
-            <a:ext cx="6537960" cy="4160520"/>
-          </a:xfrm>
-          <a:prstGeom prst="rect">
-            <a:avLst/>
-          </a:prstGeom>
-          <a:noFill/>
-          <a:ln/>
-        </p:spPr>
-        <p:txBody>
-          <a:bodyPr wrap="square" lIns="635" tIns="635" rIns="635" bIns="635" rtlCol="0" anchor="t">
-            <a:normAutofit/>
-          </a:bodyPr>
-          <a:lstStyle/>
-          <a:p>
-            <a:r>
-              <a:rPr lang="en-US" sz="2100" dirty="0">
-                <a:solidFill>
-                  <a:srgbClr val="17364A"/>
-                </a:solidFill>
-                <a:latin typeface="Aptos" pitchFamily="34" charset="0"/>
-                <a:ea typeface="Aptos" pitchFamily="34" charset="-122"/>
-                <a:cs typeface="Aptos" pitchFamily="34" charset="-120"/>
-              </a:rPr>
-              <a:t>Generative AI, predictive analytics, RAG, automation, and agentic workflows all depend on the controls.</a:t>
-            </a:r>
-            <a:endParaRPr lang="en-US" sz="2100" dirty="0"/>
-          </a:p>
-          <a:p>
-            <a:r>
-              <a:rPr lang="en-US" sz="2100" dirty="0">
-                <a:solidFill>
-                  <a:srgbClr val="17364A"/>
-                </a:solidFill>
-                <a:latin typeface="Aptos" pitchFamily="34" charset="0"/>
-                <a:ea typeface="Aptos" pitchFamily="34" charset="-122"/>
-                <a:cs typeface="Aptos" pitchFamily="34" charset="-120"/>
-              </a:rPr>
-              <a:t>The controls should be scaled to the risk of the use case.</a:t>
-            </a:r>
-            <a:endParaRPr lang="en-US" sz="2100" dirty="0"/>
-          </a:p>
-          <a:p>
-            <a:r>
-              <a:rPr lang="en-US" sz="2100" dirty="0">
-                <a:solidFill>
-                  <a:srgbClr val="17364A"/>
-                </a:solidFill>
-                <a:latin typeface="Aptos" pitchFamily="34" charset="0"/>
-                <a:ea typeface="Aptos" pitchFamily="34" charset="-122"/>
-                <a:cs typeface="Aptos" pitchFamily="34" charset="-120"/>
-              </a:rPr>
-              <a:t>A tool that drafts internal training text may require lighter review than a tool that updates case.</a:t>
-            </a:r>
-            <a:endParaRPr lang="en-US" sz="2100" dirty="0"/>
-          </a:p>
-        </p:txBody>
-      </p:sp>
-      <p:sp>
-        <p:nvSpPr>
-          <p:cNvPr id="12" name="Shape 10"/>
-          <p:cNvSpPr/>
-          <p:nvPr/>
-        </p:nvSpPr>
-        <p:spPr>
-          <a:xfrm>
-            <a:off x="7909560" y="1417320"/>
-            <a:ext cx="3154680" cy="1828800"/>
+            <a:pPr algn="ctr" indent="0" marL="0">
+              <a:buNone/>
+            </a:pPr>
+            <a:r>
+              <a:rPr lang="en-US" sz="1500" b="1" dirty="0">
+                <a:solidFill>
+                  <a:srgbClr val="FFFFFF"/>
+                </a:solidFill>
+                <a:latin typeface="Aptos" pitchFamily="34" charset="0"/>
+                <a:ea typeface="Aptos" pitchFamily="34" charset="-122"/>
+                <a:cs typeface="Aptos" pitchFamily="34" charset="-120"/>
+              </a:rPr>
+              <a:t>Plan</a:t>
+            </a:r>
+            <a:endParaRPr lang="en-US" sz="1500" dirty="0"/>
+          </a:p>
+        </p:txBody>
+      </p:sp>
+      <p:sp>
+        <p:nvSpPr>
+          <p:cNvPr id="16" name="Shape 14"/>
+          <p:cNvSpPr/>
+          <p:nvPr/>
+        </p:nvSpPr>
+        <p:spPr>
+          <a:xfrm>
+            <a:off x="8976360" y="3319272"/>
+            <a:ext cx="792480" cy="749808"/>
           </a:xfrm>
           <a:prstGeom prst="roundRect">
             <a:avLst>
-              <a:gd name="adj" fmla="val 6000"/>
+              <a:gd name="adj" fmla="val 14634"/>
             </a:avLst>
           </a:prstGeom>
           <a:solidFill>
-            <a:srgbClr val="EEF8ED"/>
+            <a:srgbClr val="2F8A28"/>
           </a:solidFill>
           <a:ln w="12700">
             <a:solidFill>
-              <a:srgbClr val="B9D7E6"/>
+              <a:srgbClr val="2F8A28"/>
             </a:solidFill>
             <a:prstDash val="solid"/>
           </a:ln>
@@ -5961,98 +6439,189 @@
       </p:sp>
       <p:sp>
         <p:nvSpPr>
-          <p:cNvPr id="13" name="Text 11"/>
-          <p:cNvSpPr/>
-          <p:nvPr/>
-        </p:nvSpPr>
-        <p:spPr>
-          <a:xfrm>
-            <a:off x="8074152" y="1563624"/>
-            <a:ext cx="2825496" cy="256032"/>
-          </a:xfrm>
-          <a:prstGeom prst="rect">
-            <a:avLst/>
-          </a:prstGeom>
-          <a:noFill/>
-          <a:ln/>
-        </p:spPr>
-        <p:txBody>
-          <a:bodyPr wrap="square" lIns="0" tIns="0" rIns="0" bIns="0" rtlCol="0" anchor="ctr"/>
-          <a:lstStyle/>
-          <a:p>
-            <a:pPr indent="0" marL="0">
-              <a:buNone/>
-            </a:pPr>
-            <a:r>
-              <a:rPr lang="en-US" sz="1300" b="1" dirty="0">
-                <a:solidFill>
-                  <a:srgbClr val="0068B7"/>
-                </a:solidFill>
-                <a:latin typeface="Aptos" pitchFamily="34" charset="0"/>
-                <a:ea typeface="Aptos" pitchFamily="34" charset="-122"/>
-                <a:cs typeface="Aptos" pitchFamily="34" charset="-120"/>
-              </a:rPr>
-              <a:t>Key idea</a:t>
-            </a:r>
-            <a:endParaRPr lang="en-US" sz="1300" dirty="0"/>
-          </a:p>
-        </p:txBody>
-      </p:sp>
-      <p:sp>
-        <p:nvSpPr>
-          <p:cNvPr id="14" name="Text 12"/>
-          <p:cNvSpPr/>
-          <p:nvPr/>
-        </p:nvSpPr>
-        <p:spPr>
-          <a:xfrm>
-            <a:off x="8074152" y="1920240"/>
-            <a:ext cx="2825496" cy="1188720"/>
-          </a:xfrm>
-          <a:prstGeom prst="rect">
-            <a:avLst/>
-          </a:prstGeom>
-          <a:noFill/>
-          <a:ln/>
-        </p:spPr>
-        <p:txBody>
-          <a:bodyPr wrap="square" lIns="0" tIns="0" rIns="0" bIns="0" rtlCol="0" anchor="t">
+          <p:cNvPr id="17" name="Text 15"/>
+          <p:cNvSpPr/>
+          <p:nvPr/>
+        </p:nvSpPr>
+        <p:spPr>
+          <a:xfrm>
+            <a:off x="9049512" y="3511296"/>
+            <a:ext cx="646176" cy="310896"/>
+          </a:xfrm>
+          <a:prstGeom prst="rect">
+            <a:avLst/>
+          </a:prstGeom>
+          <a:noFill/>
+          <a:ln/>
+        </p:spPr>
+        <p:txBody>
+          <a:bodyPr wrap="square" lIns="0" tIns="0" rIns="0" bIns="0" rtlCol="0" anchor="ctr">
             <a:normAutofit/>
           </a:bodyPr>
           <a:lstStyle/>
           <a:p>
-            <a:pPr indent="0" marL="0">
-              <a:buNone/>
-            </a:pPr>
-            <a:r>
-              <a:rPr lang="en-US" sz="1550" dirty="0">
-                <a:solidFill>
-                  <a:srgbClr val="17364A"/>
-                </a:solidFill>
-                <a:latin typeface="Aptos" pitchFamily="34" charset="0"/>
-                <a:ea typeface="Aptos" pitchFamily="34" charset="-122"/>
-                <a:cs typeface="Aptos" pitchFamily="34" charset="-120"/>
-              </a:rPr>
-              <a:t>Generative AI, predictive analytics, RAG, automation, and agentic workflows all depend on the controls.</a:t>
-            </a:r>
-            <a:endParaRPr lang="en-US" sz="1550" dirty="0"/>
-          </a:p>
-        </p:txBody>
-      </p:sp>
-      <p:sp>
-        <p:nvSpPr>
-          <p:cNvPr id="15" name="Shape 13"/>
-          <p:cNvSpPr/>
-          <p:nvPr/>
-        </p:nvSpPr>
-        <p:spPr>
-          <a:xfrm>
-            <a:off x="7909560" y="3520440"/>
-            <a:ext cx="3154680" cy="1737360"/>
+            <a:pPr algn="ctr" indent="0" marL="0">
+              <a:buNone/>
+            </a:pPr>
+            <a:r>
+              <a:rPr lang="en-US" sz="1500" b="1" dirty="0">
+                <a:solidFill>
+                  <a:srgbClr val="FFFFFF"/>
+                </a:solidFill>
+                <a:latin typeface="Aptos" pitchFamily="34" charset="0"/>
+                <a:ea typeface="Aptos" pitchFamily="34" charset="-122"/>
+                <a:cs typeface="Aptos" pitchFamily="34" charset="-120"/>
+              </a:rPr>
+              <a:t>Do</a:t>
+            </a:r>
+            <a:endParaRPr lang="en-US" sz="1500" dirty="0"/>
+          </a:p>
+        </p:txBody>
+      </p:sp>
+      <p:sp>
+        <p:nvSpPr>
+          <p:cNvPr id="18" name="Shape 16"/>
+          <p:cNvSpPr/>
+          <p:nvPr/>
+        </p:nvSpPr>
+        <p:spPr>
+          <a:xfrm>
+            <a:off x="10024872" y="3319272"/>
+            <a:ext cx="792480" cy="749808"/>
           </a:xfrm>
           <a:prstGeom prst="roundRect">
             <a:avLst>
-              <a:gd name="adj" fmla="val 6316"/>
+              <a:gd name="adj" fmla="val 14634"/>
+            </a:avLst>
+          </a:prstGeom>
+          <a:solidFill>
+            <a:srgbClr val="D69A2D"/>
+          </a:solidFill>
+          <a:ln w="12700">
+            <a:solidFill>
+              <a:srgbClr val="D69A2D"/>
+            </a:solidFill>
+            <a:prstDash val="solid"/>
+          </a:ln>
+        </p:spPr>
+      </p:sp>
+      <p:sp>
+        <p:nvSpPr>
+          <p:cNvPr id="19" name="Text 17"/>
+          <p:cNvSpPr/>
+          <p:nvPr/>
+        </p:nvSpPr>
+        <p:spPr>
+          <a:xfrm>
+            <a:off x="10098024" y="3511296"/>
+            <a:ext cx="646176" cy="310896"/>
+          </a:xfrm>
+          <a:prstGeom prst="rect">
+            <a:avLst/>
+          </a:prstGeom>
+          <a:noFill/>
+          <a:ln/>
+        </p:spPr>
+        <p:txBody>
+          <a:bodyPr wrap="square" lIns="0" tIns="0" rIns="0" bIns="0" rtlCol="0" anchor="ctr">
+            <a:normAutofit/>
+          </a:bodyPr>
+          <a:lstStyle/>
+          <a:p>
+            <a:pPr algn="ctr" indent="0" marL="0">
+              <a:buNone/>
+            </a:pPr>
+            <a:r>
+              <a:rPr lang="en-US" sz="1500" b="1" dirty="0">
+                <a:solidFill>
+                  <a:srgbClr val="FFFFFF"/>
+                </a:solidFill>
+                <a:latin typeface="Aptos" pitchFamily="34" charset="0"/>
+                <a:ea typeface="Aptos" pitchFamily="34" charset="-122"/>
+                <a:cs typeface="Aptos" pitchFamily="34" charset="-120"/>
+              </a:rPr>
+              <a:t>Review</a:t>
+            </a:r>
+            <a:endParaRPr lang="en-US" sz="1500" dirty="0"/>
+          </a:p>
+        </p:txBody>
+      </p:sp>
+      <p:sp>
+        <p:nvSpPr>
+          <p:cNvPr id="20" name="Shape 18"/>
+          <p:cNvSpPr/>
+          <p:nvPr/>
+        </p:nvSpPr>
+        <p:spPr>
+          <a:xfrm>
+            <a:off x="8293608" y="4389120"/>
+            <a:ext cx="2157984" cy="0"/>
+          </a:xfrm>
+          <a:prstGeom prst="line">
+            <a:avLst/>
+          </a:prstGeom>
+          <a:noFill/>
+          <a:ln w="25400">
+            <a:solidFill>
+              <a:srgbClr val="8ABBD8"/>
+            </a:solidFill>
+            <a:prstDash val="solid"/>
+          </a:ln>
+        </p:spPr>
+      </p:sp>
+      <p:sp>
+        <p:nvSpPr>
+          <p:cNvPr id="21" name="Text 19"/>
+          <p:cNvSpPr/>
+          <p:nvPr/>
+        </p:nvSpPr>
+        <p:spPr>
+          <a:xfrm>
+            <a:off x="7909560" y="3977640"/>
+            <a:ext cx="2926080" cy="182880"/>
+          </a:xfrm>
+          <a:prstGeom prst="rect">
+            <a:avLst/>
+          </a:prstGeom>
+          <a:noFill/>
+          <a:ln/>
+        </p:spPr>
+        <p:txBody>
+          <a:bodyPr wrap="square" lIns="0" tIns="0" rIns="0" bIns="0" rtlCol="0" anchor="ctr"/>
+          <a:lstStyle/>
+          <a:p>
+            <a:pPr algn="ctr" indent="0" marL="0">
+              <a:buNone/>
+            </a:pPr>
+            <a:r>
+              <a:rPr lang="en-US" sz="1000" dirty="0">
+                <a:solidFill>
+                  <a:srgbClr val="003A63"/>
+                </a:solidFill>
+                <a:latin typeface="Aptos" pitchFamily="34" charset="0"/>
+                <a:ea typeface="Aptos" pitchFamily="34" charset="-122"/>
+                <a:cs typeface="Aptos" pitchFamily="34" charset="-120"/>
+              </a:rPr>
+              <a:t>Dependencies visible</a:t>
+            </a:r>
+            <a:endParaRPr lang="en-US" sz="1000" dirty="0"/>
+          </a:p>
+        </p:txBody>
+      </p:sp>
+      <p:sp>
+        <p:nvSpPr>
+          <p:cNvPr id="22" name="Shape 20"/>
+          <p:cNvSpPr/>
+          <p:nvPr/>
+        </p:nvSpPr>
+        <p:spPr>
+          <a:xfrm>
+            <a:off x="7635240" y="4498848"/>
+            <a:ext cx="3474720" cy="1143000"/>
+          </a:xfrm>
+          <a:prstGeom prst="roundRect">
+            <a:avLst>
+              <a:gd name="adj" fmla="val 9600"/>
             </a:avLst>
           </a:prstGeom>
           <a:solidFill>
@@ -6068,14 +6637,14 @@
       </p:sp>
       <p:sp>
         <p:nvSpPr>
-          <p:cNvPr id="16" name="Text 14"/>
-          <p:cNvSpPr/>
-          <p:nvPr/>
-        </p:nvSpPr>
-        <p:spPr>
-          <a:xfrm>
-            <a:off x="8074152" y="3666744"/>
-            <a:ext cx="2825496" cy="256032"/>
+          <p:cNvPr id="23" name="Text 21"/>
+          <p:cNvSpPr/>
+          <p:nvPr/>
+        </p:nvSpPr>
+        <p:spPr>
+          <a:xfrm>
+            <a:off x="7799832" y="4645152"/>
+            <a:ext cx="3145536" cy="256032"/>
           </a:xfrm>
           <a:prstGeom prst="rect">
             <a:avLst/>
@@ -6099,7 +6668,7 @@
                 <a:ea typeface="Aptos" pitchFamily="34" charset="-122"/>
                 <a:cs typeface="Aptos" pitchFamily="34" charset="-120"/>
               </a:rPr>
-              <a:t>Use this for</a:t>
+              <a:t>Next action</a:t>
             </a:r>
             <a:endParaRPr lang="en-US" sz="1300" dirty="0"/>
           </a:p>
@@ -6107,14 +6676,14 @@
       </p:sp>
       <p:sp>
         <p:nvSpPr>
-          <p:cNvPr id="17" name="Text 15"/>
-          <p:cNvSpPr/>
-          <p:nvPr/>
-        </p:nvSpPr>
-        <p:spPr>
-          <a:xfrm>
-            <a:off x="8074152" y="4023360"/>
-            <a:ext cx="2825496" cy="1097280"/>
+          <p:cNvPr id="24" name="Text 22"/>
+          <p:cNvSpPr/>
+          <p:nvPr/>
+        </p:nvSpPr>
+        <p:spPr>
+          <a:xfrm>
+            <a:off x="7799832" y="5001768"/>
+            <a:ext cx="3145536" cy="502920"/>
           </a:xfrm>
           <a:prstGeom prst="rect">
             <a:avLst/>
@@ -6140,7 +6709,7 @@
                 <a:ea typeface="Aptos" pitchFamily="34" charset="-122"/>
                 <a:cs typeface="Aptos" pitchFamily="34" charset="-120"/>
               </a:rPr>
-              <a:t>Connect the concept to public health decisions, safeguards, documentation, or implementation work.</a:t>
+              <a:t>Use the concept to clarify workflow changes, dependencies, staffing, procurement requirements, training needs, and implementation checkpoints.</a:t>
             </a:r>
             <a:endParaRPr lang="en-US" sz="1550" dirty="0"/>
           </a:p>
@@ -6314,8 +6883,8 @@
         </p:nvSpPr>
         <p:spPr>
           <a:xfrm>
-            <a:off x="9966960" y="6537960"/>
-            <a:ext cx="1645920" cy="201168"/>
+            <a:off x="9646920" y="6537960"/>
+            <a:ext cx="1965960" cy="201168"/>
           </a:xfrm>
           <a:prstGeom prst="rect">
             <a:avLst/>
@@ -6339,7 +6908,7 @@
                 <a:ea typeface="Aptos" pitchFamily="34" charset="-122"/>
                 <a:cs typeface="Aptos" pitchFamily="34" charset="-120"/>
               </a:rPr>
-              <a:t>Â© Paula Soper</a:t>
+              <a:t>Copyright Paula Soper</a:t>
             </a:r>
             <a:endParaRPr lang="en-US" sz="800" dirty="0"/>
           </a:p>
@@ -6386,77 +6955,13 @@
       </p:sp>
       <p:sp>
         <p:nvSpPr>
-          <p:cNvPr id="8" name="Shape 6"/>
+          <p:cNvPr id="8" name="Text 6"/>
           <p:cNvSpPr/>
           <p:nvPr/>
         </p:nvSpPr>
         <p:spPr>
           <a:xfrm>
             <a:off x="640080" y="658368"/>
-            <a:ext cx="420624" cy="420624"/>
-          </a:xfrm>
-          <a:prstGeom prst="ellipse">
-            <a:avLst/>
-          </a:prstGeom>
-          <a:solidFill>
-            <a:srgbClr val="0068B7"/>
-          </a:solidFill>
-          <a:ln w="12700">
-            <a:solidFill>
-              <a:srgbClr val="0068B7"/>
-            </a:solidFill>
-            <a:prstDash val="solid"/>
-          </a:ln>
-        </p:spPr>
-      </p:sp>
-      <p:sp>
-        <p:nvSpPr>
-          <p:cNvPr id="9" name="Text 7"/>
-          <p:cNvSpPr/>
-          <p:nvPr/>
-        </p:nvSpPr>
-        <p:spPr>
-          <a:xfrm>
-            <a:off x="640080" y="731520"/>
-            <a:ext cx="420624" cy="164592"/>
-          </a:xfrm>
-          <a:prstGeom prst="rect">
-            <a:avLst/>
-          </a:prstGeom>
-          <a:noFill/>
-          <a:ln/>
-        </p:spPr>
-        <p:txBody>
-          <a:bodyPr wrap="square" lIns="0" tIns="0" rIns="0" bIns="0" rtlCol="0" anchor="ctr"/>
-          <a:lstStyle/>
-          <a:p>
-            <a:pPr algn="ctr" indent="0" marL="0">
-              <a:buNone/>
-            </a:pPr>
-            <a:r>
-              <a:rPr lang="en-US" sz="1100" b="1" dirty="0">
-                <a:solidFill>
-                  <a:srgbClr val="FFFFFF"/>
-                </a:solidFill>
-                <a:latin typeface="Aptos" pitchFamily="34" charset="0"/>
-                <a:ea typeface="Aptos" pitchFamily="34" charset="-122"/>
-                <a:cs typeface="Aptos" pitchFamily="34" charset="-120"/>
-              </a:rPr>
-              <a:t>10</a:t>
-            </a:r>
-            <a:endParaRPr lang="en-US" sz="1100" dirty="0"/>
-          </a:p>
-        </p:txBody>
-      </p:sp>
-      <p:sp>
-        <p:nvSpPr>
-          <p:cNvPr id="10" name="Text 8"/>
-          <p:cNvSpPr/>
-          <p:nvPr/>
-        </p:nvSpPr>
-        <p:spPr>
-          <a:xfrm>
-            <a:off x="640080" y="621792"/>
             <a:ext cx="10881360" cy="713232"/>
           </a:xfrm>
           <a:prstGeom prst="rect">
@@ -6491,14 +6996,14 @@
       </p:sp>
       <p:sp>
         <p:nvSpPr>
-          <p:cNvPr id="11" name="Text 9"/>
+          <p:cNvPr id="9" name="Text 7"/>
           <p:cNvSpPr/>
           <p:nvPr/>
         </p:nvSpPr>
         <p:spPr>
           <a:xfrm>
             <a:off x="868680" y="1508760"/>
-            <a:ext cx="6537960" cy="4160520"/>
+            <a:ext cx="6309360" cy="4160520"/>
           </a:xfrm>
           <a:prstGeom prst="rect">
             <a:avLst/>
@@ -6557,18 +7062,18 @@
       </p:sp>
       <p:sp>
         <p:nvSpPr>
-          <p:cNvPr id="12" name="Shape 10"/>
-          <p:cNvSpPr/>
-          <p:nvPr/>
-        </p:nvSpPr>
-        <p:spPr>
-          <a:xfrm>
-            <a:off x="7909560" y="1417320"/>
-            <a:ext cx="3154680" cy="1828800"/>
+          <p:cNvPr id="10" name="Shape 8"/>
+          <p:cNvSpPr/>
+          <p:nvPr/>
+        </p:nvSpPr>
+        <p:spPr>
+          <a:xfrm>
+            <a:off x="7635240" y="1325880"/>
+            <a:ext cx="3474720" cy="1325880"/>
           </a:xfrm>
           <a:prstGeom prst="roundRect">
             <a:avLst>
-              <a:gd name="adj" fmla="val 6000"/>
+              <a:gd name="adj" fmla="val 8276"/>
             </a:avLst>
           </a:prstGeom>
           <a:solidFill>
@@ -6584,14 +7089,14 @@
       </p:sp>
       <p:sp>
         <p:nvSpPr>
-          <p:cNvPr id="13" name="Text 11"/>
-          <p:cNvSpPr/>
-          <p:nvPr/>
-        </p:nvSpPr>
-        <p:spPr>
-          <a:xfrm>
-            <a:off x="8074152" y="1563624"/>
-            <a:ext cx="2825496" cy="256032"/>
+          <p:cNvPr id="11" name="Text 9"/>
+          <p:cNvSpPr/>
+          <p:nvPr/>
+        </p:nvSpPr>
+        <p:spPr>
+          <a:xfrm>
+            <a:off x="7799832" y="1472184"/>
+            <a:ext cx="3145536" cy="256032"/>
           </a:xfrm>
           <a:prstGeom prst="rect">
             <a:avLst/>
@@ -6615,7 +7120,7 @@
                 <a:ea typeface="Aptos" pitchFamily="34" charset="-122"/>
                 <a:cs typeface="Aptos" pitchFamily="34" charset="-120"/>
               </a:rPr>
-              <a:t>Key idea</a:t>
+              <a:t>Core concept</a:t>
             </a:r>
             <a:endParaRPr lang="en-US" sz="1300" dirty="0"/>
           </a:p>
@@ -6623,14 +7128,14 @@
       </p:sp>
       <p:sp>
         <p:nvSpPr>
-          <p:cNvPr id="14" name="Text 12"/>
-          <p:cNvSpPr/>
-          <p:nvPr/>
-        </p:nvSpPr>
-        <p:spPr>
-          <a:xfrm>
-            <a:off x="8074152" y="1920240"/>
-            <a:ext cx="2825496" cy="1188720"/>
+          <p:cNvPr id="12" name="Text 10"/>
+          <p:cNvSpPr/>
+          <p:nvPr/>
+        </p:nvSpPr>
+        <p:spPr>
+          <a:xfrm>
+            <a:off x="7799832" y="1828800"/>
+            <a:ext cx="3145536" cy="685800"/>
           </a:xfrm>
           <a:prstGeom prst="rect">
             <a:avLst/>
@@ -6664,18 +7169,159 @@
       </p:sp>
       <p:sp>
         <p:nvSpPr>
-          <p:cNvPr id="15" name="Shape 13"/>
-          <p:cNvSpPr/>
-          <p:nvPr/>
-        </p:nvSpPr>
-        <p:spPr>
-          <a:xfrm>
-            <a:off x="7909560" y="3520440"/>
-            <a:ext cx="3154680" cy="1737360"/>
+          <p:cNvPr id="13" name="Shape 11"/>
+          <p:cNvSpPr/>
+          <p:nvPr/>
+        </p:nvSpPr>
+        <p:spPr>
+          <a:xfrm>
+            <a:off x="7635240" y="2788920"/>
+            <a:ext cx="3474720" cy="1536192"/>
           </a:xfrm>
           <a:prstGeom prst="roundRect">
             <a:avLst>
-              <a:gd name="adj" fmla="val 6316"/>
+              <a:gd name="adj" fmla="val 7143"/>
+            </a:avLst>
+          </a:prstGeom>
+          <a:solidFill>
+            <a:srgbClr val="FFFFFF">
+              <a:alpha val="88000"/>
+            </a:srgbClr>
+          </a:solidFill>
+          <a:ln w="12700">
+            <a:solidFill>
+              <a:srgbClr val="D6E8F2"/>
+            </a:solidFill>
+            <a:prstDash val="solid"/>
+          </a:ln>
+        </p:spPr>
+      </p:sp>
+      <p:sp>
+        <p:nvSpPr>
+          <p:cNvPr id="14" name="Shape 12"/>
+          <p:cNvSpPr/>
+          <p:nvPr/>
+        </p:nvSpPr>
+        <p:spPr>
+          <a:xfrm>
+            <a:off x="8074152" y="3291840"/>
+            <a:ext cx="2596896" cy="749808"/>
+          </a:xfrm>
+          <a:prstGeom prst="rect">
+            <a:avLst/>
+          </a:prstGeom>
+          <a:solidFill>
+            <a:srgbClr val="EAF6F8"/>
+          </a:solidFill>
+          <a:ln w="12700">
+            <a:solidFill>
+              <a:srgbClr val="8ABBD8"/>
+            </a:solidFill>
+            <a:prstDash val="solid"/>
+          </a:ln>
+        </p:spPr>
+      </p:sp>
+      <p:sp>
+        <p:nvSpPr>
+          <p:cNvPr id="15" name="Shape 13"/>
+          <p:cNvSpPr/>
+          <p:nvPr/>
+        </p:nvSpPr>
+        <p:spPr>
+          <a:xfrm>
+            <a:off x="8202168" y="3721608"/>
+            <a:ext cx="2340864" cy="0"/>
+          </a:xfrm>
+          <a:prstGeom prst="line">
+            <a:avLst/>
+          </a:prstGeom>
+          <a:noFill/>
+          <a:ln w="19050">
+            <a:solidFill>
+              <a:srgbClr val="0068B7"/>
+            </a:solidFill>
+            <a:prstDash val="solid"/>
+          </a:ln>
+        </p:spPr>
+      </p:sp>
+      <p:sp>
+        <p:nvSpPr>
+          <p:cNvPr id="16" name="Shape 14"/>
+          <p:cNvSpPr/>
+          <p:nvPr/>
+        </p:nvSpPr>
+        <p:spPr>
+          <a:xfrm>
+            <a:off x="9198864" y="4206240"/>
+            <a:ext cx="347472" cy="347472"/>
+          </a:xfrm>
+          <a:prstGeom prst="ellipse">
+            <a:avLst/>
+          </a:prstGeom>
+          <a:solidFill>
+            <a:srgbClr val="2F8A28"/>
+          </a:solidFill>
+          <a:ln w="12700">
+            <a:solidFill>
+              <a:srgbClr val="2F8A28"/>
+            </a:solidFill>
+            <a:prstDash val="solid"/>
+          </a:ln>
+        </p:spPr>
+      </p:sp>
+      <p:sp>
+        <p:nvSpPr>
+          <p:cNvPr id="17" name="Text 15"/>
+          <p:cNvSpPr/>
+          <p:nvPr/>
+        </p:nvSpPr>
+        <p:spPr>
+          <a:xfrm>
+            <a:off x="7909560" y="3977640"/>
+            <a:ext cx="2926080" cy="182880"/>
+          </a:xfrm>
+          <a:prstGeom prst="rect">
+            <a:avLst/>
+          </a:prstGeom>
+          <a:noFill/>
+          <a:ln/>
+        </p:spPr>
+        <p:txBody>
+          <a:bodyPr wrap="square" lIns="0" tIns="0" rIns="0" bIns="0" rtlCol="0" anchor="ctr"/>
+          <a:lstStyle/>
+          <a:p>
+            <a:pPr algn="ctr" indent="0" marL="0">
+              <a:buNone/>
+            </a:pPr>
+            <a:r>
+              <a:rPr lang="en-US" sz="1000" dirty="0">
+                <a:solidFill>
+                  <a:srgbClr val="003A63"/>
+                </a:solidFill>
+                <a:latin typeface="Aptos" pitchFamily="34" charset="0"/>
+                <a:ea typeface="Aptos" pitchFamily="34" charset="-122"/>
+                <a:cs typeface="Aptos" pitchFamily="34" charset="-120"/>
+              </a:rPr>
+              <a:t>Concept to action</a:t>
+            </a:r>
+            <a:endParaRPr lang="en-US" sz="1000" dirty="0"/>
+          </a:p>
+        </p:txBody>
+      </p:sp>
+      <p:sp>
+        <p:nvSpPr>
+          <p:cNvPr id="18" name="Shape 16"/>
+          <p:cNvSpPr/>
+          <p:nvPr/>
+        </p:nvSpPr>
+        <p:spPr>
+          <a:xfrm>
+            <a:off x="7635240" y="4498848"/>
+            <a:ext cx="3474720" cy="1143000"/>
+          </a:xfrm>
+          <a:prstGeom prst="roundRect">
+            <a:avLst>
+              <a:gd name="adj" fmla="val 9600"/>
             </a:avLst>
           </a:prstGeom>
           <a:solidFill>
@@ -6691,14 +7337,14 @@
       </p:sp>
       <p:sp>
         <p:nvSpPr>
-          <p:cNvPr id="16" name="Text 14"/>
-          <p:cNvSpPr/>
-          <p:nvPr/>
-        </p:nvSpPr>
-        <p:spPr>
-          <a:xfrm>
-            <a:off x="8074152" y="3666744"/>
-            <a:ext cx="2825496" cy="256032"/>
+          <p:cNvPr id="19" name="Text 17"/>
+          <p:cNvSpPr/>
+          <p:nvPr/>
+        </p:nvSpPr>
+        <p:spPr>
+          <a:xfrm>
+            <a:off x="7799832" y="4645152"/>
+            <a:ext cx="3145536" cy="256032"/>
           </a:xfrm>
           <a:prstGeom prst="rect">
             <a:avLst/>
@@ -6722,7 +7368,7 @@
                 <a:ea typeface="Aptos" pitchFamily="34" charset="-122"/>
                 <a:cs typeface="Aptos" pitchFamily="34" charset="-120"/>
               </a:rPr>
-              <a:t>Use this for</a:t>
+              <a:t>Apply it</a:t>
             </a:r>
             <a:endParaRPr lang="en-US" sz="1300" dirty="0"/>
           </a:p>
@@ -6730,14 +7376,14 @@
       </p:sp>
       <p:sp>
         <p:nvSpPr>
-          <p:cNvPr id="17" name="Text 15"/>
-          <p:cNvSpPr/>
-          <p:nvPr/>
-        </p:nvSpPr>
-        <p:spPr>
-          <a:xfrm>
-            <a:off x="8074152" y="4023360"/>
-            <a:ext cx="2825496" cy="1097280"/>
+          <p:cNvPr id="20" name="Text 18"/>
+          <p:cNvSpPr/>
+          <p:nvPr/>
+        </p:nvSpPr>
+        <p:spPr>
+          <a:xfrm>
+            <a:off x="7799832" y="5001768"/>
+            <a:ext cx="3145536" cy="502920"/>
           </a:xfrm>
           <a:prstGeom prst="rect">
             <a:avLst/>
@@ -6763,7 +7409,7 @@
                 <a:ea typeface="Aptos" pitchFamily="34" charset="-122"/>
                 <a:cs typeface="Aptos" pitchFamily="34" charset="-120"/>
               </a:rPr>
-              <a:t>Connect the concept to public health decisions, safeguards, documentation, or implementation work.</a:t>
+              <a:t>Connect the concept to public health purpose, responsible use, required safeguards, documentation, and the next action a department should take.</a:t>
             </a:r>
             <a:endParaRPr lang="en-US" sz="1550" dirty="0"/>
           </a:p>
@@ -6937,8 +7583,8 @@
         </p:nvSpPr>
         <p:spPr>
           <a:xfrm>
-            <a:off x="9966960" y="6537960"/>
-            <a:ext cx="1645920" cy="201168"/>
+            <a:off x="9646920" y="6537960"/>
+            <a:ext cx="1965960" cy="201168"/>
           </a:xfrm>
           <a:prstGeom prst="rect">
             <a:avLst/>
@@ -6962,7 +7608,7 @@
                 <a:ea typeface="Aptos" pitchFamily="34" charset="-122"/>
                 <a:cs typeface="Aptos" pitchFamily="34" charset="-120"/>
               </a:rPr>
-              <a:t>Â© Paula Soper</a:t>
+              <a:t>Copyright Paula Soper</a:t>
             </a:r>
             <a:endParaRPr lang="en-US" sz="800" dirty="0"/>
           </a:p>
@@ -7057,7 +7703,7 @@
         <p:spPr>
           <a:xfrm>
             <a:off x="868680" y="1508760"/>
-            <a:ext cx="6537960" cy="4160520"/>
+            <a:ext cx="6309360" cy="4160520"/>
           </a:xfrm>
           <a:prstGeom prst="rect">
             <a:avLst/>
@@ -7108,12 +7754,12 @@
         </p:nvSpPr>
         <p:spPr>
           <a:xfrm>
-            <a:off x="7909560" y="1417320"/>
-            <a:ext cx="3154680" cy="1828800"/>
+            <a:off x="7635240" y="1325880"/>
+            <a:ext cx="3474720" cy="1325880"/>
           </a:xfrm>
           <a:prstGeom prst="roundRect">
             <a:avLst>
-              <a:gd name="adj" fmla="val 6000"/>
+              <a:gd name="adj" fmla="val 8276"/>
             </a:avLst>
           </a:prstGeom>
           <a:solidFill>
@@ -7135,8 +7781,8 @@
         </p:nvSpPr>
         <p:spPr>
           <a:xfrm>
-            <a:off x="8074152" y="1563624"/>
-            <a:ext cx="2825496" cy="256032"/>
+            <a:off x="7799832" y="1472184"/>
+            <a:ext cx="3145536" cy="256032"/>
           </a:xfrm>
           <a:prstGeom prst="rect">
             <a:avLst/>
@@ -7160,7 +7806,7 @@
                 <a:ea typeface="Aptos" pitchFamily="34" charset="-122"/>
                 <a:cs typeface="Aptos" pitchFamily="34" charset="-120"/>
               </a:rPr>
-              <a:t>Key idea</a:t>
+              <a:t>Core concept</a:t>
             </a:r>
             <a:endParaRPr lang="en-US" sz="1300" dirty="0"/>
           </a:p>
@@ -7174,8 +7820,8 @@
         </p:nvSpPr>
         <p:spPr>
           <a:xfrm>
-            <a:off x="8074152" y="1920240"/>
-            <a:ext cx="2825496" cy="1188720"/>
+            <a:off x="7799832" y="1828800"/>
+            <a:ext cx="3145536" cy="685800"/>
           </a:xfrm>
           <a:prstGeom prst="rect">
             <a:avLst/>
@@ -7215,12 +7861,153 @@
         </p:nvSpPr>
         <p:spPr>
           <a:xfrm>
-            <a:off x="7909560" y="3520440"/>
-            <a:ext cx="3154680" cy="1737360"/>
+            <a:off x="7635240" y="2788920"/>
+            <a:ext cx="3474720" cy="1536192"/>
           </a:xfrm>
           <a:prstGeom prst="roundRect">
             <a:avLst>
-              <a:gd name="adj" fmla="val 6316"/>
+              <a:gd name="adj" fmla="val 7143"/>
+            </a:avLst>
+          </a:prstGeom>
+          <a:solidFill>
+            <a:srgbClr val="FFFFFF">
+              <a:alpha val="88000"/>
+            </a:srgbClr>
+          </a:solidFill>
+          <a:ln w="12700">
+            <a:solidFill>
+              <a:srgbClr val="D6E8F2"/>
+            </a:solidFill>
+            <a:prstDash val="solid"/>
+          </a:ln>
+        </p:spPr>
+      </p:sp>
+      <p:sp>
+        <p:nvSpPr>
+          <p:cNvPr id="14" name="Shape 12"/>
+          <p:cNvSpPr/>
+          <p:nvPr/>
+        </p:nvSpPr>
+        <p:spPr>
+          <a:xfrm>
+            <a:off x="8074152" y="3291840"/>
+            <a:ext cx="2596896" cy="749808"/>
+          </a:xfrm>
+          <a:prstGeom prst="rect">
+            <a:avLst/>
+          </a:prstGeom>
+          <a:solidFill>
+            <a:srgbClr val="EAF6F8"/>
+          </a:solidFill>
+          <a:ln w="12700">
+            <a:solidFill>
+              <a:srgbClr val="8ABBD8"/>
+            </a:solidFill>
+            <a:prstDash val="solid"/>
+          </a:ln>
+        </p:spPr>
+      </p:sp>
+      <p:sp>
+        <p:nvSpPr>
+          <p:cNvPr id="15" name="Shape 13"/>
+          <p:cNvSpPr/>
+          <p:nvPr/>
+        </p:nvSpPr>
+        <p:spPr>
+          <a:xfrm>
+            <a:off x="8202168" y="3721608"/>
+            <a:ext cx="2340864" cy="0"/>
+          </a:xfrm>
+          <a:prstGeom prst="line">
+            <a:avLst/>
+          </a:prstGeom>
+          <a:noFill/>
+          <a:ln w="19050">
+            <a:solidFill>
+              <a:srgbClr val="0068B7"/>
+            </a:solidFill>
+            <a:prstDash val="solid"/>
+          </a:ln>
+        </p:spPr>
+      </p:sp>
+      <p:sp>
+        <p:nvSpPr>
+          <p:cNvPr id="16" name="Shape 14"/>
+          <p:cNvSpPr/>
+          <p:nvPr/>
+        </p:nvSpPr>
+        <p:spPr>
+          <a:xfrm>
+            <a:off x="9198864" y="4206240"/>
+            <a:ext cx="347472" cy="347472"/>
+          </a:xfrm>
+          <a:prstGeom prst="ellipse">
+            <a:avLst/>
+          </a:prstGeom>
+          <a:solidFill>
+            <a:srgbClr val="2F8A28"/>
+          </a:solidFill>
+          <a:ln w="12700">
+            <a:solidFill>
+              <a:srgbClr val="2F8A28"/>
+            </a:solidFill>
+            <a:prstDash val="solid"/>
+          </a:ln>
+        </p:spPr>
+      </p:sp>
+      <p:sp>
+        <p:nvSpPr>
+          <p:cNvPr id="17" name="Text 15"/>
+          <p:cNvSpPr/>
+          <p:nvPr/>
+        </p:nvSpPr>
+        <p:spPr>
+          <a:xfrm>
+            <a:off x="7909560" y="3977640"/>
+            <a:ext cx="2926080" cy="182880"/>
+          </a:xfrm>
+          <a:prstGeom prst="rect">
+            <a:avLst/>
+          </a:prstGeom>
+          <a:noFill/>
+          <a:ln/>
+        </p:spPr>
+        <p:txBody>
+          <a:bodyPr wrap="square" lIns="0" tIns="0" rIns="0" bIns="0" rtlCol="0" anchor="ctr"/>
+          <a:lstStyle/>
+          <a:p>
+            <a:pPr algn="ctr" indent="0" marL="0">
+              <a:buNone/>
+            </a:pPr>
+            <a:r>
+              <a:rPr lang="en-US" sz="1000" dirty="0">
+                <a:solidFill>
+                  <a:srgbClr val="003A63"/>
+                </a:solidFill>
+                <a:latin typeface="Aptos" pitchFamily="34" charset="0"/>
+                <a:ea typeface="Aptos" pitchFamily="34" charset="-122"/>
+                <a:cs typeface="Aptos" pitchFamily="34" charset="-120"/>
+              </a:rPr>
+              <a:t>Concept to action</a:t>
+            </a:r>
+            <a:endParaRPr lang="en-US" sz="1000" dirty="0"/>
+          </a:p>
+        </p:txBody>
+      </p:sp>
+      <p:sp>
+        <p:nvSpPr>
+          <p:cNvPr id="18" name="Shape 16"/>
+          <p:cNvSpPr/>
+          <p:nvPr/>
+        </p:nvSpPr>
+        <p:spPr>
+          <a:xfrm>
+            <a:off x="7635240" y="4498848"/>
+            <a:ext cx="3474720" cy="1143000"/>
+          </a:xfrm>
+          <a:prstGeom prst="roundRect">
+            <a:avLst>
+              <a:gd name="adj" fmla="val 9600"/>
             </a:avLst>
           </a:prstGeom>
           <a:solidFill>
@@ -7236,14 +8023,14 @@
       </p:sp>
       <p:sp>
         <p:nvSpPr>
-          <p:cNvPr id="14" name="Text 12"/>
-          <p:cNvSpPr/>
-          <p:nvPr/>
-        </p:nvSpPr>
-        <p:spPr>
-          <a:xfrm>
-            <a:off x="8074152" y="3666744"/>
-            <a:ext cx="2825496" cy="256032"/>
+          <p:cNvPr id="19" name="Text 17"/>
+          <p:cNvSpPr/>
+          <p:nvPr/>
+        </p:nvSpPr>
+        <p:spPr>
+          <a:xfrm>
+            <a:off x="7799832" y="4645152"/>
+            <a:ext cx="3145536" cy="256032"/>
           </a:xfrm>
           <a:prstGeom prst="rect">
             <a:avLst/>
@@ -7267,7 +8054,7 @@
                 <a:ea typeface="Aptos" pitchFamily="34" charset="-122"/>
                 <a:cs typeface="Aptos" pitchFamily="34" charset="-120"/>
               </a:rPr>
-              <a:t>Use this for</a:t>
+              <a:t>Apply it</a:t>
             </a:r>
             <a:endParaRPr lang="en-US" sz="1300" dirty="0"/>
           </a:p>
@@ -7275,14 +8062,14 @@
       </p:sp>
       <p:sp>
         <p:nvSpPr>
-          <p:cNvPr id="15" name="Text 13"/>
-          <p:cNvSpPr/>
-          <p:nvPr/>
-        </p:nvSpPr>
-        <p:spPr>
-          <a:xfrm>
-            <a:off x="8074152" y="4023360"/>
-            <a:ext cx="2825496" cy="1097280"/>
+          <p:cNvPr id="20" name="Text 18"/>
+          <p:cNvSpPr/>
+          <p:nvPr/>
+        </p:nvSpPr>
+        <p:spPr>
+          <a:xfrm>
+            <a:off x="7799832" y="5001768"/>
+            <a:ext cx="3145536" cy="502920"/>
           </a:xfrm>
           <a:prstGeom prst="rect">
             <a:avLst/>
@@ -7308,7 +8095,7 @@
                 <a:ea typeface="Aptos" pitchFamily="34" charset="-122"/>
                 <a:cs typeface="Aptos" pitchFamily="34" charset="-120"/>
               </a:rPr>
-              <a:t>Connect the concept to public health decisions, safeguards, documentation, or implementation work.</a:t>
+              <a:t>Connect the concept to public health purpose, responsible use, required safeguards, documentation, and the next action a department should take.</a:t>
             </a:r>
             <a:endParaRPr lang="en-US" sz="1550" dirty="0"/>
           </a:p>
@@ -7482,8 +8269,8 @@
         </p:nvSpPr>
         <p:spPr>
           <a:xfrm>
-            <a:off x="9966960" y="6537960"/>
-            <a:ext cx="1645920" cy="201168"/>
+            <a:off x="9646920" y="6537960"/>
+            <a:ext cx="1965960" cy="201168"/>
           </a:xfrm>
           <a:prstGeom prst="rect">
             <a:avLst/>
@@ -7507,7 +8294,7 @@
                 <a:ea typeface="Aptos" pitchFamily="34" charset="-122"/>
                 <a:cs typeface="Aptos" pitchFamily="34" charset="-120"/>
               </a:rPr>
-              <a:t>Â© Paula Soper</a:t>
+              <a:t>Copyright Paula Soper</a:t>
             </a:r>
             <a:endParaRPr lang="en-US" sz="800" dirty="0"/>
           </a:p>
@@ -7554,77 +8341,13 @@
       </p:sp>
       <p:sp>
         <p:nvSpPr>
-          <p:cNvPr id="8" name="Shape 6"/>
+          <p:cNvPr id="8" name="Text 6"/>
           <p:cNvSpPr/>
           <p:nvPr/>
         </p:nvSpPr>
         <p:spPr>
           <a:xfrm>
             <a:off x="640080" y="658368"/>
-            <a:ext cx="420624" cy="420624"/>
-          </a:xfrm>
-          <a:prstGeom prst="ellipse">
-            <a:avLst/>
-          </a:prstGeom>
-          <a:solidFill>
-            <a:srgbClr val="0068B7"/>
-          </a:solidFill>
-          <a:ln w="12700">
-            <a:solidFill>
-              <a:srgbClr val="0068B7"/>
-            </a:solidFill>
-            <a:prstDash val="solid"/>
-          </a:ln>
-        </p:spPr>
-      </p:sp>
-      <p:sp>
-        <p:nvSpPr>
-          <p:cNvPr id="9" name="Text 7"/>
-          <p:cNvSpPr/>
-          <p:nvPr/>
-        </p:nvSpPr>
-        <p:spPr>
-          <a:xfrm>
-            <a:off x="640080" y="731520"/>
-            <a:ext cx="420624" cy="164592"/>
-          </a:xfrm>
-          <a:prstGeom prst="rect">
-            <a:avLst/>
-          </a:prstGeom>
-          <a:noFill/>
-          <a:ln/>
-        </p:spPr>
-        <p:txBody>
-          <a:bodyPr wrap="square" lIns="0" tIns="0" rIns="0" bIns="0" rtlCol="0" anchor="ctr"/>
-          <a:lstStyle/>
-          <a:p>
-            <a:pPr algn="ctr" indent="0" marL="0">
-              <a:buNone/>
-            </a:pPr>
-            <a:r>
-              <a:rPr lang="en-US" sz="1100" b="1" dirty="0">
-                <a:solidFill>
-                  <a:srgbClr val="FFFFFF"/>
-                </a:solidFill>
-                <a:latin typeface="Aptos" pitchFamily="34" charset="0"/>
-                <a:ea typeface="Aptos" pitchFamily="34" charset="-122"/>
-                <a:cs typeface="Aptos" pitchFamily="34" charset="-120"/>
-              </a:rPr>
-              <a:t>11</a:t>
-            </a:r>
-            <a:endParaRPr lang="en-US" sz="1100" dirty="0"/>
-          </a:p>
-        </p:txBody>
-      </p:sp>
-      <p:sp>
-        <p:nvSpPr>
-          <p:cNvPr id="10" name="Text 8"/>
-          <p:cNvSpPr/>
-          <p:nvPr/>
-        </p:nvSpPr>
-        <p:spPr>
-          <a:xfrm>
-            <a:off x="640080" y="621792"/>
             <a:ext cx="10881360" cy="713232"/>
           </a:xfrm>
           <a:prstGeom prst="rect">
@@ -7659,14 +8382,14 @@
       </p:sp>
       <p:sp>
         <p:nvSpPr>
-          <p:cNvPr id="11" name="Text 9"/>
+          <p:cNvPr id="9" name="Text 7"/>
           <p:cNvSpPr/>
           <p:nvPr/>
         </p:nvSpPr>
         <p:spPr>
           <a:xfrm>
             <a:off x="868680" y="1508760"/>
-            <a:ext cx="6537960" cy="4160520"/>
+            <a:ext cx="6309360" cy="4160520"/>
           </a:xfrm>
           <a:prstGeom prst="rect">
             <a:avLst/>
@@ -7725,18 +8448,18 @@
       </p:sp>
       <p:sp>
         <p:nvSpPr>
-          <p:cNvPr id="12" name="Shape 10"/>
-          <p:cNvSpPr/>
-          <p:nvPr/>
-        </p:nvSpPr>
-        <p:spPr>
-          <a:xfrm>
-            <a:off x="7909560" y="1417320"/>
-            <a:ext cx="3154680" cy="1828800"/>
+          <p:cNvPr id="10" name="Shape 8"/>
+          <p:cNvSpPr/>
+          <p:nvPr/>
+        </p:nvSpPr>
+        <p:spPr>
+          <a:xfrm>
+            <a:off x="7635240" y="1325880"/>
+            <a:ext cx="3474720" cy="1325880"/>
           </a:xfrm>
           <a:prstGeom prst="roundRect">
             <a:avLst>
-              <a:gd name="adj" fmla="val 6000"/>
+              <a:gd name="adj" fmla="val 8276"/>
             </a:avLst>
           </a:prstGeom>
           <a:solidFill>
@@ -7752,14 +8475,14 @@
       </p:sp>
       <p:sp>
         <p:nvSpPr>
-          <p:cNvPr id="13" name="Text 11"/>
-          <p:cNvSpPr/>
-          <p:nvPr/>
-        </p:nvSpPr>
-        <p:spPr>
-          <a:xfrm>
-            <a:off x="8074152" y="1563624"/>
-            <a:ext cx="2825496" cy="256032"/>
+          <p:cNvPr id="11" name="Text 9"/>
+          <p:cNvSpPr/>
+          <p:nvPr/>
+        </p:nvSpPr>
+        <p:spPr>
+          <a:xfrm>
+            <a:off x="7799832" y="1472184"/>
+            <a:ext cx="3145536" cy="256032"/>
           </a:xfrm>
           <a:prstGeom prst="rect">
             <a:avLst/>
@@ -7783,7 +8506,7 @@
                 <a:ea typeface="Aptos" pitchFamily="34" charset="-122"/>
                 <a:cs typeface="Aptos" pitchFamily="34" charset="-120"/>
               </a:rPr>
-              <a:t>Key idea</a:t>
+              <a:t>Practice focus</a:t>
             </a:r>
             <a:endParaRPr lang="en-US" sz="1300" dirty="0"/>
           </a:p>
@@ -7791,14 +8514,14 @@
       </p:sp>
       <p:sp>
         <p:nvSpPr>
-          <p:cNvPr id="14" name="Text 12"/>
-          <p:cNvSpPr/>
-          <p:nvPr/>
-        </p:nvSpPr>
-        <p:spPr>
-          <a:xfrm>
-            <a:off x="8074152" y="1920240"/>
-            <a:ext cx="2825496" cy="1188720"/>
+          <p:cNvPr id="12" name="Text 10"/>
+          <p:cNvSpPr/>
+          <p:nvPr/>
+        </p:nvSpPr>
+        <p:spPr>
+          <a:xfrm>
+            <a:off x="7799832" y="1828800"/>
+            <a:ext cx="3145536" cy="685800"/>
           </a:xfrm>
           <a:prstGeom prst="rect">
             <a:avLst/>
@@ -7832,18 +8555,159 @@
       </p:sp>
       <p:sp>
         <p:nvSpPr>
-          <p:cNvPr id="15" name="Shape 13"/>
-          <p:cNvSpPr/>
-          <p:nvPr/>
-        </p:nvSpPr>
-        <p:spPr>
-          <a:xfrm>
-            <a:off x="7909560" y="3520440"/>
-            <a:ext cx="3154680" cy="1737360"/>
+          <p:cNvPr id="13" name="Shape 11"/>
+          <p:cNvSpPr/>
+          <p:nvPr/>
+        </p:nvSpPr>
+        <p:spPr>
+          <a:xfrm>
+            <a:off x="7635240" y="2788920"/>
+            <a:ext cx="3474720" cy="1536192"/>
           </a:xfrm>
           <a:prstGeom prst="roundRect">
             <a:avLst>
-              <a:gd name="adj" fmla="val 6316"/>
+              <a:gd name="adj" fmla="val 7143"/>
+            </a:avLst>
+          </a:prstGeom>
+          <a:solidFill>
+            <a:srgbClr val="FFFFFF">
+              <a:alpha val="88000"/>
+            </a:srgbClr>
+          </a:solidFill>
+          <a:ln w="12700">
+            <a:solidFill>
+              <a:srgbClr val="D6E8F2"/>
+            </a:solidFill>
+            <a:prstDash val="solid"/>
+          </a:ln>
+        </p:spPr>
+      </p:sp>
+      <p:sp>
+        <p:nvSpPr>
+          <p:cNvPr id="14" name="Shape 12"/>
+          <p:cNvSpPr/>
+          <p:nvPr/>
+        </p:nvSpPr>
+        <p:spPr>
+          <a:xfrm>
+            <a:off x="8074152" y="3291840"/>
+            <a:ext cx="2596896" cy="749808"/>
+          </a:xfrm>
+          <a:prstGeom prst="rect">
+            <a:avLst/>
+          </a:prstGeom>
+          <a:solidFill>
+            <a:srgbClr val="EAF6F8"/>
+          </a:solidFill>
+          <a:ln w="12700">
+            <a:solidFill>
+              <a:srgbClr val="8ABBD8"/>
+            </a:solidFill>
+            <a:prstDash val="solid"/>
+          </a:ln>
+        </p:spPr>
+      </p:sp>
+      <p:sp>
+        <p:nvSpPr>
+          <p:cNvPr id="15" name="Shape 13"/>
+          <p:cNvSpPr/>
+          <p:nvPr/>
+        </p:nvSpPr>
+        <p:spPr>
+          <a:xfrm>
+            <a:off x="8202168" y="3721608"/>
+            <a:ext cx="2340864" cy="0"/>
+          </a:xfrm>
+          <a:prstGeom prst="line">
+            <a:avLst/>
+          </a:prstGeom>
+          <a:noFill/>
+          <a:ln w="19050">
+            <a:solidFill>
+              <a:srgbClr val="0068B7"/>
+            </a:solidFill>
+            <a:prstDash val="solid"/>
+          </a:ln>
+        </p:spPr>
+      </p:sp>
+      <p:sp>
+        <p:nvSpPr>
+          <p:cNvPr id="16" name="Shape 14"/>
+          <p:cNvSpPr/>
+          <p:nvPr/>
+        </p:nvSpPr>
+        <p:spPr>
+          <a:xfrm>
+            <a:off x="9198864" y="4206240"/>
+            <a:ext cx="347472" cy="347472"/>
+          </a:xfrm>
+          <a:prstGeom prst="ellipse">
+            <a:avLst/>
+          </a:prstGeom>
+          <a:solidFill>
+            <a:srgbClr val="2F8A28"/>
+          </a:solidFill>
+          <a:ln w="12700">
+            <a:solidFill>
+              <a:srgbClr val="2F8A28"/>
+            </a:solidFill>
+            <a:prstDash val="solid"/>
+          </a:ln>
+        </p:spPr>
+      </p:sp>
+      <p:sp>
+        <p:nvSpPr>
+          <p:cNvPr id="17" name="Text 15"/>
+          <p:cNvSpPr/>
+          <p:nvPr/>
+        </p:nvSpPr>
+        <p:spPr>
+          <a:xfrm>
+            <a:off x="7909560" y="3977640"/>
+            <a:ext cx="2926080" cy="182880"/>
+          </a:xfrm>
+          <a:prstGeom prst="rect">
+            <a:avLst/>
+          </a:prstGeom>
+          <a:noFill/>
+          <a:ln/>
+        </p:spPr>
+        <p:txBody>
+          <a:bodyPr wrap="square" lIns="0" tIns="0" rIns="0" bIns="0" rtlCol="0" anchor="ctr"/>
+          <a:lstStyle/>
+          <a:p>
+            <a:pPr algn="ctr" indent="0" marL="0">
+              <a:buNone/>
+            </a:pPr>
+            <a:r>
+              <a:rPr lang="en-US" sz="1000" dirty="0">
+                <a:solidFill>
+                  <a:srgbClr val="003A63"/>
+                </a:solidFill>
+                <a:latin typeface="Aptos" pitchFamily="34" charset="0"/>
+                <a:ea typeface="Aptos" pitchFamily="34" charset="-122"/>
+                <a:cs typeface="Aptos" pitchFamily="34" charset="-120"/>
+              </a:rPr>
+              <a:t>Concept to action</a:t>
+            </a:r>
+            <a:endParaRPr lang="en-US" sz="1000" dirty="0"/>
+          </a:p>
+        </p:txBody>
+      </p:sp>
+      <p:sp>
+        <p:nvSpPr>
+          <p:cNvPr id="18" name="Shape 16"/>
+          <p:cNvSpPr/>
+          <p:nvPr/>
+        </p:nvSpPr>
+        <p:spPr>
+          <a:xfrm>
+            <a:off x="7635240" y="4498848"/>
+            <a:ext cx="3474720" cy="1143000"/>
+          </a:xfrm>
+          <a:prstGeom prst="roundRect">
+            <a:avLst>
+              <a:gd name="adj" fmla="val 9600"/>
             </a:avLst>
           </a:prstGeom>
           <a:solidFill>
@@ -7859,14 +8723,14 @@
       </p:sp>
       <p:sp>
         <p:nvSpPr>
-          <p:cNvPr id="16" name="Text 14"/>
-          <p:cNvSpPr/>
-          <p:nvPr/>
-        </p:nvSpPr>
-        <p:spPr>
-          <a:xfrm>
-            <a:off x="8074152" y="3666744"/>
-            <a:ext cx="2825496" cy="256032"/>
+          <p:cNvPr id="19" name="Text 17"/>
+          <p:cNvSpPr/>
+          <p:nvPr/>
+        </p:nvSpPr>
+        <p:spPr>
+          <a:xfrm>
+            <a:off x="7799832" y="4645152"/>
+            <a:ext cx="3145536" cy="256032"/>
           </a:xfrm>
           <a:prstGeom prst="rect">
             <a:avLst/>
@@ -7890,7 +8754,7 @@
                 <a:ea typeface="Aptos" pitchFamily="34" charset="-122"/>
                 <a:cs typeface="Aptos" pitchFamily="34" charset="-120"/>
               </a:rPr>
-              <a:t>Use this for</a:t>
+              <a:t>What to produce</a:t>
             </a:r>
             <a:endParaRPr lang="en-US" sz="1300" dirty="0"/>
           </a:p>
@@ -7898,14 +8762,14 @@
       </p:sp>
       <p:sp>
         <p:nvSpPr>
-          <p:cNvPr id="17" name="Text 15"/>
-          <p:cNvSpPr/>
-          <p:nvPr/>
-        </p:nvSpPr>
-        <p:spPr>
-          <a:xfrm>
-            <a:off x="8074152" y="4023360"/>
-            <a:ext cx="2825496" cy="1097280"/>
+          <p:cNvPr id="20" name="Text 18"/>
+          <p:cNvSpPr/>
+          <p:nvPr/>
+        </p:nvSpPr>
+        <p:spPr>
+          <a:xfrm>
+            <a:off x="7799832" y="5001768"/>
+            <a:ext cx="3145536" cy="502920"/>
           </a:xfrm>
           <a:prstGeom prst="rect">
             <a:avLst/>
@@ -7931,7 +8795,7 @@
                 <a:ea typeface="Aptos" pitchFamily="34" charset="-122"/>
                 <a:cs typeface="Aptos" pitchFamily="34" charset="-120"/>
               </a:rPr>
-              <a:t>Connect the concept to public health decisions, safeguards, documentation, or implementation work.</a:t>
+              <a:t>Use the assignment to test whether you can explain the concept, apply it to a realistic public health situation, and identify what would need review before the work moves forward.</a:t>
             </a:r>
             <a:endParaRPr lang="en-US" sz="1550" dirty="0"/>
           </a:p>
@@ -8105,8 +8969,8 @@
         </p:nvSpPr>
         <p:spPr>
           <a:xfrm>
-            <a:off x="9966960" y="6537960"/>
-            <a:ext cx="1645920" cy="201168"/>
+            <a:off x="9646920" y="6537960"/>
+            <a:ext cx="1965960" cy="201168"/>
           </a:xfrm>
           <a:prstGeom prst="rect">
             <a:avLst/>
@@ -8130,7 +8994,7 @@
                 <a:ea typeface="Aptos" pitchFamily="34" charset="-122"/>
                 <a:cs typeface="Aptos" pitchFamily="34" charset="-120"/>
               </a:rPr>
-              <a:t>Â© Paula Soper</a:t>
+              <a:t>Copyright Paula Soper</a:t>
             </a:r>
             <a:endParaRPr lang="en-US" sz="800" dirty="0"/>
           </a:p>
@@ -8177,77 +9041,13 @@
       </p:sp>
       <p:sp>
         <p:nvSpPr>
-          <p:cNvPr id="8" name="Shape 6"/>
+          <p:cNvPr id="8" name="Text 6"/>
           <p:cNvSpPr/>
           <p:nvPr/>
         </p:nvSpPr>
         <p:spPr>
           <a:xfrm>
             <a:off x="640080" y="658368"/>
-            <a:ext cx="420624" cy="420624"/>
-          </a:xfrm>
-          <a:prstGeom prst="ellipse">
-            <a:avLst/>
-          </a:prstGeom>
-          <a:solidFill>
-            <a:srgbClr val="0068B7"/>
-          </a:solidFill>
-          <a:ln w="12700">
-            <a:solidFill>
-              <a:srgbClr val="0068B7"/>
-            </a:solidFill>
-            <a:prstDash val="solid"/>
-          </a:ln>
-        </p:spPr>
-      </p:sp>
-      <p:sp>
-        <p:nvSpPr>
-          <p:cNvPr id="9" name="Text 7"/>
-          <p:cNvSpPr/>
-          <p:nvPr/>
-        </p:nvSpPr>
-        <p:spPr>
-          <a:xfrm>
-            <a:off x="640080" y="731520"/>
-            <a:ext cx="420624" cy="164592"/>
-          </a:xfrm>
-          <a:prstGeom prst="rect">
-            <a:avLst/>
-          </a:prstGeom>
-          <a:noFill/>
-          <a:ln/>
-        </p:spPr>
-        <p:txBody>
-          <a:bodyPr wrap="square" lIns="0" tIns="0" rIns="0" bIns="0" rtlCol="0" anchor="ctr"/>
-          <a:lstStyle/>
-          <a:p>
-            <a:pPr algn="ctr" indent="0" marL="0">
-              <a:buNone/>
-            </a:pPr>
-            <a:r>
-              <a:rPr lang="en-US" sz="1100" b="1" dirty="0">
-                <a:solidFill>
-                  <a:srgbClr val="FFFFFF"/>
-                </a:solidFill>
-                <a:latin typeface="Aptos" pitchFamily="34" charset="0"/>
-                <a:ea typeface="Aptos" pitchFamily="34" charset="-122"/>
-                <a:cs typeface="Aptos" pitchFamily="34" charset="-120"/>
-              </a:rPr>
-              <a:t>12</a:t>
-            </a:r>
-            <a:endParaRPr lang="en-US" sz="1100" dirty="0"/>
-          </a:p>
-        </p:txBody>
-      </p:sp>
-      <p:sp>
-        <p:nvSpPr>
-          <p:cNvPr id="10" name="Text 8"/>
-          <p:cNvSpPr/>
-          <p:nvPr/>
-        </p:nvSpPr>
-        <p:spPr>
-          <a:xfrm>
-            <a:off x="640080" y="621792"/>
             <a:ext cx="10881360" cy="713232"/>
           </a:xfrm>
           <a:prstGeom prst="rect">
@@ -8282,14 +9082,14 @@
       </p:sp>
       <p:sp>
         <p:nvSpPr>
-          <p:cNvPr id="11" name="Text 9"/>
+          <p:cNvPr id="9" name="Text 7"/>
           <p:cNvSpPr/>
           <p:nvPr/>
         </p:nvSpPr>
         <p:spPr>
           <a:xfrm>
             <a:off x="868680" y="1508760"/>
-            <a:ext cx="6537960" cy="4160520"/>
+            <a:ext cx="6309360" cy="4160520"/>
           </a:xfrm>
           <a:prstGeom prst="rect">
             <a:avLst/>
@@ -8334,18 +9134,18 @@
       </p:sp>
       <p:sp>
         <p:nvSpPr>
-          <p:cNvPr id="12" name="Shape 10"/>
-          <p:cNvSpPr/>
-          <p:nvPr/>
-        </p:nvSpPr>
-        <p:spPr>
-          <a:xfrm>
-            <a:off x="7909560" y="1417320"/>
-            <a:ext cx="3154680" cy="1828800"/>
+          <p:cNvPr id="10" name="Shape 8"/>
+          <p:cNvSpPr/>
+          <p:nvPr/>
+        </p:nvSpPr>
+        <p:spPr>
+          <a:xfrm>
+            <a:off x="7635240" y="1325880"/>
+            <a:ext cx="3474720" cy="1325880"/>
           </a:xfrm>
           <a:prstGeom prst="roundRect">
             <a:avLst>
-              <a:gd name="adj" fmla="val 6000"/>
+              <a:gd name="adj" fmla="val 8276"/>
             </a:avLst>
           </a:prstGeom>
           <a:solidFill>
@@ -8361,14 +9161,14 @@
       </p:sp>
       <p:sp>
         <p:nvSpPr>
-          <p:cNvPr id="13" name="Text 11"/>
-          <p:cNvSpPr/>
-          <p:nvPr/>
-        </p:nvSpPr>
-        <p:spPr>
-          <a:xfrm>
-            <a:off x="8074152" y="1563624"/>
-            <a:ext cx="2825496" cy="256032"/>
+          <p:cNvPr id="11" name="Text 9"/>
+          <p:cNvSpPr/>
+          <p:nvPr/>
+        </p:nvSpPr>
+        <p:spPr>
+          <a:xfrm>
+            <a:off x="7799832" y="1472184"/>
+            <a:ext cx="3145536" cy="256032"/>
           </a:xfrm>
           <a:prstGeom prst="rect">
             <a:avLst/>
@@ -8392,7 +9192,7 @@
                 <a:ea typeface="Aptos" pitchFamily="34" charset="-122"/>
                 <a:cs typeface="Aptos" pitchFamily="34" charset="-120"/>
               </a:rPr>
-              <a:t>Key idea</a:t>
+              <a:t>Core concept</a:t>
             </a:r>
             <a:endParaRPr lang="en-US" sz="1300" dirty="0"/>
           </a:p>
@@ -8400,14 +9200,14 @@
       </p:sp>
       <p:sp>
         <p:nvSpPr>
-          <p:cNvPr id="14" name="Text 12"/>
-          <p:cNvSpPr/>
-          <p:nvPr/>
-        </p:nvSpPr>
-        <p:spPr>
-          <a:xfrm>
-            <a:off x="8074152" y="1920240"/>
-            <a:ext cx="2825496" cy="1188720"/>
+          <p:cNvPr id="12" name="Text 10"/>
+          <p:cNvSpPr/>
+          <p:nvPr/>
+        </p:nvSpPr>
+        <p:spPr>
+          <a:xfrm>
+            <a:off x="7799832" y="1828800"/>
+            <a:ext cx="3145536" cy="685800"/>
           </a:xfrm>
           <a:prstGeom prst="rect">
             <a:avLst/>
@@ -8441,18 +9241,159 @@
       </p:sp>
       <p:sp>
         <p:nvSpPr>
-          <p:cNvPr id="15" name="Shape 13"/>
-          <p:cNvSpPr/>
-          <p:nvPr/>
-        </p:nvSpPr>
-        <p:spPr>
-          <a:xfrm>
-            <a:off x="7909560" y="3520440"/>
-            <a:ext cx="3154680" cy="1737360"/>
+          <p:cNvPr id="13" name="Shape 11"/>
+          <p:cNvSpPr/>
+          <p:nvPr/>
+        </p:nvSpPr>
+        <p:spPr>
+          <a:xfrm>
+            <a:off x="7635240" y="2788920"/>
+            <a:ext cx="3474720" cy="1536192"/>
           </a:xfrm>
           <a:prstGeom prst="roundRect">
             <a:avLst>
-              <a:gd name="adj" fmla="val 6316"/>
+              <a:gd name="adj" fmla="val 7143"/>
+            </a:avLst>
+          </a:prstGeom>
+          <a:solidFill>
+            <a:srgbClr val="FFFFFF">
+              <a:alpha val="88000"/>
+            </a:srgbClr>
+          </a:solidFill>
+          <a:ln w="12700">
+            <a:solidFill>
+              <a:srgbClr val="D6E8F2"/>
+            </a:solidFill>
+            <a:prstDash val="solid"/>
+          </a:ln>
+        </p:spPr>
+      </p:sp>
+      <p:sp>
+        <p:nvSpPr>
+          <p:cNvPr id="14" name="Shape 12"/>
+          <p:cNvSpPr/>
+          <p:nvPr/>
+        </p:nvSpPr>
+        <p:spPr>
+          <a:xfrm>
+            <a:off x="8074152" y="3291840"/>
+            <a:ext cx="2596896" cy="749808"/>
+          </a:xfrm>
+          <a:prstGeom prst="rect">
+            <a:avLst/>
+          </a:prstGeom>
+          <a:solidFill>
+            <a:srgbClr val="EAF6F8"/>
+          </a:solidFill>
+          <a:ln w="12700">
+            <a:solidFill>
+              <a:srgbClr val="8ABBD8"/>
+            </a:solidFill>
+            <a:prstDash val="solid"/>
+          </a:ln>
+        </p:spPr>
+      </p:sp>
+      <p:sp>
+        <p:nvSpPr>
+          <p:cNvPr id="15" name="Shape 13"/>
+          <p:cNvSpPr/>
+          <p:nvPr/>
+        </p:nvSpPr>
+        <p:spPr>
+          <a:xfrm>
+            <a:off x="8202168" y="3721608"/>
+            <a:ext cx="2340864" cy="0"/>
+          </a:xfrm>
+          <a:prstGeom prst="line">
+            <a:avLst/>
+          </a:prstGeom>
+          <a:noFill/>
+          <a:ln w="19050">
+            <a:solidFill>
+              <a:srgbClr val="0068B7"/>
+            </a:solidFill>
+            <a:prstDash val="solid"/>
+          </a:ln>
+        </p:spPr>
+      </p:sp>
+      <p:sp>
+        <p:nvSpPr>
+          <p:cNvPr id="16" name="Shape 14"/>
+          <p:cNvSpPr/>
+          <p:nvPr/>
+        </p:nvSpPr>
+        <p:spPr>
+          <a:xfrm>
+            <a:off x="9198864" y="4206240"/>
+            <a:ext cx="347472" cy="347472"/>
+          </a:xfrm>
+          <a:prstGeom prst="ellipse">
+            <a:avLst/>
+          </a:prstGeom>
+          <a:solidFill>
+            <a:srgbClr val="2F8A28"/>
+          </a:solidFill>
+          <a:ln w="12700">
+            <a:solidFill>
+              <a:srgbClr val="2F8A28"/>
+            </a:solidFill>
+            <a:prstDash val="solid"/>
+          </a:ln>
+        </p:spPr>
+      </p:sp>
+      <p:sp>
+        <p:nvSpPr>
+          <p:cNvPr id="17" name="Text 15"/>
+          <p:cNvSpPr/>
+          <p:nvPr/>
+        </p:nvSpPr>
+        <p:spPr>
+          <a:xfrm>
+            <a:off x="7909560" y="3977640"/>
+            <a:ext cx="2926080" cy="182880"/>
+          </a:xfrm>
+          <a:prstGeom prst="rect">
+            <a:avLst/>
+          </a:prstGeom>
+          <a:noFill/>
+          <a:ln/>
+        </p:spPr>
+        <p:txBody>
+          <a:bodyPr wrap="square" lIns="0" tIns="0" rIns="0" bIns="0" rtlCol="0" anchor="ctr"/>
+          <a:lstStyle/>
+          <a:p>
+            <a:pPr algn="ctr" indent="0" marL="0">
+              <a:buNone/>
+            </a:pPr>
+            <a:r>
+              <a:rPr lang="en-US" sz="1000" dirty="0">
+                <a:solidFill>
+                  <a:srgbClr val="003A63"/>
+                </a:solidFill>
+                <a:latin typeface="Aptos" pitchFamily="34" charset="0"/>
+                <a:ea typeface="Aptos" pitchFamily="34" charset="-122"/>
+                <a:cs typeface="Aptos" pitchFamily="34" charset="-120"/>
+              </a:rPr>
+              <a:t>Concept to action</a:t>
+            </a:r>
+            <a:endParaRPr lang="en-US" sz="1000" dirty="0"/>
+          </a:p>
+        </p:txBody>
+      </p:sp>
+      <p:sp>
+        <p:nvSpPr>
+          <p:cNvPr id="18" name="Shape 16"/>
+          <p:cNvSpPr/>
+          <p:nvPr/>
+        </p:nvSpPr>
+        <p:spPr>
+          <a:xfrm>
+            <a:off x="7635240" y="4498848"/>
+            <a:ext cx="3474720" cy="1143000"/>
+          </a:xfrm>
+          <a:prstGeom prst="roundRect">
+            <a:avLst>
+              <a:gd name="adj" fmla="val 9600"/>
             </a:avLst>
           </a:prstGeom>
           <a:solidFill>
@@ -8468,14 +9409,14 @@
       </p:sp>
       <p:sp>
         <p:nvSpPr>
-          <p:cNvPr id="16" name="Text 14"/>
-          <p:cNvSpPr/>
-          <p:nvPr/>
-        </p:nvSpPr>
-        <p:spPr>
-          <a:xfrm>
-            <a:off x="8074152" y="3666744"/>
-            <a:ext cx="2825496" cy="256032"/>
+          <p:cNvPr id="19" name="Text 17"/>
+          <p:cNvSpPr/>
+          <p:nvPr/>
+        </p:nvSpPr>
+        <p:spPr>
+          <a:xfrm>
+            <a:off x="7799832" y="4645152"/>
+            <a:ext cx="3145536" cy="256032"/>
           </a:xfrm>
           <a:prstGeom prst="rect">
             <a:avLst/>
@@ -8499,7 +9440,7 @@
                 <a:ea typeface="Aptos" pitchFamily="34" charset="-122"/>
                 <a:cs typeface="Aptos" pitchFamily="34" charset="-120"/>
               </a:rPr>
-              <a:t>Use this for</a:t>
+              <a:t>Apply it</a:t>
             </a:r>
             <a:endParaRPr lang="en-US" sz="1300" dirty="0"/>
           </a:p>
@@ -8507,14 +9448,14 @@
       </p:sp>
       <p:sp>
         <p:nvSpPr>
-          <p:cNvPr id="17" name="Text 15"/>
-          <p:cNvSpPr/>
-          <p:nvPr/>
-        </p:nvSpPr>
-        <p:spPr>
-          <a:xfrm>
-            <a:off x="8074152" y="4023360"/>
-            <a:ext cx="2825496" cy="1097280"/>
+          <p:cNvPr id="20" name="Text 18"/>
+          <p:cNvSpPr/>
+          <p:nvPr/>
+        </p:nvSpPr>
+        <p:spPr>
+          <a:xfrm>
+            <a:off x="7799832" y="5001768"/>
+            <a:ext cx="3145536" cy="502920"/>
           </a:xfrm>
           <a:prstGeom prst="rect">
             <a:avLst/>
@@ -8540,7 +9481,7 @@
                 <a:ea typeface="Aptos" pitchFamily="34" charset="-122"/>
                 <a:cs typeface="Aptos" pitchFamily="34" charset="-120"/>
               </a:rPr>
-              <a:t>Connect the concept to public health decisions, safeguards, documentation, or implementation work.</a:t>
+              <a:t>Connect the concept to public health purpose, responsible use, required safeguards, documentation, and the next action a department should take.</a:t>
             </a:r>
             <a:endParaRPr lang="en-US" sz="1550" dirty="0"/>
           </a:p>
@@ -8714,8 +9655,8 @@
         </p:nvSpPr>
         <p:spPr>
           <a:xfrm>
-            <a:off x="9966960" y="6537960"/>
-            <a:ext cx="1645920" cy="201168"/>
+            <a:off x="9646920" y="6537960"/>
+            <a:ext cx="1965960" cy="201168"/>
           </a:xfrm>
           <a:prstGeom prst="rect">
             <a:avLst/>
@@ -8739,7 +9680,7 @@
                 <a:ea typeface="Aptos" pitchFamily="34" charset="-122"/>
                 <a:cs typeface="Aptos" pitchFamily="34" charset="-120"/>
               </a:rPr>
-              <a:t>Â© Paula Soper</a:t>
+              <a:t>Copyright Paula Soper</a:t>
             </a:r>
             <a:endParaRPr lang="en-US" sz="800" dirty="0"/>
           </a:p>
@@ -8786,77 +9727,13 @@
       </p:sp>
       <p:sp>
         <p:nvSpPr>
-          <p:cNvPr id="8" name="Shape 6"/>
+          <p:cNvPr id="8" name="Text 6"/>
           <p:cNvSpPr/>
           <p:nvPr/>
         </p:nvSpPr>
         <p:spPr>
           <a:xfrm>
             <a:off x="640080" y="658368"/>
-            <a:ext cx="420624" cy="420624"/>
-          </a:xfrm>
-          <a:prstGeom prst="ellipse">
-            <a:avLst/>
-          </a:prstGeom>
-          <a:solidFill>
-            <a:srgbClr val="0068B7"/>
-          </a:solidFill>
-          <a:ln w="12700">
-            <a:solidFill>
-              <a:srgbClr val="0068B7"/>
-            </a:solidFill>
-            <a:prstDash val="solid"/>
-          </a:ln>
-        </p:spPr>
-      </p:sp>
-      <p:sp>
-        <p:nvSpPr>
-          <p:cNvPr id="9" name="Text 7"/>
-          <p:cNvSpPr/>
-          <p:nvPr/>
-        </p:nvSpPr>
-        <p:spPr>
-          <a:xfrm>
-            <a:off x="640080" y="731520"/>
-            <a:ext cx="420624" cy="164592"/>
-          </a:xfrm>
-          <a:prstGeom prst="rect">
-            <a:avLst/>
-          </a:prstGeom>
-          <a:noFill/>
-          <a:ln/>
-        </p:spPr>
-        <p:txBody>
-          <a:bodyPr wrap="square" lIns="0" tIns="0" rIns="0" bIns="0" rtlCol="0" anchor="ctr"/>
-          <a:lstStyle/>
-          <a:p>
-            <a:pPr algn="ctr" indent="0" marL="0">
-              <a:buNone/>
-            </a:pPr>
-            <a:r>
-              <a:rPr lang="en-US" sz="1100" b="1" dirty="0">
-                <a:solidFill>
-                  <a:srgbClr val="FFFFFF"/>
-                </a:solidFill>
-                <a:latin typeface="Aptos" pitchFamily="34" charset="0"/>
-                <a:ea typeface="Aptos" pitchFamily="34" charset="-122"/>
-                <a:cs typeface="Aptos" pitchFamily="34" charset="-120"/>
-              </a:rPr>
-              <a:t>13</a:t>
-            </a:r>
-            <a:endParaRPr lang="en-US" sz="1100" dirty="0"/>
-          </a:p>
-        </p:txBody>
-      </p:sp>
-      <p:sp>
-        <p:nvSpPr>
-          <p:cNvPr id="10" name="Text 8"/>
-          <p:cNvSpPr/>
-          <p:nvPr/>
-        </p:nvSpPr>
-        <p:spPr>
-          <a:xfrm>
-            <a:off x="640080" y="621792"/>
             <a:ext cx="10881360" cy="713232"/>
           </a:xfrm>
           <a:prstGeom prst="rect">
@@ -8891,14 +9768,14 @@
       </p:sp>
       <p:sp>
         <p:nvSpPr>
-          <p:cNvPr id="11" name="Text 9"/>
+          <p:cNvPr id="9" name="Text 7"/>
           <p:cNvSpPr/>
           <p:nvPr/>
         </p:nvSpPr>
         <p:spPr>
           <a:xfrm>
             <a:off x="868680" y="1508760"/>
-            <a:ext cx="6537960" cy="4160520"/>
+            <a:ext cx="6309360" cy="4160520"/>
           </a:xfrm>
           <a:prstGeom prst="rect">
             <a:avLst/>
@@ -8929,18 +9806,18 @@
       </p:sp>
       <p:sp>
         <p:nvSpPr>
-          <p:cNvPr id="12" name="Shape 10"/>
-          <p:cNvSpPr/>
-          <p:nvPr/>
-        </p:nvSpPr>
-        <p:spPr>
-          <a:xfrm>
-            <a:off x="7909560" y="1417320"/>
-            <a:ext cx="3154680" cy="1828800"/>
+          <p:cNvPr id="10" name="Shape 8"/>
+          <p:cNvSpPr/>
+          <p:nvPr/>
+        </p:nvSpPr>
+        <p:spPr>
+          <a:xfrm>
+            <a:off x="7635240" y="1325880"/>
+            <a:ext cx="3474720" cy="1325880"/>
           </a:xfrm>
           <a:prstGeom prst="roundRect">
             <a:avLst>
-              <a:gd name="adj" fmla="val 6000"/>
+              <a:gd name="adj" fmla="val 8276"/>
             </a:avLst>
           </a:prstGeom>
           <a:solidFill>
@@ -8956,14 +9833,14 @@
       </p:sp>
       <p:sp>
         <p:nvSpPr>
-          <p:cNvPr id="13" name="Text 11"/>
-          <p:cNvSpPr/>
-          <p:nvPr/>
-        </p:nvSpPr>
-        <p:spPr>
-          <a:xfrm>
-            <a:off x="8074152" y="1563624"/>
-            <a:ext cx="2825496" cy="256032"/>
+          <p:cNvPr id="11" name="Text 9"/>
+          <p:cNvSpPr/>
+          <p:nvPr/>
+        </p:nvSpPr>
+        <p:spPr>
+          <a:xfrm>
+            <a:off x="7799832" y="1472184"/>
+            <a:ext cx="3145536" cy="256032"/>
           </a:xfrm>
           <a:prstGeom prst="rect">
             <a:avLst/>
@@ -8987,7 +9864,7 @@
                 <a:ea typeface="Aptos" pitchFamily="34" charset="-122"/>
                 <a:cs typeface="Aptos" pitchFamily="34" charset="-120"/>
               </a:rPr>
-              <a:t>Key idea</a:t>
+              <a:t>Practice focus</a:t>
             </a:r>
             <a:endParaRPr lang="en-US" sz="1300" dirty="0"/>
           </a:p>
@@ -8995,14 +9872,14 @@
       </p:sp>
       <p:sp>
         <p:nvSpPr>
-          <p:cNvPr id="14" name="Text 12"/>
-          <p:cNvSpPr/>
-          <p:nvPr/>
-        </p:nvSpPr>
-        <p:spPr>
-          <a:xfrm>
-            <a:off x="8074152" y="1920240"/>
-            <a:ext cx="2825496" cy="1188720"/>
+          <p:cNvPr id="12" name="Text 10"/>
+          <p:cNvSpPr/>
+          <p:nvPr/>
+        </p:nvSpPr>
+        <p:spPr>
+          <a:xfrm>
+            <a:off x="7799832" y="1828800"/>
+            <a:ext cx="3145536" cy="685800"/>
           </a:xfrm>
           <a:prstGeom prst="rect">
             <a:avLst/>
@@ -9036,18 +9913,159 @@
       </p:sp>
       <p:sp>
         <p:nvSpPr>
-          <p:cNvPr id="15" name="Shape 13"/>
-          <p:cNvSpPr/>
-          <p:nvPr/>
-        </p:nvSpPr>
-        <p:spPr>
-          <a:xfrm>
-            <a:off x="7909560" y="3520440"/>
-            <a:ext cx="3154680" cy="1737360"/>
+          <p:cNvPr id="13" name="Shape 11"/>
+          <p:cNvSpPr/>
+          <p:nvPr/>
+        </p:nvSpPr>
+        <p:spPr>
+          <a:xfrm>
+            <a:off x="7635240" y="2788920"/>
+            <a:ext cx="3474720" cy="1536192"/>
           </a:xfrm>
           <a:prstGeom prst="roundRect">
             <a:avLst>
-              <a:gd name="adj" fmla="val 6316"/>
+              <a:gd name="adj" fmla="val 7143"/>
+            </a:avLst>
+          </a:prstGeom>
+          <a:solidFill>
+            <a:srgbClr val="FFFFFF">
+              <a:alpha val="88000"/>
+            </a:srgbClr>
+          </a:solidFill>
+          <a:ln w="12700">
+            <a:solidFill>
+              <a:srgbClr val="D6E8F2"/>
+            </a:solidFill>
+            <a:prstDash val="solid"/>
+          </a:ln>
+        </p:spPr>
+      </p:sp>
+      <p:sp>
+        <p:nvSpPr>
+          <p:cNvPr id="14" name="Shape 12"/>
+          <p:cNvSpPr/>
+          <p:nvPr/>
+        </p:nvSpPr>
+        <p:spPr>
+          <a:xfrm>
+            <a:off x="8074152" y="3291840"/>
+            <a:ext cx="2596896" cy="749808"/>
+          </a:xfrm>
+          <a:prstGeom prst="rect">
+            <a:avLst/>
+          </a:prstGeom>
+          <a:solidFill>
+            <a:srgbClr val="EAF6F8"/>
+          </a:solidFill>
+          <a:ln w="12700">
+            <a:solidFill>
+              <a:srgbClr val="8ABBD8"/>
+            </a:solidFill>
+            <a:prstDash val="solid"/>
+          </a:ln>
+        </p:spPr>
+      </p:sp>
+      <p:sp>
+        <p:nvSpPr>
+          <p:cNvPr id="15" name="Shape 13"/>
+          <p:cNvSpPr/>
+          <p:nvPr/>
+        </p:nvSpPr>
+        <p:spPr>
+          <a:xfrm>
+            <a:off x="8202168" y="3721608"/>
+            <a:ext cx="2340864" cy="0"/>
+          </a:xfrm>
+          <a:prstGeom prst="line">
+            <a:avLst/>
+          </a:prstGeom>
+          <a:noFill/>
+          <a:ln w="19050">
+            <a:solidFill>
+              <a:srgbClr val="0068B7"/>
+            </a:solidFill>
+            <a:prstDash val="solid"/>
+          </a:ln>
+        </p:spPr>
+      </p:sp>
+      <p:sp>
+        <p:nvSpPr>
+          <p:cNvPr id="16" name="Shape 14"/>
+          <p:cNvSpPr/>
+          <p:nvPr/>
+        </p:nvSpPr>
+        <p:spPr>
+          <a:xfrm>
+            <a:off x="9198864" y="4206240"/>
+            <a:ext cx="347472" cy="347472"/>
+          </a:xfrm>
+          <a:prstGeom prst="ellipse">
+            <a:avLst/>
+          </a:prstGeom>
+          <a:solidFill>
+            <a:srgbClr val="2F8A28"/>
+          </a:solidFill>
+          <a:ln w="12700">
+            <a:solidFill>
+              <a:srgbClr val="2F8A28"/>
+            </a:solidFill>
+            <a:prstDash val="solid"/>
+          </a:ln>
+        </p:spPr>
+      </p:sp>
+      <p:sp>
+        <p:nvSpPr>
+          <p:cNvPr id="17" name="Text 15"/>
+          <p:cNvSpPr/>
+          <p:nvPr/>
+        </p:nvSpPr>
+        <p:spPr>
+          <a:xfrm>
+            <a:off x="7909560" y="3977640"/>
+            <a:ext cx="2926080" cy="182880"/>
+          </a:xfrm>
+          <a:prstGeom prst="rect">
+            <a:avLst/>
+          </a:prstGeom>
+          <a:noFill/>
+          <a:ln/>
+        </p:spPr>
+        <p:txBody>
+          <a:bodyPr wrap="square" lIns="0" tIns="0" rIns="0" bIns="0" rtlCol="0" anchor="ctr"/>
+          <a:lstStyle/>
+          <a:p>
+            <a:pPr algn="ctr" indent="0" marL="0">
+              <a:buNone/>
+            </a:pPr>
+            <a:r>
+              <a:rPr lang="en-US" sz="1000" dirty="0">
+                <a:solidFill>
+                  <a:srgbClr val="003A63"/>
+                </a:solidFill>
+                <a:latin typeface="Aptos" pitchFamily="34" charset="0"/>
+                <a:ea typeface="Aptos" pitchFamily="34" charset="-122"/>
+                <a:cs typeface="Aptos" pitchFamily="34" charset="-120"/>
+              </a:rPr>
+              <a:t>Concept to action</a:t>
+            </a:r>
+            <a:endParaRPr lang="en-US" sz="1000" dirty="0"/>
+          </a:p>
+        </p:txBody>
+      </p:sp>
+      <p:sp>
+        <p:nvSpPr>
+          <p:cNvPr id="18" name="Shape 16"/>
+          <p:cNvSpPr/>
+          <p:nvPr/>
+        </p:nvSpPr>
+        <p:spPr>
+          <a:xfrm>
+            <a:off x="7635240" y="4498848"/>
+            <a:ext cx="3474720" cy="1143000"/>
+          </a:xfrm>
+          <a:prstGeom prst="roundRect">
+            <a:avLst>
+              <a:gd name="adj" fmla="val 9600"/>
             </a:avLst>
           </a:prstGeom>
           <a:solidFill>
@@ -9063,14 +10081,14 @@
       </p:sp>
       <p:sp>
         <p:nvSpPr>
-          <p:cNvPr id="16" name="Text 14"/>
-          <p:cNvSpPr/>
-          <p:nvPr/>
-        </p:nvSpPr>
-        <p:spPr>
-          <a:xfrm>
-            <a:off x="8074152" y="3666744"/>
-            <a:ext cx="2825496" cy="256032"/>
+          <p:cNvPr id="19" name="Text 17"/>
+          <p:cNvSpPr/>
+          <p:nvPr/>
+        </p:nvSpPr>
+        <p:spPr>
+          <a:xfrm>
+            <a:off x="7799832" y="4645152"/>
+            <a:ext cx="3145536" cy="256032"/>
           </a:xfrm>
           <a:prstGeom prst="rect">
             <a:avLst/>
@@ -9094,7 +10112,7 @@
                 <a:ea typeface="Aptos" pitchFamily="34" charset="-122"/>
                 <a:cs typeface="Aptos" pitchFamily="34" charset="-120"/>
               </a:rPr>
-              <a:t>Use this for</a:t>
+              <a:t>What to produce</a:t>
             </a:r>
             <a:endParaRPr lang="en-US" sz="1300" dirty="0"/>
           </a:p>
@@ -9102,14 +10120,14 @@
       </p:sp>
       <p:sp>
         <p:nvSpPr>
-          <p:cNvPr id="17" name="Text 15"/>
-          <p:cNvSpPr/>
-          <p:nvPr/>
-        </p:nvSpPr>
-        <p:spPr>
-          <a:xfrm>
-            <a:off x="8074152" y="4023360"/>
-            <a:ext cx="2825496" cy="1097280"/>
+          <p:cNvPr id="20" name="Text 18"/>
+          <p:cNvSpPr/>
+          <p:nvPr/>
+        </p:nvSpPr>
+        <p:spPr>
+          <a:xfrm>
+            <a:off x="7799832" y="5001768"/>
+            <a:ext cx="3145536" cy="502920"/>
           </a:xfrm>
           <a:prstGeom prst="rect">
             <a:avLst/>
@@ -9135,7 +10153,7 @@
                 <a:ea typeface="Aptos" pitchFamily="34" charset="-122"/>
                 <a:cs typeface="Aptos" pitchFamily="34" charset="-120"/>
               </a:rPr>
-              <a:t>Connect the concept to public health decisions, safeguards, documentation, or implementation work.</a:t>
+              <a:t>Use the assignment to test whether you can explain the concept, apply it to a realistic public health situation, and identify what would need review before the work moves forward.</a:t>
             </a:r>
             <a:endParaRPr lang="en-US" sz="1550" dirty="0"/>
           </a:p>
@@ -9309,8 +10327,8 @@
         </p:nvSpPr>
         <p:spPr>
           <a:xfrm>
-            <a:off x="9966960" y="6537960"/>
-            <a:ext cx="1645920" cy="201168"/>
+            <a:off x="9646920" y="6537960"/>
+            <a:ext cx="1965960" cy="201168"/>
           </a:xfrm>
           <a:prstGeom prst="rect">
             <a:avLst/>
@@ -9334,7 +10352,7 @@
                 <a:ea typeface="Aptos" pitchFamily="34" charset="-122"/>
                 <a:cs typeface="Aptos" pitchFamily="34" charset="-120"/>
               </a:rPr>
-              <a:t>Â© Paula Soper</a:t>
+              <a:t>Copyright Paula Soper</a:t>
             </a:r>
             <a:endParaRPr lang="en-US" sz="800" dirty="0"/>
           </a:p>
@@ -9697,46 +10715,7 @@
       </p:sp>
       <p:sp>
         <p:nvSpPr>
-          <p:cNvPr id="15" name="Text 13"/>
-          <p:cNvSpPr/>
-          <p:nvPr/>
-        </p:nvSpPr>
-        <p:spPr>
-          <a:xfrm>
-            <a:off x="8695944" y="3941064"/>
-            <a:ext cx="201168" cy="256032"/>
-          </a:xfrm>
-          <a:prstGeom prst="rect">
-            <a:avLst/>
-          </a:prstGeom>
-          <a:noFill/>
-          <a:ln/>
-        </p:spPr>
-        <p:txBody>
-          <a:bodyPr wrap="square" lIns="0" tIns="0" rIns="0" bIns="0" rtlCol="0" anchor="ctr"/>
-          <a:lstStyle/>
-          <a:p>
-            <a:pPr algn="ctr" indent="0" marL="0">
-              <a:buNone/>
-            </a:pPr>
-            <a:r>
-              <a:rPr lang="en-US" sz="1800" b="1" dirty="0">
-                <a:solidFill>
-                  <a:srgbClr val="0068B7"/>
-                </a:solidFill>
-                <a:latin typeface="Aptos" pitchFamily="34" charset="0"/>
-                <a:ea typeface="Aptos" pitchFamily="34" charset="-122"/>
-                <a:cs typeface="Aptos" pitchFamily="34" charset="-120"/>
-              </a:rPr>
-              <a:t>â†’</a:t>
-            </a:r>
-            <a:endParaRPr lang="en-US" sz="1800" dirty="0"/>
-          </a:p>
-        </p:txBody>
-      </p:sp>
-      <p:sp>
-        <p:nvSpPr>
-          <p:cNvPr id="16" name="Shape 14"/>
+          <p:cNvPr id="15" name="Shape 13"/>
           <p:cNvSpPr/>
           <p:nvPr/>
         </p:nvSpPr>
@@ -9763,7 +10742,7 @@
       </p:sp>
       <p:sp>
         <p:nvSpPr>
-          <p:cNvPr id="17" name="Text 15"/>
+          <p:cNvPr id="16" name="Text 14"/>
           <p:cNvSpPr/>
           <p:nvPr/>
         </p:nvSpPr>
@@ -9804,46 +10783,7 @@
       </p:sp>
       <p:sp>
         <p:nvSpPr>
-          <p:cNvPr id="18" name="Text 16"/>
-          <p:cNvSpPr/>
-          <p:nvPr/>
-        </p:nvSpPr>
-        <p:spPr>
-          <a:xfrm>
-            <a:off x="9985248" y="3941064"/>
-            <a:ext cx="201168" cy="256032"/>
-          </a:xfrm>
-          <a:prstGeom prst="rect">
-            <a:avLst/>
-          </a:prstGeom>
-          <a:noFill/>
-          <a:ln/>
-        </p:spPr>
-        <p:txBody>
-          <a:bodyPr wrap="square" lIns="0" tIns="0" rIns="0" bIns="0" rtlCol="0" anchor="ctr"/>
-          <a:lstStyle/>
-          <a:p>
-            <a:pPr algn="ctr" indent="0" marL="0">
-              <a:buNone/>
-            </a:pPr>
-            <a:r>
-              <a:rPr lang="en-US" sz="1800" b="1" dirty="0">
-                <a:solidFill>
-                  <a:srgbClr val="0068B7"/>
-                </a:solidFill>
-                <a:latin typeface="Aptos" pitchFamily="34" charset="0"/>
-                <a:ea typeface="Aptos" pitchFamily="34" charset="-122"/>
-                <a:cs typeface="Aptos" pitchFamily="34" charset="-120"/>
-              </a:rPr>
-              <a:t>â†’</a:t>
-            </a:r>
-            <a:endParaRPr lang="en-US" sz="1800" dirty="0"/>
-          </a:p>
-        </p:txBody>
-      </p:sp>
-      <p:sp>
-        <p:nvSpPr>
-          <p:cNvPr id="19" name="Shape 17"/>
+          <p:cNvPr id="17" name="Shape 15"/>
           <p:cNvSpPr/>
           <p:nvPr/>
         </p:nvSpPr>
@@ -9870,7 +10810,7 @@
       </p:sp>
       <p:sp>
         <p:nvSpPr>
-          <p:cNvPr id="20" name="Text 18"/>
+          <p:cNvPr id="18" name="Text 16"/>
           <p:cNvSpPr/>
           <p:nvPr/>
         </p:nvSpPr>
@@ -10077,8 +11017,8 @@
         </p:nvSpPr>
         <p:spPr>
           <a:xfrm>
-            <a:off x="9966960" y="6537960"/>
-            <a:ext cx="1645920" cy="201168"/>
+            <a:off x="9646920" y="6537960"/>
+            <a:ext cx="1965960" cy="201168"/>
           </a:xfrm>
           <a:prstGeom prst="rect">
             <a:avLst/>
@@ -10102,7 +11042,7 @@
                 <a:ea typeface="Aptos" pitchFamily="34" charset="-122"/>
                 <a:cs typeface="Aptos" pitchFamily="34" charset="-120"/>
               </a:rPr>
-              <a:t>Â© Paula Soper</a:t>
+              <a:t>Copyright Paula Soper</a:t>
             </a:r>
             <a:endParaRPr lang="en-US" sz="800" dirty="0"/>
           </a:p>
@@ -10149,77 +11089,13 @@
       </p:sp>
       <p:sp>
         <p:nvSpPr>
-          <p:cNvPr id="8" name="Shape 6"/>
+          <p:cNvPr id="8" name="Text 6"/>
           <p:cNvSpPr/>
           <p:nvPr/>
         </p:nvSpPr>
         <p:spPr>
           <a:xfrm>
             <a:off x="640080" y="658368"/>
-            <a:ext cx="420624" cy="420624"/>
-          </a:xfrm>
-          <a:prstGeom prst="ellipse">
-            <a:avLst/>
-          </a:prstGeom>
-          <a:solidFill>
-            <a:srgbClr val="0068B7"/>
-          </a:solidFill>
-          <a:ln w="12700">
-            <a:solidFill>
-              <a:srgbClr val="0068B7"/>
-            </a:solidFill>
-            <a:prstDash val="solid"/>
-          </a:ln>
-        </p:spPr>
-      </p:sp>
-      <p:sp>
-        <p:nvSpPr>
-          <p:cNvPr id="9" name="Text 7"/>
-          <p:cNvSpPr/>
-          <p:nvPr/>
-        </p:nvSpPr>
-        <p:spPr>
-          <a:xfrm>
-            <a:off x="640080" y="731520"/>
-            <a:ext cx="420624" cy="164592"/>
-          </a:xfrm>
-          <a:prstGeom prst="rect">
-            <a:avLst/>
-          </a:prstGeom>
-          <a:noFill/>
-          <a:ln/>
-        </p:spPr>
-        <p:txBody>
-          <a:bodyPr wrap="square" lIns="0" tIns="0" rIns="0" bIns="0" rtlCol="0" anchor="ctr"/>
-          <a:lstStyle/>
-          <a:p>
-            <a:pPr algn="ctr" indent="0" marL="0">
-              <a:buNone/>
-            </a:pPr>
-            <a:r>
-              <a:rPr lang="en-US" sz="1100" b="1" dirty="0">
-                <a:solidFill>
-                  <a:srgbClr val="FFFFFF"/>
-                </a:solidFill>
-                <a:latin typeface="Aptos" pitchFamily="34" charset="0"/>
-                <a:ea typeface="Aptos" pitchFamily="34" charset="-122"/>
-                <a:cs typeface="Aptos" pitchFamily="34" charset="-120"/>
-              </a:rPr>
-              <a:t>14</a:t>
-            </a:r>
-            <a:endParaRPr lang="en-US" sz="1100" dirty="0"/>
-          </a:p>
-        </p:txBody>
-      </p:sp>
-      <p:sp>
-        <p:nvSpPr>
-          <p:cNvPr id="10" name="Text 8"/>
-          <p:cNvSpPr/>
-          <p:nvPr/>
-        </p:nvSpPr>
-        <p:spPr>
-          <a:xfrm>
-            <a:off x="640080" y="621792"/>
             <a:ext cx="10881360" cy="713232"/>
           </a:xfrm>
           <a:prstGeom prst="rect">
@@ -10254,14 +11130,14 @@
       </p:sp>
       <p:sp>
         <p:nvSpPr>
-          <p:cNvPr id="11" name="Text 9"/>
+          <p:cNvPr id="9" name="Text 7"/>
           <p:cNvSpPr/>
           <p:nvPr/>
         </p:nvSpPr>
         <p:spPr>
           <a:xfrm>
             <a:off x="868680" y="1508760"/>
-            <a:ext cx="6537960" cy="4160520"/>
+            <a:ext cx="6309360" cy="4160520"/>
           </a:xfrm>
           <a:prstGeom prst="rect">
             <a:avLst/>
@@ -10320,18 +11196,18 @@
       </p:sp>
       <p:sp>
         <p:nvSpPr>
-          <p:cNvPr id="12" name="Shape 10"/>
-          <p:cNvSpPr/>
-          <p:nvPr/>
-        </p:nvSpPr>
-        <p:spPr>
-          <a:xfrm>
-            <a:off x="7909560" y="1417320"/>
-            <a:ext cx="3154680" cy="1828800"/>
+          <p:cNvPr id="10" name="Shape 8"/>
+          <p:cNvSpPr/>
+          <p:nvPr/>
+        </p:nvSpPr>
+        <p:spPr>
+          <a:xfrm>
+            <a:off x="7635240" y="1325880"/>
+            <a:ext cx="3474720" cy="1325880"/>
           </a:xfrm>
           <a:prstGeom prst="roundRect">
             <a:avLst>
-              <a:gd name="adj" fmla="val 6000"/>
+              <a:gd name="adj" fmla="val 8276"/>
             </a:avLst>
           </a:prstGeom>
           <a:solidFill>
@@ -10347,14 +11223,14 @@
       </p:sp>
       <p:sp>
         <p:nvSpPr>
-          <p:cNvPr id="13" name="Text 11"/>
-          <p:cNvSpPr/>
-          <p:nvPr/>
-        </p:nvSpPr>
-        <p:spPr>
-          <a:xfrm>
-            <a:off x="8074152" y="1563624"/>
-            <a:ext cx="2825496" cy="256032"/>
+          <p:cNvPr id="11" name="Text 9"/>
+          <p:cNvSpPr/>
+          <p:nvPr/>
+        </p:nvSpPr>
+        <p:spPr>
+          <a:xfrm>
+            <a:off x="7799832" y="1472184"/>
+            <a:ext cx="3145536" cy="256032"/>
           </a:xfrm>
           <a:prstGeom prst="rect">
             <a:avLst/>
@@ -10378,7 +11254,7 @@
                 <a:ea typeface="Aptos" pitchFamily="34" charset="-122"/>
                 <a:cs typeface="Aptos" pitchFamily="34" charset="-120"/>
               </a:rPr>
-              <a:t>Key idea</a:t>
+              <a:t>Practice focus</a:t>
             </a:r>
             <a:endParaRPr lang="en-US" sz="1300" dirty="0"/>
           </a:p>
@@ -10386,14 +11262,14 @@
       </p:sp>
       <p:sp>
         <p:nvSpPr>
-          <p:cNvPr id="14" name="Text 12"/>
-          <p:cNvSpPr/>
-          <p:nvPr/>
-        </p:nvSpPr>
-        <p:spPr>
-          <a:xfrm>
-            <a:off x="8074152" y="1920240"/>
-            <a:ext cx="2825496" cy="1188720"/>
+          <p:cNvPr id="12" name="Text 10"/>
+          <p:cNvSpPr/>
+          <p:nvPr/>
+        </p:nvSpPr>
+        <p:spPr>
+          <a:xfrm>
+            <a:off x="7799832" y="1828800"/>
+            <a:ext cx="3145536" cy="685800"/>
           </a:xfrm>
           <a:prstGeom prst="rect">
             <a:avLst/>
@@ -10427,18 +11303,159 @@
       </p:sp>
       <p:sp>
         <p:nvSpPr>
-          <p:cNvPr id="15" name="Shape 13"/>
-          <p:cNvSpPr/>
-          <p:nvPr/>
-        </p:nvSpPr>
-        <p:spPr>
-          <a:xfrm>
-            <a:off x="7909560" y="3520440"/>
-            <a:ext cx="3154680" cy="1737360"/>
+          <p:cNvPr id="13" name="Shape 11"/>
+          <p:cNvSpPr/>
+          <p:nvPr/>
+        </p:nvSpPr>
+        <p:spPr>
+          <a:xfrm>
+            <a:off x="7635240" y="2788920"/>
+            <a:ext cx="3474720" cy="1536192"/>
           </a:xfrm>
           <a:prstGeom prst="roundRect">
             <a:avLst>
-              <a:gd name="adj" fmla="val 6316"/>
+              <a:gd name="adj" fmla="val 7143"/>
+            </a:avLst>
+          </a:prstGeom>
+          <a:solidFill>
+            <a:srgbClr val="FFFFFF">
+              <a:alpha val="88000"/>
+            </a:srgbClr>
+          </a:solidFill>
+          <a:ln w="12700">
+            <a:solidFill>
+              <a:srgbClr val="D6E8F2"/>
+            </a:solidFill>
+            <a:prstDash val="solid"/>
+          </a:ln>
+        </p:spPr>
+      </p:sp>
+      <p:sp>
+        <p:nvSpPr>
+          <p:cNvPr id="14" name="Shape 12"/>
+          <p:cNvSpPr/>
+          <p:nvPr/>
+        </p:nvSpPr>
+        <p:spPr>
+          <a:xfrm>
+            <a:off x="8074152" y="3291840"/>
+            <a:ext cx="2596896" cy="749808"/>
+          </a:xfrm>
+          <a:prstGeom prst="rect">
+            <a:avLst/>
+          </a:prstGeom>
+          <a:solidFill>
+            <a:srgbClr val="EAF6F8"/>
+          </a:solidFill>
+          <a:ln w="12700">
+            <a:solidFill>
+              <a:srgbClr val="8ABBD8"/>
+            </a:solidFill>
+            <a:prstDash val="solid"/>
+          </a:ln>
+        </p:spPr>
+      </p:sp>
+      <p:sp>
+        <p:nvSpPr>
+          <p:cNvPr id="15" name="Shape 13"/>
+          <p:cNvSpPr/>
+          <p:nvPr/>
+        </p:nvSpPr>
+        <p:spPr>
+          <a:xfrm>
+            <a:off x="8202168" y="3721608"/>
+            <a:ext cx="2340864" cy="0"/>
+          </a:xfrm>
+          <a:prstGeom prst="line">
+            <a:avLst/>
+          </a:prstGeom>
+          <a:noFill/>
+          <a:ln w="19050">
+            <a:solidFill>
+              <a:srgbClr val="0068B7"/>
+            </a:solidFill>
+            <a:prstDash val="solid"/>
+          </a:ln>
+        </p:spPr>
+      </p:sp>
+      <p:sp>
+        <p:nvSpPr>
+          <p:cNvPr id="16" name="Shape 14"/>
+          <p:cNvSpPr/>
+          <p:nvPr/>
+        </p:nvSpPr>
+        <p:spPr>
+          <a:xfrm>
+            <a:off x="9198864" y="4206240"/>
+            <a:ext cx="347472" cy="347472"/>
+          </a:xfrm>
+          <a:prstGeom prst="ellipse">
+            <a:avLst/>
+          </a:prstGeom>
+          <a:solidFill>
+            <a:srgbClr val="2F8A28"/>
+          </a:solidFill>
+          <a:ln w="12700">
+            <a:solidFill>
+              <a:srgbClr val="2F8A28"/>
+            </a:solidFill>
+            <a:prstDash val="solid"/>
+          </a:ln>
+        </p:spPr>
+      </p:sp>
+      <p:sp>
+        <p:nvSpPr>
+          <p:cNvPr id="17" name="Text 15"/>
+          <p:cNvSpPr/>
+          <p:nvPr/>
+        </p:nvSpPr>
+        <p:spPr>
+          <a:xfrm>
+            <a:off x="7909560" y="3977640"/>
+            <a:ext cx="2926080" cy="182880"/>
+          </a:xfrm>
+          <a:prstGeom prst="rect">
+            <a:avLst/>
+          </a:prstGeom>
+          <a:noFill/>
+          <a:ln/>
+        </p:spPr>
+        <p:txBody>
+          <a:bodyPr wrap="square" lIns="0" tIns="0" rIns="0" bIns="0" rtlCol="0" anchor="ctr"/>
+          <a:lstStyle/>
+          <a:p>
+            <a:pPr algn="ctr" indent="0" marL="0">
+              <a:buNone/>
+            </a:pPr>
+            <a:r>
+              <a:rPr lang="en-US" sz="1000" dirty="0">
+                <a:solidFill>
+                  <a:srgbClr val="003A63"/>
+                </a:solidFill>
+                <a:latin typeface="Aptos" pitchFamily="34" charset="0"/>
+                <a:ea typeface="Aptos" pitchFamily="34" charset="-122"/>
+                <a:cs typeface="Aptos" pitchFamily="34" charset="-120"/>
+              </a:rPr>
+              <a:t>Concept to action</a:t>
+            </a:r>
+            <a:endParaRPr lang="en-US" sz="1000" dirty="0"/>
+          </a:p>
+        </p:txBody>
+      </p:sp>
+      <p:sp>
+        <p:nvSpPr>
+          <p:cNvPr id="18" name="Shape 16"/>
+          <p:cNvSpPr/>
+          <p:nvPr/>
+        </p:nvSpPr>
+        <p:spPr>
+          <a:xfrm>
+            <a:off x="7635240" y="4498848"/>
+            <a:ext cx="3474720" cy="1143000"/>
+          </a:xfrm>
+          <a:prstGeom prst="roundRect">
+            <a:avLst>
+              <a:gd name="adj" fmla="val 9600"/>
             </a:avLst>
           </a:prstGeom>
           <a:solidFill>
@@ -10454,14 +11471,14 @@
       </p:sp>
       <p:sp>
         <p:nvSpPr>
-          <p:cNvPr id="16" name="Text 14"/>
-          <p:cNvSpPr/>
-          <p:nvPr/>
-        </p:nvSpPr>
-        <p:spPr>
-          <a:xfrm>
-            <a:off x="8074152" y="3666744"/>
-            <a:ext cx="2825496" cy="256032"/>
+          <p:cNvPr id="19" name="Text 17"/>
+          <p:cNvSpPr/>
+          <p:nvPr/>
+        </p:nvSpPr>
+        <p:spPr>
+          <a:xfrm>
+            <a:off x="7799832" y="4645152"/>
+            <a:ext cx="3145536" cy="256032"/>
           </a:xfrm>
           <a:prstGeom prst="rect">
             <a:avLst/>
@@ -10485,7 +11502,7 @@
                 <a:ea typeface="Aptos" pitchFamily="34" charset="-122"/>
                 <a:cs typeface="Aptos" pitchFamily="34" charset="-120"/>
               </a:rPr>
-              <a:t>Use this for</a:t>
+              <a:t>What to produce</a:t>
             </a:r>
             <a:endParaRPr lang="en-US" sz="1300" dirty="0"/>
           </a:p>
@@ -10493,14 +11510,14 @@
       </p:sp>
       <p:sp>
         <p:nvSpPr>
-          <p:cNvPr id="17" name="Text 15"/>
-          <p:cNvSpPr/>
-          <p:nvPr/>
-        </p:nvSpPr>
-        <p:spPr>
-          <a:xfrm>
-            <a:off x="8074152" y="4023360"/>
-            <a:ext cx="2825496" cy="1097280"/>
+          <p:cNvPr id="20" name="Text 18"/>
+          <p:cNvSpPr/>
+          <p:nvPr/>
+        </p:nvSpPr>
+        <p:spPr>
+          <a:xfrm>
+            <a:off x="7799832" y="5001768"/>
+            <a:ext cx="3145536" cy="502920"/>
           </a:xfrm>
           <a:prstGeom prst="rect">
             <a:avLst/>
@@ -10526,7 +11543,7 @@
                 <a:ea typeface="Aptos" pitchFamily="34" charset="-122"/>
                 <a:cs typeface="Aptos" pitchFamily="34" charset="-120"/>
               </a:rPr>
-              <a:t>Connect the concept to public health decisions, safeguards, documentation, or implementation work.</a:t>
+              <a:t>Use the assignment to test whether you can explain the concept, apply it to a realistic public health situation, and identify what would need review before the work moves forward.</a:t>
             </a:r>
             <a:endParaRPr lang="en-US" sz="1550" dirty="0"/>
           </a:p>
@@ -10700,8 +11717,8 @@
         </p:nvSpPr>
         <p:spPr>
           <a:xfrm>
-            <a:off x="9966960" y="6537960"/>
-            <a:ext cx="1645920" cy="201168"/>
+            <a:off x="9646920" y="6537960"/>
+            <a:ext cx="1965960" cy="201168"/>
           </a:xfrm>
           <a:prstGeom prst="rect">
             <a:avLst/>
@@ -10725,7 +11742,7 @@
                 <a:ea typeface="Aptos" pitchFamily="34" charset="-122"/>
                 <a:cs typeface="Aptos" pitchFamily="34" charset="-120"/>
               </a:rPr>
-              <a:t>Â© Paula Soper</a:t>
+              <a:t>Copyright Paula Soper</a:t>
             </a:r>
             <a:endParaRPr lang="en-US" sz="800" dirty="0"/>
           </a:p>
@@ -10772,77 +11789,13 @@
       </p:sp>
       <p:sp>
         <p:nvSpPr>
-          <p:cNvPr id="8" name="Shape 6"/>
+          <p:cNvPr id="8" name="Text 6"/>
           <p:cNvSpPr/>
           <p:nvPr/>
         </p:nvSpPr>
         <p:spPr>
           <a:xfrm>
             <a:off x="640080" y="658368"/>
-            <a:ext cx="420624" cy="420624"/>
-          </a:xfrm>
-          <a:prstGeom prst="ellipse">
-            <a:avLst/>
-          </a:prstGeom>
-          <a:solidFill>
-            <a:srgbClr val="0068B7"/>
-          </a:solidFill>
-          <a:ln w="12700">
-            <a:solidFill>
-              <a:srgbClr val="0068B7"/>
-            </a:solidFill>
-            <a:prstDash val="solid"/>
-          </a:ln>
-        </p:spPr>
-      </p:sp>
-      <p:sp>
-        <p:nvSpPr>
-          <p:cNvPr id="9" name="Text 7"/>
-          <p:cNvSpPr/>
-          <p:nvPr/>
-        </p:nvSpPr>
-        <p:spPr>
-          <a:xfrm>
-            <a:off x="640080" y="731520"/>
-            <a:ext cx="420624" cy="164592"/>
-          </a:xfrm>
-          <a:prstGeom prst="rect">
-            <a:avLst/>
-          </a:prstGeom>
-          <a:noFill/>
-          <a:ln/>
-        </p:spPr>
-        <p:txBody>
-          <a:bodyPr wrap="square" lIns="0" tIns="0" rIns="0" bIns="0" rtlCol="0" anchor="ctr"/>
-          <a:lstStyle/>
-          <a:p>
-            <a:pPr algn="ctr" indent="0" marL="0">
-              <a:buNone/>
-            </a:pPr>
-            <a:r>
-              <a:rPr lang="en-US" sz="1100" b="1" dirty="0">
-                <a:solidFill>
-                  <a:srgbClr val="FFFFFF"/>
-                </a:solidFill>
-                <a:latin typeface="Aptos" pitchFamily="34" charset="0"/>
-                <a:ea typeface="Aptos" pitchFamily="34" charset="-122"/>
-                <a:cs typeface="Aptos" pitchFamily="34" charset="-120"/>
-              </a:rPr>
-              <a:t>15</a:t>
-            </a:r>
-            <a:endParaRPr lang="en-US" sz="1100" dirty="0"/>
-          </a:p>
-        </p:txBody>
-      </p:sp>
-      <p:sp>
-        <p:nvSpPr>
-          <p:cNvPr id="10" name="Text 8"/>
-          <p:cNvSpPr/>
-          <p:nvPr/>
-        </p:nvSpPr>
-        <p:spPr>
-          <a:xfrm>
-            <a:off x="640080" y="621792"/>
             <a:ext cx="10881360" cy="713232"/>
           </a:xfrm>
           <a:prstGeom prst="rect">
@@ -10877,14 +11830,14 @@
       </p:sp>
       <p:sp>
         <p:nvSpPr>
-          <p:cNvPr id="11" name="Text 9"/>
+          <p:cNvPr id="9" name="Text 7"/>
           <p:cNvSpPr/>
           <p:nvPr/>
         </p:nvSpPr>
         <p:spPr>
           <a:xfrm>
             <a:off x="868680" y="1508760"/>
-            <a:ext cx="6537960" cy="4160520"/>
+            <a:ext cx="6309360" cy="4160520"/>
           </a:xfrm>
           <a:prstGeom prst="rect">
             <a:avLst/>
@@ -10943,18 +11896,18 @@
       </p:sp>
       <p:sp>
         <p:nvSpPr>
-          <p:cNvPr id="12" name="Shape 10"/>
-          <p:cNvSpPr/>
-          <p:nvPr/>
-        </p:nvSpPr>
-        <p:spPr>
-          <a:xfrm>
-            <a:off x="7909560" y="1417320"/>
-            <a:ext cx="3154680" cy="1828800"/>
+          <p:cNvPr id="10" name="Shape 8"/>
+          <p:cNvSpPr/>
+          <p:nvPr/>
+        </p:nvSpPr>
+        <p:spPr>
+          <a:xfrm>
+            <a:off x="7635240" y="1325880"/>
+            <a:ext cx="3474720" cy="1325880"/>
           </a:xfrm>
           <a:prstGeom prst="roundRect">
             <a:avLst>
-              <a:gd name="adj" fmla="val 6000"/>
+              <a:gd name="adj" fmla="val 8276"/>
             </a:avLst>
           </a:prstGeom>
           <a:solidFill>
@@ -10970,14 +11923,14 @@
       </p:sp>
       <p:sp>
         <p:nvSpPr>
-          <p:cNvPr id="13" name="Text 11"/>
-          <p:cNvSpPr/>
-          <p:nvPr/>
-        </p:nvSpPr>
-        <p:spPr>
-          <a:xfrm>
-            <a:off x="8074152" y="1563624"/>
-            <a:ext cx="2825496" cy="256032"/>
+          <p:cNvPr id="11" name="Text 9"/>
+          <p:cNvSpPr/>
+          <p:nvPr/>
+        </p:nvSpPr>
+        <p:spPr>
+          <a:xfrm>
+            <a:off x="7799832" y="1472184"/>
+            <a:ext cx="3145536" cy="256032"/>
           </a:xfrm>
           <a:prstGeom prst="rect">
             <a:avLst/>
@@ -11001,7 +11954,7 @@
                 <a:ea typeface="Aptos" pitchFamily="34" charset="-122"/>
                 <a:cs typeface="Aptos" pitchFamily="34" charset="-120"/>
               </a:rPr>
-              <a:t>Key idea</a:t>
+              <a:t>Core concept</a:t>
             </a:r>
             <a:endParaRPr lang="en-US" sz="1300" dirty="0"/>
           </a:p>
@@ -11009,14 +11962,14 @@
       </p:sp>
       <p:sp>
         <p:nvSpPr>
-          <p:cNvPr id="14" name="Text 12"/>
-          <p:cNvSpPr/>
-          <p:nvPr/>
-        </p:nvSpPr>
-        <p:spPr>
-          <a:xfrm>
-            <a:off x="8074152" y="1920240"/>
-            <a:ext cx="2825496" cy="1188720"/>
+          <p:cNvPr id="12" name="Text 10"/>
+          <p:cNvSpPr/>
+          <p:nvPr/>
+        </p:nvSpPr>
+        <p:spPr>
+          <a:xfrm>
+            <a:off x="7799832" y="1828800"/>
+            <a:ext cx="3145536" cy="685800"/>
           </a:xfrm>
           <a:prstGeom prst="rect">
             <a:avLst/>
@@ -11050,18 +12003,159 @@
       </p:sp>
       <p:sp>
         <p:nvSpPr>
-          <p:cNvPr id="15" name="Shape 13"/>
-          <p:cNvSpPr/>
-          <p:nvPr/>
-        </p:nvSpPr>
-        <p:spPr>
-          <a:xfrm>
-            <a:off x="7909560" y="3520440"/>
-            <a:ext cx="3154680" cy="1737360"/>
+          <p:cNvPr id="13" name="Shape 11"/>
+          <p:cNvSpPr/>
+          <p:nvPr/>
+        </p:nvSpPr>
+        <p:spPr>
+          <a:xfrm>
+            <a:off x="7635240" y="2788920"/>
+            <a:ext cx="3474720" cy="1536192"/>
           </a:xfrm>
           <a:prstGeom prst="roundRect">
             <a:avLst>
-              <a:gd name="adj" fmla="val 6316"/>
+              <a:gd name="adj" fmla="val 7143"/>
+            </a:avLst>
+          </a:prstGeom>
+          <a:solidFill>
+            <a:srgbClr val="FFFFFF">
+              <a:alpha val="88000"/>
+            </a:srgbClr>
+          </a:solidFill>
+          <a:ln w="12700">
+            <a:solidFill>
+              <a:srgbClr val="D6E8F2"/>
+            </a:solidFill>
+            <a:prstDash val="solid"/>
+          </a:ln>
+        </p:spPr>
+      </p:sp>
+      <p:sp>
+        <p:nvSpPr>
+          <p:cNvPr id="14" name="Shape 12"/>
+          <p:cNvSpPr/>
+          <p:nvPr/>
+        </p:nvSpPr>
+        <p:spPr>
+          <a:xfrm>
+            <a:off x="8074152" y="3291840"/>
+            <a:ext cx="2596896" cy="749808"/>
+          </a:xfrm>
+          <a:prstGeom prst="rect">
+            <a:avLst/>
+          </a:prstGeom>
+          <a:solidFill>
+            <a:srgbClr val="EAF6F8"/>
+          </a:solidFill>
+          <a:ln w="12700">
+            <a:solidFill>
+              <a:srgbClr val="8ABBD8"/>
+            </a:solidFill>
+            <a:prstDash val="solid"/>
+          </a:ln>
+        </p:spPr>
+      </p:sp>
+      <p:sp>
+        <p:nvSpPr>
+          <p:cNvPr id="15" name="Shape 13"/>
+          <p:cNvSpPr/>
+          <p:nvPr/>
+        </p:nvSpPr>
+        <p:spPr>
+          <a:xfrm>
+            <a:off x="8202168" y="3721608"/>
+            <a:ext cx="2340864" cy="0"/>
+          </a:xfrm>
+          <a:prstGeom prst="line">
+            <a:avLst/>
+          </a:prstGeom>
+          <a:noFill/>
+          <a:ln w="19050">
+            <a:solidFill>
+              <a:srgbClr val="0068B7"/>
+            </a:solidFill>
+            <a:prstDash val="solid"/>
+          </a:ln>
+        </p:spPr>
+      </p:sp>
+      <p:sp>
+        <p:nvSpPr>
+          <p:cNvPr id="16" name="Shape 14"/>
+          <p:cNvSpPr/>
+          <p:nvPr/>
+        </p:nvSpPr>
+        <p:spPr>
+          <a:xfrm>
+            <a:off x="9198864" y="4206240"/>
+            <a:ext cx="347472" cy="347472"/>
+          </a:xfrm>
+          <a:prstGeom prst="ellipse">
+            <a:avLst/>
+          </a:prstGeom>
+          <a:solidFill>
+            <a:srgbClr val="2F8A28"/>
+          </a:solidFill>
+          <a:ln w="12700">
+            <a:solidFill>
+              <a:srgbClr val="2F8A28"/>
+            </a:solidFill>
+            <a:prstDash val="solid"/>
+          </a:ln>
+        </p:spPr>
+      </p:sp>
+      <p:sp>
+        <p:nvSpPr>
+          <p:cNvPr id="17" name="Text 15"/>
+          <p:cNvSpPr/>
+          <p:nvPr/>
+        </p:nvSpPr>
+        <p:spPr>
+          <a:xfrm>
+            <a:off x="7909560" y="3977640"/>
+            <a:ext cx="2926080" cy="182880"/>
+          </a:xfrm>
+          <a:prstGeom prst="rect">
+            <a:avLst/>
+          </a:prstGeom>
+          <a:noFill/>
+          <a:ln/>
+        </p:spPr>
+        <p:txBody>
+          <a:bodyPr wrap="square" lIns="0" tIns="0" rIns="0" bIns="0" rtlCol="0" anchor="ctr"/>
+          <a:lstStyle/>
+          <a:p>
+            <a:pPr algn="ctr" indent="0" marL="0">
+              <a:buNone/>
+            </a:pPr>
+            <a:r>
+              <a:rPr lang="en-US" sz="1000" dirty="0">
+                <a:solidFill>
+                  <a:srgbClr val="003A63"/>
+                </a:solidFill>
+                <a:latin typeface="Aptos" pitchFamily="34" charset="0"/>
+                <a:ea typeface="Aptos" pitchFamily="34" charset="-122"/>
+                <a:cs typeface="Aptos" pitchFamily="34" charset="-120"/>
+              </a:rPr>
+              <a:t>Concept to action</a:t>
+            </a:r>
+            <a:endParaRPr lang="en-US" sz="1000" dirty="0"/>
+          </a:p>
+        </p:txBody>
+      </p:sp>
+      <p:sp>
+        <p:nvSpPr>
+          <p:cNvPr id="18" name="Shape 16"/>
+          <p:cNvSpPr/>
+          <p:nvPr/>
+        </p:nvSpPr>
+        <p:spPr>
+          <a:xfrm>
+            <a:off x="7635240" y="4498848"/>
+            <a:ext cx="3474720" cy="1143000"/>
+          </a:xfrm>
+          <a:prstGeom prst="roundRect">
+            <a:avLst>
+              <a:gd name="adj" fmla="val 9600"/>
             </a:avLst>
           </a:prstGeom>
           <a:solidFill>
@@ -11077,14 +12171,14 @@
       </p:sp>
       <p:sp>
         <p:nvSpPr>
-          <p:cNvPr id="16" name="Text 14"/>
-          <p:cNvSpPr/>
-          <p:nvPr/>
-        </p:nvSpPr>
-        <p:spPr>
-          <a:xfrm>
-            <a:off x="8074152" y="3666744"/>
-            <a:ext cx="2825496" cy="256032"/>
+          <p:cNvPr id="19" name="Text 17"/>
+          <p:cNvSpPr/>
+          <p:nvPr/>
+        </p:nvSpPr>
+        <p:spPr>
+          <a:xfrm>
+            <a:off x="7799832" y="4645152"/>
+            <a:ext cx="3145536" cy="256032"/>
           </a:xfrm>
           <a:prstGeom prst="rect">
             <a:avLst/>
@@ -11108,7 +12202,7 @@
                 <a:ea typeface="Aptos" pitchFamily="34" charset="-122"/>
                 <a:cs typeface="Aptos" pitchFamily="34" charset="-120"/>
               </a:rPr>
-              <a:t>Use this for</a:t>
+              <a:t>Apply it</a:t>
             </a:r>
             <a:endParaRPr lang="en-US" sz="1300" dirty="0"/>
           </a:p>
@@ -11116,14 +12210,14 @@
       </p:sp>
       <p:sp>
         <p:nvSpPr>
-          <p:cNvPr id="17" name="Text 15"/>
-          <p:cNvSpPr/>
-          <p:nvPr/>
-        </p:nvSpPr>
-        <p:spPr>
-          <a:xfrm>
-            <a:off x="8074152" y="4023360"/>
-            <a:ext cx="2825496" cy="1097280"/>
+          <p:cNvPr id="20" name="Text 18"/>
+          <p:cNvSpPr/>
+          <p:nvPr/>
+        </p:nvSpPr>
+        <p:spPr>
+          <a:xfrm>
+            <a:off x="7799832" y="5001768"/>
+            <a:ext cx="3145536" cy="502920"/>
           </a:xfrm>
           <a:prstGeom prst="rect">
             <a:avLst/>
@@ -11149,7 +12243,7 @@
                 <a:ea typeface="Aptos" pitchFamily="34" charset="-122"/>
                 <a:cs typeface="Aptos" pitchFamily="34" charset="-120"/>
               </a:rPr>
-              <a:t>Connect the concept to public health decisions, safeguards, documentation, or implementation work.</a:t>
+              <a:t>Connect the concept to public health purpose, responsible use, required safeguards, documentation, and the next action a department should take.</a:t>
             </a:r>
             <a:endParaRPr lang="en-US" sz="1550" dirty="0"/>
           </a:p>
@@ -11323,8 +12417,8 @@
         </p:nvSpPr>
         <p:spPr>
           <a:xfrm>
-            <a:off x="9966960" y="6537960"/>
-            <a:ext cx="1645920" cy="201168"/>
+            <a:off x="9646920" y="6537960"/>
+            <a:ext cx="1965960" cy="201168"/>
           </a:xfrm>
           <a:prstGeom prst="rect">
             <a:avLst/>
@@ -11348,7 +12442,7 @@
                 <a:ea typeface="Aptos" pitchFamily="34" charset="-122"/>
                 <a:cs typeface="Aptos" pitchFamily="34" charset="-120"/>
               </a:rPr>
-              <a:t>Â© Paula Soper</a:t>
+              <a:t>Copyright Paula Soper</a:t>
             </a:r>
             <a:endParaRPr lang="en-US" sz="800" dirty="0"/>
           </a:p>
@@ -11443,7 +12537,7 @@
         <p:spPr>
           <a:xfrm>
             <a:off x="868680" y="1508760"/>
-            <a:ext cx="6537960" cy="4160520"/>
+            <a:ext cx="6309360" cy="4160520"/>
           </a:xfrm>
           <a:prstGeom prst="rect">
             <a:avLst/>
@@ -11480,12 +12574,12 @@
         </p:nvSpPr>
         <p:spPr>
           <a:xfrm>
-            <a:off x="7909560" y="1417320"/>
-            <a:ext cx="3154680" cy="1828800"/>
+            <a:off x="7635240" y="1325880"/>
+            <a:ext cx="3474720" cy="1325880"/>
           </a:xfrm>
           <a:prstGeom prst="roundRect">
             <a:avLst>
-              <a:gd name="adj" fmla="val 6000"/>
+              <a:gd name="adj" fmla="val 8276"/>
             </a:avLst>
           </a:prstGeom>
           <a:solidFill>
@@ -11507,8 +12601,8 @@
         </p:nvSpPr>
         <p:spPr>
           <a:xfrm>
-            <a:off x="8074152" y="1563624"/>
-            <a:ext cx="2825496" cy="256032"/>
+            <a:off x="7799832" y="1472184"/>
+            <a:ext cx="3145536" cy="256032"/>
           </a:xfrm>
           <a:prstGeom prst="rect">
             <a:avLst/>
@@ -11532,7 +12626,7 @@
                 <a:ea typeface="Aptos" pitchFamily="34" charset="-122"/>
                 <a:cs typeface="Aptos" pitchFamily="34" charset="-120"/>
               </a:rPr>
-              <a:t>Key idea</a:t>
+              <a:t>Core concept</a:t>
             </a:r>
             <a:endParaRPr lang="en-US" sz="1300" dirty="0"/>
           </a:p>
@@ -11546,8 +12640,8 @@
         </p:nvSpPr>
         <p:spPr>
           <a:xfrm>
-            <a:off x="8074152" y="1920240"/>
-            <a:ext cx="2825496" cy="1188720"/>
+            <a:off x="7799832" y="1828800"/>
+            <a:ext cx="3145536" cy="685800"/>
           </a:xfrm>
           <a:prstGeom prst="rect">
             <a:avLst/>
@@ -11587,12 +12681,153 @@
         </p:nvSpPr>
         <p:spPr>
           <a:xfrm>
-            <a:off x="7909560" y="3520440"/>
-            <a:ext cx="3154680" cy="1737360"/>
+            <a:off x="7635240" y="2788920"/>
+            <a:ext cx="3474720" cy="1536192"/>
           </a:xfrm>
           <a:prstGeom prst="roundRect">
             <a:avLst>
-              <a:gd name="adj" fmla="val 6316"/>
+              <a:gd name="adj" fmla="val 7143"/>
+            </a:avLst>
+          </a:prstGeom>
+          <a:solidFill>
+            <a:srgbClr val="FFFFFF">
+              <a:alpha val="88000"/>
+            </a:srgbClr>
+          </a:solidFill>
+          <a:ln w="12700">
+            <a:solidFill>
+              <a:srgbClr val="D6E8F2"/>
+            </a:solidFill>
+            <a:prstDash val="solid"/>
+          </a:ln>
+        </p:spPr>
+      </p:sp>
+      <p:sp>
+        <p:nvSpPr>
+          <p:cNvPr id="14" name="Shape 12"/>
+          <p:cNvSpPr/>
+          <p:nvPr/>
+        </p:nvSpPr>
+        <p:spPr>
+          <a:xfrm>
+            <a:off x="8074152" y="3291840"/>
+            <a:ext cx="2596896" cy="749808"/>
+          </a:xfrm>
+          <a:prstGeom prst="rect">
+            <a:avLst/>
+          </a:prstGeom>
+          <a:solidFill>
+            <a:srgbClr val="EAF6F8"/>
+          </a:solidFill>
+          <a:ln w="12700">
+            <a:solidFill>
+              <a:srgbClr val="8ABBD8"/>
+            </a:solidFill>
+            <a:prstDash val="solid"/>
+          </a:ln>
+        </p:spPr>
+      </p:sp>
+      <p:sp>
+        <p:nvSpPr>
+          <p:cNvPr id="15" name="Shape 13"/>
+          <p:cNvSpPr/>
+          <p:nvPr/>
+        </p:nvSpPr>
+        <p:spPr>
+          <a:xfrm>
+            <a:off x="8202168" y="3721608"/>
+            <a:ext cx="2340864" cy="0"/>
+          </a:xfrm>
+          <a:prstGeom prst="line">
+            <a:avLst/>
+          </a:prstGeom>
+          <a:noFill/>
+          <a:ln w="19050">
+            <a:solidFill>
+              <a:srgbClr val="0068B7"/>
+            </a:solidFill>
+            <a:prstDash val="solid"/>
+          </a:ln>
+        </p:spPr>
+      </p:sp>
+      <p:sp>
+        <p:nvSpPr>
+          <p:cNvPr id="16" name="Shape 14"/>
+          <p:cNvSpPr/>
+          <p:nvPr/>
+        </p:nvSpPr>
+        <p:spPr>
+          <a:xfrm>
+            <a:off x="9198864" y="4206240"/>
+            <a:ext cx="347472" cy="347472"/>
+          </a:xfrm>
+          <a:prstGeom prst="ellipse">
+            <a:avLst/>
+          </a:prstGeom>
+          <a:solidFill>
+            <a:srgbClr val="2F8A28"/>
+          </a:solidFill>
+          <a:ln w="12700">
+            <a:solidFill>
+              <a:srgbClr val="2F8A28"/>
+            </a:solidFill>
+            <a:prstDash val="solid"/>
+          </a:ln>
+        </p:spPr>
+      </p:sp>
+      <p:sp>
+        <p:nvSpPr>
+          <p:cNvPr id="17" name="Text 15"/>
+          <p:cNvSpPr/>
+          <p:nvPr/>
+        </p:nvSpPr>
+        <p:spPr>
+          <a:xfrm>
+            <a:off x="7909560" y="3977640"/>
+            <a:ext cx="2926080" cy="182880"/>
+          </a:xfrm>
+          <a:prstGeom prst="rect">
+            <a:avLst/>
+          </a:prstGeom>
+          <a:noFill/>
+          <a:ln/>
+        </p:spPr>
+        <p:txBody>
+          <a:bodyPr wrap="square" lIns="0" tIns="0" rIns="0" bIns="0" rtlCol="0" anchor="ctr"/>
+          <a:lstStyle/>
+          <a:p>
+            <a:pPr algn="ctr" indent="0" marL="0">
+              <a:buNone/>
+            </a:pPr>
+            <a:r>
+              <a:rPr lang="en-US" sz="1000" dirty="0">
+                <a:solidFill>
+                  <a:srgbClr val="003A63"/>
+                </a:solidFill>
+                <a:latin typeface="Aptos" pitchFamily="34" charset="0"/>
+                <a:ea typeface="Aptos" pitchFamily="34" charset="-122"/>
+                <a:cs typeface="Aptos" pitchFamily="34" charset="-120"/>
+              </a:rPr>
+              <a:t>Concept to action</a:t>
+            </a:r>
+            <a:endParaRPr lang="en-US" sz="1000" dirty="0"/>
+          </a:p>
+        </p:txBody>
+      </p:sp>
+      <p:sp>
+        <p:nvSpPr>
+          <p:cNvPr id="18" name="Shape 16"/>
+          <p:cNvSpPr/>
+          <p:nvPr/>
+        </p:nvSpPr>
+        <p:spPr>
+          <a:xfrm>
+            <a:off x="7635240" y="4498848"/>
+            <a:ext cx="3474720" cy="1143000"/>
+          </a:xfrm>
+          <a:prstGeom prst="roundRect">
+            <a:avLst>
+              <a:gd name="adj" fmla="val 9600"/>
             </a:avLst>
           </a:prstGeom>
           <a:solidFill>
@@ -11608,14 +12843,14 @@
       </p:sp>
       <p:sp>
         <p:nvSpPr>
-          <p:cNvPr id="14" name="Text 12"/>
-          <p:cNvSpPr/>
-          <p:nvPr/>
-        </p:nvSpPr>
-        <p:spPr>
-          <a:xfrm>
-            <a:off x="8074152" y="3666744"/>
-            <a:ext cx="2825496" cy="256032"/>
+          <p:cNvPr id="19" name="Text 17"/>
+          <p:cNvSpPr/>
+          <p:nvPr/>
+        </p:nvSpPr>
+        <p:spPr>
+          <a:xfrm>
+            <a:off x="7799832" y="4645152"/>
+            <a:ext cx="3145536" cy="256032"/>
           </a:xfrm>
           <a:prstGeom prst="rect">
             <a:avLst/>
@@ -11639,7 +12874,7 @@
                 <a:ea typeface="Aptos" pitchFamily="34" charset="-122"/>
                 <a:cs typeface="Aptos" pitchFamily="34" charset="-120"/>
               </a:rPr>
-              <a:t>Use this for</a:t>
+              <a:t>Apply it</a:t>
             </a:r>
             <a:endParaRPr lang="en-US" sz="1300" dirty="0"/>
           </a:p>
@@ -11647,14 +12882,14 @@
       </p:sp>
       <p:sp>
         <p:nvSpPr>
-          <p:cNvPr id="15" name="Text 13"/>
-          <p:cNvSpPr/>
-          <p:nvPr/>
-        </p:nvSpPr>
-        <p:spPr>
-          <a:xfrm>
-            <a:off x="8074152" y="4023360"/>
-            <a:ext cx="2825496" cy="1097280"/>
+          <p:cNvPr id="20" name="Text 18"/>
+          <p:cNvSpPr/>
+          <p:nvPr/>
+        </p:nvSpPr>
+        <p:spPr>
+          <a:xfrm>
+            <a:off x="7799832" y="5001768"/>
+            <a:ext cx="3145536" cy="502920"/>
           </a:xfrm>
           <a:prstGeom prst="rect">
             <a:avLst/>
@@ -11680,7 +12915,7 @@
                 <a:ea typeface="Aptos" pitchFamily="34" charset="-122"/>
                 <a:cs typeface="Aptos" pitchFamily="34" charset="-120"/>
               </a:rPr>
-              <a:t>Connect the concept to public health decisions, safeguards, documentation, or implementation work.</a:t>
+              <a:t>Connect the concept to public health purpose, responsible use, required safeguards, documentation, and the next action a department should take.</a:t>
             </a:r>
             <a:endParaRPr lang="en-US" sz="1550" dirty="0"/>
           </a:p>
@@ -11854,8 +13089,8 @@
         </p:nvSpPr>
         <p:spPr>
           <a:xfrm>
-            <a:off x="9966960" y="6537960"/>
-            <a:ext cx="1645920" cy="201168"/>
+            <a:off x="9646920" y="6537960"/>
+            <a:ext cx="1965960" cy="201168"/>
           </a:xfrm>
           <a:prstGeom prst="rect">
             <a:avLst/>
@@ -11879,7 +13114,7 @@
                 <a:ea typeface="Aptos" pitchFamily="34" charset="-122"/>
                 <a:cs typeface="Aptos" pitchFamily="34" charset="-120"/>
               </a:rPr>
-              <a:t>Â© Paula Soper</a:t>
+              <a:t>Copyright Paula Soper</a:t>
             </a:r>
             <a:endParaRPr lang="en-US" sz="800" dirty="0"/>
           </a:p>
@@ -12222,46 +13457,7 @@
       </p:sp>
       <p:sp>
         <p:nvSpPr>
-          <p:cNvPr id="15" name="Text 13"/>
-          <p:cNvSpPr/>
-          <p:nvPr/>
-        </p:nvSpPr>
-        <p:spPr>
-          <a:xfrm>
-            <a:off x="8817864" y="4187952"/>
-            <a:ext cx="201168" cy="256032"/>
-          </a:xfrm>
-          <a:prstGeom prst="rect">
-            <a:avLst/>
-          </a:prstGeom>
-          <a:noFill/>
-          <a:ln/>
-        </p:spPr>
-        <p:txBody>
-          <a:bodyPr wrap="square" lIns="0" tIns="0" rIns="0" bIns="0" rtlCol="0" anchor="ctr"/>
-          <a:lstStyle/>
-          <a:p>
-            <a:pPr algn="ctr" indent="0" marL="0">
-              <a:buNone/>
-            </a:pPr>
-            <a:r>
-              <a:rPr lang="en-US" sz="1800" b="1" dirty="0">
-                <a:solidFill>
-                  <a:srgbClr val="0068B7"/>
-                </a:solidFill>
-                <a:latin typeface="Aptos" pitchFamily="34" charset="0"/>
-                <a:ea typeface="Aptos" pitchFamily="34" charset="-122"/>
-                <a:cs typeface="Aptos" pitchFamily="34" charset="-120"/>
-              </a:rPr>
-              <a:t>â†’</a:t>
-            </a:r>
-            <a:endParaRPr lang="en-US" sz="1800" dirty="0"/>
-          </a:p>
-        </p:txBody>
-      </p:sp>
-      <p:sp>
-        <p:nvSpPr>
-          <p:cNvPr id="16" name="Shape 14"/>
+          <p:cNvPr id="15" name="Shape 13"/>
           <p:cNvSpPr/>
           <p:nvPr/>
         </p:nvSpPr>
@@ -12288,7 +13484,7 @@
       </p:sp>
       <p:sp>
         <p:nvSpPr>
-          <p:cNvPr id="17" name="Text 15"/>
+          <p:cNvPr id="16" name="Text 14"/>
           <p:cNvSpPr/>
           <p:nvPr/>
         </p:nvSpPr>
@@ -12329,46 +13525,7 @@
       </p:sp>
       <p:sp>
         <p:nvSpPr>
-          <p:cNvPr id="18" name="Text 16"/>
-          <p:cNvSpPr/>
-          <p:nvPr/>
-        </p:nvSpPr>
-        <p:spPr>
-          <a:xfrm>
-            <a:off x="10046208" y="4187952"/>
-            <a:ext cx="201168" cy="256032"/>
-          </a:xfrm>
-          <a:prstGeom prst="rect">
-            <a:avLst/>
-          </a:prstGeom>
-          <a:noFill/>
-          <a:ln/>
-        </p:spPr>
-        <p:txBody>
-          <a:bodyPr wrap="square" lIns="0" tIns="0" rIns="0" bIns="0" rtlCol="0" anchor="ctr"/>
-          <a:lstStyle/>
-          <a:p>
-            <a:pPr algn="ctr" indent="0" marL="0">
-              <a:buNone/>
-            </a:pPr>
-            <a:r>
-              <a:rPr lang="en-US" sz="1800" b="1" dirty="0">
-                <a:solidFill>
-                  <a:srgbClr val="0068B7"/>
-                </a:solidFill>
-                <a:latin typeface="Aptos" pitchFamily="34" charset="0"/>
-                <a:ea typeface="Aptos" pitchFamily="34" charset="-122"/>
-                <a:cs typeface="Aptos" pitchFamily="34" charset="-120"/>
-              </a:rPr>
-              <a:t>â†’</a:t>
-            </a:r>
-            <a:endParaRPr lang="en-US" sz="1800" dirty="0"/>
-          </a:p>
-        </p:txBody>
-      </p:sp>
-      <p:sp>
-        <p:nvSpPr>
-          <p:cNvPr id="19" name="Shape 17"/>
+          <p:cNvPr id="17" name="Shape 15"/>
           <p:cNvSpPr/>
           <p:nvPr/>
         </p:nvSpPr>
@@ -12395,7 +13552,7 @@
       </p:sp>
       <p:sp>
         <p:nvSpPr>
-          <p:cNvPr id="20" name="Text 18"/>
+          <p:cNvPr id="18" name="Text 16"/>
           <p:cNvSpPr/>
           <p:nvPr/>
         </p:nvSpPr>
@@ -12602,8 +13759,8 @@
         </p:nvSpPr>
         <p:spPr>
           <a:xfrm>
-            <a:off x="9966960" y="6537960"/>
-            <a:ext cx="1645920" cy="201168"/>
+            <a:off x="9646920" y="6537960"/>
+            <a:ext cx="1965960" cy="201168"/>
           </a:xfrm>
           <a:prstGeom prst="rect">
             <a:avLst/>
@@ -12627,7 +13784,7 @@
                 <a:ea typeface="Aptos" pitchFamily="34" charset="-122"/>
                 <a:cs typeface="Aptos" pitchFamily="34" charset="-120"/>
               </a:rPr>
-              <a:t>Â© Paula Soper</a:t>
+              <a:t>Copyright Paula Soper</a:t>
             </a:r>
             <a:endParaRPr lang="en-US" sz="800" dirty="0"/>
           </a:p>
@@ -12970,46 +14127,7 @@
       </p:sp>
       <p:sp>
         <p:nvSpPr>
-          <p:cNvPr id="15" name="Text 13"/>
-          <p:cNvSpPr/>
-          <p:nvPr/>
-        </p:nvSpPr>
-        <p:spPr>
-          <a:xfrm>
-            <a:off x="8817864" y="4187952"/>
-            <a:ext cx="201168" cy="256032"/>
-          </a:xfrm>
-          <a:prstGeom prst="rect">
-            <a:avLst/>
-          </a:prstGeom>
-          <a:noFill/>
-          <a:ln/>
-        </p:spPr>
-        <p:txBody>
-          <a:bodyPr wrap="square" lIns="0" tIns="0" rIns="0" bIns="0" rtlCol="0" anchor="ctr"/>
-          <a:lstStyle/>
-          <a:p>
-            <a:pPr algn="ctr" indent="0" marL="0">
-              <a:buNone/>
-            </a:pPr>
-            <a:r>
-              <a:rPr lang="en-US" sz="1800" b="1" dirty="0">
-                <a:solidFill>
-                  <a:srgbClr val="0068B7"/>
-                </a:solidFill>
-                <a:latin typeface="Aptos" pitchFamily="34" charset="0"/>
-                <a:ea typeface="Aptos" pitchFamily="34" charset="-122"/>
-                <a:cs typeface="Aptos" pitchFamily="34" charset="-120"/>
-              </a:rPr>
-              <a:t>â†’</a:t>
-            </a:r>
-            <a:endParaRPr lang="en-US" sz="1800" dirty="0"/>
-          </a:p>
-        </p:txBody>
-      </p:sp>
-      <p:sp>
-        <p:nvSpPr>
-          <p:cNvPr id="16" name="Shape 14"/>
+          <p:cNvPr id="15" name="Shape 13"/>
           <p:cNvSpPr/>
           <p:nvPr/>
         </p:nvSpPr>
@@ -13036,7 +14154,7 @@
       </p:sp>
       <p:sp>
         <p:nvSpPr>
-          <p:cNvPr id="17" name="Text 15"/>
+          <p:cNvPr id="16" name="Text 14"/>
           <p:cNvSpPr/>
           <p:nvPr/>
         </p:nvSpPr>
@@ -13077,46 +14195,7 @@
       </p:sp>
       <p:sp>
         <p:nvSpPr>
-          <p:cNvPr id="18" name="Text 16"/>
-          <p:cNvSpPr/>
-          <p:nvPr/>
-        </p:nvSpPr>
-        <p:spPr>
-          <a:xfrm>
-            <a:off x="10046208" y="4187952"/>
-            <a:ext cx="201168" cy="256032"/>
-          </a:xfrm>
-          <a:prstGeom prst="rect">
-            <a:avLst/>
-          </a:prstGeom>
-          <a:noFill/>
-          <a:ln/>
-        </p:spPr>
-        <p:txBody>
-          <a:bodyPr wrap="square" lIns="0" tIns="0" rIns="0" bIns="0" rtlCol="0" anchor="ctr"/>
-          <a:lstStyle/>
-          <a:p>
-            <a:pPr algn="ctr" indent="0" marL="0">
-              <a:buNone/>
-            </a:pPr>
-            <a:r>
-              <a:rPr lang="en-US" sz="1800" b="1" dirty="0">
-                <a:solidFill>
-                  <a:srgbClr val="0068B7"/>
-                </a:solidFill>
-                <a:latin typeface="Aptos" pitchFamily="34" charset="0"/>
-                <a:ea typeface="Aptos" pitchFamily="34" charset="-122"/>
-                <a:cs typeface="Aptos" pitchFamily="34" charset="-120"/>
-              </a:rPr>
-              <a:t>â†’</a:t>
-            </a:r>
-            <a:endParaRPr lang="en-US" sz="1800" dirty="0"/>
-          </a:p>
-        </p:txBody>
-      </p:sp>
-      <p:sp>
-        <p:nvSpPr>
-          <p:cNvPr id="19" name="Shape 17"/>
+          <p:cNvPr id="17" name="Shape 15"/>
           <p:cNvSpPr/>
           <p:nvPr/>
         </p:nvSpPr>
@@ -13143,7 +14222,7 @@
       </p:sp>
       <p:sp>
         <p:nvSpPr>
-          <p:cNvPr id="20" name="Text 18"/>
+          <p:cNvPr id="18" name="Text 16"/>
           <p:cNvSpPr/>
           <p:nvPr/>
         </p:nvSpPr>
@@ -13350,8 +14429,8 @@
         </p:nvSpPr>
         <p:spPr>
           <a:xfrm>
-            <a:off x="9966960" y="6537960"/>
-            <a:ext cx="1645920" cy="201168"/>
+            <a:off x="9646920" y="6537960"/>
+            <a:ext cx="1965960" cy="201168"/>
           </a:xfrm>
           <a:prstGeom prst="rect">
             <a:avLst/>
@@ -13375,7 +14454,7 @@
                 <a:ea typeface="Aptos" pitchFamily="34" charset="-122"/>
                 <a:cs typeface="Aptos" pitchFamily="34" charset="-120"/>
               </a:rPr>
-              <a:t>Â© Paula Soper</a:t>
+              <a:t>Copyright Paula Soper</a:t>
             </a:r>
             <a:endParaRPr lang="en-US" sz="800" dirty="0"/>
           </a:p>
@@ -13422,77 +14501,13 @@
       </p:sp>
       <p:sp>
         <p:nvSpPr>
-          <p:cNvPr id="8" name="Shape 6"/>
+          <p:cNvPr id="8" name="Text 6"/>
           <p:cNvSpPr/>
           <p:nvPr/>
         </p:nvSpPr>
         <p:spPr>
           <a:xfrm>
             <a:off x="640080" y="658368"/>
-            <a:ext cx="420624" cy="420624"/>
-          </a:xfrm>
-          <a:prstGeom prst="ellipse">
-            <a:avLst/>
-          </a:prstGeom>
-          <a:solidFill>
-            <a:srgbClr val="0068B7"/>
-          </a:solidFill>
-          <a:ln w="12700">
-            <a:solidFill>
-              <a:srgbClr val="0068B7"/>
-            </a:solidFill>
-            <a:prstDash val="solid"/>
-          </a:ln>
-        </p:spPr>
-      </p:sp>
-      <p:sp>
-        <p:nvSpPr>
-          <p:cNvPr id="9" name="Text 7"/>
-          <p:cNvSpPr/>
-          <p:nvPr/>
-        </p:nvSpPr>
-        <p:spPr>
-          <a:xfrm>
-            <a:off x="640080" y="731520"/>
-            <a:ext cx="420624" cy="164592"/>
-          </a:xfrm>
-          <a:prstGeom prst="rect">
-            <a:avLst/>
-          </a:prstGeom>
-          <a:noFill/>
-          <a:ln/>
-        </p:spPr>
-        <p:txBody>
-          <a:bodyPr wrap="square" lIns="0" tIns="0" rIns="0" bIns="0" rtlCol="0" anchor="ctr"/>
-          <a:lstStyle/>
-          <a:p>
-            <a:pPr algn="ctr" indent="0" marL="0">
-              <a:buNone/>
-            </a:pPr>
-            <a:r>
-              <a:rPr lang="en-US" sz="1100" b="1" dirty="0">
-                <a:solidFill>
-                  <a:srgbClr val="FFFFFF"/>
-                </a:solidFill>
-                <a:latin typeface="Aptos" pitchFamily="34" charset="0"/>
-                <a:ea typeface="Aptos" pitchFamily="34" charset="-122"/>
-                <a:cs typeface="Aptos" pitchFamily="34" charset="-120"/>
-              </a:rPr>
-              <a:t>1</a:t>
-            </a:r>
-            <a:endParaRPr lang="en-US" sz="1100" dirty="0"/>
-          </a:p>
-        </p:txBody>
-      </p:sp>
-      <p:sp>
-        <p:nvSpPr>
-          <p:cNvPr id="10" name="Text 8"/>
-          <p:cNvSpPr/>
-          <p:nvPr/>
-        </p:nvSpPr>
-        <p:spPr>
-          <a:xfrm>
-            <a:off x="640080" y="621792"/>
             <a:ext cx="10881360" cy="713232"/>
           </a:xfrm>
           <a:prstGeom prst="rect">
@@ -13527,14 +14542,14 @@
       </p:sp>
       <p:sp>
         <p:nvSpPr>
-          <p:cNvPr id="11" name="Text 9"/>
+          <p:cNvPr id="9" name="Text 7"/>
           <p:cNvSpPr/>
           <p:nvPr/>
         </p:nvSpPr>
         <p:spPr>
           <a:xfrm>
             <a:off x="868680" y="1508760"/>
-            <a:ext cx="6537960" cy="4160520"/>
+            <a:ext cx="6309360" cy="4160520"/>
           </a:xfrm>
           <a:prstGeom prst="rect">
             <a:avLst/>
@@ -13593,18 +14608,18 @@
       </p:sp>
       <p:sp>
         <p:nvSpPr>
-          <p:cNvPr id="12" name="Shape 10"/>
-          <p:cNvSpPr/>
-          <p:nvPr/>
-        </p:nvSpPr>
-        <p:spPr>
-          <a:xfrm>
-            <a:off x="7909560" y="1417320"/>
-            <a:ext cx="3154680" cy="1828800"/>
+          <p:cNvPr id="10" name="Shape 8"/>
+          <p:cNvSpPr/>
+          <p:nvPr/>
+        </p:nvSpPr>
+        <p:spPr>
+          <a:xfrm>
+            <a:off x="7635240" y="1325880"/>
+            <a:ext cx="3474720" cy="1325880"/>
           </a:xfrm>
           <a:prstGeom prst="roundRect">
             <a:avLst>
-              <a:gd name="adj" fmla="val 6000"/>
+              <a:gd name="adj" fmla="val 8276"/>
             </a:avLst>
           </a:prstGeom>
           <a:solidFill>
@@ -13620,14 +14635,14 @@
       </p:sp>
       <p:sp>
         <p:nvSpPr>
-          <p:cNvPr id="13" name="Text 11"/>
-          <p:cNvSpPr/>
-          <p:nvPr/>
-        </p:nvSpPr>
-        <p:spPr>
-          <a:xfrm>
-            <a:off x="8074152" y="1563624"/>
-            <a:ext cx="2825496" cy="256032"/>
+          <p:cNvPr id="11" name="Text 9"/>
+          <p:cNvSpPr/>
+          <p:nvPr/>
+        </p:nvSpPr>
+        <p:spPr>
+          <a:xfrm>
+            <a:off x="7799832" y="1472184"/>
+            <a:ext cx="3145536" cy="256032"/>
           </a:xfrm>
           <a:prstGeom prst="rect">
             <a:avLst/>
@@ -13651,7 +14666,7 @@
                 <a:ea typeface="Aptos" pitchFamily="34" charset="-122"/>
                 <a:cs typeface="Aptos" pitchFamily="34" charset="-120"/>
               </a:rPr>
-              <a:t>Key idea</a:t>
+              <a:t>Practice focus</a:t>
             </a:r>
             <a:endParaRPr lang="en-US" sz="1300" dirty="0"/>
           </a:p>
@@ -13659,14 +14674,14 @@
       </p:sp>
       <p:sp>
         <p:nvSpPr>
-          <p:cNvPr id="14" name="Text 12"/>
-          <p:cNvSpPr/>
-          <p:nvPr/>
-        </p:nvSpPr>
-        <p:spPr>
-          <a:xfrm>
-            <a:off x="8074152" y="1920240"/>
-            <a:ext cx="2825496" cy="1188720"/>
+          <p:cNvPr id="12" name="Text 10"/>
+          <p:cNvSpPr/>
+          <p:nvPr/>
+        </p:nvSpPr>
+        <p:spPr>
+          <a:xfrm>
+            <a:off x="7799832" y="1828800"/>
+            <a:ext cx="3145536" cy="685800"/>
           </a:xfrm>
           <a:prstGeom prst="rect">
             <a:avLst/>
@@ -13700,18 +14715,159 @@
       </p:sp>
       <p:sp>
         <p:nvSpPr>
-          <p:cNvPr id="15" name="Shape 13"/>
-          <p:cNvSpPr/>
-          <p:nvPr/>
-        </p:nvSpPr>
-        <p:spPr>
-          <a:xfrm>
-            <a:off x="7909560" y="3520440"/>
-            <a:ext cx="3154680" cy="1737360"/>
+          <p:cNvPr id="13" name="Shape 11"/>
+          <p:cNvSpPr/>
+          <p:nvPr/>
+        </p:nvSpPr>
+        <p:spPr>
+          <a:xfrm>
+            <a:off x="7635240" y="2788920"/>
+            <a:ext cx="3474720" cy="1536192"/>
           </a:xfrm>
           <a:prstGeom prst="roundRect">
             <a:avLst>
-              <a:gd name="adj" fmla="val 6316"/>
+              <a:gd name="adj" fmla="val 7143"/>
+            </a:avLst>
+          </a:prstGeom>
+          <a:solidFill>
+            <a:srgbClr val="FFFFFF">
+              <a:alpha val="88000"/>
+            </a:srgbClr>
+          </a:solidFill>
+          <a:ln w="12700">
+            <a:solidFill>
+              <a:srgbClr val="D6E8F2"/>
+            </a:solidFill>
+            <a:prstDash val="solid"/>
+          </a:ln>
+        </p:spPr>
+      </p:sp>
+      <p:sp>
+        <p:nvSpPr>
+          <p:cNvPr id="14" name="Shape 12"/>
+          <p:cNvSpPr/>
+          <p:nvPr/>
+        </p:nvSpPr>
+        <p:spPr>
+          <a:xfrm>
+            <a:off x="8074152" y="3291840"/>
+            <a:ext cx="2596896" cy="749808"/>
+          </a:xfrm>
+          <a:prstGeom prst="rect">
+            <a:avLst/>
+          </a:prstGeom>
+          <a:solidFill>
+            <a:srgbClr val="EAF6F8"/>
+          </a:solidFill>
+          <a:ln w="12700">
+            <a:solidFill>
+              <a:srgbClr val="8ABBD8"/>
+            </a:solidFill>
+            <a:prstDash val="solid"/>
+          </a:ln>
+        </p:spPr>
+      </p:sp>
+      <p:sp>
+        <p:nvSpPr>
+          <p:cNvPr id="15" name="Shape 13"/>
+          <p:cNvSpPr/>
+          <p:nvPr/>
+        </p:nvSpPr>
+        <p:spPr>
+          <a:xfrm>
+            <a:off x="8202168" y="3721608"/>
+            <a:ext cx="2340864" cy="0"/>
+          </a:xfrm>
+          <a:prstGeom prst="line">
+            <a:avLst/>
+          </a:prstGeom>
+          <a:noFill/>
+          <a:ln w="19050">
+            <a:solidFill>
+              <a:srgbClr val="0068B7"/>
+            </a:solidFill>
+            <a:prstDash val="solid"/>
+          </a:ln>
+        </p:spPr>
+      </p:sp>
+      <p:sp>
+        <p:nvSpPr>
+          <p:cNvPr id="16" name="Shape 14"/>
+          <p:cNvSpPr/>
+          <p:nvPr/>
+        </p:nvSpPr>
+        <p:spPr>
+          <a:xfrm>
+            <a:off x="9198864" y="4206240"/>
+            <a:ext cx="347472" cy="347472"/>
+          </a:xfrm>
+          <a:prstGeom prst="ellipse">
+            <a:avLst/>
+          </a:prstGeom>
+          <a:solidFill>
+            <a:srgbClr val="2F8A28"/>
+          </a:solidFill>
+          <a:ln w="12700">
+            <a:solidFill>
+              <a:srgbClr val="2F8A28"/>
+            </a:solidFill>
+            <a:prstDash val="solid"/>
+          </a:ln>
+        </p:spPr>
+      </p:sp>
+      <p:sp>
+        <p:nvSpPr>
+          <p:cNvPr id="17" name="Text 15"/>
+          <p:cNvSpPr/>
+          <p:nvPr/>
+        </p:nvSpPr>
+        <p:spPr>
+          <a:xfrm>
+            <a:off x="7909560" y="3977640"/>
+            <a:ext cx="2926080" cy="182880"/>
+          </a:xfrm>
+          <a:prstGeom prst="rect">
+            <a:avLst/>
+          </a:prstGeom>
+          <a:noFill/>
+          <a:ln/>
+        </p:spPr>
+        <p:txBody>
+          <a:bodyPr wrap="square" lIns="0" tIns="0" rIns="0" bIns="0" rtlCol="0" anchor="ctr"/>
+          <a:lstStyle/>
+          <a:p>
+            <a:pPr algn="ctr" indent="0" marL="0">
+              <a:buNone/>
+            </a:pPr>
+            <a:r>
+              <a:rPr lang="en-US" sz="1000" dirty="0">
+                <a:solidFill>
+                  <a:srgbClr val="003A63"/>
+                </a:solidFill>
+                <a:latin typeface="Aptos" pitchFamily="34" charset="0"/>
+                <a:ea typeface="Aptos" pitchFamily="34" charset="-122"/>
+                <a:cs typeface="Aptos" pitchFamily="34" charset="-120"/>
+              </a:rPr>
+              <a:t>Concept to action</a:t>
+            </a:r>
+            <a:endParaRPr lang="en-US" sz="1000" dirty="0"/>
+          </a:p>
+        </p:txBody>
+      </p:sp>
+      <p:sp>
+        <p:nvSpPr>
+          <p:cNvPr id="18" name="Shape 16"/>
+          <p:cNvSpPr/>
+          <p:nvPr/>
+        </p:nvSpPr>
+        <p:spPr>
+          <a:xfrm>
+            <a:off x="7635240" y="4498848"/>
+            <a:ext cx="3474720" cy="1143000"/>
+          </a:xfrm>
+          <a:prstGeom prst="roundRect">
+            <a:avLst>
+              <a:gd name="adj" fmla="val 9600"/>
             </a:avLst>
           </a:prstGeom>
           <a:solidFill>
@@ -13727,14 +14883,14 @@
       </p:sp>
       <p:sp>
         <p:nvSpPr>
-          <p:cNvPr id="16" name="Text 14"/>
-          <p:cNvSpPr/>
-          <p:nvPr/>
-        </p:nvSpPr>
-        <p:spPr>
-          <a:xfrm>
-            <a:off x="8074152" y="3666744"/>
-            <a:ext cx="2825496" cy="256032"/>
+          <p:cNvPr id="19" name="Text 17"/>
+          <p:cNvSpPr/>
+          <p:nvPr/>
+        </p:nvSpPr>
+        <p:spPr>
+          <a:xfrm>
+            <a:off x="7799832" y="4645152"/>
+            <a:ext cx="3145536" cy="256032"/>
           </a:xfrm>
           <a:prstGeom prst="rect">
             <a:avLst/>
@@ -13758,7 +14914,7 @@
                 <a:ea typeface="Aptos" pitchFamily="34" charset="-122"/>
                 <a:cs typeface="Aptos" pitchFamily="34" charset="-120"/>
               </a:rPr>
-              <a:t>Use this for</a:t>
+              <a:t>What to produce</a:t>
             </a:r>
             <a:endParaRPr lang="en-US" sz="1300" dirty="0"/>
           </a:p>
@@ -13766,14 +14922,14 @@
       </p:sp>
       <p:sp>
         <p:nvSpPr>
-          <p:cNvPr id="17" name="Text 15"/>
-          <p:cNvSpPr/>
-          <p:nvPr/>
-        </p:nvSpPr>
-        <p:spPr>
-          <a:xfrm>
-            <a:off x="8074152" y="4023360"/>
-            <a:ext cx="2825496" cy="1097280"/>
+          <p:cNvPr id="20" name="Text 18"/>
+          <p:cNvSpPr/>
+          <p:nvPr/>
+        </p:nvSpPr>
+        <p:spPr>
+          <a:xfrm>
+            <a:off x="7799832" y="5001768"/>
+            <a:ext cx="3145536" cy="502920"/>
           </a:xfrm>
           <a:prstGeom prst="rect">
             <a:avLst/>
@@ -13799,7 +14955,7 @@
                 <a:ea typeface="Aptos" pitchFamily="34" charset="-122"/>
                 <a:cs typeface="Aptos" pitchFamily="34" charset="-120"/>
               </a:rPr>
-              <a:t>Connect the concept to public health decisions, safeguards, documentation, or implementation work.</a:t>
+              <a:t>Use the assignment to test whether you can explain the concept, apply it to a realistic public health situation, and identify what would need review before the work moves forward.</a:t>
             </a:r>
             <a:endParaRPr lang="en-US" sz="1550" dirty="0"/>
           </a:p>
@@ -13973,8 +15129,8 @@
         </p:nvSpPr>
         <p:spPr>
           <a:xfrm>
-            <a:off x="9966960" y="6537960"/>
-            <a:ext cx="1645920" cy="201168"/>
+            <a:off x="9646920" y="6537960"/>
+            <a:ext cx="1965960" cy="201168"/>
           </a:xfrm>
           <a:prstGeom prst="rect">
             <a:avLst/>
@@ -13998,7 +15154,7 @@
                 <a:ea typeface="Aptos" pitchFamily="34" charset="-122"/>
                 <a:cs typeface="Aptos" pitchFamily="34" charset="-120"/>
               </a:rPr>
-              <a:t>Â© Paula Soper</a:t>
+              <a:t>Copyright Paula Soper</a:t>
             </a:r>
             <a:endParaRPr lang="en-US" sz="800" dirty="0"/>
           </a:p>
@@ -14093,7 +15249,7 @@
         <p:spPr>
           <a:xfrm>
             <a:off x="868680" y="1508760"/>
-            <a:ext cx="6537960" cy="4160520"/>
+            <a:ext cx="6309360" cy="4160520"/>
           </a:xfrm>
           <a:prstGeom prst="rect">
             <a:avLst/>
@@ -14130,12 +15286,12 @@
         </p:nvSpPr>
         <p:spPr>
           <a:xfrm>
-            <a:off x="7909560" y="1417320"/>
-            <a:ext cx="3154680" cy="1828800"/>
+            <a:off x="7635240" y="1325880"/>
+            <a:ext cx="3474720" cy="1325880"/>
           </a:xfrm>
           <a:prstGeom prst="roundRect">
             <a:avLst>
-              <a:gd name="adj" fmla="val 6000"/>
+              <a:gd name="adj" fmla="val 8276"/>
             </a:avLst>
           </a:prstGeom>
           <a:solidFill>
@@ -14157,8 +15313,8 @@
         </p:nvSpPr>
         <p:spPr>
           <a:xfrm>
-            <a:off x="8074152" y="1563624"/>
-            <a:ext cx="2825496" cy="256032"/>
+            <a:off x="7799832" y="1472184"/>
+            <a:ext cx="3145536" cy="256032"/>
           </a:xfrm>
           <a:prstGeom prst="rect">
             <a:avLst/>
@@ -14182,7 +15338,7 @@
                 <a:ea typeface="Aptos" pitchFamily="34" charset="-122"/>
                 <a:cs typeface="Aptos" pitchFamily="34" charset="-120"/>
               </a:rPr>
-              <a:t>Key idea</a:t>
+              <a:t>Practice focus</a:t>
             </a:r>
             <a:endParaRPr lang="en-US" sz="1300" dirty="0"/>
           </a:p>
@@ -14196,8 +15352,8 @@
         </p:nvSpPr>
         <p:spPr>
           <a:xfrm>
-            <a:off x="8074152" y="1920240"/>
-            <a:ext cx="2825496" cy="1188720"/>
+            <a:off x="7799832" y="1828800"/>
+            <a:ext cx="3145536" cy="685800"/>
           </a:xfrm>
           <a:prstGeom prst="rect">
             <a:avLst/>
@@ -14237,12 +15393,153 @@
         </p:nvSpPr>
         <p:spPr>
           <a:xfrm>
-            <a:off x="7909560" y="3520440"/>
-            <a:ext cx="3154680" cy="1737360"/>
+            <a:off x="7635240" y="2788920"/>
+            <a:ext cx="3474720" cy="1536192"/>
           </a:xfrm>
           <a:prstGeom prst="roundRect">
             <a:avLst>
-              <a:gd name="adj" fmla="val 6316"/>
+              <a:gd name="adj" fmla="val 7143"/>
+            </a:avLst>
+          </a:prstGeom>
+          <a:solidFill>
+            <a:srgbClr val="FFFFFF">
+              <a:alpha val="88000"/>
+            </a:srgbClr>
+          </a:solidFill>
+          <a:ln w="12700">
+            <a:solidFill>
+              <a:srgbClr val="D6E8F2"/>
+            </a:solidFill>
+            <a:prstDash val="solid"/>
+          </a:ln>
+        </p:spPr>
+      </p:sp>
+      <p:sp>
+        <p:nvSpPr>
+          <p:cNvPr id="14" name="Shape 12"/>
+          <p:cNvSpPr/>
+          <p:nvPr/>
+        </p:nvSpPr>
+        <p:spPr>
+          <a:xfrm>
+            <a:off x="8074152" y="3291840"/>
+            <a:ext cx="2596896" cy="749808"/>
+          </a:xfrm>
+          <a:prstGeom prst="rect">
+            <a:avLst/>
+          </a:prstGeom>
+          <a:solidFill>
+            <a:srgbClr val="EAF6F8"/>
+          </a:solidFill>
+          <a:ln w="12700">
+            <a:solidFill>
+              <a:srgbClr val="8ABBD8"/>
+            </a:solidFill>
+            <a:prstDash val="solid"/>
+          </a:ln>
+        </p:spPr>
+      </p:sp>
+      <p:sp>
+        <p:nvSpPr>
+          <p:cNvPr id="15" name="Shape 13"/>
+          <p:cNvSpPr/>
+          <p:nvPr/>
+        </p:nvSpPr>
+        <p:spPr>
+          <a:xfrm>
+            <a:off x="8202168" y="3721608"/>
+            <a:ext cx="2340864" cy="0"/>
+          </a:xfrm>
+          <a:prstGeom prst="line">
+            <a:avLst/>
+          </a:prstGeom>
+          <a:noFill/>
+          <a:ln w="19050">
+            <a:solidFill>
+              <a:srgbClr val="0068B7"/>
+            </a:solidFill>
+            <a:prstDash val="solid"/>
+          </a:ln>
+        </p:spPr>
+      </p:sp>
+      <p:sp>
+        <p:nvSpPr>
+          <p:cNvPr id="16" name="Shape 14"/>
+          <p:cNvSpPr/>
+          <p:nvPr/>
+        </p:nvSpPr>
+        <p:spPr>
+          <a:xfrm>
+            <a:off x="9198864" y="4206240"/>
+            <a:ext cx="347472" cy="347472"/>
+          </a:xfrm>
+          <a:prstGeom prst="ellipse">
+            <a:avLst/>
+          </a:prstGeom>
+          <a:solidFill>
+            <a:srgbClr val="2F8A28"/>
+          </a:solidFill>
+          <a:ln w="12700">
+            <a:solidFill>
+              <a:srgbClr val="2F8A28"/>
+            </a:solidFill>
+            <a:prstDash val="solid"/>
+          </a:ln>
+        </p:spPr>
+      </p:sp>
+      <p:sp>
+        <p:nvSpPr>
+          <p:cNvPr id="17" name="Text 15"/>
+          <p:cNvSpPr/>
+          <p:nvPr/>
+        </p:nvSpPr>
+        <p:spPr>
+          <a:xfrm>
+            <a:off x="7909560" y="3977640"/>
+            <a:ext cx="2926080" cy="182880"/>
+          </a:xfrm>
+          <a:prstGeom prst="rect">
+            <a:avLst/>
+          </a:prstGeom>
+          <a:noFill/>
+          <a:ln/>
+        </p:spPr>
+        <p:txBody>
+          <a:bodyPr wrap="square" lIns="0" tIns="0" rIns="0" bIns="0" rtlCol="0" anchor="ctr"/>
+          <a:lstStyle/>
+          <a:p>
+            <a:pPr algn="ctr" indent="0" marL="0">
+              <a:buNone/>
+            </a:pPr>
+            <a:r>
+              <a:rPr lang="en-US" sz="1000" dirty="0">
+                <a:solidFill>
+                  <a:srgbClr val="003A63"/>
+                </a:solidFill>
+                <a:latin typeface="Aptos" pitchFamily="34" charset="0"/>
+                <a:ea typeface="Aptos" pitchFamily="34" charset="-122"/>
+                <a:cs typeface="Aptos" pitchFamily="34" charset="-120"/>
+              </a:rPr>
+              <a:t>Concept to action</a:t>
+            </a:r>
+            <a:endParaRPr lang="en-US" sz="1000" dirty="0"/>
+          </a:p>
+        </p:txBody>
+      </p:sp>
+      <p:sp>
+        <p:nvSpPr>
+          <p:cNvPr id="18" name="Shape 16"/>
+          <p:cNvSpPr/>
+          <p:nvPr/>
+        </p:nvSpPr>
+        <p:spPr>
+          <a:xfrm>
+            <a:off x="7635240" y="4498848"/>
+            <a:ext cx="3474720" cy="1143000"/>
+          </a:xfrm>
+          <a:prstGeom prst="roundRect">
+            <a:avLst>
+              <a:gd name="adj" fmla="val 9600"/>
             </a:avLst>
           </a:prstGeom>
           <a:solidFill>
@@ -14258,14 +15555,14 @@
       </p:sp>
       <p:sp>
         <p:nvSpPr>
-          <p:cNvPr id="14" name="Text 12"/>
-          <p:cNvSpPr/>
-          <p:nvPr/>
-        </p:nvSpPr>
-        <p:spPr>
-          <a:xfrm>
-            <a:off x="8074152" y="3666744"/>
-            <a:ext cx="2825496" cy="256032"/>
+          <p:cNvPr id="19" name="Text 17"/>
+          <p:cNvSpPr/>
+          <p:nvPr/>
+        </p:nvSpPr>
+        <p:spPr>
+          <a:xfrm>
+            <a:off x="7799832" y="4645152"/>
+            <a:ext cx="3145536" cy="256032"/>
           </a:xfrm>
           <a:prstGeom prst="rect">
             <a:avLst/>
@@ -14289,7 +15586,7 @@
                 <a:ea typeface="Aptos" pitchFamily="34" charset="-122"/>
                 <a:cs typeface="Aptos" pitchFamily="34" charset="-120"/>
               </a:rPr>
-              <a:t>Use this for</a:t>
+              <a:t>What to produce</a:t>
             </a:r>
             <a:endParaRPr lang="en-US" sz="1300" dirty="0"/>
           </a:p>
@@ -14297,14 +15594,14 @@
       </p:sp>
       <p:sp>
         <p:nvSpPr>
-          <p:cNvPr id="15" name="Text 13"/>
-          <p:cNvSpPr/>
-          <p:nvPr/>
-        </p:nvSpPr>
-        <p:spPr>
-          <a:xfrm>
-            <a:off x="8074152" y="4023360"/>
-            <a:ext cx="2825496" cy="1097280"/>
+          <p:cNvPr id="20" name="Text 18"/>
+          <p:cNvSpPr/>
+          <p:nvPr/>
+        </p:nvSpPr>
+        <p:spPr>
+          <a:xfrm>
+            <a:off x="7799832" y="5001768"/>
+            <a:ext cx="3145536" cy="502920"/>
           </a:xfrm>
           <a:prstGeom prst="rect">
             <a:avLst/>
@@ -14330,7 +15627,7 @@
                 <a:ea typeface="Aptos" pitchFamily="34" charset="-122"/>
                 <a:cs typeface="Aptos" pitchFamily="34" charset="-120"/>
               </a:rPr>
-              <a:t>Connect the concept to public health decisions, safeguards, documentation, or implementation work.</a:t>
+              <a:t>Use the assignment to test whether you can explain the concept, apply it to a realistic public health situation, and identify what would need review before the work moves forward.</a:t>
             </a:r>
             <a:endParaRPr lang="en-US" sz="1550" dirty="0"/>
           </a:p>
@@ -14504,8 +15801,8 @@
         </p:nvSpPr>
         <p:spPr>
           <a:xfrm>
-            <a:off x="9966960" y="6537960"/>
-            <a:ext cx="1645920" cy="201168"/>
+            <a:off x="9646920" y="6537960"/>
+            <a:ext cx="1965960" cy="201168"/>
           </a:xfrm>
           <a:prstGeom prst="rect">
             <a:avLst/>
@@ -14529,7 +15826,7 @@
                 <a:ea typeface="Aptos" pitchFamily="34" charset="-122"/>
                 <a:cs typeface="Aptos" pitchFamily="34" charset="-120"/>
               </a:rPr>
-              <a:t>Â© Paula Soper</a:t>
+              <a:t>Copyright Paula Soper</a:t>
             </a:r>
             <a:endParaRPr lang="en-US" sz="800" dirty="0"/>
           </a:p>
@@ -14576,77 +15873,13 @@
       </p:sp>
       <p:sp>
         <p:nvSpPr>
-          <p:cNvPr id="8" name="Shape 6"/>
+          <p:cNvPr id="8" name="Text 6"/>
           <p:cNvSpPr/>
           <p:nvPr/>
         </p:nvSpPr>
         <p:spPr>
           <a:xfrm>
             <a:off x="640080" y="658368"/>
-            <a:ext cx="420624" cy="420624"/>
-          </a:xfrm>
-          <a:prstGeom prst="ellipse">
-            <a:avLst/>
-          </a:prstGeom>
-          <a:solidFill>
-            <a:srgbClr val="0068B7"/>
-          </a:solidFill>
-          <a:ln w="12700">
-            <a:solidFill>
-              <a:srgbClr val="0068B7"/>
-            </a:solidFill>
-            <a:prstDash val="solid"/>
-          </a:ln>
-        </p:spPr>
-      </p:sp>
-      <p:sp>
-        <p:nvSpPr>
-          <p:cNvPr id="9" name="Text 7"/>
-          <p:cNvSpPr/>
-          <p:nvPr/>
-        </p:nvSpPr>
-        <p:spPr>
-          <a:xfrm>
-            <a:off x="640080" y="731520"/>
-            <a:ext cx="420624" cy="164592"/>
-          </a:xfrm>
-          <a:prstGeom prst="rect">
-            <a:avLst/>
-          </a:prstGeom>
-          <a:noFill/>
-          <a:ln/>
-        </p:spPr>
-        <p:txBody>
-          <a:bodyPr wrap="square" lIns="0" tIns="0" rIns="0" bIns="0" rtlCol="0" anchor="ctr"/>
-          <a:lstStyle/>
-          <a:p>
-            <a:pPr algn="ctr" indent="0" marL="0">
-              <a:buNone/>
-            </a:pPr>
-            <a:r>
-              <a:rPr lang="en-US" sz="1100" b="1" dirty="0">
-                <a:solidFill>
-                  <a:srgbClr val="FFFFFF"/>
-                </a:solidFill>
-                <a:latin typeface="Aptos" pitchFamily="34" charset="0"/>
-                <a:ea typeface="Aptos" pitchFamily="34" charset="-122"/>
-                <a:cs typeface="Aptos" pitchFamily="34" charset="-120"/>
-              </a:rPr>
-              <a:t>2</a:t>
-            </a:r>
-            <a:endParaRPr lang="en-US" sz="1100" dirty="0"/>
-          </a:p>
-        </p:txBody>
-      </p:sp>
-      <p:sp>
-        <p:nvSpPr>
-          <p:cNvPr id="10" name="Text 8"/>
-          <p:cNvSpPr/>
-          <p:nvPr/>
-        </p:nvSpPr>
-        <p:spPr>
-          <a:xfrm>
-            <a:off x="640080" y="621792"/>
             <a:ext cx="10881360" cy="713232"/>
           </a:xfrm>
           <a:prstGeom prst="rect">
@@ -14681,14 +15914,14 @@
       </p:sp>
       <p:sp>
         <p:nvSpPr>
-          <p:cNvPr id="11" name="Text 9"/>
+          <p:cNvPr id="9" name="Text 7"/>
           <p:cNvSpPr/>
           <p:nvPr/>
         </p:nvSpPr>
         <p:spPr>
           <a:xfrm>
             <a:off x="868680" y="1508760"/>
-            <a:ext cx="6537960" cy="4160520"/>
+            <a:ext cx="6309360" cy="4160520"/>
           </a:xfrm>
           <a:prstGeom prst="rect">
             <a:avLst/>
@@ -14747,18 +15980,18 @@
       </p:sp>
       <p:sp>
         <p:nvSpPr>
-          <p:cNvPr id="12" name="Shape 10"/>
-          <p:cNvSpPr/>
-          <p:nvPr/>
-        </p:nvSpPr>
-        <p:spPr>
-          <a:xfrm>
-            <a:off x="7909560" y="1417320"/>
-            <a:ext cx="3154680" cy="1828800"/>
+          <p:cNvPr id="10" name="Shape 8"/>
+          <p:cNvSpPr/>
+          <p:nvPr/>
+        </p:nvSpPr>
+        <p:spPr>
+          <a:xfrm>
+            <a:off x="7635240" y="1325880"/>
+            <a:ext cx="3474720" cy="1325880"/>
           </a:xfrm>
           <a:prstGeom prst="roundRect">
             <a:avLst>
-              <a:gd name="adj" fmla="val 6000"/>
+              <a:gd name="adj" fmla="val 8276"/>
             </a:avLst>
           </a:prstGeom>
           <a:solidFill>
@@ -14774,14 +16007,14 @@
       </p:sp>
       <p:sp>
         <p:nvSpPr>
-          <p:cNvPr id="13" name="Text 11"/>
-          <p:cNvSpPr/>
-          <p:nvPr/>
-        </p:nvSpPr>
-        <p:spPr>
-          <a:xfrm>
-            <a:off x="8074152" y="1563624"/>
-            <a:ext cx="2825496" cy="256032"/>
+          <p:cNvPr id="11" name="Text 9"/>
+          <p:cNvSpPr/>
+          <p:nvPr/>
+        </p:nvSpPr>
+        <p:spPr>
+          <a:xfrm>
+            <a:off x="7799832" y="1472184"/>
+            <a:ext cx="3145536" cy="256032"/>
           </a:xfrm>
           <a:prstGeom prst="rect">
             <a:avLst/>
@@ -14805,7 +16038,7 @@
                 <a:ea typeface="Aptos" pitchFamily="34" charset="-122"/>
                 <a:cs typeface="Aptos" pitchFamily="34" charset="-120"/>
               </a:rPr>
-              <a:t>Key idea</a:t>
+              <a:t>Core concept</a:t>
             </a:r>
             <a:endParaRPr lang="en-US" sz="1300" dirty="0"/>
           </a:p>
@@ -14813,14 +16046,14 @@
       </p:sp>
       <p:sp>
         <p:nvSpPr>
-          <p:cNvPr id="14" name="Text 12"/>
-          <p:cNvSpPr/>
-          <p:nvPr/>
-        </p:nvSpPr>
-        <p:spPr>
-          <a:xfrm>
-            <a:off x="8074152" y="1920240"/>
-            <a:ext cx="2825496" cy="1188720"/>
+          <p:cNvPr id="12" name="Text 10"/>
+          <p:cNvSpPr/>
+          <p:nvPr/>
+        </p:nvSpPr>
+        <p:spPr>
+          <a:xfrm>
+            <a:off x="7799832" y="1828800"/>
+            <a:ext cx="3145536" cy="685800"/>
           </a:xfrm>
           <a:prstGeom prst="rect">
             <a:avLst/>
@@ -14854,18 +16087,159 @@
       </p:sp>
       <p:sp>
         <p:nvSpPr>
-          <p:cNvPr id="15" name="Shape 13"/>
-          <p:cNvSpPr/>
-          <p:nvPr/>
-        </p:nvSpPr>
-        <p:spPr>
-          <a:xfrm>
-            <a:off x="7909560" y="3520440"/>
-            <a:ext cx="3154680" cy="1737360"/>
+          <p:cNvPr id="13" name="Shape 11"/>
+          <p:cNvSpPr/>
+          <p:nvPr/>
+        </p:nvSpPr>
+        <p:spPr>
+          <a:xfrm>
+            <a:off x="7635240" y="2788920"/>
+            <a:ext cx="3474720" cy="1536192"/>
           </a:xfrm>
           <a:prstGeom prst="roundRect">
             <a:avLst>
-              <a:gd name="adj" fmla="val 6316"/>
+              <a:gd name="adj" fmla="val 7143"/>
+            </a:avLst>
+          </a:prstGeom>
+          <a:solidFill>
+            <a:srgbClr val="FFFFFF">
+              <a:alpha val="88000"/>
+            </a:srgbClr>
+          </a:solidFill>
+          <a:ln w="12700">
+            <a:solidFill>
+              <a:srgbClr val="D6E8F2"/>
+            </a:solidFill>
+            <a:prstDash val="solid"/>
+          </a:ln>
+        </p:spPr>
+      </p:sp>
+      <p:sp>
+        <p:nvSpPr>
+          <p:cNvPr id="14" name="Shape 12"/>
+          <p:cNvSpPr/>
+          <p:nvPr/>
+        </p:nvSpPr>
+        <p:spPr>
+          <a:xfrm>
+            <a:off x="8074152" y="3291840"/>
+            <a:ext cx="2596896" cy="749808"/>
+          </a:xfrm>
+          <a:prstGeom prst="rect">
+            <a:avLst/>
+          </a:prstGeom>
+          <a:solidFill>
+            <a:srgbClr val="EAF6F8"/>
+          </a:solidFill>
+          <a:ln w="12700">
+            <a:solidFill>
+              <a:srgbClr val="8ABBD8"/>
+            </a:solidFill>
+            <a:prstDash val="solid"/>
+          </a:ln>
+        </p:spPr>
+      </p:sp>
+      <p:sp>
+        <p:nvSpPr>
+          <p:cNvPr id="15" name="Shape 13"/>
+          <p:cNvSpPr/>
+          <p:nvPr/>
+        </p:nvSpPr>
+        <p:spPr>
+          <a:xfrm>
+            <a:off x="8202168" y="3721608"/>
+            <a:ext cx="2340864" cy="0"/>
+          </a:xfrm>
+          <a:prstGeom prst="line">
+            <a:avLst/>
+          </a:prstGeom>
+          <a:noFill/>
+          <a:ln w="19050">
+            <a:solidFill>
+              <a:srgbClr val="0068B7"/>
+            </a:solidFill>
+            <a:prstDash val="solid"/>
+          </a:ln>
+        </p:spPr>
+      </p:sp>
+      <p:sp>
+        <p:nvSpPr>
+          <p:cNvPr id="16" name="Shape 14"/>
+          <p:cNvSpPr/>
+          <p:nvPr/>
+        </p:nvSpPr>
+        <p:spPr>
+          <a:xfrm>
+            <a:off x="9198864" y="4206240"/>
+            <a:ext cx="347472" cy="347472"/>
+          </a:xfrm>
+          <a:prstGeom prst="ellipse">
+            <a:avLst/>
+          </a:prstGeom>
+          <a:solidFill>
+            <a:srgbClr val="2F8A28"/>
+          </a:solidFill>
+          <a:ln w="12700">
+            <a:solidFill>
+              <a:srgbClr val="2F8A28"/>
+            </a:solidFill>
+            <a:prstDash val="solid"/>
+          </a:ln>
+        </p:spPr>
+      </p:sp>
+      <p:sp>
+        <p:nvSpPr>
+          <p:cNvPr id="17" name="Text 15"/>
+          <p:cNvSpPr/>
+          <p:nvPr/>
+        </p:nvSpPr>
+        <p:spPr>
+          <a:xfrm>
+            <a:off x="7909560" y="3977640"/>
+            <a:ext cx="2926080" cy="182880"/>
+          </a:xfrm>
+          <a:prstGeom prst="rect">
+            <a:avLst/>
+          </a:prstGeom>
+          <a:noFill/>
+          <a:ln/>
+        </p:spPr>
+        <p:txBody>
+          <a:bodyPr wrap="square" lIns="0" tIns="0" rIns="0" bIns="0" rtlCol="0" anchor="ctr"/>
+          <a:lstStyle/>
+          <a:p>
+            <a:pPr algn="ctr" indent="0" marL="0">
+              <a:buNone/>
+            </a:pPr>
+            <a:r>
+              <a:rPr lang="en-US" sz="1000" dirty="0">
+                <a:solidFill>
+                  <a:srgbClr val="003A63"/>
+                </a:solidFill>
+                <a:latin typeface="Aptos" pitchFamily="34" charset="0"/>
+                <a:ea typeface="Aptos" pitchFamily="34" charset="-122"/>
+                <a:cs typeface="Aptos" pitchFamily="34" charset="-120"/>
+              </a:rPr>
+              <a:t>Concept to action</a:t>
+            </a:r>
+            <a:endParaRPr lang="en-US" sz="1000" dirty="0"/>
+          </a:p>
+        </p:txBody>
+      </p:sp>
+      <p:sp>
+        <p:nvSpPr>
+          <p:cNvPr id="18" name="Shape 16"/>
+          <p:cNvSpPr/>
+          <p:nvPr/>
+        </p:nvSpPr>
+        <p:spPr>
+          <a:xfrm>
+            <a:off x="7635240" y="4498848"/>
+            <a:ext cx="3474720" cy="1143000"/>
+          </a:xfrm>
+          <a:prstGeom prst="roundRect">
+            <a:avLst>
+              <a:gd name="adj" fmla="val 9600"/>
             </a:avLst>
           </a:prstGeom>
           <a:solidFill>
@@ -14881,14 +16255,14 @@
       </p:sp>
       <p:sp>
         <p:nvSpPr>
-          <p:cNvPr id="16" name="Text 14"/>
-          <p:cNvSpPr/>
-          <p:nvPr/>
-        </p:nvSpPr>
-        <p:spPr>
-          <a:xfrm>
-            <a:off x="8074152" y="3666744"/>
-            <a:ext cx="2825496" cy="256032"/>
+          <p:cNvPr id="19" name="Text 17"/>
+          <p:cNvSpPr/>
+          <p:nvPr/>
+        </p:nvSpPr>
+        <p:spPr>
+          <a:xfrm>
+            <a:off x="7799832" y="4645152"/>
+            <a:ext cx="3145536" cy="256032"/>
           </a:xfrm>
           <a:prstGeom prst="rect">
             <a:avLst/>
@@ -14912,7 +16286,7 @@
                 <a:ea typeface="Aptos" pitchFamily="34" charset="-122"/>
                 <a:cs typeface="Aptos" pitchFamily="34" charset="-120"/>
               </a:rPr>
-              <a:t>Use this for</a:t>
+              <a:t>Apply it</a:t>
             </a:r>
             <a:endParaRPr lang="en-US" sz="1300" dirty="0"/>
           </a:p>
@@ -14920,14 +16294,14 @@
       </p:sp>
       <p:sp>
         <p:nvSpPr>
-          <p:cNvPr id="17" name="Text 15"/>
-          <p:cNvSpPr/>
-          <p:nvPr/>
-        </p:nvSpPr>
-        <p:spPr>
-          <a:xfrm>
-            <a:off x="8074152" y="4023360"/>
-            <a:ext cx="2825496" cy="1097280"/>
+          <p:cNvPr id="20" name="Text 18"/>
+          <p:cNvSpPr/>
+          <p:nvPr/>
+        </p:nvSpPr>
+        <p:spPr>
+          <a:xfrm>
+            <a:off x="7799832" y="5001768"/>
+            <a:ext cx="3145536" cy="502920"/>
           </a:xfrm>
           <a:prstGeom prst="rect">
             <a:avLst/>
@@ -14953,7 +16327,7 @@
                 <a:ea typeface="Aptos" pitchFamily="34" charset="-122"/>
                 <a:cs typeface="Aptos" pitchFamily="34" charset="-120"/>
               </a:rPr>
-              <a:t>Connect the concept to public health decisions, safeguards, documentation, or implementation work.</a:t>
+              <a:t>Connect the concept to public health purpose, responsible use, required safeguards, documentation, and the next action a department should take.</a:t>
             </a:r>
             <a:endParaRPr lang="en-US" sz="1550" dirty="0"/>
           </a:p>
@@ -15127,8 +16501,8 @@
         </p:nvSpPr>
         <p:spPr>
           <a:xfrm>
-            <a:off x="9966960" y="6537960"/>
-            <a:ext cx="1645920" cy="201168"/>
+            <a:off x="9646920" y="6537960"/>
+            <a:ext cx="1965960" cy="201168"/>
           </a:xfrm>
           <a:prstGeom prst="rect">
             <a:avLst/>
@@ -15152,7 +16526,7 @@
                 <a:ea typeface="Aptos" pitchFamily="34" charset="-122"/>
                 <a:cs typeface="Aptos" pitchFamily="34" charset="-120"/>
               </a:rPr>
-              <a:t>Â© Paula Soper</a:t>
+              <a:t>Copyright Paula Soper</a:t>
             </a:r>
             <a:endParaRPr lang="en-US" sz="800" dirty="0"/>
           </a:p>
@@ -15199,14 +16573,257 @@
       </p:sp>
       <p:sp>
         <p:nvSpPr>
-          <p:cNvPr id="8" name="Shape 6"/>
+          <p:cNvPr id="8" name="Text 6"/>
           <p:cNvSpPr/>
           <p:nvPr/>
         </p:nvSpPr>
         <p:spPr>
           <a:xfrm>
             <a:off x="640080" y="658368"/>
-            <a:ext cx="420624" cy="420624"/>
+            <a:ext cx="10881360" cy="713232"/>
+          </a:xfrm>
+          <a:prstGeom prst="rect">
+            <a:avLst/>
+          </a:prstGeom>
+          <a:noFill/>
+          <a:ln/>
+        </p:spPr>
+        <p:txBody>
+          <a:bodyPr wrap="square" lIns="0" tIns="0" rIns="0" bIns="0" rtlCol="0" anchor="ctr">
+            <a:normAutofit/>
+          </a:bodyPr>
+          <a:lstStyle/>
+          <a:p>
+            <a:pPr indent="0" marL="0">
+              <a:buNone/>
+            </a:pPr>
+            <a:r>
+              <a:rPr lang="en-US" sz="3400" b="1" dirty="0">
+                <a:solidFill>
+                  <a:srgbClr val="003A63"/>
+                </a:solidFill>
+                <a:latin typeface="Aptos Display" pitchFamily="34" charset="0"/>
+                <a:ea typeface="Aptos Display" pitchFamily="34" charset="-122"/>
+                <a:cs typeface="Aptos Display" pitchFamily="34" charset="-120"/>
+              </a:rPr>
+              <a:t>Jurisdiction and Agency Policy Note</a:t>
+            </a:r>
+            <a:endParaRPr lang="en-US" sz="3400" dirty="0"/>
+          </a:p>
+        </p:txBody>
+      </p:sp>
+      <p:sp>
+        <p:nvSpPr>
+          <p:cNvPr id="9" name="Text 7"/>
+          <p:cNvSpPr/>
+          <p:nvPr/>
+        </p:nvSpPr>
+        <p:spPr>
+          <a:xfrm>
+            <a:off x="868680" y="1508760"/>
+            <a:ext cx="6309360" cy="4160520"/>
+          </a:xfrm>
+          <a:prstGeom prst="rect">
+            <a:avLst/>
+          </a:prstGeom>
+          <a:noFill/>
+          <a:ln/>
+        </p:spPr>
+        <p:txBody>
+          <a:bodyPr wrap="square" lIns="635" tIns="635" rIns="635" bIns="635" rtlCol="0" anchor="t">
+            <a:normAutofit/>
+          </a:bodyPr>
+          <a:lstStyle/>
+          <a:p>
+            <a:r>
+              <a:rPr lang="en-US" sz="2100" dirty="0">
+                <a:solidFill>
+                  <a:srgbClr val="17364A"/>
+                </a:solidFill>
+                <a:latin typeface="Aptos" pitchFamily="34" charset="0"/>
+                <a:ea typeface="Aptos" pitchFamily="34" charset="-122"/>
+                <a:cs typeface="Aptos" pitchFamily="34" charset="-120"/>
+              </a:rPr>
+              <a:t>This national-level module is intended for training and planning purposes.</a:t>
+            </a:r>
+            <a:endParaRPr lang="en-US" sz="2100" dirty="0"/>
+          </a:p>
+          <a:p>
+            <a:r>
+              <a:rPr lang="en-US" sz="2100" dirty="0">
+                <a:solidFill>
+                  <a:srgbClr val="17364A"/>
+                </a:solidFill>
+                <a:latin typeface="Aptos" pitchFamily="34" charset="0"/>
+                <a:ea typeface="Aptos" pitchFamily="34" charset="-122"/>
+                <a:cs typeface="Aptos" pitchFamily="34" charset="-120"/>
+              </a:rPr>
+              <a:t>It does not replace legal, privacy, procurement, civil rights, records, or agency policy review.</a:t>
+            </a:r>
+            <a:endParaRPr lang="en-US" sz="2100" dirty="0"/>
+          </a:p>
+          <a:p>
+            <a:r>
+              <a:rPr lang="en-US" sz="2100" dirty="0">
+                <a:solidFill>
+                  <a:srgbClr val="17364A"/>
+                </a:solidFill>
+                <a:latin typeface="Aptos" pitchFamily="34" charset="0"/>
+                <a:ea typeface="Aptos" pitchFamily="34" charset="-122"/>
+                <a:cs typeface="Aptos" pitchFamily="34" charset="-120"/>
+              </a:rPr>
+              <a:t>Learners should confirm applicable requirements in their own jurisdiction and organization before.</a:t>
+            </a:r>
+            <a:endParaRPr lang="en-US" sz="2100" dirty="0"/>
+          </a:p>
+        </p:txBody>
+      </p:sp>
+      <p:sp>
+        <p:nvSpPr>
+          <p:cNvPr id="10" name="Shape 8"/>
+          <p:cNvSpPr/>
+          <p:nvPr/>
+        </p:nvSpPr>
+        <p:spPr>
+          <a:xfrm>
+            <a:off x="7635240" y="1325880"/>
+            <a:ext cx="3474720" cy="1325880"/>
+          </a:xfrm>
+          <a:prstGeom prst="roundRect">
+            <a:avLst>
+              <a:gd name="adj" fmla="val 8276"/>
+            </a:avLst>
+          </a:prstGeom>
+          <a:solidFill>
+            <a:srgbClr val="EEF8ED"/>
+          </a:solidFill>
+          <a:ln w="12700">
+            <a:solidFill>
+              <a:srgbClr val="B9D7E6"/>
+            </a:solidFill>
+            <a:prstDash val="solid"/>
+          </a:ln>
+        </p:spPr>
+      </p:sp>
+      <p:sp>
+        <p:nvSpPr>
+          <p:cNvPr id="11" name="Text 9"/>
+          <p:cNvSpPr/>
+          <p:nvPr/>
+        </p:nvSpPr>
+        <p:spPr>
+          <a:xfrm>
+            <a:off x="7799832" y="1472184"/>
+            <a:ext cx="3145536" cy="256032"/>
+          </a:xfrm>
+          <a:prstGeom prst="rect">
+            <a:avLst/>
+          </a:prstGeom>
+          <a:noFill/>
+          <a:ln/>
+        </p:spPr>
+        <p:txBody>
+          <a:bodyPr wrap="square" lIns="0" tIns="0" rIns="0" bIns="0" rtlCol="0" anchor="ctr"/>
+          <a:lstStyle/>
+          <a:p>
+            <a:pPr indent="0" marL="0">
+              <a:buNone/>
+            </a:pPr>
+            <a:r>
+              <a:rPr lang="en-US" sz="1300" b="1" dirty="0">
+                <a:solidFill>
+                  <a:srgbClr val="0068B7"/>
+                </a:solidFill>
+                <a:latin typeface="Aptos" pitchFamily="34" charset="0"/>
+                <a:ea typeface="Aptos" pitchFamily="34" charset="-122"/>
+                <a:cs typeface="Aptos" pitchFamily="34" charset="-120"/>
+              </a:rPr>
+              <a:t>Governance lens</a:t>
+            </a:r>
+            <a:endParaRPr lang="en-US" sz="1300" dirty="0"/>
+          </a:p>
+        </p:txBody>
+      </p:sp>
+      <p:sp>
+        <p:nvSpPr>
+          <p:cNvPr id="12" name="Text 10"/>
+          <p:cNvSpPr/>
+          <p:nvPr/>
+        </p:nvSpPr>
+        <p:spPr>
+          <a:xfrm>
+            <a:off x="7799832" y="1828800"/>
+            <a:ext cx="3145536" cy="685800"/>
+          </a:xfrm>
+          <a:prstGeom prst="rect">
+            <a:avLst/>
+          </a:prstGeom>
+          <a:noFill/>
+          <a:ln/>
+        </p:spPr>
+        <p:txBody>
+          <a:bodyPr wrap="square" lIns="0" tIns="0" rIns="0" bIns="0" rtlCol="0" anchor="t">
+            <a:normAutofit/>
+          </a:bodyPr>
+          <a:lstStyle/>
+          <a:p>
+            <a:pPr indent="0" marL="0">
+              <a:buNone/>
+            </a:pPr>
+            <a:r>
+              <a:rPr lang="en-US" sz="1550" dirty="0">
+                <a:solidFill>
+                  <a:srgbClr val="17364A"/>
+                </a:solidFill>
+                <a:latin typeface="Aptos" pitchFamily="34" charset="0"/>
+                <a:ea typeface="Aptos" pitchFamily="34" charset="-122"/>
+                <a:cs typeface="Aptos" pitchFamily="34" charset="-120"/>
+              </a:rPr>
+              <a:t>This national-level module is intended for training and planning purposes.</a:t>
+            </a:r>
+            <a:endParaRPr lang="en-US" sz="1550" dirty="0"/>
+          </a:p>
+        </p:txBody>
+      </p:sp>
+      <p:sp>
+        <p:nvSpPr>
+          <p:cNvPr id="13" name="Shape 11"/>
+          <p:cNvSpPr/>
+          <p:nvPr/>
+        </p:nvSpPr>
+        <p:spPr>
+          <a:xfrm>
+            <a:off x="7635240" y="2788920"/>
+            <a:ext cx="3474720" cy="1536192"/>
+          </a:xfrm>
+          <a:prstGeom prst="roundRect">
+            <a:avLst>
+              <a:gd name="adj" fmla="val 7143"/>
+            </a:avLst>
+          </a:prstGeom>
+          <a:solidFill>
+            <a:srgbClr val="FFFFFF">
+              <a:alpha val="88000"/>
+            </a:srgbClr>
+          </a:solidFill>
+          <a:ln w="12700">
+            <a:solidFill>
+              <a:srgbClr val="D6E8F2"/>
+            </a:solidFill>
+            <a:prstDash val="solid"/>
+          </a:ln>
+        </p:spPr>
+      </p:sp>
+      <p:sp>
+        <p:nvSpPr>
+          <p:cNvPr id="14" name="Shape 12"/>
+          <p:cNvSpPr/>
+          <p:nvPr/>
+        </p:nvSpPr>
+        <p:spPr>
+          <a:xfrm>
+            <a:off x="7891272" y="3108960"/>
+            <a:ext cx="566928" cy="566928"/>
           </a:xfrm>
           <a:prstGeom prst="ellipse">
             <a:avLst/>
@@ -15224,172 +16841,24 @@
       </p:sp>
       <p:sp>
         <p:nvSpPr>
-          <p:cNvPr id="9" name="Text 7"/>
-          <p:cNvSpPr/>
-          <p:nvPr/>
-        </p:nvSpPr>
-        <p:spPr>
-          <a:xfrm>
-            <a:off x="640080" y="731520"/>
-            <a:ext cx="420624" cy="164592"/>
-          </a:xfrm>
-          <a:prstGeom prst="rect">
-            <a:avLst/>
-          </a:prstGeom>
-          <a:noFill/>
-          <a:ln/>
-        </p:spPr>
-        <p:txBody>
-          <a:bodyPr wrap="square" lIns="0" tIns="0" rIns="0" bIns="0" rtlCol="0" anchor="ctr"/>
-          <a:lstStyle/>
-          <a:p>
-            <a:pPr algn="ctr" indent="0" marL="0">
-              <a:buNone/>
-            </a:pPr>
-            <a:r>
-              <a:rPr lang="en-US" sz="1100" b="1" dirty="0">
-                <a:solidFill>
-                  <a:srgbClr val="FFFFFF"/>
-                </a:solidFill>
-                <a:latin typeface="Aptos" pitchFamily="34" charset="0"/>
-                <a:ea typeface="Aptos" pitchFamily="34" charset="-122"/>
-                <a:cs typeface="Aptos" pitchFamily="34" charset="-120"/>
-              </a:rPr>
-              <a:t>3</a:t>
-            </a:r>
-            <a:endParaRPr lang="en-US" sz="1100" dirty="0"/>
-          </a:p>
-        </p:txBody>
-      </p:sp>
-      <p:sp>
-        <p:nvSpPr>
-          <p:cNvPr id="10" name="Text 8"/>
-          <p:cNvSpPr/>
-          <p:nvPr/>
-        </p:nvSpPr>
-        <p:spPr>
-          <a:xfrm>
-            <a:off x="640080" y="621792"/>
-            <a:ext cx="10881360" cy="713232"/>
-          </a:xfrm>
-          <a:prstGeom prst="rect">
-            <a:avLst/>
-          </a:prstGeom>
-          <a:noFill/>
-          <a:ln/>
-        </p:spPr>
-        <p:txBody>
-          <a:bodyPr wrap="square" lIns="0" tIns="0" rIns="0" bIns="0" rtlCol="0" anchor="ctr">
-            <a:normAutofit/>
-          </a:bodyPr>
-          <a:lstStyle/>
-          <a:p>
-            <a:pPr indent="0" marL="0">
-              <a:buNone/>
-            </a:pPr>
-            <a:r>
-              <a:rPr lang="en-US" sz="3400" b="1" dirty="0">
-                <a:solidFill>
-                  <a:srgbClr val="003A63"/>
-                </a:solidFill>
-                <a:latin typeface="Aptos Display" pitchFamily="34" charset="0"/>
-                <a:ea typeface="Aptos Display" pitchFamily="34" charset="-122"/>
-                <a:cs typeface="Aptos Display" pitchFamily="34" charset="-120"/>
-              </a:rPr>
-              <a:t>Jurisdiction and Agency Policy Note</a:t>
-            </a:r>
-            <a:endParaRPr lang="en-US" sz="3400" dirty="0"/>
-          </a:p>
-        </p:txBody>
-      </p:sp>
-      <p:sp>
-        <p:nvSpPr>
-          <p:cNvPr id="11" name="Text 9"/>
-          <p:cNvSpPr/>
-          <p:nvPr/>
-        </p:nvSpPr>
-        <p:spPr>
-          <a:xfrm>
-            <a:off x="868680" y="1508760"/>
-            <a:ext cx="6537960" cy="4160520"/>
-          </a:xfrm>
-          <a:prstGeom prst="rect">
-            <a:avLst/>
-          </a:prstGeom>
-          <a:noFill/>
-          <a:ln/>
-        </p:spPr>
-        <p:txBody>
-          <a:bodyPr wrap="square" lIns="635" tIns="635" rIns="635" bIns="635" rtlCol="0" anchor="t">
-            <a:normAutofit/>
-          </a:bodyPr>
-          <a:lstStyle/>
-          <a:p>
-            <a:r>
-              <a:rPr lang="en-US" sz="2100" dirty="0">
-                <a:solidFill>
-                  <a:srgbClr val="17364A"/>
-                </a:solidFill>
-                <a:latin typeface="Aptos" pitchFamily="34" charset="0"/>
-                <a:ea typeface="Aptos" pitchFamily="34" charset="-122"/>
-                <a:cs typeface="Aptos" pitchFamily="34" charset="-120"/>
-              </a:rPr>
-              <a:t>This national-level module is intended for training and planning purposes.</a:t>
-            </a:r>
-            <a:endParaRPr lang="en-US" sz="2100" dirty="0"/>
-          </a:p>
-          <a:p>
-            <a:r>
-              <a:rPr lang="en-US" sz="2100" dirty="0">
-                <a:solidFill>
-                  <a:srgbClr val="17364A"/>
-                </a:solidFill>
-                <a:latin typeface="Aptos" pitchFamily="34" charset="0"/>
-                <a:ea typeface="Aptos" pitchFamily="34" charset="-122"/>
-                <a:cs typeface="Aptos" pitchFamily="34" charset="-120"/>
-              </a:rPr>
-              <a:t>It does not replace legal, privacy, procurement, civil rights, records, or agency policy review.</a:t>
-            </a:r>
-            <a:endParaRPr lang="en-US" sz="2100" dirty="0"/>
-          </a:p>
-          <a:p>
-            <a:r>
-              <a:rPr lang="en-US" sz="2100" dirty="0">
-                <a:solidFill>
-                  <a:srgbClr val="17364A"/>
-                </a:solidFill>
-                <a:latin typeface="Aptos" pitchFamily="34" charset="0"/>
-                <a:ea typeface="Aptos" pitchFamily="34" charset="-122"/>
-                <a:cs typeface="Aptos" pitchFamily="34" charset="-120"/>
-              </a:rPr>
-              <a:t>Learners should confirm applicable requirements in their own jurisdiction and organization before.</a:t>
-            </a:r>
-            <a:endParaRPr lang="en-US" sz="2100" dirty="0"/>
-          </a:p>
-        </p:txBody>
-      </p:sp>
-      <p:sp>
-        <p:nvSpPr>
-          <p:cNvPr id="12" name="Shape 10"/>
-          <p:cNvSpPr/>
-          <p:nvPr/>
-        </p:nvSpPr>
-        <p:spPr>
-          <a:xfrm>
-            <a:off x="7909560" y="1417320"/>
-            <a:ext cx="3154680" cy="1828800"/>
-          </a:xfrm>
-          <a:prstGeom prst="roundRect">
-            <a:avLst>
-              <a:gd name="adj" fmla="val 6000"/>
-            </a:avLst>
+          <p:cNvPr id="15" name="Shape 13"/>
+          <p:cNvSpPr/>
+          <p:nvPr/>
+        </p:nvSpPr>
+        <p:spPr>
+          <a:xfrm>
+            <a:off x="10287000" y="3108960"/>
+            <a:ext cx="566928" cy="566928"/>
+          </a:xfrm>
+          <a:prstGeom prst="ellipse">
+            <a:avLst/>
           </a:prstGeom>
           <a:solidFill>
-            <a:srgbClr val="EEF8ED"/>
+            <a:srgbClr val="2F8A28"/>
           </a:solidFill>
           <a:ln w="12700">
             <a:solidFill>
-              <a:srgbClr val="B9D7E6"/>
+              <a:srgbClr val="2F8A28"/>
             </a:solidFill>
             <a:prstDash val="solid"/>
           </a:ln>
@@ -15397,14 +16866,108 @@
       </p:sp>
       <p:sp>
         <p:nvSpPr>
-          <p:cNvPr id="13" name="Text 11"/>
-          <p:cNvSpPr/>
-          <p:nvPr/>
-        </p:nvSpPr>
-        <p:spPr>
-          <a:xfrm>
-            <a:off x="8074152" y="1563624"/>
-            <a:ext cx="2825496" cy="256032"/>
+          <p:cNvPr id="16" name="Shape 14"/>
+          <p:cNvSpPr/>
+          <p:nvPr/>
+        </p:nvSpPr>
+        <p:spPr>
+          <a:xfrm>
+            <a:off x="9089136" y="3456432"/>
+            <a:ext cx="566928" cy="566928"/>
+          </a:xfrm>
+          <a:prstGeom prst="ellipse">
+            <a:avLst/>
+          </a:prstGeom>
+          <a:solidFill>
+            <a:srgbClr val="6A4CA3"/>
+          </a:solidFill>
+          <a:ln w="12700">
+            <a:solidFill>
+              <a:srgbClr val="6A4CA3"/>
+            </a:solidFill>
+            <a:prstDash val="solid"/>
+          </a:ln>
+        </p:spPr>
+      </p:sp>
+      <p:sp>
+        <p:nvSpPr>
+          <p:cNvPr id="17" name="Shape 15"/>
+          <p:cNvSpPr/>
+          <p:nvPr/>
+        </p:nvSpPr>
+        <p:spPr>
+          <a:xfrm>
+            <a:off x="8385048" y="3419856"/>
+            <a:ext cx="1975104" cy="0"/>
+          </a:xfrm>
+          <a:prstGeom prst="line">
+            <a:avLst/>
+          </a:prstGeom>
+          <a:noFill/>
+          <a:ln w="25400">
+            <a:solidFill>
+              <a:srgbClr val="8ABBD8"/>
+            </a:solidFill>
+            <a:prstDash val="solid"/>
+          </a:ln>
+        </p:spPr>
+      </p:sp>
+      <p:sp>
+        <p:nvSpPr>
+          <p:cNvPr id="18" name="Shape 16"/>
+          <p:cNvSpPr/>
+          <p:nvPr/>
+        </p:nvSpPr>
+        <p:spPr>
+          <a:xfrm>
+            <a:off x="8202168" y="3630168"/>
+            <a:ext cx="1170432" cy="118872"/>
+          </a:xfrm>
+          <a:prstGeom prst="line">
+            <a:avLst/>
+          </a:prstGeom>
+          <a:noFill/>
+          <a:ln w="25400">
+            <a:solidFill>
+              <a:srgbClr val="8ABBD8"/>
+            </a:solidFill>
+            <a:prstDash val="solid"/>
+          </a:ln>
+        </p:spPr>
+      </p:sp>
+      <p:sp>
+        <p:nvSpPr>
+          <p:cNvPr id="19" name="Shape 17"/>
+          <p:cNvSpPr/>
+          <p:nvPr/>
+        </p:nvSpPr>
+        <p:spPr>
+          <a:xfrm>
+            <a:off x="10543032" y="3630168"/>
+            <a:ext cx="-1170432" cy="118872"/>
+          </a:xfrm>
+          <a:prstGeom prst="line">
+            <a:avLst/>
+          </a:prstGeom>
+          <a:noFill/>
+          <a:ln w="25400">
+            <a:solidFill>
+              <a:srgbClr val="8ABBD8"/>
+            </a:solidFill>
+            <a:prstDash val="solid"/>
+          </a:ln>
+        </p:spPr>
+      </p:sp>
+      <p:sp>
+        <p:nvSpPr>
+          <p:cNvPr id="20" name="Text 18"/>
+          <p:cNvSpPr/>
+          <p:nvPr/>
+        </p:nvSpPr>
+        <p:spPr>
+          <a:xfrm>
+            <a:off x="7863840" y="4069080"/>
+            <a:ext cx="3017520" cy="164592"/>
           </a:xfrm>
           <a:prstGeom prst="rect">
             <a:avLst/>
@@ -15416,79 +16979,38 @@
           <a:bodyPr wrap="square" lIns="0" tIns="0" rIns="0" bIns="0" rtlCol="0" anchor="ctr"/>
           <a:lstStyle/>
           <a:p>
-            <a:pPr indent="0" marL="0">
-              <a:buNone/>
-            </a:pPr>
-            <a:r>
-              <a:rPr lang="en-US" sz="1300" b="1" dirty="0">
-                <a:solidFill>
-                  <a:srgbClr val="0068B7"/>
-                </a:solidFill>
-                <a:latin typeface="Aptos" pitchFamily="34" charset="0"/>
-                <a:ea typeface="Aptos" pitchFamily="34" charset="-122"/>
-                <a:cs typeface="Aptos" pitchFamily="34" charset="-120"/>
-              </a:rPr>
-              <a:t>Key idea</a:t>
-            </a:r>
-            <a:endParaRPr lang="en-US" sz="1300" dirty="0"/>
-          </a:p>
-        </p:txBody>
-      </p:sp>
-      <p:sp>
-        <p:nvSpPr>
-          <p:cNvPr id="14" name="Text 12"/>
-          <p:cNvSpPr/>
-          <p:nvPr/>
-        </p:nvSpPr>
-        <p:spPr>
-          <a:xfrm>
-            <a:off x="8074152" y="1920240"/>
-            <a:ext cx="2825496" cy="1188720"/>
-          </a:xfrm>
-          <a:prstGeom prst="rect">
-            <a:avLst/>
-          </a:prstGeom>
-          <a:noFill/>
-          <a:ln/>
-        </p:spPr>
-        <p:txBody>
-          <a:bodyPr wrap="square" lIns="0" tIns="0" rIns="0" bIns="0" rtlCol="0" anchor="t">
-            <a:normAutofit/>
-          </a:bodyPr>
-          <a:lstStyle/>
-          <a:p>
-            <a:pPr indent="0" marL="0">
-              <a:buNone/>
-            </a:pPr>
-            <a:r>
-              <a:rPr lang="en-US" sz="1550" dirty="0">
-                <a:solidFill>
-                  <a:srgbClr val="17364A"/>
-                </a:solidFill>
-                <a:latin typeface="Aptos" pitchFamily="34" charset="0"/>
-                <a:ea typeface="Aptos" pitchFamily="34" charset="-122"/>
-                <a:cs typeface="Aptos" pitchFamily="34" charset="-120"/>
-              </a:rPr>
-              <a:t>This national-level module is intended for training and planning purposes.</a:t>
-            </a:r>
-            <a:endParaRPr lang="en-US" sz="1550" dirty="0"/>
-          </a:p>
-        </p:txBody>
-      </p:sp>
-      <p:sp>
-        <p:nvSpPr>
-          <p:cNvPr id="15" name="Shape 13"/>
-          <p:cNvSpPr/>
-          <p:nvPr/>
-        </p:nvSpPr>
-        <p:spPr>
-          <a:xfrm>
-            <a:off x="7909560" y="3520440"/>
-            <a:ext cx="3154680" cy="1737360"/>
+            <a:pPr algn="ctr" indent="0" marL="0">
+              <a:buNone/>
+            </a:pPr>
+            <a:r>
+              <a:rPr lang="en-US" sz="900" b="1" dirty="0">
+                <a:solidFill>
+                  <a:srgbClr val="003A63"/>
+                </a:solidFill>
+                <a:latin typeface="Aptos" pitchFamily="34" charset="0"/>
+                <a:ea typeface="Aptos" pitchFamily="34" charset="-122"/>
+                <a:cs typeface="Aptos" pitchFamily="34" charset="-120"/>
+              </a:rPr>
+              <a:t>Decision rights</a:t>
+            </a:r>
+            <a:endParaRPr lang="en-US" sz="900" dirty="0"/>
+          </a:p>
+        </p:txBody>
+      </p:sp>
+      <p:sp>
+        <p:nvSpPr>
+          <p:cNvPr id="21" name="Shape 19"/>
+          <p:cNvSpPr/>
+          <p:nvPr/>
+        </p:nvSpPr>
+        <p:spPr>
+          <a:xfrm>
+            <a:off x="7635240" y="4498848"/>
+            <a:ext cx="3474720" cy="1143000"/>
           </a:xfrm>
           <a:prstGeom prst="roundRect">
             <a:avLst>
-              <a:gd name="adj" fmla="val 6316"/>
+              <a:gd name="adj" fmla="val 9600"/>
             </a:avLst>
           </a:prstGeom>
           <a:solidFill>
@@ -15504,14 +17026,14 @@
       </p:sp>
       <p:sp>
         <p:nvSpPr>
-          <p:cNvPr id="16" name="Text 14"/>
-          <p:cNvSpPr/>
-          <p:nvPr/>
-        </p:nvSpPr>
-        <p:spPr>
-          <a:xfrm>
-            <a:off x="8074152" y="3666744"/>
-            <a:ext cx="2825496" cy="256032"/>
+          <p:cNvPr id="22" name="Text 20"/>
+          <p:cNvSpPr/>
+          <p:nvPr/>
+        </p:nvSpPr>
+        <p:spPr>
+          <a:xfrm>
+            <a:off x="7799832" y="4645152"/>
+            <a:ext cx="3145536" cy="256032"/>
           </a:xfrm>
           <a:prstGeom prst="rect">
             <a:avLst/>
@@ -15535,7 +17057,7 @@
                 <a:ea typeface="Aptos" pitchFamily="34" charset="-122"/>
                 <a:cs typeface="Aptos" pitchFamily="34" charset="-120"/>
               </a:rPr>
-              <a:t>Use this for</a:t>
+              <a:t>What to document</a:t>
             </a:r>
             <a:endParaRPr lang="en-US" sz="1300" dirty="0"/>
           </a:p>
@@ -15543,14 +17065,14 @@
       </p:sp>
       <p:sp>
         <p:nvSpPr>
-          <p:cNvPr id="17" name="Text 15"/>
-          <p:cNvSpPr/>
-          <p:nvPr/>
-        </p:nvSpPr>
-        <p:spPr>
-          <a:xfrm>
-            <a:off x="8074152" y="4023360"/>
-            <a:ext cx="2825496" cy="1097280"/>
+          <p:cNvPr id="23" name="Text 21"/>
+          <p:cNvSpPr/>
+          <p:nvPr/>
+        </p:nvSpPr>
+        <p:spPr>
+          <a:xfrm>
+            <a:off x="7799832" y="5001768"/>
+            <a:ext cx="3145536" cy="502920"/>
           </a:xfrm>
           <a:prstGeom prst="rect">
             <a:avLst/>
@@ -15576,7 +17098,7 @@
                 <a:ea typeface="Aptos" pitchFamily="34" charset="-122"/>
                 <a:cs typeface="Aptos" pitchFamily="34" charset="-120"/>
               </a:rPr>
-              <a:t>Connect the concept to public health decisions, safeguards, documentation, or implementation work.</a:t>
+              <a:t>Translate this concept into clear decision rights, review steps, documentation expectations, and escalation paths before an AI-supported workflow is approved.</a:t>
             </a:r>
             <a:endParaRPr lang="en-US" sz="1550" dirty="0"/>
           </a:p>
@@ -15750,8 +17272,8 @@
         </p:nvSpPr>
         <p:spPr>
           <a:xfrm>
-            <a:off x="9966960" y="6537960"/>
-            <a:ext cx="1645920" cy="201168"/>
+            <a:off x="9646920" y="6537960"/>
+            <a:ext cx="1965960" cy="201168"/>
           </a:xfrm>
           <a:prstGeom prst="rect">
             <a:avLst/>
@@ -15775,7 +17297,7 @@
                 <a:ea typeface="Aptos" pitchFamily="34" charset="-122"/>
                 <a:cs typeface="Aptos" pitchFamily="34" charset="-120"/>
               </a:rPr>
-              <a:t>Â© Paula Soper</a:t>
+              <a:t>Copyright Paula Soper</a:t>
             </a:r>
             <a:endParaRPr lang="en-US" sz="800" dirty="0"/>
           </a:p>
@@ -15822,77 +17344,13 @@
       </p:sp>
       <p:sp>
         <p:nvSpPr>
-          <p:cNvPr id="8" name="Shape 6"/>
+          <p:cNvPr id="8" name="Text 6"/>
           <p:cNvSpPr/>
           <p:nvPr/>
         </p:nvSpPr>
         <p:spPr>
           <a:xfrm>
             <a:off x="640080" y="658368"/>
-            <a:ext cx="420624" cy="420624"/>
-          </a:xfrm>
-          <a:prstGeom prst="ellipse">
-            <a:avLst/>
-          </a:prstGeom>
-          <a:solidFill>
-            <a:srgbClr val="0068B7"/>
-          </a:solidFill>
-          <a:ln w="12700">
-            <a:solidFill>
-              <a:srgbClr val="0068B7"/>
-            </a:solidFill>
-            <a:prstDash val="solid"/>
-          </a:ln>
-        </p:spPr>
-      </p:sp>
-      <p:sp>
-        <p:nvSpPr>
-          <p:cNvPr id="9" name="Text 7"/>
-          <p:cNvSpPr/>
-          <p:nvPr/>
-        </p:nvSpPr>
-        <p:spPr>
-          <a:xfrm>
-            <a:off x="640080" y="731520"/>
-            <a:ext cx="420624" cy="164592"/>
-          </a:xfrm>
-          <a:prstGeom prst="rect">
-            <a:avLst/>
-          </a:prstGeom>
-          <a:noFill/>
-          <a:ln/>
-        </p:spPr>
-        <p:txBody>
-          <a:bodyPr wrap="square" lIns="0" tIns="0" rIns="0" bIns="0" rtlCol="0" anchor="ctr"/>
-          <a:lstStyle/>
-          <a:p>
-            <a:pPr algn="ctr" indent="0" marL="0">
-              <a:buNone/>
-            </a:pPr>
-            <a:r>
-              <a:rPr lang="en-US" sz="1100" b="1" dirty="0">
-                <a:solidFill>
-                  <a:srgbClr val="FFFFFF"/>
-                </a:solidFill>
-                <a:latin typeface="Aptos" pitchFamily="34" charset="0"/>
-                <a:ea typeface="Aptos" pitchFamily="34" charset="-122"/>
-                <a:cs typeface="Aptos" pitchFamily="34" charset="-120"/>
-              </a:rPr>
-              <a:t>4</a:t>
-            </a:r>
-            <a:endParaRPr lang="en-US" sz="1100" dirty="0"/>
-          </a:p>
-        </p:txBody>
-      </p:sp>
-      <p:sp>
-        <p:nvSpPr>
-          <p:cNvPr id="10" name="Text 8"/>
-          <p:cNvSpPr/>
-          <p:nvPr/>
-        </p:nvSpPr>
-        <p:spPr>
-          <a:xfrm>
-            <a:off x="640080" y="621792"/>
             <a:ext cx="10881360" cy="713232"/>
           </a:xfrm>
           <a:prstGeom prst="rect">
@@ -15927,14 +17385,14 @@
       </p:sp>
       <p:sp>
         <p:nvSpPr>
-          <p:cNvPr id="11" name="Text 9"/>
+          <p:cNvPr id="9" name="Text 7"/>
           <p:cNvSpPr/>
           <p:nvPr/>
         </p:nvSpPr>
         <p:spPr>
           <a:xfrm>
             <a:off x="868680" y="1508760"/>
-            <a:ext cx="6537960" cy="4160520"/>
+            <a:ext cx="6309360" cy="4160520"/>
           </a:xfrm>
           <a:prstGeom prst="rect">
             <a:avLst/>
@@ -15993,18 +17451,18 @@
       </p:sp>
       <p:sp>
         <p:nvSpPr>
-          <p:cNvPr id="12" name="Shape 10"/>
-          <p:cNvSpPr/>
-          <p:nvPr/>
-        </p:nvSpPr>
-        <p:spPr>
-          <a:xfrm>
-            <a:off x="7909560" y="1417320"/>
-            <a:ext cx="3154680" cy="1828800"/>
+          <p:cNvPr id="10" name="Shape 8"/>
+          <p:cNvSpPr/>
+          <p:nvPr/>
+        </p:nvSpPr>
+        <p:spPr>
+          <a:xfrm>
+            <a:off x="7635240" y="1325880"/>
+            <a:ext cx="3474720" cy="1325880"/>
           </a:xfrm>
           <a:prstGeom prst="roundRect">
             <a:avLst>
-              <a:gd name="adj" fmla="val 6000"/>
+              <a:gd name="adj" fmla="val 8276"/>
             </a:avLst>
           </a:prstGeom>
           <a:solidFill>
@@ -16020,14 +17478,14 @@
       </p:sp>
       <p:sp>
         <p:nvSpPr>
-          <p:cNvPr id="13" name="Text 11"/>
-          <p:cNvSpPr/>
-          <p:nvPr/>
-        </p:nvSpPr>
-        <p:spPr>
-          <a:xfrm>
-            <a:off x="8074152" y="1563624"/>
-            <a:ext cx="2825496" cy="256032"/>
+          <p:cNvPr id="11" name="Text 9"/>
+          <p:cNvSpPr/>
+          <p:nvPr/>
+        </p:nvSpPr>
+        <p:spPr>
+          <a:xfrm>
+            <a:off x="7799832" y="1472184"/>
+            <a:ext cx="3145536" cy="256032"/>
           </a:xfrm>
           <a:prstGeom prst="rect">
             <a:avLst/>
@@ -16051,7 +17509,7 @@
                 <a:ea typeface="Aptos" pitchFamily="34" charset="-122"/>
                 <a:cs typeface="Aptos" pitchFamily="34" charset="-120"/>
               </a:rPr>
-              <a:t>Key idea</a:t>
+              <a:t>Core concept</a:t>
             </a:r>
             <a:endParaRPr lang="en-US" sz="1300" dirty="0"/>
           </a:p>
@@ -16059,14 +17517,14 @@
       </p:sp>
       <p:sp>
         <p:nvSpPr>
-          <p:cNvPr id="14" name="Text 12"/>
-          <p:cNvSpPr/>
-          <p:nvPr/>
-        </p:nvSpPr>
-        <p:spPr>
-          <a:xfrm>
-            <a:off x="8074152" y="1920240"/>
-            <a:ext cx="2825496" cy="1188720"/>
+          <p:cNvPr id="12" name="Text 10"/>
+          <p:cNvSpPr/>
+          <p:nvPr/>
+        </p:nvSpPr>
+        <p:spPr>
+          <a:xfrm>
+            <a:off x="7799832" y="1828800"/>
+            <a:ext cx="3145536" cy="685800"/>
           </a:xfrm>
           <a:prstGeom prst="rect">
             <a:avLst/>
@@ -16100,18 +17558,159 @@
       </p:sp>
       <p:sp>
         <p:nvSpPr>
-          <p:cNvPr id="15" name="Shape 13"/>
-          <p:cNvSpPr/>
-          <p:nvPr/>
-        </p:nvSpPr>
-        <p:spPr>
-          <a:xfrm>
-            <a:off x="7909560" y="3520440"/>
-            <a:ext cx="3154680" cy="1737360"/>
+          <p:cNvPr id="13" name="Shape 11"/>
+          <p:cNvSpPr/>
+          <p:nvPr/>
+        </p:nvSpPr>
+        <p:spPr>
+          <a:xfrm>
+            <a:off x="7635240" y="2788920"/>
+            <a:ext cx="3474720" cy="1536192"/>
           </a:xfrm>
           <a:prstGeom prst="roundRect">
             <a:avLst>
-              <a:gd name="adj" fmla="val 6316"/>
+              <a:gd name="adj" fmla="val 7143"/>
+            </a:avLst>
+          </a:prstGeom>
+          <a:solidFill>
+            <a:srgbClr val="FFFFFF">
+              <a:alpha val="88000"/>
+            </a:srgbClr>
+          </a:solidFill>
+          <a:ln w="12700">
+            <a:solidFill>
+              <a:srgbClr val="D6E8F2"/>
+            </a:solidFill>
+            <a:prstDash val="solid"/>
+          </a:ln>
+        </p:spPr>
+      </p:sp>
+      <p:sp>
+        <p:nvSpPr>
+          <p:cNvPr id="14" name="Shape 12"/>
+          <p:cNvSpPr/>
+          <p:nvPr/>
+        </p:nvSpPr>
+        <p:spPr>
+          <a:xfrm>
+            <a:off x="8074152" y="3291840"/>
+            <a:ext cx="2596896" cy="749808"/>
+          </a:xfrm>
+          <a:prstGeom prst="rect">
+            <a:avLst/>
+          </a:prstGeom>
+          <a:solidFill>
+            <a:srgbClr val="EAF6F8"/>
+          </a:solidFill>
+          <a:ln w="12700">
+            <a:solidFill>
+              <a:srgbClr val="8ABBD8"/>
+            </a:solidFill>
+            <a:prstDash val="solid"/>
+          </a:ln>
+        </p:spPr>
+      </p:sp>
+      <p:sp>
+        <p:nvSpPr>
+          <p:cNvPr id="15" name="Shape 13"/>
+          <p:cNvSpPr/>
+          <p:nvPr/>
+        </p:nvSpPr>
+        <p:spPr>
+          <a:xfrm>
+            <a:off x="8202168" y="3721608"/>
+            <a:ext cx="2340864" cy="0"/>
+          </a:xfrm>
+          <a:prstGeom prst="line">
+            <a:avLst/>
+          </a:prstGeom>
+          <a:noFill/>
+          <a:ln w="19050">
+            <a:solidFill>
+              <a:srgbClr val="0068B7"/>
+            </a:solidFill>
+            <a:prstDash val="solid"/>
+          </a:ln>
+        </p:spPr>
+      </p:sp>
+      <p:sp>
+        <p:nvSpPr>
+          <p:cNvPr id="16" name="Shape 14"/>
+          <p:cNvSpPr/>
+          <p:nvPr/>
+        </p:nvSpPr>
+        <p:spPr>
+          <a:xfrm>
+            <a:off x="9198864" y="4206240"/>
+            <a:ext cx="347472" cy="347472"/>
+          </a:xfrm>
+          <a:prstGeom prst="ellipse">
+            <a:avLst/>
+          </a:prstGeom>
+          <a:solidFill>
+            <a:srgbClr val="2F8A28"/>
+          </a:solidFill>
+          <a:ln w="12700">
+            <a:solidFill>
+              <a:srgbClr val="2F8A28"/>
+            </a:solidFill>
+            <a:prstDash val="solid"/>
+          </a:ln>
+        </p:spPr>
+      </p:sp>
+      <p:sp>
+        <p:nvSpPr>
+          <p:cNvPr id="17" name="Text 15"/>
+          <p:cNvSpPr/>
+          <p:nvPr/>
+        </p:nvSpPr>
+        <p:spPr>
+          <a:xfrm>
+            <a:off x="7909560" y="3977640"/>
+            <a:ext cx="2926080" cy="182880"/>
+          </a:xfrm>
+          <a:prstGeom prst="rect">
+            <a:avLst/>
+          </a:prstGeom>
+          <a:noFill/>
+          <a:ln/>
+        </p:spPr>
+        <p:txBody>
+          <a:bodyPr wrap="square" lIns="0" tIns="0" rIns="0" bIns="0" rtlCol="0" anchor="ctr"/>
+          <a:lstStyle/>
+          <a:p>
+            <a:pPr algn="ctr" indent="0" marL="0">
+              <a:buNone/>
+            </a:pPr>
+            <a:r>
+              <a:rPr lang="en-US" sz="1000" dirty="0">
+                <a:solidFill>
+                  <a:srgbClr val="003A63"/>
+                </a:solidFill>
+                <a:latin typeface="Aptos" pitchFamily="34" charset="0"/>
+                <a:ea typeface="Aptos" pitchFamily="34" charset="-122"/>
+                <a:cs typeface="Aptos" pitchFamily="34" charset="-120"/>
+              </a:rPr>
+              <a:t>Concept to action</a:t>
+            </a:r>
+            <a:endParaRPr lang="en-US" sz="1000" dirty="0"/>
+          </a:p>
+        </p:txBody>
+      </p:sp>
+      <p:sp>
+        <p:nvSpPr>
+          <p:cNvPr id="18" name="Shape 16"/>
+          <p:cNvSpPr/>
+          <p:nvPr/>
+        </p:nvSpPr>
+        <p:spPr>
+          <a:xfrm>
+            <a:off x="7635240" y="4498848"/>
+            <a:ext cx="3474720" cy="1143000"/>
+          </a:xfrm>
+          <a:prstGeom prst="roundRect">
+            <a:avLst>
+              <a:gd name="adj" fmla="val 9600"/>
             </a:avLst>
           </a:prstGeom>
           <a:solidFill>
@@ -16127,14 +17726,14 @@
       </p:sp>
       <p:sp>
         <p:nvSpPr>
-          <p:cNvPr id="16" name="Text 14"/>
-          <p:cNvSpPr/>
-          <p:nvPr/>
-        </p:nvSpPr>
-        <p:spPr>
-          <a:xfrm>
-            <a:off x="8074152" y="3666744"/>
-            <a:ext cx="2825496" cy="256032"/>
+          <p:cNvPr id="19" name="Text 17"/>
+          <p:cNvSpPr/>
+          <p:nvPr/>
+        </p:nvSpPr>
+        <p:spPr>
+          <a:xfrm>
+            <a:off x="7799832" y="4645152"/>
+            <a:ext cx="3145536" cy="256032"/>
           </a:xfrm>
           <a:prstGeom prst="rect">
             <a:avLst/>
@@ -16158,7 +17757,7 @@
                 <a:ea typeface="Aptos" pitchFamily="34" charset="-122"/>
                 <a:cs typeface="Aptos" pitchFamily="34" charset="-120"/>
               </a:rPr>
-              <a:t>Use this for</a:t>
+              <a:t>Apply it</a:t>
             </a:r>
             <a:endParaRPr lang="en-US" sz="1300" dirty="0"/>
           </a:p>
@@ -16166,14 +17765,14 @@
       </p:sp>
       <p:sp>
         <p:nvSpPr>
-          <p:cNvPr id="17" name="Text 15"/>
-          <p:cNvSpPr/>
-          <p:nvPr/>
-        </p:nvSpPr>
-        <p:spPr>
-          <a:xfrm>
-            <a:off x="8074152" y="4023360"/>
-            <a:ext cx="2825496" cy="1097280"/>
+          <p:cNvPr id="20" name="Text 18"/>
+          <p:cNvSpPr/>
+          <p:nvPr/>
+        </p:nvSpPr>
+        <p:spPr>
+          <a:xfrm>
+            <a:off x="7799832" y="5001768"/>
+            <a:ext cx="3145536" cy="502920"/>
           </a:xfrm>
           <a:prstGeom prst="rect">
             <a:avLst/>
@@ -16199,7 +17798,7 @@
                 <a:ea typeface="Aptos" pitchFamily="34" charset="-122"/>
                 <a:cs typeface="Aptos" pitchFamily="34" charset="-120"/>
               </a:rPr>
-              <a:t>Connect the concept to public health decisions, safeguards, documentation, or implementation work.</a:t>
+              <a:t>Connect the concept to public health purpose, responsible use, required safeguards, documentation, and the next action a department should take.</a:t>
             </a:r>
             <a:endParaRPr lang="en-US" sz="1550" dirty="0"/>
           </a:p>

--- a/downloads/presentations/modules/arc-330.pptx
+++ b/downloads/presentations/modules/arc-330.pptx
@@ -3518,13 +3518,11 @@
             </a:avLst>
           </a:prstGeom>
           <a:solidFill>
-            <a:srgbClr val="FFFFFF">
-              <a:alpha val="88000"/>
-            </a:srgbClr>
+            <a:srgbClr val="FFFFFF"/>
           </a:solidFill>
           <a:ln w="12700">
             <a:solidFill>
-              <a:srgbClr val="D6E8F2"/>
+              <a:srgbClr val="B9D7E6"/>
             </a:solidFill>
             <a:prstDash val="solid"/>
           </a:ln>
@@ -3532,119 +3530,112 @@
       </p:sp>
       <p:sp>
         <p:nvSpPr>
-          <p:cNvPr id="14" name="Shape 12"/>
-          <p:cNvSpPr/>
-          <p:nvPr/>
-        </p:nvSpPr>
-        <p:spPr>
-          <a:xfrm>
-            <a:off x="8074152" y="3291840"/>
-            <a:ext cx="2596896" cy="749808"/>
-          </a:xfrm>
-          <a:prstGeom prst="rect">
-            <a:avLst/>
-          </a:prstGeom>
-          <a:solidFill>
-            <a:srgbClr val="EAF6F8"/>
-          </a:solidFill>
-          <a:ln w="12700">
-            <a:solidFill>
-              <a:srgbClr val="8ABBD8"/>
-            </a:solidFill>
-            <a:prstDash val="solid"/>
-          </a:ln>
-        </p:spPr>
-      </p:sp>
-      <p:sp>
-        <p:nvSpPr>
-          <p:cNvPr id="15" name="Shape 13"/>
-          <p:cNvSpPr/>
-          <p:nvPr/>
-        </p:nvSpPr>
-        <p:spPr>
-          <a:xfrm>
-            <a:off x="8202168" y="3721608"/>
-            <a:ext cx="2340864" cy="0"/>
-          </a:xfrm>
-          <a:prstGeom prst="line">
-            <a:avLst/>
-          </a:prstGeom>
-          <a:noFill/>
-          <a:ln w="19050">
-            <a:solidFill>
-              <a:srgbClr val="0068B7"/>
-            </a:solidFill>
-            <a:prstDash val="solid"/>
-          </a:ln>
-        </p:spPr>
+          <p:cNvPr id="14" name="Text 12"/>
+          <p:cNvSpPr/>
+          <p:nvPr/>
+        </p:nvSpPr>
+        <p:spPr>
+          <a:xfrm>
+            <a:off x="7799832" y="2935224"/>
+            <a:ext cx="3145536" cy="256032"/>
+          </a:xfrm>
+          <a:prstGeom prst="rect">
+            <a:avLst/>
+          </a:prstGeom>
+          <a:noFill/>
+          <a:ln/>
+        </p:spPr>
+        <p:txBody>
+          <a:bodyPr wrap="square" lIns="0" tIns="0" rIns="0" bIns="0" rtlCol="0" anchor="ctr"/>
+          <a:lstStyle/>
+          <a:p>
+            <a:pPr indent="0" marL="0">
+              <a:buNone/>
+            </a:pPr>
+            <a:r>
+              <a:rPr lang="en-US" sz="1300" b="1" dirty="0">
+                <a:solidFill>
+                  <a:srgbClr val="0068B7"/>
+                </a:solidFill>
+                <a:latin typeface="Aptos" pitchFamily="34" charset="0"/>
+                <a:ea typeface="Aptos" pitchFamily="34" charset="-122"/>
+                <a:cs typeface="Aptos" pitchFamily="34" charset="-120"/>
+              </a:rPr>
+              <a:t>Concept checkpoints</a:t>
+            </a:r>
+            <a:endParaRPr lang="en-US" sz="1300" dirty="0"/>
+          </a:p>
+        </p:txBody>
+      </p:sp>
+      <p:sp>
+        <p:nvSpPr>
+          <p:cNvPr id="15" name="Text 13"/>
+          <p:cNvSpPr/>
+          <p:nvPr/>
+        </p:nvSpPr>
+        <p:spPr>
+          <a:xfrm>
+            <a:off x="7818120" y="3300984"/>
+            <a:ext cx="3090672" cy="877824"/>
+          </a:xfrm>
+          <a:prstGeom prst="rect">
+            <a:avLst/>
+          </a:prstGeom>
+          <a:noFill/>
+          <a:ln/>
+        </p:spPr>
+        <p:txBody>
+          <a:bodyPr wrap="square" lIns="254" tIns="254" rIns="254" bIns="254" rtlCol="0" anchor="t">
+            <a:normAutofit/>
+          </a:bodyPr>
+          <a:lstStyle/>
+          <a:p>
+            <a:r>
+              <a:rPr lang="en-US" sz="1380" dirty="0">
+                <a:solidFill>
+                  <a:srgbClr val="17364A"/>
+                </a:solidFill>
+                <a:latin typeface="Aptos" pitchFamily="34" charset="0"/>
+                <a:ea typeface="Aptos" pitchFamily="34" charset="-122"/>
+                <a:cs typeface="Aptos" pitchFamily="34" charset="-120"/>
+              </a:rPr>
+              <a:t>Cloud computing provides remote infrastructure, platforms, and services that can host data.</a:t>
+            </a:r>
+            <a:endParaRPr lang="en-US" sz="1380" dirty="0"/>
+          </a:p>
+          <a:p>
+            <a:r>
+              <a:rPr lang="en-US" sz="1380" dirty="0">
+                <a:solidFill>
+                  <a:srgbClr val="17364A"/>
+                </a:solidFill>
+                <a:latin typeface="Aptos" pitchFamily="34" charset="0"/>
+                <a:ea typeface="Aptos" pitchFamily="34" charset="-122"/>
+                <a:cs typeface="Aptos" pitchFamily="34" charset="-120"/>
+              </a:rPr>
+              <a:t>Cloud deployment can improve scalability and resilience, but only when identity, access,.</a:t>
+            </a:r>
+            <a:endParaRPr lang="en-US" sz="1380" dirty="0"/>
+          </a:p>
+          <a:p>
+            <a:r>
+              <a:rPr lang="en-US" sz="1380" dirty="0">
+                <a:solidFill>
+                  <a:srgbClr val="17364A"/>
+                </a:solidFill>
+                <a:latin typeface="Aptos" pitchFamily="34" charset="0"/>
+                <a:ea typeface="Aptos" pitchFamily="34" charset="-122"/>
+                <a:cs typeface="Aptos" pitchFamily="34" charset="-120"/>
+              </a:rPr>
+              <a:t>Containers can improve reproducibility and deployment speed, but they must be scanned,.</a:t>
+            </a:r>
+            <a:endParaRPr lang="en-US" sz="1380" dirty="0"/>
+          </a:p>
+        </p:txBody>
       </p:sp>
       <p:sp>
         <p:nvSpPr>
           <p:cNvPr id="16" name="Shape 14"/>
-          <p:cNvSpPr/>
-          <p:nvPr/>
-        </p:nvSpPr>
-        <p:spPr>
-          <a:xfrm>
-            <a:off x="9198864" y="4206240"/>
-            <a:ext cx="347472" cy="347472"/>
-          </a:xfrm>
-          <a:prstGeom prst="ellipse">
-            <a:avLst/>
-          </a:prstGeom>
-          <a:solidFill>
-            <a:srgbClr val="2F8A28"/>
-          </a:solidFill>
-          <a:ln w="12700">
-            <a:solidFill>
-              <a:srgbClr val="2F8A28"/>
-            </a:solidFill>
-            <a:prstDash val="solid"/>
-          </a:ln>
-        </p:spPr>
-      </p:sp>
-      <p:sp>
-        <p:nvSpPr>
-          <p:cNvPr id="17" name="Text 15"/>
-          <p:cNvSpPr/>
-          <p:nvPr/>
-        </p:nvSpPr>
-        <p:spPr>
-          <a:xfrm>
-            <a:off x="7909560" y="3977640"/>
-            <a:ext cx="2926080" cy="182880"/>
-          </a:xfrm>
-          <a:prstGeom prst="rect">
-            <a:avLst/>
-          </a:prstGeom>
-          <a:noFill/>
-          <a:ln/>
-        </p:spPr>
-        <p:txBody>
-          <a:bodyPr wrap="square" lIns="0" tIns="0" rIns="0" bIns="0" rtlCol="0" anchor="ctr"/>
-          <a:lstStyle/>
-          <a:p>
-            <a:pPr algn="ctr" indent="0" marL="0">
-              <a:buNone/>
-            </a:pPr>
-            <a:r>
-              <a:rPr lang="en-US" sz="1000" dirty="0">
-                <a:solidFill>
-                  <a:srgbClr val="003A63"/>
-                </a:solidFill>
-                <a:latin typeface="Aptos" pitchFamily="34" charset="0"/>
-                <a:ea typeface="Aptos" pitchFamily="34" charset="-122"/>
-                <a:cs typeface="Aptos" pitchFamily="34" charset="-120"/>
-              </a:rPr>
-              <a:t>Concept to action</a:t>
-            </a:r>
-            <a:endParaRPr lang="en-US" sz="1000" dirty="0"/>
-          </a:p>
-        </p:txBody>
-      </p:sp>
-      <p:sp>
-        <p:nvSpPr>
-          <p:cNvPr id="18" name="Shape 16"/>
           <p:cNvSpPr/>
           <p:nvPr/>
         </p:nvSpPr>
@@ -3671,7 +3662,7 @@
       </p:sp>
       <p:sp>
         <p:nvSpPr>
-          <p:cNvPr id="19" name="Text 17"/>
+          <p:cNvPr id="17" name="Text 15"/>
           <p:cNvSpPr/>
           <p:nvPr/>
         </p:nvSpPr>
@@ -3710,7 +3701,7 @@
       </p:sp>
       <p:sp>
         <p:nvSpPr>
-          <p:cNvPr id="20" name="Text 18"/>
+          <p:cNvPr id="18" name="Text 16"/>
           <p:cNvSpPr/>
           <p:nvPr/>
         </p:nvSpPr>
@@ -4218,13 +4209,11 @@
             </a:avLst>
           </a:prstGeom>
           <a:solidFill>
-            <a:srgbClr val="FFFFFF">
-              <a:alpha val="88000"/>
-            </a:srgbClr>
+            <a:srgbClr val="FFFFFF"/>
           </a:solidFill>
           <a:ln w="12700">
             <a:solidFill>
-              <a:srgbClr val="D6E8F2"/>
+              <a:srgbClr val="B9D7E6"/>
             </a:solidFill>
             <a:prstDash val="solid"/>
           </a:ln>
@@ -4232,119 +4221,112 @@
       </p:sp>
       <p:sp>
         <p:nvSpPr>
-          <p:cNvPr id="14" name="Shape 12"/>
-          <p:cNvSpPr/>
-          <p:nvPr/>
-        </p:nvSpPr>
-        <p:spPr>
-          <a:xfrm>
-            <a:off x="8074152" y="3291840"/>
-            <a:ext cx="2596896" cy="749808"/>
-          </a:xfrm>
-          <a:prstGeom prst="rect">
-            <a:avLst/>
-          </a:prstGeom>
-          <a:solidFill>
-            <a:srgbClr val="EAF6F8"/>
-          </a:solidFill>
-          <a:ln w="12700">
-            <a:solidFill>
-              <a:srgbClr val="8ABBD8"/>
-            </a:solidFill>
-            <a:prstDash val="solid"/>
-          </a:ln>
-        </p:spPr>
-      </p:sp>
-      <p:sp>
-        <p:nvSpPr>
-          <p:cNvPr id="15" name="Shape 13"/>
-          <p:cNvSpPr/>
-          <p:nvPr/>
-        </p:nvSpPr>
-        <p:spPr>
-          <a:xfrm>
-            <a:off x="8202168" y="3721608"/>
-            <a:ext cx="2340864" cy="0"/>
-          </a:xfrm>
-          <a:prstGeom prst="line">
-            <a:avLst/>
-          </a:prstGeom>
-          <a:noFill/>
-          <a:ln w="19050">
-            <a:solidFill>
-              <a:srgbClr val="0068B7"/>
-            </a:solidFill>
-            <a:prstDash val="solid"/>
-          </a:ln>
-        </p:spPr>
+          <p:cNvPr id="14" name="Text 12"/>
+          <p:cNvSpPr/>
+          <p:nvPr/>
+        </p:nvSpPr>
+        <p:spPr>
+          <a:xfrm>
+            <a:off x="7799832" y="2935224"/>
+            <a:ext cx="3145536" cy="256032"/>
+          </a:xfrm>
+          <a:prstGeom prst="rect">
+            <a:avLst/>
+          </a:prstGeom>
+          <a:noFill/>
+          <a:ln/>
+        </p:spPr>
+        <p:txBody>
+          <a:bodyPr wrap="square" lIns="0" tIns="0" rIns="0" bIns="0" rtlCol="0" anchor="ctr"/>
+          <a:lstStyle/>
+          <a:p>
+            <a:pPr indent="0" marL="0">
+              <a:buNone/>
+            </a:pPr>
+            <a:r>
+              <a:rPr lang="en-US" sz="1300" b="1" dirty="0">
+                <a:solidFill>
+                  <a:srgbClr val="0068B7"/>
+                </a:solidFill>
+                <a:latin typeface="Aptos" pitchFamily="34" charset="0"/>
+                <a:ea typeface="Aptos" pitchFamily="34" charset="-122"/>
+                <a:cs typeface="Aptos" pitchFamily="34" charset="-120"/>
+              </a:rPr>
+              <a:t>Concept checkpoints</a:t>
+            </a:r>
+            <a:endParaRPr lang="en-US" sz="1300" dirty="0"/>
+          </a:p>
+        </p:txBody>
+      </p:sp>
+      <p:sp>
+        <p:nvSpPr>
+          <p:cNvPr id="15" name="Text 13"/>
+          <p:cNvSpPr/>
+          <p:nvPr/>
+        </p:nvSpPr>
+        <p:spPr>
+          <a:xfrm>
+            <a:off x="7818120" y="3300984"/>
+            <a:ext cx="3090672" cy="877824"/>
+          </a:xfrm>
+          <a:prstGeom prst="rect">
+            <a:avLst/>
+          </a:prstGeom>
+          <a:noFill/>
+          <a:ln/>
+        </p:spPr>
+        <p:txBody>
+          <a:bodyPr wrap="square" lIns="254" tIns="254" rIns="254" bIns="254" rtlCol="0" anchor="t">
+            <a:normAutofit/>
+          </a:bodyPr>
+          <a:lstStyle/>
+          <a:p>
+            <a:r>
+              <a:rPr lang="en-US" sz="1380" dirty="0">
+                <a:solidFill>
+                  <a:srgbClr val="17364A"/>
+                </a:solidFill>
+                <a:latin typeface="Aptos" pitchFamily="34" charset="0"/>
+                <a:ea typeface="Aptos" pitchFamily="34" charset="-122"/>
+                <a:cs typeface="Aptos" pitchFamily="34" charset="-120"/>
+              </a:rPr>
+              <a:t>A public health agency may deploy an internal RAG assistant in a cloud environment so.</a:t>
+            </a:r>
+            <a:endParaRPr lang="en-US" sz="1380" dirty="0"/>
+          </a:p>
+          <a:p>
+            <a:r>
+              <a:rPr lang="en-US" sz="1380" dirty="0">
+                <a:solidFill>
+                  <a:srgbClr val="17364A"/>
+                </a:solidFill>
+                <a:latin typeface="Aptos" pitchFamily="34" charset="0"/>
+                <a:ea typeface="Aptos" pitchFamily="34" charset="-122"/>
+                <a:cs typeface="Aptos" pitchFamily="34" charset="-120"/>
+              </a:rPr>
+              <a:t>The tool may be low risk if it uses public documents, but it becomes higher risk if it.</a:t>
+            </a:r>
+            <a:endParaRPr lang="en-US" sz="1380" dirty="0"/>
+          </a:p>
+          <a:p>
+            <a:r>
+              <a:rPr lang="en-US" sz="1380" dirty="0">
+                <a:solidFill>
+                  <a:srgbClr val="17364A"/>
+                </a:solidFill>
+                <a:latin typeface="Aptos" pitchFamily="34" charset="0"/>
+                <a:ea typeface="Aptos" pitchFamily="34" charset="-122"/>
+                <a:cs typeface="Aptos" pitchFamily="34" charset="-120"/>
+              </a:rPr>
+              <a:t>Secure deployment requires access controls, document-level permissions, logging,.</a:t>
+            </a:r>
+            <a:endParaRPr lang="en-US" sz="1380" dirty="0"/>
+          </a:p>
+        </p:txBody>
       </p:sp>
       <p:sp>
         <p:nvSpPr>
           <p:cNvPr id="16" name="Shape 14"/>
-          <p:cNvSpPr/>
-          <p:nvPr/>
-        </p:nvSpPr>
-        <p:spPr>
-          <a:xfrm>
-            <a:off x="9198864" y="4206240"/>
-            <a:ext cx="347472" cy="347472"/>
-          </a:xfrm>
-          <a:prstGeom prst="ellipse">
-            <a:avLst/>
-          </a:prstGeom>
-          <a:solidFill>
-            <a:srgbClr val="2F8A28"/>
-          </a:solidFill>
-          <a:ln w="12700">
-            <a:solidFill>
-              <a:srgbClr val="2F8A28"/>
-            </a:solidFill>
-            <a:prstDash val="solid"/>
-          </a:ln>
-        </p:spPr>
-      </p:sp>
-      <p:sp>
-        <p:nvSpPr>
-          <p:cNvPr id="17" name="Text 15"/>
-          <p:cNvSpPr/>
-          <p:nvPr/>
-        </p:nvSpPr>
-        <p:spPr>
-          <a:xfrm>
-            <a:off x="7909560" y="3977640"/>
-            <a:ext cx="2926080" cy="182880"/>
-          </a:xfrm>
-          <a:prstGeom prst="rect">
-            <a:avLst/>
-          </a:prstGeom>
-          <a:noFill/>
-          <a:ln/>
-        </p:spPr>
-        <p:txBody>
-          <a:bodyPr wrap="square" lIns="0" tIns="0" rIns="0" bIns="0" rtlCol="0" anchor="ctr"/>
-          <a:lstStyle/>
-          <a:p>
-            <a:pPr algn="ctr" indent="0" marL="0">
-              <a:buNone/>
-            </a:pPr>
-            <a:r>
-              <a:rPr lang="en-US" sz="1000" dirty="0">
-                <a:solidFill>
-                  <a:srgbClr val="003A63"/>
-                </a:solidFill>
-                <a:latin typeface="Aptos" pitchFamily="34" charset="0"/>
-                <a:ea typeface="Aptos" pitchFamily="34" charset="-122"/>
-                <a:cs typeface="Aptos" pitchFamily="34" charset="-120"/>
-              </a:rPr>
-              <a:t>Concept to action</a:t>
-            </a:r>
-            <a:endParaRPr lang="en-US" sz="1000" dirty="0"/>
-          </a:p>
-        </p:txBody>
-      </p:sp>
-      <p:sp>
-        <p:nvSpPr>
-          <p:cNvPr id="18" name="Shape 16"/>
           <p:cNvSpPr/>
           <p:nvPr/>
         </p:nvSpPr>
@@ -4371,7 +4353,7 @@
       </p:sp>
       <p:sp>
         <p:nvSpPr>
-          <p:cNvPr id="19" name="Text 17"/>
+          <p:cNvPr id="17" name="Text 15"/>
           <p:cNvSpPr/>
           <p:nvPr/>
         </p:nvSpPr>
@@ -4410,7 +4392,7 @@
       </p:sp>
       <p:sp>
         <p:nvSpPr>
-          <p:cNvPr id="20" name="Text 18"/>
+          <p:cNvPr id="18" name="Text 16"/>
           <p:cNvSpPr/>
           <p:nvPr/>
         </p:nvSpPr>
@@ -4918,13 +4900,11 @@
             </a:avLst>
           </a:prstGeom>
           <a:solidFill>
-            <a:srgbClr val="FFFFFF">
-              <a:alpha val="88000"/>
-            </a:srgbClr>
+            <a:srgbClr val="FFFFFF"/>
           </a:solidFill>
           <a:ln w="12700">
             <a:solidFill>
-              <a:srgbClr val="D6E8F2"/>
+              <a:srgbClr val="B9D7E6"/>
             </a:solidFill>
             <a:prstDash val="solid"/>
           </a:ln>
@@ -4932,119 +4912,112 @@
       </p:sp>
       <p:sp>
         <p:nvSpPr>
-          <p:cNvPr id="14" name="Shape 12"/>
-          <p:cNvSpPr/>
-          <p:nvPr/>
-        </p:nvSpPr>
-        <p:spPr>
-          <a:xfrm>
-            <a:off x="8074152" y="3291840"/>
-            <a:ext cx="2596896" cy="749808"/>
-          </a:xfrm>
-          <a:prstGeom prst="rect">
-            <a:avLst/>
-          </a:prstGeom>
-          <a:solidFill>
-            <a:srgbClr val="EAF6F8"/>
-          </a:solidFill>
-          <a:ln w="12700">
-            <a:solidFill>
-              <a:srgbClr val="8ABBD8"/>
-            </a:solidFill>
-            <a:prstDash val="solid"/>
-          </a:ln>
-        </p:spPr>
-      </p:sp>
-      <p:sp>
-        <p:nvSpPr>
-          <p:cNvPr id="15" name="Shape 13"/>
-          <p:cNvSpPr/>
-          <p:nvPr/>
-        </p:nvSpPr>
-        <p:spPr>
-          <a:xfrm>
-            <a:off x="8202168" y="3721608"/>
-            <a:ext cx="2340864" cy="0"/>
-          </a:xfrm>
-          <a:prstGeom prst="line">
-            <a:avLst/>
-          </a:prstGeom>
-          <a:noFill/>
-          <a:ln w="19050">
-            <a:solidFill>
-              <a:srgbClr val="0068B7"/>
-            </a:solidFill>
-            <a:prstDash val="solid"/>
-          </a:ln>
-        </p:spPr>
+          <p:cNvPr id="14" name="Text 12"/>
+          <p:cNvSpPr/>
+          <p:nvPr/>
+        </p:nvSpPr>
+        <p:spPr>
+          <a:xfrm>
+            <a:off x="7799832" y="2935224"/>
+            <a:ext cx="3145536" cy="256032"/>
+          </a:xfrm>
+          <a:prstGeom prst="rect">
+            <a:avLst/>
+          </a:prstGeom>
+          <a:noFill/>
+          <a:ln/>
+        </p:spPr>
+        <p:txBody>
+          <a:bodyPr wrap="square" lIns="0" tIns="0" rIns="0" bIns="0" rtlCol="0" anchor="ctr"/>
+          <a:lstStyle/>
+          <a:p>
+            <a:pPr indent="0" marL="0">
+              <a:buNone/>
+            </a:pPr>
+            <a:r>
+              <a:rPr lang="en-US" sz="1300" b="1" dirty="0">
+                <a:solidFill>
+                  <a:srgbClr val="0068B7"/>
+                </a:solidFill>
+                <a:latin typeface="Aptos" pitchFamily="34" charset="0"/>
+                <a:ea typeface="Aptos" pitchFamily="34" charset="-122"/>
+                <a:cs typeface="Aptos" pitchFamily="34" charset="-120"/>
+              </a:rPr>
+              <a:t>Concept checkpoints</a:t>
+            </a:r>
+            <a:endParaRPr lang="en-US" sz="1300" dirty="0"/>
+          </a:p>
+        </p:txBody>
+      </p:sp>
+      <p:sp>
+        <p:nvSpPr>
+          <p:cNvPr id="15" name="Text 13"/>
+          <p:cNvSpPr/>
+          <p:nvPr/>
+        </p:nvSpPr>
+        <p:spPr>
+          <a:xfrm>
+            <a:off x="7818120" y="3300984"/>
+            <a:ext cx="3090672" cy="877824"/>
+          </a:xfrm>
+          <a:prstGeom prst="rect">
+            <a:avLst/>
+          </a:prstGeom>
+          <a:noFill/>
+          <a:ln/>
+        </p:spPr>
+        <p:txBody>
+          <a:bodyPr wrap="square" lIns="254" tIns="254" rIns="254" bIns="254" rtlCol="0" anchor="t">
+            <a:normAutofit/>
+          </a:bodyPr>
+          <a:lstStyle/>
+          <a:p>
+            <a:r>
+              <a:rPr lang="en-US" sz="1380" dirty="0">
+                <a:solidFill>
+                  <a:srgbClr val="17364A"/>
+                </a:solidFill>
+                <a:latin typeface="Aptos" pitchFamily="34" charset="0"/>
+                <a:ea typeface="Aptos" pitchFamily="34" charset="-122"/>
+                <a:cs typeface="Aptos" pitchFamily="34" charset="-120"/>
+              </a:rPr>
+              <a:t>Development, testing, staging, and production environments should be clearly separated so.</a:t>
+            </a:r>
+            <a:endParaRPr lang="en-US" sz="1380" dirty="0"/>
+          </a:p>
+          <a:p>
+            <a:r>
+              <a:rPr lang="en-US" sz="1380" dirty="0">
+                <a:solidFill>
+                  <a:srgbClr val="17364A"/>
+                </a:solidFill>
+                <a:latin typeface="Aptos" pitchFamily="34" charset="0"/>
+                <a:ea typeface="Aptos" pitchFamily="34" charset="-122"/>
+                <a:cs typeface="Aptos" pitchFamily="34" charset="-120"/>
+              </a:rPr>
+              <a:t>Sensitive production data should not be copied into lower environments unless approved.</a:t>
+            </a:r>
+            <a:endParaRPr lang="en-US" sz="1380" dirty="0"/>
+          </a:p>
+          <a:p>
+            <a:r>
+              <a:rPr lang="en-US" sz="1380" dirty="0">
+                <a:solidFill>
+                  <a:srgbClr val="17364A"/>
+                </a:solidFill>
+                <a:latin typeface="Aptos" pitchFamily="34" charset="0"/>
+                <a:ea typeface="Aptos" pitchFamily="34" charset="-122"/>
+                <a:cs typeface="Aptos" pitchFamily="34" charset="-120"/>
+              </a:rPr>
+              <a:t>Logging and monitoring are central to deployment safety.</a:t>
+            </a:r>
+            <a:endParaRPr lang="en-US" sz="1380" dirty="0"/>
+          </a:p>
+        </p:txBody>
       </p:sp>
       <p:sp>
         <p:nvSpPr>
           <p:cNvPr id="16" name="Shape 14"/>
-          <p:cNvSpPr/>
-          <p:nvPr/>
-        </p:nvSpPr>
-        <p:spPr>
-          <a:xfrm>
-            <a:off x="9198864" y="4206240"/>
-            <a:ext cx="347472" cy="347472"/>
-          </a:xfrm>
-          <a:prstGeom prst="ellipse">
-            <a:avLst/>
-          </a:prstGeom>
-          <a:solidFill>
-            <a:srgbClr val="2F8A28"/>
-          </a:solidFill>
-          <a:ln w="12700">
-            <a:solidFill>
-              <a:srgbClr val="2F8A28"/>
-            </a:solidFill>
-            <a:prstDash val="solid"/>
-          </a:ln>
-        </p:spPr>
-      </p:sp>
-      <p:sp>
-        <p:nvSpPr>
-          <p:cNvPr id="17" name="Text 15"/>
-          <p:cNvSpPr/>
-          <p:nvPr/>
-        </p:nvSpPr>
-        <p:spPr>
-          <a:xfrm>
-            <a:off x="7909560" y="3977640"/>
-            <a:ext cx="2926080" cy="182880"/>
-          </a:xfrm>
-          <a:prstGeom prst="rect">
-            <a:avLst/>
-          </a:prstGeom>
-          <a:noFill/>
-          <a:ln/>
-        </p:spPr>
-        <p:txBody>
-          <a:bodyPr wrap="square" lIns="0" tIns="0" rIns="0" bIns="0" rtlCol="0" anchor="ctr"/>
-          <a:lstStyle/>
-          <a:p>
-            <a:pPr algn="ctr" indent="0" marL="0">
-              <a:buNone/>
-            </a:pPr>
-            <a:r>
-              <a:rPr lang="en-US" sz="1000" dirty="0">
-                <a:solidFill>
-                  <a:srgbClr val="003A63"/>
-                </a:solidFill>
-                <a:latin typeface="Aptos" pitchFamily="34" charset="0"/>
-                <a:ea typeface="Aptos" pitchFamily="34" charset="-122"/>
-                <a:cs typeface="Aptos" pitchFamily="34" charset="-120"/>
-              </a:rPr>
-              <a:t>Concept to action</a:t>
-            </a:r>
-            <a:endParaRPr lang="en-US" sz="1000" dirty="0"/>
-          </a:p>
-        </p:txBody>
-      </p:sp>
-      <p:sp>
-        <p:nvSpPr>
-          <p:cNvPr id="18" name="Shape 16"/>
           <p:cNvSpPr/>
           <p:nvPr/>
         </p:nvSpPr>
@@ -5071,7 +5044,7 @@
       </p:sp>
       <p:sp>
         <p:nvSpPr>
-          <p:cNvPr id="19" name="Text 17"/>
+          <p:cNvPr id="17" name="Text 15"/>
           <p:cNvSpPr/>
           <p:nvPr/>
         </p:nvSpPr>
@@ -5110,7 +5083,7 @@
       </p:sp>
       <p:sp>
         <p:nvSpPr>
-          <p:cNvPr id="20" name="Text 18"/>
+          <p:cNvPr id="18" name="Text 16"/>
           <p:cNvSpPr/>
           <p:nvPr/>
         </p:nvSpPr>
@@ -5618,13 +5591,11 @@
             </a:avLst>
           </a:prstGeom>
           <a:solidFill>
-            <a:srgbClr val="FFFFFF">
-              <a:alpha val="88000"/>
-            </a:srgbClr>
+            <a:srgbClr val="FFFFFF"/>
           </a:solidFill>
           <a:ln w="12700">
             <a:solidFill>
-              <a:srgbClr val="D6E8F2"/>
+              <a:srgbClr val="B9D7E6"/>
             </a:solidFill>
             <a:prstDash val="solid"/>
           </a:ln>
@@ -5632,26 +5603,42 @@
       </p:sp>
       <p:sp>
         <p:nvSpPr>
-          <p:cNvPr id="14" name="Shape 12"/>
-          <p:cNvSpPr/>
-          <p:nvPr/>
-        </p:nvSpPr>
-        <p:spPr>
-          <a:xfrm>
-            <a:off x="8046720" y="3108960"/>
-            <a:ext cx="2651760" cy="896112"/>
-          </a:xfrm>
-          <a:prstGeom prst="arc">
-            <a:avLst/>
-          </a:prstGeom>
-          <a:noFill/>
-          <a:ln w="25400">
-            <a:solidFill>
-              <a:srgbClr val="0068B7"/>
-            </a:solidFill>
-            <a:prstDash val="solid"/>
-          </a:ln>
-        </p:spPr>
+          <p:cNvPr id="14" name="Text 12"/>
+          <p:cNvSpPr/>
+          <p:nvPr/>
+        </p:nvSpPr>
+        <p:spPr>
+          <a:xfrm>
+            <a:off x="7799832" y="2935224"/>
+            <a:ext cx="3145536" cy="256032"/>
+          </a:xfrm>
+          <a:prstGeom prst="rect">
+            <a:avLst/>
+          </a:prstGeom>
+          <a:noFill/>
+          <a:ln/>
+        </p:spPr>
+        <p:txBody>
+          <a:bodyPr wrap="square" lIns="0" tIns="0" rIns="0" bIns="0" rtlCol="0" anchor="ctr"/>
+          <a:lstStyle/>
+          <a:p>
+            <a:pPr indent="0" marL="0">
+              <a:buNone/>
+            </a:pPr>
+            <a:r>
+              <a:rPr lang="en-US" sz="1300" b="1" dirty="0">
+                <a:solidFill>
+                  <a:srgbClr val="0068B7"/>
+                </a:solidFill>
+                <a:latin typeface="Aptos" pitchFamily="34" charset="0"/>
+                <a:ea typeface="Aptos" pitchFamily="34" charset="-122"/>
+                <a:cs typeface="Aptos" pitchFamily="34" charset="-120"/>
+              </a:rPr>
+              <a:t>Concept checkpoints</a:t>
+            </a:r>
+            <a:endParaRPr lang="en-US" sz="1300" dirty="0"/>
+          </a:p>
+        </p:txBody>
       </p:sp>
       <p:sp>
         <p:nvSpPr>
@@ -5661,102 +5648,67 @@
         </p:nvSpPr>
         <p:spPr>
           <a:xfrm>
-            <a:off x="7909560" y="3099816"/>
-            <a:ext cx="2926080" cy="256032"/>
-          </a:xfrm>
-          <a:prstGeom prst="rect">
-            <a:avLst/>
-          </a:prstGeom>
-          <a:noFill/>
-          <a:ln/>
-        </p:spPr>
-        <p:txBody>
-          <a:bodyPr wrap="square" lIns="0" tIns="0" rIns="0" bIns="0" rtlCol="0" anchor="ctr"/>
-          <a:lstStyle/>
-          <a:p>
-            <a:pPr algn="ctr" indent="0" marL="0">
-              <a:buNone/>
-            </a:pPr>
-            <a:r>
-              <a:rPr lang="en-US" sz="1500" b="1" dirty="0">
-                <a:solidFill>
-                  <a:srgbClr val="003A63"/>
-                </a:solidFill>
-                <a:latin typeface="Aptos" pitchFamily="34" charset="0"/>
-                <a:ea typeface="Aptos" pitchFamily="34" charset="-122"/>
-                <a:cs typeface="Aptos" pitchFamily="34" charset="-120"/>
-              </a:rPr>
-              <a:t>Risk</a:t>
-            </a:r>
-            <a:endParaRPr lang="en-US" sz="1500" dirty="0"/>
+            <a:off x="7818120" y="3300984"/>
+            <a:ext cx="3090672" cy="877824"/>
+          </a:xfrm>
+          <a:prstGeom prst="rect">
+            <a:avLst/>
+          </a:prstGeom>
+          <a:noFill/>
+          <a:ln/>
+        </p:spPr>
+        <p:txBody>
+          <a:bodyPr wrap="square" lIns="254" tIns="254" rIns="254" bIns="254" rtlCol="0" anchor="t">
+            <a:normAutofit/>
+          </a:bodyPr>
+          <a:lstStyle/>
+          <a:p>
+            <a:r>
+              <a:rPr lang="en-US" sz="1380" dirty="0">
+                <a:solidFill>
+                  <a:srgbClr val="17364A"/>
+                </a:solidFill>
+                <a:latin typeface="Aptos" pitchFamily="34" charset="0"/>
+                <a:ea typeface="Aptos" pitchFamily="34" charset="-122"/>
+                <a:cs typeface="Aptos" pitchFamily="34" charset="-120"/>
+              </a:rPr>
+              <a:t>When staff do not connect technical decisions to authority, workflow, equity, privacy,.</a:t>
+            </a:r>
+            <a:endParaRPr lang="en-US" sz="1380" dirty="0"/>
+          </a:p>
+          <a:p>
+            <a:r>
+              <a:rPr lang="en-US" sz="1380" dirty="0">
+                <a:solidFill>
+                  <a:srgbClr val="17364A"/>
+                </a:solidFill>
+                <a:latin typeface="Aptos" pitchFamily="34" charset="0"/>
+                <a:ea typeface="Aptos" pitchFamily="34" charset="-122"/>
+                <a:cs typeface="Aptos" pitchFamily="34" charset="-120"/>
+              </a:rPr>
+              <a:t>Vendors may provide demonstrations, dashboards, or summary metrics that do not match the.</a:t>
+            </a:r>
+            <a:endParaRPr lang="en-US" sz="1380" dirty="0"/>
+          </a:p>
+          <a:p>
+            <a:r>
+              <a:rPr lang="en-US" sz="1380" dirty="0">
+                <a:solidFill>
+                  <a:srgbClr val="17364A"/>
+                </a:solidFill>
+                <a:latin typeface="Aptos" pitchFamily="34" charset="0"/>
+                <a:ea typeface="Aptos" pitchFamily="34" charset="-122"/>
+                <a:cs typeface="Aptos" pitchFamily="34" charset="-120"/>
+              </a:rPr>
+              <a:t>A guardrail is to require documentation, test results, acceptance criteria, and.</a:t>
+            </a:r>
+            <a:endParaRPr lang="en-US" sz="1380" dirty="0"/>
           </a:p>
         </p:txBody>
       </p:sp>
       <p:sp>
         <p:nvSpPr>
           <p:cNvPr id="16" name="Shape 14"/>
-          <p:cNvSpPr/>
-          <p:nvPr/>
-        </p:nvSpPr>
-        <p:spPr>
-          <a:xfrm>
-            <a:off x="8366760" y="3639312"/>
-            <a:ext cx="2011680" cy="0"/>
-          </a:xfrm>
-          <a:prstGeom prst="line">
-            <a:avLst/>
-          </a:prstGeom>
-          <a:noFill/>
-          <a:ln w="63500">
-            <a:solidFill>
-              <a:srgbClr val="2F8A28"/>
-            </a:solidFill>
-            <a:prstDash val="solid"/>
-          </a:ln>
-        </p:spPr>
-      </p:sp>
-      <p:sp>
-        <p:nvSpPr>
-          <p:cNvPr id="17" name="Text 15"/>
-          <p:cNvSpPr/>
-          <p:nvPr/>
-        </p:nvSpPr>
-        <p:spPr>
-          <a:xfrm>
-            <a:off x="7909560" y="3849624"/>
-            <a:ext cx="2926080" cy="164592"/>
-          </a:xfrm>
-          <a:prstGeom prst="rect">
-            <a:avLst/>
-          </a:prstGeom>
-          <a:noFill/>
-          <a:ln/>
-        </p:spPr>
-        <p:txBody>
-          <a:bodyPr wrap="square" lIns="0" tIns="0" rIns="0" bIns="0" rtlCol="0" anchor="ctr"/>
-          <a:lstStyle/>
-          <a:p>
-            <a:pPr algn="ctr" indent="0" marL="0">
-              <a:buNone/>
-            </a:pPr>
-            <a:r>
-              <a:rPr lang="en-US" sz="900" dirty="0">
-                <a:solidFill>
-                  <a:srgbClr val="003A63"/>
-                </a:solidFill>
-                <a:latin typeface="Aptos" pitchFamily="34" charset="0"/>
-                <a:ea typeface="Aptos" pitchFamily="34" charset="-122"/>
-                <a:cs typeface="Aptos" pitchFamily="34" charset="-120"/>
-              </a:rPr>
-              <a:t>Human review</a:t>
-            </a:r>
-            <a:endParaRPr lang="en-US" sz="900" dirty="0"/>
-          </a:p>
-        </p:txBody>
-      </p:sp>
-      <p:sp>
-        <p:nvSpPr>
-          <p:cNvPr id="18" name="Shape 16"/>
           <p:cNvSpPr/>
           <p:nvPr/>
         </p:nvSpPr>
@@ -5783,7 +5735,7 @@
       </p:sp>
       <p:sp>
         <p:nvSpPr>
-          <p:cNvPr id="19" name="Text 17"/>
+          <p:cNvPr id="17" name="Text 15"/>
           <p:cNvSpPr/>
           <p:nvPr/>
         </p:nvSpPr>
@@ -5822,7 +5774,7 @@
       </p:sp>
       <p:sp>
         <p:nvSpPr>
-          <p:cNvPr id="20" name="Text 18"/>
+          <p:cNvPr id="18" name="Text 16"/>
           <p:cNvSpPr/>
           <p:nvPr/>
         </p:nvSpPr>
@@ -6330,13 +6282,11 @@
             </a:avLst>
           </a:prstGeom>
           <a:solidFill>
-            <a:srgbClr val="FFFFFF">
-              <a:alpha val="88000"/>
-            </a:srgbClr>
+            <a:srgbClr val="FFFFFF"/>
           </a:solidFill>
           <a:ln w="12700">
             <a:solidFill>
-              <a:srgbClr val="D6E8F2"/>
+              <a:srgbClr val="B9D7E6"/>
             </a:solidFill>
             <a:prstDash val="solid"/>
           </a:ln>
@@ -6344,30 +6294,42 @@
       </p:sp>
       <p:sp>
         <p:nvSpPr>
-          <p:cNvPr id="14" name="Shape 12"/>
-          <p:cNvSpPr/>
-          <p:nvPr/>
-        </p:nvSpPr>
-        <p:spPr>
-          <a:xfrm>
-            <a:off x="7927848" y="3319272"/>
-            <a:ext cx="792480" cy="749808"/>
-          </a:xfrm>
-          <a:prstGeom prst="roundRect">
-            <a:avLst>
-              <a:gd name="adj" fmla="val 14634"/>
-            </a:avLst>
-          </a:prstGeom>
-          <a:solidFill>
-            <a:srgbClr val="0068B7"/>
-          </a:solidFill>
-          <a:ln w="12700">
-            <a:solidFill>
-              <a:srgbClr val="0068B7"/>
-            </a:solidFill>
-            <a:prstDash val="solid"/>
-          </a:ln>
-        </p:spPr>
+          <p:cNvPr id="14" name="Text 12"/>
+          <p:cNvSpPr/>
+          <p:nvPr/>
+        </p:nvSpPr>
+        <p:spPr>
+          <a:xfrm>
+            <a:off x="7799832" y="2935224"/>
+            <a:ext cx="3145536" cy="256032"/>
+          </a:xfrm>
+          <a:prstGeom prst="rect">
+            <a:avLst/>
+          </a:prstGeom>
+          <a:noFill/>
+          <a:ln/>
+        </p:spPr>
+        <p:txBody>
+          <a:bodyPr wrap="square" lIns="0" tIns="0" rIns="0" bIns="0" rtlCol="0" anchor="ctr"/>
+          <a:lstStyle/>
+          <a:p>
+            <a:pPr indent="0" marL="0">
+              <a:buNone/>
+            </a:pPr>
+            <a:r>
+              <a:rPr lang="en-US" sz="1300" b="1" dirty="0">
+                <a:solidFill>
+                  <a:srgbClr val="0068B7"/>
+                </a:solidFill>
+                <a:latin typeface="Aptos" pitchFamily="34" charset="0"/>
+                <a:ea typeface="Aptos" pitchFamily="34" charset="-122"/>
+                <a:cs typeface="Aptos" pitchFamily="34" charset="-120"/>
+              </a:rPr>
+              <a:t>Concept checkpoints</a:t>
+            </a:r>
+            <a:endParaRPr lang="en-US" sz="1300" dirty="0"/>
+          </a:p>
+        </p:txBody>
       </p:sp>
       <p:sp>
         <p:nvSpPr>
@@ -6377,240 +6339,67 @@
         </p:nvSpPr>
         <p:spPr>
           <a:xfrm>
-            <a:off x="8001000" y="3511296"/>
-            <a:ext cx="646176" cy="310896"/>
-          </a:xfrm>
-          <a:prstGeom prst="rect">
-            <a:avLst/>
-          </a:prstGeom>
-          <a:noFill/>
-          <a:ln/>
-        </p:spPr>
-        <p:txBody>
-          <a:bodyPr wrap="square" lIns="0" tIns="0" rIns="0" bIns="0" rtlCol="0" anchor="ctr">
+            <a:off x="7818120" y="3300984"/>
+            <a:ext cx="3090672" cy="877824"/>
+          </a:xfrm>
+          <a:prstGeom prst="rect">
+            <a:avLst/>
+          </a:prstGeom>
+          <a:noFill/>
+          <a:ln/>
+        </p:spPr>
+        <p:txBody>
+          <a:bodyPr wrap="square" lIns="254" tIns="254" rIns="254" bIns="254" rtlCol="0" anchor="t">
             <a:normAutofit/>
           </a:bodyPr>
           <a:lstStyle/>
           <a:p>
-            <a:pPr algn="ctr" indent="0" marL="0">
-              <a:buNone/>
-            </a:pPr>
-            <a:r>
-              <a:rPr lang="en-US" sz="1500" b="1" dirty="0">
-                <a:solidFill>
-                  <a:srgbClr val="FFFFFF"/>
-                </a:solidFill>
-                <a:latin typeface="Aptos" pitchFamily="34" charset="0"/>
-                <a:ea typeface="Aptos" pitchFamily="34" charset="-122"/>
-                <a:cs typeface="Aptos" pitchFamily="34" charset="-120"/>
-              </a:rPr>
-              <a:t>Plan</a:t>
-            </a:r>
-            <a:endParaRPr lang="en-US" sz="1500" dirty="0"/>
+            <a:r>
+              <a:rPr lang="en-US" sz="1380" dirty="0">
+                <a:solidFill>
+                  <a:srgbClr val="17364A"/>
+                </a:solidFill>
+                <a:latin typeface="Aptos" pitchFamily="34" charset="0"/>
+                <a:ea typeface="Aptos" pitchFamily="34" charset="-122"/>
+                <a:cs typeface="Aptos" pitchFamily="34" charset="-120"/>
+              </a:rPr>
+              <a:t>Generative AI, predictive analytics, RAG, automation, and agentic workflows all depend on.</a:t>
+            </a:r>
+            <a:endParaRPr lang="en-US" sz="1380" dirty="0"/>
+          </a:p>
+          <a:p>
+            <a:r>
+              <a:rPr lang="en-US" sz="1380" dirty="0">
+                <a:solidFill>
+                  <a:srgbClr val="17364A"/>
+                </a:solidFill>
+                <a:latin typeface="Aptos" pitchFamily="34" charset="0"/>
+                <a:ea typeface="Aptos" pitchFamily="34" charset="-122"/>
+                <a:cs typeface="Aptos" pitchFamily="34" charset="-120"/>
+              </a:rPr>
+              <a:t>A tool that drafts internal training text may require lighter review than a tool that.</a:t>
+            </a:r>
+            <a:endParaRPr lang="en-US" sz="1380" dirty="0"/>
+          </a:p>
+          <a:p>
+            <a:r>
+              <a:rPr lang="en-US" sz="1380" dirty="0">
+                <a:solidFill>
+                  <a:srgbClr val="17364A"/>
+                </a:solidFill>
+                <a:latin typeface="Aptos" pitchFamily="34" charset="0"/>
+                <a:ea typeface="Aptos" pitchFamily="34" charset="-122"/>
+                <a:cs typeface="Aptos" pitchFamily="34" charset="-120"/>
+              </a:rPr>
+              <a:t>The module should be applied during readiness assessment, procurement, implementation.</a:t>
+            </a:r>
+            <a:endParaRPr lang="en-US" sz="1380" dirty="0"/>
           </a:p>
         </p:txBody>
       </p:sp>
       <p:sp>
         <p:nvSpPr>
           <p:cNvPr id="16" name="Shape 14"/>
-          <p:cNvSpPr/>
-          <p:nvPr/>
-        </p:nvSpPr>
-        <p:spPr>
-          <a:xfrm>
-            <a:off x="8976360" y="3319272"/>
-            <a:ext cx="792480" cy="749808"/>
-          </a:xfrm>
-          <a:prstGeom prst="roundRect">
-            <a:avLst>
-              <a:gd name="adj" fmla="val 14634"/>
-            </a:avLst>
-          </a:prstGeom>
-          <a:solidFill>
-            <a:srgbClr val="2F8A28"/>
-          </a:solidFill>
-          <a:ln w="12700">
-            <a:solidFill>
-              <a:srgbClr val="2F8A28"/>
-            </a:solidFill>
-            <a:prstDash val="solid"/>
-          </a:ln>
-        </p:spPr>
-      </p:sp>
-      <p:sp>
-        <p:nvSpPr>
-          <p:cNvPr id="17" name="Text 15"/>
-          <p:cNvSpPr/>
-          <p:nvPr/>
-        </p:nvSpPr>
-        <p:spPr>
-          <a:xfrm>
-            <a:off x="9049512" y="3511296"/>
-            <a:ext cx="646176" cy="310896"/>
-          </a:xfrm>
-          <a:prstGeom prst="rect">
-            <a:avLst/>
-          </a:prstGeom>
-          <a:noFill/>
-          <a:ln/>
-        </p:spPr>
-        <p:txBody>
-          <a:bodyPr wrap="square" lIns="0" tIns="0" rIns="0" bIns="0" rtlCol="0" anchor="ctr">
-            <a:normAutofit/>
-          </a:bodyPr>
-          <a:lstStyle/>
-          <a:p>
-            <a:pPr algn="ctr" indent="0" marL="0">
-              <a:buNone/>
-            </a:pPr>
-            <a:r>
-              <a:rPr lang="en-US" sz="1500" b="1" dirty="0">
-                <a:solidFill>
-                  <a:srgbClr val="FFFFFF"/>
-                </a:solidFill>
-                <a:latin typeface="Aptos" pitchFamily="34" charset="0"/>
-                <a:ea typeface="Aptos" pitchFamily="34" charset="-122"/>
-                <a:cs typeface="Aptos" pitchFamily="34" charset="-120"/>
-              </a:rPr>
-              <a:t>Do</a:t>
-            </a:r>
-            <a:endParaRPr lang="en-US" sz="1500" dirty="0"/>
-          </a:p>
-        </p:txBody>
-      </p:sp>
-      <p:sp>
-        <p:nvSpPr>
-          <p:cNvPr id="18" name="Shape 16"/>
-          <p:cNvSpPr/>
-          <p:nvPr/>
-        </p:nvSpPr>
-        <p:spPr>
-          <a:xfrm>
-            <a:off x="10024872" y="3319272"/>
-            <a:ext cx="792480" cy="749808"/>
-          </a:xfrm>
-          <a:prstGeom prst="roundRect">
-            <a:avLst>
-              <a:gd name="adj" fmla="val 14634"/>
-            </a:avLst>
-          </a:prstGeom>
-          <a:solidFill>
-            <a:srgbClr val="D69A2D"/>
-          </a:solidFill>
-          <a:ln w="12700">
-            <a:solidFill>
-              <a:srgbClr val="D69A2D"/>
-            </a:solidFill>
-            <a:prstDash val="solid"/>
-          </a:ln>
-        </p:spPr>
-      </p:sp>
-      <p:sp>
-        <p:nvSpPr>
-          <p:cNvPr id="19" name="Text 17"/>
-          <p:cNvSpPr/>
-          <p:nvPr/>
-        </p:nvSpPr>
-        <p:spPr>
-          <a:xfrm>
-            <a:off x="10098024" y="3511296"/>
-            <a:ext cx="646176" cy="310896"/>
-          </a:xfrm>
-          <a:prstGeom prst="rect">
-            <a:avLst/>
-          </a:prstGeom>
-          <a:noFill/>
-          <a:ln/>
-        </p:spPr>
-        <p:txBody>
-          <a:bodyPr wrap="square" lIns="0" tIns="0" rIns="0" bIns="0" rtlCol="0" anchor="ctr">
-            <a:normAutofit/>
-          </a:bodyPr>
-          <a:lstStyle/>
-          <a:p>
-            <a:pPr algn="ctr" indent="0" marL="0">
-              <a:buNone/>
-            </a:pPr>
-            <a:r>
-              <a:rPr lang="en-US" sz="1500" b="1" dirty="0">
-                <a:solidFill>
-                  <a:srgbClr val="FFFFFF"/>
-                </a:solidFill>
-                <a:latin typeface="Aptos" pitchFamily="34" charset="0"/>
-                <a:ea typeface="Aptos" pitchFamily="34" charset="-122"/>
-                <a:cs typeface="Aptos" pitchFamily="34" charset="-120"/>
-              </a:rPr>
-              <a:t>Review</a:t>
-            </a:r>
-            <a:endParaRPr lang="en-US" sz="1500" dirty="0"/>
-          </a:p>
-        </p:txBody>
-      </p:sp>
-      <p:sp>
-        <p:nvSpPr>
-          <p:cNvPr id="20" name="Shape 18"/>
-          <p:cNvSpPr/>
-          <p:nvPr/>
-        </p:nvSpPr>
-        <p:spPr>
-          <a:xfrm>
-            <a:off x="8293608" y="4389120"/>
-            <a:ext cx="2157984" cy="0"/>
-          </a:xfrm>
-          <a:prstGeom prst="line">
-            <a:avLst/>
-          </a:prstGeom>
-          <a:noFill/>
-          <a:ln w="25400">
-            <a:solidFill>
-              <a:srgbClr val="8ABBD8"/>
-            </a:solidFill>
-            <a:prstDash val="solid"/>
-          </a:ln>
-        </p:spPr>
-      </p:sp>
-      <p:sp>
-        <p:nvSpPr>
-          <p:cNvPr id="21" name="Text 19"/>
-          <p:cNvSpPr/>
-          <p:nvPr/>
-        </p:nvSpPr>
-        <p:spPr>
-          <a:xfrm>
-            <a:off x="7909560" y="3977640"/>
-            <a:ext cx="2926080" cy="182880"/>
-          </a:xfrm>
-          <a:prstGeom prst="rect">
-            <a:avLst/>
-          </a:prstGeom>
-          <a:noFill/>
-          <a:ln/>
-        </p:spPr>
-        <p:txBody>
-          <a:bodyPr wrap="square" lIns="0" tIns="0" rIns="0" bIns="0" rtlCol="0" anchor="ctr"/>
-          <a:lstStyle/>
-          <a:p>
-            <a:pPr algn="ctr" indent="0" marL="0">
-              <a:buNone/>
-            </a:pPr>
-            <a:r>
-              <a:rPr lang="en-US" sz="1000" dirty="0">
-                <a:solidFill>
-                  <a:srgbClr val="003A63"/>
-                </a:solidFill>
-                <a:latin typeface="Aptos" pitchFamily="34" charset="0"/>
-                <a:ea typeface="Aptos" pitchFamily="34" charset="-122"/>
-                <a:cs typeface="Aptos" pitchFamily="34" charset="-120"/>
-              </a:rPr>
-              <a:t>Dependencies visible</a:t>
-            </a:r>
-            <a:endParaRPr lang="en-US" sz="1000" dirty="0"/>
-          </a:p>
-        </p:txBody>
-      </p:sp>
-      <p:sp>
-        <p:nvSpPr>
-          <p:cNvPr id="22" name="Shape 20"/>
           <p:cNvSpPr/>
           <p:nvPr/>
         </p:nvSpPr>
@@ -6637,7 +6426,7 @@
       </p:sp>
       <p:sp>
         <p:nvSpPr>
-          <p:cNvPr id="23" name="Text 21"/>
+          <p:cNvPr id="17" name="Text 15"/>
           <p:cNvSpPr/>
           <p:nvPr/>
         </p:nvSpPr>
@@ -6676,7 +6465,7 @@
       </p:sp>
       <p:sp>
         <p:nvSpPr>
-          <p:cNvPr id="24" name="Text 22"/>
+          <p:cNvPr id="18" name="Text 16"/>
           <p:cNvSpPr/>
           <p:nvPr/>
         </p:nvSpPr>
@@ -7184,13 +6973,11 @@
             </a:avLst>
           </a:prstGeom>
           <a:solidFill>
-            <a:srgbClr val="FFFFFF">
-              <a:alpha val="88000"/>
-            </a:srgbClr>
+            <a:srgbClr val="FFFFFF"/>
           </a:solidFill>
           <a:ln w="12700">
             <a:solidFill>
-              <a:srgbClr val="D6E8F2"/>
+              <a:srgbClr val="B9D7E6"/>
             </a:solidFill>
             <a:prstDash val="solid"/>
           </a:ln>
@@ -7198,119 +6985,112 @@
       </p:sp>
       <p:sp>
         <p:nvSpPr>
-          <p:cNvPr id="14" name="Shape 12"/>
-          <p:cNvSpPr/>
-          <p:nvPr/>
-        </p:nvSpPr>
-        <p:spPr>
-          <a:xfrm>
-            <a:off x="8074152" y="3291840"/>
-            <a:ext cx="2596896" cy="749808"/>
-          </a:xfrm>
-          <a:prstGeom prst="rect">
-            <a:avLst/>
-          </a:prstGeom>
-          <a:solidFill>
-            <a:srgbClr val="EAF6F8"/>
-          </a:solidFill>
-          <a:ln w="12700">
-            <a:solidFill>
-              <a:srgbClr val="8ABBD8"/>
-            </a:solidFill>
-            <a:prstDash val="solid"/>
-          </a:ln>
-        </p:spPr>
-      </p:sp>
-      <p:sp>
-        <p:nvSpPr>
-          <p:cNvPr id="15" name="Shape 13"/>
-          <p:cNvSpPr/>
-          <p:nvPr/>
-        </p:nvSpPr>
-        <p:spPr>
-          <a:xfrm>
-            <a:off x="8202168" y="3721608"/>
-            <a:ext cx="2340864" cy="0"/>
-          </a:xfrm>
-          <a:prstGeom prst="line">
-            <a:avLst/>
-          </a:prstGeom>
-          <a:noFill/>
-          <a:ln w="19050">
-            <a:solidFill>
-              <a:srgbClr val="0068B7"/>
-            </a:solidFill>
-            <a:prstDash val="solid"/>
-          </a:ln>
-        </p:spPr>
+          <p:cNvPr id="14" name="Text 12"/>
+          <p:cNvSpPr/>
+          <p:nvPr/>
+        </p:nvSpPr>
+        <p:spPr>
+          <a:xfrm>
+            <a:off x="7799832" y="2935224"/>
+            <a:ext cx="3145536" cy="256032"/>
+          </a:xfrm>
+          <a:prstGeom prst="rect">
+            <a:avLst/>
+          </a:prstGeom>
+          <a:noFill/>
+          <a:ln/>
+        </p:spPr>
+        <p:txBody>
+          <a:bodyPr wrap="square" lIns="0" tIns="0" rIns="0" bIns="0" rtlCol="0" anchor="ctr"/>
+          <a:lstStyle/>
+          <a:p>
+            <a:pPr indent="0" marL="0">
+              <a:buNone/>
+            </a:pPr>
+            <a:r>
+              <a:rPr lang="en-US" sz="1300" b="1" dirty="0">
+                <a:solidFill>
+                  <a:srgbClr val="0068B7"/>
+                </a:solidFill>
+                <a:latin typeface="Aptos" pitchFamily="34" charset="0"/>
+                <a:ea typeface="Aptos" pitchFamily="34" charset="-122"/>
+                <a:cs typeface="Aptos" pitchFamily="34" charset="-120"/>
+              </a:rPr>
+              <a:t>Concept checkpoints</a:t>
+            </a:r>
+            <a:endParaRPr lang="en-US" sz="1300" dirty="0"/>
+          </a:p>
+        </p:txBody>
+      </p:sp>
+      <p:sp>
+        <p:nvSpPr>
+          <p:cNvPr id="15" name="Text 13"/>
+          <p:cNvSpPr/>
+          <p:nvPr/>
+        </p:nvSpPr>
+        <p:spPr>
+          <a:xfrm>
+            <a:off x="7818120" y="3300984"/>
+            <a:ext cx="3090672" cy="877824"/>
+          </a:xfrm>
+          <a:prstGeom prst="rect">
+            <a:avLst/>
+          </a:prstGeom>
+          <a:noFill/>
+          <a:ln/>
+        </p:spPr>
+        <p:txBody>
+          <a:bodyPr wrap="square" lIns="254" tIns="254" rIns="254" bIns="254" rtlCol="0" anchor="t">
+            <a:normAutofit/>
+          </a:bodyPr>
+          <a:lstStyle/>
+          <a:p>
+            <a:r>
+              <a:rPr lang="en-US" sz="1380" dirty="0">
+                <a:solidFill>
+                  <a:srgbClr val="17364A"/>
+                </a:solidFill>
+                <a:latin typeface="Aptos" pitchFamily="34" charset="0"/>
+                <a:ea typeface="Aptos" pitchFamily="34" charset="-122"/>
+                <a:cs typeface="Aptos" pitchFamily="34" charset="-120"/>
+              </a:rPr>
+              <a:t>Where does this topic appear in one current or proposed AI workflow in your agency?</a:t>
+            </a:r>
+            <a:endParaRPr lang="en-US" sz="1380" dirty="0"/>
+          </a:p>
+          <a:p>
+            <a:r>
+              <a:rPr lang="en-US" sz="1380" dirty="0">
+                <a:solidFill>
+                  <a:srgbClr val="17364A"/>
+                </a:solidFill>
+                <a:latin typeface="Aptos" pitchFamily="34" charset="0"/>
+                <a:ea typeface="Aptos" pitchFamily="34" charset="-122"/>
+                <a:cs typeface="Aptos" pitchFamily="34" charset="-120"/>
+              </a:rPr>
+              <a:t>What decisions, data sources, users, or partners would be affected if this area is poorly.</a:t>
+            </a:r>
+            <a:endParaRPr lang="en-US" sz="1380" dirty="0"/>
+          </a:p>
+          <a:p>
+            <a:r>
+              <a:rPr lang="en-US" sz="1380" dirty="0">
+                <a:solidFill>
+                  <a:srgbClr val="17364A"/>
+                </a:solidFill>
+                <a:latin typeface="Aptos" pitchFamily="34" charset="0"/>
+                <a:ea typeface="Aptos" pitchFamily="34" charset="-122"/>
+                <a:cs typeface="Aptos" pitchFamily="34" charset="-120"/>
+              </a:rPr>
+              <a:t>What evidence would governance reviewers need before approving the workflow?</a:t>
+            </a:r>
+            <a:endParaRPr lang="en-US" sz="1380" dirty="0"/>
+          </a:p>
+        </p:txBody>
       </p:sp>
       <p:sp>
         <p:nvSpPr>
           <p:cNvPr id="16" name="Shape 14"/>
-          <p:cNvSpPr/>
-          <p:nvPr/>
-        </p:nvSpPr>
-        <p:spPr>
-          <a:xfrm>
-            <a:off x="9198864" y="4206240"/>
-            <a:ext cx="347472" cy="347472"/>
-          </a:xfrm>
-          <a:prstGeom prst="ellipse">
-            <a:avLst/>
-          </a:prstGeom>
-          <a:solidFill>
-            <a:srgbClr val="2F8A28"/>
-          </a:solidFill>
-          <a:ln w="12700">
-            <a:solidFill>
-              <a:srgbClr val="2F8A28"/>
-            </a:solidFill>
-            <a:prstDash val="solid"/>
-          </a:ln>
-        </p:spPr>
-      </p:sp>
-      <p:sp>
-        <p:nvSpPr>
-          <p:cNvPr id="17" name="Text 15"/>
-          <p:cNvSpPr/>
-          <p:nvPr/>
-        </p:nvSpPr>
-        <p:spPr>
-          <a:xfrm>
-            <a:off x="7909560" y="3977640"/>
-            <a:ext cx="2926080" cy="182880"/>
-          </a:xfrm>
-          <a:prstGeom prst="rect">
-            <a:avLst/>
-          </a:prstGeom>
-          <a:noFill/>
-          <a:ln/>
-        </p:spPr>
-        <p:txBody>
-          <a:bodyPr wrap="square" lIns="0" tIns="0" rIns="0" bIns="0" rtlCol="0" anchor="ctr"/>
-          <a:lstStyle/>
-          <a:p>
-            <a:pPr algn="ctr" indent="0" marL="0">
-              <a:buNone/>
-            </a:pPr>
-            <a:r>
-              <a:rPr lang="en-US" sz="1000" dirty="0">
-                <a:solidFill>
-                  <a:srgbClr val="003A63"/>
-                </a:solidFill>
-                <a:latin typeface="Aptos" pitchFamily="34" charset="0"/>
-                <a:ea typeface="Aptos" pitchFamily="34" charset="-122"/>
-                <a:cs typeface="Aptos" pitchFamily="34" charset="-120"/>
-              </a:rPr>
-              <a:t>Concept to action</a:t>
-            </a:r>
-            <a:endParaRPr lang="en-US" sz="1000" dirty="0"/>
-          </a:p>
-        </p:txBody>
-      </p:sp>
-      <p:sp>
-        <p:nvSpPr>
-          <p:cNvPr id="18" name="Shape 16"/>
           <p:cNvSpPr/>
           <p:nvPr/>
         </p:nvSpPr>
@@ -7337,7 +7117,7 @@
       </p:sp>
       <p:sp>
         <p:nvSpPr>
-          <p:cNvPr id="19" name="Text 17"/>
+          <p:cNvPr id="17" name="Text 15"/>
           <p:cNvSpPr/>
           <p:nvPr/>
         </p:nvSpPr>
@@ -7376,7 +7156,7 @@
       </p:sp>
       <p:sp>
         <p:nvSpPr>
-          <p:cNvPr id="20" name="Text 18"/>
+          <p:cNvPr id="18" name="Text 16"/>
           <p:cNvSpPr/>
           <p:nvPr/>
         </p:nvSpPr>
@@ -7870,13 +7650,11 @@
             </a:avLst>
           </a:prstGeom>
           <a:solidFill>
-            <a:srgbClr val="FFFFFF">
-              <a:alpha val="88000"/>
-            </a:srgbClr>
+            <a:srgbClr val="FFFFFF"/>
           </a:solidFill>
           <a:ln w="12700">
             <a:solidFill>
-              <a:srgbClr val="D6E8F2"/>
+              <a:srgbClr val="B9D7E6"/>
             </a:solidFill>
             <a:prstDash val="solid"/>
           </a:ln>
@@ -7884,119 +7662,98 @@
       </p:sp>
       <p:sp>
         <p:nvSpPr>
-          <p:cNvPr id="14" name="Shape 12"/>
-          <p:cNvSpPr/>
-          <p:nvPr/>
-        </p:nvSpPr>
-        <p:spPr>
-          <a:xfrm>
-            <a:off x="8074152" y="3291840"/>
-            <a:ext cx="2596896" cy="749808"/>
-          </a:xfrm>
-          <a:prstGeom prst="rect">
-            <a:avLst/>
-          </a:prstGeom>
-          <a:solidFill>
-            <a:srgbClr val="EAF6F8"/>
-          </a:solidFill>
-          <a:ln w="12700">
-            <a:solidFill>
-              <a:srgbClr val="8ABBD8"/>
-            </a:solidFill>
-            <a:prstDash val="solid"/>
-          </a:ln>
-        </p:spPr>
-      </p:sp>
-      <p:sp>
-        <p:nvSpPr>
-          <p:cNvPr id="15" name="Shape 13"/>
-          <p:cNvSpPr/>
-          <p:nvPr/>
-        </p:nvSpPr>
-        <p:spPr>
-          <a:xfrm>
-            <a:off x="8202168" y="3721608"/>
-            <a:ext cx="2340864" cy="0"/>
-          </a:xfrm>
-          <a:prstGeom prst="line">
-            <a:avLst/>
-          </a:prstGeom>
-          <a:noFill/>
-          <a:ln w="19050">
-            <a:solidFill>
-              <a:srgbClr val="0068B7"/>
-            </a:solidFill>
-            <a:prstDash val="solid"/>
-          </a:ln>
-        </p:spPr>
+          <p:cNvPr id="14" name="Text 12"/>
+          <p:cNvSpPr/>
+          <p:nvPr/>
+        </p:nvSpPr>
+        <p:spPr>
+          <a:xfrm>
+            <a:off x="7799832" y="2935224"/>
+            <a:ext cx="3145536" cy="256032"/>
+          </a:xfrm>
+          <a:prstGeom prst="rect">
+            <a:avLst/>
+          </a:prstGeom>
+          <a:noFill/>
+          <a:ln/>
+        </p:spPr>
+        <p:txBody>
+          <a:bodyPr wrap="square" lIns="0" tIns="0" rIns="0" bIns="0" rtlCol="0" anchor="ctr"/>
+          <a:lstStyle/>
+          <a:p>
+            <a:pPr indent="0" marL="0">
+              <a:buNone/>
+            </a:pPr>
+            <a:r>
+              <a:rPr lang="en-US" sz="1300" b="1" dirty="0">
+                <a:solidFill>
+                  <a:srgbClr val="0068B7"/>
+                </a:solidFill>
+                <a:latin typeface="Aptos" pitchFamily="34" charset="0"/>
+                <a:ea typeface="Aptos" pitchFamily="34" charset="-122"/>
+                <a:cs typeface="Aptos" pitchFamily="34" charset="-120"/>
+              </a:rPr>
+              <a:t>Concept checkpoints</a:t>
+            </a:r>
+            <a:endParaRPr lang="en-US" sz="1300" dirty="0"/>
+          </a:p>
+        </p:txBody>
+      </p:sp>
+      <p:sp>
+        <p:nvSpPr>
+          <p:cNvPr id="15" name="Text 13"/>
+          <p:cNvSpPr/>
+          <p:nvPr/>
+        </p:nvSpPr>
+        <p:spPr>
+          <a:xfrm>
+            <a:off x="7818120" y="3300984"/>
+            <a:ext cx="3090672" cy="877824"/>
+          </a:xfrm>
+          <a:prstGeom prst="rect">
+            <a:avLst/>
+          </a:prstGeom>
+          <a:noFill/>
+          <a:ln/>
+        </p:spPr>
+        <p:txBody>
+          <a:bodyPr wrap="square" lIns="254" tIns="254" rIns="254" bIns="254" rtlCol="0" anchor="t">
+            <a:normAutofit/>
+          </a:bodyPr>
+          <a:lstStyle/>
+          <a:p>
+            <a:r>
+              <a:rPr lang="en-US" sz="1380" dirty="0">
+                <a:solidFill>
+                  <a:srgbClr val="17364A"/>
+                </a:solidFill>
+                <a:latin typeface="Aptos" pitchFamily="34" charset="0"/>
+                <a:ea typeface="Aptos" pitchFamily="34" charset="-122"/>
+                <a:cs typeface="Aptos" pitchFamily="34" charset="-120"/>
+              </a:rPr>
+              <a:t>Which safeguards should be required before pilot testing?</a:t>
+            </a:r>
+            <a:endParaRPr lang="en-US" sz="1380" dirty="0"/>
+          </a:p>
+          <a:p>
+            <a:r>
+              <a:rPr lang="en-US" sz="1380" dirty="0">
+                <a:solidFill>
+                  <a:srgbClr val="17364A"/>
+                </a:solidFill>
+                <a:latin typeface="Aptos" pitchFamily="34" charset="0"/>
+                <a:ea typeface="Aptos" pitchFamily="34" charset="-122"/>
+                <a:cs typeface="Aptos" pitchFamily="34" charset="-120"/>
+              </a:rPr>
+              <a:t>Who owns ongoing monitoring and review?</a:t>
+            </a:r>
+            <a:endParaRPr lang="en-US" sz="1380" dirty="0"/>
+          </a:p>
+        </p:txBody>
       </p:sp>
       <p:sp>
         <p:nvSpPr>
           <p:cNvPr id="16" name="Shape 14"/>
-          <p:cNvSpPr/>
-          <p:nvPr/>
-        </p:nvSpPr>
-        <p:spPr>
-          <a:xfrm>
-            <a:off x="9198864" y="4206240"/>
-            <a:ext cx="347472" cy="347472"/>
-          </a:xfrm>
-          <a:prstGeom prst="ellipse">
-            <a:avLst/>
-          </a:prstGeom>
-          <a:solidFill>
-            <a:srgbClr val="2F8A28"/>
-          </a:solidFill>
-          <a:ln w="12700">
-            <a:solidFill>
-              <a:srgbClr val="2F8A28"/>
-            </a:solidFill>
-            <a:prstDash val="solid"/>
-          </a:ln>
-        </p:spPr>
-      </p:sp>
-      <p:sp>
-        <p:nvSpPr>
-          <p:cNvPr id="17" name="Text 15"/>
-          <p:cNvSpPr/>
-          <p:nvPr/>
-        </p:nvSpPr>
-        <p:spPr>
-          <a:xfrm>
-            <a:off x="7909560" y="3977640"/>
-            <a:ext cx="2926080" cy="182880"/>
-          </a:xfrm>
-          <a:prstGeom prst="rect">
-            <a:avLst/>
-          </a:prstGeom>
-          <a:noFill/>
-          <a:ln/>
-        </p:spPr>
-        <p:txBody>
-          <a:bodyPr wrap="square" lIns="0" tIns="0" rIns="0" bIns="0" rtlCol="0" anchor="ctr"/>
-          <a:lstStyle/>
-          <a:p>
-            <a:pPr algn="ctr" indent="0" marL="0">
-              <a:buNone/>
-            </a:pPr>
-            <a:r>
-              <a:rPr lang="en-US" sz="1000" dirty="0">
-                <a:solidFill>
-                  <a:srgbClr val="003A63"/>
-                </a:solidFill>
-                <a:latin typeface="Aptos" pitchFamily="34" charset="0"/>
-                <a:ea typeface="Aptos" pitchFamily="34" charset="-122"/>
-                <a:cs typeface="Aptos" pitchFamily="34" charset="-120"/>
-              </a:rPr>
-              <a:t>Concept to action</a:t>
-            </a:r>
-            <a:endParaRPr lang="en-US" sz="1000" dirty="0"/>
-          </a:p>
-        </p:txBody>
-      </p:sp>
-      <p:sp>
-        <p:nvSpPr>
-          <p:cNvPr id="18" name="Shape 16"/>
           <p:cNvSpPr/>
           <p:nvPr/>
         </p:nvSpPr>
@@ -8023,7 +7780,7 @@
       </p:sp>
       <p:sp>
         <p:nvSpPr>
-          <p:cNvPr id="19" name="Text 17"/>
+          <p:cNvPr id="17" name="Text 15"/>
           <p:cNvSpPr/>
           <p:nvPr/>
         </p:nvSpPr>
@@ -8062,7 +7819,7 @@
       </p:sp>
       <p:sp>
         <p:nvSpPr>
-          <p:cNvPr id="20" name="Text 18"/>
+          <p:cNvPr id="18" name="Text 16"/>
           <p:cNvSpPr/>
           <p:nvPr/>
         </p:nvSpPr>
@@ -8570,13 +8327,11 @@
             </a:avLst>
           </a:prstGeom>
           <a:solidFill>
-            <a:srgbClr val="FFFFFF">
-              <a:alpha val="88000"/>
-            </a:srgbClr>
+            <a:srgbClr val="FFFFFF"/>
           </a:solidFill>
           <a:ln w="12700">
             <a:solidFill>
-              <a:srgbClr val="D6E8F2"/>
+              <a:srgbClr val="B9D7E6"/>
             </a:solidFill>
             <a:prstDash val="solid"/>
           </a:ln>
@@ -8584,119 +8339,112 @@
       </p:sp>
       <p:sp>
         <p:nvSpPr>
-          <p:cNvPr id="14" name="Shape 12"/>
-          <p:cNvSpPr/>
-          <p:nvPr/>
-        </p:nvSpPr>
-        <p:spPr>
-          <a:xfrm>
-            <a:off x="8074152" y="3291840"/>
-            <a:ext cx="2596896" cy="749808"/>
-          </a:xfrm>
-          <a:prstGeom prst="rect">
-            <a:avLst/>
-          </a:prstGeom>
-          <a:solidFill>
-            <a:srgbClr val="EAF6F8"/>
-          </a:solidFill>
-          <a:ln w="12700">
-            <a:solidFill>
-              <a:srgbClr val="8ABBD8"/>
-            </a:solidFill>
-            <a:prstDash val="solid"/>
-          </a:ln>
-        </p:spPr>
-      </p:sp>
-      <p:sp>
-        <p:nvSpPr>
-          <p:cNvPr id="15" name="Shape 13"/>
-          <p:cNvSpPr/>
-          <p:nvPr/>
-        </p:nvSpPr>
-        <p:spPr>
-          <a:xfrm>
-            <a:off x="8202168" y="3721608"/>
-            <a:ext cx="2340864" cy="0"/>
-          </a:xfrm>
-          <a:prstGeom prst="line">
-            <a:avLst/>
-          </a:prstGeom>
-          <a:noFill/>
-          <a:ln w="19050">
-            <a:solidFill>
-              <a:srgbClr val="0068B7"/>
-            </a:solidFill>
-            <a:prstDash val="solid"/>
-          </a:ln>
-        </p:spPr>
+          <p:cNvPr id="14" name="Text 12"/>
+          <p:cNvSpPr/>
+          <p:nvPr/>
+        </p:nvSpPr>
+        <p:spPr>
+          <a:xfrm>
+            <a:off x="7799832" y="2935224"/>
+            <a:ext cx="3145536" cy="256032"/>
+          </a:xfrm>
+          <a:prstGeom prst="rect">
+            <a:avLst/>
+          </a:prstGeom>
+          <a:noFill/>
+          <a:ln/>
+        </p:spPr>
+        <p:txBody>
+          <a:bodyPr wrap="square" lIns="0" tIns="0" rIns="0" bIns="0" rtlCol="0" anchor="ctr"/>
+          <a:lstStyle/>
+          <a:p>
+            <a:pPr indent="0" marL="0">
+              <a:buNone/>
+            </a:pPr>
+            <a:r>
+              <a:rPr lang="en-US" sz="1300" b="1" dirty="0">
+                <a:solidFill>
+                  <a:srgbClr val="0068B7"/>
+                </a:solidFill>
+                <a:latin typeface="Aptos" pitchFamily="34" charset="0"/>
+                <a:ea typeface="Aptos" pitchFamily="34" charset="-122"/>
+                <a:cs typeface="Aptos" pitchFamily="34" charset="-120"/>
+              </a:rPr>
+              <a:t>Concept checkpoints</a:t>
+            </a:r>
+            <a:endParaRPr lang="en-US" sz="1300" dirty="0"/>
+          </a:p>
+        </p:txBody>
+      </p:sp>
+      <p:sp>
+        <p:nvSpPr>
+          <p:cNvPr id="15" name="Text 13"/>
+          <p:cNvSpPr/>
+          <p:nvPr/>
+        </p:nvSpPr>
+        <p:spPr>
+          <a:xfrm>
+            <a:off x="7818120" y="3300984"/>
+            <a:ext cx="3090672" cy="877824"/>
+          </a:xfrm>
+          <a:prstGeom prst="rect">
+            <a:avLst/>
+          </a:prstGeom>
+          <a:noFill/>
+          <a:ln/>
+        </p:spPr>
+        <p:txBody>
+          <a:bodyPr wrap="square" lIns="254" tIns="254" rIns="254" bIns="254" rtlCol="0" anchor="t">
+            <a:normAutofit/>
+          </a:bodyPr>
+          <a:lstStyle/>
+          <a:p>
+            <a:r>
+              <a:rPr lang="en-US" sz="1380" dirty="0">
+                <a:solidFill>
+                  <a:srgbClr val="17364A"/>
+                </a:solidFill>
+                <a:latin typeface="Aptos" pitchFamily="34" charset="0"/>
+                <a:ea typeface="Aptos" pitchFamily="34" charset="-122"/>
+                <a:cs typeface="Aptos" pitchFamily="34" charset="-120"/>
+              </a:rPr>
+              <a:t>The artifact should describe the use case, affected users, data sources, system.</a:t>
+            </a:r>
+            <a:endParaRPr lang="en-US" sz="1380" dirty="0"/>
+          </a:p>
+          <a:p>
+            <a:r>
+              <a:rPr lang="en-US" sz="1380" dirty="0">
+                <a:solidFill>
+                  <a:srgbClr val="17364A"/>
+                </a:solidFill>
+                <a:latin typeface="Aptos" pitchFamily="34" charset="0"/>
+                <a:ea typeface="Aptos" pitchFamily="34" charset="-122"/>
+                <a:cs typeface="Aptos" pitchFamily="34" charset="-120"/>
+              </a:rPr>
+              <a:t>The exercise should produce a work product that could be used in a governance meeting,.</a:t>
+            </a:r>
+            <a:endParaRPr lang="en-US" sz="1380" dirty="0"/>
+          </a:p>
+          <a:p>
+            <a:r>
+              <a:rPr lang="en-US" sz="1380" dirty="0">
+                <a:solidFill>
+                  <a:srgbClr val="17364A"/>
+                </a:solidFill>
+                <a:latin typeface="Aptos" pitchFamily="34" charset="0"/>
+                <a:ea typeface="Aptos" pitchFamily="34" charset="-122"/>
+                <a:cs typeface="Aptos" pitchFamily="34" charset="-120"/>
+              </a:rPr>
+              <a:t>Learners should document assumptions and identify which staff or partners need to be.</a:t>
+            </a:r>
+            <a:endParaRPr lang="en-US" sz="1380" dirty="0"/>
+          </a:p>
+        </p:txBody>
       </p:sp>
       <p:sp>
         <p:nvSpPr>
           <p:cNvPr id="16" name="Shape 14"/>
-          <p:cNvSpPr/>
-          <p:nvPr/>
-        </p:nvSpPr>
-        <p:spPr>
-          <a:xfrm>
-            <a:off x="9198864" y="4206240"/>
-            <a:ext cx="347472" cy="347472"/>
-          </a:xfrm>
-          <a:prstGeom prst="ellipse">
-            <a:avLst/>
-          </a:prstGeom>
-          <a:solidFill>
-            <a:srgbClr val="2F8A28"/>
-          </a:solidFill>
-          <a:ln w="12700">
-            <a:solidFill>
-              <a:srgbClr val="2F8A28"/>
-            </a:solidFill>
-            <a:prstDash val="solid"/>
-          </a:ln>
-        </p:spPr>
-      </p:sp>
-      <p:sp>
-        <p:nvSpPr>
-          <p:cNvPr id="17" name="Text 15"/>
-          <p:cNvSpPr/>
-          <p:nvPr/>
-        </p:nvSpPr>
-        <p:spPr>
-          <a:xfrm>
-            <a:off x="7909560" y="3977640"/>
-            <a:ext cx="2926080" cy="182880"/>
-          </a:xfrm>
-          <a:prstGeom prst="rect">
-            <a:avLst/>
-          </a:prstGeom>
-          <a:noFill/>
-          <a:ln/>
-        </p:spPr>
-        <p:txBody>
-          <a:bodyPr wrap="square" lIns="0" tIns="0" rIns="0" bIns="0" rtlCol="0" anchor="ctr"/>
-          <a:lstStyle/>
-          <a:p>
-            <a:pPr algn="ctr" indent="0" marL="0">
-              <a:buNone/>
-            </a:pPr>
-            <a:r>
-              <a:rPr lang="en-US" sz="1000" dirty="0">
-                <a:solidFill>
-                  <a:srgbClr val="003A63"/>
-                </a:solidFill>
-                <a:latin typeface="Aptos" pitchFamily="34" charset="0"/>
-                <a:ea typeface="Aptos" pitchFamily="34" charset="-122"/>
-                <a:cs typeface="Aptos" pitchFamily="34" charset="-120"/>
-              </a:rPr>
-              <a:t>Concept to action</a:t>
-            </a:r>
-            <a:endParaRPr lang="en-US" sz="1000" dirty="0"/>
-          </a:p>
-        </p:txBody>
-      </p:sp>
-      <p:sp>
-        <p:nvSpPr>
-          <p:cNvPr id="18" name="Shape 16"/>
           <p:cNvSpPr/>
           <p:nvPr/>
         </p:nvSpPr>
@@ -8723,7 +8471,7 @@
       </p:sp>
       <p:sp>
         <p:nvSpPr>
-          <p:cNvPr id="19" name="Text 17"/>
+          <p:cNvPr id="17" name="Text 15"/>
           <p:cNvSpPr/>
           <p:nvPr/>
         </p:nvSpPr>
@@ -8762,7 +8510,7 @@
       </p:sp>
       <p:sp>
         <p:nvSpPr>
-          <p:cNvPr id="20" name="Text 18"/>
+          <p:cNvPr id="18" name="Text 16"/>
           <p:cNvSpPr/>
           <p:nvPr/>
         </p:nvSpPr>
@@ -9256,13 +9004,11 @@
             </a:avLst>
           </a:prstGeom>
           <a:solidFill>
-            <a:srgbClr val="FFFFFF">
-              <a:alpha val="88000"/>
-            </a:srgbClr>
+            <a:srgbClr val="FFFFFF"/>
           </a:solidFill>
           <a:ln w="12700">
             <a:solidFill>
-              <a:srgbClr val="D6E8F2"/>
+              <a:srgbClr val="B9D7E6"/>
             </a:solidFill>
             <a:prstDash val="solid"/>
           </a:ln>
@@ -9270,119 +9016,98 @@
       </p:sp>
       <p:sp>
         <p:nvSpPr>
-          <p:cNvPr id="14" name="Shape 12"/>
-          <p:cNvSpPr/>
-          <p:nvPr/>
-        </p:nvSpPr>
-        <p:spPr>
-          <a:xfrm>
-            <a:off x="8074152" y="3291840"/>
-            <a:ext cx="2596896" cy="749808"/>
-          </a:xfrm>
-          <a:prstGeom prst="rect">
-            <a:avLst/>
-          </a:prstGeom>
-          <a:solidFill>
-            <a:srgbClr val="EAF6F8"/>
-          </a:solidFill>
-          <a:ln w="12700">
-            <a:solidFill>
-              <a:srgbClr val="8ABBD8"/>
-            </a:solidFill>
-            <a:prstDash val="solid"/>
-          </a:ln>
-        </p:spPr>
-      </p:sp>
-      <p:sp>
-        <p:nvSpPr>
-          <p:cNvPr id="15" name="Shape 13"/>
-          <p:cNvSpPr/>
-          <p:nvPr/>
-        </p:nvSpPr>
-        <p:spPr>
-          <a:xfrm>
-            <a:off x="8202168" y="3721608"/>
-            <a:ext cx="2340864" cy="0"/>
-          </a:xfrm>
-          <a:prstGeom prst="line">
-            <a:avLst/>
-          </a:prstGeom>
-          <a:noFill/>
-          <a:ln w="19050">
-            <a:solidFill>
-              <a:srgbClr val="0068B7"/>
-            </a:solidFill>
-            <a:prstDash val="solid"/>
-          </a:ln>
-        </p:spPr>
+          <p:cNvPr id="14" name="Text 12"/>
+          <p:cNvSpPr/>
+          <p:nvPr/>
+        </p:nvSpPr>
+        <p:spPr>
+          <a:xfrm>
+            <a:off x="7799832" y="2935224"/>
+            <a:ext cx="3145536" cy="256032"/>
+          </a:xfrm>
+          <a:prstGeom prst="rect">
+            <a:avLst/>
+          </a:prstGeom>
+          <a:noFill/>
+          <a:ln/>
+        </p:spPr>
+        <p:txBody>
+          <a:bodyPr wrap="square" lIns="0" tIns="0" rIns="0" bIns="0" rtlCol="0" anchor="ctr"/>
+          <a:lstStyle/>
+          <a:p>
+            <a:pPr indent="0" marL="0">
+              <a:buNone/>
+            </a:pPr>
+            <a:r>
+              <a:rPr lang="en-US" sz="1300" b="1" dirty="0">
+                <a:solidFill>
+                  <a:srgbClr val="0068B7"/>
+                </a:solidFill>
+                <a:latin typeface="Aptos" pitchFamily="34" charset="0"/>
+                <a:ea typeface="Aptos" pitchFamily="34" charset="-122"/>
+                <a:cs typeface="Aptos" pitchFamily="34" charset="-120"/>
+              </a:rPr>
+              <a:t>Concept checkpoints</a:t>
+            </a:r>
+            <a:endParaRPr lang="en-US" sz="1300" dirty="0"/>
+          </a:p>
+        </p:txBody>
+      </p:sp>
+      <p:sp>
+        <p:nvSpPr>
+          <p:cNvPr id="15" name="Text 13"/>
+          <p:cNvSpPr/>
+          <p:nvPr/>
+        </p:nvSpPr>
+        <p:spPr>
+          <a:xfrm>
+            <a:off x="7818120" y="3300984"/>
+            <a:ext cx="3090672" cy="877824"/>
+          </a:xfrm>
+          <a:prstGeom prst="rect">
+            <a:avLst/>
+          </a:prstGeom>
+          <a:noFill/>
+          <a:ln/>
+        </p:spPr>
+        <p:txBody>
+          <a:bodyPr wrap="square" lIns="254" tIns="254" rIns="254" bIns="254" rtlCol="0" anchor="t">
+            <a:normAutofit/>
+          </a:bodyPr>
+          <a:lstStyle/>
+          <a:p>
+            <a:r>
+              <a:rPr lang="en-US" sz="1380" dirty="0">
+                <a:solidFill>
+                  <a:srgbClr val="17364A"/>
+                </a:solidFill>
+                <a:latin typeface="Aptos" pitchFamily="34" charset="0"/>
+                <a:ea typeface="Aptos" pitchFamily="34" charset="-122"/>
+                <a:cs typeface="Aptos" pitchFamily="34" charset="-120"/>
+              </a:rPr>
+              <a:t>The expected artifact is a completed secure deployment readiness worksheet.</a:t>
+            </a:r>
+            <a:endParaRPr lang="en-US" sz="1380" dirty="0"/>
+          </a:p>
+          <a:p>
+            <a:r>
+              <a:rPr lang="en-US" sz="1380" dirty="0">
+                <a:solidFill>
+                  <a:srgbClr val="17364A"/>
+                </a:solidFill>
+                <a:latin typeface="Aptos" pitchFamily="34" charset="0"/>
+                <a:ea typeface="Aptos" pitchFamily="34" charset="-122"/>
+                <a:cs typeface="Aptos" pitchFamily="34" charset="-120"/>
+              </a:rPr>
+              <a:t>It should be specific to a public health workflow and should include technical.</a:t>
+            </a:r>
+            <a:endParaRPr lang="en-US" sz="1380" dirty="0"/>
+          </a:p>
+        </p:txBody>
       </p:sp>
       <p:sp>
         <p:nvSpPr>
           <p:cNvPr id="16" name="Shape 14"/>
-          <p:cNvSpPr/>
-          <p:nvPr/>
-        </p:nvSpPr>
-        <p:spPr>
-          <a:xfrm>
-            <a:off x="9198864" y="4206240"/>
-            <a:ext cx="347472" cy="347472"/>
-          </a:xfrm>
-          <a:prstGeom prst="ellipse">
-            <a:avLst/>
-          </a:prstGeom>
-          <a:solidFill>
-            <a:srgbClr val="2F8A28"/>
-          </a:solidFill>
-          <a:ln w="12700">
-            <a:solidFill>
-              <a:srgbClr val="2F8A28"/>
-            </a:solidFill>
-            <a:prstDash val="solid"/>
-          </a:ln>
-        </p:spPr>
-      </p:sp>
-      <p:sp>
-        <p:nvSpPr>
-          <p:cNvPr id="17" name="Text 15"/>
-          <p:cNvSpPr/>
-          <p:nvPr/>
-        </p:nvSpPr>
-        <p:spPr>
-          <a:xfrm>
-            <a:off x="7909560" y="3977640"/>
-            <a:ext cx="2926080" cy="182880"/>
-          </a:xfrm>
-          <a:prstGeom prst="rect">
-            <a:avLst/>
-          </a:prstGeom>
-          <a:noFill/>
-          <a:ln/>
-        </p:spPr>
-        <p:txBody>
-          <a:bodyPr wrap="square" lIns="0" tIns="0" rIns="0" bIns="0" rtlCol="0" anchor="ctr"/>
-          <a:lstStyle/>
-          <a:p>
-            <a:pPr algn="ctr" indent="0" marL="0">
-              <a:buNone/>
-            </a:pPr>
-            <a:r>
-              <a:rPr lang="en-US" sz="1000" dirty="0">
-                <a:solidFill>
-                  <a:srgbClr val="003A63"/>
-                </a:solidFill>
-                <a:latin typeface="Aptos" pitchFamily="34" charset="0"/>
-                <a:ea typeface="Aptos" pitchFamily="34" charset="-122"/>
-                <a:cs typeface="Aptos" pitchFamily="34" charset="-120"/>
-              </a:rPr>
-              <a:t>Concept to action</a:t>
-            </a:r>
-            <a:endParaRPr lang="en-US" sz="1000" dirty="0"/>
-          </a:p>
-        </p:txBody>
-      </p:sp>
-      <p:sp>
-        <p:nvSpPr>
-          <p:cNvPr id="18" name="Shape 16"/>
           <p:cNvSpPr/>
           <p:nvPr/>
         </p:nvSpPr>
@@ -9409,7 +9134,7 @@
       </p:sp>
       <p:sp>
         <p:nvSpPr>
-          <p:cNvPr id="19" name="Text 17"/>
+          <p:cNvPr id="17" name="Text 15"/>
           <p:cNvSpPr/>
           <p:nvPr/>
         </p:nvSpPr>
@@ -9448,7 +9173,7 @@
       </p:sp>
       <p:sp>
         <p:nvSpPr>
-          <p:cNvPr id="20" name="Text 18"/>
+          <p:cNvPr id="18" name="Text 16"/>
           <p:cNvSpPr/>
           <p:nvPr/>
         </p:nvSpPr>
@@ -9928,13 +9653,11 @@
             </a:avLst>
           </a:prstGeom>
           <a:solidFill>
-            <a:srgbClr val="FFFFFF">
-              <a:alpha val="88000"/>
-            </a:srgbClr>
+            <a:srgbClr val="FFFFFF"/>
           </a:solidFill>
           <a:ln w="12700">
             <a:solidFill>
-              <a:srgbClr val="D6E8F2"/>
+              <a:srgbClr val="B9D7E6"/>
             </a:solidFill>
             <a:prstDash val="solid"/>
           </a:ln>
@@ -9942,119 +9665,98 @@
       </p:sp>
       <p:sp>
         <p:nvSpPr>
-          <p:cNvPr id="14" name="Shape 12"/>
-          <p:cNvSpPr/>
-          <p:nvPr/>
-        </p:nvSpPr>
-        <p:spPr>
-          <a:xfrm>
-            <a:off x="8074152" y="3291840"/>
-            <a:ext cx="2596896" cy="749808"/>
-          </a:xfrm>
-          <a:prstGeom prst="rect">
-            <a:avLst/>
-          </a:prstGeom>
-          <a:solidFill>
-            <a:srgbClr val="EAF6F8"/>
-          </a:solidFill>
-          <a:ln w="12700">
-            <a:solidFill>
-              <a:srgbClr val="8ABBD8"/>
-            </a:solidFill>
-            <a:prstDash val="solid"/>
-          </a:ln>
-        </p:spPr>
-      </p:sp>
-      <p:sp>
-        <p:nvSpPr>
-          <p:cNvPr id="15" name="Shape 13"/>
-          <p:cNvSpPr/>
-          <p:nvPr/>
-        </p:nvSpPr>
-        <p:spPr>
-          <a:xfrm>
-            <a:off x="8202168" y="3721608"/>
-            <a:ext cx="2340864" cy="0"/>
-          </a:xfrm>
-          <a:prstGeom prst="line">
-            <a:avLst/>
-          </a:prstGeom>
-          <a:noFill/>
-          <a:ln w="19050">
-            <a:solidFill>
-              <a:srgbClr val="0068B7"/>
-            </a:solidFill>
-            <a:prstDash val="solid"/>
-          </a:ln>
-        </p:spPr>
+          <p:cNvPr id="14" name="Text 12"/>
+          <p:cNvSpPr/>
+          <p:nvPr/>
+        </p:nvSpPr>
+        <p:spPr>
+          <a:xfrm>
+            <a:off x="7799832" y="2935224"/>
+            <a:ext cx="3145536" cy="256032"/>
+          </a:xfrm>
+          <a:prstGeom prst="rect">
+            <a:avLst/>
+          </a:prstGeom>
+          <a:noFill/>
+          <a:ln/>
+        </p:spPr>
+        <p:txBody>
+          <a:bodyPr wrap="square" lIns="0" tIns="0" rIns="0" bIns="0" rtlCol="0" anchor="ctr"/>
+          <a:lstStyle/>
+          <a:p>
+            <a:pPr indent="0" marL="0">
+              <a:buNone/>
+            </a:pPr>
+            <a:r>
+              <a:rPr lang="en-US" sz="1300" b="1" dirty="0">
+                <a:solidFill>
+                  <a:srgbClr val="0068B7"/>
+                </a:solidFill>
+                <a:latin typeface="Aptos" pitchFamily="34" charset="0"/>
+                <a:ea typeface="Aptos" pitchFamily="34" charset="-122"/>
+                <a:cs typeface="Aptos" pitchFamily="34" charset="-120"/>
+              </a:rPr>
+              <a:t>Concept checkpoints</a:t>
+            </a:r>
+            <a:endParaRPr lang="en-US" sz="1300" dirty="0"/>
+          </a:p>
+        </p:txBody>
+      </p:sp>
+      <p:sp>
+        <p:nvSpPr>
+          <p:cNvPr id="15" name="Text 13"/>
+          <p:cNvSpPr/>
+          <p:nvPr/>
+        </p:nvSpPr>
+        <p:spPr>
+          <a:xfrm>
+            <a:off x="7818120" y="3300984"/>
+            <a:ext cx="3090672" cy="877824"/>
+          </a:xfrm>
+          <a:prstGeom prst="rect">
+            <a:avLst/>
+          </a:prstGeom>
+          <a:noFill/>
+          <a:ln/>
+        </p:spPr>
+        <p:txBody>
+          <a:bodyPr wrap="square" lIns="254" tIns="254" rIns="254" bIns="254" rtlCol="0" anchor="t">
+            <a:normAutofit/>
+          </a:bodyPr>
+          <a:lstStyle/>
+          <a:p>
+            <a:r>
+              <a:rPr lang="en-US" sz="1380" dirty="0">
+                <a:solidFill>
+                  <a:srgbClr val="17364A"/>
+                </a:solidFill>
+                <a:latin typeface="Aptos" pitchFamily="34" charset="0"/>
+                <a:ea typeface="Aptos" pitchFamily="34" charset="-122"/>
+                <a:cs typeface="Aptos" pitchFamily="34" charset="-120"/>
+              </a:rPr>
+              <a:t>The expected artifact is a completed secure deployment readiness worksheet.</a:t>
+            </a:r>
+            <a:endParaRPr lang="en-US" sz="1380" dirty="0"/>
+          </a:p>
+          <a:p>
+            <a:r>
+              <a:rPr lang="en-US" sz="1380" dirty="0">
+                <a:solidFill>
+                  <a:srgbClr val="17364A"/>
+                </a:solidFill>
+                <a:latin typeface="Aptos" pitchFamily="34" charset="0"/>
+                <a:ea typeface="Aptos" pitchFamily="34" charset="-122"/>
+                <a:cs typeface="Aptos" pitchFamily="34" charset="-120"/>
+              </a:rPr>
+              <a:t>It should be specific to a public health workflow and should include technical.</a:t>
+            </a:r>
+            <a:endParaRPr lang="en-US" sz="1380" dirty="0"/>
+          </a:p>
+        </p:txBody>
       </p:sp>
       <p:sp>
         <p:nvSpPr>
           <p:cNvPr id="16" name="Shape 14"/>
-          <p:cNvSpPr/>
-          <p:nvPr/>
-        </p:nvSpPr>
-        <p:spPr>
-          <a:xfrm>
-            <a:off x="9198864" y="4206240"/>
-            <a:ext cx="347472" cy="347472"/>
-          </a:xfrm>
-          <a:prstGeom prst="ellipse">
-            <a:avLst/>
-          </a:prstGeom>
-          <a:solidFill>
-            <a:srgbClr val="2F8A28"/>
-          </a:solidFill>
-          <a:ln w="12700">
-            <a:solidFill>
-              <a:srgbClr val="2F8A28"/>
-            </a:solidFill>
-            <a:prstDash val="solid"/>
-          </a:ln>
-        </p:spPr>
-      </p:sp>
-      <p:sp>
-        <p:nvSpPr>
-          <p:cNvPr id="17" name="Text 15"/>
-          <p:cNvSpPr/>
-          <p:nvPr/>
-        </p:nvSpPr>
-        <p:spPr>
-          <a:xfrm>
-            <a:off x="7909560" y="3977640"/>
-            <a:ext cx="2926080" cy="182880"/>
-          </a:xfrm>
-          <a:prstGeom prst="rect">
-            <a:avLst/>
-          </a:prstGeom>
-          <a:noFill/>
-          <a:ln/>
-        </p:spPr>
-        <p:txBody>
-          <a:bodyPr wrap="square" lIns="0" tIns="0" rIns="0" bIns="0" rtlCol="0" anchor="ctr"/>
-          <a:lstStyle/>
-          <a:p>
-            <a:pPr algn="ctr" indent="0" marL="0">
-              <a:buNone/>
-            </a:pPr>
-            <a:r>
-              <a:rPr lang="en-US" sz="1000" dirty="0">
-                <a:solidFill>
-                  <a:srgbClr val="003A63"/>
-                </a:solidFill>
-                <a:latin typeface="Aptos" pitchFamily="34" charset="0"/>
-                <a:ea typeface="Aptos" pitchFamily="34" charset="-122"/>
-                <a:cs typeface="Aptos" pitchFamily="34" charset="-120"/>
-              </a:rPr>
-              <a:t>Concept to action</a:t>
-            </a:r>
-            <a:endParaRPr lang="en-US" sz="1000" dirty="0"/>
-          </a:p>
-        </p:txBody>
-      </p:sp>
-      <p:sp>
-        <p:nvSpPr>
-          <p:cNvPr id="18" name="Shape 16"/>
           <p:cNvSpPr/>
           <p:nvPr/>
         </p:nvSpPr>
@@ -10081,7 +9783,7 @@
       </p:sp>
       <p:sp>
         <p:nvSpPr>
-          <p:cNvPr id="19" name="Text 17"/>
+          <p:cNvPr id="17" name="Text 15"/>
           <p:cNvSpPr/>
           <p:nvPr/>
         </p:nvSpPr>
@@ -10120,7 +9822,7 @@
       </p:sp>
       <p:sp>
         <p:nvSpPr>
-          <p:cNvPr id="20" name="Text 18"/>
+          <p:cNvPr id="18" name="Text 16"/>
           <p:cNvSpPr/>
           <p:nvPr/>
         </p:nvSpPr>
@@ -10653,20 +10355,20 @@
         </p:nvSpPr>
         <p:spPr>
           <a:xfrm>
-            <a:off x="7635240" y="3730752"/>
-            <a:ext cx="1033272" cy="749808"/>
+            <a:off x="7909560" y="3675888"/>
+            <a:ext cx="3154680" cy="1691640"/>
           </a:xfrm>
           <a:prstGeom prst="roundRect">
             <a:avLst>
-              <a:gd name="adj" fmla="val 14634"/>
+              <a:gd name="adj" fmla="val 6486"/>
             </a:avLst>
           </a:prstGeom>
           <a:solidFill>
-            <a:srgbClr val="0068B7"/>
+            <a:srgbClr val="FFFFFF"/>
           </a:solidFill>
           <a:ln w="12700">
             <a:solidFill>
-              <a:srgbClr val="0068B7"/>
+              <a:srgbClr val="B9D7E6"/>
             </a:solidFill>
             <a:prstDash val="solid"/>
           </a:ln>
@@ -10680,172 +10382,100 @@
         </p:nvSpPr>
         <p:spPr>
           <a:xfrm>
-            <a:off x="7708392" y="3922776"/>
-            <a:ext cx="886968" cy="310896"/>
-          </a:xfrm>
-          <a:prstGeom prst="rect">
-            <a:avLst/>
-          </a:prstGeom>
-          <a:noFill/>
-          <a:ln/>
-        </p:spPr>
-        <p:txBody>
-          <a:bodyPr wrap="square" lIns="0" tIns="0" rIns="0" bIns="0" rtlCol="0" anchor="ctr">
+            <a:off x="8074152" y="3822192"/>
+            <a:ext cx="2825496" cy="256032"/>
+          </a:xfrm>
+          <a:prstGeom prst="rect">
+            <a:avLst/>
+          </a:prstGeom>
+          <a:noFill/>
+          <a:ln/>
+        </p:spPr>
+        <p:txBody>
+          <a:bodyPr wrap="square" lIns="0" tIns="0" rIns="0" bIns="0" rtlCol="0" anchor="ctr"/>
+          <a:lstStyle/>
+          <a:p>
+            <a:pPr indent="0" marL="0">
+              <a:buNone/>
+            </a:pPr>
+            <a:r>
+              <a:rPr lang="en-US" sz="1300" b="1" dirty="0">
+                <a:solidFill>
+                  <a:srgbClr val="0068B7"/>
+                </a:solidFill>
+                <a:latin typeface="Aptos" pitchFamily="34" charset="0"/>
+                <a:ea typeface="Aptos" pitchFamily="34" charset="-122"/>
+                <a:cs typeface="Aptos" pitchFamily="34" charset="-120"/>
+              </a:rPr>
+              <a:t>Learning sequence</a:t>
+            </a:r>
+            <a:endParaRPr lang="en-US" sz="1300" dirty="0"/>
+          </a:p>
+        </p:txBody>
+      </p:sp>
+      <p:sp>
+        <p:nvSpPr>
+          <p:cNvPr id="15" name="Text 13"/>
+          <p:cNvSpPr/>
+          <p:nvPr/>
+        </p:nvSpPr>
+        <p:spPr>
+          <a:xfrm>
+            <a:off x="8092440" y="4187952"/>
+            <a:ext cx="2770632" cy="1033272"/>
+          </a:xfrm>
+          <a:prstGeom prst="rect">
+            <a:avLst/>
+          </a:prstGeom>
+          <a:noFill/>
+          <a:ln/>
+        </p:spPr>
+        <p:txBody>
+          <a:bodyPr wrap="square" lIns="254" tIns="254" rIns="254" bIns="254" rtlCol="0" anchor="t">
             <a:normAutofit/>
           </a:bodyPr>
           <a:lstStyle/>
           <a:p>
-            <a:pPr algn="ctr" indent="0" marL="0">
-              <a:buNone/>
-            </a:pPr>
-            <a:r>
-              <a:rPr lang="en-US" sz="1500" b="1" dirty="0">
-                <a:solidFill>
-                  <a:srgbClr val="FFFFFF"/>
-                </a:solidFill>
-                <a:latin typeface="Aptos" pitchFamily="34" charset="0"/>
-                <a:ea typeface="Aptos" pitchFamily="34" charset="-122"/>
-                <a:cs typeface="Aptos" pitchFamily="34" charset="-120"/>
-              </a:rPr>
-              <a:t>Learn</a:t>
-            </a:r>
-            <a:endParaRPr lang="en-US" sz="1500" dirty="0"/>
-          </a:p>
-        </p:txBody>
-      </p:sp>
-      <p:sp>
-        <p:nvSpPr>
-          <p:cNvPr id="15" name="Shape 13"/>
-          <p:cNvSpPr/>
-          <p:nvPr/>
-        </p:nvSpPr>
-        <p:spPr>
-          <a:xfrm>
-            <a:off x="8924544" y="3730752"/>
-            <a:ext cx="1033272" cy="749808"/>
-          </a:xfrm>
-          <a:prstGeom prst="roundRect">
-            <a:avLst>
-              <a:gd name="adj" fmla="val 14634"/>
-            </a:avLst>
-          </a:prstGeom>
-          <a:solidFill>
-            <a:srgbClr val="2F8A28"/>
-          </a:solidFill>
-          <a:ln w="12700">
-            <a:solidFill>
-              <a:srgbClr val="2F8A28"/>
-            </a:solidFill>
-            <a:prstDash val="solid"/>
-          </a:ln>
-        </p:spPr>
-      </p:sp>
-      <p:sp>
-        <p:nvSpPr>
-          <p:cNvPr id="16" name="Text 14"/>
-          <p:cNvSpPr/>
-          <p:nvPr/>
-        </p:nvSpPr>
-        <p:spPr>
-          <a:xfrm>
-            <a:off x="8997696" y="3922776"/>
-            <a:ext cx="886968" cy="310896"/>
-          </a:xfrm>
-          <a:prstGeom prst="rect">
-            <a:avLst/>
-          </a:prstGeom>
-          <a:noFill/>
-          <a:ln/>
-        </p:spPr>
-        <p:txBody>
-          <a:bodyPr wrap="square" lIns="0" tIns="0" rIns="0" bIns="0" rtlCol="0" anchor="ctr">
-            <a:normAutofit/>
-          </a:bodyPr>
-          <a:lstStyle/>
-          <a:p>
-            <a:pPr algn="ctr" indent="0" marL="0">
-              <a:buNone/>
-            </a:pPr>
-            <a:r>
-              <a:rPr lang="en-US" sz="1500" b="1" dirty="0">
-                <a:solidFill>
-                  <a:srgbClr val="FFFFFF"/>
-                </a:solidFill>
-                <a:latin typeface="Aptos" pitchFamily="34" charset="0"/>
-                <a:ea typeface="Aptos" pitchFamily="34" charset="-122"/>
-                <a:cs typeface="Aptos" pitchFamily="34" charset="-120"/>
-              </a:rPr>
-              <a:t>Apply</a:t>
-            </a:r>
-            <a:endParaRPr lang="en-US" sz="1500" dirty="0"/>
-          </a:p>
-        </p:txBody>
-      </p:sp>
-      <p:sp>
-        <p:nvSpPr>
-          <p:cNvPr id="17" name="Shape 15"/>
-          <p:cNvSpPr/>
-          <p:nvPr/>
-        </p:nvSpPr>
-        <p:spPr>
-          <a:xfrm>
-            <a:off x="10213848" y="3730752"/>
-            <a:ext cx="1033272" cy="749808"/>
-          </a:xfrm>
-          <a:prstGeom prst="roundRect">
-            <a:avLst>
-              <a:gd name="adj" fmla="val 14634"/>
-            </a:avLst>
-          </a:prstGeom>
-          <a:solidFill>
-            <a:srgbClr val="6A4CA3"/>
-          </a:solidFill>
-          <a:ln w="12700">
-            <a:solidFill>
-              <a:srgbClr val="6A4CA3"/>
-            </a:solidFill>
-            <a:prstDash val="solid"/>
-          </a:ln>
-        </p:spPr>
-      </p:sp>
-      <p:sp>
-        <p:nvSpPr>
-          <p:cNvPr id="18" name="Text 16"/>
-          <p:cNvSpPr/>
-          <p:nvPr/>
-        </p:nvSpPr>
-        <p:spPr>
-          <a:xfrm>
-            <a:off x="10287000" y="3922776"/>
-            <a:ext cx="886968" cy="310896"/>
-          </a:xfrm>
-          <a:prstGeom prst="rect">
-            <a:avLst/>
-          </a:prstGeom>
-          <a:noFill/>
-          <a:ln/>
-        </p:spPr>
-        <p:txBody>
-          <a:bodyPr wrap="square" lIns="0" tIns="0" rIns="0" bIns="0" rtlCol="0" anchor="ctr">
-            <a:normAutofit/>
-          </a:bodyPr>
-          <a:lstStyle/>
-          <a:p>
-            <a:pPr algn="ctr" indent="0" marL="0">
-              <a:buNone/>
-            </a:pPr>
-            <a:r>
-              <a:rPr lang="en-US" sz="1500" b="1" dirty="0">
-                <a:solidFill>
-                  <a:srgbClr val="FFFFFF"/>
-                </a:solidFill>
-                <a:latin typeface="Aptos" pitchFamily="34" charset="0"/>
-                <a:ea typeface="Aptos" pitchFamily="34" charset="-122"/>
-                <a:cs typeface="Aptos" pitchFamily="34" charset="-120"/>
-              </a:rPr>
-              <a:t>Document</a:t>
-            </a:r>
-            <a:endParaRPr lang="en-US" sz="1500" dirty="0"/>
+            <a:r>
+              <a:rPr lang="en-US" sz="1380" dirty="0">
+                <a:solidFill>
+                  <a:srgbClr val="17364A"/>
+                </a:solidFill>
+                <a:latin typeface="Aptos" pitchFamily="34" charset="0"/>
+                <a:ea typeface="Aptos" pitchFamily="34" charset="-122"/>
+                <a:cs typeface="Aptos" pitchFamily="34" charset="-120"/>
+              </a:rPr>
+              <a:t>Read the module for shared vocabulary and context.</a:t>
+            </a:r>
+            <a:endParaRPr lang="en-US" sz="1380" dirty="0"/>
+          </a:p>
+          <a:p>
+            <a:r>
+              <a:rPr lang="en-US" sz="1380" dirty="0">
+                <a:solidFill>
+                  <a:srgbClr val="17364A"/>
+                </a:solidFill>
+                <a:latin typeface="Aptos" pitchFamily="34" charset="0"/>
+                <a:ea typeface="Aptos" pitchFamily="34" charset="-122"/>
+                <a:cs typeface="Aptos" pitchFamily="34" charset="-120"/>
+              </a:rPr>
+              <a:t>Complete the practical exercise to apply the concept.</a:t>
+            </a:r>
+            <a:endParaRPr lang="en-US" sz="1380" dirty="0"/>
+          </a:p>
+          <a:p>
+            <a:r>
+              <a:rPr lang="en-US" sz="1380" dirty="0">
+                <a:solidFill>
+                  <a:srgbClr val="17364A"/>
+                </a:solidFill>
+                <a:latin typeface="Aptos" pitchFamily="34" charset="0"/>
+                <a:ea typeface="Aptos" pitchFamily="34" charset="-122"/>
+                <a:cs typeface="Aptos" pitchFamily="34" charset="-120"/>
+              </a:rPr>
+              <a:t>Use the notes and references for deeper review.</a:t>
+            </a:r>
+            <a:endParaRPr lang="en-US" sz="1380" dirty="0"/>
           </a:p>
         </p:txBody>
       </p:sp>
@@ -11318,13 +10948,11 @@
             </a:avLst>
           </a:prstGeom>
           <a:solidFill>
-            <a:srgbClr val="FFFFFF">
-              <a:alpha val="88000"/>
-            </a:srgbClr>
+            <a:srgbClr val="FFFFFF"/>
           </a:solidFill>
           <a:ln w="12700">
             <a:solidFill>
-              <a:srgbClr val="D6E8F2"/>
+              <a:srgbClr val="B9D7E6"/>
             </a:solidFill>
             <a:prstDash val="solid"/>
           </a:ln>
@@ -11332,119 +10960,112 @@
       </p:sp>
       <p:sp>
         <p:nvSpPr>
-          <p:cNvPr id="14" name="Shape 12"/>
-          <p:cNvSpPr/>
-          <p:nvPr/>
-        </p:nvSpPr>
-        <p:spPr>
-          <a:xfrm>
-            <a:off x="8074152" y="3291840"/>
-            <a:ext cx="2596896" cy="749808"/>
-          </a:xfrm>
-          <a:prstGeom prst="rect">
-            <a:avLst/>
-          </a:prstGeom>
-          <a:solidFill>
-            <a:srgbClr val="EAF6F8"/>
-          </a:solidFill>
-          <a:ln w="12700">
-            <a:solidFill>
-              <a:srgbClr val="8ABBD8"/>
-            </a:solidFill>
-            <a:prstDash val="solid"/>
-          </a:ln>
-        </p:spPr>
-      </p:sp>
-      <p:sp>
-        <p:nvSpPr>
-          <p:cNvPr id="15" name="Shape 13"/>
-          <p:cNvSpPr/>
-          <p:nvPr/>
-        </p:nvSpPr>
-        <p:spPr>
-          <a:xfrm>
-            <a:off x="8202168" y="3721608"/>
-            <a:ext cx="2340864" cy="0"/>
-          </a:xfrm>
-          <a:prstGeom prst="line">
-            <a:avLst/>
-          </a:prstGeom>
-          <a:noFill/>
-          <a:ln w="19050">
-            <a:solidFill>
-              <a:srgbClr val="0068B7"/>
-            </a:solidFill>
-            <a:prstDash val="solid"/>
-          </a:ln>
-        </p:spPr>
+          <p:cNvPr id="14" name="Text 12"/>
+          <p:cNvSpPr/>
+          <p:nvPr/>
+        </p:nvSpPr>
+        <p:spPr>
+          <a:xfrm>
+            <a:off x="7799832" y="2935224"/>
+            <a:ext cx="3145536" cy="256032"/>
+          </a:xfrm>
+          <a:prstGeom prst="rect">
+            <a:avLst/>
+          </a:prstGeom>
+          <a:noFill/>
+          <a:ln/>
+        </p:spPr>
+        <p:txBody>
+          <a:bodyPr wrap="square" lIns="0" tIns="0" rIns="0" bIns="0" rtlCol="0" anchor="ctr"/>
+          <a:lstStyle/>
+          <a:p>
+            <a:pPr indent="0" marL="0">
+              <a:buNone/>
+            </a:pPr>
+            <a:r>
+              <a:rPr lang="en-US" sz="1300" b="1" dirty="0">
+                <a:solidFill>
+                  <a:srgbClr val="0068B7"/>
+                </a:solidFill>
+                <a:latin typeface="Aptos" pitchFamily="34" charset="0"/>
+                <a:ea typeface="Aptos" pitchFamily="34" charset="-122"/>
+                <a:cs typeface="Aptos" pitchFamily="34" charset="-120"/>
+              </a:rPr>
+              <a:t>Concept checkpoints</a:t>
+            </a:r>
+            <a:endParaRPr lang="en-US" sz="1300" dirty="0"/>
+          </a:p>
+        </p:txBody>
+      </p:sp>
+      <p:sp>
+        <p:nvSpPr>
+          <p:cNvPr id="15" name="Text 13"/>
+          <p:cNvSpPr/>
+          <p:nvPr/>
+        </p:nvSpPr>
+        <p:spPr>
+          <a:xfrm>
+            <a:off x="7818120" y="3300984"/>
+            <a:ext cx="3090672" cy="877824"/>
+          </a:xfrm>
+          <a:prstGeom prst="rect">
+            <a:avLst/>
+          </a:prstGeom>
+          <a:noFill/>
+          <a:ln/>
+        </p:spPr>
+        <p:txBody>
+          <a:bodyPr wrap="square" lIns="254" tIns="254" rIns="254" bIns="254" rtlCol="0" anchor="t">
+            <a:normAutofit/>
+          </a:bodyPr>
+          <a:lstStyle/>
+          <a:p>
+            <a:r>
+              <a:rPr lang="en-US" sz="1380" dirty="0">
+                <a:solidFill>
+                  <a:srgbClr val="17364A"/>
+                </a:solidFill>
+                <a:latin typeface="Aptos" pitchFamily="34" charset="0"/>
+                <a:ea typeface="Aptos" pitchFamily="34" charset="-122"/>
+                <a:cs typeface="Aptos" pitchFamily="34" charset="-120"/>
+              </a:rPr>
+              <a:t>1.</a:t>
+            </a:r>
+            <a:endParaRPr lang="en-US" sz="1380" dirty="0"/>
+          </a:p>
+          <a:p>
+            <a:r>
+              <a:rPr lang="en-US" sz="1380" dirty="0">
+                <a:solidFill>
+                  <a:srgbClr val="17364A"/>
+                </a:solidFill>
+                <a:latin typeface="Aptos" pitchFamily="34" charset="0"/>
+                <a:ea typeface="Aptos" pitchFamily="34" charset="-122"/>
+                <a:cs typeface="Aptos" pitchFamily="34" charset="-120"/>
+              </a:rPr>
+              <a:t>What is the best reason to address cloud, containers, and secure deployment basics before.</a:t>
+            </a:r>
+            <a:endParaRPr lang="en-US" sz="1380" dirty="0"/>
+          </a:p>
+          <a:p>
+            <a:r>
+              <a:rPr lang="en-US" sz="1380" dirty="0">
+                <a:solidFill>
+                  <a:srgbClr val="17364A"/>
+                </a:solidFill>
+                <a:latin typeface="Aptos" pitchFamily="34" charset="0"/>
+                <a:ea typeface="Aptos" pitchFamily="34" charset="-122"/>
+                <a:cs typeface="Aptos" pitchFamily="34" charset="-120"/>
+              </a:rPr>
+              <a:t>2.</a:t>
+            </a:r>
+            <a:endParaRPr lang="en-US" sz="1380" dirty="0"/>
+          </a:p>
+        </p:txBody>
       </p:sp>
       <p:sp>
         <p:nvSpPr>
           <p:cNvPr id="16" name="Shape 14"/>
-          <p:cNvSpPr/>
-          <p:nvPr/>
-        </p:nvSpPr>
-        <p:spPr>
-          <a:xfrm>
-            <a:off x="9198864" y="4206240"/>
-            <a:ext cx="347472" cy="347472"/>
-          </a:xfrm>
-          <a:prstGeom prst="ellipse">
-            <a:avLst/>
-          </a:prstGeom>
-          <a:solidFill>
-            <a:srgbClr val="2F8A28"/>
-          </a:solidFill>
-          <a:ln w="12700">
-            <a:solidFill>
-              <a:srgbClr val="2F8A28"/>
-            </a:solidFill>
-            <a:prstDash val="solid"/>
-          </a:ln>
-        </p:spPr>
-      </p:sp>
-      <p:sp>
-        <p:nvSpPr>
-          <p:cNvPr id="17" name="Text 15"/>
-          <p:cNvSpPr/>
-          <p:nvPr/>
-        </p:nvSpPr>
-        <p:spPr>
-          <a:xfrm>
-            <a:off x="7909560" y="3977640"/>
-            <a:ext cx="2926080" cy="182880"/>
-          </a:xfrm>
-          <a:prstGeom prst="rect">
-            <a:avLst/>
-          </a:prstGeom>
-          <a:noFill/>
-          <a:ln/>
-        </p:spPr>
-        <p:txBody>
-          <a:bodyPr wrap="square" lIns="0" tIns="0" rIns="0" bIns="0" rtlCol="0" anchor="ctr"/>
-          <a:lstStyle/>
-          <a:p>
-            <a:pPr algn="ctr" indent="0" marL="0">
-              <a:buNone/>
-            </a:pPr>
-            <a:r>
-              <a:rPr lang="en-US" sz="1000" dirty="0">
-                <a:solidFill>
-                  <a:srgbClr val="003A63"/>
-                </a:solidFill>
-                <a:latin typeface="Aptos" pitchFamily="34" charset="0"/>
-                <a:ea typeface="Aptos" pitchFamily="34" charset="-122"/>
-                <a:cs typeface="Aptos" pitchFamily="34" charset="-120"/>
-              </a:rPr>
-              <a:t>Concept to action</a:t>
-            </a:r>
-            <a:endParaRPr lang="en-US" sz="1000" dirty="0"/>
-          </a:p>
-        </p:txBody>
-      </p:sp>
-      <p:sp>
-        <p:nvSpPr>
-          <p:cNvPr id="18" name="Shape 16"/>
           <p:cNvSpPr/>
           <p:nvPr/>
         </p:nvSpPr>
@@ -11471,7 +11092,7 @@
       </p:sp>
       <p:sp>
         <p:nvSpPr>
-          <p:cNvPr id="19" name="Text 17"/>
+          <p:cNvPr id="17" name="Text 15"/>
           <p:cNvSpPr/>
           <p:nvPr/>
         </p:nvSpPr>
@@ -11510,7 +11131,7 @@
       </p:sp>
       <p:sp>
         <p:nvSpPr>
-          <p:cNvPr id="20" name="Text 18"/>
+          <p:cNvPr id="18" name="Text 16"/>
           <p:cNvSpPr/>
           <p:nvPr/>
         </p:nvSpPr>
@@ -12018,13 +11639,11 @@
             </a:avLst>
           </a:prstGeom>
           <a:solidFill>
-            <a:srgbClr val="FFFFFF">
-              <a:alpha val="88000"/>
-            </a:srgbClr>
+            <a:srgbClr val="FFFFFF"/>
           </a:solidFill>
           <a:ln w="12700">
             <a:solidFill>
-              <a:srgbClr val="D6E8F2"/>
+              <a:srgbClr val="B9D7E6"/>
             </a:solidFill>
             <a:prstDash val="solid"/>
           </a:ln>
@@ -12032,119 +11651,98 @@
       </p:sp>
       <p:sp>
         <p:nvSpPr>
-          <p:cNvPr id="14" name="Shape 12"/>
-          <p:cNvSpPr/>
-          <p:nvPr/>
-        </p:nvSpPr>
-        <p:spPr>
-          <a:xfrm>
-            <a:off x="8074152" y="3291840"/>
-            <a:ext cx="2596896" cy="749808"/>
-          </a:xfrm>
-          <a:prstGeom prst="rect">
-            <a:avLst/>
-          </a:prstGeom>
-          <a:solidFill>
-            <a:srgbClr val="EAF6F8"/>
-          </a:solidFill>
-          <a:ln w="12700">
-            <a:solidFill>
-              <a:srgbClr val="8ABBD8"/>
-            </a:solidFill>
-            <a:prstDash val="solid"/>
-          </a:ln>
-        </p:spPr>
-      </p:sp>
-      <p:sp>
-        <p:nvSpPr>
-          <p:cNvPr id="15" name="Shape 13"/>
-          <p:cNvSpPr/>
-          <p:nvPr/>
-        </p:nvSpPr>
-        <p:spPr>
-          <a:xfrm>
-            <a:off x="8202168" y="3721608"/>
-            <a:ext cx="2340864" cy="0"/>
-          </a:xfrm>
-          <a:prstGeom prst="line">
-            <a:avLst/>
-          </a:prstGeom>
-          <a:noFill/>
-          <a:ln w="19050">
-            <a:solidFill>
-              <a:srgbClr val="0068B7"/>
-            </a:solidFill>
-            <a:prstDash val="solid"/>
-          </a:ln>
-        </p:spPr>
+          <p:cNvPr id="14" name="Text 12"/>
+          <p:cNvSpPr/>
+          <p:nvPr/>
+        </p:nvSpPr>
+        <p:spPr>
+          <a:xfrm>
+            <a:off x="7799832" y="2935224"/>
+            <a:ext cx="3145536" cy="256032"/>
+          </a:xfrm>
+          <a:prstGeom prst="rect">
+            <a:avLst/>
+          </a:prstGeom>
+          <a:noFill/>
+          <a:ln/>
+        </p:spPr>
+        <p:txBody>
+          <a:bodyPr wrap="square" lIns="0" tIns="0" rIns="0" bIns="0" rtlCol="0" anchor="ctr"/>
+          <a:lstStyle/>
+          <a:p>
+            <a:pPr indent="0" marL="0">
+              <a:buNone/>
+            </a:pPr>
+            <a:r>
+              <a:rPr lang="en-US" sz="1300" b="1" dirty="0">
+                <a:solidFill>
+                  <a:srgbClr val="0068B7"/>
+                </a:solidFill>
+                <a:latin typeface="Aptos" pitchFamily="34" charset="0"/>
+                <a:ea typeface="Aptos" pitchFamily="34" charset="-122"/>
+                <a:cs typeface="Aptos" pitchFamily="34" charset="-120"/>
+              </a:rPr>
+              <a:t>Concept checkpoints</a:t>
+            </a:r>
+            <a:endParaRPr lang="en-US" sz="1300" dirty="0"/>
+          </a:p>
+        </p:txBody>
+      </p:sp>
+      <p:sp>
+        <p:nvSpPr>
+          <p:cNvPr id="15" name="Text 13"/>
+          <p:cNvSpPr/>
+          <p:nvPr/>
+        </p:nvSpPr>
+        <p:spPr>
+          <a:xfrm>
+            <a:off x="7818120" y="3300984"/>
+            <a:ext cx="3090672" cy="877824"/>
+          </a:xfrm>
+          <a:prstGeom prst="rect">
+            <a:avLst/>
+          </a:prstGeom>
+          <a:noFill/>
+          <a:ln/>
+        </p:spPr>
+        <p:txBody>
+          <a:bodyPr wrap="square" lIns="254" tIns="254" rIns="254" bIns="254" rtlCol="0" anchor="t">
+            <a:normAutofit/>
+          </a:bodyPr>
+          <a:lstStyle/>
+          <a:p>
+            <a:r>
+              <a:rPr lang="en-US" sz="1380" dirty="0">
+                <a:solidFill>
+                  <a:srgbClr val="17364A"/>
+                </a:solidFill>
+                <a:latin typeface="Aptos" pitchFamily="34" charset="0"/>
+                <a:ea typeface="Aptos" pitchFamily="34" charset="-122"/>
+                <a:cs typeface="Aptos" pitchFamily="34" charset="-120"/>
+              </a:rPr>
+              <a:t>CDC Public Health Data Strategy and Data Modernization resources:.</a:t>
+            </a:r>
+            <a:endParaRPr lang="en-US" sz="1380" dirty="0"/>
+          </a:p>
+          <a:p>
+            <a:r>
+              <a:rPr lang="en-US" sz="1380" dirty="0">
+                <a:solidFill>
+                  <a:srgbClr val="17364A"/>
+                </a:solidFill>
+                <a:latin typeface="Aptos" pitchFamily="34" charset="0"/>
+                <a:ea typeface="Aptos" pitchFamily="34" charset="-122"/>
+                <a:cs typeface="Aptos" pitchFamily="34" charset="-120"/>
+              </a:rPr>
+              <a:t>OWASP Top 10 for LLM Applications, when security or AI integrations are relevant</a:t>
+            </a:r>
+            <a:endParaRPr lang="en-US" sz="1380" dirty="0"/>
+          </a:p>
+        </p:txBody>
       </p:sp>
       <p:sp>
         <p:nvSpPr>
           <p:cNvPr id="16" name="Shape 14"/>
-          <p:cNvSpPr/>
-          <p:nvPr/>
-        </p:nvSpPr>
-        <p:spPr>
-          <a:xfrm>
-            <a:off x="9198864" y="4206240"/>
-            <a:ext cx="347472" cy="347472"/>
-          </a:xfrm>
-          <a:prstGeom prst="ellipse">
-            <a:avLst/>
-          </a:prstGeom>
-          <a:solidFill>
-            <a:srgbClr val="2F8A28"/>
-          </a:solidFill>
-          <a:ln w="12700">
-            <a:solidFill>
-              <a:srgbClr val="2F8A28"/>
-            </a:solidFill>
-            <a:prstDash val="solid"/>
-          </a:ln>
-        </p:spPr>
-      </p:sp>
-      <p:sp>
-        <p:nvSpPr>
-          <p:cNvPr id="17" name="Text 15"/>
-          <p:cNvSpPr/>
-          <p:nvPr/>
-        </p:nvSpPr>
-        <p:spPr>
-          <a:xfrm>
-            <a:off x="7909560" y="3977640"/>
-            <a:ext cx="2926080" cy="182880"/>
-          </a:xfrm>
-          <a:prstGeom prst="rect">
-            <a:avLst/>
-          </a:prstGeom>
-          <a:noFill/>
-          <a:ln/>
-        </p:spPr>
-        <p:txBody>
-          <a:bodyPr wrap="square" lIns="0" tIns="0" rIns="0" bIns="0" rtlCol="0" anchor="ctr"/>
-          <a:lstStyle/>
-          <a:p>
-            <a:pPr algn="ctr" indent="0" marL="0">
-              <a:buNone/>
-            </a:pPr>
-            <a:r>
-              <a:rPr lang="en-US" sz="1000" dirty="0">
-                <a:solidFill>
-                  <a:srgbClr val="003A63"/>
-                </a:solidFill>
-                <a:latin typeface="Aptos" pitchFamily="34" charset="0"/>
-                <a:ea typeface="Aptos" pitchFamily="34" charset="-122"/>
-                <a:cs typeface="Aptos" pitchFamily="34" charset="-120"/>
-              </a:rPr>
-              <a:t>Concept to action</a:t>
-            </a:r>
-            <a:endParaRPr lang="en-US" sz="1000" dirty="0"/>
-          </a:p>
-        </p:txBody>
-      </p:sp>
-      <p:sp>
-        <p:nvSpPr>
-          <p:cNvPr id="18" name="Shape 16"/>
           <p:cNvSpPr/>
           <p:nvPr/>
         </p:nvSpPr>
@@ -12171,7 +11769,7 @@
       </p:sp>
       <p:sp>
         <p:nvSpPr>
-          <p:cNvPr id="19" name="Text 17"/>
+          <p:cNvPr id="17" name="Text 15"/>
           <p:cNvSpPr/>
           <p:nvPr/>
         </p:nvSpPr>
@@ -12210,7 +11808,7 @@
       </p:sp>
       <p:sp>
         <p:nvSpPr>
-          <p:cNvPr id="20" name="Text 18"/>
+          <p:cNvPr id="18" name="Text 16"/>
           <p:cNvSpPr/>
           <p:nvPr/>
         </p:nvSpPr>
@@ -12690,13 +12288,11 @@
             </a:avLst>
           </a:prstGeom>
           <a:solidFill>
-            <a:srgbClr val="FFFFFF">
-              <a:alpha val="88000"/>
-            </a:srgbClr>
+            <a:srgbClr val="FFFFFF"/>
           </a:solidFill>
           <a:ln w="12700">
             <a:solidFill>
-              <a:srgbClr val="D6E8F2"/>
+              <a:srgbClr val="B9D7E6"/>
             </a:solidFill>
             <a:prstDash val="solid"/>
           </a:ln>
@@ -12704,119 +12300,84 @@
       </p:sp>
       <p:sp>
         <p:nvSpPr>
-          <p:cNvPr id="14" name="Shape 12"/>
-          <p:cNvSpPr/>
-          <p:nvPr/>
-        </p:nvSpPr>
-        <p:spPr>
-          <a:xfrm>
-            <a:off x="8074152" y="3291840"/>
-            <a:ext cx="2596896" cy="749808"/>
-          </a:xfrm>
-          <a:prstGeom prst="rect">
-            <a:avLst/>
-          </a:prstGeom>
-          <a:solidFill>
-            <a:srgbClr val="EAF6F8"/>
-          </a:solidFill>
-          <a:ln w="12700">
-            <a:solidFill>
-              <a:srgbClr val="8ABBD8"/>
-            </a:solidFill>
-            <a:prstDash val="solid"/>
-          </a:ln>
-        </p:spPr>
-      </p:sp>
-      <p:sp>
-        <p:nvSpPr>
-          <p:cNvPr id="15" name="Shape 13"/>
-          <p:cNvSpPr/>
-          <p:nvPr/>
-        </p:nvSpPr>
-        <p:spPr>
-          <a:xfrm>
-            <a:off x="8202168" y="3721608"/>
-            <a:ext cx="2340864" cy="0"/>
-          </a:xfrm>
-          <a:prstGeom prst="line">
-            <a:avLst/>
-          </a:prstGeom>
-          <a:noFill/>
-          <a:ln w="19050">
-            <a:solidFill>
-              <a:srgbClr val="0068B7"/>
-            </a:solidFill>
-            <a:prstDash val="solid"/>
-          </a:ln>
-        </p:spPr>
+          <p:cNvPr id="14" name="Text 12"/>
+          <p:cNvSpPr/>
+          <p:nvPr/>
+        </p:nvSpPr>
+        <p:spPr>
+          <a:xfrm>
+            <a:off x="7799832" y="2935224"/>
+            <a:ext cx="3145536" cy="256032"/>
+          </a:xfrm>
+          <a:prstGeom prst="rect">
+            <a:avLst/>
+          </a:prstGeom>
+          <a:noFill/>
+          <a:ln/>
+        </p:spPr>
+        <p:txBody>
+          <a:bodyPr wrap="square" lIns="0" tIns="0" rIns="0" bIns="0" rtlCol="0" anchor="ctr"/>
+          <a:lstStyle/>
+          <a:p>
+            <a:pPr indent="0" marL="0">
+              <a:buNone/>
+            </a:pPr>
+            <a:r>
+              <a:rPr lang="en-US" sz="1300" b="1" dirty="0">
+                <a:solidFill>
+                  <a:srgbClr val="0068B7"/>
+                </a:solidFill>
+                <a:latin typeface="Aptos" pitchFamily="34" charset="0"/>
+                <a:ea typeface="Aptos" pitchFamily="34" charset="-122"/>
+                <a:cs typeface="Aptos" pitchFamily="34" charset="-120"/>
+              </a:rPr>
+              <a:t>Concept checkpoints</a:t>
+            </a:r>
+            <a:endParaRPr lang="en-US" sz="1300" dirty="0"/>
+          </a:p>
+        </p:txBody>
+      </p:sp>
+      <p:sp>
+        <p:nvSpPr>
+          <p:cNvPr id="15" name="Text 13"/>
+          <p:cNvSpPr/>
+          <p:nvPr/>
+        </p:nvSpPr>
+        <p:spPr>
+          <a:xfrm>
+            <a:off x="7818120" y="3300984"/>
+            <a:ext cx="3090672" cy="877824"/>
+          </a:xfrm>
+          <a:prstGeom prst="rect">
+            <a:avLst/>
+          </a:prstGeom>
+          <a:noFill/>
+          <a:ln/>
+        </p:spPr>
+        <p:txBody>
+          <a:bodyPr wrap="square" lIns="254" tIns="254" rIns="254" bIns="254" rtlCol="0" anchor="t">
+            <a:normAutofit/>
+          </a:bodyPr>
+          <a:lstStyle/>
+          <a:p>
+            <a:r>
+              <a:rPr lang="en-US" sz="1380" dirty="0">
+                <a:solidFill>
+                  <a:srgbClr val="17364A"/>
+                </a:solidFill>
+                <a:latin typeface="Aptos" pitchFamily="34" charset="0"/>
+                <a:ea typeface="Aptos" pitchFamily="34" charset="-122"/>
+                <a:cs typeface="Aptos" pitchFamily="34" charset="-120"/>
+              </a:rPr>
+              <a:t>Agency privacy, cybersecurity, data governance, procurement, and records management policies</a:t>
+            </a:r>
+            <a:endParaRPr lang="en-US" sz="1380" dirty="0"/>
+          </a:p>
+        </p:txBody>
       </p:sp>
       <p:sp>
         <p:nvSpPr>
           <p:cNvPr id="16" name="Shape 14"/>
-          <p:cNvSpPr/>
-          <p:nvPr/>
-        </p:nvSpPr>
-        <p:spPr>
-          <a:xfrm>
-            <a:off x="9198864" y="4206240"/>
-            <a:ext cx="347472" cy="347472"/>
-          </a:xfrm>
-          <a:prstGeom prst="ellipse">
-            <a:avLst/>
-          </a:prstGeom>
-          <a:solidFill>
-            <a:srgbClr val="2F8A28"/>
-          </a:solidFill>
-          <a:ln w="12700">
-            <a:solidFill>
-              <a:srgbClr val="2F8A28"/>
-            </a:solidFill>
-            <a:prstDash val="solid"/>
-          </a:ln>
-        </p:spPr>
-      </p:sp>
-      <p:sp>
-        <p:nvSpPr>
-          <p:cNvPr id="17" name="Text 15"/>
-          <p:cNvSpPr/>
-          <p:nvPr/>
-        </p:nvSpPr>
-        <p:spPr>
-          <a:xfrm>
-            <a:off x="7909560" y="3977640"/>
-            <a:ext cx="2926080" cy="182880"/>
-          </a:xfrm>
-          <a:prstGeom prst="rect">
-            <a:avLst/>
-          </a:prstGeom>
-          <a:noFill/>
-          <a:ln/>
-        </p:spPr>
-        <p:txBody>
-          <a:bodyPr wrap="square" lIns="0" tIns="0" rIns="0" bIns="0" rtlCol="0" anchor="ctr"/>
-          <a:lstStyle/>
-          <a:p>
-            <a:pPr algn="ctr" indent="0" marL="0">
-              <a:buNone/>
-            </a:pPr>
-            <a:r>
-              <a:rPr lang="en-US" sz="1000" dirty="0">
-                <a:solidFill>
-                  <a:srgbClr val="003A63"/>
-                </a:solidFill>
-                <a:latin typeface="Aptos" pitchFamily="34" charset="0"/>
-                <a:ea typeface="Aptos" pitchFamily="34" charset="-122"/>
-                <a:cs typeface="Aptos" pitchFamily="34" charset="-120"/>
-              </a:rPr>
-              <a:t>Concept to action</a:t>
-            </a:r>
-            <a:endParaRPr lang="en-US" sz="1000" dirty="0"/>
-          </a:p>
-        </p:txBody>
-      </p:sp>
-      <p:sp>
-        <p:nvSpPr>
-          <p:cNvPr id="18" name="Shape 16"/>
           <p:cNvSpPr/>
           <p:nvPr/>
         </p:nvSpPr>
@@ -12843,7 +12404,7 @@
       </p:sp>
       <p:sp>
         <p:nvSpPr>
-          <p:cNvPr id="19" name="Text 17"/>
+          <p:cNvPr id="17" name="Text 15"/>
           <p:cNvSpPr/>
           <p:nvPr/>
         </p:nvSpPr>
@@ -12882,7 +12443,7 @@
       </p:sp>
       <p:sp>
         <p:nvSpPr>
-          <p:cNvPr id="20" name="Text 18"/>
+          <p:cNvPr id="18" name="Text 16"/>
           <p:cNvSpPr/>
           <p:nvPr/>
         </p:nvSpPr>
@@ -13395,20 +12956,20 @@
         </p:nvSpPr>
         <p:spPr>
           <a:xfrm>
-            <a:off x="7818120" y="3977640"/>
-            <a:ext cx="972312" cy="749808"/>
+            <a:off x="8046720" y="3794760"/>
+            <a:ext cx="3063240" cy="1600200"/>
           </a:xfrm>
           <a:prstGeom prst="roundRect">
             <a:avLst>
-              <a:gd name="adj" fmla="val 14634"/>
+              <a:gd name="adj" fmla="val 6857"/>
             </a:avLst>
           </a:prstGeom>
           <a:solidFill>
-            <a:srgbClr val="0068B7"/>
+            <a:srgbClr val="FFFFFF"/>
           </a:solidFill>
           <a:ln w="12700">
             <a:solidFill>
-              <a:srgbClr val="0068B7"/>
+              <a:srgbClr val="B9D7E6"/>
             </a:solidFill>
             <a:prstDash val="solid"/>
           </a:ln>
@@ -13422,172 +12983,100 @@
         </p:nvSpPr>
         <p:spPr>
           <a:xfrm>
-            <a:off x="7891272" y="4169664"/>
-            <a:ext cx="826008" cy="310896"/>
-          </a:xfrm>
-          <a:prstGeom prst="rect">
-            <a:avLst/>
-          </a:prstGeom>
-          <a:noFill/>
-          <a:ln/>
-        </p:spPr>
-        <p:txBody>
-          <a:bodyPr wrap="square" lIns="0" tIns="0" rIns="0" bIns="0" rtlCol="0" anchor="ctr">
+            <a:off x="8211312" y="3941064"/>
+            <a:ext cx="2734056" cy="256032"/>
+          </a:xfrm>
+          <a:prstGeom prst="rect">
+            <a:avLst/>
+          </a:prstGeom>
+          <a:noFill/>
+          <a:ln/>
+        </p:spPr>
+        <p:txBody>
+          <a:bodyPr wrap="square" lIns="0" tIns="0" rIns="0" bIns="0" rtlCol="0" anchor="ctr"/>
+          <a:lstStyle/>
+          <a:p>
+            <a:pPr indent="0" marL="0">
+              <a:buNone/>
+            </a:pPr>
+            <a:r>
+              <a:rPr lang="en-US" sz="1300" b="1" dirty="0">
+                <a:solidFill>
+                  <a:srgbClr val="0068B7"/>
+                </a:solidFill>
+                <a:latin typeface="Aptos" pitchFamily="34" charset="0"/>
+                <a:ea typeface="Aptos" pitchFamily="34" charset="-122"/>
+                <a:cs typeface="Aptos" pitchFamily="34" charset="-120"/>
+              </a:rPr>
+              <a:t>Use the play links to</a:t>
+            </a:r>
+            <a:endParaRPr lang="en-US" sz="1300" dirty="0"/>
+          </a:p>
+        </p:txBody>
+      </p:sp>
+      <p:sp>
+        <p:nvSpPr>
+          <p:cNvPr id="15" name="Text 13"/>
+          <p:cNvSpPr/>
+          <p:nvPr/>
+        </p:nvSpPr>
+        <p:spPr>
+          <a:xfrm>
+            <a:off x="8229600" y="4306824"/>
+            <a:ext cx="2679192" cy="941832"/>
+          </a:xfrm>
+          <a:prstGeom prst="rect">
+            <a:avLst/>
+          </a:prstGeom>
+          <a:noFill/>
+          <a:ln/>
+        </p:spPr>
+        <p:txBody>
+          <a:bodyPr wrap="square" lIns="254" tIns="254" rIns="254" bIns="254" rtlCol="0" anchor="t">
             <a:normAutofit/>
           </a:bodyPr>
           <a:lstStyle/>
           <a:p>
-            <a:pPr algn="ctr" indent="0" marL="0">
-              <a:buNone/>
-            </a:pPr>
-            <a:r>
-              <a:rPr lang="en-US" sz="1500" b="1" dirty="0">
-                <a:solidFill>
-                  <a:srgbClr val="FFFFFF"/>
-                </a:solidFill>
-                <a:latin typeface="Aptos" pitchFamily="34" charset="0"/>
-                <a:ea typeface="Aptos" pitchFamily="34" charset="-122"/>
-                <a:cs typeface="Aptos" pitchFamily="34" charset="-120"/>
-              </a:rPr>
-              <a:t>Lesson</a:t>
-            </a:r>
-            <a:endParaRPr lang="en-US" sz="1500" dirty="0"/>
-          </a:p>
-        </p:txBody>
-      </p:sp>
-      <p:sp>
-        <p:nvSpPr>
-          <p:cNvPr id="15" name="Shape 13"/>
-          <p:cNvSpPr/>
-          <p:nvPr/>
-        </p:nvSpPr>
-        <p:spPr>
-          <a:xfrm>
-            <a:off x="9046464" y="3977640"/>
-            <a:ext cx="972312" cy="749808"/>
-          </a:xfrm>
-          <a:prstGeom prst="roundRect">
-            <a:avLst>
-              <a:gd name="adj" fmla="val 14634"/>
-            </a:avLst>
-          </a:prstGeom>
-          <a:solidFill>
-            <a:srgbClr val="2F8A28"/>
-          </a:solidFill>
-          <a:ln w="12700">
-            <a:solidFill>
-              <a:srgbClr val="2F8A28"/>
-            </a:solidFill>
-            <a:prstDash val="solid"/>
-          </a:ln>
-        </p:spPr>
-      </p:sp>
-      <p:sp>
-        <p:nvSpPr>
-          <p:cNvPr id="16" name="Text 14"/>
-          <p:cNvSpPr/>
-          <p:nvPr/>
-        </p:nvSpPr>
-        <p:spPr>
-          <a:xfrm>
-            <a:off x="9119616" y="4169664"/>
-            <a:ext cx="826008" cy="310896"/>
-          </a:xfrm>
-          <a:prstGeom prst="rect">
-            <a:avLst/>
-          </a:prstGeom>
-          <a:noFill/>
-          <a:ln/>
-        </p:spPr>
-        <p:txBody>
-          <a:bodyPr wrap="square" lIns="0" tIns="0" rIns="0" bIns="0" rtlCol="0" anchor="ctr">
-            <a:normAutofit/>
-          </a:bodyPr>
-          <a:lstStyle/>
-          <a:p>
-            <a:pPr algn="ctr" indent="0" marL="0">
-              <a:buNone/>
-            </a:pPr>
-            <a:r>
-              <a:rPr lang="en-US" sz="1500" b="1" dirty="0">
-                <a:solidFill>
-                  <a:srgbClr val="FFFFFF"/>
-                </a:solidFill>
-                <a:latin typeface="Aptos" pitchFamily="34" charset="0"/>
-                <a:ea typeface="Aptos" pitchFamily="34" charset="-122"/>
-                <a:cs typeface="Aptos" pitchFamily="34" charset="-120"/>
-              </a:rPr>
-              <a:t>Plays</a:t>
-            </a:r>
-            <a:endParaRPr lang="en-US" sz="1500" dirty="0"/>
-          </a:p>
-        </p:txBody>
-      </p:sp>
-      <p:sp>
-        <p:nvSpPr>
-          <p:cNvPr id="17" name="Shape 15"/>
-          <p:cNvSpPr/>
-          <p:nvPr/>
-        </p:nvSpPr>
-        <p:spPr>
-          <a:xfrm>
-            <a:off x="10274808" y="3977640"/>
-            <a:ext cx="972312" cy="749808"/>
-          </a:xfrm>
-          <a:prstGeom prst="roundRect">
-            <a:avLst>
-              <a:gd name="adj" fmla="val 14634"/>
-            </a:avLst>
-          </a:prstGeom>
-          <a:solidFill>
-            <a:srgbClr val="6A4CA3"/>
-          </a:solidFill>
-          <a:ln w="12700">
-            <a:solidFill>
-              <a:srgbClr val="6A4CA3"/>
-            </a:solidFill>
-            <a:prstDash val="solid"/>
-          </a:ln>
-        </p:spPr>
-      </p:sp>
-      <p:sp>
-        <p:nvSpPr>
-          <p:cNvPr id="18" name="Text 16"/>
-          <p:cNvSpPr/>
-          <p:nvPr/>
-        </p:nvSpPr>
-        <p:spPr>
-          <a:xfrm>
-            <a:off x="10347960" y="4169664"/>
-            <a:ext cx="826008" cy="310896"/>
-          </a:xfrm>
-          <a:prstGeom prst="rect">
-            <a:avLst/>
-          </a:prstGeom>
-          <a:noFill/>
-          <a:ln/>
-        </p:spPr>
-        <p:txBody>
-          <a:bodyPr wrap="square" lIns="0" tIns="0" rIns="0" bIns="0" rtlCol="0" anchor="ctr">
-            <a:normAutofit/>
-          </a:bodyPr>
-          <a:lstStyle/>
-          <a:p>
-            <a:pPr algn="ctr" indent="0" marL="0">
-              <a:buNone/>
-            </a:pPr>
-            <a:r>
-              <a:rPr lang="en-US" sz="1500" b="1" dirty="0">
-                <a:solidFill>
-                  <a:srgbClr val="FFFFFF"/>
-                </a:solidFill>
-                <a:latin typeface="Aptos" pitchFamily="34" charset="0"/>
-                <a:ea typeface="Aptos" pitchFamily="34" charset="-122"/>
-                <a:cs typeface="Aptos" pitchFamily="34" charset="-120"/>
-              </a:rPr>
-              <a:t>Action</a:t>
-            </a:r>
-            <a:endParaRPr lang="en-US" sz="1500" dirty="0"/>
+            <a:r>
+              <a:rPr lang="en-US" sz="1380" dirty="0">
+                <a:solidFill>
+                  <a:srgbClr val="17364A"/>
+                </a:solidFill>
+                <a:latin typeface="Aptos" pitchFamily="34" charset="0"/>
+                <a:ea typeface="Aptos" pitchFamily="34" charset="-122"/>
+                <a:cs typeface="Aptos" pitchFamily="34" charset="-120"/>
+              </a:rPr>
+              <a:t>Locate the decision point in the playbook sequence.</a:t>
+            </a:r>
+            <a:endParaRPr lang="en-US" sz="1380" dirty="0"/>
+          </a:p>
+          <a:p>
+            <a:r>
+              <a:rPr lang="en-US" sz="1380" dirty="0">
+                <a:solidFill>
+                  <a:srgbClr val="17364A"/>
+                </a:solidFill>
+                <a:latin typeface="Aptos" pitchFamily="34" charset="0"/>
+                <a:ea typeface="Aptos" pitchFamily="34" charset="-122"/>
+                <a:cs typeface="Aptos" pitchFamily="34" charset="-120"/>
+              </a:rPr>
+              <a:t>Identify who should participate in the work.</a:t>
+            </a:r>
+            <a:endParaRPr lang="en-US" sz="1380" dirty="0"/>
+          </a:p>
+          <a:p>
+            <a:r>
+              <a:rPr lang="en-US" sz="1380" dirty="0">
+                <a:solidFill>
+                  <a:srgbClr val="17364A"/>
+                </a:solidFill>
+                <a:latin typeface="Aptos" pitchFamily="34" charset="0"/>
+                <a:ea typeface="Aptos" pitchFamily="34" charset="-122"/>
+                <a:cs typeface="Aptos" pitchFamily="34" charset="-120"/>
+              </a:rPr>
+              <a:t>Document the review, approval, or implementation step.</a:t>
+            </a:r>
+            <a:endParaRPr lang="en-US" sz="1380" dirty="0"/>
           </a:p>
         </p:txBody>
       </p:sp>
@@ -14065,20 +13554,20 @@
         </p:nvSpPr>
         <p:spPr>
           <a:xfrm>
-            <a:off x="7818120" y="3977640"/>
-            <a:ext cx="972312" cy="749808"/>
+            <a:off x="8046720" y="3794760"/>
+            <a:ext cx="3063240" cy="1600200"/>
           </a:xfrm>
           <a:prstGeom prst="roundRect">
             <a:avLst>
-              <a:gd name="adj" fmla="val 14634"/>
+              <a:gd name="adj" fmla="val 6857"/>
             </a:avLst>
           </a:prstGeom>
           <a:solidFill>
-            <a:srgbClr val="0068B7"/>
+            <a:srgbClr val="FFFFFF"/>
           </a:solidFill>
           <a:ln w="12700">
             <a:solidFill>
-              <a:srgbClr val="0068B7"/>
+              <a:srgbClr val="B9D7E6"/>
             </a:solidFill>
             <a:prstDash val="solid"/>
           </a:ln>
@@ -14092,172 +13581,100 @@
         </p:nvSpPr>
         <p:spPr>
           <a:xfrm>
-            <a:off x="7891272" y="4169664"/>
-            <a:ext cx="826008" cy="310896"/>
-          </a:xfrm>
-          <a:prstGeom prst="rect">
-            <a:avLst/>
-          </a:prstGeom>
-          <a:noFill/>
-          <a:ln/>
-        </p:spPr>
-        <p:txBody>
-          <a:bodyPr wrap="square" lIns="0" tIns="0" rIns="0" bIns="0" rtlCol="0" anchor="ctr">
+            <a:off x="8211312" y="3941064"/>
+            <a:ext cx="2734056" cy="256032"/>
+          </a:xfrm>
+          <a:prstGeom prst="rect">
+            <a:avLst/>
+          </a:prstGeom>
+          <a:noFill/>
+          <a:ln/>
+        </p:spPr>
+        <p:txBody>
+          <a:bodyPr wrap="square" lIns="0" tIns="0" rIns="0" bIns="0" rtlCol="0" anchor="ctr"/>
+          <a:lstStyle/>
+          <a:p>
+            <a:pPr indent="0" marL="0">
+              <a:buNone/>
+            </a:pPr>
+            <a:r>
+              <a:rPr lang="en-US" sz="1300" b="1" dirty="0">
+                <a:solidFill>
+                  <a:srgbClr val="0068B7"/>
+                </a:solidFill>
+                <a:latin typeface="Aptos" pitchFamily="34" charset="0"/>
+                <a:ea typeface="Aptos" pitchFamily="34" charset="-122"/>
+                <a:cs typeface="Aptos" pitchFamily="34" charset="-120"/>
+              </a:rPr>
+              <a:t>Tool selection cues</a:t>
+            </a:r>
+            <a:endParaRPr lang="en-US" sz="1300" dirty="0"/>
+          </a:p>
+        </p:txBody>
+      </p:sp>
+      <p:sp>
+        <p:nvSpPr>
+          <p:cNvPr id="15" name="Text 13"/>
+          <p:cNvSpPr/>
+          <p:nvPr/>
+        </p:nvSpPr>
+        <p:spPr>
+          <a:xfrm>
+            <a:off x="8229600" y="4306824"/>
+            <a:ext cx="2679192" cy="941832"/>
+          </a:xfrm>
+          <a:prstGeom prst="rect">
+            <a:avLst/>
+          </a:prstGeom>
+          <a:noFill/>
+          <a:ln/>
+        </p:spPr>
+        <p:txBody>
+          <a:bodyPr wrap="square" lIns="254" tIns="254" rIns="254" bIns="254" rtlCol="0" anchor="t">
             <a:normAutofit/>
           </a:bodyPr>
           <a:lstStyle/>
           <a:p>
-            <a:pPr algn="ctr" indent="0" marL="0">
-              <a:buNone/>
-            </a:pPr>
-            <a:r>
-              <a:rPr lang="en-US" sz="1500" b="1" dirty="0">
-                <a:solidFill>
-                  <a:srgbClr val="FFFFFF"/>
-                </a:solidFill>
-                <a:latin typeface="Aptos" pitchFamily="34" charset="0"/>
-                <a:ea typeface="Aptos" pitchFamily="34" charset="-122"/>
-                <a:cs typeface="Aptos" pitchFamily="34" charset="-120"/>
-              </a:rPr>
-              <a:t>Concept</a:t>
-            </a:r>
-            <a:endParaRPr lang="en-US" sz="1500" dirty="0"/>
-          </a:p>
-        </p:txBody>
-      </p:sp>
-      <p:sp>
-        <p:nvSpPr>
-          <p:cNvPr id="15" name="Shape 13"/>
-          <p:cNvSpPr/>
-          <p:nvPr/>
-        </p:nvSpPr>
-        <p:spPr>
-          <a:xfrm>
-            <a:off x="9046464" y="3977640"/>
-            <a:ext cx="972312" cy="749808"/>
-          </a:xfrm>
-          <a:prstGeom prst="roundRect">
-            <a:avLst>
-              <a:gd name="adj" fmla="val 14634"/>
-            </a:avLst>
-          </a:prstGeom>
-          <a:solidFill>
-            <a:srgbClr val="2F8A28"/>
-          </a:solidFill>
-          <a:ln w="12700">
-            <a:solidFill>
-              <a:srgbClr val="2F8A28"/>
-            </a:solidFill>
-            <a:prstDash val="solid"/>
-          </a:ln>
-        </p:spPr>
-      </p:sp>
-      <p:sp>
-        <p:nvSpPr>
-          <p:cNvPr id="16" name="Text 14"/>
-          <p:cNvSpPr/>
-          <p:nvPr/>
-        </p:nvSpPr>
-        <p:spPr>
-          <a:xfrm>
-            <a:off x="9119616" y="4169664"/>
-            <a:ext cx="826008" cy="310896"/>
-          </a:xfrm>
-          <a:prstGeom prst="rect">
-            <a:avLst/>
-          </a:prstGeom>
-          <a:noFill/>
-          <a:ln/>
-        </p:spPr>
-        <p:txBody>
-          <a:bodyPr wrap="square" lIns="0" tIns="0" rIns="0" bIns="0" rtlCol="0" anchor="ctr">
-            <a:normAutofit/>
-          </a:bodyPr>
-          <a:lstStyle/>
-          <a:p>
-            <a:pPr algn="ctr" indent="0" marL="0">
-              <a:buNone/>
-            </a:pPr>
-            <a:r>
-              <a:rPr lang="en-US" sz="1500" b="1" dirty="0">
-                <a:solidFill>
-                  <a:srgbClr val="FFFFFF"/>
-                </a:solidFill>
-                <a:latin typeface="Aptos" pitchFamily="34" charset="0"/>
-                <a:ea typeface="Aptos" pitchFamily="34" charset="-122"/>
-                <a:cs typeface="Aptos" pitchFamily="34" charset="-120"/>
-              </a:rPr>
-              <a:t>Tool</a:t>
-            </a:r>
-            <a:endParaRPr lang="en-US" sz="1500" dirty="0"/>
-          </a:p>
-        </p:txBody>
-      </p:sp>
-      <p:sp>
-        <p:nvSpPr>
-          <p:cNvPr id="17" name="Shape 15"/>
-          <p:cNvSpPr/>
-          <p:nvPr/>
-        </p:nvSpPr>
-        <p:spPr>
-          <a:xfrm>
-            <a:off x="10274808" y="3977640"/>
-            <a:ext cx="972312" cy="749808"/>
-          </a:xfrm>
-          <a:prstGeom prst="roundRect">
-            <a:avLst>
-              <a:gd name="adj" fmla="val 14634"/>
-            </a:avLst>
-          </a:prstGeom>
-          <a:solidFill>
-            <a:srgbClr val="D69A2D"/>
-          </a:solidFill>
-          <a:ln w="12700">
-            <a:solidFill>
-              <a:srgbClr val="D69A2D"/>
-            </a:solidFill>
-            <a:prstDash val="solid"/>
-          </a:ln>
-        </p:spPr>
-      </p:sp>
-      <p:sp>
-        <p:nvSpPr>
-          <p:cNvPr id="18" name="Text 16"/>
-          <p:cNvSpPr/>
-          <p:nvPr/>
-        </p:nvSpPr>
-        <p:spPr>
-          <a:xfrm>
-            <a:off x="10347960" y="4169664"/>
-            <a:ext cx="826008" cy="310896"/>
-          </a:xfrm>
-          <a:prstGeom prst="rect">
-            <a:avLst/>
-          </a:prstGeom>
-          <a:noFill/>
-          <a:ln/>
-        </p:spPr>
-        <p:txBody>
-          <a:bodyPr wrap="square" lIns="0" tIns="0" rIns="0" bIns="0" rtlCol="0" anchor="ctr">
-            <a:normAutofit/>
-          </a:bodyPr>
-          <a:lstStyle/>
-          <a:p>
-            <a:pPr algn="ctr" indent="0" marL="0">
-              <a:buNone/>
-            </a:pPr>
-            <a:r>
-              <a:rPr lang="en-US" sz="1500" b="1" dirty="0">
-                <a:solidFill>
-                  <a:srgbClr val="FFFFFF"/>
-                </a:solidFill>
-                <a:latin typeface="Aptos" pitchFamily="34" charset="0"/>
-                <a:ea typeface="Aptos" pitchFamily="34" charset="-122"/>
-                <a:cs typeface="Aptos" pitchFamily="34" charset="-120"/>
-              </a:rPr>
-              <a:t>Artifact</a:t>
-            </a:r>
-            <a:endParaRPr lang="en-US" sz="1500" dirty="0"/>
+            <a:r>
+              <a:rPr lang="en-US" sz="1380" dirty="0">
+                <a:solidFill>
+                  <a:srgbClr val="17364A"/>
+                </a:solidFill>
+                <a:latin typeface="Aptos" pitchFamily="34" charset="0"/>
+                <a:ea typeface="Aptos" pitchFamily="34" charset="-122"/>
+                <a:cs typeface="Aptos" pitchFamily="34" charset="-120"/>
+              </a:rPr>
+              <a:t>Use a tool when no comparable local process exists.</a:t>
+            </a:r>
+            <a:endParaRPr lang="en-US" sz="1380" dirty="0"/>
+          </a:p>
+          <a:p>
+            <a:r>
+              <a:rPr lang="en-US" sz="1380" dirty="0">
+                <a:solidFill>
+                  <a:srgbClr val="17364A"/>
+                </a:solidFill>
+                <a:latin typeface="Aptos" pitchFamily="34" charset="0"/>
+                <a:ea typeface="Aptos" pitchFamily="34" charset="-122"/>
+                <a:cs typeface="Aptos" pitchFamily="34" charset="-120"/>
+              </a:rPr>
+              <a:t>Adapt existing department templates when they already fit the purpose.</a:t>
+            </a:r>
+            <a:endParaRPr lang="en-US" sz="1380" dirty="0"/>
+          </a:p>
+          <a:p>
+            <a:r>
+              <a:rPr lang="en-US" sz="1380" dirty="0">
+                <a:solidFill>
+                  <a:srgbClr val="17364A"/>
+                </a:solidFill>
+                <a:latin typeface="Aptos" pitchFamily="34" charset="0"/>
+                <a:ea typeface="Aptos" pitchFamily="34" charset="-122"/>
+                <a:cs typeface="Aptos" pitchFamily="34" charset="-120"/>
+              </a:rPr>
+              <a:t>Save the completed artifact as evidence of the decision.</a:t>
+            </a:r>
+            <a:endParaRPr lang="en-US" sz="1380" dirty="0"/>
           </a:p>
         </p:txBody>
       </p:sp>
@@ -14730,13 +14147,11 @@
             </a:avLst>
           </a:prstGeom>
           <a:solidFill>
-            <a:srgbClr val="FFFFFF">
-              <a:alpha val="88000"/>
-            </a:srgbClr>
+            <a:srgbClr val="FFFFFF"/>
           </a:solidFill>
           <a:ln w="12700">
             <a:solidFill>
-              <a:srgbClr val="D6E8F2"/>
+              <a:srgbClr val="B9D7E6"/>
             </a:solidFill>
             <a:prstDash val="solid"/>
           </a:ln>
@@ -14744,119 +14159,112 @@
       </p:sp>
       <p:sp>
         <p:nvSpPr>
-          <p:cNvPr id="14" name="Shape 12"/>
-          <p:cNvSpPr/>
-          <p:nvPr/>
-        </p:nvSpPr>
-        <p:spPr>
-          <a:xfrm>
-            <a:off x="8074152" y="3291840"/>
-            <a:ext cx="2596896" cy="749808"/>
-          </a:xfrm>
-          <a:prstGeom prst="rect">
-            <a:avLst/>
-          </a:prstGeom>
-          <a:solidFill>
-            <a:srgbClr val="EAF6F8"/>
-          </a:solidFill>
-          <a:ln w="12700">
-            <a:solidFill>
-              <a:srgbClr val="8ABBD8"/>
-            </a:solidFill>
-            <a:prstDash val="solid"/>
-          </a:ln>
-        </p:spPr>
-      </p:sp>
-      <p:sp>
-        <p:nvSpPr>
-          <p:cNvPr id="15" name="Shape 13"/>
-          <p:cNvSpPr/>
-          <p:nvPr/>
-        </p:nvSpPr>
-        <p:spPr>
-          <a:xfrm>
-            <a:off x="8202168" y="3721608"/>
-            <a:ext cx="2340864" cy="0"/>
-          </a:xfrm>
-          <a:prstGeom prst="line">
-            <a:avLst/>
-          </a:prstGeom>
-          <a:noFill/>
-          <a:ln w="19050">
-            <a:solidFill>
-              <a:srgbClr val="0068B7"/>
-            </a:solidFill>
-            <a:prstDash val="solid"/>
-          </a:ln>
-        </p:spPr>
+          <p:cNvPr id="14" name="Text 12"/>
+          <p:cNvSpPr/>
+          <p:nvPr/>
+        </p:nvSpPr>
+        <p:spPr>
+          <a:xfrm>
+            <a:off x="7799832" y="2935224"/>
+            <a:ext cx="3145536" cy="256032"/>
+          </a:xfrm>
+          <a:prstGeom prst="rect">
+            <a:avLst/>
+          </a:prstGeom>
+          <a:noFill/>
+          <a:ln/>
+        </p:spPr>
+        <p:txBody>
+          <a:bodyPr wrap="square" lIns="0" tIns="0" rIns="0" bIns="0" rtlCol="0" anchor="ctr"/>
+          <a:lstStyle/>
+          <a:p>
+            <a:pPr indent="0" marL="0">
+              <a:buNone/>
+            </a:pPr>
+            <a:r>
+              <a:rPr lang="en-US" sz="1300" b="1" dirty="0">
+                <a:solidFill>
+                  <a:srgbClr val="0068B7"/>
+                </a:solidFill>
+                <a:latin typeface="Aptos" pitchFamily="34" charset="0"/>
+                <a:ea typeface="Aptos" pitchFamily="34" charset="-122"/>
+                <a:cs typeface="Aptos" pitchFamily="34" charset="-120"/>
+              </a:rPr>
+              <a:t>Concept checkpoints</a:t>
+            </a:r>
+            <a:endParaRPr lang="en-US" sz="1300" dirty="0"/>
+          </a:p>
+        </p:txBody>
+      </p:sp>
+      <p:sp>
+        <p:nvSpPr>
+          <p:cNvPr id="15" name="Text 13"/>
+          <p:cNvSpPr/>
+          <p:nvPr/>
+        </p:nvSpPr>
+        <p:spPr>
+          <a:xfrm>
+            <a:off x="7818120" y="3300984"/>
+            <a:ext cx="3090672" cy="877824"/>
+          </a:xfrm>
+          <a:prstGeom prst="rect">
+            <a:avLst/>
+          </a:prstGeom>
+          <a:noFill/>
+          <a:ln/>
+        </p:spPr>
+        <p:txBody>
+          <a:bodyPr wrap="square" lIns="254" tIns="254" rIns="254" bIns="254" rtlCol="0" anchor="t">
+            <a:normAutofit/>
+          </a:bodyPr>
+          <a:lstStyle/>
+          <a:p>
+            <a:r>
+              <a:rPr lang="en-US" sz="1380" dirty="0">
+                <a:solidFill>
+                  <a:srgbClr val="17364A"/>
+                </a:solidFill>
+                <a:latin typeface="Aptos" pitchFamily="34" charset="0"/>
+                <a:ea typeface="Aptos" pitchFamily="34" charset="-122"/>
+                <a:cs typeface="Aptos" pitchFamily="34" charset="-120"/>
+              </a:rPr>
+              <a:t>Identify the technical, operational, privacy, security, equity, and governance issues.</a:t>
+            </a:r>
+            <a:endParaRPr lang="en-US" sz="1380" dirty="0"/>
+          </a:p>
+          <a:p>
+            <a:r>
+              <a:rPr lang="en-US" sz="1380" dirty="0">
+                <a:solidFill>
+                  <a:srgbClr val="17364A"/>
+                </a:solidFill>
+                <a:latin typeface="Aptos" pitchFamily="34" charset="0"/>
+                <a:ea typeface="Aptos" pitchFamily="34" charset="-122"/>
+                <a:cs typeface="Aptos" pitchFamily="34" charset="-120"/>
+              </a:rPr>
+              <a:t>Recognize common failure modes that can affect safety, accuracy, trust, workflow fit, or.</a:t>
+            </a:r>
+            <a:endParaRPr lang="en-US" sz="1380" dirty="0"/>
+          </a:p>
+          <a:p>
+            <a:r>
+              <a:rPr lang="en-US" sz="1380" dirty="0">
+                <a:solidFill>
+                  <a:srgbClr val="17364A"/>
+                </a:solidFill>
+                <a:latin typeface="Aptos" pitchFamily="34" charset="0"/>
+                <a:ea typeface="Aptos" pitchFamily="34" charset="-122"/>
+                <a:cs typeface="Aptos" pitchFamily="34" charset="-120"/>
+              </a:rPr>
+              <a:t>Identify practical guardrails that should be documented before implementation.</a:t>
+            </a:r>
+            <a:endParaRPr lang="en-US" sz="1380" dirty="0"/>
+          </a:p>
+        </p:txBody>
       </p:sp>
       <p:sp>
         <p:nvSpPr>
           <p:cNvPr id="16" name="Shape 14"/>
-          <p:cNvSpPr/>
-          <p:nvPr/>
-        </p:nvSpPr>
-        <p:spPr>
-          <a:xfrm>
-            <a:off x="9198864" y="4206240"/>
-            <a:ext cx="347472" cy="347472"/>
-          </a:xfrm>
-          <a:prstGeom prst="ellipse">
-            <a:avLst/>
-          </a:prstGeom>
-          <a:solidFill>
-            <a:srgbClr val="2F8A28"/>
-          </a:solidFill>
-          <a:ln w="12700">
-            <a:solidFill>
-              <a:srgbClr val="2F8A28"/>
-            </a:solidFill>
-            <a:prstDash val="solid"/>
-          </a:ln>
-        </p:spPr>
-      </p:sp>
-      <p:sp>
-        <p:nvSpPr>
-          <p:cNvPr id="17" name="Text 15"/>
-          <p:cNvSpPr/>
-          <p:nvPr/>
-        </p:nvSpPr>
-        <p:spPr>
-          <a:xfrm>
-            <a:off x="7909560" y="3977640"/>
-            <a:ext cx="2926080" cy="182880"/>
-          </a:xfrm>
-          <a:prstGeom prst="rect">
-            <a:avLst/>
-          </a:prstGeom>
-          <a:noFill/>
-          <a:ln/>
-        </p:spPr>
-        <p:txBody>
-          <a:bodyPr wrap="square" lIns="0" tIns="0" rIns="0" bIns="0" rtlCol="0" anchor="ctr"/>
-          <a:lstStyle/>
-          <a:p>
-            <a:pPr algn="ctr" indent="0" marL="0">
-              <a:buNone/>
-            </a:pPr>
-            <a:r>
-              <a:rPr lang="en-US" sz="1000" dirty="0">
-                <a:solidFill>
-                  <a:srgbClr val="003A63"/>
-                </a:solidFill>
-                <a:latin typeface="Aptos" pitchFamily="34" charset="0"/>
-                <a:ea typeface="Aptos" pitchFamily="34" charset="-122"/>
-                <a:cs typeface="Aptos" pitchFamily="34" charset="-120"/>
-              </a:rPr>
-              <a:t>Concept to action</a:t>
-            </a:r>
-            <a:endParaRPr lang="en-US" sz="1000" dirty="0"/>
-          </a:p>
-        </p:txBody>
-      </p:sp>
-      <p:sp>
-        <p:nvSpPr>
-          <p:cNvPr id="18" name="Shape 16"/>
           <p:cNvSpPr/>
           <p:nvPr/>
         </p:nvSpPr>
@@ -14883,7 +14291,7 @@
       </p:sp>
       <p:sp>
         <p:nvSpPr>
-          <p:cNvPr id="19" name="Text 17"/>
+          <p:cNvPr id="17" name="Text 15"/>
           <p:cNvSpPr/>
           <p:nvPr/>
         </p:nvSpPr>
@@ -14922,7 +14330,7 @@
       </p:sp>
       <p:sp>
         <p:nvSpPr>
-          <p:cNvPr id="20" name="Text 18"/>
+          <p:cNvPr id="18" name="Text 16"/>
           <p:cNvSpPr/>
           <p:nvPr/>
         </p:nvSpPr>
@@ -15402,13 +14810,11 @@
             </a:avLst>
           </a:prstGeom>
           <a:solidFill>
-            <a:srgbClr val="FFFFFF">
-              <a:alpha val="88000"/>
-            </a:srgbClr>
+            <a:srgbClr val="FFFFFF"/>
           </a:solidFill>
           <a:ln w="12700">
             <a:solidFill>
-              <a:srgbClr val="D6E8F2"/>
+              <a:srgbClr val="B9D7E6"/>
             </a:solidFill>
             <a:prstDash val="solid"/>
           </a:ln>
@@ -15416,119 +14822,84 @@
       </p:sp>
       <p:sp>
         <p:nvSpPr>
-          <p:cNvPr id="14" name="Shape 12"/>
-          <p:cNvSpPr/>
-          <p:nvPr/>
-        </p:nvSpPr>
-        <p:spPr>
-          <a:xfrm>
-            <a:off x="8074152" y="3291840"/>
-            <a:ext cx="2596896" cy="749808"/>
-          </a:xfrm>
-          <a:prstGeom prst="rect">
-            <a:avLst/>
-          </a:prstGeom>
-          <a:solidFill>
-            <a:srgbClr val="EAF6F8"/>
-          </a:solidFill>
-          <a:ln w="12700">
-            <a:solidFill>
-              <a:srgbClr val="8ABBD8"/>
-            </a:solidFill>
-            <a:prstDash val="solid"/>
-          </a:ln>
-        </p:spPr>
-      </p:sp>
-      <p:sp>
-        <p:nvSpPr>
-          <p:cNvPr id="15" name="Shape 13"/>
-          <p:cNvSpPr/>
-          <p:nvPr/>
-        </p:nvSpPr>
-        <p:spPr>
-          <a:xfrm>
-            <a:off x="8202168" y="3721608"/>
-            <a:ext cx="2340864" cy="0"/>
-          </a:xfrm>
-          <a:prstGeom prst="line">
-            <a:avLst/>
-          </a:prstGeom>
-          <a:noFill/>
-          <a:ln w="19050">
-            <a:solidFill>
-              <a:srgbClr val="0068B7"/>
-            </a:solidFill>
-            <a:prstDash val="solid"/>
-          </a:ln>
-        </p:spPr>
+          <p:cNvPr id="14" name="Text 12"/>
+          <p:cNvSpPr/>
+          <p:nvPr/>
+        </p:nvSpPr>
+        <p:spPr>
+          <a:xfrm>
+            <a:off x="7799832" y="2935224"/>
+            <a:ext cx="3145536" cy="256032"/>
+          </a:xfrm>
+          <a:prstGeom prst="rect">
+            <a:avLst/>
+          </a:prstGeom>
+          <a:noFill/>
+          <a:ln/>
+        </p:spPr>
+        <p:txBody>
+          <a:bodyPr wrap="square" lIns="0" tIns="0" rIns="0" bIns="0" rtlCol="0" anchor="ctr"/>
+          <a:lstStyle/>
+          <a:p>
+            <a:pPr indent="0" marL="0">
+              <a:buNone/>
+            </a:pPr>
+            <a:r>
+              <a:rPr lang="en-US" sz="1300" b="1" dirty="0">
+                <a:solidFill>
+                  <a:srgbClr val="0068B7"/>
+                </a:solidFill>
+                <a:latin typeface="Aptos" pitchFamily="34" charset="0"/>
+                <a:ea typeface="Aptos" pitchFamily="34" charset="-122"/>
+                <a:cs typeface="Aptos" pitchFamily="34" charset="-120"/>
+              </a:rPr>
+              <a:t>Concept checkpoints</a:t>
+            </a:r>
+            <a:endParaRPr lang="en-US" sz="1300" dirty="0"/>
+          </a:p>
+        </p:txBody>
+      </p:sp>
+      <p:sp>
+        <p:nvSpPr>
+          <p:cNvPr id="15" name="Text 13"/>
+          <p:cNvSpPr/>
+          <p:nvPr/>
+        </p:nvSpPr>
+        <p:spPr>
+          <a:xfrm>
+            <a:off x="7818120" y="3300984"/>
+            <a:ext cx="3090672" cy="877824"/>
+          </a:xfrm>
+          <a:prstGeom prst="rect">
+            <a:avLst/>
+          </a:prstGeom>
+          <a:noFill/>
+          <a:ln/>
+        </p:spPr>
+        <p:txBody>
+          <a:bodyPr wrap="square" lIns="254" tIns="254" rIns="254" bIns="254" rtlCol="0" anchor="t">
+            <a:normAutofit/>
+          </a:bodyPr>
+          <a:lstStyle/>
+          <a:p>
+            <a:r>
+              <a:rPr lang="en-US" sz="1380" dirty="0">
+                <a:solidFill>
+                  <a:srgbClr val="17364A"/>
+                </a:solidFill>
+                <a:latin typeface="Aptos" pitchFamily="34" charset="0"/>
+                <a:ea typeface="Aptos" pitchFamily="34" charset="-122"/>
+                <a:cs typeface="Aptos" pitchFamily="34" charset="-120"/>
+              </a:rPr>
+              <a:t>Produce a secure deployment readiness worksheet that can support readiness assessment,.</a:t>
+            </a:r>
+            <a:endParaRPr lang="en-US" sz="1380" dirty="0"/>
+          </a:p>
+        </p:txBody>
       </p:sp>
       <p:sp>
         <p:nvSpPr>
           <p:cNvPr id="16" name="Shape 14"/>
-          <p:cNvSpPr/>
-          <p:nvPr/>
-        </p:nvSpPr>
-        <p:spPr>
-          <a:xfrm>
-            <a:off x="9198864" y="4206240"/>
-            <a:ext cx="347472" cy="347472"/>
-          </a:xfrm>
-          <a:prstGeom prst="ellipse">
-            <a:avLst/>
-          </a:prstGeom>
-          <a:solidFill>
-            <a:srgbClr val="2F8A28"/>
-          </a:solidFill>
-          <a:ln w="12700">
-            <a:solidFill>
-              <a:srgbClr val="2F8A28"/>
-            </a:solidFill>
-            <a:prstDash val="solid"/>
-          </a:ln>
-        </p:spPr>
-      </p:sp>
-      <p:sp>
-        <p:nvSpPr>
-          <p:cNvPr id="17" name="Text 15"/>
-          <p:cNvSpPr/>
-          <p:nvPr/>
-        </p:nvSpPr>
-        <p:spPr>
-          <a:xfrm>
-            <a:off x="7909560" y="3977640"/>
-            <a:ext cx="2926080" cy="182880"/>
-          </a:xfrm>
-          <a:prstGeom prst="rect">
-            <a:avLst/>
-          </a:prstGeom>
-          <a:noFill/>
-          <a:ln/>
-        </p:spPr>
-        <p:txBody>
-          <a:bodyPr wrap="square" lIns="0" tIns="0" rIns="0" bIns="0" rtlCol="0" anchor="ctr"/>
-          <a:lstStyle/>
-          <a:p>
-            <a:pPr algn="ctr" indent="0" marL="0">
-              <a:buNone/>
-            </a:pPr>
-            <a:r>
-              <a:rPr lang="en-US" sz="1000" dirty="0">
-                <a:solidFill>
-                  <a:srgbClr val="003A63"/>
-                </a:solidFill>
-                <a:latin typeface="Aptos" pitchFamily="34" charset="0"/>
-                <a:ea typeface="Aptos" pitchFamily="34" charset="-122"/>
-                <a:cs typeface="Aptos" pitchFamily="34" charset="-120"/>
-              </a:rPr>
-              <a:t>Concept to action</a:t>
-            </a:r>
-            <a:endParaRPr lang="en-US" sz="1000" dirty="0"/>
-          </a:p>
-        </p:txBody>
-      </p:sp>
-      <p:sp>
-        <p:nvSpPr>
-          <p:cNvPr id="18" name="Shape 16"/>
           <p:cNvSpPr/>
           <p:nvPr/>
         </p:nvSpPr>
@@ -15555,7 +14926,7 @@
       </p:sp>
       <p:sp>
         <p:nvSpPr>
-          <p:cNvPr id="19" name="Text 17"/>
+          <p:cNvPr id="17" name="Text 15"/>
           <p:cNvSpPr/>
           <p:nvPr/>
         </p:nvSpPr>
@@ -15594,7 +14965,7 @@
       </p:sp>
       <p:sp>
         <p:nvSpPr>
-          <p:cNvPr id="20" name="Text 18"/>
+          <p:cNvPr id="18" name="Text 16"/>
           <p:cNvSpPr/>
           <p:nvPr/>
         </p:nvSpPr>
@@ -16102,13 +15473,11 @@
             </a:avLst>
           </a:prstGeom>
           <a:solidFill>
-            <a:srgbClr val="FFFFFF">
-              <a:alpha val="88000"/>
-            </a:srgbClr>
+            <a:srgbClr val="FFFFFF"/>
           </a:solidFill>
           <a:ln w="12700">
             <a:solidFill>
-              <a:srgbClr val="D6E8F2"/>
+              <a:srgbClr val="B9D7E6"/>
             </a:solidFill>
             <a:prstDash val="solid"/>
           </a:ln>
@@ -16116,119 +15485,112 @@
       </p:sp>
       <p:sp>
         <p:nvSpPr>
-          <p:cNvPr id="14" name="Shape 12"/>
-          <p:cNvSpPr/>
-          <p:nvPr/>
-        </p:nvSpPr>
-        <p:spPr>
-          <a:xfrm>
-            <a:off x="8074152" y="3291840"/>
-            <a:ext cx="2596896" cy="749808"/>
-          </a:xfrm>
-          <a:prstGeom prst="rect">
-            <a:avLst/>
-          </a:prstGeom>
-          <a:solidFill>
-            <a:srgbClr val="EAF6F8"/>
-          </a:solidFill>
-          <a:ln w="12700">
-            <a:solidFill>
-              <a:srgbClr val="8ABBD8"/>
-            </a:solidFill>
-            <a:prstDash val="solid"/>
-          </a:ln>
-        </p:spPr>
-      </p:sp>
-      <p:sp>
-        <p:nvSpPr>
-          <p:cNvPr id="15" name="Shape 13"/>
-          <p:cNvSpPr/>
-          <p:nvPr/>
-        </p:nvSpPr>
-        <p:spPr>
-          <a:xfrm>
-            <a:off x="8202168" y="3721608"/>
-            <a:ext cx="2340864" cy="0"/>
-          </a:xfrm>
-          <a:prstGeom prst="line">
-            <a:avLst/>
-          </a:prstGeom>
-          <a:noFill/>
-          <a:ln w="19050">
-            <a:solidFill>
-              <a:srgbClr val="0068B7"/>
-            </a:solidFill>
-            <a:prstDash val="solid"/>
-          </a:ln>
-        </p:spPr>
+          <p:cNvPr id="14" name="Text 12"/>
+          <p:cNvSpPr/>
+          <p:nvPr/>
+        </p:nvSpPr>
+        <p:spPr>
+          <a:xfrm>
+            <a:off x="7799832" y="2935224"/>
+            <a:ext cx="3145536" cy="256032"/>
+          </a:xfrm>
+          <a:prstGeom prst="rect">
+            <a:avLst/>
+          </a:prstGeom>
+          <a:noFill/>
+          <a:ln/>
+        </p:spPr>
+        <p:txBody>
+          <a:bodyPr wrap="square" lIns="0" tIns="0" rIns="0" bIns="0" rtlCol="0" anchor="ctr"/>
+          <a:lstStyle/>
+          <a:p>
+            <a:pPr indent="0" marL="0">
+              <a:buNone/>
+            </a:pPr>
+            <a:r>
+              <a:rPr lang="en-US" sz="1300" b="1" dirty="0">
+                <a:solidFill>
+                  <a:srgbClr val="0068B7"/>
+                </a:solidFill>
+                <a:latin typeface="Aptos" pitchFamily="34" charset="0"/>
+                <a:ea typeface="Aptos" pitchFamily="34" charset="-122"/>
+                <a:cs typeface="Aptos" pitchFamily="34" charset="-120"/>
+              </a:rPr>
+              <a:t>Concept checkpoints</a:t>
+            </a:r>
+            <a:endParaRPr lang="en-US" sz="1300" dirty="0"/>
+          </a:p>
+        </p:txBody>
+      </p:sp>
+      <p:sp>
+        <p:nvSpPr>
+          <p:cNvPr id="15" name="Text 13"/>
+          <p:cNvSpPr/>
+          <p:nvPr/>
+        </p:nvSpPr>
+        <p:spPr>
+          <a:xfrm>
+            <a:off x="7818120" y="3300984"/>
+            <a:ext cx="3090672" cy="877824"/>
+          </a:xfrm>
+          <a:prstGeom prst="rect">
+            <a:avLst/>
+          </a:prstGeom>
+          <a:noFill/>
+          <a:ln/>
+        </p:spPr>
+        <p:txBody>
+          <a:bodyPr wrap="square" lIns="254" tIns="254" rIns="254" bIns="254" rtlCol="0" anchor="t">
+            <a:normAutofit/>
+          </a:bodyPr>
+          <a:lstStyle/>
+          <a:p>
+            <a:r>
+              <a:rPr lang="en-US" sz="1380" dirty="0">
+                <a:solidFill>
+                  <a:srgbClr val="17364A"/>
+                </a:solidFill>
+                <a:latin typeface="Aptos" pitchFamily="34" charset="0"/>
+                <a:ea typeface="Aptos" pitchFamily="34" charset="-122"/>
+                <a:cs typeface="Aptos" pitchFamily="34" charset="-120"/>
+              </a:rPr>
+              <a:t>Many AI tools are deployed in cloud environments or packaged in containers that make.</a:t>
+            </a:r>
+            <a:endParaRPr lang="en-US" sz="1380" dirty="0"/>
+          </a:p>
+          <a:p>
+            <a:r>
+              <a:rPr lang="en-US" sz="1380" dirty="0">
+                <a:solidFill>
+                  <a:srgbClr val="17364A"/>
+                </a:solidFill>
+                <a:latin typeface="Aptos" pitchFamily="34" charset="0"/>
+                <a:ea typeface="Aptos" pitchFamily="34" charset="-122"/>
+                <a:cs typeface="Aptos" pitchFamily="34" charset="-120"/>
+              </a:rPr>
+              <a:t>Public health staff do not need to become cloud engineers, but they need enough technical.</a:t>
+            </a:r>
+            <a:endParaRPr lang="en-US" sz="1380" dirty="0"/>
+          </a:p>
+          <a:p>
+            <a:r>
+              <a:rPr lang="en-US" sz="1380" dirty="0">
+                <a:solidFill>
+                  <a:srgbClr val="17364A"/>
+                </a:solidFill>
+                <a:latin typeface="Aptos" pitchFamily="34" charset="0"/>
+                <a:ea typeface="Aptos" pitchFamily="34" charset="-122"/>
+                <a:cs typeface="Aptos" pitchFamily="34" charset="-120"/>
+              </a:rPr>
+              <a:t>This module connects deployment choices to public health continuity, privacy,.</a:t>
+            </a:r>
+            <a:endParaRPr lang="en-US" sz="1380" dirty="0"/>
+          </a:p>
+        </p:txBody>
       </p:sp>
       <p:sp>
         <p:nvSpPr>
           <p:cNvPr id="16" name="Shape 14"/>
-          <p:cNvSpPr/>
-          <p:nvPr/>
-        </p:nvSpPr>
-        <p:spPr>
-          <a:xfrm>
-            <a:off x="9198864" y="4206240"/>
-            <a:ext cx="347472" cy="347472"/>
-          </a:xfrm>
-          <a:prstGeom prst="ellipse">
-            <a:avLst/>
-          </a:prstGeom>
-          <a:solidFill>
-            <a:srgbClr val="2F8A28"/>
-          </a:solidFill>
-          <a:ln w="12700">
-            <a:solidFill>
-              <a:srgbClr val="2F8A28"/>
-            </a:solidFill>
-            <a:prstDash val="solid"/>
-          </a:ln>
-        </p:spPr>
-      </p:sp>
-      <p:sp>
-        <p:nvSpPr>
-          <p:cNvPr id="17" name="Text 15"/>
-          <p:cNvSpPr/>
-          <p:nvPr/>
-        </p:nvSpPr>
-        <p:spPr>
-          <a:xfrm>
-            <a:off x="7909560" y="3977640"/>
-            <a:ext cx="2926080" cy="182880"/>
-          </a:xfrm>
-          <a:prstGeom prst="rect">
-            <a:avLst/>
-          </a:prstGeom>
-          <a:noFill/>
-          <a:ln/>
-        </p:spPr>
-        <p:txBody>
-          <a:bodyPr wrap="square" lIns="0" tIns="0" rIns="0" bIns="0" rtlCol="0" anchor="ctr"/>
-          <a:lstStyle/>
-          <a:p>
-            <a:pPr algn="ctr" indent="0" marL="0">
-              <a:buNone/>
-            </a:pPr>
-            <a:r>
-              <a:rPr lang="en-US" sz="1000" dirty="0">
-                <a:solidFill>
-                  <a:srgbClr val="003A63"/>
-                </a:solidFill>
-                <a:latin typeface="Aptos" pitchFamily="34" charset="0"/>
-                <a:ea typeface="Aptos" pitchFamily="34" charset="-122"/>
-                <a:cs typeface="Aptos" pitchFamily="34" charset="-120"/>
-              </a:rPr>
-              <a:t>Concept to action</a:t>
-            </a:r>
-            <a:endParaRPr lang="en-US" sz="1000" dirty="0"/>
-          </a:p>
-        </p:txBody>
-      </p:sp>
-      <p:sp>
-        <p:nvSpPr>
-          <p:cNvPr id="18" name="Shape 16"/>
           <p:cNvSpPr/>
           <p:nvPr/>
         </p:nvSpPr>
@@ -16255,7 +15617,7 @@
       </p:sp>
       <p:sp>
         <p:nvSpPr>
-          <p:cNvPr id="19" name="Text 17"/>
+          <p:cNvPr id="17" name="Text 15"/>
           <p:cNvSpPr/>
           <p:nvPr/>
         </p:nvSpPr>
@@ -16294,7 +15656,7 @@
       </p:sp>
       <p:sp>
         <p:nvSpPr>
-          <p:cNvPr id="20" name="Text 18"/>
+          <p:cNvPr id="18" name="Text 16"/>
           <p:cNvSpPr/>
           <p:nvPr/>
         </p:nvSpPr>
@@ -16802,13 +16164,11 @@
             </a:avLst>
           </a:prstGeom>
           <a:solidFill>
-            <a:srgbClr val="FFFFFF">
-              <a:alpha val="88000"/>
-            </a:srgbClr>
+            <a:srgbClr val="FFFFFF"/>
           </a:solidFill>
           <a:ln w="12700">
             <a:solidFill>
-              <a:srgbClr val="D6E8F2"/>
+              <a:srgbClr val="B9D7E6"/>
             </a:solidFill>
             <a:prstDash val="solid"/>
           </a:ln>
@@ -16816,190 +16176,112 @@
       </p:sp>
       <p:sp>
         <p:nvSpPr>
-          <p:cNvPr id="14" name="Shape 12"/>
-          <p:cNvSpPr/>
-          <p:nvPr/>
-        </p:nvSpPr>
-        <p:spPr>
-          <a:xfrm>
-            <a:off x="7891272" y="3108960"/>
-            <a:ext cx="566928" cy="566928"/>
-          </a:xfrm>
-          <a:prstGeom prst="ellipse">
-            <a:avLst/>
-          </a:prstGeom>
-          <a:solidFill>
-            <a:srgbClr val="0068B7"/>
-          </a:solidFill>
-          <a:ln w="12700">
-            <a:solidFill>
-              <a:srgbClr val="0068B7"/>
-            </a:solidFill>
-            <a:prstDash val="solid"/>
-          </a:ln>
-        </p:spPr>
-      </p:sp>
-      <p:sp>
-        <p:nvSpPr>
-          <p:cNvPr id="15" name="Shape 13"/>
-          <p:cNvSpPr/>
-          <p:nvPr/>
-        </p:nvSpPr>
-        <p:spPr>
-          <a:xfrm>
-            <a:off x="10287000" y="3108960"/>
-            <a:ext cx="566928" cy="566928"/>
-          </a:xfrm>
-          <a:prstGeom prst="ellipse">
-            <a:avLst/>
-          </a:prstGeom>
-          <a:solidFill>
-            <a:srgbClr val="2F8A28"/>
-          </a:solidFill>
-          <a:ln w="12700">
-            <a:solidFill>
-              <a:srgbClr val="2F8A28"/>
-            </a:solidFill>
-            <a:prstDash val="solid"/>
-          </a:ln>
-        </p:spPr>
+          <p:cNvPr id="14" name="Text 12"/>
+          <p:cNvSpPr/>
+          <p:nvPr/>
+        </p:nvSpPr>
+        <p:spPr>
+          <a:xfrm>
+            <a:off x="7799832" y="2935224"/>
+            <a:ext cx="3145536" cy="256032"/>
+          </a:xfrm>
+          <a:prstGeom prst="rect">
+            <a:avLst/>
+          </a:prstGeom>
+          <a:noFill/>
+          <a:ln/>
+        </p:spPr>
+        <p:txBody>
+          <a:bodyPr wrap="square" lIns="0" tIns="0" rIns="0" bIns="0" rtlCol="0" anchor="ctr"/>
+          <a:lstStyle/>
+          <a:p>
+            <a:pPr indent="0" marL="0">
+              <a:buNone/>
+            </a:pPr>
+            <a:r>
+              <a:rPr lang="en-US" sz="1300" b="1" dirty="0">
+                <a:solidFill>
+                  <a:srgbClr val="0068B7"/>
+                </a:solidFill>
+                <a:latin typeface="Aptos" pitchFamily="34" charset="0"/>
+                <a:ea typeface="Aptos" pitchFamily="34" charset="-122"/>
+                <a:cs typeface="Aptos" pitchFamily="34" charset="-120"/>
+              </a:rPr>
+              <a:t>Concept checkpoints</a:t>
+            </a:r>
+            <a:endParaRPr lang="en-US" sz="1300" dirty="0"/>
+          </a:p>
+        </p:txBody>
+      </p:sp>
+      <p:sp>
+        <p:nvSpPr>
+          <p:cNvPr id="15" name="Text 13"/>
+          <p:cNvSpPr/>
+          <p:nvPr/>
+        </p:nvSpPr>
+        <p:spPr>
+          <a:xfrm>
+            <a:off x="7818120" y="3300984"/>
+            <a:ext cx="3090672" cy="877824"/>
+          </a:xfrm>
+          <a:prstGeom prst="rect">
+            <a:avLst/>
+          </a:prstGeom>
+          <a:noFill/>
+          <a:ln/>
+        </p:spPr>
+        <p:txBody>
+          <a:bodyPr wrap="square" lIns="254" tIns="254" rIns="254" bIns="254" rtlCol="0" anchor="t">
+            <a:normAutofit/>
+          </a:bodyPr>
+          <a:lstStyle/>
+          <a:p>
+            <a:r>
+              <a:rPr lang="en-US" sz="1380" dirty="0">
+                <a:solidFill>
+                  <a:srgbClr val="17364A"/>
+                </a:solidFill>
+                <a:latin typeface="Aptos" pitchFamily="34" charset="0"/>
+                <a:ea typeface="Aptos" pitchFamily="34" charset="-122"/>
+                <a:cs typeface="Aptos" pitchFamily="34" charset="-120"/>
+              </a:rPr>
+              <a:t>This national-level module is intended for training and planning purposes.</a:t>
+            </a:r>
+            <a:endParaRPr lang="en-US" sz="1380" dirty="0"/>
+          </a:p>
+          <a:p>
+            <a:r>
+              <a:rPr lang="en-US" sz="1380" dirty="0">
+                <a:solidFill>
+                  <a:srgbClr val="17364A"/>
+                </a:solidFill>
+                <a:latin typeface="Aptos" pitchFamily="34" charset="0"/>
+                <a:ea typeface="Aptos" pitchFamily="34" charset="-122"/>
+                <a:cs typeface="Aptos" pitchFamily="34" charset="-120"/>
+              </a:rPr>
+              <a:t>It does not replace legal, privacy, procurement, civil rights, records, or agency policy.</a:t>
+            </a:r>
+            <a:endParaRPr lang="en-US" sz="1380" dirty="0"/>
+          </a:p>
+          <a:p>
+            <a:r>
+              <a:rPr lang="en-US" sz="1380" dirty="0">
+                <a:solidFill>
+                  <a:srgbClr val="17364A"/>
+                </a:solidFill>
+                <a:latin typeface="Aptos" pitchFamily="34" charset="0"/>
+                <a:ea typeface="Aptos" pitchFamily="34" charset="-122"/>
+                <a:cs typeface="Aptos" pitchFamily="34" charset="-120"/>
+              </a:rPr>
+              <a:t>Learners should confirm applicable requirements in their own jurisdiction and organization.</a:t>
+            </a:r>
+            <a:endParaRPr lang="en-US" sz="1380" dirty="0"/>
+          </a:p>
+        </p:txBody>
       </p:sp>
       <p:sp>
         <p:nvSpPr>
           <p:cNvPr id="16" name="Shape 14"/>
-          <p:cNvSpPr/>
-          <p:nvPr/>
-        </p:nvSpPr>
-        <p:spPr>
-          <a:xfrm>
-            <a:off x="9089136" y="3456432"/>
-            <a:ext cx="566928" cy="566928"/>
-          </a:xfrm>
-          <a:prstGeom prst="ellipse">
-            <a:avLst/>
-          </a:prstGeom>
-          <a:solidFill>
-            <a:srgbClr val="6A4CA3"/>
-          </a:solidFill>
-          <a:ln w="12700">
-            <a:solidFill>
-              <a:srgbClr val="6A4CA3"/>
-            </a:solidFill>
-            <a:prstDash val="solid"/>
-          </a:ln>
-        </p:spPr>
-      </p:sp>
-      <p:sp>
-        <p:nvSpPr>
-          <p:cNvPr id="17" name="Shape 15"/>
-          <p:cNvSpPr/>
-          <p:nvPr/>
-        </p:nvSpPr>
-        <p:spPr>
-          <a:xfrm>
-            <a:off x="8385048" y="3419856"/>
-            <a:ext cx="1975104" cy="0"/>
-          </a:xfrm>
-          <a:prstGeom prst="line">
-            <a:avLst/>
-          </a:prstGeom>
-          <a:noFill/>
-          <a:ln w="25400">
-            <a:solidFill>
-              <a:srgbClr val="8ABBD8"/>
-            </a:solidFill>
-            <a:prstDash val="solid"/>
-          </a:ln>
-        </p:spPr>
-      </p:sp>
-      <p:sp>
-        <p:nvSpPr>
-          <p:cNvPr id="18" name="Shape 16"/>
-          <p:cNvSpPr/>
-          <p:nvPr/>
-        </p:nvSpPr>
-        <p:spPr>
-          <a:xfrm>
-            <a:off x="8202168" y="3630168"/>
-            <a:ext cx="1170432" cy="118872"/>
-          </a:xfrm>
-          <a:prstGeom prst="line">
-            <a:avLst/>
-          </a:prstGeom>
-          <a:noFill/>
-          <a:ln w="25400">
-            <a:solidFill>
-              <a:srgbClr val="8ABBD8"/>
-            </a:solidFill>
-            <a:prstDash val="solid"/>
-          </a:ln>
-        </p:spPr>
-      </p:sp>
-      <p:sp>
-        <p:nvSpPr>
-          <p:cNvPr id="19" name="Shape 17"/>
-          <p:cNvSpPr/>
-          <p:nvPr/>
-        </p:nvSpPr>
-        <p:spPr>
-          <a:xfrm>
-            <a:off x="10543032" y="3630168"/>
-            <a:ext cx="-1170432" cy="118872"/>
-          </a:xfrm>
-          <a:prstGeom prst="line">
-            <a:avLst/>
-          </a:prstGeom>
-          <a:noFill/>
-          <a:ln w="25400">
-            <a:solidFill>
-              <a:srgbClr val="8ABBD8"/>
-            </a:solidFill>
-            <a:prstDash val="solid"/>
-          </a:ln>
-        </p:spPr>
-      </p:sp>
-      <p:sp>
-        <p:nvSpPr>
-          <p:cNvPr id="20" name="Text 18"/>
-          <p:cNvSpPr/>
-          <p:nvPr/>
-        </p:nvSpPr>
-        <p:spPr>
-          <a:xfrm>
-            <a:off x="7863840" y="4069080"/>
-            <a:ext cx="3017520" cy="164592"/>
-          </a:xfrm>
-          <a:prstGeom prst="rect">
-            <a:avLst/>
-          </a:prstGeom>
-          <a:noFill/>
-          <a:ln/>
-        </p:spPr>
-        <p:txBody>
-          <a:bodyPr wrap="square" lIns="0" tIns="0" rIns="0" bIns="0" rtlCol="0" anchor="ctr"/>
-          <a:lstStyle/>
-          <a:p>
-            <a:pPr algn="ctr" indent="0" marL="0">
-              <a:buNone/>
-            </a:pPr>
-            <a:r>
-              <a:rPr lang="en-US" sz="900" b="1" dirty="0">
-                <a:solidFill>
-                  <a:srgbClr val="003A63"/>
-                </a:solidFill>
-                <a:latin typeface="Aptos" pitchFamily="34" charset="0"/>
-                <a:ea typeface="Aptos" pitchFamily="34" charset="-122"/>
-                <a:cs typeface="Aptos" pitchFamily="34" charset="-120"/>
-              </a:rPr>
-              <a:t>Decision rights</a:t>
-            </a:r>
-            <a:endParaRPr lang="en-US" sz="900" dirty="0"/>
-          </a:p>
-        </p:txBody>
-      </p:sp>
-      <p:sp>
-        <p:nvSpPr>
-          <p:cNvPr id="21" name="Shape 19"/>
           <p:cNvSpPr/>
           <p:nvPr/>
         </p:nvSpPr>
@@ -17026,7 +16308,7 @@
       </p:sp>
       <p:sp>
         <p:nvSpPr>
-          <p:cNvPr id="22" name="Text 20"/>
+          <p:cNvPr id="17" name="Text 15"/>
           <p:cNvSpPr/>
           <p:nvPr/>
         </p:nvSpPr>
@@ -17065,7 +16347,7 @@
       </p:sp>
       <p:sp>
         <p:nvSpPr>
-          <p:cNvPr id="23" name="Text 21"/>
+          <p:cNvPr id="18" name="Text 16"/>
           <p:cNvSpPr/>
           <p:nvPr/>
         </p:nvSpPr>
@@ -17573,13 +16855,11 @@
             </a:avLst>
           </a:prstGeom>
           <a:solidFill>
-            <a:srgbClr val="FFFFFF">
-              <a:alpha val="88000"/>
-            </a:srgbClr>
+            <a:srgbClr val="FFFFFF"/>
           </a:solidFill>
           <a:ln w="12700">
             <a:solidFill>
-              <a:srgbClr val="D6E8F2"/>
+              <a:srgbClr val="B9D7E6"/>
             </a:solidFill>
             <a:prstDash val="solid"/>
           </a:ln>
@@ -17587,119 +16867,112 @@
       </p:sp>
       <p:sp>
         <p:nvSpPr>
-          <p:cNvPr id="14" name="Shape 12"/>
-          <p:cNvSpPr/>
-          <p:nvPr/>
-        </p:nvSpPr>
-        <p:spPr>
-          <a:xfrm>
-            <a:off x="8074152" y="3291840"/>
-            <a:ext cx="2596896" cy="749808"/>
-          </a:xfrm>
-          <a:prstGeom prst="rect">
-            <a:avLst/>
-          </a:prstGeom>
-          <a:solidFill>
-            <a:srgbClr val="EAF6F8"/>
-          </a:solidFill>
-          <a:ln w="12700">
-            <a:solidFill>
-              <a:srgbClr val="8ABBD8"/>
-            </a:solidFill>
-            <a:prstDash val="solid"/>
-          </a:ln>
-        </p:spPr>
-      </p:sp>
-      <p:sp>
-        <p:nvSpPr>
-          <p:cNvPr id="15" name="Shape 13"/>
-          <p:cNvSpPr/>
-          <p:nvPr/>
-        </p:nvSpPr>
-        <p:spPr>
-          <a:xfrm>
-            <a:off x="8202168" y="3721608"/>
-            <a:ext cx="2340864" cy="0"/>
-          </a:xfrm>
-          <a:prstGeom prst="line">
-            <a:avLst/>
-          </a:prstGeom>
-          <a:noFill/>
-          <a:ln w="19050">
-            <a:solidFill>
-              <a:srgbClr val="0068B7"/>
-            </a:solidFill>
-            <a:prstDash val="solid"/>
-          </a:ln>
-        </p:spPr>
+          <p:cNvPr id="14" name="Text 12"/>
+          <p:cNvSpPr/>
+          <p:nvPr/>
+        </p:nvSpPr>
+        <p:spPr>
+          <a:xfrm>
+            <a:off x="7799832" y="2935224"/>
+            <a:ext cx="3145536" cy="256032"/>
+          </a:xfrm>
+          <a:prstGeom prst="rect">
+            <a:avLst/>
+          </a:prstGeom>
+          <a:noFill/>
+          <a:ln/>
+        </p:spPr>
+        <p:txBody>
+          <a:bodyPr wrap="square" lIns="0" tIns="0" rIns="0" bIns="0" rtlCol="0" anchor="ctr"/>
+          <a:lstStyle/>
+          <a:p>
+            <a:pPr indent="0" marL="0">
+              <a:buNone/>
+            </a:pPr>
+            <a:r>
+              <a:rPr lang="en-US" sz="1300" b="1" dirty="0">
+                <a:solidFill>
+                  <a:srgbClr val="0068B7"/>
+                </a:solidFill>
+                <a:latin typeface="Aptos" pitchFamily="34" charset="0"/>
+                <a:ea typeface="Aptos" pitchFamily="34" charset="-122"/>
+                <a:cs typeface="Aptos" pitchFamily="34" charset="-120"/>
+              </a:rPr>
+              <a:t>Concept checkpoints</a:t>
+            </a:r>
+            <a:endParaRPr lang="en-US" sz="1300" dirty="0"/>
+          </a:p>
+        </p:txBody>
+      </p:sp>
+      <p:sp>
+        <p:nvSpPr>
+          <p:cNvPr id="15" name="Text 13"/>
+          <p:cNvSpPr/>
+          <p:nvPr/>
+        </p:nvSpPr>
+        <p:spPr>
+          <a:xfrm>
+            <a:off x="7818120" y="3300984"/>
+            <a:ext cx="3090672" cy="877824"/>
+          </a:xfrm>
+          <a:prstGeom prst="rect">
+            <a:avLst/>
+          </a:prstGeom>
+          <a:noFill/>
+          <a:ln/>
+        </p:spPr>
+        <p:txBody>
+          <a:bodyPr wrap="square" lIns="254" tIns="254" rIns="254" bIns="254" rtlCol="0" anchor="t">
+            <a:normAutofit/>
+          </a:bodyPr>
+          <a:lstStyle/>
+          <a:p>
+            <a:r>
+              <a:rPr lang="en-US" sz="1380" dirty="0">
+                <a:solidFill>
+                  <a:srgbClr val="17364A"/>
+                </a:solidFill>
+                <a:latin typeface="Aptos" pitchFamily="34" charset="0"/>
+                <a:ea typeface="Aptos" pitchFamily="34" charset="-122"/>
+                <a:cs typeface="Aptos" pitchFamily="34" charset="-120"/>
+              </a:rPr>
+              <a:t>Cloud, Containers, and Secure Deployment Basics matters because AI systems are embedded in.</a:t>
+            </a:r>
+            <a:endParaRPr lang="en-US" sz="1380" dirty="0"/>
+          </a:p>
+          <a:p>
+            <a:r>
+              <a:rPr lang="en-US" sz="1380" dirty="0">
+                <a:solidFill>
+                  <a:srgbClr val="17364A"/>
+                </a:solidFill>
+                <a:latin typeface="Aptos" pitchFamily="34" charset="0"/>
+                <a:ea typeface="Aptos" pitchFamily="34" charset="-122"/>
+                <a:cs typeface="Aptos" pitchFamily="34" charset="-120"/>
+              </a:rPr>
+              <a:t>The topic also affects accountability.</a:t>
+            </a:r>
+            <a:endParaRPr lang="en-US" sz="1380" dirty="0"/>
+          </a:p>
+          <a:p>
+            <a:r>
+              <a:rPr lang="en-US" sz="1380" dirty="0">
+                <a:solidFill>
+                  <a:srgbClr val="17364A"/>
+                </a:solidFill>
+                <a:latin typeface="Aptos" pitchFamily="34" charset="0"/>
+                <a:ea typeface="Aptos" pitchFamily="34" charset="-122"/>
+                <a:cs typeface="Aptos" pitchFamily="34" charset="-120"/>
+              </a:rPr>
+              <a:t>Public health agencies must be able to explain how data are used, why a tool was approved,.</a:t>
+            </a:r>
+            <a:endParaRPr lang="en-US" sz="1380" dirty="0"/>
+          </a:p>
+        </p:txBody>
       </p:sp>
       <p:sp>
         <p:nvSpPr>
           <p:cNvPr id="16" name="Shape 14"/>
-          <p:cNvSpPr/>
-          <p:nvPr/>
-        </p:nvSpPr>
-        <p:spPr>
-          <a:xfrm>
-            <a:off x="9198864" y="4206240"/>
-            <a:ext cx="347472" cy="347472"/>
-          </a:xfrm>
-          <a:prstGeom prst="ellipse">
-            <a:avLst/>
-          </a:prstGeom>
-          <a:solidFill>
-            <a:srgbClr val="2F8A28"/>
-          </a:solidFill>
-          <a:ln w="12700">
-            <a:solidFill>
-              <a:srgbClr val="2F8A28"/>
-            </a:solidFill>
-            <a:prstDash val="solid"/>
-          </a:ln>
-        </p:spPr>
-      </p:sp>
-      <p:sp>
-        <p:nvSpPr>
-          <p:cNvPr id="17" name="Text 15"/>
-          <p:cNvSpPr/>
-          <p:nvPr/>
-        </p:nvSpPr>
-        <p:spPr>
-          <a:xfrm>
-            <a:off x="7909560" y="3977640"/>
-            <a:ext cx="2926080" cy="182880"/>
-          </a:xfrm>
-          <a:prstGeom prst="rect">
-            <a:avLst/>
-          </a:prstGeom>
-          <a:noFill/>
-          <a:ln/>
-        </p:spPr>
-        <p:txBody>
-          <a:bodyPr wrap="square" lIns="0" tIns="0" rIns="0" bIns="0" rtlCol="0" anchor="ctr"/>
-          <a:lstStyle/>
-          <a:p>
-            <a:pPr algn="ctr" indent="0" marL="0">
-              <a:buNone/>
-            </a:pPr>
-            <a:r>
-              <a:rPr lang="en-US" sz="1000" dirty="0">
-                <a:solidFill>
-                  <a:srgbClr val="003A63"/>
-                </a:solidFill>
-                <a:latin typeface="Aptos" pitchFamily="34" charset="0"/>
-                <a:ea typeface="Aptos" pitchFamily="34" charset="-122"/>
-                <a:cs typeface="Aptos" pitchFamily="34" charset="-120"/>
-              </a:rPr>
-              <a:t>Concept to action</a:t>
-            </a:r>
-            <a:endParaRPr lang="en-US" sz="1000" dirty="0"/>
-          </a:p>
-        </p:txBody>
-      </p:sp>
-      <p:sp>
-        <p:nvSpPr>
-          <p:cNvPr id="18" name="Shape 16"/>
           <p:cNvSpPr/>
           <p:nvPr/>
         </p:nvSpPr>
@@ -17726,7 +16999,7 @@
       </p:sp>
       <p:sp>
         <p:nvSpPr>
-          <p:cNvPr id="19" name="Text 17"/>
+          <p:cNvPr id="17" name="Text 15"/>
           <p:cNvSpPr/>
           <p:nvPr/>
         </p:nvSpPr>
@@ -17765,7 +17038,7 @@
       </p:sp>
       <p:sp>
         <p:nvSpPr>
-          <p:cNvPr id="20" name="Text 18"/>
+          <p:cNvPr id="18" name="Text 16"/>
           <p:cNvSpPr/>
           <p:nvPr/>
         </p:nvSpPr>

--- a/downloads/presentations/modules/arc-330.pptx
+++ b/downloads/presentations/modules/arc-330.pptx
@@ -3346,49 +3346,58 @@
           <a:ln/>
         </p:spPr>
         <p:txBody>
-          <a:bodyPr wrap="square" lIns="635" tIns="635" rIns="635" bIns="635" rtlCol="0" anchor="t">
+          <a:bodyPr wrap="square" lIns="1016" tIns="1016" rIns="1016" bIns="1016" rtlCol="0" anchor="t">
             <a:normAutofit/>
           </a:bodyPr>
           <a:lstStyle/>
           <a:p>
+            <a:pPr indent="0" marL="0">
+              <a:buNone/>
+            </a:pPr>
             <a:r>
               <a:rPr lang="en-US" sz="2100" dirty="0">
                 <a:solidFill>
-                  <a:srgbClr val="17364A"/>
-                </a:solidFill>
-                <a:latin typeface="Aptos" pitchFamily="34" charset="0"/>
-                <a:ea typeface="Aptos" pitchFamily="34" charset="-122"/>
-                <a:cs typeface="Aptos" pitchFamily="34" charset="-120"/>
-              </a:rPr>
-              <a:t>Cloud computing provides remote infrastructure, platforms, and services that can host data pipelines,.</a:t>
+                  <a:srgbClr val="003A63"/>
+                </a:solidFill>
+                <a:latin typeface="Aptos" pitchFamily="34" charset="0"/>
+                <a:ea typeface="Aptos" pitchFamily="34" charset="-122"/>
+                <a:cs typeface="Aptos" pitchFamily="34" charset="-120"/>
+              </a:rPr>
+              <a:t>• Cloud computing provides remote infrastructure, platforms, and services that can host data.</a:t>
             </a:r>
             <a:endParaRPr lang="en-US" sz="2100" dirty="0"/>
           </a:p>
           <a:p>
+            <a:pPr indent="0" marL="0">
+              <a:buNone/>
+            </a:pPr>
             <a:r>
               <a:rPr lang="en-US" sz="2100" dirty="0">
                 <a:solidFill>
-                  <a:srgbClr val="17364A"/>
-                </a:solidFill>
-                <a:latin typeface="Aptos" pitchFamily="34" charset="0"/>
-                <a:ea typeface="Aptos" pitchFamily="34" charset="-122"/>
-                <a:cs typeface="Aptos" pitchFamily="34" charset="-120"/>
-              </a:rPr>
-              <a:t>Cloud deployment can improve scalability and resilience, but only when identity, access, logging,.</a:t>
+                  <a:srgbClr val="003A63"/>
+                </a:solidFill>
+                <a:latin typeface="Aptos" pitchFamily="34" charset="0"/>
+                <a:ea typeface="Aptos" pitchFamily="34" charset="-122"/>
+                <a:cs typeface="Aptos" pitchFamily="34" charset="-120"/>
+              </a:rPr>
+              <a:t>• Cloud deployment can improve scalability and resilience, but only when identity, access,.</a:t>
             </a:r>
             <a:endParaRPr lang="en-US" sz="2100" dirty="0"/>
           </a:p>
           <a:p>
+            <a:pPr indent="0" marL="0">
+              <a:buNone/>
+            </a:pPr>
             <a:r>
               <a:rPr lang="en-US" sz="2100" dirty="0">
                 <a:solidFill>
-                  <a:srgbClr val="17364A"/>
-                </a:solidFill>
-                <a:latin typeface="Aptos" pitchFamily="34" charset="0"/>
-                <a:ea typeface="Aptos" pitchFamily="34" charset="-122"/>
-                <a:cs typeface="Aptos" pitchFamily="34" charset="-120"/>
-              </a:rPr>
-              <a:t>Containers package software and its dependencies so that it can run consistently across environments.</a:t>
+                  <a:srgbClr val="003A63"/>
+                </a:solidFill>
+                <a:latin typeface="Aptos" pitchFamily="34" charset="0"/>
+                <a:ea typeface="Aptos" pitchFamily="34" charset="-122"/>
+                <a:cs typeface="Aptos" pitchFamily="34" charset="-120"/>
+              </a:rPr>
+              <a:t>• Containers package software and its dependencies so that it can run consistently across.</a:t>
             </a:r>
             <a:endParaRPr lang="en-US" sz="2100" dirty="0"/>
           </a:p>
@@ -3468,17 +3477,17 @@
         </p:nvSpPr>
         <p:spPr>
           <a:xfrm>
-            <a:off x="7799832" y="1828800"/>
-            <a:ext cx="3145536" cy="685800"/>
-          </a:xfrm>
-          <a:prstGeom prst="rect">
-            <a:avLst/>
-          </a:prstGeom>
-          <a:noFill/>
-          <a:ln/>
-        </p:spPr>
-        <p:txBody>
-          <a:bodyPr wrap="square" lIns="0" tIns="0" rIns="0" bIns="0" rtlCol="0" anchor="t">
+            <a:off x="7799832" y="1801368"/>
+            <a:ext cx="3145536" cy="758952"/>
+          </a:xfrm>
+          <a:prstGeom prst="rect">
+            <a:avLst/>
+          </a:prstGeom>
+          <a:noFill/>
+          <a:ln/>
+        </p:spPr>
+        <p:txBody>
+          <a:bodyPr wrap="square" lIns="254" tIns="254" rIns="254" bIns="254" rtlCol="0" anchor="t">
             <a:normAutofit/>
           </a:bodyPr>
           <a:lstStyle/>
@@ -3487,7 +3496,7 @@
               <a:buNone/>
             </a:pPr>
             <a:r>
-              <a:rPr lang="en-US" sz="1550" dirty="0">
+              <a:rPr lang="en-US" sz="1320" dirty="0">
                 <a:solidFill>
                   <a:srgbClr val="17364A"/>
                 </a:solidFill>
@@ -3497,7 +3506,7 @@
               </a:rPr>
               <a:t>Cloud computing provides remote infrastructure, platforms, and services that can host data pipelines,.</a:t>
             </a:r>
-            <a:endParaRPr lang="en-US" sz="1550" dirty="0"/>
+            <a:endParaRPr lang="en-US" sz="1320" dirty="0"/>
           </a:p>
         </p:txBody>
       </p:sp>
@@ -3585,13 +3594,16 @@
           <a:ln/>
         </p:spPr>
         <p:txBody>
-          <a:bodyPr wrap="square" lIns="254" tIns="254" rIns="254" bIns="254" rtlCol="0" anchor="t">
+          <a:bodyPr wrap="square" lIns="508" tIns="508" rIns="508" bIns="508" rtlCol="0" anchor="t">
             <a:normAutofit/>
           </a:bodyPr>
           <a:lstStyle/>
           <a:p>
-            <a:r>
-              <a:rPr lang="en-US" sz="1380" dirty="0">
+            <a:pPr indent="0" marL="0">
+              <a:buNone/>
+            </a:pPr>
+            <a:r>
+              <a:rPr lang="en-US" sz="1220" dirty="0">
                 <a:solidFill>
                   <a:srgbClr val="17364A"/>
                 </a:solidFill>
@@ -3599,13 +3611,16 @@
                 <a:ea typeface="Aptos" pitchFamily="34" charset="-122"/>
                 <a:cs typeface="Aptos" pitchFamily="34" charset="-120"/>
               </a:rPr>
-              <a:t>Cloud computing provides remote infrastructure, platforms, and services that can host data.</a:t>
-            </a:r>
-            <a:endParaRPr lang="en-US" sz="1380" dirty="0"/>
-          </a:p>
-          <a:p>
-            <a:r>
-              <a:rPr lang="en-US" sz="1380" dirty="0">
+              <a:t>Cloud computing provides remote infrastructure, platforms, and.</a:t>
+            </a:r>
+            <a:endParaRPr lang="en-US" sz="1220" dirty="0"/>
+          </a:p>
+          <a:p>
+            <a:pPr indent="0" marL="0">
+              <a:buNone/>
+            </a:pPr>
+            <a:r>
+              <a:rPr lang="en-US" sz="1220" dirty="0">
                 <a:solidFill>
                   <a:srgbClr val="17364A"/>
                 </a:solidFill>
@@ -3613,13 +3628,16 @@
                 <a:ea typeface="Aptos" pitchFamily="34" charset="-122"/>
                 <a:cs typeface="Aptos" pitchFamily="34" charset="-120"/>
               </a:rPr>
-              <a:t>Cloud deployment can improve scalability and resilience, but only when identity, access,.</a:t>
-            </a:r>
-            <a:endParaRPr lang="en-US" sz="1380" dirty="0"/>
-          </a:p>
-          <a:p>
-            <a:r>
-              <a:rPr lang="en-US" sz="1380" dirty="0">
+              <a:t>Cloud deployment can improve scalability and resilience, but only.</a:t>
+            </a:r>
+            <a:endParaRPr lang="en-US" sz="1220" dirty="0"/>
+          </a:p>
+          <a:p>
+            <a:pPr indent="0" marL="0">
+              <a:buNone/>
+            </a:pPr>
+            <a:r>
+              <a:rPr lang="en-US" sz="1220" dirty="0">
                 <a:solidFill>
                   <a:srgbClr val="17364A"/>
                 </a:solidFill>
@@ -3627,9 +3645,9 @@
                 <a:ea typeface="Aptos" pitchFamily="34" charset="-122"/>
                 <a:cs typeface="Aptos" pitchFamily="34" charset="-120"/>
               </a:rPr>
-              <a:t>Containers can improve reproducibility and deployment speed, but they must be scanned,.</a:t>
-            </a:r>
-            <a:endParaRPr lang="en-US" sz="1380" dirty="0"/>
+              <a:t>Containers can improve reproducibility and deployment speed, but.</a:t>
+            </a:r>
+            <a:endParaRPr lang="en-US" sz="1220" dirty="0"/>
           </a:p>
         </p:txBody>
       </p:sp>
@@ -3707,17 +3725,17 @@
         </p:nvSpPr>
         <p:spPr>
           <a:xfrm>
-            <a:off x="7799832" y="5001768"/>
-            <a:ext cx="3145536" cy="502920"/>
-          </a:xfrm>
-          <a:prstGeom prst="rect">
-            <a:avLst/>
-          </a:prstGeom>
-          <a:noFill/>
-          <a:ln/>
-        </p:spPr>
-        <p:txBody>
-          <a:bodyPr wrap="square" lIns="0" tIns="0" rIns="0" bIns="0" rtlCol="0" anchor="t">
+            <a:off x="7799832" y="4974336"/>
+            <a:ext cx="3145536" cy="576072"/>
+          </a:xfrm>
+          <a:prstGeom prst="rect">
+            <a:avLst/>
+          </a:prstGeom>
+          <a:noFill/>
+          <a:ln/>
+        </p:spPr>
+        <p:txBody>
+          <a:bodyPr wrap="square" lIns="254" tIns="254" rIns="254" bIns="254" rtlCol="0" anchor="t">
             <a:normAutofit/>
           </a:bodyPr>
           <a:lstStyle/>
@@ -3726,7 +3744,7 @@
               <a:buNone/>
             </a:pPr>
             <a:r>
-              <a:rPr lang="en-US" sz="1550" dirty="0">
+              <a:rPr lang="en-US" sz="1320" dirty="0">
                 <a:solidFill>
                   <a:srgbClr val="17364A"/>
                 </a:solidFill>
@@ -3734,9 +3752,9 @@
                 <a:ea typeface="Aptos" pitchFamily="34" charset="-122"/>
                 <a:cs typeface="Aptos" pitchFamily="34" charset="-120"/>
               </a:rPr>
-              <a:t>Connect the concept to public health purpose, responsible use, required safeguards, documentation, and the next action a department should take.</a:t>
-            </a:r>
-            <a:endParaRPr lang="en-US" sz="1550" dirty="0"/>
+              <a:t>Connect the concept to public health purpose, responsible use, required safeguards, documentation, and the next action a.</a:t>
+            </a:r>
+            <a:endParaRPr lang="en-US" sz="1320" dirty="0"/>
           </a:p>
         </p:txBody>
       </p:sp>
@@ -4037,49 +4055,58 @@
           <a:ln/>
         </p:spPr>
         <p:txBody>
-          <a:bodyPr wrap="square" lIns="635" tIns="635" rIns="635" bIns="635" rtlCol="0" anchor="t">
+          <a:bodyPr wrap="square" lIns="1016" tIns="1016" rIns="1016" bIns="1016" rtlCol="0" anchor="t">
             <a:normAutofit/>
           </a:bodyPr>
           <a:lstStyle/>
           <a:p>
+            <a:pPr indent="0" marL="0">
+              <a:buNone/>
+            </a:pPr>
             <a:r>
               <a:rPr lang="en-US" sz="2100" dirty="0">
                 <a:solidFill>
-                  <a:srgbClr val="17364A"/>
-                </a:solidFill>
-                <a:latin typeface="Aptos" pitchFamily="34" charset="0"/>
-                <a:ea typeface="Aptos" pitchFamily="34" charset="-122"/>
-                <a:cs typeface="Aptos" pitchFamily="34" charset="-120"/>
-              </a:rPr>
-              <a:t>A public health agency may deploy an internal RAG assistant in a cloud environment so staff can search.</a:t>
+                  <a:srgbClr val="003A63"/>
+                </a:solidFill>
+                <a:latin typeface="Aptos" pitchFamily="34" charset="0"/>
+                <a:ea typeface="Aptos" pitchFamily="34" charset="-122"/>
+                <a:cs typeface="Aptos" pitchFamily="34" charset="-120"/>
+              </a:rPr>
+              <a:t>• A public health agency may deploy an internal RAG assistant in a cloud environment so staff.</a:t>
             </a:r>
             <a:endParaRPr lang="en-US" sz="2100" dirty="0"/>
           </a:p>
           <a:p>
+            <a:pPr indent="0" marL="0">
+              <a:buNone/>
+            </a:pPr>
             <a:r>
               <a:rPr lang="en-US" sz="2100" dirty="0">
                 <a:solidFill>
-                  <a:srgbClr val="17364A"/>
-                </a:solidFill>
-                <a:latin typeface="Aptos" pitchFamily="34" charset="0"/>
-                <a:ea typeface="Aptos" pitchFamily="34" charset="-122"/>
-                <a:cs typeface="Aptos" pitchFamily="34" charset="-120"/>
-              </a:rPr>
-              <a:t>The tool may be low risk if it uses public documents, but it becomes higher risk if it retrieves.</a:t>
+                  <a:srgbClr val="003A63"/>
+                </a:solidFill>
+                <a:latin typeface="Aptos" pitchFamily="34" charset="0"/>
+                <a:ea typeface="Aptos" pitchFamily="34" charset="-122"/>
+                <a:cs typeface="Aptos" pitchFamily="34" charset="-120"/>
+              </a:rPr>
+              <a:t>• The tool may be low risk if it uses public documents, but it becomes higher risk if it.</a:t>
             </a:r>
             <a:endParaRPr lang="en-US" sz="2100" dirty="0"/>
           </a:p>
           <a:p>
+            <a:pPr indent="0" marL="0">
+              <a:buNone/>
+            </a:pPr>
             <a:r>
               <a:rPr lang="en-US" sz="2100" dirty="0">
                 <a:solidFill>
-                  <a:srgbClr val="17364A"/>
-                </a:solidFill>
-                <a:latin typeface="Aptos" pitchFamily="34" charset="0"/>
-                <a:ea typeface="Aptos" pitchFamily="34" charset="-122"/>
-                <a:cs typeface="Aptos" pitchFamily="34" charset="-120"/>
-              </a:rPr>
-              <a:t>Secure deployment requires access controls, document-level permissions, logging, monitoring, backup,.</a:t>
+                  <a:srgbClr val="003A63"/>
+                </a:solidFill>
+                <a:latin typeface="Aptos" pitchFamily="34" charset="0"/>
+                <a:ea typeface="Aptos" pitchFamily="34" charset="-122"/>
+                <a:cs typeface="Aptos" pitchFamily="34" charset="-120"/>
+              </a:rPr>
+              <a:t>• Secure deployment requires access controls, document-level permissions, logging, monitoring,.</a:t>
             </a:r>
             <a:endParaRPr lang="en-US" sz="2100" dirty="0"/>
           </a:p>
@@ -4159,17 +4186,17 @@
         </p:nvSpPr>
         <p:spPr>
           <a:xfrm>
-            <a:off x="7799832" y="1828800"/>
-            <a:ext cx="3145536" cy="685800"/>
-          </a:xfrm>
-          <a:prstGeom prst="rect">
-            <a:avLst/>
-          </a:prstGeom>
-          <a:noFill/>
-          <a:ln/>
-        </p:spPr>
-        <p:txBody>
-          <a:bodyPr wrap="square" lIns="0" tIns="0" rIns="0" bIns="0" rtlCol="0" anchor="t">
+            <a:off x="7799832" y="1801368"/>
+            <a:ext cx="3145536" cy="758952"/>
+          </a:xfrm>
+          <a:prstGeom prst="rect">
+            <a:avLst/>
+          </a:prstGeom>
+          <a:noFill/>
+          <a:ln/>
+        </p:spPr>
+        <p:txBody>
+          <a:bodyPr wrap="square" lIns="254" tIns="254" rIns="254" bIns="254" rtlCol="0" anchor="t">
             <a:normAutofit/>
           </a:bodyPr>
           <a:lstStyle/>
@@ -4178,7 +4205,7 @@
               <a:buNone/>
             </a:pPr>
             <a:r>
-              <a:rPr lang="en-US" sz="1550" dirty="0">
+              <a:rPr lang="en-US" sz="1320" dirty="0">
                 <a:solidFill>
                   <a:srgbClr val="17364A"/>
                 </a:solidFill>
@@ -4188,7 +4215,7 @@
               </a:rPr>
               <a:t>A public health agency may deploy an internal RAG assistant in a cloud environment so staff can search.</a:t>
             </a:r>
-            <a:endParaRPr lang="en-US" sz="1550" dirty="0"/>
+            <a:endParaRPr lang="en-US" sz="1320" dirty="0"/>
           </a:p>
         </p:txBody>
       </p:sp>
@@ -4276,13 +4303,16 @@
           <a:ln/>
         </p:spPr>
         <p:txBody>
-          <a:bodyPr wrap="square" lIns="254" tIns="254" rIns="254" bIns="254" rtlCol="0" anchor="t">
+          <a:bodyPr wrap="square" lIns="508" tIns="508" rIns="508" bIns="508" rtlCol="0" anchor="t">
             <a:normAutofit/>
           </a:bodyPr>
           <a:lstStyle/>
           <a:p>
-            <a:r>
-              <a:rPr lang="en-US" sz="1380" dirty="0">
+            <a:pPr indent="0" marL="0">
+              <a:buNone/>
+            </a:pPr>
+            <a:r>
+              <a:rPr lang="en-US" sz="1220" dirty="0">
                 <a:solidFill>
                   <a:srgbClr val="17364A"/>
                 </a:solidFill>
@@ -4290,13 +4320,16 @@
                 <a:ea typeface="Aptos" pitchFamily="34" charset="-122"/>
                 <a:cs typeface="Aptos" pitchFamily="34" charset="-120"/>
               </a:rPr>
-              <a:t>A public health agency may deploy an internal RAG assistant in a cloud environment so.</a:t>
-            </a:r>
-            <a:endParaRPr lang="en-US" sz="1380" dirty="0"/>
-          </a:p>
-          <a:p>
-            <a:r>
-              <a:rPr lang="en-US" sz="1380" dirty="0">
+              <a:t>A public health agency may deploy an internal RAG assistant in a.</a:t>
+            </a:r>
+            <a:endParaRPr lang="en-US" sz="1220" dirty="0"/>
+          </a:p>
+          <a:p>
+            <a:pPr indent="0" marL="0">
+              <a:buNone/>
+            </a:pPr>
+            <a:r>
+              <a:rPr lang="en-US" sz="1220" dirty="0">
                 <a:solidFill>
                   <a:srgbClr val="17364A"/>
                 </a:solidFill>
@@ -4304,13 +4337,16 @@
                 <a:ea typeface="Aptos" pitchFamily="34" charset="-122"/>
                 <a:cs typeface="Aptos" pitchFamily="34" charset="-120"/>
               </a:rPr>
-              <a:t>The tool may be low risk if it uses public documents, but it becomes higher risk if it.</a:t>
-            </a:r>
-            <a:endParaRPr lang="en-US" sz="1380" dirty="0"/>
-          </a:p>
-          <a:p>
-            <a:r>
-              <a:rPr lang="en-US" sz="1380" dirty="0">
+              <a:t>The tool may be low risk if it uses public documents, but it.</a:t>
+            </a:r>
+            <a:endParaRPr lang="en-US" sz="1220" dirty="0"/>
+          </a:p>
+          <a:p>
+            <a:pPr indent="0" marL="0">
+              <a:buNone/>
+            </a:pPr>
+            <a:r>
+              <a:rPr lang="en-US" sz="1220" dirty="0">
                 <a:solidFill>
                   <a:srgbClr val="17364A"/>
                 </a:solidFill>
@@ -4318,9 +4354,9 @@
                 <a:ea typeface="Aptos" pitchFamily="34" charset="-122"/>
                 <a:cs typeface="Aptos" pitchFamily="34" charset="-120"/>
               </a:rPr>
-              <a:t>Secure deployment requires access controls, document-level permissions, logging,.</a:t>
-            </a:r>
-            <a:endParaRPr lang="en-US" sz="1380" dirty="0"/>
+              <a:t>Secure deployment requires access controls, document-level.</a:t>
+            </a:r>
+            <a:endParaRPr lang="en-US" sz="1220" dirty="0"/>
           </a:p>
         </p:txBody>
       </p:sp>
@@ -4398,17 +4434,17 @@
         </p:nvSpPr>
         <p:spPr>
           <a:xfrm>
-            <a:off x="7799832" y="5001768"/>
-            <a:ext cx="3145536" cy="502920"/>
-          </a:xfrm>
-          <a:prstGeom prst="rect">
-            <a:avLst/>
-          </a:prstGeom>
-          <a:noFill/>
-          <a:ln/>
-        </p:spPr>
-        <p:txBody>
-          <a:bodyPr wrap="square" lIns="0" tIns="0" rIns="0" bIns="0" rtlCol="0" anchor="t">
+            <a:off x="7799832" y="4974336"/>
+            <a:ext cx="3145536" cy="576072"/>
+          </a:xfrm>
+          <a:prstGeom prst="rect">
+            <a:avLst/>
+          </a:prstGeom>
+          <a:noFill/>
+          <a:ln/>
+        </p:spPr>
+        <p:txBody>
+          <a:bodyPr wrap="square" lIns="254" tIns="254" rIns="254" bIns="254" rtlCol="0" anchor="t">
             <a:normAutofit/>
           </a:bodyPr>
           <a:lstStyle/>
@@ -4417,7 +4453,7 @@
               <a:buNone/>
             </a:pPr>
             <a:r>
-              <a:rPr lang="en-US" sz="1550" dirty="0">
+              <a:rPr lang="en-US" sz="1320" dirty="0">
                 <a:solidFill>
                   <a:srgbClr val="17364A"/>
                 </a:solidFill>
@@ -4425,9 +4461,9 @@
                 <a:ea typeface="Aptos" pitchFamily="34" charset="-122"/>
                 <a:cs typeface="Aptos" pitchFamily="34" charset="-120"/>
               </a:rPr>
-              <a:t>Connect the concept to public health purpose, responsible use, required safeguards, documentation, and the next action a department should take.</a:t>
-            </a:r>
-            <a:endParaRPr lang="en-US" sz="1550" dirty="0"/>
+              <a:t>Connect the concept to public health purpose, responsible use, required safeguards, documentation, and the next action a.</a:t>
+            </a:r>
+            <a:endParaRPr lang="en-US" sz="1320" dirty="0"/>
           </a:p>
         </p:txBody>
       </p:sp>
@@ -4728,49 +4764,58 @@
           <a:ln/>
         </p:spPr>
         <p:txBody>
-          <a:bodyPr wrap="square" lIns="635" tIns="635" rIns="635" bIns="635" rtlCol="0" anchor="t">
+          <a:bodyPr wrap="square" lIns="1016" tIns="1016" rIns="1016" bIns="1016" rtlCol="0" anchor="t">
             <a:normAutofit/>
           </a:bodyPr>
           <a:lstStyle/>
           <a:p>
+            <a:pPr indent="0" marL="0">
+              <a:buNone/>
+            </a:pPr>
             <a:r>
               <a:rPr lang="en-US" sz="2100" dirty="0">
                 <a:solidFill>
-                  <a:srgbClr val="17364A"/>
-                </a:solidFill>
-                <a:latin typeface="Aptos" pitchFamily="34" charset="0"/>
-                <a:ea typeface="Aptos" pitchFamily="34" charset="-122"/>
-                <a:cs typeface="Aptos" pitchFamily="34" charset="-120"/>
-              </a:rPr>
-              <a:t>Secure deployment begins with environment separation.</a:t>
+                  <a:srgbClr val="003A63"/>
+                </a:solidFill>
+                <a:latin typeface="Aptos" pitchFamily="34" charset="0"/>
+                <a:ea typeface="Aptos" pitchFamily="34" charset="-122"/>
+                <a:cs typeface="Aptos" pitchFamily="34" charset="-120"/>
+              </a:rPr>
+              <a:t>• Secure deployment begins with environment separation.</a:t>
             </a:r>
             <a:endParaRPr lang="en-US" sz="2100" dirty="0"/>
           </a:p>
           <a:p>
+            <a:pPr indent="0" marL="0">
+              <a:buNone/>
+            </a:pPr>
             <a:r>
               <a:rPr lang="en-US" sz="2100" dirty="0">
                 <a:solidFill>
-                  <a:srgbClr val="17364A"/>
-                </a:solidFill>
-                <a:latin typeface="Aptos" pitchFamily="34" charset="0"/>
-                <a:ea typeface="Aptos" pitchFamily="34" charset="-122"/>
-                <a:cs typeface="Aptos" pitchFamily="34" charset="-120"/>
-              </a:rPr>
-              <a:t>Development, testing, staging, and production environments should be clearly separated so experimental.</a:t>
+                  <a:srgbClr val="003A63"/>
+                </a:solidFill>
+                <a:latin typeface="Aptos" pitchFamily="34" charset="0"/>
+                <a:ea typeface="Aptos" pitchFamily="34" charset="-122"/>
+                <a:cs typeface="Aptos" pitchFamily="34" charset="-120"/>
+              </a:rPr>
+              <a:t>• Development, testing, staging, and production environments should be clearly separated so.</a:t>
             </a:r>
             <a:endParaRPr lang="en-US" sz="2100" dirty="0"/>
           </a:p>
           <a:p>
+            <a:pPr indent="0" marL="0">
+              <a:buNone/>
+            </a:pPr>
             <a:r>
               <a:rPr lang="en-US" sz="2100" dirty="0">
                 <a:solidFill>
-                  <a:srgbClr val="17364A"/>
-                </a:solidFill>
-                <a:latin typeface="Aptos" pitchFamily="34" charset="0"/>
-                <a:ea typeface="Aptos" pitchFamily="34" charset="-122"/>
-                <a:cs typeface="Aptos" pitchFamily="34" charset="-120"/>
-              </a:rPr>
-              <a:t>Sensitive production data should not be copied into lower environments unless approved controls are in.</a:t>
+                  <a:srgbClr val="003A63"/>
+                </a:solidFill>
+                <a:latin typeface="Aptos" pitchFamily="34" charset="0"/>
+                <a:ea typeface="Aptos" pitchFamily="34" charset="-122"/>
+                <a:cs typeface="Aptos" pitchFamily="34" charset="-120"/>
+              </a:rPr>
+              <a:t>• Sensitive production data should not be copied into lower environments unless approved.</a:t>
             </a:r>
             <a:endParaRPr lang="en-US" sz="2100" dirty="0"/>
           </a:p>
@@ -4850,17 +4895,17 @@
         </p:nvSpPr>
         <p:spPr>
           <a:xfrm>
-            <a:off x="7799832" y="1828800"/>
-            <a:ext cx="3145536" cy="685800"/>
-          </a:xfrm>
-          <a:prstGeom prst="rect">
-            <a:avLst/>
-          </a:prstGeom>
-          <a:noFill/>
-          <a:ln/>
-        </p:spPr>
-        <p:txBody>
-          <a:bodyPr wrap="square" lIns="0" tIns="0" rIns="0" bIns="0" rtlCol="0" anchor="t">
+            <a:off x="7799832" y="1801368"/>
+            <a:ext cx="3145536" cy="758952"/>
+          </a:xfrm>
+          <a:prstGeom prst="rect">
+            <a:avLst/>
+          </a:prstGeom>
+          <a:noFill/>
+          <a:ln/>
+        </p:spPr>
+        <p:txBody>
+          <a:bodyPr wrap="square" lIns="254" tIns="254" rIns="254" bIns="254" rtlCol="0" anchor="t">
             <a:normAutofit/>
           </a:bodyPr>
           <a:lstStyle/>
@@ -4869,7 +4914,7 @@
               <a:buNone/>
             </a:pPr>
             <a:r>
-              <a:rPr lang="en-US" sz="1550" dirty="0">
+              <a:rPr lang="en-US" sz="1320" dirty="0">
                 <a:solidFill>
                   <a:srgbClr val="17364A"/>
                 </a:solidFill>
@@ -4879,7 +4924,7 @@
               </a:rPr>
               <a:t>Secure deployment begins with environment separation.</a:t>
             </a:r>
-            <a:endParaRPr lang="en-US" sz="1550" dirty="0"/>
+            <a:endParaRPr lang="en-US" sz="1320" dirty="0"/>
           </a:p>
         </p:txBody>
       </p:sp>
@@ -4967,13 +5012,16 @@
           <a:ln/>
         </p:spPr>
         <p:txBody>
-          <a:bodyPr wrap="square" lIns="254" tIns="254" rIns="254" bIns="254" rtlCol="0" anchor="t">
+          <a:bodyPr wrap="square" lIns="508" tIns="508" rIns="508" bIns="508" rtlCol="0" anchor="t">
             <a:normAutofit/>
           </a:bodyPr>
           <a:lstStyle/>
           <a:p>
-            <a:r>
-              <a:rPr lang="en-US" sz="1380" dirty="0">
+            <a:pPr indent="0" marL="0">
+              <a:buNone/>
+            </a:pPr>
+            <a:r>
+              <a:rPr lang="en-US" sz="1220" dirty="0">
                 <a:solidFill>
                   <a:srgbClr val="17364A"/>
                 </a:solidFill>
@@ -4981,13 +5029,16 @@
                 <a:ea typeface="Aptos" pitchFamily="34" charset="-122"/>
                 <a:cs typeface="Aptos" pitchFamily="34" charset="-120"/>
               </a:rPr>
-              <a:t>Development, testing, staging, and production environments should be clearly separated so.</a:t>
-            </a:r>
-            <a:endParaRPr lang="en-US" sz="1380" dirty="0"/>
-          </a:p>
-          <a:p>
-            <a:r>
-              <a:rPr lang="en-US" sz="1380" dirty="0">
+              <a:t>Development, testing, staging, and production environments should.</a:t>
+            </a:r>
+            <a:endParaRPr lang="en-US" sz="1220" dirty="0"/>
+          </a:p>
+          <a:p>
+            <a:pPr indent="0" marL="0">
+              <a:buNone/>
+            </a:pPr>
+            <a:r>
+              <a:rPr lang="en-US" sz="1220" dirty="0">
                 <a:solidFill>
                   <a:srgbClr val="17364A"/>
                 </a:solidFill>
@@ -4995,13 +5046,16 @@
                 <a:ea typeface="Aptos" pitchFamily="34" charset="-122"/>
                 <a:cs typeface="Aptos" pitchFamily="34" charset="-120"/>
               </a:rPr>
-              <a:t>Sensitive production data should not be copied into lower environments unless approved.</a:t>
-            </a:r>
-            <a:endParaRPr lang="en-US" sz="1380" dirty="0"/>
-          </a:p>
-          <a:p>
-            <a:r>
-              <a:rPr lang="en-US" sz="1380" dirty="0">
+              <a:t>Sensitive production data should not be copied into lower.</a:t>
+            </a:r>
+            <a:endParaRPr lang="en-US" sz="1220" dirty="0"/>
+          </a:p>
+          <a:p>
+            <a:pPr indent="0" marL="0">
+              <a:buNone/>
+            </a:pPr>
+            <a:r>
+              <a:rPr lang="en-US" sz="1220" dirty="0">
                 <a:solidFill>
                   <a:srgbClr val="17364A"/>
                 </a:solidFill>
@@ -5011,7 +5065,7 @@
               </a:rPr>
               <a:t>Logging and monitoring are central to deployment safety.</a:t>
             </a:r>
-            <a:endParaRPr lang="en-US" sz="1380" dirty="0"/>
+            <a:endParaRPr lang="en-US" sz="1220" dirty="0"/>
           </a:p>
         </p:txBody>
       </p:sp>
@@ -5089,17 +5143,17 @@
         </p:nvSpPr>
         <p:spPr>
           <a:xfrm>
-            <a:off x="7799832" y="5001768"/>
-            <a:ext cx="3145536" cy="502920"/>
-          </a:xfrm>
-          <a:prstGeom prst="rect">
-            <a:avLst/>
-          </a:prstGeom>
-          <a:noFill/>
-          <a:ln/>
-        </p:spPr>
-        <p:txBody>
-          <a:bodyPr wrap="square" lIns="0" tIns="0" rIns="0" bIns="0" rtlCol="0" anchor="t">
+            <a:off x="7799832" y="4974336"/>
+            <a:ext cx="3145536" cy="576072"/>
+          </a:xfrm>
+          <a:prstGeom prst="rect">
+            <a:avLst/>
+          </a:prstGeom>
+          <a:noFill/>
+          <a:ln/>
+        </p:spPr>
+        <p:txBody>
+          <a:bodyPr wrap="square" lIns="254" tIns="254" rIns="254" bIns="254" rtlCol="0" anchor="t">
             <a:normAutofit/>
           </a:bodyPr>
           <a:lstStyle/>
@@ -5108,7 +5162,7 @@
               <a:buNone/>
             </a:pPr>
             <a:r>
-              <a:rPr lang="en-US" sz="1550" dirty="0">
+              <a:rPr lang="en-US" sz="1320" dirty="0">
                 <a:solidFill>
                   <a:srgbClr val="17364A"/>
                 </a:solidFill>
@@ -5116,9 +5170,9 @@
                 <a:ea typeface="Aptos" pitchFamily="34" charset="-122"/>
                 <a:cs typeface="Aptos" pitchFamily="34" charset="-120"/>
               </a:rPr>
-              <a:t>Connect the concept to public health purpose, responsible use, required safeguards, documentation, and the next action a department should take.</a:t>
-            </a:r>
-            <a:endParaRPr lang="en-US" sz="1550" dirty="0"/>
+              <a:t>Connect the concept to public health purpose, responsible use, required safeguards, documentation, and the next action a.</a:t>
+            </a:r>
+            <a:endParaRPr lang="en-US" sz="1320" dirty="0"/>
           </a:p>
         </p:txBody>
       </p:sp>
@@ -5419,49 +5473,58 @@
           <a:ln/>
         </p:spPr>
         <p:txBody>
-          <a:bodyPr wrap="square" lIns="635" tIns="635" rIns="635" bIns="635" rtlCol="0" anchor="t">
+          <a:bodyPr wrap="square" lIns="1016" tIns="1016" rIns="1016" bIns="1016" rtlCol="0" anchor="t">
             <a:normAutofit/>
           </a:bodyPr>
           <a:lstStyle/>
           <a:p>
+            <a:pPr indent="0" marL="0">
+              <a:buNone/>
+            </a:pPr>
             <a:r>
               <a:rPr lang="en-US" sz="2100" dirty="0">
                 <a:solidFill>
-                  <a:srgbClr val="17364A"/>
-                </a:solidFill>
-                <a:latin typeface="Aptos" pitchFamily="34" charset="0"/>
-                <a:ea typeface="Aptos" pitchFamily="34" charset="-122"/>
-                <a:cs typeface="Aptos" pitchFamily="34" charset="-120"/>
-              </a:rPr>
-              <a:t>A common failure mode is treating the topic as a technical detail rather than a public health control.</a:t>
+                  <a:srgbClr val="003A63"/>
+                </a:solidFill>
+                <a:latin typeface="Aptos" pitchFamily="34" charset="0"/>
+                <a:ea typeface="Aptos" pitchFamily="34" charset="-122"/>
+                <a:cs typeface="Aptos" pitchFamily="34" charset="-120"/>
+              </a:rPr>
+              <a:t>• A common failure mode is treating the topic as a technical detail rather than a public health.</a:t>
             </a:r>
             <a:endParaRPr lang="en-US" sz="2100" dirty="0"/>
           </a:p>
           <a:p>
+            <a:pPr indent="0" marL="0">
+              <a:buNone/>
+            </a:pPr>
             <a:r>
               <a:rPr lang="en-US" sz="2100" dirty="0">
                 <a:solidFill>
-                  <a:srgbClr val="17364A"/>
-                </a:solidFill>
-                <a:latin typeface="Aptos" pitchFamily="34" charset="0"/>
-                <a:ea typeface="Aptos" pitchFamily="34" charset="-122"/>
-                <a:cs typeface="Aptos" pitchFamily="34" charset="-120"/>
-              </a:rPr>
-              <a:t>When staff do not connect technical decisions to authority, workflow, equity, privacy, security, and.</a:t>
+                  <a:srgbClr val="003A63"/>
+                </a:solidFill>
+                <a:latin typeface="Aptos" pitchFamily="34" charset="0"/>
+                <a:ea typeface="Aptos" pitchFamily="34" charset="-122"/>
+                <a:cs typeface="Aptos" pitchFamily="34" charset="-120"/>
+              </a:rPr>
+              <a:t>• When staff do not connect technical decisions to authority, workflow, equity, privacy,.</a:t>
             </a:r>
             <a:endParaRPr lang="en-US" sz="2100" dirty="0"/>
           </a:p>
           <a:p>
+            <a:pPr indent="0" marL="0">
+              <a:buNone/>
+            </a:pPr>
             <a:r>
               <a:rPr lang="en-US" sz="2100" dirty="0">
                 <a:solidFill>
-                  <a:srgbClr val="17364A"/>
-                </a:solidFill>
-                <a:latin typeface="Aptos" pitchFamily="34" charset="0"/>
-                <a:ea typeface="Aptos" pitchFamily="34" charset="-122"/>
-                <a:cs typeface="Aptos" pitchFamily="34" charset="-120"/>
-              </a:rPr>
-              <a:t>Another risk is relying on vendor claims without agency-defined evidence.</a:t>
+                  <a:srgbClr val="003A63"/>
+                </a:solidFill>
+                <a:latin typeface="Aptos" pitchFamily="34" charset="0"/>
+                <a:ea typeface="Aptos" pitchFamily="34" charset="-122"/>
+                <a:cs typeface="Aptos" pitchFamily="34" charset="-120"/>
+              </a:rPr>
+              <a:t>• Another risk is relying on vendor claims without agency-defined evidence.</a:t>
             </a:r>
             <a:endParaRPr lang="en-US" sz="2100" dirty="0"/>
           </a:p>
@@ -5541,17 +5604,17 @@
         </p:nvSpPr>
         <p:spPr>
           <a:xfrm>
-            <a:off x="7799832" y="1828800"/>
-            <a:ext cx="3145536" cy="685800"/>
-          </a:xfrm>
-          <a:prstGeom prst="rect">
-            <a:avLst/>
-          </a:prstGeom>
-          <a:noFill/>
-          <a:ln/>
-        </p:spPr>
-        <p:txBody>
-          <a:bodyPr wrap="square" lIns="0" tIns="0" rIns="0" bIns="0" rtlCol="0" anchor="t">
+            <a:off x="7799832" y="1801368"/>
+            <a:ext cx="3145536" cy="758952"/>
+          </a:xfrm>
+          <a:prstGeom prst="rect">
+            <a:avLst/>
+          </a:prstGeom>
+          <a:noFill/>
+          <a:ln/>
+        </p:spPr>
+        <p:txBody>
+          <a:bodyPr wrap="square" lIns="254" tIns="254" rIns="254" bIns="254" rtlCol="0" anchor="t">
             <a:normAutofit/>
           </a:bodyPr>
           <a:lstStyle/>
@@ -5560,7 +5623,7 @@
               <a:buNone/>
             </a:pPr>
             <a:r>
-              <a:rPr lang="en-US" sz="1550" dirty="0">
+              <a:rPr lang="en-US" sz="1320" dirty="0">
                 <a:solidFill>
                   <a:srgbClr val="17364A"/>
                 </a:solidFill>
@@ -5570,7 +5633,7 @@
               </a:rPr>
               <a:t>A common failure mode is treating the topic as a technical detail rather than a public health control.</a:t>
             </a:r>
-            <a:endParaRPr lang="en-US" sz="1550" dirty="0"/>
+            <a:endParaRPr lang="en-US" sz="1320" dirty="0"/>
           </a:p>
         </p:txBody>
       </p:sp>
@@ -5658,13 +5721,16 @@
           <a:ln/>
         </p:spPr>
         <p:txBody>
-          <a:bodyPr wrap="square" lIns="254" tIns="254" rIns="254" bIns="254" rtlCol="0" anchor="t">
+          <a:bodyPr wrap="square" lIns="508" tIns="508" rIns="508" bIns="508" rtlCol="0" anchor="t">
             <a:normAutofit/>
           </a:bodyPr>
           <a:lstStyle/>
           <a:p>
-            <a:r>
-              <a:rPr lang="en-US" sz="1380" dirty="0">
+            <a:pPr indent="0" marL="0">
+              <a:buNone/>
+            </a:pPr>
+            <a:r>
+              <a:rPr lang="en-US" sz="1220" dirty="0">
                 <a:solidFill>
                   <a:srgbClr val="17364A"/>
                 </a:solidFill>
@@ -5672,13 +5738,16 @@
                 <a:ea typeface="Aptos" pitchFamily="34" charset="-122"/>
                 <a:cs typeface="Aptos" pitchFamily="34" charset="-120"/>
               </a:rPr>
-              <a:t>When staff do not connect technical decisions to authority, workflow, equity, privacy,.</a:t>
-            </a:r>
-            <a:endParaRPr lang="en-US" sz="1380" dirty="0"/>
-          </a:p>
-          <a:p>
-            <a:r>
-              <a:rPr lang="en-US" sz="1380" dirty="0">
+              <a:t>When staff do not connect technical decisions to authority,.</a:t>
+            </a:r>
+            <a:endParaRPr lang="en-US" sz="1220" dirty="0"/>
+          </a:p>
+          <a:p>
+            <a:pPr indent="0" marL="0">
+              <a:buNone/>
+            </a:pPr>
+            <a:r>
+              <a:rPr lang="en-US" sz="1220" dirty="0">
                 <a:solidFill>
                   <a:srgbClr val="17364A"/>
                 </a:solidFill>
@@ -5686,13 +5755,16 @@
                 <a:ea typeface="Aptos" pitchFamily="34" charset="-122"/>
                 <a:cs typeface="Aptos" pitchFamily="34" charset="-120"/>
               </a:rPr>
-              <a:t>Vendors may provide demonstrations, dashboards, or summary metrics that do not match the.</a:t>
-            </a:r>
-            <a:endParaRPr lang="en-US" sz="1380" dirty="0"/>
-          </a:p>
-          <a:p>
-            <a:r>
-              <a:rPr lang="en-US" sz="1380" dirty="0">
+              <a:t>Vendors may provide demonstrations, dashboards, or summary metrics.</a:t>
+            </a:r>
+            <a:endParaRPr lang="en-US" sz="1220" dirty="0"/>
+          </a:p>
+          <a:p>
+            <a:pPr indent="0" marL="0">
+              <a:buNone/>
+            </a:pPr>
+            <a:r>
+              <a:rPr lang="en-US" sz="1220" dirty="0">
                 <a:solidFill>
                   <a:srgbClr val="17364A"/>
                 </a:solidFill>
@@ -5700,9 +5772,9 @@
                 <a:ea typeface="Aptos" pitchFamily="34" charset="-122"/>
                 <a:cs typeface="Aptos" pitchFamily="34" charset="-120"/>
               </a:rPr>
-              <a:t>A guardrail is to require documentation, test results, acceptance criteria, and.</a:t>
-            </a:r>
-            <a:endParaRPr lang="en-US" sz="1380" dirty="0"/>
+              <a:t>A guardrail is to require documentation, test results, acceptance.</a:t>
+            </a:r>
+            <a:endParaRPr lang="en-US" sz="1220" dirty="0"/>
           </a:p>
         </p:txBody>
       </p:sp>
@@ -5780,17 +5852,17 @@
         </p:nvSpPr>
         <p:spPr>
           <a:xfrm>
-            <a:off x="7799832" y="5001768"/>
-            <a:ext cx="3145536" cy="502920"/>
-          </a:xfrm>
-          <a:prstGeom prst="rect">
-            <a:avLst/>
-          </a:prstGeom>
-          <a:noFill/>
-          <a:ln/>
-        </p:spPr>
-        <p:txBody>
-          <a:bodyPr wrap="square" lIns="0" tIns="0" rIns="0" bIns="0" rtlCol="0" anchor="t">
+            <a:off x="7799832" y="4974336"/>
+            <a:ext cx="3145536" cy="576072"/>
+          </a:xfrm>
+          <a:prstGeom prst="rect">
+            <a:avLst/>
+          </a:prstGeom>
+          <a:noFill/>
+          <a:ln/>
+        </p:spPr>
+        <p:txBody>
+          <a:bodyPr wrap="square" lIns="254" tIns="254" rIns="254" bIns="254" rtlCol="0" anchor="t">
             <a:normAutofit/>
           </a:bodyPr>
           <a:lstStyle/>
@@ -5799,7 +5871,7 @@
               <a:buNone/>
             </a:pPr>
             <a:r>
-              <a:rPr lang="en-US" sz="1550" dirty="0">
+              <a:rPr lang="en-US" sz="1320" dirty="0">
                 <a:solidFill>
                   <a:srgbClr val="17364A"/>
                 </a:solidFill>
@@ -5807,9 +5879,9 @@
                 <a:ea typeface="Aptos" pitchFamily="34" charset="-122"/>
                 <a:cs typeface="Aptos" pitchFamily="34" charset="-120"/>
               </a:rPr>
-              <a:t>Identify what could go wrong, who could be affected, what safeguards are needed, and what evidence should be reviewed before use expands.</a:t>
-            </a:r>
-            <a:endParaRPr lang="en-US" sz="1550" dirty="0"/>
+              <a:t>Identify what could go wrong, who could be affected, what safeguards are needed, and what evidence should be reviewed.</a:t>
+            </a:r>
+            <a:endParaRPr lang="en-US" sz="1320" dirty="0"/>
           </a:p>
         </p:txBody>
       </p:sp>
@@ -6110,49 +6182,58 @@
           <a:ln/>
         </p:spPr>
         <p:txBody>
-          <a:bodyPr wrap="square" lIns="635" tIns="635" rIns="635" bIns="635" rtlCol="0" anchor="t">
+          <a:bodyPr wrap="square" lIns="1016" tIns="1016" rIns="1016" bIns="1016" rtlCol="0" anchor="t">
             <a:normAutofit/>
           </a:bodyPr>
           <a:lstStyle/>
           <a:p>
+            <a:pPr indent="0" marL="0">
+              <a:buNone/>
+            </a:pPr>
             <a:r>
               <a:rPr lang="en-US" sz="2100" dirty="0">
                 <a:solidFill>
-                  <a:srgbClr val="17364A"/>
-                </a:solidFill>
-                <a:latin typeface="Aptos" pitchFamily="34" charset="0"/>
-                <a:ea typeface="Aptos" pitchFamily="34" charset="-122"/>
-                <a:cs typeface="Aptos" pitchFamily="34" charset="-120"/>
-              </a:rPr>
-              <a:t>Generative AI, predictive analytics, RAG, automation, and agentic workflows all depend on the controls.</a:t>
+                  <a:srgbClr val="003A63"/>
+                </a:solidFill>
+                <a:latin typeface="Aptos" pitchFamily="34" charset="0"/>
+                <a:ea typeface="Aptos" pitchFamily="34" charset="-122"/>
+                <a:cs typeface="Aptos" pitchFamily="34" charset="-120"/>
+              </a:rPr>
+              <a:t>• Generative AI, predictive analytics, RAG, automation, and agentic workflows all depend on the.</a:t>
             </a:r>
             <a:endParaRPr lang="en-US" sz="2100" dirty="0"/>
           </a:p>
           <a:p>
+            <a:pPr indent="0" marL="0">
+              <a:buNone/>
+            </a:pPr>
             <a:r>
               <a:rPr lang="en-US" sz="2100" dirty="0">
                 <a:solidFill>
-                  <a:srgbClr val="17364A"/>
-                </a:solidFill>
-                <a:latin typeface="Aptos" pitchFamily="34" charset="0"/>
-                <a:ea typeface="Aptos" pitchFamily="34" charset="-122"/>
-                <a:cs typeface="Aptos" pitchFamily="34" charset="-120"/>
-              </a:rPr>
-              <a:t>The controls should be scaled to the risk of the use case.</a:t>
+                  <a:srgbClr val="003A63"/>
+                </a:solidFill>
+                <a:latin typeface="Aptos" pitchFamily="34" charset="0"/>
+                <a:ea typeface="Aptos" pitchFamily="34" charset="-122"/>
+                <a:cs typeface="Aptos" pitchFamily="34" charset="-120"/>
+              </a:rPr>
+              <a:t>• The controls should be scaled to the risk of the use case.</a:t>
             </a:r>
             <a:endParaRPr lang="en-US" sz="2100" dirty="0"/>
           </a:p>
           <a:p>
+            <a:pPr indent="0" marL="0">
+              <a:buNone/>
+            </a:pPr>
             <a:r>
               <a:rPr lang="en-US" sz="2100" dirty="0">
                 <a:solidFill>
-                  <a:srgbClr val="17364A"/>
-                </a:solidFill>
-                <a:latin typeface="Aptos" pitchFamily="34" charset="0"/>
-                <a:ea typeface="Aptos" pitchFamily="34" charset="-122"/>
-                <a:cs typeface="Aptos" pitchFamily="34" charset="-120"/>
-              </a:rPr>
-              <a:t>A tool that drafts internal training text may require lighter review than a tool that updates case.</a:t>
+                  <a:srgbClr val="003A63"/>
+                </a:solidFill>
+                <a:latin typeface="Aptos" pitchFamily="34" charset="0"/>
+                <a:ea typeface="Aptos" pitchFamily="34" charset="-122"/>
+                <a:cs typeface="Aptos" pitchFamily="34" charset="-120"/>
+              </a:rPr>
+              <a:t>• A tool that drafts internal training text may require lighter review than a tool that updates.</a:t>
             </a:r>
             <a:endParaRPr lang="en-US" sz="2100" dirty="0"/>
           </a:p>
@@ -6232,17 +6313,17 @@
         </p:nvSpPr>
         <p:spPr>
           <a:xfrm>
-            <a:off x="7799832" y="1828800"/>
-            <a:ext cx="3145536" cy="685800"/>
-          </a:xfrm>
-          <a:prstGeom prst="rect">
-            <a:avLst/>
-          </a:prstGeom>
-          <a:noFill/>
-          <a:ln/>
-        </p:spPr>
-        <p:txBody>
-          <a:bodyPr wrap="square" lIns="0" tIns="0" rIns="0" bIns="0" rtlCol="0" anchor="t">
+            <a:off x="7799832" y="1801368"/>
+            <a:ext cx="3145536" cy="758952"/>
+          </a:xfrm>
+          <a:prstGeom prst="rect">
+            <a:avLst/>
+          </a:prstGeom>
+          <a:noFill/>
+          <a:ln/>
+        </p:spPr>
+        <p:txBody>
+          <a:bodyPr wrap="square" lIns="254" tIns="254" rIns="254" bIns="254" rtlCol="0" anchor="t">
             <a:normAutofit/>
           </a:bodyPr>
           <a:lstStyle/>
@@ -6251,7 +6332,7 @@
               <a:buNone/>
             </a:pPr>
             <a:r>
-              <a:rPr lang="en-US" sz="1550" dirty="0">
+              <a:rPr lang="en-US" sz="1320" dirty="0">
                 <a:solidFill>
                   <a:srgbClr val="17364A"/>
                 </a:solidFill>
@@ -6261,7 +6342,7 @@
               </a:rPr>
               <a:t>Generative AI, predictive analytics, RAG, automation, and agentic workflows all depend on the controls.</a:t>
             </a:r>
-            <a:endParaRPr lang="en-US" sz="1550" dirty="0"/>
+            <a:endParaRPr lang="en-US" sz="1320" dirty="0"/>
           </a:p>
         </p:txBody>
       </p:sp>
@@ -6349,13 +6430,16 @@
           <a:ln/>
         </p:spPr>
         <p:txBody>
-          <a:bodyPr wrap="square" lIns="254" tIns="254" rIns="254" bIns="254" rtlCol="0" anchor="t">
+          <a:bodyPr wrap="square" lIns="508" tIns="508" rIns="508" bIns="508" rtlCol="0" anchor="t">
             <a:normAutofit/>
           </a:bodyPr>
           <a:lstStyle/>
           <a:p>
-            <a:r>
-              <a:rPr lang="en-US" sz="1380" dirty="0">
+            <a:pPr indent="0" marL="0">
+              <a:buNone/>
+            </a:pPr>
+            <a:r>
+              <a:rPr lang="en-US" sz="1220" dirty="0">
                 <a:solidFill>
                   <a:srgbClr val="17364A"/>
                 </a:solidFill>
@@ -6363,13 +6447,16 @@
                 <a:ea typeface="Aptos" pitchFamily="34" charset="-122"/>
                 <a:cs typeface="Aptos" pitchFamily="34" charset="-120"/>
               </a:rPr>
-              <a:t>Generative AI, predictive analytics, RAG, automation, and agentic workflows all depend on.</a:t>
-            </a:r>
-            <a:endParaRPr lang="en-US" sz="1380" dirty="0"/>
-          </a:p>
-          <a:p>
-            <a:r>
-              <a:rPr lang="en-US" sz="1380" dirty="0">
+              <a:t>Generative AI, predictive analytics, RAG, automation, and agentic.</a:t>
+            </a:r>
+            <a:endParaRPr lang="en-US" sz="1220" dirty="0"/>
+          </a:p>
+          <a:p>
+            <a:pPr indent="0" marL="0">
+              <a:buNone/>
+            </a:pPr>
+            <a:r>
+              <a:rPr lang="en-US" sz="1220" dirty="0">
                 <a:solidFill>
                   <a:srgbClr val="17364A"/>
                 </a:solidFill>
@@ -6377,13 +6464,16 @@
                 <a:ea typeface="Aptos" pitchFamily="34" charset="-122"/>
                 <a:cs typeface="Aptos" pitchFamily="34" charset="-120"/>
               </a:rPr>
-              <a:t>A tool that drafts internal training text may require lighter review than a tool that.</a:t>
-            </a:r>
-            <a:endParaRPr lang="en-US" sz="1380" dirty="0"/>
-          </a:p>
-          <a:p>
-            <a:r>
-              <a:rPr lang="en-US" sz="1380" dirty="0">
+              <a:t>A tool that drafts internal training text may require lighter.</a:t>
+            </a:r>
+            <a:endParaRPr lang="en-US" sz="1220" dirty="0"/>
+          </a:p>
+          <a:p>
+            <a:pPr indent="0" marL="0">
+              <a:buNone/>
+            </a:pPr>
+            <a:r>
+              <a:rPr lang="en-US" sz="1220" dirty="0">
                 <a:solidFill>
                   <a:srgbClr val="17364A"/>
                 </a:solidFill>
@@ -6391,9 +6481,9 @@
                 <a:ea typeface="Aptos" pitchFamily="34" charset="-122"/>
                 <a:cs typeface="Aptos" pitchFamily="34" charset="-120"/>
               </a:rPr>
-              <a:t>The module should be applied during readiness assessment, procurement, implementation.</a:t>
-            </a:r>
-            <a:endParaRPr lang="en-US" sz="1380" dirty="0"/>
+              <a:t>The module should be applied during readiness assessment,.</a:t>
+            </a:r>
+            <a:endParaRPr lang="en-US" sz="1220" dirty="0"/>
           </a:p>
         </p:txBody>
       </p:sp>
@@ -6471,17 +6561,17 @@
         </p:nvSpPr>
         <p:spPr>
           <a:xfrm>
-            <a:off x="7799832" y="5001768"/>
-            <a:ext cx="3145536" cy="502920"/>
-          </a:xfrm>
-          <a:prstGeom prst="rect">
-            <a:avLst/>
-          </a:prstGeom>
-          <a:noFill/>
-          <a:ln/>
-        </p:spPr>
-        <p:txBody>
-          <a:bodyPr wrap="square" lIns="0" tIns="0" rIns="0" bIns="0" rtlCol="0" anchor="t">
+            <a:off x="7799832" y="4974336"/>
+            <a:ext cx="3145536" cy="576072"/>
+          </a:xfrm>
+          <a:prstGeom prst="rect">
+            <a:avLst/>
+          </a:prstGeom>
+          <a:noFill/>
+          <a:ln/>
+        </p:spPr>
+        <p:txBody>
+          <a:bodyPr wrap="square" lIns="254" tIns="254" rIns="254" bIns="254" rtlCol="0" anchor="t">
             <a:normAutofit/>
           </a:bodyPr>
           <a:lstStyle/>
@@ -6490,7 +6580,7 @@
               <a:buNone/>
             </a:pPr>
             <a:r>
-              <a:rPr lang="en-US" sz="1550" dirty="0">
+              <a:rPr lang="en-US" sz="1320" dirty="0">
                 <a:solidFill>
                   <a:srgbClr val="17364A"/>
                 </a:solidFill>
@@ -6498,9 +6588,9 @@
                 <a:ea typeface="Aptos" pitchFamily="34" charset="-122"/>
                 <a:cs typeface="Aptos" pitchFamily="34" charset="-120"/>
               </a:rPr>
-              <a:t>Use the concept to clarify workflow changes, dependencies, staffing, procurement requirements, training needs, and implementation checkpoints.</a:t>
-            </a:r>
-            <a:endParaRPr lang="en-US" sz="1550" dirty="0"/>
+              <a:t>Use the concept to clarify workflow changes, dependencies, staffing, procurement requirements, training needs, and.</a:t>
+            </a:r>
+            <a:endParaRPr lang="en-US" sz="1320" dirty="0"/>
           </a:p>
         </p:txBody>
       </p:sp>
@@ -6801,49 +6891,58 @@
           <a:ln/>
         </p:spPr>
         <p:txBody>
-          <a:bodyPr wrap="square" lIns="635" tIns="635" rIns="635" bIns="635" rtlCol="0" anchor="t">
+          <a:bodyPr wrap="square" lIns="1016" tIns="1016" rIns="1016" bIns="1016" rtlCol="0" anchor="t">
             <a:normAutofit/>
           </a:bodyPr>
           <a:lstStyle/>
           <a:p>
+            <a:pPr indent="0" marL="0">
+              <a:buNone/>
+            </a:pPr>
             <a:r>
               <a:rPr lang="en-US" sz="2100" dirty="0">
                 <a:solidFill>
-                  <a:srgbClr val="17364A"/>
-                </a:solidFill>
-                <a:latin typeface="Aptos" pitchFamily="34" charset="0"/>
-                <a:ea typeface="Aptos" pitchFamily="34" charset="-122"/>
-                <a:cs typeface="Aptos" pitchFamily="34" charset="-120"/>
-              </a:rPr>
-              <a:t>Where does this topic appear in one current or proposed AI workflow in your agency?</a:t>
+                  <a:srgbClr val="003A63"/>
+                </a:solidFill>
+                <a:latin typeface="Aptos" pitchFamily="34" charset="0"/>
+                <a:ea typeface="Aptos" pitchFamily="34" charset="-122"/>
+                <a:cs typeface="Aptos" pitchFamily="34" charset="-120"/>
+              </a:rPr>
+              <a:t>• Where does this topic appear in one current or proposed AI workflow in your agency?</a:t>
             </a:r>
             <a:endParaRPr lang="en-US" sz="2100" dirty="0"/>
           </a:p>
           <a:p>
+            <a:pPr indent="0" marL="0">
+              <a:buNone/>
+            </a:pPr>
             <a:r>
               <a:rPr lang="en-US" sz="2100" dirty="0">
                 <a:solidFill>
-                  <a:srgbClr val="17364A"/>
-                </a:solidFill>
-                <a:latin typeface="Aptos" pitchFamily="34" charset="0"/>
-                <a:ea typeface="Aptos" pitchFamily="34" charset="-122"/>
-                <a:cs typeface="Aptos" pitchFamily="34" charset="-120"/>
-              </a:rPr>
-              <a:t>What decisions, data sources, users, or partners would be affected if this area is poorly designed?</a:t>
+                  <a:srgbClr val="003A63"/>
+                </a:solidFill>
+                <a:latin typeface="Aptos" pitchFamily="34" charset="0"/>
+                <a:ea typeface="Aptos" pitchFamily="34" charset="-122"/>
+                <a:cs typeface="Aptos" pitchFamily="34" charset="-120"/>
+              </a:rPr>
+              <a:t>• What decisions, data sources, users, or partners would be affected if this area is poorly.</a:t>
             </a:r>
             <a:endParaRPr lang="en-US" sz="2100" dirty="0"/>
           </a:p>
           <a:p>
+            <a:pPr indent="0" marL="0">
+              <a:buNone/>
+            </a:pPr>
             <a:r>
               <a:rPr lang="en-US" sz="2100" dirty="0">
                 <a:solidFill>
-                  <a:srgbClr val="17364A"/>
-                </a:solidFill>
-                <a:latin typeface="Aptos" pitchFamily="34" charset="0"/>
-                <a:ea typeface="Aptos" pitchFamily="34" charset="-122"/>
-                <a:cs typeface="Aptos" pitchFamily="34" charset="-120"/>
-              </a:rPr>
-              <a:t>What evidence would governance reviewers need before approving the workflow?</a:t>
+                  <a:srgbClr val="003A63"/>
+                </a:solidFill>
+                <a:latin typeface="Aptos" pitchFamily="34" charset="0"/>
+                <a:ea typeface="Aptos" pitchFamily="34" charset="-122"/>
+                <a:cs typeface="Aptos" pitchFamily="34" charset="-120"/>
+              </a:rPr>
+              <a:t>• What evidence would governance reviewers need before approving the workflow?</a:t>
             </a:r>
             <a:endParaRPr lang="en-US" sz="2100" dirty="0"/>
           </a:p>
@@ -6923,17 +7022,17 @@
         </p:nvSpPr>
         <p:spPr>
           <a:xfrm>
-            <a:off x="7799832" y="1828800"/>
-            <a:ext cx="3145536" cy="685800"/>
-          </a:xfrm>
-          <a:prstGeom prst="rect">
-            <a:avLst/>
-          </a:prstGeom>
-          <a:noFill/>
-          <a:ln/>
-        </p:spPr>
-        <p:txBody>
-          <a:bodyPr wrap="square" lIns="0" tIns="0" rIns="0" bIns="0" rtlCol="0" anchor="t">
+            <a:off x="7799832" y="1801368"/>
+            <a:ext cx="3145536" cy="758952"/>
+          </a:xfrm>
+          <a:prstGeom prst="rect">
+            <a:avLst/>
+          </a:prstGeom>
+          <a:noFill/>
+          <a:ln/>
+        </p:spPr>
+        <p:txBody>
+          <a:bodyPr wrap="square" lIns="254" tIns="254" rIns="254" bIns="254" rtlCol="0" anchor="t">
             <a:normAutofit/>
           </a:bodyPr>
           <a:lstStyle/>
@@ -6942,7 +7041,7 @@
               <a:buNone/>
             </a:pPr>
             <a:r>
-              <a:rPr lang="en-US" sz="1550" dirty="0">
+              <a:rPr lang="en-US" sz="1320" dirty="0">
                 <a:solidFill>
                   <a:srgbClr val="17364A"/>
                 </a:solidFill>
@@ -6952,7 +7051,7 @@
               </a:rPr>
               <a:t>Where does this topic appear in one current or proposed AI workflow in your agency?</a:t>
             </a:r>
-            <a:endParaRPr lang="en-US" sz="1550" dirty="0"/>
+            <a:endParaRPr lang="en-US" sz="1320" dirty="0"/>
           </a:p>
         </p:txBody>
       </p:sp>
@@ -7040,13 +7139,16 @@
           <a:ln/>
         </p:spPr>
         <p:txBody>
-          <a:bodyPr wrap="square" lIns="254" tIns="254" rIns="254" bIns="254" rtlCol="0" anchor="t">
+          <a:bodyPr wrap="square" lIns="508" tIns="508" rIns="508" bIns="508" rtlCol="0" anchor="t">
             <a:normAutofit/>
           </a:bodyPr>
           <a:lstStyle/>
           <a:p>
-            <a:r>
-              <a:rPr lang="en-US" sz="1380" dirty="0">
+            <a:pPr indent="0" marL="0">
+              <a:buNone/>
+            </a:pPr>
+            <a:r>
+              <a:rPr lang="en-US" sz="1220" dirty="0">
                 <a:solidFill>
                   <a:srgbClr val="17364A"/>
                 </a:solidFill>
@@ -7054,13 +7156,16 @@
                 <a:ea typeface="Aptos" pitchFamily="34" charset="-122"/>
                 <a:cs typeface="Aptos" pitchFamily="34" charset="-120"/>
               </a:rPr>
-              <a:t>Where does this topic appear in one current or proposed AI workflow in your agency?</a:t>
-            </a:r>
-            <a:endParaRPr lang="en-US" sz="1380" dirty="0"/>
-          </a:p>
-          <a:p>
-            <a:r>
-              <a:rPr lang="en-US" sz="1380" dirty="0">
+              <a:t>Where does this topic appear in one current or proposed AI.</a:t>
+            </a:r>
+            <a:endParaRPr lang="en-US" sz="1220" dirty="0"/>
+          </a:p>
+          <a:p>
+            <a:pPr indent="0" marL="0">
+              <a:buNone/>
+            </a:pPr>
+            <a:r>
+              <a:rPr lang="en-US" sz="1220" dirty="0">
                 <a:solidFill>
                   <a:srgbClr val="17364A"/>
                 </a:solidFill>
@@ -7068,13 +7173,16 @@
                 <a:ea typeface="Aptos" pitchFamily="34" charset="-122"/>
                 <a:cs typeface="Aptos" pitchFamily="34" charset="-120"/>
               </a:rPr>
-              <a:t>What decisions, data sources, users, or partners would be affected if this area is poorly.</a:t>
-            </a:r>
-            <a:endParaRPr lang="en-US" sz="1380" dirty="0"/>
-          </a:p>
-          <a:p>
-            <a:r>
-              <a:rPr lang="en-US" sz="1380" dirty="0">
+              <a:t>What decisions, data sources, users, or partners would be affected.</a:t>
+            </a:r>
+            <a:endParaRPr lang="en-US" sz="1220" dirty="0"/>
+          </a:p>
+          <a:p>
+            <a:pPr indent="0" marL="0">
+              <a:buNone/>
+            </a:pPr>
+            <a:r>
+              <a:rPr lang="en-US" sz="1220" dirty="0">
                 <a:solidFill>
                   <a:srgbClr val="17364A"/>
                 </a:solidFill>
@@ -7082,9 +7190,9 @@
                 <a:ea typeface="Aptos" pitchFamily="34" charset="-122"/>
                 <a:cs typeface="Aptos" pitchFamily="34" charset="-120"/>
               </a:rPr>
-              <a:t>What evidence would governance reviewers need before approving the workflow?</a:t>
-            </a:r>
-            <a:endParaRPr lang="en-US" sz="1380" dirty="0"/>
+              <a:t>What evidence would governance reviewers need before approving the.</a:t>
+            </a:r>
+            <a:endParaRPr lang="en-US" sz="1220" dirty="0"/>
           </a:p>
         </p:txBody>
       </p:sp>
@@ -7162,17 +7270,17 @@
         </p:nvSpPr>
         <p:spPr>
           <a:xfrm>
-            <a:off x="7799832" y="5001768"/>
-            <a:ext cx="3145536" cy="502920"/>
-          </a:xfrm>
-          <a:prstGeom prst="rect">
-            <a:avLst/>
-          </a:prstGeom>
-          <a:noFill/>
-          <a:ln/>
-        </p:spPr>
-        <p:txBody>
-          <a:bodyPr wrap="square" lIns="0" tIns="0" rIns="0" bIns="0" rtlCol="0" anchor="t">
+            <a:off x="7799832" y="4974336"/>
+            <a:ext cx="3145536" cy="576072"/>
+          </a:xfrm>
+          <a:prstGeom prst="rect">
+            <a:avLst/>
+          </a:prstGeom>
+          <a:noFill/>
+          <a:ln/>
+        </p:spPr>
+        <p:txBody>
+          <a:bodyPr wrap="square" lIns="254" tIns="254" rIns="254" bIns="254" rtlCol="0" anchor="t">
             <a:normAutofit/>
           </a:bodyPr>
           <a:lstStyle/>
@@ -7181,7 +7289,7 @@
               <a:buNone/>
             </a:pPr>
             <a:r>
-              <a:rPr lang="en-US" sz="1550" dirty="0">
+              <a:rPr lang="en-US" sz="1320" dirty="0">
                 <a:solidFill>
                   <a:srgbClr val="17364A"/>
                 </a:solidFill>
@@ -7189,9 +7297,9 @@
                 <a:ea typeface="Aptos" pitchFamily="34" charset="-122"/>
                 <a:cs typeface="Aptos" pitchFamily="34" charset="-120"/>
               </a:rPr>
-              <a:t>Connect the concept to public health purpose, responsible use, required safeguards, documentation, and the next action a department should take.</a:t>
-            </a:r>
-            <a:endParaRPr lang="en-US" sz="1550" dirty="0"/>
+              <a:t>Connect the concept to public health purpose, responsible use, required safeguards, documentation, and the next action a.</a:t>
+            </a:r>
+            <a:endParaRPr lang="en-US" sz="1320" dirty="0"/>
           </a:p>
         </p:txBody>
       </p:sp>
@@ -7492,35 +7600,41 @@
           <a:ln/>
         </p:spPr>
         <p:txBody>
-          <a:bodyPr wrap="square" lIns="635" tIns="635" rIns="635" bIns="635" rtlCol="0" anchor="t">
+          <a:bodyPr wrap="square" lIns="1016" tIns="1016" rIns="1016" bIns="1016" rtlCol="0" anchor="t">
             <a:normAutofit/>
           </a:bodyPr>
           <a:lstStyle/>
           <a:p>
+            <a:pPr indent="0" marL="0">
+              <a:buNone/>
+            </a:pPr>
             <a:r>
               <a:rPr lang="en-US" sz="2100" dirty="0">
                 <a:solidFill>
-                  <a:srgbClr val="17364A"/>
-                </a:solidFill>
-                <a:latin typeface="Aptos" pitchFamily="34" charset="0"/>
-                <a:ea typeface="Aptos" pitchFamily="34" charset="-122"/>
-                <a:cs typeface="Aptos" pitchFamily="34" charset="-120"/>
-              </a:rPr>
-              <a:t>Which safeguards should be required before pilot testing?</a:t>
+                  <a:srgbClr val="003A63"/>
+                </a:solidFill>
+                <a:latin typeface="Aptos" pitchFamily="34" charset="0"/>
+                <a:ea typeface="Aptos" pitchFamily="34" charset="-122"/>
+                <a:cs typeface="Aptos" pitchFamily="34" charset="-120"/>
+              </a:rPr>
+              <a:t>• Which safeguards should be required before pilot testing?</a:t>
             </a:r>
             <a:endParaRPr lang="en-US" sz="2100" dirty="0"/>
           </a:p>
           <a:p>
+            <a:pPr indent="0" marL="0">
+              <a:buNone/>
+            </a:pPr>
             <a:r>
               <a:rPr lang="en-US" sz="2100" dirty="0">
                 <a:solidFill>
-                  <a:srgbClr val="17364A"/>
-                </a:solidFill>
-                <a:latin typeface="Aptos" pitchFamily="34" charset="0"/>
-                <a:ea typeface="Aptos" pitchFamily="34" charset="-122"/>
-                <a:cs typeface="Aptos" pitchFamily="34" charset="-120"/>
-              </a:rPr>
-              <a:t>Who owns ongoing monitoring and review?</a:t>
+                  <a:srgbClr val="003A63"/>
+                </a:solidFill>
+                <a:latin typeface="Aptos" pitchFamily="34" charset="0"/>
+                <a:ea typeface="Aptos" pitchFamily="34" charset="-122"/>
+                <a:cs typeface="Aptos" pitchFamily="34" charset="-120"/>
+              </a:rPr>
+              <a:t>• Who owns ongoing monitoring and review?</a:t>
             </a:r>
             <a:endParaRPr lang="en-US" sz="2100" dirty="0"/>
           </a:p>
@@ -7600,17 +7714,17 @@
         </p:nvSpPr>
         <p:spPr>
           <a:xfrm>
-            <a:off x="7799832" y="1828800"/>
-            <a:ext cx="3145536" cy="685800"/>
-          </a:xfrm>
-          <a:prstGeom prst="rect">
-            <a:avLst/>
-          </a:prstGeom>
-          <a:noFill/>
-          <a:ln/>
-        </p:spPr>
-        <p:txBody>
-          <a:bodyPr wrap="square" lIns="0" tIns="0" rIns="0" bIns="0" rtlCol="0" anchor="t">
+            <a:off x="7799832" y="1801368"/>
+            <a:ext cx="3145536" cy="758952"/>
+          </a:xfrm>
+          <a:prstGeom prst="rect">
+            <a:avLst/>
+          </a:prstGeom>
+          <a:noFill/>
+          <a:ln/>
+        </p:spPr>
+        <p:txBody>
+          <a:bodyPr wrap="square" lIns="254" tIns="254" rIns="254" bIns="254" rtlCol="0" anchor="t">
             <a:normAutofit/>
           </a:bodyPr>
           <a:lstStyle/>
@@ -7619,7 +7733,7 @@
               <a:buNone/>
             </a:pPr>
             <a:r>
-              <a:rPr lang="en-US" sz="1550" dirty="0">
+              <a:rPr lang="en-US" sz="1320" dirty="0">
                 <a:solidFill>
                   <a:srgbClr val="17364A"/>
                 </a:solidFill>
@@ -7629,7 +7743,7 @@
               </a:rPr>
               <a:t>Which safeguards should be required before pilot testing?</a:t>
             </a:r>
-            <a:endParaRPr lang="en-US" sz="1550" dirty="0"/>
+            <a:endParaRPr lang="en-US" sz="1320" dirty="0"/>
           </a:p>
         </p:txBody>
       </p:sp>
@@ -7717,13 +7831,16 @@
           <a:ln/>
         </p:spPr>
         <p:txBody>
-          <a:bodyPr wrap="square" lIns="254" tIns="254" rIns="254" bIns="254" rtlCol="0" anchor="t">
+          <a:bodyPr wrap="square" lIns="508" tIns="508" rIns="508" bIns="508" rtlCol="0" anchor="t">
             <a:normAutofit/>
           </a:bodyPr>
           <a:lstStyle/>
           <a:p>
-            <a:r>
-              <a:rPr lang="en-US" sz="1380" dirty="0">
+            <a:pPr indent="0" marL="0">
+              <a:buNone/>
+            </a:pPr>
+            <a:r>
+              <a:rPr lang="en-US" sz="1220" dirty="0">
                 <a:solidFill>
                   <a:srgbClr val="17364A"/>
                 </a:solidFill>
@@ -7733,11 +7850,14 @@
               </a:rPr>
               <a:t>Which safeguards should be required before pilot testing?</a:t>
             </a:r>
-            <a:endParaRPr lang="en-US" sz="1380" dirty="0"/>
-          </a:p>
-          <a:p>
-            <a:r>
-              <a:rPr lang="en-US" sz="1380" dirty="0">
+            <a:endParaRPr lang="en-US" sz="1220" dirty="0"/>
+          </a:p>
+          <a:p>
+            <a:pPr indent="0" marL="0">
+              <a:buNone/>
+            </a:pPr>
+            <a:r>
+              <a:rPr lang="en-US" sz="1220" dirty="0">
                 <a:solidFill>
                   <a:srgbClr val="17364A"/>
                 </a:solidFill>
@@ -7747,7 +7867,7 @@
               </a:rPr>
               <a:t>Who owns ongoing monitoring and review?</a:t>
             </a:r>
-            <a:endParaRPr lang="en-US" sz="1380" dirty="0"/>
+            <a:endParaRPr lang="en-US" sz="1220" dirty="0"/>
           </a:p>
         </p:txBody>
       </p:sp>
@@ -7825,17 +7945,17 @@
         </p:nvSpPr>
         <p:spPr>
           <a:xfrm>
-            <a:off x="7799832" y="5001768"/>
-            <a:ext cx="3145536" cy="502920"/>
-          </a:xfrm>
-          <a:prstGeom prst="rect">
-            <a:avLst/>
-          </a:prstGeom>
-          <a:noFill/>
-          <a:ln/>
-        </p:spPr>
-        <p:txBody>
-          <a:bodyPr wrap="square" lIns="0" tIns="0" rIns="0" bIns="0" rtlCol="0" anchor="t">
+            <a:off x="7799832" y="4974336"/>
+            <a:ext cx="3145536" cy="576072"/>
+          </a:xfrm>
+          <a:prstGeom prst="rect">
+            <a:avLst/>
+          </a:prstGeom>
+          <a:noFill/>
+          <a:ln/>
+        </p:spPr>
+        <p:txBody>
+          <a:bodyPr wrap="square" lIns="254" tIns="254" rIns="254" bIns="254" rtlCol="0" anchor="t">
             <a:normAutofit/>
           </a:bodyPr>
           <a:lstStyle/>
@@ -7844,7 +7964,7 @@
               <a:buNone/>
             </a:pPr>
             <a:r>
-              <a:rPr lang="en-US" sz="1550" dirty="0">
+              <a:rPr lang="en-US" sz="1320" dirty="0">
                 <a:solidFill>
                   <a:srgbClr val="17364A"/>
                 </a:solidFill>
@@ -7852,9 +7972,9 @@
                 <a:ea typeface="Aptos" pitchFamily="34" charset="-122"/>
                 <a:cs typeface="Aptos" pitchFamily="34" charset="-120"/>
               </a:rPr>
-              <a:t>Connect the concept to public health purpose, responsible use, required safeguards, documentation, and the next action a department should take.</a:t>
-            </a:r>
-            <a:endParaRPr lang="en-US" sz="1550" dirty="0"/>
+              <a:t>Connect the concept to public health purpose, responsible use, required safeguards, documentation, and the next action a.</a:t>
+            </a:r>
+            <a:endParaRPr lang="en-US" sz="1320" dirty="0"/>
           </a:p>
         </p:txBody>
       </p:sp>
@@ -8155,49 +8275,58 @@
           <a:ln/>
         </p:spPr>
         <p:txBody>
-          <a:bodyPr wrap="square" lIns="635" tIns="635" rIns="635" bIns="635" rtlCol="0" anchor="t">
+          <a:bodyPr wrap="square" lIns="1016" tIns="1016" rIns="1016" bIns="1016" rtlCol="0" anchor="t">
             <a:normAutofit/>
           </a:bodyPr>
           <a:lstStyle/>
           <a:p>
+            <a:pPr indent="0" marL="0">
+              <a:buNone/>
+            </a:pPr>
             <a:r>
               <a:rPr lang="en-US" sz="2100" dirty="0">
                 <a:solidFill>
-                  <a:srgbClr val="17364A"/>
-                </a:solidFill>
-                <a:latin typeface="Aptos" pitchFamily="34" charset="0"/>
-                <a:ea typeface="Aptos" pitchFamily="34" charset="-122"/>
-                <a:cs typeface="Aptos" pitchFamily="34" charset="-120"/>
-              </a:rPr>
-              <a:t>Create a secure deployment readiness worksheet for one real or realistic public health AI workflow.</a:t>
+                  <a:srgbClr val="003A63"/>
+                </a:solidFill>
+                <a:latin typeface="Aptos" pitchFamily="34" charset="0"/>
+                <a:ea typeface="Aptos" pitchFamily="34" charset="-122"/>
+                <a:cs typeface="Aptos" pitchFamily="34" charset="-120"/>
+              </a:rPr>
+              <a:t>• Create a secure deployment readiness worksheet for one real or realistic public health AI.</a:t>
             </a:r>
             <a:endParaRPr lang="en-US" sz="2100" dirty="0"/>
           </a:p>
           <a:p>
+            <a:pPr indent="0" marL="0">
+              <a:buNone/>
+            </a:pPr>
             <a:r>
               <a:rPr lang="en-US" sz="2100" dirty="0">
                 <a:solidFill>
-                  <a:srgbClr val="17364A"/>
-                </a:solidFill>
-                <a:latin typeface="Aptos" pitchFamily="34" charset="0"/>
-                <a:ea typeface="Aptos" pitchFamily="34" charset="-122"/>
-                <a:cs typeface="Aptos" pitchFamily="34" charset="-120"/>
-              </a:rPr>
-              <a:t>The artifact should describe the use case, affected users, data sources, system dependencies, risks,.</a:t>
+                  <a:srgbClr val="003A63"/>
+                </a:solidFill>
+                <a:latin typeface="Aptos" pitchFamily="34" charset="0"/>
+                <a:ea typeface="Aptos" pitchFamily="34" charset="-122"/>
+                <a:cs typeface="Aptos" pitchFamily="34" charset="-120"/>
+              </a:rPr>
+              <a:t>• The artifact should describe the use case, affected users, data sources, system dependencies,.</a:t>
             </a:r>
             <a:endParaRPr lang="en-US" sz="2100" dirty="0"/>
           </a:p>
           <a:p>
+            <a:pPr indent="0" marL="0">
+              <a:buNone/>
+            </a:pPr>
             <a:r>
               <a:rPr lang="en-US" sz="2100" dirty="0">
                 <a:solidFill>
-                  <a:srgbClr val="17364A"/>
-                </a:solidFill>
-                <a:latin typeface="Aptos" pitchFamily="34" charset="0"/>
-                <a:ea typeface="Aptos" pitchFamily="34" charset="-122"/>
-                <a:cs typeface="Aptos" pitchFamily="34" charset="-120"/>
-              </a:rPr>
-              <a:t>The exercise should produce a work product that could be used in a governance meeting, procurement.</a:t>
+                  <a:srgbClr val="003A63"/>
+                </a:solidFill>
+                <a:latin typeface="Aptos" pitchFamily="34" charset="0"/>
+                <a:ea typeface="Aptos" pitchFamily="34" charset="-122"/>
+                <a:cs typeface="Aptos" pitchFamily="34" charset="-120"/>
+              </a:rPr>
+              <a:t>• The exercise should produce a work product that could be used in a governance meeting,.</a:t>
             </a:r>
             <a:endParaRPr lang="en-US" sz="2100" dirty="0"/>
           </a:p>
@@ -8277,17 +8406,17 @@
         </p:nvSpPr>
         <p:spPr>
           <a:xfrm>
-            <a:off x="7799832" y="1828800"/>
-            <a:ext cx="3145536" cy="685800"/>
-          </a:xfrm>
-          <a:prstGeom prst="rect">
-            <a:avLst/>
-          </a:prstGeom>
-          <a:noFill/>
-          <a:ln/>
-        </p:spPr>
-        <p:txBody>
-          <a:bodyPr wrap="square" lIns="0" tIns="0" rIns="0" bIns="0" rtlCol="0" anchor="t">
+            <a:off x="7799832" y="1801368"/>
+            <a:ext cx="3145536" cy="758952"/>
+          </a:xfrm>
+          <a:prstGeom prst="rect">
+            <a:avLst/>
+          </a:prstGeom>
+          <a:noFill/>
+          <a:ln/>
+        </p:spPr>
+        <p:txBody>
+          <a:bodyPr wrap="square" lIns="254" tIns="254" rIns="254" bIns="254" rtlCol="0" anchor="t">
             <a:normAutofit/>
           </a:bodyPr>
           <a:lstStyle/>
@@ -8296,7 +8425,7 @@
               <a:buNone/>
             </a:pPr>
             <a:r>
-              <a:rPr lang="en-US" sz="1550" dirty="0">
+              <a:rPr lang="en-US" sz="1320" dirty="0">
                 <a:solidFill>
                   <a:srgbClr val="17364A"/>
                 </a:solidFill>
@@ -8306,7 +8435,7 @@
               </a:rPr>
               <a:t>Create a secure deployment readiness worksheet for one real or realistic public health AI workflow.</a:t>
             </a:r>
-            <a:endParaRPr lang="en-US" sz="1550" dirty="0"/>
+            <a:endParaRPr lang="en-US" sz="1320" dirty="0"/>
           </a:p>
         </p:txBody>
       </p:sp>
@@ -8394,13 +8523,16 @@
           <a:ln/>
         </p:spPr>
         <p:txBody>
-          <a:bodyPr wrap="square" lIns="254" tIns="254" rIns="254" bIns="254" rtlCol="0" anchor="t">
+          <a:bodyPr wrap="square" lIns="508" tIns="508" rIns="508" bIns="508" rtlCol="0" anchor="t">
             <a:normAutofit/>
           </a:bodyPr>
           <a:lstStyle/>
           <a:p>
-            <a:r>
-              <a:rPr lang="en-US" sz="1380" dirty="0">
+            <a:pPr indent="0" marL="0">
+              <a:buNone/>
+            </a:pPr>
+            <a:r>
+              <a:rPr lang="en-US" sz="1220" dirty="0">
                 <a:solidFill>
                   <a:srgbClr val="17364A"/>
                 </a:solidFill>
@@ -8408,13 +8540,16 @@
                 <a:ea typeface="Aptos" pitchFamily="34" charset="-122"/>
                 <a:cs typeface="Aptos" pitchFamily="34" charset="-120"/>
               </a:rPr>
-              <a:t>The artifact should describe the use case, affected users, data sources, system.</a:t>
-            </a:r>
-            <a:endParaRPr lang="en-US" sz="1380" dirty="0"/>
-          </a:p>
-          <a:p>
-            <a:r>
-              <a:rPr lang="en-US" sz="1380" dirty="0">
+              <a:t>The artifact should describe the use case, affected users, data.</a:t>
+            </a:r>
+            <a:endParaRPr lang="en-US" sz="1220" dirty="0"/>
+          </a:p>
+          <a:p>
+            <a:pPr indent="0" marL="0">
+              <a:buNone/>
+            </a:pPr>
+            <a:r>
+              <a:rPr lang="en-US" sz="1220" dirty="0">
                 <a:solidFill>
                   <a:srgbClr val="17364A"/>
                 </a:solidFill>
@@ -8422,13 +8557,16 @@
                 <a:ea typeface="Aptos" pitchFamily="34" charset="-122"/>
                 <a:cs typeface="Aptos" pitchFamily="34" charset="-120"/>
               </a:rPr>
-              <a:t>The exercise should produce a work product that could be used in a governance meeting,.</a:t>
-            </a:r>
-            <a:endParaRPr lang="en-US" sz="1380" dirty="0"/>
-          </a:p>
-          <a:p>
-            <a:r>
-              <a:rPr lang="en-US" sz="1380" dirty="0">
+              <a:t>The exercise should produce a work product that could be used in a.</a:t>
+            </a:r>
+            <a:endParaRPr lang="en-US" sz="1220" dirty="0"/>
+          </a:p>
+          <a:p>
+            <a:pPr indent="0" marL="0">
+              <a:buNone/>
+            </a:pPr>
+            <a:r>
+              <a:rPr lang="en-US" sz="1220" dirty="0">
                 <a:solidFill>
                   <a:srgbClr val="17364A"/>
                 </a:solidFill>
@@ -8436,9 +8574,9 @@
                 <a:ea typeface="Aptos" pitchFamily="34" charset="-122"/>
                 <a:cs typeface="Aptos" pitchFamily="34" charset="-120"/>
               </a:rPr>
-              <a:t>Learners should document assumptions and identify which staff or partners need to be.</a:t>
-            </a:r>
-            <a:endParaRPr lang="en-US" sz="1380" dirty="0"/>
+              <a:t>Learners should document assumptions and identify which staff or.</a:t>
+            </a:r>
+            <a:endParaRPr lang="en-US" sz="1220" dirty="0"/>
           </a:p>
         </p:txBody>
       </p:sp>
@@ -8516,17 +8654,17 @@
         </p:nvSpPr>
         <p:spPr>
           <a:xfrm>
-            <a:off x="7799832" y="5001768"/>
-            <a:ext cx="3145536" cy="502920"/>
-          </a:xfrm>
-          <a:prstGeom prst="rect">
-            <a:avLst/>
-          </a:prstGeom>
-          <a:noFill/>
-          <a:ln/>
-        </p:spPr>
-        <p:txBody>
-          <a:bodyPr wrap="square" lIns="0" tIns="0" rIns="0" bIns="0" rtlCol="0" anchor="t">
+            <a:off x="7799832" y="4974336"/>
+            <a:ext cx="3145536" cy="576072"/>
+          </a:xfrm>
+          <a:prstGeom prst="rect">
+            <a:avLst/>
+          </a:prstGeom>
+          <a:noFill/>
+          <a:ln/>
+        </p:spPr>
+        <p:txBody>
+          <a:bodyPr wrap="square" lIns="254" tIns="254" rIns="254" bIns="254" rtlCol="0" anchor="t">
             <a:normAutofit/>
           </a:bodyPr>
           <a:lstStyle/>
@@ -8535,7 +8673,7 @@
               <a:buNone/>
             </a:pPr>
             <a:r>
-              <a:rPr lang="en-US" sz="1550" dirty="0">
+              <a:rPr lang="en-US" sz="1320" dirty="0">
                 <a:solidFill>
                   <a:srgbClr val="17364A"/>
                 </a:solidFill>
@@ -8543,9 +8681,9 @@
                 <a:ea typeface="Aptos" pitchFamily="34" charset="-122"/>
                 <a:cs typeface="Aptos" pitchFamily="34" charset="-120"/>
               </a:rPr>
-              <a:t>Use the assignment to test whether you can explain the concept, apply it to a realistic public health situation, and identify what would need review before the work moves forward.</a:t>
-            </a:r>
-            <a:endParaRPr lang="en-US" sz="1550" dirty="0"/>
+              <a:t>Use the assignment to test whether you can explain the concept, apply it to a realistic public health situation, and.</a:t>
+            </a:r>
+            <a:endParaRPr lang="en-US" sz="1320" dirty="0"/>
           </a:p>
         </p:txBody>
       </p:sp>
@@ -8846,35 +8984,41 @@
           <a:ln/>
         </p:spPr>
         <p:txBody>
-          <a:bodyPr wrap="square" lIns="635" tIns="635" rIns="635" bIns="635" rtlCol="0" anchor="t">
+          <a:bodyPr wrap="square" lIns="1016" tIns="1016" rIns="1016" bIns="1016" rtlCol="0" anchor="t">
             <a:normAutofit/>
           </a:bodyPr>
           <a:lstStyle/>
           <a:p>
+            <a:pPr indent="0" marL="0">
+              <a:buNone/>
+            </a:pPr>
             <a:r>
               <a:rPr lang="en-US" sz="2100" dirty="0">
                 <a:solidFill>
-                  <a:srgbClr val="17364A"/>
-                </a:solidFill>
-                <a:latin typeface="Aptos" pitchFamily="34" charset="0"/>
-                <a:ea typeface="Aptos" pitchFamily="34" charset="-122"/>
-                <a:cs typeface="Aptos" pitchFamily="34" charset="-120"/>
-              </a:rPr>
-              <a:t>The expected artifact is a completed secure deployment readiness worksheet.</a:t>
+                  <a:srgbClr val="003A63"/>
+                </a:solidFill>
+                <a:latin typeface="Aptos" pitchFamily="34" charset="0"/>
+                <a:ea typeface="Aptos" pitchFamily="34" charset="-122"/>
+                <a:cs typeface="Aptos" pitchFamily="34" charset="-120"/>
+              </a:rPr>
+              <a:t>• The expected artifact is a completed secure deployment readiness worksheet.</a:t>
             </a:r>
             <a:endParaRPr lang="en-US" sz="2100" dirty="0"/>
           </a:p>
           <a:p>
+            <a:pPr indent="0" marL="0">
+              <a:buNone/>
+            </a:pPr>
             <a:r>
               <a:rPr lang="en-US" sz="2100" dirty="0">
                 <a:solidFill>
-                  <a:srgbClr val="17364A"/>
-                </a:solidFill>
-                <a:latin typeface="Aptos" pitchFamily="34" charset="0"/>
-                <a:ea typeface="Aptos" pitchFamily="34" charset="-122"/>
-                <a:cs typeface="Aptos" pitchFamily="34" charset="-120"/>
-              </a:rPr>
-              <a:t>It should be specific to a public health workflow and should include technical dependencies, governance.</a:t>
+                  <a:srgbClr val="003A63"/>
+                </a:solidFill>
+                <a:latin typeface="Aptos" pitchFamily="34" charset="0"/>
+                <a:ea typeface="Aptos" pitchFamily="34" charset="-122"/>
+                <a:cs typeface="Aptos" pitchFamily="34" charset="-120"/>
+              </a:rPr>
+              <a:t>• It should be specific to a public health workflow and should include technical dependencies,.</a:t>
             </a:r>
             <a:endParaRPr lang="en-US" sz="2100" dirty="0"/>
           </a:p>
@@ -8954,17 +9098,17 @@
         </p:nvSpPr>
         <p:spPr>
           <a:xfrm>
-            <a:off x="7799832" y="1828800"/>
-            <a:ext cx="3145536" cy="685800"/>
-          </a:xfrm>
-          <a:prstGeom prst="rect">
-            <a:avLst/>
-          </a:prstGeom>
-          <a:noFill/>
-          <a:ln/>
-        </p:spPr>
-        <p:txBody>
-          <a:bodyPr wrap="square" lIns="0" tIns="0" rIns="0" bIns="0" rtlCol="0" anchor="t">
+            <a:off x="7799832" y="1801368"/>
+            <a:ext cx="3145536" cy="758952"/>
+          </a:xfrm>
+          <a:prstGeom prst="rect">
+            <a:avLst/>
+          </a:prstGeom>
+          <a:noFill/>
+          <a:ln/>
+        </p:spPr>
+        <p:txBody>
+          <a:bodyPr wrap="square" lIns="254" tIns="254" rIns="254" bIns="254" rtlCol="0" anchor="t">
             <a:normAutofit/>
           </a:bodyPr>
           <a:lstStyle/>
@@ -8973,7 +9117,7 @@
               <a:buNone/>
             </a:pPr>
             <a:r>
-              <a:rPr lang="en-US" sz="1550" dirty="0">
+              <a:rPr lang="en-US" sz="1320" dirty="0">
                 <a:solidFill>
                   <a:srgbClr val="17364A"/>
                 </a:solidFill>
@@ -8983,7 +9127,7 @@
               </a:rPr>
               <a:t>The expected artifact is a completed secure deployment readiness worksheet.</a:t>
             </a:r>
-            <a:endParaRPr lang="en-US" sz="1550" dirty="0"/>
+            <a:endParaRPr lang="en-US" sz="1320" dirty="0"/>
           </a:p>
         </p:txBody>
       </p:sp>
@@ -9071,13 +9215,16 @@
           <a:ln/>
         </p:spPr>
         <p:txBody>
-          <a:bodyPr wrap="square" lIns="254" tIns="254" rIns="254" bIns="254" rtlCol="0" anchor="t">
+          <a:bodyPr wrap="square" lIns="508" tIns="508" rIns="508" bIns="508" rtlCol="0" anchor="t">
             <a:normAutofit/>
           </a:bodyPr>
           <a:lstStyle/>
           <a:p>
-            <a:r>
-              <a:rPr lang="en-US" sz="1380" dirty="0">
+            <a:pPr indent="0" marL="0">
+              <a:buNone/>
+            </a:pPr>
+            <a:r>
+              <a:rPr lang="en-US" sz="1220" dirty="0">
                 <a:solidFill>
                   <a:srgbClr val="17364A"/>
                 </a:solidFill>
@@ -9085,13 +9232,16 @@
                 <a:ea typeface="Aptos" pitchFamily="34" charset="-122"/>
                 <a:cs typeface="Aptos" pitchFamily="34" charset="-120"/>
               </a:rPr>
-              <a:t>The expected artifact is a completed secure deployment readiness worksheet.</a:t>
-            </a:r>
-            <a:endParaRPr lang="en-US" sz="1380" dirty="0"/>
-          </a:p>
-          <a:p>
-            <a:r>
-              <a:rPr lang="en-US" sz="1380" dirty="0">
+              <a:t>The expected artifact is a completed secure deployment readiness.</a:t>
+            </a:r>
+            <a:endParaRPr lang="en-US" sz="1220" dirty="0"/>
+          </a:p>
+          <a:p>
+            <a:pPr indent="0" marL="0">
+              <a:buNone/>
+            </a:pPr>
+            <a:r>
+              <a:rPr lang="en-US" sz="1220" dirty="0">
                 <a:solidFill>
                   <a:srgbClr val="17364A"/>
                 </a:solidFill>
@@ -9099,9 +9249,9 @@
                 <a:ea typeface="Aptos" pitchFamily="34" charset="-122"/>
                 <a:cs typeface="Aptos" pitchFamily="34" charset="-120"/>
               </a:rPr>
-              <a:t>It should be specific to a public health workflow and should include technical.</a:t>
-            </a:r>
-            <a:endParaRPr lang="en-US" sz="1380" dirty="0"/>
+              <a:t>It should be specific to a public health workflow and should.</a:t>
+            </a:r>
+            <a:endParaRPr lang="en-US" sz="1220" dirty="0"/>
           </a:p>
         </p:txBody>
       </p:sp>
@@ -9179,17 +9329,17 @@
         </p:nvSpPr>
         <p:spPr>
           <a:xfrm>
-            <a:off x="7799832" y="5001768"/>
-            <a:ext cx="3145536" cy="502920"/>
-          </a:xfrm>
-          <a:prstGeom prst="rect">
-            <a:avLst/>
-          </a:prstGeom>
-          <a:noFill/>
-          <a:ln/>
-        </p:spPr>
-        <p:txBody>
-          <a:bodyPr wrap="square" lIns="0" tIns="0" rIns="0" bIns="0" rtlCol="0" anchor="t">
+            <a:off x="7799832" y="4974336"/>
+            <a:ext cx="3145536" cy="576072"/>
+          </a:xfrm>
+          <a:prstGeom prst="rect">
+            <a:avLst/>
+          </a:prstGeom>
+          <a:noFill/>
+          <a:ln/>
+        </p:spPr>
+        <p:txBody>
+          <a:bodyPr wrap="square" lIns="254" tIns="254" rIns="254" bIns="254" rtlCol="0" anchor="t">
             <a:normAutofit/>
           </a:bodyPr>
           <a:lstStyle/>
@@ -9198,7 +9348,7 @@
               <a:buNone/>
             </a:pPr>
             <a:r>
-              <a:rPr lang="en-US" sz="1550" dirty="0">
+              <a:rPr lang="en-US" sz="1320" dirty="0">
                 <a:solidFill>
                   <a:srgbClr val="17364A"/>
                 </a:solidFill>
@@ -9206,9 +9356,9 @@
                 <a:ea typeface="Aptos" pitchFamily="34" charset="-122"/>
                 <a:cs typeface="Aptos" pitchFamily="34" charset="-120"/>
               </a:rPr>
-              <a:t>Connect the concept to public health purpose, responsible use, required safeguards, documentation, and the next action a department should take.</a:t>
-            </a:r>
-            <a:endParaRPr lang="en-US" sz="1550" dirty="0"/>
+              <a:t>Connect the concept to public health purpose, responsible use, required safeguards, documentation, and the next action a.</a:t>
+            </a:r>
+            <a:endParaRPr lang="en-US" sz="1320" dirty="0"/>
           </a:p>
         </p:txBody>
       </p:sp>
@@ -9509,21 +9659,24 @@
           <a:ln/>
         </p:spPr>
         <p:txBody>
-          <a:bodyPr wrap="square" lIns="635" tIns="635" rIns="635" bIns="635" rtlCol="0" anchor="t">
+          <a:bodyPr wrap="square" lIns="1016" tIns="1016" rIns="1016" bIns="1016" rtlCol="0" anchor="t">
             <a:normAutofit/>
           </a:bodyPr>
           <a:lstStyle/>
           <a:p>
+            <a:pPr indent="0" marL="0">
+              <a:buNone/>
+            </a:pPr>
             <a:r>
               <a:rPr lang="en-US" sz="2100" dirty="0">
                 <a:solidFill>
-                  <a:srgbClr val="17364A"/>
-                </a:solidFill>
-                <a:latin typeface="Aptos" pitchFamily="34" charset="0"/>
-                <a:ea typeface="Aptos" pitchFamily="34" charset="-122"/>
-                <a:cs typeface="Aptos" pitchFamily="34" charset="-120"/>
-              </a:rPr>
-              <a:t>The expected artifact is a completed secure deployment readiness worksheet. It should be specific to a.</a:t>
+                  <a:srgbClr val="003A63"/>
+                </a:solidFill>
+                <a:latin typeface="Aptos" pitchFamily="34" charset="0"/>
+                <a:ea typeface="Aptos" pitchFamily="34" charset="-122"/>
+                <a:cs typeface="Aptos" pitchFamily="34" charset="-120"/>
+              </a:rPr>
+              <a:t>• The expected artifact is a completed secure deployment readiness worksheet. It should be.</a:t>
             </a:r>
             <a:endParaRPr lang="en-US" sz="2100" dirty="0"/>
           </a:p>
@@ -9603,17 +9756,17 @@
         </p:nvSpPr>
         <p:spPr>
           <a:xfrm>
-            <a:off x="7799832" y="1828800"/>
-            <a:ext cx="3145536" cy="685800"/>
-          </a:xfrm>
-          <a:prstGeom prst="rect">
-            <a:avLst/>
-          </a:prstGeom>
-          <a:noFill/>
-          <a:ln/>
-        </p:spPr>
-        <p:txBody>
-          <a:bodyPr wrap="square" lIns="0" tIns="0" rIns="0" bIns="0" rtlCol="0" anchor="t">
+            <a:off x="7799832" y="1801368"/>
+            <a:ext cx="3145536" cy="758952"/>
+          </a:xfrm>
+          <a:prstGeom prst="rect">
+            <a:avLst/>
+          </a:prstGeom>
+          <a:noFill/>
+          <a:ln/>
+        </p:spPr>
+        <p:txBody>
+          <a:bodyPr wrap="square" lIns="254" tIns="254" rIns="254" bIns="254" rtlCol="0" anchor="t">
             <a:normAutofit/>
           </a:bodyPr>
           <a:lstStyle/>
@@ -9622,7 +9775,7 @@
               <a:buNone/>
             </a:pPr>
             <a:r>
-              <a:rPr lang="en-US" sz="1550" dirty="0">
+              <a:rPr lang="en-US" sz="1320" dirty="0">
                 <a:solidFill>
                   <a:srgbClr val="17364A"/>
                 </a:solidFill>
@@ -9632,7 +9785,7 @@
               </a:rPr>
               <a:t>The expected artifact is a completed secure deployment readiness worksheet. It should be specific to a.</a:t>
             </a:r>
-            <a:endParaRPr lang="en-US" sz="1550" dirty="0"/>
+            <a:endParaRPr lang="en-US" sz="1320" dirty="0"/>
           </a:p>
         </p:txBody>
       </p:sp>
@@ -9720,13 +9873,16 @@
           <a:ln/>
         </p:spPr>
         <p:txBody>
-          <a:bodyPr wrap="square" lIns="254" tIns="254" rIns="254" bIns="254" rtlCol="0" anchor="t">
+          <a:bodyPr wrap="square" lIns="508" tIns="508" rIns="508" bIns="508" rtlCol="0" anchor="t">
             <a:normAutofit/>
           </a:bodyPr>
           <a:lstStyle/>
           <a:p>
-            <a:r>
-              <a:rPr lang="en-US" sz="1380" dirty="0">
+            <a:pPr indent="0" marL="0">
+              <a:buNone/>
+            </a:pPr>
+            <a:r>
+              <a:rPr lang="en-US" sz="1220" dirty="0">
                 <a:solidFill>
                   <a:srgbClr val="17364A"/>
                 </a:solidFill>
@@ -9734,13 +9890,16 @@
                 <a:ea typeface="Aptos" pitchFamily="34" charset="-122"/>
                 <a:cs typeface="Aptos" pitchFamily="34" charset="-120"/>
               </a:rPr>
-              <a:t>The expected artifact is a completed secure deployment readiness worksheet.</a:t>
-            </a:r>
-            <a:endParaRPr lang="en-US" sz="1380" dirty="0"/>
-          </a:p>
-          <a:p>
-            <a:r>
-              <a:rPr lang="en-US" sz="1380" dirty="0">
+              <a:t>The expected artifact is a completed secure deployment readiness.</a:t>
+            </a:r>
+            <a:endParaRPr lang="en-US" sz="1220" dirty="0"/>
+          </a:p>
+          <a:p>
+            <a:pPr indent="0" marL="0">
+              <a:buNone/>
+            </a:pPr>
+            <a:r>
+              <a:rPr lang="en-US" sz="1220" dirty="0">
                 <a:solidFill>
                   <a:srgbClr val="17364A"/>
                 </a:solidFill>
@@ -9748,9 +9907,9 @@
                 <a:ea typeface="Aptos" pitchFamily="34" charset="-122"/>
                 <a:cs typeface="Aptos" pitchFamily="34" charset="-120"/>
               </a:rPr>
-              <a:t>It should be specific to a public health workflow and should include technical.</a:t>
-            </a:r>
-            <a:endParaRPr lang="en-US" sz="1380" dirty="0"/>
+              <a:t>It should be specific to a public health workflow and should.</a:t>
+            </a:r>
+            <a:endParaRPr lang="en-US" sz="1220" dirty="0"/>
           </a:p>
         </p:txBody>
       </p:sp>
@@ -9828,17 +9987,17 @@
         </p:nvSpPr>
         <p:spPr>
           <a:xfrm>
-            <a:off x="7799832" y="5001768"/>
-            <a:ext cx="3145536" cy="502920"/>
-          </a:xfrm>
-          <a:prstGeom prst="rect">
-            <a:avLst/>
-          </a:prstGeom>
-          <a:noFill/>
-          <a:ln/>
-        </p:spPr>
-        <p:txBody>
-          <a:bodyPr wrap="square" lIns="0" tIns="0" rIns="0" bIns="0" rtlCol="0" anchor="t">
+            <a:off x="7799832" y="4974336"/>
+            <a:ext cx="3145536" cy="576072"/>
+          </a:xfrm>
+          <a:prstGeom prst="rect">
+            <a:avLst/>
+          </a:prstGeom>
+          <a:noFill/>
+          <a:ln/>
+        </p:spPr>
+        <p:txBody>
+          <a:bodyPr wrap="square" lIns="254" tIns="254" rIns="254" bIns="254" rtlCol="0" anchor="t">
             <a:normAutofit/>
           </a:bodyPr>
           <a:lstStyle/>
@@ -9847,7 +10006,7 @@
               <a:buNone/>
             </a:pPr>
             <a:r>
-              <a:rPr lang="en-US" sz="1550" dirty="0">
+              <a:rPr lang="en-US" sz="1320" dirty="0">
                 <a:solidFill>
                   <a:srgbClr val="17364A"/>
                 </a:solidFill>
@@ -9855,9 +10014,9 @@
                 <a:ea typeface="Aptos" pitchFamily="34" charset="-122"/>
                 <a:cs typeface="Aptos" pitchFamily="34" charset="-120"/>
               </a:rPr>
-              <a:t>Use the assignment to test whether you can explain the concept, apply it to a realistic public health situation, and identify what would need review before the work moves forward.</a:t>
-            </a:r>
-            <a:endParaRPr lang="en-US" sz="1550" dirty="0"/>
+              <a:t>Use the assignment to test whether you can explain the concept, apply it to a realistic public health situation, and.</a:t>
+            </a:r>
+            <a:endParaRPr lang="en-US" sz="1320" dirty="0"/>
           </a:p>
         </p:txBody>
       </p:sp>
@@ -10158,49 +10317,58 @@
           <a:ln/>
         </p:spPr>
         <p:txBody>
-          <a:bodyPr wrap="square" lIns="635" tIns="635" rIns="635" bIns="635" rtlCol="0" anchor="t">
+          <a:bodyPr wrap="square" lIns="1016" tIns="1016" rIns="1016" bIns="1016" rtlCol="0" anchor="t">
             <a:normAutofit/>
           </a:bodyPr>
           <a:lstStyle/>
           <a:p>
+            <a:pPr indent="0" marL="0">
+              <a:buNone/>
+            </a:pPr>
             <a:r>
               <a:rPr lang="en-US" sz="2100" dirty="0">
                 <a:solidFill>
-                  <a:srgbClr val="17364A"/>
-                </a:solidFill>
-                <a:latin typeface="Aptos" pitchFamily="34" charset="0"/>
-                <a:ea typeface="Aptos" pitchFamily="34" charset="-122"/>
-                <a:cs typeface="Aptos" pitchFamily="34" charset="-120"/>
-              </a:rPr>
-              <a:t>Many AI tools are deployed in cloud environments or packaged in containers that make applications easier to move,.</a:t>
+                  <a:srgbClr val="003A63"/>
+                </a:solidFill>
+                <a:latin typeface="Aptos" pitchFamily="34" charset="0"/>
+                <a:ea typeface="Aptos" pitchFamily="34" charset="-122"/>
+                <a:cs typeface="Aptos" pitchFamily="34" charset="-120"/>
+              </a:rPr>
+              <a:t>• Many AI tools are deployed in cloud environments or packaged in containers that make.</a:t>
             </a:r>
             <a:endParaRPr lang="en-US" sz="2100" dirty="0"/>
           </a:p>
           <a:p>
+            <a:pPr indent="0" marL="0">
+              <a:buNone/>
+            </a:pPr>
             <a:r>
               <a:rPr lang="en-US" sz="2100" dirty="0">
                 <a:solidFill>
-                  <a:srgbClr val="17364A"/>
-                </a:solidFill>
-                <a:latin typeface="Aptos" pitchFamily="34" charset="0"/>
-                <a:ea typeface="Aptos" pitchFamily="34" charset="-122"/>
-                <a:cs typeface="Aptos" pitchFamily="34" charset="-120"/>
-              </a:rPr>
-              <a:t>Public health staff do not need to become cloud engineers, but they need enough technical literacy to understand.</a:t>
+                  <a:srgbClr val="003A63"/>
+                </a:solidFill>
+                <a:latin typeface="Aptos" pitchFamily="34" charset="0"/>
+                <a:ea typeface="Aptos" pitchFamily="34" charset="-122"/>
+                <a:cs typeface="Aptos" pitchFamily="34" charset="-120"/>
+              </a:rPr>
+              <a:t>• Public health staff do not need to become cloud engineers, but they need enough technical.</a:t>
             </a:r>
             <a:endParaRPr lang="en-US" sz="2100" dirty="0"/>
           </a:p>
           <a:p>
+            <a:pPr indent="0" marL="0">
+              <a:buNone/>
+            </a:pPr>
             <a:r>
               <a:rPr lang="en-US" sz="2100" dirty="0">
                 <a:solidFill>
-                  <a:srgbClr val="17364A"/>
-                </a:solidFill>
-                <a:latin typeface="Aptos" pitchFamily="34" charset="0"/>
-                <a:ea typeface="Aptos" pitchFamily="34" charset="-122"/>
-                <a:cs typeface="Aptos" pitchFamily="34" charset="-120"/>
-              </a:rPr>
-              <a:t>This module connects deployment choices to public health continuity, privacy, cybersecurity, and sustainability.</a:t>
+                  <a:srgbClr val="003A63"/>
+                </a:solidFill>
+                <a:latin typeface="Aptos" pitchFamily="34" charset="0"/>
+                <a:ea typeface="Aptos" pitchFamily="34" charset="-122"/>
+                <a:cs typeface="Aptos" pitchFamily="34" charset="-120"/>
+              </a:rPr>
+              <a:t>• This module connects deployment choices to public health continuity, privacy, cybersecurity,.</a:t>
             </a:r>
             <a:endParaRPr lang="en-US" sz="2100" dirty="0"/>
           </a:p>
@@ -10280,17 +10448,17 @@
         </p:nvSpPr>
         <p:spPr>
           <a:xfrm>
-            <a:off x="8074152" y="1920240"/>
-            <a:ext cx="2825496" cy="1280160"/>
-          </a:xfrm>
-          <a:prstGeom prst="rect">
-            <a:avLst/>
-          </a:prstGeom>
-          <a:noFill/>
-          <a:ln/>
-        </p:spPr>
-        <p:txBody>
-          <a:bodyPr wrap="square" lIns="0" tIns="0" rIns="0" bIns="0" rtlCol="0" anchor="t">
+            <a:off x="8074152" y="1892808"/>
+            <a:ext cx="2825496" cy="1353312"/>
+          </a:xfrm>
+          <a:prstGeom prst="rect">
+            <a:avLst/>
+          </a:prstGeom>
+          <a:noFill/>
+          <a:ln/>
+        </p:spPr>
+        <p:txBody>
+          <a:bodyPr wrap="square" lIns="254" tIns="254" rIns="254" bIns="254" rtlCol="0" anchor="t">
             <a:normAutofit/>
           </a:bodyPr>
           <a:lstStyle/>
@@ -10299,7 +10467,7 @@
               <a:buNone/>
             </a:pPr>
             <a:r>
-              <a:rPr lang="en-US" sz="1550" dirty="0">
+              <a:rPr lang="en-US" sz="1320" dirty="0">
                 <a:solidFill>
                   <a:srgbClr val="17364A"/>
                 </a:solidFill>
@@ -10307,43 +10475,9 @@
                 <a:ea typeface="Aptos" pitchFamily="34" charset="-122"/>
                 <a:cs typeface="Aptos" pitchFamily="34" charset="-120"/>
               </a:rPr>
-              <a:t>Level: intermediate/practitioner</a:t>
-            </a:r>
-            <a:endParaRPr lang="en-US" sz="1550" dirty="0"/>
-          </a:p>
-          <a:p>
-            <a:pPr indent="0" marL="0">
-              <a:buNone/>
-            </a:pPr>
-            <a:r>
-              <a:rPr lang="en-US" sz="1550" dirty="0">
-                <a:solidFill>
-                  <a:srgbClr val="17364A"/>
-                </a:solidFill>
-                <a:latin typeface="Aptos" pitchFamily="34" charset="0"/>
-                <a:ea typeface="Aptos" pitchFamily="34" charset="-122"/>
-                <a:cs typeface="Aptos" pitchFamily="34" charset="-120"/>
-              </a:rPr>
-              <a:t>Primary track: Technical Architecture Track</a:t>
-            </a:r>
-            <a:endParaRPr lang="en-US" sz="1550" dirty="0"/>
-          </a:p>
-          <a:p>
-            <a:pPr indent="0" marL="0">
-              <a:buNone/>
-            </a:pPr>
-            <a:r>
-              <a:rPr lang="en-US" sz="1550" dirty="0">
-                <a:solidFill>
-                  <a:srgbClr val="17364A"/>
-                </a:solidFill>
-                <a:latin typeface="Aptos" pitchFamily="34" charset="0"/>
-                <a:ea typeface="Aptos" pitchFamily="34" charset="-122"/>
-                <a:cs typeface="Aptos" pitchFamily="34" charset="-120"/>
-              </a:rPr>
-              <a:t>Appears in tracks: operations-data-quality</a:t>
-            </a:r>
-            <a:endParaRPr lang="en-US" sz="1550" dirty="0"/>
+              <a:t>Level: intermediate/practitioner Primary track: Technical Architecture Track Appears in tracks: operations-data-quality</a:t>
+            </a:r>
+            <a:endParaRPr lang="en-US" sz="1320" dirty="0"/>
           </a:p>
         </p:txBody>
       </p:sp>
@@ -10431,13 +10565,16 @@
           <a:ln/>
         </p:spPr>
         <p:txBody>
-          <a:bodyPr wrap="square" lIns="254" tIns="254" rIns="254" bIns="254" rtlCol="0" anchor="t">
+          <a:bodyPr wrap="square" lIns="508" tIns="508" rIns="508" bIns="508" rtlCol="0" anchor="t">
             <a:normAutofit/>
           </a:bodyPr>
           <a:lstStyle/>
           <a:p>
-            <a:r>
-              <a:rPr lang="en-US" sz="1380" dirty="0">
+            <a:pPr indent="0" marL="0">
+              <a:buNone/>
+            </a:pPr>
+            <a:r>
+              <a:rPr lang="en-US" sz="1220" dirty="0">
                 <a:solidFill>
                   <a:srgbClr val="17364A"/>
                 </a:solidFill>
@@ -10447,11 +10584,14 @@
               </a:rPr>
               <a:t>Read the module for shared vocabulary and context.</a:t>
             </a:r>
-            <a:endParaRPr lang="en-US" sz="1380" dirty="0"/>
-          </a:p>
-          <a:p>
-            <a:r>
-              <a:rPr lang="en-US" sz="1380" dirty="0">
+            <a:endParaRPr lang="en-US" sz="1220" dirty="0"/>
+          </a:p>
+          <a:p>
+            <a:pPr indent="0" marL="0">
+              <a:buNone/>
+            </a:pPr>
+            <a:r>
+              <a:rPr lang="en-US" sz="1220" dirty="0">
                 <a:solidFill>
                   <a:srgbClr val="17364A"/>
                 </a:solidFill>
@@ -10461,11 +10601,14 @@
               </a:rPr>
               <a:t>Complete the practical exercise to apply the concept.</a:t>
             </a:r>
-            <a:endParaRPr lang="en-US" sz="1380" dirty="0"/>
-          </a:p>
-          <a:p>
-            <a:r>
-              <a:rPr lang="en-US" sz="1380" dirty="0">
+            <a:endParaRPr lang="en-US" sz="1220" dirty="0"/>
+          </a:p>
+          <a:p>
+            <a:pPr indent="0" marL="0">
+              <a:buNone/>
+            </a:pPr>
+            <a:r>
+              <a:rPr lang="en-US" sz="1220" dirty="0">
                 <a:solidFill>
                   <a:srgbClr val="17364A"/>
                 </a:solidFill>
@@ -10475,7 +10618,7 @@
               </a:rPr>
               <a:t>Use the notes and references for deeper review.</a:t>
             </a:r>
-            <a:endParaRPr lang="en-US" sz="1380" dirty="0"/>
+            <a:endParaRPr lang="en-US" sz="1220" dirty="0"/>
           </a:p>
         </p:txBody>
       </p:sp>
@@ -10776,49 +10919,58 @@
           <a:ln/>
         </p:spPr>
         <p:txBody>
-          <a:bodyPr wrap="square" lIns="635" tIns="635" rIns="635" bIns="635" rtlCol="0" anchor="t">
+          <a:bodyPr wrap="square" lIns="1016" tIns="1016" rIns="1016" bIns="1016" rtlCol="0" anchor="t">
             <a:normAutofit/>
           </a:bodyPr>
           <a:lstStyle/>
           <a:p>
+            <a:pPr indent="0" marL="0">
+              <a:buNone/>
+            </a:pPr>
             <a:r>
               <a:rPr lang="en-US" sz="2100" dirty="0">
                 <a:solidFill>
-                  <a:srgbClr val="17364A"/>
-                </a:solidFill>
-                <a:latin typeface="Aptos" pitchFamily="34" charset="0"/>
-                <a:ea typeface="Aptos" pitchFamily="34" charset="-122"/>
-                <a:cs typeface="Aptos" pitchFamily="34" charset="-120"/>
-              </a:rPr>
-              <a:t>1. What is the best reason to address cloud, containers, and secure deployment basics before deployment?</a:t>
+                  <a:srgbClr val="003A63"/>
+                </a:solidFill>
+                <a:latin typeface="Aptos" pitchFamily="34" charset="0"/>
+                <a:ea typeface="Aptos" pitchFamily="34" charset="-122"/>
+                <a:cs typeface="Aptos" pitchFamily="34" charset="-120"/>
+              </a:rPr>
+              <a:t>• 1. What is the best reason to address cloud, containers, and secure deployment basics before.</a:t>
             </a:r>
             <a:endParaRPr lang="en-US" sz="2100" dirty="0"/>
           </a:p>
           <a:p>
+            <a:pPr indent="0" marL="0">
+              <a:buNone/>
+            </a:pPr>
             <a:r>
               <a:rPr lang="en-US" sz="2100" dirty="0">
                 <a:solidFill>
-                  <a:srgbClr val="17364A"/>
-                </a:solidFill>
-                <a:latin typeface="Aptos" pitchFamily="34" charset="0"/>
-                <a:ea typeface="Aptos" pitchFamily="34" charset="-122"/>
-                <a:cs typeface="Aptos" pitchFamily="34" charset="-120"/>
-              </a:rPr>
-              <a:t>2. Which practice best supports responsible implementation?</a:t>
+                  <a:srgbClr val="003A63"/>
+                </a:solidFill>
+                <a:latin typeface="Aptos" pitchFamily="34" charset="0"/>
+                <a:ea typeface="Aptos" pitchFamily="34" charset="-122"/>
+                <a:cs typeface="Aptos" pitchFamily="34" charset="-120"/>
+              </a:rPr>
+              <a:t>• 2. Which practice best supports responsible implementation?</a:t>
             </a:r>
             <a:endParaRPr lang="en-US" sz="2100" dirty="0"/>
           </a:p>
           <a:p>
+            <a:pPr indent="0" marL="0">
+              <a:buNone/>
+            </a:pPr>
             <a:r>
               <a:rPr lang="en-US" sz="2100" dirty="0">
                 <a:solidFill>
-                  <a:srgbClr val="17364A"/>
-                </a:solidFill>
-                <a:latin typeface="Aptos" pitchFamily="34" charset="0"/>
-                <a:ea typeface="Aptos" pitchFamily="34" charset="-122"/>
-                <a:cs typeface="Aptos" pitchFamily="34" charset="-120"/>
-              </a:rPr>
-              <a:t>3. Which statement best describes a common failure mode?</a:t>
+                  <a:srgbClr val="003A63"/>
+                </a:solidFill>
+                <a:latin typeface="Aptos" pitchFamily="34" charset="0"/>
+                <a:ea typeface="Aptos" pitchFamily="34" charset="-122"/>
+                <a:cs typeface="Aptos" pitchFamily="34" charset="-120"/>
+              </a:rPr>
+              <a:t>• 3. Which statement best describes a common failure mode?</a:t>
             </a:r>
             <a:endParaRPr lang="en-US" sz="2100" dirty="0"/>
           </a:p>
@@ -10898,17 +11050,17 @@
         </p:nvSpPr>
         <p:spPr>
           <a:xfrm>
-            <a:off x="7799832" y="1828800"/>
-            <a:ext cx="3145536" cy="685800"/>
-          </a:xfrm>
-          <a:prstGeom prst="rect">
-            <a:avLst/>
-          </a:prstGeom>
-          <a:noFill/>
-          <a:ln/>
-        </p:spPr>
-        <p:txBody>
-          <a:bodyPr wrap="square" lIns="0" tIns="0" rIns="0" bIns="0" rtlCol="0" anchor="t">
+            <a:off x="7799832" y="1801368"/>
+            <a:ext cx="3145536" cy="758952"/>
+          </a:xfrm>
+          <a:prstGeom prst="rect">
+            <a:avLst/>
+          </a:prstGeom>
+          <a:noFill/>
+          <a:ln/>
+        </p:spPr>
+        <p:txBody>
+          <a:bodyPr wrap="square" lIns="254" tIns="254" rIns="254" bIns="254" rtlCol="0" anchor="t">
             <a:normAutofit/>
           </a:bodyPr>
           <a:lstStyle/>
@@ -10917,7 +11069,7 @@
               <a:buNone/>
             </a:pPr>
             <a:r>
-              <a:rPr lang="en-US" sz="1550" dirty="0">
+              <a:rPr lang="en-US" sz="1320" dirty="0">
                 <a:solidFill>
                   <a:srgbClr val="17364A"/>
                 </a:solidFill>
@@ -10927,7 +11079,7 @@
               </a:rPr>
               <a:t>1. What is the best reason to address cloud, containers, and secure deployment basics before deployment?</a:t>
             </a:r>
-            <a:endParaRPr lang="en-US" sz="1550" dirty="0"/>
+            <a:endParaRPr lang="en-US" sz="1320" dirty="0"/>
           </a:p>
         </p:txBody>
       </p:sp>
@@ -11015,13 +11167,16 @@
           <a:ln/>
         </p:spPr>
         <p:txBody>
-          <a:bodyPr wrap="square" lIns="254" tIns="254" rIns="254" bIns="254" rtlCol="0" anchor="t">
+          <a:bodyPr wrap="square" lIns="508" tIns="508" rIns="508" bIns="508" rtlCol="0" anchor="t">
             <a:normAutofit/>
           </a:bodyPr>
           <a:lstStyle/>
           <a:p>
-            <a:r>
-              <a:rPr lang="en-US" sz="1380" dirty="0">
+            <a:pPr indent="0" marL="0">
+              <a:buNone/>
+            </a:pPr>
+            <a:r>
+              <a:rPr lang="en-US" sz="1220" dirty="0">
                 <a:solidFill>
                   <a:srgbClr val="17364A"/>
                 </a:solidFill>
@@ -11031,11 +11186,14 @@
               </a:rPr>
               <a:t>1.</a:t>
             </a:r>
-            <a:endParaRPr lang="en-US" sz="1380" dirty="0"/>
-          </a:p>
-          <a:p>
-            <a:r>
-              <a:rPr lang="en-US" sz="1380" dirty="0">
+            <a:endParaRPr lang="en-US" sz="1220" dirty="0"/>
+          </a:p>
+          <a:p>
+            <a:pPr indent="0" marL="0">
+              <a:buNone/>
+            </a:pPr>
+            <a:r>
+              <a:rPr lang="en-US" sz="1220" dirty="0">
                 <a:solidFill>
                   <a:srgbClr val="17364A"/>
                 </a:solidFill>
@@ -11043,13 +11201,16 @@
                 <a:ea typeface="Aptos" pitchFamily="34" charset="-122"/>
                 <a:cs typeface="Aptos" pitchFamily="34" charset="-120"/>
               </a:rPr>
-              <a:t>What is the best reason to address cloud, containers, and secure deployment basics before.</a:t>
-            </a:r>
-            <a:endParaRPr lang="en-US" sz="1380" dirty="0"/>
-          </a:p>
-          <a:p>
-            <a:r>
-              <a:rPr lang="en-US" sz="1380" dirty="0">
+              <a:t>What is the best reason to address cloud, containers, and secure.</a:t>
+            </a:r>
+            <a:endParaRPr lang="en-US" sz="1220" dirty="0"/>
+          </a:p>
+          <a:p>
+            <a:pPr indent="0" marL="0">
+              <a:buNone/>
+            </a:pPr>
+            <a:r>
+              <a:rPr lang="en-US" sz="1220" dirty="0">
                 <a:solidFill>
                   <a:srgbClr val="17364A"/>
                 </a:solidFill>
@@ -11059,7 +11220,7 @@
               </a:rPr>
               <a:t>2.</a:t>
             </a:r>
-            <a:endParaRPr lang="en-US" sz="1380" dirty="0"/>
+            <a:endParaRPr lang="en-US" sz="1220" dirty="0"/>
           </a:p>
         </p:txBody>
       </p:sp>
@@ -11137,17 +11298,17 @@
         </p:nvSpPr>
         <p:spPr>
           <a:xfrm>
-            <a:off x="7799832" y="5001768"/>
-            <a:ext cx="3145536" cy="502920"/>
-          </a:xfrm>
-          <a:prstGeom prst="rect">
-            <a:avLst/>
-          </a:prstGeom>
-          <a:noFill/>
-          <a:ln/>
-        </p:spPr>
-        <p:txBody>
-          <a:bodyPr wrap="square" lIns="0" tIns="0" rIns="0" bIns="0" rtlCol="0" anchor="t">
+            <a:off x="7799832" y="4974336"/>
+            <a:ext cx="3145536" cy="576072"/>
+          </a:xfrm>
+          <a:prstGeom prst="rect">
+            <a:avLst/>
+          </a:prstGeom>
+          <a:noFill/>
+          <a:ln/>
+        </p:spPr>
+        <p:txBody>
+          <a:bodyPr wrap="square" lIns="254" tIns="254" rIns="254" bIns="254" rtlCol="0" anchor="t">
             <a:normAutofit/>
           </a:bodyPr>
           <a:lstStyle/>
@@ -11156,7 +11317,7 @@
               <a:buNone/>
             </a:pPr>
             <a:r>
-              <a:rPr lang="en-US" sz="1550" dirty="0">
+              <a:rPr lang="en-US" sz="1320" dirty="0">
                 <a:solidFill>
                   <a:srgbClr val="17364A"/>
                 </a:solidFill>
@@ -11164,9 +11325,9 @@
                 <a:ea typeface="Aptos" pitchFamily="34" charset="-122"/>
                 <a:cs typeface="Aptos" pitchFamily="34" charset="-120"/>
               </a:rPr>
-              <a:t>Use the assignment to test whether you can explain the concept, apply it to a realistic public health situation, and identify what would need review before the work moves forward.</a:t>
-            </a:r>
-            <a:endParaRPr lang="en-US" sz="1550" dirty="0"/>
+              <a:t>Use the assignment to test whether you can explain the concept, apply it to a realistic public health situation, and.</a:t>
+            </a:r>
+            <a:endParaRPr lang="en-US" sz="1320" dirty="0"/>
           </a:p>
         </p:txBody>
       </p:sp>
@@ -11467,49 +11628,58 @@
           <a:ln/>
         </p:spPr>
         <p:txBody>
-          <a:bodyPr wrap="square" lIns="635" tIns="635" rIns="635" bIns="635" rtlCol="0" anchor="t">
+          <a:bodyPr wrap="square" lIns="1016" tIns="1016" rIns="1016" bIns="1016" rtlCol="0" anchor="t">
             <a:normAutofit/>
           </a:bodyPr>
           <a:lstStyle/>
           <a:p>
+            <a:pPr indent="0" marL="0">
+              <a:buNone/>
+            </a:pPr>
             <a:r>
               <a:rPr lang="en-US" sz="2100" dirty="0">
                 <a:solidFill>
-                  <a:srgbClr val="17364A"/>
-                </a:solidFill>
-                <a:latin typeface="Aptos" pitchFamily="34" charset="0"/>
-                <a:ea typeface="Aptos" pitchFamily="34" charset="-122"/>
-                <a:cs typeface="Aptos" pitchFamily="34" charset="-120"/>
-              </a:rPr>
-              <a:t>NIST AI Risk Management Framework: https://www.nist.gov/itl/ai-risk-management-framework</a:t>
+                  <a:srgbClr val="003A63"/>
+                </a:solidFill>
+                <a:latin typeface="Aptos" pitchFamily="34" charset="0"/>
+                <a:ea typeface="Aptos" pitchFamily="34" charset="-122"/>
+                <a:cs typeface="Aptos" pitchFamily="34" charset="-120"/>
+              </a:rPr>
+              <a:t>• NIST AI Risk Management Framework: https://www.nist.gov/itl/ai-risk-management-framework</a:t>
             </a:r>
             <a:endParaRPr lang="en-US" sz="2100" dirty="0"/>
           </a:p>
           <a:p>
+            <a:pPr indent="0" marL="0">
+              <a:buNone/>
+            </a:pPr>
             <a:r>
               <a:rPr lang="en-US" sz="2100" dirty="0">
                 <a:solidFill>
-                  <a:srgbClr val="17364A"/>
-                </a:solidFill>
-                <a:latin typeface="Aptos" pitchFamily="34" charset="0"/>
-                <a:ea typeface="Aptos" pitchFamily="34" charset="-122"/>
-                <a:cs typeface="Aptos" pitchFamily="34" charset="-120"/>
-              </a:rPr>
-              <a:t>NIST Cybersecurity Framework and cloud security guidance</a:t>
+                  <a:srgbClr val="003A63"/>
+                </a:solidFill>
+                <a:latin typeface="Aptos" pitchFamily="34" charset="0"/>
+                <a:ea typeface="Aptos" pitchFamily="34" charset="-122"/>
+                <a:cs typeface="Aptos" pitchFamily="34" charset="-120"/>
+              </a:rPr>
+              <a:t>• NIST Cybersecurity Framework and cloud security guidance</a:t>
             </a:r>
             <a:endParaRPr lang="en-US" sz="2100" dirty="0"/>
           </a:p>
           <a:p>
+            <a:pPr indent="0" marL="0">
+              <a:buNone/>
+            </a:pPr>
             <a:r>
               <a:rPr lang="en-US" sz="2100" dirty="0">
                 <a:solidFill>
-                  <a:srgbClr val="17364A"/>
-                </a:solidFill>
-                <a:latin typeface="Aptos" pitchFamily="34" charset="0"/>
-                <a:ea typeface="Aptos" pitchFamily="34" charset="-122"/>
-                <a:cs typeface="Aptos" pitchFamily="34" charset="-120"/>
-              </a:rPr>
-              <a:t>NIST Generative AI Profile:.</a:t>
+                  <a:srgbClr val="003A63"/>
+                </a:solidFill>
+                <a:latin typeface="Aptos" pitchFamily="34" charset="0"/>
+                <a:ea typeface="Aptos" pitchFamily="34" charset="-122"/>
+                <a:cs typeface="Aptos" pitchFamily="34" charset="-120"/>
+              </a:rPr>
+              <a:t>• NIST Generative AI Profile:.</a:t>
             </a:r>
             <a:endParaRPr lang="en-US" sz="2100" dirty="0"/>
           </a:p>
@@ -11589,17 +11759,17 @@
         </p:nvSpPr>
         <p:spPr>
           <a:xfrm>
-            <a:off x="7799832" y="1828800"/>
-            <a:ext cx="3145536" cy="685800"/>
-          </a:xfrm>
-          <a:prstGeom prst="rect">
-            <a:avLst/>
-          </a:prstGeom>
-          <a:noFill/>
-          <a:ln/>
-        </p:spPr>
-        <p:txBody>
-          <a:bodyPr wrap="square" lIns="0" tIns="0" rIns="0" bIns="0" rtlCol="0" anchor="t">
+            <a:off x="7799832" y="1801368"/>
+            <a:ext cx="3145536" cy="758952"/>
+          </a:xfrm>
+          <a:prstGeom prst="rect">
+            <a:avLst/>
+          </a:prstGeom>
+          <a:noFill/>
+          <a:ln/>
+        </p:spPr>
+        <p:txBody>
+          <a:bodyPr wrap="square" lIns="254" tIns="254" rIns="254" bIns="254" rtlCol="0" anchor="t">
             <a:normAutofit/>
           </a:bodyPr>
           <a:lstStyle/>
@@ -11608,7 +11778,7 @@
               <a:buNone/>
             </a:pPr>
             <a:r>
-              <a:rPr lang="en-US" sz="1550" dirty="0">
+              <a:rPr lang="en-US" sz="1320" dirty="0">
                 <a:solidFill>
                   <a:srgbClr val="17364A"/>
                 </a:solidFill>
@@ -11618,7 +11788,7 @@
               </a:rPr>
               <a:t>NIST AI Risk Management Framework: https://www.nist.gov/itl/ai-risk-management-framework</a:t>
             </a:r>
-            <a:endParaRPr lang="en-US" sz="1550" dirty="0"/>
+            <a:endParaRPr lang="en-US" sz="1320" dirty="0"/>
           </a:p>
         </p:txBody>
       </p:sp>
@@ -11706,13 +11876,16 @@
           <a:ln/>
         </p:spPr>
         <p:txBody>
-          <a:bodyPr wrap="square" lIns="254" tIns="254" rIns="254" bIns="254" rtlCol="0" anchor="t">
+          <a:bodyPr wrap="square" lIns="508" tIns="508" rIns="508" bIns="508" rtlCol="0" anchor="t">
             <a:normAutofit/>
           </a:bodyPr>
           <a:lstStyle/>
           <a:p>
-            <a:r>
-              <a:rPr lang="en-US" sz="1380" dirty="0">
+            <a:pPr indent="0" marL="0">
+              <a:buNone/>
+            </a:pPr>
+            <a:r>
+              <a:rPr lang="en-US" sz="1220" dirty="0">
                 <a:solidFill>
                   <a:srgbClr val="17364A"/>
                 </a:solidFill>
@@ -11722,11 +11895,14 @@
               </a:rPr>
               <a:t>CDC Public Health Data Strategy and Data Modernization resources:.</a:t>
             </a:r>
-            <a:endParaRPr lang="en-US" sz="1380" dirty="0"/>
-          </a:p>
-          <a:p>
-            <a:r>
-              <a:rPr lang="en-US" sz="1380" dirty="0">
+            <a:endParaRPr lang="en-US" sz="1220" dirty="0"/>
+          </a:p>
+          <a:p>
+            <a:pPr indent="0" marL="0">
+              <a:buNone/>
+            </a:pPr>
+            <a:r>
+              <a:rPr lang="en-US" sz="1220" dirty="0">
                 <a:solidFill>
                   <a:srgbClr val="17364A"/>
                 </a:solidFill>
@@ -11734,9 +11910,9 @@
                 <a:ea typeface="Aptos" pitchFamily="34" charset="-122"/>
                 <a:cs typeface="Aptos" pitchFamily="34" charset="-120"/>
               </a:rPr>
-              <a:t>OWASP Top 10 for LLM Applications, when security or AI integrations are relevant</a:t>
-            </a:r>
-            <a:endParaRPr lang="en-US" sz="1380" dirty="0"/>
+              <a:t>OWASP Top 10 for LLM Applications, when security or AI.</a:t>
+            </a:r>
+            <a:endParaRPr lang="en-US" sz="1220" dirty="0"/>
           </a:p>
         </p:txBody>
       </p:sp>
@@ -11814,17 +11990,17 @@
         </p:nvSpPr>
         <p:spPr>
           <a:xfrm>
-            <a:off x="7799832" y="5001768"/>
-            <a:ext cx="3145536" cy="502920"/>
-          </a:xfrm>
-          <a:prstGeom prst="rect">
-            <a:avLst/>
-          </a:prstGeom>
-          <a:noFill/>
-          <a:ln/>
-        </p:spPr>
-        <p:txBody>
-          <a:bodyPr wrap="square" lIns="0" tIns="0" rIns="0" bIns="0" rtlCol="0" anchor="t">
+            <a:off x="7799832" y="4974336"/>
+            <a:ext cx="3145536" cy="576072"/>
+          </a:xfrm>
+          <a:prstGeom prst="rect">
+            <a:avLst/>
+          </a:prstGeom>
+          <a:noFill/>
+          <a:ln/>
+        </p:spPr>
+        <p:txBody>
+          <a:bodyPr wrap="square" lIns="254" tIns="254" rIns="254" bIns="254" rtlCol="0" anchor="t">
             <a:normAutofit/>
           </a:bodyPr>
           <a:lstStyle/>
@@ -11833,7 +12009,7 @@
               <a:buNone/>
             </a:pPr>
             <a:r>
-              <a:rPr lang="en-US" sz="1550" dirty="0">
+              <a:rPr lang="en-US" sz="1320" dirty="0">
                 <a:solidFill>
                   <a:srgbClr val="17364A"/>
                 </a:solidFill>
@@ -11841,9 +12017,9 @@
                 <a:ea typeface="Aptos" pitchFamily="34" charset="-122"/>
                 <a:cs typeface="Aptos" pitchFamily="34" charset="-120"/>
               </a:rPr>
-              <a:t>Connect the concept to public health purpose, responsible use, required safeguards, documentation, and the next action a department should take.</a:t>
-            </a:r>
-            <a:endParaRPr lang="en-US" sz="1550" dirty="0"/>
+              <a:t>Connect the concept to public health purpose, responsible use, required safeguards, documentation, and the next action a.</a:t>
+            </a:r>
+            <a:endParaRPr lang="en-US" sz="1320" dirty="0"/>
           </a:p>
         </p:txBody>
       </p:sp>
@@ -12144,21 +12320,24 @@
           <a:ln/>
         </p:spPr>
         <p:txBody>
-          <a:bodyPr wrap="square" lIns="635" tIns="635" rIns="635" bIns="635" rtlCol="0" anchor="t">
+          <a:bodyPr wrap="square" lIns="1016" tIns="1016" rIns="1016" bIns="1016" rtlCol="0" anchor="t">
             <a:normAutofit/>
           </a:bodyPr>
           <a:lstStyle/>
           <a:p>
+            <a:pPr indent="0" marL="0">
+              <a:buNone/>
+            </a:pPr>
             <a:r>
               <a:rPr lang="en-US" sz="2100" dirty="0">
                 <a:solidFill>
-                  <a:srgbClr val="17364A"/>
-                </a:solidFill>
-                <a:latin typeface="Aptos" pitchFamily="34" charset="0"/>
-                <a:ea typeface="Aptos" pitchFamily="34" charset="-122"/>
-                <a:cs typeface="Aptos" pitchFamily="34" charset="-120"/>
-              </a:rPr>
-              <a:t>Agency privacy, cybersecurity, data governance, procurement, and records management policies</a:t>
+                  <a:srgbClr val="003A63"/>
+                </a:solidFill>
+                <a:latin typeface="Aptos" pitchFamily="34" charset="0"/>
+                <a:ea typeface="Aptos" pitchFamily="34" charset="-122"/>
+                <a:cs typeface="Aptos" pitchFamily="34" charset="-120"/>
+              </a:rPr>
+              <a:t>• Agency privacy, cybersecurity, data governance, procurement, and records management policies</a:t>
             </a:r>
             <a:endParaRPr lang="en-US" sz="2100" dirty="0"/>
           </a:p>
@@ -12238,17 +12417,17 @@
         </p:nvSpPr>
         <p:spPr>
           <a:xfrm>
-            <a:off x="7799832" y="1828800"/>
-            <a:ext cx="3145536" cy="685800"/>
-          </a:xfrm>
-          <a:prstGeom prst="rect">
-            <a:avLst/>
-          </a:prstGeom>
-          <a:noFill/>
-          <a:ln/>
-        </p:spPr>
-        <p:txBody>
-          <a:bodyPr wrap="square" lIns="0" tIns="0" rIns="0" bIns="0" rtlCol="0" anchor="t">
+            <a:off x="7799832" y="1801368"/>
+            <a:ext cx="3145536" cy="758952"/>
+          </a:xfrm>
+          <a:prstGeom prst="rect">
+            <a:avLst/>
+          </a:prstGeom>
+          <a:noFill/>
+          <a:ln/>
+        </p:spPr>
+        <p:txBody>
+          <a:bodyPr wrap="square" lIns="254" tIns="254" rIns="254" bIns="254" rtlCol="0" anchor="t">
             <a:normAutofit/>
           </a:bodyPr>
           <a:lstStyle/>
@@ -12257,7 +12436,7 @@
               <a:buNone/>
             </a:pPr>
             <a:r>
-              <a:rPr lang="en-US" sz="1550" dirty="0">
+              <a:rPr lang="en-US" sz="1320" dirty="0">
                 <a:solidFill>
                   <a:srgbClr val="17364A"/>
                 </a:solidFill>
@@ -12267,7 +12446,7 @@
               </a:rPr>
               <a:t>Agency privacy, cybersecurity, data governance, procurement, and records management policies</a:t>
             </a:r>
-            <a:endParaRPr lang="en-US" sz="1550" dirty="0"/>
+            <a:endParaRPr lang="en-US" sz="1320" dirty="0"/>
           </a:p>
         </p:txBody>
       </p:sp>
@@ -12355,13 +12534,16 @@
           <a:ln/>
         </p:spPr>
         <p:txBody>
-          <a:bodyPr wrap="square" lIns="254" tIns="254" rIns="254" bIns="254" rtlCol="0" anchor="t">
+          <a:bodyPr wrap="square" lIns="508" tIns="508" rIns="508" bIns="508" rtlCol="0" anchor="t">
             <a:normAutofit/>
           </a:bodyPr>
           <a:lstStyle/>
           <a:p>
-            <a:r>
-              <a:rPr lang="en-US" sz="1380" dirty="0">
+            <a:pPr indent="0" marL="0">
+              <a:buNone/>
+            </a:pPr>
+            <a:r>
+              <a:rPr lang="en-US" sz="1220" dirty="0">
                 <a:solidFill>
                   <a:srgbClr val="17364A"/>
                 </a:solidFill>
@@ -12369,9 +12551,9 @@
                 <a:ea typeface="Aptos" pitchFamily="34" charset="-122"/>
                 <a:cs typeface="Aptos" pitchFamily="34" charset="-120"/>
               </a:rPr>
-              <a:t>Agency privacy, cybersecurity, data governance, procurement, and records management policies</a:t>
-            </a:r>
-            <a:endParaRPr lang="en-US" sz="1380" dirty="0"/>
+              <a:t>Agency privacy, cybersecurity, data governance, procurement, and.</a:t>
+            </a:r>
+            <a:endParaRPr lang="en-US" sz="1220" dirty="0"/>
           </a:p>
         </p:txBody>
       </p:sp>
@@ -12449,17 +12631,17 @@
         </p:nvSpPr>
         <p:spPr>
           <a:xfrm>
-            <a:off x="7799832" y="5001768"/>
-            <a:ext cx="3145536" cy="502920"/>
-          </a:xfrm>
-          <a:prstGeom prst="rect">
-            <a:avLst/>
-          </a:prstGeom>
-          <a:noFill/>
-          <a:ln/>
-        </p:spPr>
-        <p:txBody>
-          <a:bodyPr wrap="square" lIns="0" tIns="0" rIns="0" bIns="0" rtlCol="0" anchor="t">
+            <a:off x="7799832" y="4974336"/>
+            <a:ext cx="3145536" cy="576072"/>
+          </a:xfrm>
+          <a:prstGeom prst="rect">
+            <a:avLst/>
+          </a:prstGeom>
+          <a:noFill/>
+          <a:ln/>
+        </p:spPr>
+        <p:txBody>
+          <a:bodyPr wrap="square" lIns="254" tIns="254" rIns="254" bIns="254" rtlCol="0" anchor="t">
             <a:normAutofit/>
           </a:bodyPr>
           <a:lstStyle/>
@@ -12468,7 +12650,7 @@
               <a:buNone/>
             </a:pPr>
             <a:r>
-              <a:rPr lang="en-US" sz="1550" dirty="0">
+              <a:rPr lang="en-US" sz="1320" dirty="0">
                 <a:solidFill>
                   <a:srgbClr val="17364A"/>
                 </a:solidFill>
@@ -12476,9 +12658,9 @@
                 <a:ea typeface="Aptos" pitchFamily="34" charset="-122"/>
                 <a:cs typeface="Aptos" pitchFamily="34" charset="-120"/>
               </a:rPr>
-              <a:t>Connect the concept to public health purpose, responsible use, required safeguards, documentation, and the next action a department should take.</a:t>
-            </a:r>
-            <a:endParaRPr lang="en-US" sz="1550" dirty="0"/>
+              <a:t>Connect the concept to public health purpose, responsible use, required safeguards, documentation, and the next action a.</a:t>
+            </a:r>
+            <a:endParaRPr lang="en-US" sz="1320" dirty="0"/>
           </a:p>
         </p:txBody>
       </p:sp>
@@ -12779,63 +12961,75 @@
           <a:ln/>
         </p:spPr>
         <p:txBody>
-          <a:bodyPr wrap="square" lIns="635" tIns="635" rIns="635" bIns="635" rtlCol="0" anchor="t">
+          <a:bodyPr wrap="square" lIns="1016" tIns="1016" rIns="1016" bIns="1016" rtlCol="0" anchor="t">
             <a:normAutofit/>
           </a:bodyPr>
           <a:lstStyle/>
           <a:p>
+            <a:pPr indent="0" marL="0">
+              <a:buNone/>
+            </a:pPr>
             <a:r>
               <a:rPr lang="en-US" sz="1900" dirty="0">
                 <a:solidFill>
-                  <a:srgbClr val="17364A"/>
-                </a:solidFill>
-                <a:latin typeface="Aptos" pitchFamily="34" charset="0"/>
-                <a:ea typeface="Aptos" pitchFamily="34" charset="-122"/>
-                <a:cs typeface="Aptos" pitchFamily="34" charset="-120"/>
-              </a:rPr>
-              <a:t>Play 11: Build and Deploy AI Solutions - This lesson informs Play 11 by helping learners connect the lesson.</a:t>
+                  <a:srgbClr val="003A63"/>
+                </a:solidFill>
+                <a:latin typeface="Aptos" pitchFamily="34" charset="0"/>
+                <a:ea typeface="Aptos" pitchFamily="34" charset="-122"/>
+                <a:cs typeface="Aptos" pitchFamily="34" charset="-120"/>
+              </a:rPr>
+              <a:t>• Play 11: Build and Deploy AI Solutions - This lesson informs Play 11 by helping learners.</a:t>
             </a:r>
             <a:endParaRPr lang="en-US" sz="1900" dirty="0"/>
           </a:p>
           <a:p>
+            <a:pPr indent="0" marL="0">
+              <a:buNone/>
+            </a:pPr>
             <a:r>
               <a:rPr lang="en-US" sz="1900" dirty="0">
                 <a:solidFill>
-                  <a:srgbClr val="17364A"/>
-                </a:solidFill>
-                <a:latin typeface="Aptos" pitchFamily="34" charset="0"/>
-                <a:ea typeface="Aptos" pitchFamily="34" charset="-122"/>
-                <a:cs typeface="Aptos" pitchFamily="34" charset="-120"/>
-              </a:rPr>
-              <a:t>Play 2: Readiness Assessment - This lesson informs Play 2 by helping learners connect the lesson topic to.</a:t>
+                  <a:srgbClr val="003A63"/>
+                </a:solidFill>
+                <a:latin typeface="Aptos" pitchFamily="34" charset="0"/>
+                <a:ea typeface="Aptos" pitchFamily="34" charset="-122"/>
+                <a:cs typeface="Aptos" pitchFamily="34" charset="-120"/>
+              </a:rPr>
+              <a:t>• Play 2: Readiness Assessment - This lesson informs Play 2 by helping learners connect the.</a:t>
             </a:r>
             <a:endParaRPr lang="en-US" sz="1900" dirty="0"/>
           </a:p>
           <a:p>
+            <a:pPr indent="0" marL="0">
+              <a:buNone/>
+            </a:pPr>
             <a:r>
               <a:rPr lang="en-US" sz="1900" dirty="0">
                 <a:solidFill>
-                  <a:srgbClr val="17364A"/>
-                </a:solidFill>
-                <a:latin typeface="Aptos" pitchFamily="34" charset="0"/>
-                <a:ea typeface="Aptos" pitchFamily="34" charset="-122"/>
-                <a:cs typeface="Aptos" pitchFamily="34" charset="-120"/>
-              </a:rPr>
-              <a:t>Play 3: Establish AI Governance - This lesson informs Play 3 by helping learners connect the lesson topic to.</a:t>
+                  <a:srgbClr val="003A63"/>
+                </a:solidFill>
+                <a:latin typeface="Aptos" pitchFamily="34" charset="0"/>
+                <a:ea typeface="Aptos" pitchFamily="34" charset="-122"/>
+                <a:cs typeface="Aptos" pitchFamily="34" charset="-120"/>
+              </a:rPr>
+              <a:t>• Play 3: Establish AI Governance - This lesson informs Play 3 by helping learners connect the.</a:t>
             </a:r>
             <a:endParaRPr lang="en-US" sz="1900" dirty="0"/>
           </a:p>
           <a:p>
+            <a:pPr indent="0" marL="0">
+              <a:buNone/>
+            </a:pPr>
             <a:r>
               <a:rPr lang="en-US" sz="1900" dirty="0">
                 <a:solidFill>
-                  <a:srgbClr val="17364A"/>
-                </a:solidFill>
-                <a:latin typeface="Aptos" pitchFamily="34" charset="0"/>
-                <a:ea typeface="Aptos" pitchFamily="34" charset="-122"/>
-                <a:cs typeface="Aptos" pitchFamily="34" charset="-120"/>
-              </a:rPr>
-              <a:t>Play 1: Vision &amp; Guardrails - This lesson informs Play 1 by helping learners connect the lesson topic to.</a:t>
+                  <a:srgbClr val="003A63"/>
+                </a:solidFill>
+                <a:latin typeface="Aptos" pitchFamily="34" charset="0"/>
+                <a:ea typeface="Aptos" pitchFamily="34" charset="-122"/>
+                <a:cs typeface="Aptos" pitchFamily="34" charset="-120"/>
+              </a:rPr>
+              <a:t>• Play 1: Vision &amp; Guardrails - This lesson informs Play 1 by helping learners connect the.</a:t>
             </a:r>
             <a:endParaRPr lang="en-US" sz="1900" dirty="0"/>
           </a:p>
@@ -12915,17 +13109,17 @@
         </p:nvSpPr>
         <p:spPr>
           <a:xfrm>
-            <a:off x="8211312" y="1920240"/>
-            <a:ext cx="2734056" cy="1463040"/>
-          </a:xfrm>
-          <a:prstGeom prst="rect">
-            <a:avLst/>
-          </a:prstGeom>
-          <a:noFill/>
-          <a:ln/>
-        </p:spPr>
-        <p:txBody>
-          <a:bodyPr wrap="square" lIns="0" tIns="0" rIns="0" bIns="0" rtlCol="0" anchor="t">
+            <a:off x="8211312" y="1892808"/>
+            <a:ext cx="2734056" cy="1536192"/>
+          </a:xfrm>
+          <a:prstGeom prst="rect">
+            <a:avLst/>
+          </a:prstGeom>
+          <a:noFill/>
+          <a:ln/>
+        </p:spPr>
+        <p:txBody>
+          <a:bodyPr wrap="square" lIns="254" tIns="254" rIns="254" bIns="254" rtlCol="0" anchor="t">
             <a:normAutofit/>
           </a:bodyPr>
           <a:lstStyle/>
@@ -12934,7 +13128,7 @@
               <a:buNone/>
             </a:pPr>
             <a:r>
-              <a:rPr lang="en-US" sz="1550" dirty="0">
+              <a:rPr lang="en-US" sz="1320" dirty="0">
                 <a:solidFill>
                   <a:srgbClr val="17364A"/>
                 </a:solidFill>
@@ -12942,9 +13136,9 @@
                 <a:ea typeface="Aptos" pitchFamily="34" charset="-122"/>
                 <a:cs typeface="Aptos" pitchFamily="34" charset="-120"/>
               </a:rPr>
-              <a:t>Use the related plays to identify decisions, participants, timing, approvals, and documentation needed for responsible implementation.</a:t>
-            </a:r>
-            <a:endParaRPr lang="en-US" sz="1550" dirty="0"/>
+              <a:t>Use the related plays to identify decisions, participants, timing, approvals, and documentation needed for responsible.</a:t>
+            </a:r>
+            <a:endParaRPr lang="en-US" sz="1320" dirty="0"/>
           </a:p>
         </p:txBody>
       </p:sp>
@@ -13032,13 +13226,16 @@
           <a:ln/>
         </p:spPr>
         <p:txBody>
-          <a:bodyPr wrap="square" lIns="254" tIns="254" rIns="254" bIns="254" rtlCol="0" anchor="t">
+          <a:bodyPr wrap="square" lIns="508" tIns="508" rIns="508" bIns="508" rtlCol="0" anchor="t">
             <a:normAutofit/>
           </a:bodyPr>
           <a:lstStyle/>
           <a:p>
-            <a:r>
-              <a:rPr lang="en-US" sz="1380" dirty="0">
+            <a:pPr indent="0" marL="0">
+              <a:buNone/>
+            </a:pPr>
+            <a:r>
+              <a:rPr lang="en-US" sz="1220" dirty="0">
                 <a:solidFill>
                   <a:srgbClr val="17364A"/>
                 </a:solidFill>
@@ -13048,11 +13245,14 @@
               </a:rPr>
               <a:t>Locate the decision point in the playbook sequence.</a:t>
             </a:r>
-            <a:endParaRPr lang="en-US" sz="1380" dirty="0"/>
-          </a:p>
-          <a:p>
-            <a:r>
-              <a:rPr lang="en-US" sz="1380" dirty="0">
+            <a:endParaRPr lang="en-US" sz="1220" dirty="0"/>
+          </a:p>
+          <a:p>
+            <a:pPr indent="0" marL="0">
+              <a:buNone/>
+            </a:pPr>
+            <a:r>
+              <a:rPr lang="en-US" sz="1220" dirty="0">
                 <a:solidFill>
                   <a:srgbClr val="17364A"/>
                 </a:solidFill>
@@ -13062,11 +13262,14 @@
               </a:rPr>
               <a:t>Identify who should participate in the work.</a:t>
             </a:r>
-            <a:endParaRPr lang="en-US" sz="1380" dirty="0"/>
-          </a:p>
-          <a:p>
-            <a:r>
-              <a:rPr lang="en-US" sz="1380" dirty="0">
+            <a:endParaRPr lang="en-US" sz="1220" dirty="0"/>
+          </a:p>
+          <a:p>
+            <a:pPr indent="0" marL="0">
+              <a:buNone/>
+            </a:pPr>
+            <a:r>
+              <a:rPr lang="en-US" sz="1220" dirty="0">
                 <a:solidFill>
                   <a:srgbClr val="17364A"/>
                 </a:solidFill>
@@ -13076,7 +13279,7 @@
               </a:rPr>
               <a:t>Document the review, approval, or implementation step.</a:t>
             </a:r>
-            <a:endParaRPr lang="en-US" sz="1380" dirty="0"/>
+            <a:endParaRPr lang="en-US" sz="1220" dirty="0"/>
           </a:p>
         </p:txBody>
       </p:sp>
@@ -13377,63 +13580,75 @@
           <a:ln/>
         </p:spPr>
         <p:txBody>
-          <a:bodyPr wrap="square" lIns="635" tIns="635" rIns="635" bIns="635" rtlCol="0" anchor="t">
+          <a:bodyPr wrap="square" lIns="1016" tIns="1016" rIns="1016" bIns="1016" rtlCol="0" anchor="t">
             <a:normAutofit/>
           </a:bodyPr>
           <a:lstStyle/>
           <a:p>
+            <a:pPr indent="0" marL="0">
+              <a:buNone/>
+            </a:pPr>
             <a:r>
               <a:rPr lang="en-US" sz="1850" dirty="0">
                 <a:solidFill>
-                  <a:srgbClr val="17364A"/>
-                </a:solidFill>
-                <a:latin typeface="Aptos" pitchFamily="34" charset="0"/>
-                <a:ea typeface="Aptos" pitchFamily="34" charset="-122"/>
-                <a:cs typeface="Aptos" pitchFamily="34" charset="-120"/>
-              </a:rPr>
-              <a:t>Tool 4: AI Policy Landscape Scan (Worksheet) - Use AI Policy Landscape Scan to translate this lesson into a.</a:t>
+                  <a:srgbClr val="003A63"/>
+                </a:solidFill>
+                <a:latin typeface="Aptos" pitchFamily="34" charset="0"/>
+                <a:ea typeface="Aptos" pitchFamily="34" charset="-122"/>
+                <a:cs typeface="Aptos" pitchFamily="34" charset="-120"/>
+              </a:rPr>
+              <a:t>• Tool 4: AI Policy Landscape Scan (Worksheet) - Use AI Policy Landscape Scan to translate this.</a:t>
             </a:r>
             <a:endParaRPr lang="en-US" sz="1850" dirty="0"/>
           </a:p>
           <a:p>
+            <a:pPr indent="0" marL="0">
+              <a:buNone/>
+            </a:pPr>
             <a:r>
               <a:rPr lang="en-US" sz="1850" dirty="0">
                 <a:solidFill>
-                  <a:srgbClr val="17364A"/>
-                </a:solidFill>
-                <a:latin typeface="Aptos" pitchFamily="34" charset="0"/>
-                <a:ea typeface="Aptos" pitchFamily="34" charset="-122"/>
-                <a:cs typeface="Aptos" pitchFamily="34" charset="-120"/>
-              </a:rPr>
-              <a:t>Tool 5: AI Environmental and Resource Impact Review (Checklist) - Use this tool to complete or strengthen.</a:t>
+                  <a:srgbClr val="003A63"/>
+                </a:solidFill>
+                <a:latin typeface="Aptos" pitchFamily="34" charset="0"/>
+                <a:ea typeface="Aptos" pitchFamily="34" charset="-122"/>
+                <a:cs typeface="Aptos" pitchFamily="34" charset="-120"/>
+              </a:rPr>
+              <a:t>• Tool 5: AI Environmental and Resource Impact Review (Checklist) - Use this tool to complete or.</a:t>
             </a:r>
             <a:endParaRPr lang="en-US" sz="1850" dirty="0"/>
           </a:p>
           <a:p>
+            <a:pPr indent="0" marL="0">
+              <a:buNone/>
+            </a:pPr>
             <a:r>
               <a:rPr lang="en-US" sz="1850" dirty="0">
                 <a:solidFill>
-                  <a:srgbClr val="17364A"/>
-                </a:solidFill>
-                <a:latin typeface="Aptos" pitchFamily="34" charset="0"/>
-                <a:ea typeface="Aptos" pitchFamily="34" charset="-122"/>
-                <a:cs typeface="Aptos" pitchFamily="34" charset="-120"/>
-              </a:rPr>
-              <a:t>Tool 6: Human-Centered AI Decision Rule Checklist (Checklist) - Use Human-Centered AI Decision Rule.</a:t>
+                  <a:srgbClr val="003A63"/>
+                </a:solidFill>
+                <a:latin typeface="Aptos" pitchFamily="34" charset="0"/>
+                <a:ea typeface="Aptos" pitchFamily="34" charset="-122"/>
+                <a:cs typeface="Aptos" pitchFamily="34" charset="-120"/>
+              </a:rPr>
+              <a:t>• Tool 6: Human-Centered AI Decision Rule Checklist (Checklist) - Use Human-Centered AI Decision.</a:t>
             </a:r>
             <a:endParaRPr lang="en-US" sz="1850" dirty="0"/>
           </a:p>
           <a:p>
+            <a:pPr indent="0" marL="0">
+              <a:buNone/>
+            </a:pPr>
             <a:r>
               <a:rPr lang="en-US" sz="1850" dirty="0">
                 <a:solidFill>
-                  <a:srgbClr val="17364A"/>
-                </a:solidFill>
-                <a:latin typeface="Aptos" pitchFamily="34" charset="0"/>
-                <a:ea typeface="Aptos" pitchFamily="34" charset="-122"/>
-                <a:cs typeface="Aptos" pitchFamily="34" charset="-120"/>
-              </a:rPr>
-              <a:t>Tool 8: AI Project Charter (Planning) - Use AI Project Charter to translate this lesson into a documented.</a:t>
+                  <a:srgbClr val="003A63"/>
+                </a:solidFill>
+                <a:latin typeface="Aptos" pitchFamily="34" charset="0"/>
+                <a:ea typeface="Aptos" pitchFamily="34" charset="-122"/>
+                <a:cs typeface="Aptos" pitchFamily="34" charset="-120"/>
+              </a:rPr>
+              <a:t>• Tool 8: AI Project Charter (Planning) - Use AI Project Charter to translate this lesson into a.</a:t>
             </a:r>
             <a:endParaRPr lang="en-US" sz="1850" dirty="0"/>
           </a:p>
@@ -13513,17 +13728,17 @@
         </p:nvSpPr>
         <p:spPr>
           <a:xfrm>
-            <a:off x="8211312" y="1920240"/>
-            <a:ext cx="2734056" cy="1463040"/>
-          </a:xfrm>
-          <a:prstGeom prst="rect">
-            <a:avLst/>
-          </a:prstGeom>
-          <a:noFill/>
-          <a:ln/>
-        </p:spPr>
-        <p:txBody>
-          <a:bodyPr wrap="square" lIns="0" tIns="0" rIns="0" bIns="0" rtlCol="0" anchor="t">
+            <a:off x="8211312" y="1892808"/>
+            <a:ext cx="2734056" cy="1536192"/>
+          </a:xfrm>
+          <a:prstGeom prst="rect">
+            <a:avLst/>
+          </a:prstGeom>
+          <a:noFill/>
+          <a:ln/>
+        </p:spPr>
+        <p:txBody>
+          <a:bodyPr wrap="square" lIns="254" tIns="254" rIns="254" bIns="254" rtlCol="0" anchor="t">
             <a:normAutofit/>
           </a:bodyPr>
           <a:lstStyle/>
@@ -13532,7 +13747,7 @@
               <a:buNone/>
             </a:pPr>
             <a:r>
-              <a:rPr lang="en-US" sz="1550" dirty="0">
+              <a:rPr lang="en-US" sz="1320" dirty="0">
                 <a:solidFill>
                   <a:srgbClr val="17364A"/>
                 </a:solidFill>
@@ -13540,9 +13755,9 @@
                 <a:ea typeface="Aptos" pitchFamily="34" charset="-122"/>
                 <a:cs typeface="Aptos" pitchFamily="34" charset="-120"/>
               </a:rPr>
-              <a:t>Use linked tools when your department needs a structured worksheet, template, checklist, review process, or documentation artifact.</a:t>
-            </a:r>
-            <a:endParaRPr lang="en-US" sz="1550" dirty="0"/>
+              <a:t>Use linked tools when your department needs a structured worksheet, template, checklist, review process, or.</a:t>
+            </a:r>
+            <a:endParaRPr lang="en-US" sz="1320" dirty="0"/>
           </a:p>
         </p:txBody>
       </p:sp>
@@ -13630,13 +13845,16 @@
           <a:ln/>
         </p:spPr>
         <p:txBody>
-          <a:bodyPr wrap="square" lIns="254" tIns="254" rIns="254" bIns="254" rtlCol="0" anchor="t">
+          <a:bodyPr wrap="square" lIns="508" tIns="508" rIns="508" bIns="508" rtlCol="0" anchor="t">
             <a:normAutofit/>
           </a:bodyPr>
           <a:lstStyle/>
           <a:p>
-            <a:r>
-              <a:rPr lang="en-US" sz="1380" dirty="0">
+            <a:pPr indent="0" marL="0">
+              <a:buNone/>
+            </a:pPr>
+            <a:r>
+              <a:rPr lang="en-US" sz="1220" dirty="0">
                 <a:solidFill>
                   <a:srgbClr val="17364A"/>
                 </a:solidFill>
@@ -13646,11 +13864,14 @@
               </a:rPr>
               <a:t>Use a tool when no comparable local process exists.</a:t>
             </a:r>
-            <a:endParaRPr lang="en-US" sz="1380" dirty="0"/>
-          </a:p>
-          <a:p>
-            <a:r>
-              <a:rPr lang="en-US" sz="1380" dirty="0">
+            <a:endParaRPr lang="en-US" sz="1220" dirty="0"/>
+          </a:p>
+          <a:p>
+            <a:pPr indent="0" marL="0">
+              <a:buNone/>
+            </a:pPr>
+            <a:r>
+              <a:rPr lang="en-US" sz="1220" dirty="0">
                 <a:solidFill>
                   <a:srgbClr val="17364A"/>
                 </a:solidFill>
@@ -13658,13 +13879,16 @@
                 <a:ea typeface="Aptos" pitchFamily="34" charset="-122"/>
                 <a:cs typeface="Aptos" pitchFamily="34" charset="-120"/>
               </a:rPr>
-              <a:t>Adapt existing department templates when they already fit the purpose.</a:t>
-            </a:r>
-            <a:endParaRPr lang="en-US" sz="1380" dirty="0"/>
-          </a:p>
-          <a:p>
-            <a:r>
-              <a:rPr lang="en-US" sz="1380" dirty="0">
+              <a:t>Adapt existing department templates when they already fit the.</a:t>
+            </a:r>
+            <a:endParaRPr lang="en-US" sz="1220" dirty="0"/>
+          </a:p>
+          <a:p>
+            <a:pPr indent="0" marL="0">
+              <a:buNone/>
+            </a:pPr>
+            <a:r>
+              <a:rPr lang="en-US" sz="1220" dirty="0">
                 <a:solidFill>
                   <a:srgbClr val="17364A"/>
                 </a:solidFill>
@@ -13674,7 +13898,7 @@
               </a:rPr>
               <a:t>Save the completed artifact as evidence of the decision.</a:t>
             </a:r>
-            <a:endParaRPr lang="en-US" sz="1380" dirty="0"/>
+            <a:endParaRPr lang="en-US" sz="1220" dirty="0"/>
           </a:p>
         </p:txBody>
       </p:sp>
@@ -13975,49 +14199,58 @@
           <a:ln/>
         </p:spPr>
         <p:txBody>
-          <a:bodyPr wrap="square" lIns="635" tIns="635" rIns="635" bIns="635" rtlCol="0" anchor="t">
+          <a:bodyPr wrap="square" lIns="1016" tIns="1016" rIns="1016" bIns="1016" rtlCol="0" anchor="t">
             <a:normAutofit/>
           </a:bodyPr>
           <a:lstStyle/>
           <a:p>
+            <a:pPr indent="0" marL="0">
+              <a:buNone/>
+            </a:pPr>
             <a:r>
               <a:rPr lang="en-US" sz="2100" dirty="0">
                 <a:solidFill>
-                  <a:srgbClr val="17364A"/>
-                </a:solidFill>
-                <a:latin typeface="Aptos" pitchFamily="34" charset="0"/>
-                <a:ea typeface="Aptos" pitchFamily="34" charset="-122"/>
-                <a:cs typeface="Aptos" pitchFamily="34" charset="-120"/>
-              </a:rPr>
-              <a:t>Explain the purpose of cloud, containers, and secure deployment basics in public health AI work.</a:t>
+                  <a:srgbClr val="003A63"/>
+                </a:solidFill>
+                <a:latin typeface="Aptos" pitchFamily="34" charset="0"/>
+                <a:ea typeface="Aptos" pitchFamily="34" charset="-122"/>
+                <a:cs typeface="Aptos" pitchFamily="34" charset="-120"/>
+              </a:rPr>
+              <a:t>• Explain the purpose of cloud, containers, and secure deployment basics in public health AI work.</a:t>
             </a:r>
             <a:endParaRPr lang="en-US" sz="2100" dirty="0"/>
           </a:p>
           <a:p>
+            <a:pPr indent="0" marL="0">
+              <a:buNone/>
+            </a:pPr>
             <a:r>
               <a:rPr lang="en-US" sz="2100" dirty="0">
                 <a:solidFill>
-                  <a:srgbClr val="17364A"/>
-                </a:solidFill>
-                <a:latin typeface="Aptos" pitchFamily="34" charset="0"/>
-                <a:ea typeface="Aptos" pitchFamily="34" charset="-122"/>
-                <a:cs typeface="Aptos" pitchFamily="34" charset="-120"/>
-              </a:rPr>
-              <a:t>Identify the technical, operational, privacy, security, equity, and governance issues associated with.</a:t>
+                  <a:srgbClr val="003A63"/>
+                </a:solidFill>
+                <a:latin typeface="Aptos" pitchFamily="34" charset="0"/>
+                <a:ea typeface="Aptos" pitchFamily="34" charset="-122"/>
+                <a:cs typeface="Aptos" pitchFamily="34" charset="-120"/>
+              </a:rPr>
+              <a:t>• Identify the technical, operational, privacy, security, equity, and governance issues.</a:t>
             </a:r>
             <a:endParaRPr lang="en-US" sz="2100" dirty="0"/>
           </a:p>
           <a:p>
+            <a:pPr indent="0" marL="0">
+              <a:buNone/>
+            </a:pPr>
             <a:r>
               <a:rPr lang="en-US" sz="2100" dirty="0">
                 <a:solidFill>
-                  <a:srgbClr val="17364A"/>
-                </a:solidFill>
-                <a:latin typeface="Aptos" pitchFamily="34" charset="0"/>
-                <a:ea typeface="Aptos" pitchFamily="34" charset="-122"/>
-                <a:cs typeface="Aptos" pitchFamily="34" charset="-120"/>
-              </a:rPr>
-              <a:t>Apply the topic to a real or realistic public health workflow, system, or implementation scenario.</a:t>
+                  <a:srgbClr val="003A63"/>
+                </a:solidFill>
+                <a:latin typeface="Aptos" pitchFamily="34" charset="0"/>
+                <a:ea typeface="Aptos" pitchFamily="34" charset="-122"/>
+                <a:cs typeface="Aptos" pitchFamily="34" charset="-120"/>
+              </a:rPr>
+              <a:t>• Apply the topic to a real or realistic public health workflow, system, or implementation.</a:t>
             </a:r>
             <a:endParaRPr lang="en-US" sz="2100" dirty="0"/>
           </a:p>
@@ -14097,17 +14330,17 @@
         </p:nvSpPr>
         <p:spPr>
           <a:xfrm>
-            <a:off x="7799832" y="1828800"/>
-            <a:ext cx="3145536" cy="685800"/>
-          </a:xfrm>
-          <a:prstGeom prst="rect">
-            <a:avLst/>
-          </a:prstGeom>
-          <a:noFill/>
-          <a:ln/>
-        </p:spPr>
-        <p:txBody>
-          <a:bodyPr wrap="square" lIns="0" tIns="0" rIns="0" bIns="0" rtlCol="0" anchor="t">
+            <a:off x="7799832" y="1801368"/>
+            <a:ext cx="3145536" cy="758952"/>
+          </a:xfrm>
+          <a:prstGeom prst="rect">
+            <a:avLst/>
+          </a:prstGeom>
+          <a:noFill/>
+          <a:ln/>
+        </p:spPr>
+        <p:txBody>
+          <a:bodyPr wrap="square" lIns="254" tIns="254" rIns="254" bIns="254" rtlCol="0" anchor="t">
             <a:normAutofit/>
           </a:bodyPr>
           <a:lstStyle/>
@@ -14116,7 +14349,7 @@
               <a:buNone/>
             </a:pPr>
             <a:r>
-              <a:rPr lang="en-US" sz="1550" dirty="0">
+              <a:rPr lang="en-US" sz="1320" dirty="0">
                 <a:solidFill>
                   <a:srgbClr val="17364A"/>
                 </a:solidFill>
@@ -14126,7 +14359,7 @@
               </a:rPr>
               <a:t>Explain the purpose of cloud, containers, and secure deployment basics in public health AI work.</a:t>
             </a:r>
-            <a:endParaRPr lang="en-US" sz="1550" dirty="0"/>
+            <a:endParaRPr lang="en-US" sz="1320" dirty="0"/>
           </a:p>
         </p:txBody>
       </p:sp>
@@ -14214,13 +14447,16 @@
           <a:ln/>
         </p:spPr>
         <p:txBody>
-          <a:bodyPr wrap="square" lIns="254" tIns="254" rIns="254" bIns="254" rtlCol="0" anchor="t">
+          <a:bodyPr wrap="square" lIns="508" tIns="508" rIns="508" bIns="508" rtlCol="0" anchor="t">
             <a:normAutofit/>
           </a:bodyPr>
           <a:lstStyle/>
           <a:p>
-            <a:r>
-              <a:rPr lang="en-US" sz="1380" dirty="0">
+            <a:pPr indent="0" marL="0">
+              <a:buNone/>
+            </a:pPr>
+            <a:r>
+              <a:rPr lang="en-US" sz="1220" dirty="0">
                 <a:solidFill>
                   <a:srgbClr val="17364A"/>
                 </a:solidFill>
@@ -14228,13 +14464,16 @@
                 <a:ea typeface="Aptos" pitchFamily="34" charset="-122"/>
                 <a:cs typeface="Aptos" pitchFamily="34" charset="-120"/>
               </a:rPr>
-              <a:t>Identify the technical, operational, privacy, security, equity, and governance issues.</a:t>
-            </a:r>
-            <a:endParaRPr lang="en-US" sz="1380" dirty="0"/>
-          </a:p>
-          <a:p>
-            <a:r>
-              <a:rPr lang="en-US" sz="1380" dirty="0">
+              <a:t>Identify the technical, operational, privacy, security, equity,.</a:t>
+            </a:r>
+            <a:endParaRPr lang="en-US" sz="1220" dirty="0"/>
+          </a:p>
+          <a:p>
+            <a:pPr indent="0" marL="0">
+              <a:buNone/>
+            </a:pPr>
+            <a:r>
+              <a:rPr lang="en-US" sz="1220" dirty="0">
                 <a:solidFill>
                   <a:srgbClr val="17364A"/>
                 </a:solidFill>
@@ -14242,13 +14481,16 @@
                 <a:ea typeface="Aptos" pitchFamily="34" charset="-122"/>
                 <a:cs typeface="Aptos" pitchFamily="34" charset="-120"/>
               </a:rPr>
-              <a:t>Recognize common failure modes that can affect safety, accuracy, trust, workflow fit, or.</a:t>
-            </a:r>
-            <a:endParaRPr lang="en-US" sz="1380" dirty="0"/>
-          </a:p>
-          <a:p>
-            <a:r>
-              <a:rPr lang="en-US" sz="1380" dirty="0">
+              <a:t>Recognize common failure modes that can affect safety, accuracy,.</a:t>
+            </a:r>
+            <a:endParaRPr lang="en-US" sz="1220" dirty="0"/>
+          </a:p>
+          <a:p>
+            <a:pPr indent="0" marL="0">
+              <a:buNone/>
+            </a:pPr>
+            <a:r>
+              <a:rPr lang="en-US" sz="1220" dirty="0">
                 <a:solidFill>
                   <a:srgbClr val="17364A"/>
                 </a:solidFill>
@@ -14256,9 +14498,9 @@
                 <a:ea typeface="Aptos" pitchFamily="34" charset="-122"/>
                 <a:cs typeface="Aptos" pitchFamily="34" charset="-120"/>
               </a:rPr>
-              <a:t>Identify practical guardrails that should be documented before implementation.</a:t>
-            </a:r>
-            <a:endParaRPr lang="en-US" sz="1380" dirty="0"/>
+              <a:t>Identify practical guardrails that should be documented before.</a:t>
+            </a:r>
+            <a:endParaRPr lang="en-US" sz="1220" dirty="0"/>
           </a:p>
         </p:txBody>
       </p:sp>
@@ -14336,17 +14578,17 @@
         </p:nvSpPr>
         <p:spPr>
           <a:xfrm>
-            <a:off x="7799832" y="5001768"/>
-            <a:ext cx="3145536" cy="502920"/>
-          </a:xfrm>
-          <a:prstGeom prst="rect">
-            <a:avLst/>
-          </a:prstGeom>
-          <a:noFill/>
-          <a:ln/>
-        </p:spPr>
-        <p:txBody>
-          <a:bodyPr wrap="square" lIns="0" tIns="0" rIns="0" bIns="0" rtlCol="0" anchor="t">
+            <a:off x="7799832" y="4974336"/>
+            <a:ext cx="3145536" cy="576072"/>
+          </a:xfrm>
+          <a:prstGeom prst="rect">
+            <a:avLst/>
+          </a:prstGeom>
+          <a:noFill/>
+          <a:ln/>
+        </p:spPr>
+        <p:txBody>
+          <a:bodyPr wrap="square" lIns="254" tIns="254" rIns="254" bIns="254" rtlCol="0" anchor="t">
             <a:normAutofit/>
           </a:bodyPr>
           <a:lstStyle/>
@@ -14355,7 +14597,7 @@
               <a:buNone/>
             </a:pPr>
             <a:r>
-              <a:rPr lang="en-US" sz="1550" dirty="0">
+              <a:rPr lang="en-US" sz="1320" dirty="0">
                 <a:solidFill>
                   <a:srgbClr val="17364A"/>
                 </a:solidFill>
@@ -14363,9 +14605,9 @@
                 <a:ea typeface="Aptos" pitchFamily="34" charset="-122"/>
                 <a:cs typeface="Aptos" pitchFamily="34" charset="-120"/>
               </a:rPr>
-              <a:t>Use the assignment to test whether you can explain the concept, apply it to a realistic public health situation, and identify what would need review before the work moves forward.</a:t>
-            </a:r>
-            <a:endParaRPr lang="en-US" sz="1550" dirty="0"/>
+              <a:t>Use the assignment to test whether you can explain the concept, apply it to a realistic public health situation, and.</a:t>
+            </a:r>
+            <a:endParaRPr lang="en-US" sz="1320" dirty="0"/>
           </a:p>
         </p:txBody>
       </p:sp>
@@ -14666,21 +14908,24 @@
           <a:ln/>
         </p:spPr>
         <p:txBody>
-          <a:bodyPr wrap="square" lIns="635" tIns="635" rIns="635" bIns="635" rtlCol="0" anchor="t">
+          <a:bodyPr wrap="square" lIns="1016" tIns="1016" rIns="1016" bIns="1016" rtlCol="0" anchor="t">
             <a:normAutofit/>
           </a:bodyPr>
           <a:lstStyle/>
           <a:p>
+            <a:pPr indent="0" marL="0">
+              <a:buNone/>
+            </a:pPr>
             <a:r>
               <a:rPr lang="en-US" sz="2100" dirty="0">
                 <a:solidFill>
-                  <a:srgbClr val="17364A"/>
-                </a:solidFill>
-                <a:latin typeface="Aptos" pitchFamily="34" charset="0"/>
-                <a:ea typeface="Aptos" pitchFamily="34" charset="-122"/>
-                <a:cs typeface="Aptos" pitchFamily="34" charset="-120"/>
-              </a:rPr>
-              <a:t>Produce a secure deployment readiness worksheet that can support readiness assessment, governance.</a:t>
+                  <a:srgbClr val="003A63"/>
+                </a:solidFill>
+                <a:latin typeface="Aptos" pitchFamily="34" charset="0"/>
+                <a:ea typeface="Aptos" pitchFamily="34" charset="-122"/>
+                <a:cs typeface="Aptos" pitchFamily="34" charset="-120"/>
+              </a:rPr>
+              <a:t>• Produce a secure deployment readiness worksheet that can support readiness assessment,.</a:t>
             </a:r>
             <a:endParaRPr lang="en-US" sz="2100" dirty="0"/>
           </a:p>
@@ -14760,17 +15005,17 @@
         </p:nvSpPr>
         <p:spPr>
           <a:xfrm>
-            <a:off x="7799832" y="1828800"/>
-            <a:ext cx="3145536" cy="685800"/>
-          </a:xfrm>
-          <a:prstGeom prst="rect">
-            <a:avLst/>
-          </a:prstGeom>
-          <a:noFill/>
-          <a:ln/>
-        </p:spPr>
-        <p:txBody>
-          <a:bodyPr wrap="square" lIns="0" tIns="0" rIns="0" bIns="0" rtlCol="0" anchor="t">
+            <a:off x="7799832" y="1801368"/>
+            <a:ext cx="3145536" cy="758952"/>
+          </a:xfrm>
+          <a:prstGeom prst="rect">
+            <a:avLst/>
+          </a:prstGeom>
+          <a:noFill/>
+          <a:ln/>
+        </p:spPr>
+        <p:txBody>
+          <a:bodyPr wrap="square" lIns="254" tIns="254" rIns="254" bIns="254" rtlCol="0" anchor="t">
             <a:normAutofit/>
           </a:bodyPr>
           <a:lstStyle/>
@@ -14779,7 +15024,7 @@
               <a:buNone/>
             </a:pPr>
             <a:r>
-              <a:rPr lang="en-US" sz="1550" dirty="0">
+              <a:rPr lang="en-US" sz="1320" dirty="0">
                 <a:solidFill>
                   <a:srgbClr val="17364A"/>
                 </a:solidFill>
@@ -14789,7 +15034,7 @@
               </a:rPr>
               <a:t>Produce a secure deployment readiness worksheet that can support readiness assessment, governance.</a:t>
             </a:r>
-            <a:endParaRPr lang="en-US" sz="1550" dirty="0"/>
+            <a:endParaRPr lang="en-US" sz="1320" dirty="0"/>
           </a:p>
         </p:txBody>
       </p:sp>
@@ -14877,13 +15122,16 @@
           <a:ln/>
         </p:spPr>
         <p:txBody>
-          <a:bodyPr wrap="square" lIns="254" tIns="254" rIns="254" bIns="254" rtlCol="0" anchor="t">
+          <a:bodyPr wrap="square" lIns="508" tIns="508" rIns="508" bIns="508" rtlCol="0" anchor="t">
             <a:normAutofit/>
           </a:bodyPr>
           <a:lstStyle/>
           <a:p>
-            <a:r>
-              <a:rPr lang="en-US" sz="1380" dirty="0">
+            <a:pPr indent="0" marL="0">
+              <a:buNone/>
+            </a:pPr>
+            <a:r>
+              <a:rPr lang="en-US" sz="1220" dirty="0">
                 <a:solidFill>
                   <a:srgbClr val="17364A"/>
                 </a:solidFill>
@@ -14891,9 +15139,9 @@
                 <a:ea typeface="Aptos" pitchFamily="34" charset="-122"/>
                 <a:cs typeface="Aptos" pitchFamily="34" charset="-120"/>
               </a:rPr>
-              <a:t>Produce a secure deployment readiness worksheet that can support readiness assessment,.</a:t>
-            </a:r>
-            <a:endParaRPr lang="en-US" sz="1380" dirty="0"/>
+              <a:t>Produce a secure deployment readiness worksheet that can support.</a:t>
+            </a:r>
+            <a:endParaRPr lang="en-US" sz="1220" dirty="0"/>
           </a:p>
         </p:txBody>
       </p:sp>
@@ -14971,17 +15219,17 @@
         </p:nvSpPr>
         <p:spPr>
           <a:xfrm>
-            <a:off x="7799832" y="5001768"/>
-            <a:ext cx="3145536" cy="502920"/>
-          </a:xfrm>
-          <a:prstGeom prst="rect">
-            <a:avLst/>
-          </a:prstGeom>
-          <a:noFill/>
-          <a:ln/>
-        </p:spPr>
-        <p:txBody>
-          <a:bodyPr wrap="square" lIns="0" tIns="0" rIns="0" bIns="0" rtlCol="0" anchor="t">
+            <a:off x="7799832" y="4974336"/>
+            <a:ext cx="3145536" cy="576072"/>
+          </a:xfrm>
+          <a:prstGeom prst="rect">
+            <a:avLst/>
+          </a:prstGeom>
+          <a:noFill/>
+          <a:ln/>
+        </p:spPr>
+        <p:txBody>
+          <a:bodyPr wrap="square" lIns="254" tIns="254" rIns="254" bIns="254" rtlCol="0" anchor="t">
             <a:normAutofit/>
           </a:bodyPr>
           <a:lstStyle/>
@@ -14990,7 +15238,7 @@
               <a:buNone/>
             </a:pPr>
             <a:r>
-              <a:rPr lang="en-US" sz="1550" dirty="0">
+              <a:rPr lang="en-US" sz="1320" dirty="0">
                 <a:solidFill>
                   <a:srgbClr val="17364A"/>
                 </a:solidFill>
@@ -14998,9 +15246,9 @@
                 <a:ea typeface="Aptos" pitchFamily="34" charset="-122"/>
                 <a:cs typeface="Aptos" pitchFamily="34" charset="-120"/>
               </a:rPr>
-              <a:t>Use the assignment to test whether you can explain the concept, apply it to a realistic public health situation, and identify what would need review before the work moves forward.</a:t>
-            </a:r>
-            <a:endParaRPr lang="en-US" sz="1550" dirty="0"/>
+              <a:t>Use the assignment to test whether you can explain the concept, apply it to a realistic public health situation, and.</a:t>
+            </a:r>
+            <a:endParaRPr lang="en-US" sz="1320" dirty="0"/>
           </a:p>
         </p:txBody>
       </p:sp>
@@ -15301,49 +15549,58 @@
           <a:ln/>
         </p:spPr>
         <p:txBody>
-          <a:bodyPr wrap="square" lIns="635" tIns="635" rIns="635" bIns="635" rtlCol="0" anchor="t">
+          <a:bodyPr wrap="square" lIns="1016" tIns="1016" rIns="1016" bIns="1016" rtlCol="0" anchor="t">
             <a:normAutofit/>
           </a:bodyPr>
           <a:lstStyle/>
           <a:p>
+            <a:pPr indent="0" marL="0">
+              <a:buNone/>
+            </a:pPr>
             <a:r>
               <a:rPr lang="en-US" sz="2100" dirty="0">
                 <a:solidFill>
-                  <a:srgbClr val="17364A"/>
-                </a:solidFill>
-                <a:latin typeface="Aptos" pitchFamily="34" charset="0"/>
-                <a:ea typeface="Aptos" pitchFamily="34" charset="-122"/>
-                <a:cs typeface="Aptos" pitchFamily="34" charset="-120"/>
-              </a:rPr>
-              <a:t>Many AI tools are deployed in cloud environments or packaged in containers that make applications.</a:t>
+                  <a:srgbClr val="003A63"/>
+                </a:solidFill>
+                <a:latin typeface="Aptos" pitchFamily="34" charset="0"/>
+                <a:ea typeface="Aptos" pitchFamily="34" charset="-122"/>
+                <a:cs typeface="Aptos" pitchFamily="34" charset="-120"/>
+              </a:rPr>
+              <a:t>• Many AI tools are deployed in cloud environments or packaged in containers that make.</a:t>
             </a:r>
             <a:endParaRPr lang="en-US" sz="2100" dirty="0"/>
           </a:p>
           <a:p>
+            <a:pPr indent="0" marL="0">
+              <a:buNone/>
+            </a:pPr>
             <a:r>
               <a:rPr lang="en-US" sz="2100" dirty="0">
                 <a:solidFill>
-                  <a:srgbClr val="17364A"/>
-                </a:solidFill>
-                <a:latin typeface="Aptos" pitchFamily="34" charset="0"/>
-                <a:ea typeface="Aptos" pitchFamily="34" charset="-122"/>
-                <a:cs typeface="Aptos" pitchFamily="34" charset="-120"/>
-              </a:rPr>
-              <a:t>Public health staff do not need to become cloud engineers, but they need enough technical literacy to.</a:t>
+                  <a:srgbClr val="003A63"/>
+                </a:solidFill>
+                <a:latin typeface="Aptos" pitchFamily="34" charset="0"/>
+                <a:ea typeface="Aptos" pitchFamily="34" charset="-122"/>
+                <a:cs typeface="Aptos" pitchFamily="34" charset="-120"/>
+              </a:rPr>
+              <a:t>• Public health staff do not need to become cloud engineers, but they need enough technical.</a:t>
             </a:r>
             <a:endParaRPr lang="en-US" sz="2100" dirty="0"/>
           </a:p>
           <a:p>
+            <a:pPr indent="0" marL="0">
+              <a:buNone/>
+            </a:pPr>
             <a:r>
               <a:rPr lang="en-US" sz="2100" dirty="0">
                 <a:solidFill>
-                  <a:srgbClr val="17364A"/>
-                </a:solidFill>
-                <a:latin typeface="Aptos" pitchFamily="34" charset="0"/>
-                <a:ea typeface="Aptos" pitchFamily="34" charset="-122"/>
-                <a:cs typeface="Aptos" pitchFamily="34" charset="-120"/>
-              </a:rPr>
-              <a:t>This module connects deployment choices to public health continuity, privacy, cybersecurity, and.</a:t>
+                  <a:srgbClr val="003A63"/>
+                </a:solidFill>
+                <a:latin typeface="Aptos" pitchFamily="34" charset="0"/>
+                <a:ea typeface="Aptos" pitchFamily="34" charset="-122"/>
+                <a:cs typeface="Aptos" pitchFamily="34" charset="-120"/>
+              </a:rPr>
+              <a:t>• This module connects deployment choices to public health continuity, privacy, cybersecurity,.</a:t>
             </a:r>
             <a:endParaRPr lang="en-US" sz="2100" dirty="0"/>
           </a:p>
@@ -15423,17 +15680,17 @@
         </p:nvSpPr>
         <p:spPr>
           <a:xfrm>
-            <a:off x="7799832" y="1828800"/>
-            <a:ext cx="3145536" cy="685800"/>
-          </a:xfrm>
-          <a:prstGeom prst="rect">
-            <a:avLst/>
-          </a:prstGeom>
-          <a:noFill/>
-          <a:ln/>
-        </p:spPr>
-        <p:txBody>
-          <a:bodyPr wrap="square" lIns="0" tIns="0" rIns="0" bIns="0" rtlCol="0" anchor="t">
+            <a:off x="7799832" y="1801368"/>
+            <a:ext cx="3145536" cy="758952"/>
+          </a:xfrm>
+          <a:prstGeom prst="rect">
+            <a:avLst/>
+          </a:prstGeom>
+          <a:noFill/>
+          <a:ln/>
+        </p:spPr>
+        <p:txBody>
+          <a:bodyPr wrap="square" lIns="254" tIns="254" rIns="254" bIns="254" rtlCol="0" anchor="t">
             <a:normAutofit/>
           </a:bodyPr>
           <a:lstStyle/>
@@ -15442,7 +15699,7 @@
               <a:buNone/>
             </a:pPr>
             <a:r>
-              <a:rPr lang="en-US" sz="1550" dirty="0">
+              <a:rPr lang="en-US" sz="1320" dirty="0">
                 <a:solidFill>
                   <a:srgbClr val="17364A"/>
                 </a:solidFill>
@@ -15452,7 +15709,7 @@
               </a:rPr>
               <a:t>Many AI tools are deployed in cloud environments or packaged in containers that make applications.</a:t>
             </a:r>
-            <a:endParaRPr lang="en-US" sz="1550" dirty="0"/>
+            <a:endParaRPr lang="en-US" sz="1320" dirty="0"/>
           </a:p>
         </p:txBody>
       </p:sp>
@@ -15540,13 +15797,16 @@
           <a:ln/>
         </p:spPr>
         <p:txBody>
-          <a:bodyPr wrap="square" lIns="254" tIns="254" rIns="254" bIns="254" rtlCol="0" anchor="t">
+          <a:bodyPr wrap="square" lIns="508" tIns="508" rIns="508" bIns="508" rtlCol="0" anchor="t">
             <a:normAutofit/>
           </a:bodyPr>
           <a:lstStyle/>
           <a:p>
-            <a:r>
-              <a:rPr lang="en-US" sz="1380" dirty="0">
+            <a:pPr indent="0" marL="0">
+              <a:buNone/>
+            </a:pPr>
+            <a:r>
+              <a:rPr lang="en-US" sz="1220" dirty="0">
                 <a:solidFill>
                   <a:srgbClr val="17364A"/>
                 </a:solidFill>
@@ -15554,13 +15814,16 @@
                 <a:ea typeface="Aptos" pitchFamily="34" charset="-122"/>
                 <a:cs typeface="Aptos" pitchFamily="34" charset="-120"/>
               </a:rPr>
-              <a:t>Many AI tools are deployed in cloud environments or packaged in containers that make.</a:t>
-            </a:r>
-            <a:endParaRPr lang="en-US" sz="1380" dirty="0"/>
-          </a:p>
-          <a:p>
-            <a:r>
-              <a:rPr lang="en-US" sz="1380" dirty="0">
+              <a:t>Many AI tools are deployed in cloud environments or packaged in.</a:t>
+            </a:r>
+            <a:endParaRPr lang="en-US" sz="1220" dirty="0"/>
+          </a:p>
+          <a:p>
+            <a:pPr indent="0" marL="0">
+              <a:buNone/>
+            </a:pPr>
+            <a:r>
+              <a:rPr lang="en-US" sz="1220" dirty="0">
                 <a:solidFill>
                   <a:srgbClr val="17364A"/>
                 </a:solidFill>
@@ -15568,13 +15831,16 @@
                 <a:ea typeface="Aptos" pitchFamily="34" charset="-122"/>
                 <a:cs typeface="Aptos" pitchFamily="34" charset="-120"/>
               </a:rPr>
-              <a:t>Public health staff do not need to become cloud engineers, but they need enough technical.</a:t>
-            </a:r>
-            <a:endParaRPr lang="en-US" sz="1380" dirty="0"/>
-          </a:p>
-          <a:p>
-            <a:r>
-              <a:rPr lang="en-US" sz="1380" dirty="0">
+              <a:t>Public health staff do not need to become cloud engineers, but.</a:t>
+            </a:r>
+            <a:endParaRPr lang="en-US" sz="1220" dirty="0"/>
+          </a:p>
+          <a:p>
+            <a:pPr indent="0" marL="0">
+              <a:buNone/>
+            </a:pPr>
+            <a:r>
+              <a:rPr lang="en-US" sz="1220" dirty="0">
                 <a:solidFill>
                   <a:srgbClr val="17364A"/>
                 </a:solidFill>
@@ -15582,9 +15848,9 @@
                 <a:ea typeface="Aptos" pitchFamily="34" charset="-122"/>
                 <a:cs typeface="Aptos" pitchFamily="34" charset="-120"/>
               </a:rPr>
-              <a:t>This module connects deployment choices to public health continuity, privacy,.</a:t>
-            </a:r>
-            <a:endParaRPr lang="en-US" sz="1380" dirty="0"/>
+              <a:t>This module connects deployment choices to public health.</a:t>
+            </a:r>
+            <a:endParaRPr lang="en-US" sz="1220" dirty="0"/>
           </a:p>
         </p:txBody>
       </p:sp>
@@ -15662,17 +15928,17 @@
         </p:nvSpPr>
         <p:spPr>
           <a:xfrm>
-            <a:off x="7799832" y="5001768"/>
-            <a:ext cx="3145536" cy="502920"/>
-          </a:xfrm>
-          <a:prstGeom prst="rect">
-            <a:avLst/>
-          </a:prstGeom>
-          <a:noFill/>
-          <a:ln/>
-        </p:spPr>
-        <p:txBody>
-          <a:bodyPr wrap="square" lIns="0" tIns="0" rIns="0" bIns="0" rtlCol="0" anchor="t">
+            <a:off x="7799832" y="4974336"/>
+            <a:ext cx="3145536" cy="576072"/>
+          </a:xfrm>
+          <a:prstGeom prst="rect">
+            <a:avLst/>
+          </a:prstGeom>
+          <a:noFill/>
+          <a:ln/>
+        </p:spPr>
+        <p:txBody>
+          <a:bodyPr wrap="square" lIns="254" tIns="254" rIns="254" bIns="254" rtlCol="0" anchor="t">
             <a:normAutofit/>
           </a:bodyPr>
           <a:lstStyle/>
@@ -15681,7 +15947,7 @@
               <a:buNone/>
             </a:pPr>
             <a:r>
-              <a:rPr lang="en-US" sz="1550" dirty="0">
+              <a:rPr lang="en-US" sz="1320" dirty="0">
                 <a:solidFill>
                   <a:srgbClr val="17364A"/>
                 </a:solidFill>
@@ -15689,9 +15955,9 @@
                 <a:ea typeface="Aptos" pitchFamily="34" charset="-122"/>
                 <a:cs typeface="Aptos" pitchFamily="34" charset="-120"/>
               </a:rPr>
-              <a:t>Connect the concept to public health purpose, responsible use, required safeguards, documentation, and the next action a department should take.</a:t>
-            </a:r>
-            <a:endParaRPr lang="en-US" sz="1550" dirty="0"/>
+              <a:t>Connect the concept to public health purpose, responsible use, required safeguards, documentation, and the next action a.</a:t>
+            </a:r>
+            <a:endParaRPr lang="en-US" sz="1320" dirty="0"/>
           </a:p>
         </p:txBody>
       </p:sp>
@@ -15992,49 +16258,58 @@
           <a:ln/>
         </p:spPr>
         <p:txBody>
-          <a:bodyPr wrap="square" lIns="635" tIns="635" rIns="635" bIns="635" rtlCol="0" anchor="t">
+          <a:bodyPr wrap="square" lIns="1016" tIns="1016" rIns="1016" bIns="1016" rtlCol="0" anchor="t">
             <a:normAutofit/>
           </a:bodyPr>
           <a:lstStyle/>
           <a:p>
+            <a:pPr indent="0" marL="0">
+              <a:buNone/>
+            </a:pPr>
             <a:r>
               <a:rPr lang="en-US" sz="2100" dirty="0">
                 <a:solidFill>
-                  <a:srgbClr val="17364A"/>
-                </a:solidFill>
-                <a:latin typeface="Aptos" pitchFamily="34" charset="0"/>
-                <a:ea typeface="Aptos" pitchFamily="34" charset="-122"/>
-                <a:cs typeface="Aptos" pitchFamily="34" charset="-120"/>
-              </a:rPr>
-              <a:t>This national-level module is intended for training and planning purposes.</a:t>
+                  <a:srgbClr val="003A63"/>
+                </a:solidFill>
+                <a:latin typeface="Aptos" pitchFamily="34" charset="0"/>
+                <a:ea typeface="Aptos" pitchFamily="34" charset="-122"/>
+                <a:cs typeface="Aptos" pitchFamily="34" charset="-120"/>
+              </a:rPr>
+              <a:t>• This national-level module is intended for training and planning purposes.</a:t>
             </a:r>
             <a:endParaRPr lang="en-US" sz="2100" dirty="0"/>
           </a:p>
           <a:p>
+            <a:pPr indent="0" marL="0">
+              <a:buNone/>
+            </a:pPr>
             <a:r>
               <a:rPr lang="en-US" sz="2100" dirty="0">
                 <a:solidFill>
-                  <a:srgbClr val="17364A"/>
-                </a:solidFill>
-                <a:latin typeface="Aptos" pitchFamily="34" charset="0"/>
-                <a:ea typeface="Aptos" pitchFamily="34" charset="-122"/>
-                <a:cs typeface="Aptos" pitchFamily="34" charset="-120"/>
-              </a:rPr>
-              <a:t>It does not replace legal, privacy, procurement, civil rights, records, or agency policy review.</a:t>
+                  <a:srgbClr val="003A63"/>
+                </a:solidFill>
+                <a:latin typeface="Aptos" pitchFamily="34" charset="0"/>
+                <a:ea typeface="Aptos" pitchFamily="34" charset="-122"/>
+                <a:cs typeface="Aptos" pitchFamily="34" charset="-120"/>
+              </a:rPr>
+              <a:t>• It does not replace legal, privacy, procurement, civil rights, records, or agency policy review.</a:t>
             </a:r>
             <a:endParaRPr lang="en-US" sz="2100" dirty="0"/>
           </a:p>
           <a:p>
+            <a:pPr indent="0" marL="0">
+              <a:buNone/>
+            </a:pPr>
             <a:r>
               <a:rPr lang="en-US" sz="2100" dirty="0">
                 <a:solidFill>
-                  <a:srgbClr val="17364A"/>
-                </a:solidFill>
-                <a:latin typeface="Aptos" pitchFamily="34" charset="0"/>
-                <a:ea typeface="Aptos" pitchFamily="34" charset="-122"/>
-                <a:cs typeface="Aptos" pitchFamily="34" charset="-120"/>
-              </a:rPr>
-              <a:t>Learners should confirm applicable requirements in their own jurisdiction and organization before.</a:t>
+                  <a:srgbClr val="003A63"/>
+                </a:solidFill>
+                <a:latin typeface="Aptos" pitchFamily="34" charset="0"/>
+                <a:ea typeface="Aptos" pitchFamily="34" charset="-122"/>
+                <a:cs typeface="Aptos" pitchFamily="34" charset="-120"/>
+              </a:rPr>
+              <a:t>• Learners should confirm applicable requirements in their own jurisdiction and organization.</a:t>
             </a:r>
             <a:endParaRPr lang="en-US" sz="2100" dirty="0"/>
           </a:p>
@@ -16114,17 +16389,17 @@
         </p:nvSpPr>
         <p:spPr>
           <a:xfrm>
-            <a:off x="7799832" y="1828800"/>
-            <a:ext cx="3145536" cy="685800"/>
-          </a:xfrm>
-          <a:prstGeom prst="rect">
-            <a:avLst/>
-          </a:prstGeom>
-          <a:noFill/>
-          <a:ln/>
-        </p:spPr>
-        <p:txBody>
-          <a:bodyPr wrap="square" lIns="0" tIns="0" rIns="0" bIns="0" rtlCol="0" anchor="t">
+            <a:off x="7799832" y="1801368"/>
+            <a:ext cx="3145536" cy="758952"/>
+          </a:xfrm>
+          <a:prstGeom prst="rect">
+            <a:avLst/>
+          </a:prstGeom>
+          <a:noFill/>
+          <a:ln/>
+        </p:spPr>
+        <p:txBody>
+          <a:bodyPr wrap="square" lIns="254" tIns="254" rIns="254" bIns="254" rtlCol="0" anchor="t">
             <a:normAutofit/>
           </a:bodyPr>
           <a:lstStyle/>
@@ -16133,7 +16408,7 @@
               <a:buNone/>
             </a:pPr>
             <a:r>
-              <a:rPr lang="en-US" sz="1550" dirty="0">
+              <a:rPr lang="en-US" sz="1320" dirty="0">
                 <a:solidFill>
                   <a:srgbClr val="17364A"/>
                 </a:solidFill>
@@ -16143,7 +16418,7 @@
               </a:rPr>
               <a:t>This national-level module is intended for training and planning purposes.</a:t>
             </a:r>
-            <a:endParaRPr lang="en-US" sz="1550" dirty="0"/>
+            <a:endParaRPr lang="en-US" sz="1320" dirty="0"/>
           </a:p>
         </p:txBody>
       </p:sp>
@@ -16231,13 +16506,16 @@
           <a:ln/>
         </p:spPr>
         <p:txBody>
-          <a:bodyPr wrap="square" lIns="254" tIns="254" rIns="254" bIns="254" rtlCol="0" anchor="t">
+          <a:bodyPr wrap="square" lIns="508" tIns="508" rIns="508" bIns="508" rtlCol="0" anchor="t">
             <a:normAutofit/>
           </a:bodyPr>
           <a:lstStyle/>
           <a:p>
-            <a:r>
-              <a:rPr lang="en-US" sz="1380" dirty="0">
+            <a:pPr indent="0" marL="0">
+              <a:buNone/>
+            </a:pPr>
+            <a:r>
+              <a:rPr lang="en-US" sz="1220" dirty="0">
                 <a:solidFill>
                   <a:srgbClr val="17364A"/>
                 </a:solidFill>
@@ -16245,13 +16523,16 @@
                 <a:ea typeface="Aptos" pitchFamily="34" charset="-122"/>
                 <a:cs typeface="Aptos" pitchFamily="34" charset="-120"/>
               </a:rPr>
-              <a:t>This national-level module is intended for training and planning purposes.</a:t>
-            </a:r>
-            <a:endParaRPr lang="en-US" sz="1380" dirty="0"/>
-          </a:p>
-          <a:p>
-            <a:r>
-              <a:rPr lang="en-US" sz="1380" dirty="0">
+              <a:t>This national-level module is intended for training and planning.</a:t>
+            </a:r>
+            <a:endParaRPr lang="en-US" sz="1220" dirty="0"/>
+          </a:p>
+          <a:p>
+            <a:pPr indent="0" marL="0">
+              <a:buNone/>
+            </a:pPr>
+            <a:r>
+              <a:rPr lang="en-US" sz="1220" dirty="0">
                 <a:solidFill>
                   <a:srgbClr val="17364A"/>
                 </a:solidFill>
@@ -16259,13 +16540,16 @@
                 <a:ea typeface="Aptos" pitchFamily="34" charset="-122"/>
                 <a:cs typeface="Aptos" pitchFamily="34" charset="-120"/>
               </a:rPr>
-              <a:t>It does not replace legal, privacy, procurement, civil rights, records, or agency policy.</a:t>
-            </a:r>
-            <a:endParaRPr lang="en-US" sz="1380" dirty="0"/>
-          </a:p>
-          <a:p>
-            <a:r>
-              <a:rPr lang="en-US" sz="1380" dirty="0">
+              <a:t>It does not replace legal, privacy, procurement, civil rights,.</a:t>
+            </a:r>
+            <a:endParaRPr lang="en-US" sz="1220" dirty="0"/>
+          </a:p>
+          <a:p>
+            <a:pPr indent="0" marL="0">
+              <a:buNone/>
+            </a:pPr>
+            <a:r>
+              <a:rPr lang="en-US" sz="1220" dirty="0">
                 <a:solidFill>
                   <a:srgbClr val="17364A"/>
                 </a:solidFill>
@@ -16273,9 +16557,9 @@
                 <a:ea typeface="Aptos" pitchFamily="34" charset="-122"/>
                 <a:cs typeface="Aptos" pitchFamily="34" charset="-120"/>
               </a:rPr>
-              <a:t>Learners should confirm applicable requirements in their own jurisdiction and organization.</a:t>
-            </a:r>
-            <a:endParaRPr lang="en-US" sz="1380" dirty="0"/>
+              <a:t>Learners should confirm applicable requirements in their own.</a:t>
+            </a:r>
+            <a:endParaRPr lang="en-US" sz="1220" dirty="0"/>
           </a:p>
         </p:txBody>
       </p:sp>
@@ -16353,17 +16637,17 @@
         </p:nvSpPr>
         <p:spPr>
           <a:xfrm>
-            <a:off x="7799832" y="5001768"/>
-            <a:ext cx="3145536" cy="502920"/>
-          </a:xfrm>
-          <a:prstGeom prst="rect">
-            <a:avLst/>
-          </a:prstGeom>
-          <a:noFill/>
-          <a:ln/>
-        </p:spPr>
-        <p:txBody>
-          <a:bodyPr wrap="square" lIns="0" tIns="0" rIns="0" bIns="0" rtlCol="0" anchor="t">
+            <a:off x="7799832" y="4974336"/>
+            <a:ext cx="3145536" cy="576072"/>
+          </a:xfrm>
+          <a:prstGeom prst="rect">
+            <a:avLst/>
+          </a:prstGeom>
+          <a:noFill/>
+          <a:ln/>
+        </p:spPr>
+        <p:txBody>
+          <a:bodyPr wrap="square" lIns="254" tIns="254" rIns="254" bIns="254" rtlCol="0" anchor="t">
             <a:normAutofit/>
           </a:bodyPr>
           <a:lstStyle/>
@@ -16372,7 +16656,7 @@
               <a:buNone/>
             </a:pPr>
             <a:r>
-              <a:rPr lang="en-US" sz="1550" dirty="0">
+              <a:rPr lang="en-US" sz="1320" dirty="0">
                 <a:solidFill>
                   <a:srgbClr val="17364A"/>
                 </a:solidFill>
@@ -16380,9 +16664,9 @@
                 <a:ea typeface="Aptos" pitchFamily="34" charset="-122"/>
                 <a:cs typeface="Aptos" pitchFamily="34" charset="-120"/>
               </a:rPr>
-              <a:t>Translate this concept into clear decision rights, review steps, documentation expectations, and escalation paths before an AI-supported workflow is approved.</a:t>
-            </a:r>
-            <a:endParaRPr lang="en-US" sz="1550" dirty="0"/>
+              <a:t>Translate this concept into clear decision rights, review steps, documentation expectations, and escalation paths before.</a:t>
+            </a:r>
+            <a:endParaRPr lang="en-US" sz="1320" dirty="0"/>
           </a:p>
         </p:txBody>
       </p:sp>
@@ -16683,49 +16967,58 @@
           <a:ln/>
         </p:spPr>
         <p:txBody>
-          <a:bodyPr wrap="square" lIns="635" tIns="635" rIns="635" bIns="635" rtlCol="0" anchor="t">
+          <a:bodyPr wrap="square" lIns="1016" tIns="1016" rIns="1016" bIns="1016" rtlCol="0" anchor="t">
             <a:normAutofit/>
           </a:bodyPr>
           <a:lstStyle/>
           <a:p>
+            <a:pPr indent="0" marL="0">
+              <a:buNone/>
+            </a:pPr>
             <a:r>
               <a:rPr lang="en-US" sz="2100" dirty="0">
                 <a:solidFill>
-                  <a:srgbClr val="17364A"/>
-                </a:solidFill>
-                <a:latin typeface="Aptos" pitchFamily="34" charset="0"/>
-                <a:ea typeface="Aptos" pitchFamily="34" charset="-122"/>
-                <a:cs typeface="Aptos" pitchFamily="34" charset="-120"/>
-              </a:rPr>
-              <a:t>Cloud, Containers, and Secure Deployment Basics matters because AI systems are embedded in public.</a:t>
+                  <a:srgbClr val="003A63"/>
+                </a:solidFill>
+                <a:latin typeface="Aptos" pitchFamily="34" charset="0"/>
+                <a:ea typeface="Aptos" pitchFamily="34" charset="-122"/>
+                <a:cs typeface="Aptos" pitchFamily="34" charset="-120"/>
+              </a:rPr>
+              <a:t>• Cloud, Containers, and Secure Deployment Basics matters because AI systems are embedded in.</a:t>
             </a:r>
             <a:endParaRPr lang="en-US" sz="2100" dirty="0"/>
           </a:p>
           <a:p>
+            <a:pPr indent="0" marL="0">
+              <a:buNone/>
+            </a:pPr>
             <a:r>
               <a:rPr lang="en-US" sz="2100" dirty="0">
                 <a:solidFill>
-                  <a:srgbClr val="17364A"/>
-                </a:solidFill>
-                <a:latin typeface="Aptos" pitchFamily="34" charset="0"/>
-                <a:ea typeface="Aptos" pitchFamily="34" charset="-122"/>
-                <a:cs typeface="Aptos" pitchFamily="34" charset="-120"/>
-              </a:rPr>
-              <a:t>The topic affects whether AI outputs are accurate, explainable, safe, equitable, secure, and sustainable.</a:t>
+                  <a:srgbClr val="003A63"/>
+                </a:solidFill>
+                <a:latin typeface="Aptos" pitchFamily="34" charset="0"/>
+                <a:ea typeface="Aptos" pitchFamily="34" charset="-122"/>
+                <a:cs typeface="Aptos" pitchFamily="34" charset="-120"/>
+              </a:rPr>
+              <a:t>• The topic affects whether AI outputs are accurate, explainable, safe, equitable, secure, and.</a:t>
             </a:r>
             <a:endParaRPr lang="en-US" sz="2100" dirty="0"/>
           </a:p>
           <a:p>
+            <a:pPr indent="0" marL="0">
+              <a:buNone/>
+            </a:pPr>
             <a:r>
               <a:rPr lang="en-US" sz="2100" dirty="0">
                 <a:solidFill>
-                  <a:srgbClr val="17364A"/>
-                </a:solidFill>
-                <a:latin typeface="Aptos" pitchFamily="34" charset="0"/>
-                <a:ea typeface="Aptos" pitchFamily="34" charset="-122"/>
-                <a:cs typeface="Aptos" pitchFamily="34" charset="-120"/>
-              </a:rPr>
-              <a:t>Agencies that ignore this area may create tools that work in a demonstration but fail in actual practice.</a:t>
+                  <a:srgbClr val="003A63"/>
+                </a:solidFill>
+                <a:latin typeface="Aptos" pitchFamily="34" charset="0"/>
+                <a:ea typeface="Aptos" pitchFamily="34" charset="-122"/>
+                <a:cs typeface="Aptos" pitchFamily="34" charset="-120"/>
+              </a:rPr>
+              <a:t>• Agencies that ignore this area may create tools that work in a demonstration but fail in.</a:t>
             </a:r>
             <a:endParaRPr lang="en-US" sz="2100" dirty="0"/>
           </a:p>
@@ -16805,17 +17098,17 @@
         </p:nvSpPr>
         <p:spPr>
           <a:xfrm>
-            <a:off x="7799832" y="1828800"/>
-            <a:ext cx="3145536" cy="685800"/>
-          </a:xfrm>
-          <a:prstGeom prst="rect">
-            <a:avLst/>
-          </a:prstGeom>
-          <a:noFill/>
-          <a:ln/>
-        </p:spPr>
-        <p:txBody>
-          <a:bodyPr wrap="square" lIns="0" tIns="0" rIns="0" bIns="0" rtlCol="0" anchor="t">
+            <a:off x="7799832" y="1801368"/>
+            <a:ext cx="3145536" cy="758952"/>
+          </a:xfrm>
+          <a:prstGeom prst="rect">
+            <a:avLst/>
+          </a:prstGeom>
+          <a:noFill/>
+          <a:ln/>
+        </p:spPr>
+        <p:txBody>
+          <a:bodyPr wrap="square" lIns="254" tIns="254" rIns="254" bIns="254" rtlCol="0" anchor="t">
             <a:normAutofit/>
           </a:bodyPr>
           <a:lstStyle/>
@@ -16824,7 +17117,7 @@
               <a:buNone/>
             </a:pPr>
             <a:r>
-              <a:rPr lang="en-US" sz="1550" dirty="0">
+              <a:rPr lang="en-US" sz="1320" dirty="0">
                 <a:solidFill>
                   <a:srgbClr val="17364A"/>
                 </a:solidFill>
@@ -16834,7 +17127,7 @@
               </a:rPr>
               <a:t>Cloud, Containers, and Secure Deployment Basics matters because AI systems are embedded in public.</a:t>
             </a:r>
-            <a:endParaRPr lang="en-US" sz="1550" dirty="0"/>
+            <a:endParaRPr lang="en-US" sz="1320" dirty="0"/>
           </a:p>
         </p:txBody>
       </p:sp>
@@ -16922,13 +17215,16 @@
           <a:ln/>
         </p:spPr>
         <p:txBody>
-          <a:bodyPr wrap="square" lIns="254" tIns="254" rIns="254" bIns="254" rtlCol="0" anchor="t">
+          <a:bodyPr wrap="square" lIns="508" tIns="508" rIns="508" bIns="508" rtlCol="0" anchor="t">
             <a:normAutofit/>
           </a:bodyPr>
           <a:lstStyle/>
           <a:p>
-            <a:r>
-              <a:rPr lang="en-US" sz="1380" dirty="0">
+            <a:pPr indent="0" marL="0">
+              <a:buNone/>
+            </a:pPr>
+            <a:r>
+              <a:rPr lang="en-US" sz="1220" dirty="0">
                 <a:solidFill>
                   <a:srgbClr val="17364A"/>
                 </a:solidFill>
@@ -16936,13 +17232,16 @@
                 <a:ea typeface="Aptos" pitchFamily="34" charset="-122"/>
                 <a:cs typeface="Aptos" pitchFamily="34" charset="-120"/>
               </a:rPr>
-              <a:t>Cloud, Containers, and Secure Deployment Basics matters because AI systems are embedded in.</a:t>
-            </a:r>
-            <a:endParaRPr lang="en-US" sz="1380" dirty="0"/>
-          </a:p>
-          <a:p>
-            <a:r>
-              <a:rPr lang="en-US" sz="1380" dirty="0">
+              <a:t>Cloud, Containers, and Secure Deployment Basics matters because AI.</a:t>
+            </a:r>
+            <a:endParaRPr lang="en-US" sz="1220" dirty="0"/>
+          </a:p>
+          <a:p>
+            <a:pPr indent="0" marL="0">
+              <a:buNone/>
+            </a:pPr>
+            <a:r>
+              <a:rPr lang="en-US" sz="1220" dirty="0">
                 <a:solidFill>
                   <a:srgbClr val="17364A"/>
                 </a:solidFill>
@@ -16952,11 +17251,14 @@
               </a:rPr>
               <a:t>The topic also affects accountability.</a:t>
             </a:r>
-            <a:endParaRPr lang="en-US" sz="1380" dirty="0"/>
-          </a:p>
-          <a:p>
-            <a:r>
-              <a:rPr lang="en-US" sz="1380" dirty="0">
+            <a:endParaRPr lang="en-US" sz="1220" dirty="0"/>
+          </a:p>
+          <a:p>
+            <a:pPr indent="0" marL="0">
+              <a:buNone/>
+            </a:pPr>
+            <a:r>
+              <a:rPr lang="en-US" sz="1220" dirty="0">
                 <a:solidFill>
                   <a:srgbClr val="17364A"/>
                 </a:solidFill>
@@ -16964,9 +17266,9 @@
                 <a:ea typeface="Aptos" pitchFamily="34" charset="-122"/>
                 <a:cs typeface="Aptos" pitchFamily="34" charset="-120"/>
               </a:rPr>
-              <a:t>Public health agencies must be able to explain how data are used, why a tool was approved,.</a:t>
-            </a:r>
-            <a:endParaRPr lang="en-US" sz="1380" dirty="0"/>
+              <a:t>Public health agencies must be able to explain how data are used,.</a:t>
+            </a:r>
+            <a:endParaRPr lang="en-US" sz="1220" dirty="0"/>
           </a:p>
         </p:txBody>
       </p:sp>
@@ -17044,17 +17346,17 @@
         </p:nvSpPr>
         <p:spPr>
           <a:xfrm>
-            <a:off x="7799832" y="5001768"/>
-            <a:ext cx="3145536" cy="502920"/>
-          </a:xfrm>
-          <a:prstGeom prst="rect">
-            <a:avLst/>
-          </a:prstGeom>
-          <a:noFill/>
-          <a:ln/>
-        </p:spPr>
-        <p:txBody>
-          <a:bodyPr wrap="square" lIns="0" tIns="0" rIns="0" bIns="0" rtlCol="0" anchor="t">
+            <a:off x="7799832" y="4974336"/>
+            <a:ext cx="3145536" cy="576072"/>
+          </a:xfrm>
+          <a:prstGeom prst="rect">
+            <a:avLst/>
+          </a:prstGeom>
+          <a:noFill/>
+          <a:ln/>
+        </p:spPr>
+        <p:txBody>
+          <a:bodyPr wrap="square" lIns="254" tIns="254" rIns="254" bIns="254" rtlCol="0" anchor="t">
             <a:normAutofit/>
           </a:bodyPr>
           <a:lstStyle/>
@@ -17063,7 +17365,7 @@
               <a:buNone/>
             </a:pPr>
             <a:r>
-              <a:rPr lang="en-US" sz="1550" dirty="0">
+              <a:rPr lang="en-US" sz="1320" dirty="0">
                 <a:solidFill>
                   <a:srgbClr val="17364A"/>
                 </a:solidFill>
@@ -17071,9 +17373,9 @@
                 <a:ea typeface="Aptos" pitchFamily="34" charset="-122"/>
                 <a:cs typeface="Aptos" pitchFamily="34" charset="-120"/>
               </a:rPr>
-              <a:t>Connect the concept to public health purpose, responsible use, required safeguards, documentation, and the next action a department should take.</a:t>
-            </a:r>
-            <a:endParaRPr lang="en-US" sz="1550" dirty="0"/>
+              <a:t>Connect the concept to public health purpose, responsible use, required safeguards, documentation, and the next action a.</a:t>
+            </a:r>
+            <a:endParaRPr lang="en-US" sz="1320" dirty="0"/>
           </a:p>
         </p:txBody>
       </p:sp>

--- a/downloads/presentations/modules/arc-330.pptx
+++ b/downloads/presentations/modules/arc-330.pptx
@@ -3412,11 +3412,11 @@
         <p:spPr>
           <a:xfrm>
             <a:off x="7635240" y="1325880"/>
-            <a:ext cx="3474720" cy="1325880"/>
+            <a:ext cx="3474720" cy="1255471"/>
           </a:xfrm>
           <a:prstGeom prst="roundRect">
             <a:avLst>
-              <a:gd name="adj" fmla="val 8276"/>
+              <a:gd name="adj" fmla="val 8740"/>
             </a:avLst>
           </a:prstGeom>
           <a:solidFill>
@@ -3478,7 +3478,7 @@
         <p:spPr>
           <a:xfrm>
             <a:off x="7799832" y="1801368"/>
-            <a:ext cx="3145536" cy="758952"/>
+            <a:ext cx="3145536" cy="688543"/>
           </a:xfrm>
           <a:prstGeom prst="rect">
             <a:avLst/>
@@ -3518,12 +3518,12 @@
         </p:nvSpPr>
         <p:spPr>
           <a:xfrm>
-            <a:off x="7635240" y="2788920"/>
-            <a:ext cx="3474720" cy="1536192"/>
+            <a:off x="7635240" y="2718511"/>
+            <a:ext cx="3474720" cy="1328623"/>
           </a:xfrm>
           <a:prstGeom prst="roundRect">
             <a:avLst>
-              <a:gd name="adj" fmla="val 7143"/>
+              <a:gd name="adj" fmla="val 8259"/>
             </a:avLst>
           </a:prstGeom>
           <a:solidFill>
@@ -3545,7 +3545,7 @@
         </p:nvSpPr>
         <p:spPr>
           <a:xfrm>
-            <a:off x="7799832" y="2935224"/>
+            <a:off x="7799832" y="2864815"/>
             <a:ext cx="3145536" cy="256032"/>
           </a:xfrm>
           <a:prstGeom prst="rect">
@@ -3584,8 +3584,8 @@
         </p:nvSpPr>
         <p:spPr>
           <a:xfrm>
-            <a:off x="7818120" y="3300984"/>
-            <a:ext cx="3090672" cy="877824"/>
+            <a:off x="7818120" y="3230575"/>
+            <a:ext cx="3090672" cy="670255"/>
           </a:xfrm>
           <a:prstGeom prst="rect">
             <a:avLst/>
@@ -3659,12 +3659,12 @@
         </p:nvSpPr>
         <p:spPr>
           <a:xfrm>
-            <a:off x="7635240" y="4498848"/>
-            <a:ext cx="3474720" cy="1143000"/>
+            <a:off x="7635240" y="4184294"/>
+            <a:ext cx="3474720" cy="1466698"/>
           </a:xfrm>
           <a:prstGeom prst="roundRect">
             <a:avLst>
-              <a:gd name="adj" fmla="val 9600"/>
+              <a:gd name="adj" fmla="val 7481"/>
             </a:avLst>
           </a:prstGeom>
           <a:solidFill>
@@ -3686,7 +3686,7 @@
         </p:nvSpPr>
         <p:spPr>
           <a:xfrm>
-            <a:off x="7799832" y="4645152"/>
+            <a:off x="7799832" y="4330598"/>
             <a:ext cx="3145536" cy="256032"/>
           </a:xfrm>
           <a:prstGeom prst="rect">
@@ -3725,8 +3725,8 @@
         </p:nvSpPr>
         <p:spPr>
           <a:xfrm>
-            <a:off x="7799832" y="4974336"/>
-            <a:ext cx="3145536" cy="576072"/>
+            <a:off x="7799832" y="4659782"/>
+            <a:ext cx="3145536" cy="899770"/>
           </a:xfrm>
           <a:prstGeom prst="rect">
             <a:avLst/>
@@ -3752,7 +3752,7 @@
                 <a:ea typeface="Aptos" pitchFamily="34" charset="-122"/>
                 <a:cs typeface="Aptos" pitchFamily="34" charset="-120"/>
               </a:rPr>
-              <a:t>Connect the concept to public health purpose, responsible use, required safeguards, documentation, and the next action a.</a:t>
+              <a:t>Connect the concept to public health purpose, responsible use, required safeguards, documentation, and the next action a department should take.</a:t>
             </a:r>
             <a:endParaRPr lang="en-US" sz="1320" dirty="0"/>
           </a:p>
@@ -4121,11 +4121,11 @@
         <p:spPr>
           <a:xfrm>
             <a:off x="7635240" y="1325880"/>
-            <a:ext cx="3474720" cy="1325880"/>
+            <a:ext cx="3474720" cy="1255471"/>
           </a:xfrm>
           <a:prstGeom prst="roundRect">
             <a:avLst>
-              <a:gd name="adj" fmla="val 8276"/>
+              <a:gd name="adj" fmla="val 8740"/>
             </a:avLst>
           </a:prstGeom>
           <a:solidFill>
@@ -4187,7 +4187,7 @@
         <p:spPr>
           <a:xfrm>
             <a:off x="7799832" y="1801368"/>
-            <a:ext cx="3145536" cy="758952"/>
+            <a:ext cx="3145536" cy="688543"/>
           </a:xfrm>
           <a:prstGeom prst="rect">
             <a:avLst/>
@@ -4227,12 +4227,12 @@
         </p:nvSpPr>
         <p:spPr>
           <a:xfrm>
-            <a:off x="7635240" y="2788920"/>
-            <a:ext cx="3474720" cy="1536192"/>
+            <a:off x="7635240" y="2718511"/>
+            <a:ext cx="3474720" cy="1328623"/>
           </a:xfrm>
           <a:prstGeom prst="roundRect">
             <a:avLst>
-              <a:gd name="adj" fmla="val 7143"/>
+              <a:gd name="adj" fmla="val 8259"/>
             </a:avLst>
           </a:prstGeom>
           <a:solidFill>
@@ -4254,7 +4254,7 @@
         </p:nvSpPr>
         <p:spPr>
           <a:xfrm>
-            <a:off x="7799832" y="2935224"/>
+            <a:off x="7799832" y="2864815"/>
             <a:ext cx="3145536" cy="256032"/>
           </a:xfrm>
           <a:prstGeom prst="rect">
@@ -4293,8 +4293,8 @@
         </p:nvSpPr>
         <p:spPr>
           <a:xfrm>
-            <a:off x="7818120" y="3300984"/>
-            <a:ext cx="3090672" cy="877824"/>
+            <a:off x="7818120" y="3230575"/>
+            <a:ext cx="3090672" cy="670255"/>
           </a:xfrm>
           <a:prstGeom prst="rect">
             <a:avLst/>
@@ -4368,12 +4368,12 @@
         </p:nvSpPr>
         <p:spPr>
           <a:xfrm>
-            <a:off x="7635240" y="4498848"/>
-            <a:ext cx="3474720" cy="1143000"/>
+            <a:off x="7635240" y="4184294"/>
+            <a:ext cx="3474720" cy="1466698"/>
           </a:xfrm>
           <a:prstGeom prst="roundRect">
             <a:avLst>
-              <a:gd name="adj" fmla="val 9600"/>
+              <a:gd name="adj" fmla="val 7481"/>
             </a:avLst>
           </a:prstGeom>
           <a:solidFill>
@@ -4395,7 +4395,7 @@
         </p:nvSpPr>
         <p:spPr>
           <a:xfrm>
-            <a:off x="7799832" y="4645152"/>
+            <a:off x="7799832" y="4330598"/>
             <a:ext cx="3145536" cy="256032"/>
           </a:xfrm>
           <a:prstGeom prst="rect">
@@ -4434,8 +4434,8 @@
         </p:nvSpPr>
         <p:spPr>
           <a:xfrm>
-            <a:off x="7799832" y="4974336"/>
-            <a:ext cx="3145536" cy="576072"/>
+            <a:off x="7799832" y="4659782"/>
+            <a:ext cx="3145536" cy="899770"/>
           </a:xfrm>
           <a:prstGeom prst="rect">
             <a:avLst/>
@@ -4461,7 +4461,7 @@
                 <a:ea typeface="Aptos" pitchFamily="34" charset="-122"/>
                 <a:cs typeface="Aptos" pitchFamily="34" charset="-120"/>
               </a:rPr>
-              <a:t>Connect the concept to public health purpose, responsible use, required safeguards, documentation, and the next action a.</a:t>
+              <a:t>Connect the concept to public health purpose, responsible use, required safeguards, documentation, and the next action a department should take.</a:t>
             </a:r>
             <a:endParaRPr lang="en-US" sz="1320" dirty="0"/>
           </a:p>
@@ -4830,11 +4830,11 @@
         <p:spPr>
           <a:xfrm>
             <a:off x="7635240" y="1325880"/>
-            <a:ext cx="3474720" cy="1325880"/>
+            <a:ext cx="3474720" cy="1207008"/>
           </a:xfrm>
           <a:prstGeom prst="roundRect">
             <a:avLst>
-              <a:gd name="adj" fmla="val 8276"/>
+              <a:gd name="adj" fmla="val 9091"/>
             </a:avLst>
           </a:prstGeom>
           <a:solidFill>
@@ -4896,7 +4896,7 @@
         <p:spPr>
           <a:xfrm>
             <a:off x="7799832" y="1801368"/>
-            <a:ext cx="3145536" cy="758952"/>
+            <a:ext cx="3145536" cy="640080"/>
           </a:xfrm>
           <a:prstGeom prst="rect">
             <a:avLst/>
@@ -4936,12 +4936,12 @@
         </p:nvSpPr>
         <p:spPr>
           <a:xfrm>
-            <a:off x="7635240" y="2788920"/>
-            <a:ext cx="3474720" cy="1536192"/>
+            <a:off x="7635240" y="2670048"/>
+            <a:ext cx="3474720" cy="1377086"/>
           </a:xfrm>
           <a:prstGeom prst="roundRect">
             <a:avLst>
-              <a:gd name="adj" fmla="val 7143"/>
+              <a:gd name="adj" fmla="val 7968"/>
             </a:avLst>
           </a:prstGeom>
           <a:solidFill>
@@ -4963,7 +4963,7 @@
         </p:nvSpPr>
         <p:spPr>
           <a:xfrm>
-            <a:off x="7799832" y="2935224"/>
+            <a:off x="7799832" y="2816352"/>
             <a:ext cx="3145536" cy="256032"/>
           </a:xfrm>
           <a:prstGeom prst="rect">
@@ -5002,8 +5002,8 @@
         </p:nvSpPr>
         <p:spPr>
           <a:xfrm>
-            <a:off x="7818120" y="3300984"/>
-            <a:ext cx="3090672" cy="877824"/>
+            <a:off x="7818120" y="3182112"/>
+            <a:ext cx="3090672" cy="718718"/>
           </a:xfrm>
           <a:prstGeom prst="rect">
             <a:avLst/>
@@ -5077,12 +5077,12 @@
         </p:nvSpPr>
         <p:spPr>
           <a:xfrm>
-            <a:off x="7635240" y="4498848"/>
-            <a:ext cx="3474720" cy="1143000"/>
+            <a:off x="7635240" y="4184294"/>
+            <a:ext cx="3474720" cy="1466698"/>
           </a:xfrm>
           <a:prstGeom prst="roundRect">
             <a:avLst>
-              <a:gd name="adj" fmla="val 9600"/>
+              <a:gd name="adj" fmla="val 7481"/>
             </a:avLst>
           </a:prstGeom>
           <a:solidFill>
@@ -5104,7 +5104,7 @@
         </p:nvSpPr>
         <p:spPr>
           <a:xfrm>
-            <a:off x="7799832" y="4645152"/>
+            <a:off x="7799832" y="4330598"/>
             <a:ext cx="3145536" cy="256032"/>
           </a:xfrm>
           <a:prstGeom prst="rect">
@@ -5143,8 +5143,8 @@
         </p:nvSpPr>
         <p:spPr>
           <a:xfrm>
-            <a:off x="7799832" y="4974336"/>
-            <a:ext cx="3145536" cy="576072"/>
+            <a:off x="7799832" y="4659782"/>
+            <a:ext cx="3145536" cy="899770"/>
           </a:xfrm>
           <a:prstGeom prst="rect">
             <a:avLst/>
@@ -5170,7 +5170,7 @@
                 <a:ea typeface="Aptos" pitchFamily="34" charset="-122"/>
                 <a:cs typeface="Aptos" pitchFamily="34" charset="-120"/>
               </a:rPr>
-              <a:t>Connect the concept to public health purpose, responsible use, required safeguards, documentation, and the next action a.</a:t>
+              <a:t>Connect the concept to public health purpose, responsible use, required safeguards, documentation, and the next action a department should take.</a:t>
             </a:r>
             <a:endParaRPr lang="en-US" sz="1320" dirty="0"/>
           </a:p>
@@ -5539,11 +5539,11 @@
         <p:spPr>
           <a:xfrm>
             <a:off x="7635240" y="1325880"/>
-            <a:ext cx="3474720" cy="1325880"/>
+            <a:ext cx="3474720" cy="1255471"/>
           </a:xfrm>
           <a:prstGeom prst="roundRect">
             <a:avLst>
-              <a:gd name="adj" fmla="val 8276"/>
+              <a:gd name="adj" fmla="val 8740"/>
             </a:avLst>
           </a:prstGeom>
           <a:solidFill>
@@ -5605,7 +5605,7 @@
         <p:spPr>
           <a:xfrm>
             <a:off x="7799832" y="1801368"/>
-            <a:ext cx="3145536" cy="758952"/>
+            <a:ext cx="3145536" cy="688543"/>
           </a:xfrm>
           <a:prstGeom prst="rect">
             <a:avLst/>
@@ -5645,7 +5645,7 @@
         </p:nvSpPr>
         <p:spPr>
           <a:xfrm>
-            <a:off x="7635240" y="2788920"/>
+            <a:off x="7635240" y="2718511"/>
             <a:ext cx="3474720" cy="1536192"/>
           </a:xfrm>
           <a:prstGeom prst="roundRect">
@@ -5672,8 +5672,8 @@
         </p:nvSpPr>
         <p:spPr>
           <a:xfrm>
-            <a:off x="7799832" y="2935224"/>
-            <a:ext cx="3145536" cy="256032"/>
+            <a:off x="7799832" y="2846527"/>
+            <a:ext cx="3145536" cy="237744"/>
           </a:xfrm>
           <a:prstGeom prst="rect">
             <a:avLst/>
@@ -5689,7 +5689,7 @@
               <a:buNone/>
             </a:pPr>
             <a:r>
-              <a:rPr lang="en-US" sz="1300" b="1" dirty="0">
+              <a:rPr lang="en-US" sz="1250" b="1" dirty="0">
                 <a:solidFill>
                   <a:srgbClr val="0068B7"/>
                 </a:solidFill>
@@ -5697,101 +5697,317 @@
                 <a:ea typeface="Aptos" pitchFamily="34" charset="-122"/>
                 <a:cs typeface="Aptos" pitchFamily="34" charset="-120"/>
               </a:rPr>
-              <a:t>Concept checkpoints</a:t>
-            </a:r>
-            <a:endParaRPr lang="en-US" sz="1300" dirty="0"/>
-          </a:p>
-        </p:txBody>
-      </p:sp>
-      <p:sp>
-        <p:nvSpPr>
-          <p:cNvPr id="15" name="Text 13"/>
-          <p:cNvSpPr/>
-          <p:nvPr/>
-        </p:nvSpPr>
-        <p:spPr>
-          <a:xfrm>
-            <a:off x="7818120" y="3300984"/>
-            <a:ext cx="3090672" cy="877824"/>
-          </a:xfrm>
-          <a:prstGeom prst="rect">
-            <a:avLst/>
-          </a:prstGeom>
-          <a:noFill/>
-          <a:ln/>
-        </p:spPr>
-        <p:txBody>
-          <a:bodyPr wrap="square" lIns="508" tIns="508" rIns="508" bIns="508" rtlCol="0" anchor="t">
+              <a:t>Risk control loop</a:t>
+            </a:r>
+            <a:endParaRPr lang="en-US" sz="1250" dirty="0"/>
+          </a:p>
+        </p:txBody>
+      </p:sp>
+      <p:sp>
+        <p:nvSpPr>
+          <p:cNvPr id="15" name="Shape 13"/>
+          <p:cNvSpPr/>
+          <p:nvPr/>
+        </p:nvSpPr>
+        <p:spPr>
+          <a:xfrm>
+            <a:off x="8763000" y="3399739"/>
+            <a:ext cx="164592" cy="0"/>
+          </a:xfrm>
+          <a:prstGeom prst="line">
+            <a:avLst/>
+          </a:prstGeom>
+          <a:noFill/>
+          <a:ln w="15240">
+            <a:solidFill>
+              <a:srgbClr val="8ABBD8"/>
+            </a:solidFill>
+            <a:prstDash val="solid"/>
+          </a:ln>
+        </p:spPr>
+      </p:sp>
+      <p:sp>
+        <p:nvSpPr>
+          <p:cNvPr id="16" name="Shape 14"/>
+          <p:cNvSpPr/>
+          <p:nvPr/>
+        </p:nvSpPr>
+        <p:spPr>
+          <a:xfrm>
+            <a:off x="7872984" y="3248863"/>
+            <a:ext cx="890016" cy="301752"/>
+          </a:xfrm>
+          <a:prstGeom prst="roundRect">
+            <a:avLst>
+              <a:gd name="adj" fmla="val 24242"/>
+            </a:avLst>
+          </a:prstGeom>
+          <a:solidFill>
+            <a:srgbClr val="0068B7"/>
+          </a:solidFill>
+          <a:ln w="12700">
+            <a:solidFill>
+              <a:srgbClr val="0068B7"/>
+            </a:solidFill>
+            <a:prstDash val="solid"/>
+          </a:ln>
+        </p:spPr>
+      </p:sp>
+      <p:sp>
+        <p:nvSpPr>
+          <p:cNvPr id="17" name="Text 15"/>
+          <p:cNvSpPr/>
+          <p:nvPr/>
+        </p:nvSpPr>
+        <p:spPr>
+          <a:xfrm>
+            <a:off x="7909560" y="3322015"/>
+            <a:ext cx="816864" cy="146304"/>
+          </a:xfrm>
+          <a:prstGeom prst="rect">
+            <a:avLst/>
+          </a:prstGeom>
+          <a:noFill/>
+          <a:ln/>
+        </p:spPr>
+        <p:txBody>
+          <a:bodyPr wrap="square" lIns="0" tIns="0" rIns="0" bIns="0" rtlCol="0" anchor="ctr">
             <a:normAutofit/>
           </a:bodyPr>
           <a:lstStyle/>
           <a:p>
-            <a:pPr indent="0" marL="0">
-              <a:buNone/>
-            </a:pPr>
-            <a:r>
-              <a:rPr lang="en-US" sz="1220" dirty="0">
-                <a:solidFill>
-                  <a:srgbClr val="17364A"/>
-                </a:solidFill>
-                <a:latin typeface="Aptos" pitchFamily="34" charset="0"/>
-                <a:ea typeface="Aptos" pitchFamily="34" charset="-122"/>
-                <a:cs typeface="Aptos" pitchFamily="34" charset="-120"/>
-              </a:rPr>
-              <a:t>When staff do not connect technical decisions to authority,.</a:t>
-            </a:r>
-            <a:endParaRPr lang="en-US" sz="1220" dirty="0"/>
-          </a:p>
-          <a:p>
-            <a:pPr indent="0" marL="0">
-              <a:buNone/>
-            </a:pPr>
-            <a:r>
-              <a:rPr lang="en-US" sz="1220" dirty="0">
-                <a:solidFill>
-                  <a:srgbClr val="17364A"/>
-                </a:solidFill>
-                <a:latin typeface="Aptos" pitchFamily="34" charset="0"/>
-                <a:ea typeface="Aptos" pitchFamily="34" charset="-122"/>
-                <a:cs typeface="Aptos" pitchFamily="34" charset="-120"/>
-              </a:rPr>
-              <a:t>Vendors may provide demonstrations, dashboards, or summary metrics.</a:t>
-            </a:r>
-            <a:endParaRPr lang="en-US" sz="1220" dirty="0"/>
-          </a:p>
-          <a:p>
-            <a:pPr indent="0" marL="0">
-              <a:buNone/>
-            </a:pPr>
-            <a:r>
-              <a:rPr lang="en-US" sz="1220" dirty="0">
-                <a:solidFill>
-                  <a:srgbClr val="17364A"/>
-                </a:solidFill>
-                <a:latin typeface="Aptos" pitchFamily="34" charset="0"/>
-                <a:ea typeface="Aptos" pitchFamily="34" charset="-122"/>
-                <a:cs typeface="Aptos" pitchFamily="34" charset="-120"/>
-              </a:rPr>
-              <a:t>A guardrail is to require documentation, test results, acceptance.</a:t>
-            </a:r>
-            <a:endParaRPr lang="en-US" sz="1220" dirty="0"/>
-          </a:p>
-        </p:txBody>
-      </p:sp>
-      <p:sp>
-        <p:nvSpPr>
-          <p:cNvPr id="16" name="Shape 14"/>
-          <p:cNvSpPr/>
-          <p:nvPr/>
-        </p:nvSpPr>
-        <p:spPr>
-          <a:xfrm>
-            <a:off x="7635240" y="4498848"/>
-            <a:ext cx="3474720" cy="1143000"/>
+            <a:pPr algn="ctr" indent="0" marL="0">
+              <a:buNone/>
+            </a:pPr>
+            <a:r>
+              <a:rPr lang="en-US" sz="880" b="1" dirty="0">
+                <a:solidFill>
+                  <a:srgbClr val="FFFFFF"/>
+                </a:solidFill>
+                <a:latin typeface="Aptos" pitchFamily="34" charset="0"/>
+                <a:ea typeface="Aptos" pitchFamily="34" charset="-122"/>
+                <a:cs typeface="Aptos" pitchFamily="34" charset="-120"/>
+              </a:rPr>
+              <a:t>Identify</a:t>
+            </a:r>
+            <a:endParaRPr lang="en-US" sz="880" dirty="0"/>
+          </a:p>
+        </p:txBody>
+      </p:sp>
+      <p:sp>
+        <p:nvSpPr>
+          <p:cNvPr id="18" name="Shape 16"/>
+          <p:cNvSpPr/>
+          <p:nvPr/>
+        </p:nvSpPr>
+        <p:spPr>
+          <a:xfrm>
+            <a:off x="9817608" y="3399739"/>
+            <a:ext cx="164592" cy="0"/>
+          </a:xfrm>
+          <a:prstGeom prst="line">
+            <a:avLst/>
+          </a:prstGeom>
+          <a:noFill/>
+          <a:ln w="15240">
+            <a:solidFill>
+              <a:srgbClr val="8ABBD8"/>
+            </a:solidFill>
+            <a:prstDash val="solid"/>
+          </a:ln>
+        </p:spPr>
+      </p:sp>
+      <p:sp>
+        <p:nvSpPr>
+          <p:cNvPr id="19" name="Shape 17"/>
+          <p:cNvSpPr/>
+          <p:nvPr/>
+        </p:nvSpPr>
+        <p:spPr>
+          <a:xfrm>
+            <a:off x="8927592" y="3248863"/>
+            <a:ext cx="890016" cy="301752"/>
           </a:xfrm>
           <a:prstGeom prst="roundRect">
             <a:avLst>
-              <a:gd name="adj" fmla="val 9600"/>
+              <a:gd name="adj" fmla="val 24242"/>
+            </a:avLst>
+          </a:prstGeom>
+          <a:solidFill>
+            <a:srgbClr val="2F8A28"/>
+          </a:solidFill>
+          <a:ln w="12700">
+            <a:solidFill>
+              <a:srgbClr val="2F8A28"/>
+            </a:solidFill>
+            <a:prstDash val="solid"/>
+          </a:ln>
+        </p:spPr>
+      </p:sp>
+      <p:sp>
+        <p:nvSpPr>
+          <p:cNvPr id="20" name="Text 18"/>
+          <p:cNvSpPr/>
+          <p:nvPr/>
+        </p:nvSpPr>
+        <p:spPr>
+          <a:xfrm>
+            <a:off x="8964168" y="3322015"/>
+            <a:ext cx="816864" cy="146304"/>
+          </a:xfrm>
+          <a:prstGeom prst="rect">
+            <a:avLst/>
+          </a:prstGeom>
+          <a:noFill/>
+          <a:ln/>
+        </p:spPr>
+        <p:txBody>
+          <a:bodyPr wrap="square" lIns="0" tIns="0" rIns="0" bIns="0" rtlCol="0" anchor="ctr">
+            <a:normAutofit/>
+          </a:bodyPr>
+          <a:lstStyle/>
+          <a:p>
+            <a:pPr algn="ctr" indent="0" marL="0">
+              <a:buNone/>
+            </a:pPr>
+            <a:r>
+              <a:rPr lang="en-US" sz="880" b="1" dirty="0">
+                <a:solidFill>
+                  <a:srgbClr val="FFFFFF"/>
+                </a:solidFill>
+                <a:latin typeface="Aptos" pitchFamily="34" charset="0"/>
+                <a:ea typeface="Aptos" pitchFamily="34" charset="-122"/>
+                <a:cs typeface="Aptos" pitchFamily="34" charset="-120"/>
+              </a:rPr>
+              <a:t>Control</a:t>
+            </a:r>
+            <a:endParaRPr lang="en-US" sz="880" dirty="0"/>
+          </a:p>
+        </p:txBody>
+      </p:sp>
+      <p:sp>
+        <p:nvSpPr>
+          <p:cNvPr id="21" name="Shape 19"/>
+          <p:cNvSpPr/>
+          <p:nvPr/>
+        </p:nvSpPr>
+        <p:spPr>
+          <a:xfrm>
+            <a:off x="9982200" y="3248863"/>
+            <a:ext cx="890016" cy="301752"/>
+          </a:xfrm>
+          <a:prstGeom prst="roundRect">
+            <a:avLst>
+              <a:gd name="adj" fmla="val 24242"/>
+            </a:avLst>
+          </a:prstGeom>
+          <a:solidFill>
+            <a:srgbClr val="6A4CA3"/>
+          </a:solidFill>
+          <a:ln w="12700">
+            <a:solidFill>
+              <a:srgbClr val="6A4CA3"/>
+            </a:solidFill>
+            <a:prstDash val="solid"/>
+          </a:ln>
+        </p:spPr>
+      </p:sp>
+      <p:sp>
+        <p:nvSpPr>
+          <p:cNvPr id="22" name="Text 20"/>
+          <p:cNvSpPr/>
+          <p:nvPr/>
+        </p:nvSpPr>
+        <p:spPr>
+          <a:xfrm>
+            <a:off x="10018776" y="3322015"/>
+            <a:ext cx="816864" cy="146304"/>
+          </a:xfrm>
+          <a:prstGeom prst="rect">
+            <a:avLst/>
+          </a:prstGeom>
+          <a:noFill/>
+          <a:ln/>
+        </p:spPr>
+        <p:txBody>
+          <a:bodyPr wrap="square" lIns="0" tIns="0" rIns="0" bIns="0" rtlCol="0" anchor="ctr">
+            <a:normAutofit/>
+          </a:bodyPr>
+          <a:lstStyle/>
+          <a:p>
+            <a:pPr algn="ctr" indent="0" marL="0">
+              <a:buNone/>
+            </a:pPr>
+            <a:r>
+              <a:rPr lang="en-US" sz="880" b="1" dirty="0">
+                <a:solidFill>
+                  <a:srgbClr val="FFFFFF"/>
+                </a:solidFill>
+                <a:latin typeface="Aptos" pitchFamily="34" charset="0"/>
+                <a:ea typeface="Aptos" pitchFamily="34" charset="-122"/>
+                <a:cs typeface="Aptos" pitchFamily="34" charset="-120"/>
+              </a:rPr>
+              <a:t>Monitor</a:t>
+            </a:r>
+            <a:endParaRPr lang="en-US" sz="880" dirty="0"/>
+          </a:p>
+        </p:txBody>
+      </p:sp>
+      <p:sp>
+        <p:nvSpPr>
+          <p:cNvPr id="23" name="Text 21"/>
+          <p:cNvSpPr/>
+          <p:nvPr/>
+        </p:nvSpPr>
+        <p:spPr>
+          <a:xfrm>
+            <a:off x="7854696" y="3742639"/>
+            <a:ext cx="3035808" cy="365760"/>
+          </a:xfrm>
+          <a:prstGeom prst="rect">
+            <a:avLst/>
+          </a:prstGeom>
+          <a:noFill/>
+          <a:ln/>
+        </p:spPr>
+        <p:txBody>
+          <a:bodyPr wrap="square" lIns="254" tIns="254" rIns="254" bIns="254" rtlCol="0" anchor="t">
+            <a:normAutofit/>
+          </a:bodyPr>
+          <a:lstStyle/>
+          <a:p>
+            <a:pPr indent="0" marL="0">
+              <a:buNone/>
+            </a:pPr>
+            <a:r>
+              <a:rPr lang="en-US" sz="1120" dirty="0">
+                <a:solidFill>
+                  <a:srgbClr val="17364A"/>
+                </a:solidFill>
+                <a:latin typeface="Aptos" pitchFamily="34" charset="0"/>
+                <a:ea typeface="Aptos" pitchFamily="34" charset="-122"/>
+                <a:cs typeface="Aptos" pitchFamily="34" charset="-120"/>
+              </a:rPr>
+              <a:t>Responsible use depends on finding risks early, applying safeguards, and watching for drift or harm over time.</a:t>
+            </a:r>
+            <a:endParaRPr lang="en-US" sz="1120" dirty="0"/>
+          </a:p>
+        </p:txBody>
+      </p:sp>
+      <p:sp>
+        <p:nvSpPr>
+          <p:cNvPr id="24" name="Shape 22"/>
+          <p:cNvSpPr/>
+          <p:nvPr/>
+        </p:nvSpPr>
+        <p:spPr>
+          <a:xfrm>
+            <a:off x="7635240" y="4391863"/>
+            <a:ext cx="3474720" cy="1255471"/>
+          </a:xfrm>
+          <a:prstGeom prst="roundRect">
+            <a:avLst>
+              <a:gd name="adj" fmla="val 8740"/>
             </a:avLst>
           </a:prstGeom>
           <a:solidFill>
@@ -5807,13 +6023,13 @@
       </p:sp>
       <p:sp>
         <p:nvSpPr>
-          <p:cNvPr id="17" name="Text 15"/>
-          <p:cNvSpPr/>
-          <p:nvPr/>
-        </p:nvSpPr>
-        <p:spPr>
-          <a:xfrm>
-            <a:off x="7799832" y="4645152"/>
+          <p:cNvPr id="25" name="Text 23"/>
+          <p:cNvSpPr/>
+          <p:nvPr/>
+        </p:nvSpPr>
+        <p:spPr>
+          <a:xfrm>
+            <a:off x="7799832" y="4538167"/>
             <a:ext cx="3145536" cy="256032"/>
           </a:xfrm>
           <a:prstGeom prst="rect">
@@ -5846,14 +6062,14 @@
       </p:sp>
       <p:sp>
         <p:nvSpPr>
-          <p:cNvPr id="18" name="Text 16"/>
-          <p:cNvSpPr/>
-          <p:nvPr/>
-        </p:nvSpPr>
-        <p:spPr>
-          <a:xfrm>
-            <a:off x="7799832" y="4974336"/>
-            <a:ext cx="3145536" cy="576072"/>
+          <p:cNvPr id="26" name="Text 24"/>
+          <p:cNvSpPr/>
+          <p:nvPr/>
+        </p:nvSpPr>
+        <p:spPr>
+          <a:xfrm>
+            <a:off x="7799832" y="4867351"/>
+            <a:ext cx="3145536" cy="688543"/>
           </a:xfrm>
           <a:prstGeom prst="rect">
             <a:avLst/>
@@ -5879,7 +6095,7 @@
                 <a:ea typeface="Aptos" pitchFamily="34" charset="-122"/>
                 <a:cs typeface="Aptos" pitchFamily="34" charset="-120"/>
               </a:rPr>
-              <a:t>Identify what could go wrong, who could be affected, what safeguards are needed, and what evidence should be reviewed.</a:t>
+              <a:t>Identify what could go wrong, who could be affected, what safeguards are needed, and what evidence should be reviewed before use.</a:t>
             </a:r>
             <a:endParaRPr lang="en-US" sz="1320" dirty="0"/>
           </a:p>
@@ -6248,11 +6464,11 @@
         <p:spPr>
           <a:xfrm>
             <a:off x="7635240" y="1325880"/>
-            <a:ext cx="3474720" cy="1325880"/>
+            <a:ext cx="3474720" cy="1255471"/>
           </a:xfrm>
           <a:prstGeom prst="roundRect">
             <a:avLst>
-              <a:gd name="adj" fmla="val 8276"/>
+              <a:gd name="adj" fmla="val 8740"/>
             </a:avLst>
           </a:prstGeom>
           <a:solidFill>
@@ -6314,7 +6530,7 @@
         <p:spPr>
           <a:xfrm>
             <a:off x="7799832" y="1801368"/>
-            <a:ext cx="3145536" cy="758952"/>
+            <a:ext cx="3145536" cy="688543"/>
           </a:xfrm>
           <a:prstGeom prst="rect">
             <a:avLst/>
@@ -6354,12 +6570,12 @@
         </p:nvSpPr>
         <p:spPr>
           <a:xfrm>
-            <a:off x="7635240" y="2788920"/>
-            <a:ext cx="3474720" cy="1536192"/>
+            <a:off x="7635240" y="2718511"/>
+            <a:ext cx="3474720" cy="1328623"/>
           </a:xfrm>
           <a:prstGeom prst="roundRect">
             <a:avLst>
-              <a:gd name="adj" fmla="val 7143"/>
+              <a:gd name="adj" fmla="val 8259"/>
             </a:avLst>
           </a:prstGeom>
           <a:solidFill>
@@ -6381,8 +6597,8 @@
         </p:nvSpPr>
         <p:spPr>
           <a:xfrm>
-            <a:off x="7799832" y="2935224"/>
-            <a:ext cx="3145536" cy="256032"/>
+            <a:off x="7799832" y="2846527"/>
+            <a:ext cx="3145536" cy="237744"/>
           </a:xfrm>
           <a:prstGeom prst="rect">
             <a:avLst/>
@@ -6398,7 +6614,7 @@
               <a:buNone/>
             </a:pPr>
             <a:r>
-              <a:rPr lang="en-US" sz="1300" b="1" dirty="0">
+              <a:rPr lang="en-US" sz="1250" b="1" dirty="0">
                 <a:solidFill>
                   <a:srgbClr val="0068B7"/>
                 </a:solidFill>
@@ -6406,101 +6622,317 @@
                 <a:ea typeface="Aptos" pitchFamily="34" charset="-122"/>
                 <a:cs typeface="Aptos" pitchFamily="34" charset="-120"/>
               </a:rPr>
-              <a:t>Concept checkpoints</a:t>
-            </a:r>
-            <a:endParaRPr lang="en-US" sz="1300" dirty="0"/>
-          </a:p>
-        </p:txBody>
-      </p:sp>
-      <p:sp>
-        <p:nvSpPr>
-          <p:cNvPr id="15" name="Text 13"/>
-          <p:cNvSpPr/>
-          <p:nvPr/>
-        </p:nvSpPr>
-        <p:spPr>
-          <a:xfrm>
-            <a:off x="7818120" y="3300984"/>
-            <a:ext cx="3090672" cy="877824"/>
-          </a:xfrm>
-          <a:prstGeom prst="rect">
-            <a:avLst/>
-          </a:prstGeom>
-          <a:noFill/>
-          <a:ln/>
-        </p:spPr>
-        <p:txBody>
-          <a:bodyPr wrap="square" lIns="508" tIns="508" rIns="508" bIns="508" rtlCol="0" anchor="t">
+              <a:t>Implementation path</a:t>
+            </a:r>
+            <a:endParaRPr lang="en-US" sz="1250" dirty="0"/>
+          </a:p>
+        </p:txBody>
+      </p:sp>
+      <p:sp>
+        <p:nvSpPr>
+          <p:cNvPr id="15" name="Shape 13"/>
+          <p:cNvSpPr/>
+          <p:nvPr/>
+        </p:nvSpPr>
+        <p:spPr>
+          <a:xfrm>
+            <a:off x="8763000" y="3399739"/>
+            <a:ext cx="164592" cy="0"/>
+          </a:xfrm>
+          <a:prstGeom prst="line">
+            <a:avLst/>
+          </a:prstGeom>
+          <a:noFill/>
+          <a:ln w="15240">
+            <a:solidFill>
+              <a:srgbClr val="8ABBD8"/>
+            </a:solidFill>
+            <a:prstDash val="solid"/>
+          </a:ln>
+        </p:spPr>
+      </p:sp>
+      <p:sp>
+        <p:nvSpPr>
+          <p:cNvPr id="16" name="Shape 14"/>
+          <p:cNvSpPr/>
+          <p:nvPr/>
+        </p:nvSpPr>
+        <p:spPr>
+          <a:xfrm>
+            <a:off x="7872984" y="3248863"/>
+            <a:ext cx="890016" cy="301752"/>
+          </a:xfrm>
+          <a:prstGeom prst="roundRect">
+            <a:avLst>
+              <a:gd name="adj" fmla="val 24242"/>
+            </a:avLst>
+          </a:prstGeom>
+          <a:solidFill>
+            <a:srgbClr val="0068B7"/>
+          </a:solidFill>
+          <a:ln w="12700">
+            <a:solidFill>
+              <a:srgbClr val="0068B7"/>
+            </a:solidFill>
+            <a:prstDash val="solid"/>
+          </a:ln>
+        </p:spPr>
+      </p:sp>
+      <p:sp>
+        <p:nvSpPr>
+          <p:cNvPr id="17" name="Text 15"/>
+          <p:cNvSpPr/>
+          <p:nvPr/>
+        </p:nvSpPr>
+        <p:spPr>
+          <a:xfrm>
+            <a:off x="7909560" y="3322015"/>
+            <a:ext cx="816864" cy="146304"/>
+          </a:xfrm>
+          <a:prstGeom prst="rect">
+            <a:avLst/>
+          </a:prstGeom>
+          <a:noFill/>
+          <a:ln/>
+        </p:spPr>
+        <p:txBody>
+          <a:bodyPr wrap="square" lIns="0" tIns="0" rIns="0" bIns="0" rtlCol="0" anchor="ctr">
             <a:normAutofit/>
           </a:bodyPr>
           <a:lstStyle/>
           <a:p>
-            <a:pPr indent="0" marL="0">
-              <a:buNone/>
-            </a:pPr>
-            <a:r>
-              <a:rPr lang="en-US" sz="1220" dirty="0">
-                <a:solidFill>
-                  <a:srgbClr val="17364A"/>
-                </a:solidFill>
-                <a:latin typeface="Aptos" pitchFamily="34" charset="0"/>
-                <a:ea typeface="Aptos" pitchFamily="34" charset="-122"/>
-                <a:cs typeface="Aptos" pitchFamily="34" charset="-120"/>
-              </a:rPr>
-              <a:t>Generative AI, predictive analytics, RAG, automation, and agentic.</a:t>
-            </a:r>
-            <a:endParaRPr lang="en-US" sz="1220" dirty="0"/>
-          </a:p>
-          <a:p>
-            <a:pPr indent="0" marL="0">
-              <a:buNone/>
-            </a:pPr>
-            <a:r>
-              <a:rPr lang="en-US" sz="1220" dirty="0">
-                <a:solidFill>
-                  <a:srgbClr val="17364A"/>
-                </a:solidFill>
-                <a:latin typeface="Aptos" pitchFamily="34" charset="0"/>
-                <a:ea typeface="Aptos" pitchFamily="34" charset="-122"/>
-                <a:cs typeface="Aptos" pitchFamily="34" charset="-120"/>
-              </a:rPr>
-              <a:t>A tool that drafts internal training text may require lighter.</a:t>
-            </a:r>
-            <a:endParaRPr lang="en-US" sz="1220" dirty="0"/>
-          </a:p>
-          <a:p>
-            <a:pPr indent="0" marL="0">
-              <a:buNone/>
-            </a:pPr>
-            <a:r>
-              <a:rPr lang="en-US" sz="1220" dirty="0">
-                <a:solidFill>
-                  <a:srgbClr val="17364A"/>
-                </a:solidFill>
-                <a:latin typeface="Aptos" pitchFamily="34" charset="0"/>
-                <a:ea typeface="Aptos" pitchFamily="34" charset="-122"/>
-                <a:cs typeface="Aptos" pitchFamily="34" charset="-120"/>
-              </a:rPr>
-              <a:t>The module should be applied during readiness assessment,.</a:t>
-            </a:r>
-            <a:endParaRPr lang="en-US" sz="1220" dirty="0"/>
-          </a:p>
-        </p:txBody>
-      </p:sp>
-      <p:sp>
-        <p:nvSpPr>
-          <p:cNvPr id="16" name="Shape 14"/>
-          <p:cNvSpPr/>
-          <p:nvPr/>
-        </p:nvSpPr>
-        <p:spPr>
-          <a:xfrm>
-            <a:off x="7635240" y="4498848"/>
-            <a:ext cx="3474720" cy="1143000"/>
+            <a:pPr algn="ctr" indent="0" marL="0">
+              <a:buNone/>
+            </a:pPr>
+            <a:r>
+              <a:rPr lang="en-US" sz="880" b="1" dirty="0">
+                <a:solidFill>
+                  <a:srgbClr val="FFFFFF"/>
+                </a:solidFill>
+                <a:latin typeface="Aptos" pitchFamily="34" charset="0"/>
+                <a:ea typeface="Aptos" pitchFamily="34" charset="-122"/>
+                <a:cs typeface="Aptos" pitchFamily="34" charset="-120"/>
+              </a:rPr>
+              <a:t>Need</a:t>
+            </a:r>
+            <a:endParaRPr lang="en-US" sz="880" dirty="0"/>
+          </a:p>
+        </p:txBody>
+      </p:sp>
+      <p:sp>
+        <p:nvSpPr>
+          <p:cNvPr id="18" name="Shape 16"/>
+          <p:cNvSpPr/>
+          <p:nvPr/>
+        </p:nvSpPr>
+        <p:spPr>
+          <a:xfrm>
+            <a:off x="9817608" y="3399739"/>
+            <a:ext cx="164592" cy="0"/>
+          </a:xfrm>
+          <a:prstGeom prst="line">
+            <a:avLst/>
+          </a:prstGeom>
+          <a:noFill/>
+          <a:ln w="15240">
+            <a:solidFill>
+              <a:srgbClr val="8ABBD8"/>
+            </a:solidFill>
+            <a:prstDash val="solid"/>
+          </a:ln>
+        </p:spPr>
+      </p:sp>
+      <p:sp>
+        <p:nvSpPr>
+          <p:cNvPr id="19" name="Shape 17"/>
+          <p:cNvSpPr/>
+          <p:nvPr/>
+        </p:nvSpPr>
+        <p:spPr>
+          <a:xfrm>
+            <a:off x="8927592" y="3248863"/>
+            <a:ext cx="890016" cy="301752"/>
           </a:xfrm>
           <a:prstGeom prst="roundRect">
             <a:avLst>
-              <a:gd name="adj" fmla="val 9600"/>
+              <a:gd name="adj" fmla="val 24242"/>
+            </a:avLst>
+          </a:prstGeom>
+          <a:solidFill>
+            <a:srgbClr val="2F8A28"/>
+          </a:solidFill>
+          <a:ln w="12700">
+            <a:solidFill>
+              <a:srgbClr val="2F8A28"/>
+            </a:solidFill>
+            <a:prstDash val="solid"/>
+          </a:ln>
+        </p:spPr>
+      </p:sp>
+      <p:sp>
+        <p:nvSpPr>
+          <p:cNvPr id="20" name="Text 18"/>
+          <p:cNvSpPr/>
+          <p:nvPr/>
+        </p:nvSpPr>
+        <p:spPr>
+          <a:xfrm>
+            <a:off x="8964168" y="3322015"/>
+            <a:ext cx="816864" cy="146304"/>
+          </a:xfrm>
+          <a:prstGeom prst="rect">
+            <a:avLst/>
+          </a:prstGeom>
+          <a:noFill/>
+          <a:ln/>
+        </p:spPr>
+        <p:txBody>
+          <a:bodyPr wrap="square" lIns="0" tIns="0" rIns="0" bIns="0" rtlCol="0" anchor="ctr">
+            <a:normAutofit/>
+          </a:bodyPr>
+          <a:lstStyle/>
+          <a:p>
+            <a:pPr algn="ctr" indent="0" marL="0">
+              <a:buNone/>
+            </a:pPr>
+            <a:r>
+              <a:rPr lang="en-US" sz="880" b="1" dirty="0">
+                <a:solidFill>
+                  <a:srgbClr val="FFFFFF"/>
+                </a:solidFill>
+                <a:latin typeface="Aptos" pitchFamily="34" charset="0"/>
+                <a:ea typeface="Aptos" pitchFamily="34" charset="-122"/>
+                <a:cs typeface="Aptos" pitchFamily="34" charset="-120"/>
+              </a:rPr>
+              <a:t>Build</a:t>
+            </a:r>
+            <a:endParaRPr lang="en-US" sz="880" dirty="0"/>
+          </a:p>
+        </p:txBody>
+      </p:sp>
+      <p:sp>
+        <p:nvSpPr>
+          <p:cNvPr id="21" name="Shape 19"/>
+          <p:cNvSpPr/>
+          <p:nvPr/>
+        </p:nvSpPr>
+        <p:spPr>
+          <a:xfrm>
+            <a:off x="9982200" y="3248863"/>
+            <a:ext cx="890016" cy="301752"/>
+          </a:xfrm>
+          <a:prstGeom prst="roundRect">
+            <a:avLst>
+              <a:gd name="adj" fmla="val 24242"/>
+            </a:avLst>
+          </a:prstGeom>
+          <a:solidFill>
+            <a:srgbClr val="6A4CA3"/>
+          </a:solidFill>
+          <a:ln w="12700">
+            <a:solidFill>
+              <a:srgbClr val="6A4CA3"/>
+            </a:solidFill>
+            <a:prstDash val="solid"/>
+          </a:ln>
+        </p:spPr>
+      </p:sp>
+      <p:sp>
+        <p:nvSpPr>
+          <p:cNvPr id="22" name="Text 20"/>
+          <p:cNvSpPr/>
+          <p:nvPr/>
+        </p:nvSpPr>
+        <p:spPr>
+          <a:xfrm>
+            <a:off x="10018776" y="3322015"/>
+            <a:ext cx="816864" cy="146304"/>
+          </a:xfrm>
+          <a:prstGeom prst="rect">
+            <a:avLst/>
+          </a:prstGeom>
+          <a:noFill/>
+          <a:ln/>
+        </p:spPr>
+        <p:txBody>
+          <a:bodyPr wrap="square" lIns="0" tIns="0" rIns="0" bIns="0" rtlCol="0" anchor="ctr">
+            <a:normAutofit/>
+          </a:bodyPr>
+          <a:lstStyle/>
+          <a:p>
+            <a:pPr algn="ctr" indent="0" marL="0">
+              <a:buNone/>
+            </a:pPr>
+            <a:r>
+              <a:rPr lang="en-US" sz="880" b="1" dirty="0">
+                <a:solidFill>
+                  <a:srgbClr val="FFFFFF"/>
+                </a:solidFill>
+                <a:latin typeface="Aptos" pitchFamily="34" charset="0"/>
+                <a:ea typeface="Aptos" pitchFamily="34" charset="-122"/>
+                <a:cs typeface="Aptos" pitchFamily="34" charset="-120"/>
+              </a:rPr>
+              <a:t>Adopt</a:t>
+            </a:r>
+            <a:endParaRPr lang="en-US" sz="880" dirty="0"/>
+          </a:p>
+        </p:txBody>
+      </p:sp>
+      <p:sp>
+        <p:nvSpPr>
+          <p:cNvPr id="23" name="Text 21"/>
+          <p:cNvSpPr/>
+          <p:nvPr/>
+        </p:nvSpPr>
+        <p:spPr>
+          <a:xfrm>
+            <a:off x="7854696" y="3742639"/>
+            <a:ext cx="3035808" cy="158191"/>
+          </a:xfrm>
+          <a:prstGeom prst="rect">
+            <a:avLst/>
+          </a:prstGeom>
+          <a:noFill/>
+          <a:ln/>
+        </p:spPr>
+        <p:txBody>
+          <a:bodyPr wrap="square" lIns="254" tIns="254" rIns="254" bIns="254" rtlCol="0" anchor="t">
+            <a:normAutofit/>
+          </a:bodyPr>
+          <a:lstStyle/>
+          <a:p>
+            <a:pPr indent="0" marL="0">
+              <a:buNone/>
+            </a:pPr>
+            <a:r>
+              <a:rPr lang="en-US" sz="1120" dirty="0">
+                <a:solidFill>
+                  <a:srgbClr val="17364A"/>
+                </a:solidFill>
+                <a:latin typeface="Aptos" pitchFamily="34" charset="0"/>
+                <a:ea typeface="Aptos" pitchFamily="34" charset="-122"/>
+                <a:cs typeface="Aptos" pitchFamily="34" charset="-120"/>
+              </a:rPr>
+              <a:t>Implementation work should make dependencies, approvals, training, and sustainment visible before launch.</a:t>
+            </a:r>
+            <a:endParaRPr lang="en-US" sz="1120" dirty="0"/>
+          </a:p>
+        </p:txBody>
+      </p:sp>
+      <p:sp>
+        <p:nvSpPr>
+          <p:cNvPr id="24" name="Shape 22"/>
+          <p:cNvSpPr/>
+          <p:nvPr/>
+        </p:nvSpPr>
+        <p:spPr>
+          <a:xfrm>
+            <a:off x="7635240" y="4184294"/>
+            <a:ext cx="3474720" cy="1466698"/>
+          </a:xfrm>
+          <a:prstGeom prst="roundRect">
+            <a:avLst>
+              <a:gd name="adj" fmla="val 7481"/>
             </a:avLst>
           </a:prstGeom>
           <a:solidFill>
@@ -6516,13 +6948,13 @@
       </p:sp>
       <p:sp>
         <p:nvSpPr>
-          <p:cNvPr id="17" name="Text 15"/>
-          <p:cNvSpPr/>
-          <p:nvPr/>
-        </p:nvSpPr>
-        <p:spPr>
-          <a:xfrm>
-            <a:off x="7799832" y="4645152"/>
+          <p:cNvPr id="25" name="Text 23"/>
+          <p:cNvSpPr/>
+          <p:nvPr/>
+        </p:nvSpPr>
+        <p:spPr>
+          <a:xfrm>
+            <a:off x="7799832" y="4330598"/>
             <a:ext cx="3145536" cy="256032"/>
           </a:xfrm>
           <a:prstGeom prst="rect">
@@ -6555,14 +6987,14 @@
       </p:sp>
       <p:sp>
         <p:nvSpPr>
-          <p:cNvPr id="18" name="Text 16"/>
-          <p:cNvSpPr/>
-          <p:nvPr/>
-        </p:nvSpPr>
-        <p:spPr>
-          <a:xfrm>
-            <a:off x="7799832" y="4974336"/>
-            <a:ext cx="3145536" cy="576072"/>
+          <p:cNvPr id="26" name="Text 24"/>
+          <p:cNvSpPr/>
+          <p:nvPr/>
+        </p:nvSpPr>
+        <p:spPr>
+          <a:xfrm>
+            <a:off x="7799832" y="4659782"/>
+            <a:ext cx="3145536" cy="899770"/>
           </a:xfrm>
           <a:prstGeom prst="rect">
             <a:avLst/>
@@ -6588,7 +7020,7 @@
                 <a:ea typeface="Aptos" pitchFamily="34" charset="-122"/>
                 <a:cs typeface="Aptos" pitchFamily="34" charset="-120"/>
               </a:rPr>
-              <a:t>Use the concept to clarify workflow changes, dependencies, staffing, procurement requirements, training needs, and.</a:t>
+              <a:t>Use the concept to clarify workflow changes, dependencies, staffing, procurement requirements, training needs, and implementation checkpoints.</a:t>
             </a:r>
             <a:endParaRPr lang="en-US" sz="1320" dirty="0"/>
           </a:p>
@@ -6957,11 +7389,11 @@
         <p:spPr>
           <a:xfrm>
             <a:off x="7635240" y="1325880"/>
-            <a:ext cx="3474720" cy="1325880"/>
+            <a:ext cx="3474720" cy="1207008"/>
           </a:xfrm>
           <a:prstGeom prst="roundRect">
             <a:avLst>
-              <a:gd name="adj" fmla="val 8276"/>
+              <a:gd name="adj" fmla="val 9091"/>
             </a:avLst>
           </a:prstGeom>
           <a:solidFill>
@@ -7023,7 +7455,7 @@
         <p:spPr>
           <a:xfrm>
             <a:off x="7799832" y="1801368"/>
-            <a:ext cx="3145536" cy="758952"/>
+            <a:ext cx="3145536" cy="640080"/>
           </a:xfrm>
           <a:prstGeom prst="rect">
             <a:avLst/>
@@ -7063,12 +7495,12 @@
         </p:nvSpPr>
         <p:spPr>
           <a:xfrm>
-            <a:off x="7635240" y="2788920"/>
-            <a:ext cx="3474720" cy="1536192"/>
+            <a:off x="7635240" y="2670048"/>
+            <a:ext cx="3474720" cy="1377086"/>
           </a:xfrm>
           <a:prstGeom prst="roundRect">
             <a:avLst>
-              <a:gd name="adj" fmla="val 7143"/>
+              <a:gd name="adj" fmla="val 7968"/>
             </a:avLst>
           </a:prstGeom>
           <a:solidFill>
@@ -7090,7 +7522,7 @@
         </p:nvSpPr>
         <p:spPr>
           <a:xfrm>
-            <a:off x="7799832" y="2935224"/>
+            <a:off x="7799832" y="2816352"/>
             <a:ext cx="3145536" cy="256032"/>
           </a:xfrm>
           <a:prstGeom prst="rect">
@@ -7129,8 +7561,8 @@
         </p:nvSpPr>
         <p:spPr>
           <a:xfrm>
-            <a:off x="7818120" y="3300984"/>
-            <a:ext cx="3090672" cy="877824"/>
+            <a:off x="7818120" y="3182112"/>
+            <a:ext cx="3090672" cy="718718"/>
           </a:xfrm>
           <a:prstGeom prst="rect">
             <a:avLst/>
@@ -7204,12 +7636,12 @@
         </p:nvSpPr>
         <p:spPr>
           <a:xfrm>
-            <a:off x="7635240" y="4498848"/>
-            <a:ext cx="3474720" cy="1143000"/>
+            <a:off x="7635240" y="4184294"/>
+            <a:ext cx="3474720" cy="1466698"/>
           </a:xfrm>
           <a:prstGeom prst="roundRect">
             <a:avLst>
-              <a:gd name="adj" fmla="val 9600"/>
+              <a:gd name="adj" fmla="val 7481"/>
             </a:avLst>
           </a:prstGeom>
           <a:solidFill>
@@ -7231,7 +7663,7 @@
         </p:nvSpPr>
         <p:spPr>
           <a:xfrm>
-            <a:off x="7799832" y="4645152"/>
+            <a:off x="7799832" y="4330598"/>
             <a:ext cx="3145536" cy="256032"/>
           </a:xfrm>
           <a:prstGeom prst="rect">
@@ -7270,8 +7702,8 @@
         </p:nvSpPr>
         <p:spPr>
           <a:xfrm>
-            <a:off x="7799832" y="4974336"/>
-            <a:ext cx="3145536" cy="576072"/>
+            <a:off x="7799832" y="4659782"/>
+            <a:ext cx="3145536" cy="899770"/>
           </a:xfrm>
           <a:prstGeom prst="rect">
             <a:avLst/>
@@ -7297,7 +7729,7 @@
                 <a:ea typeface="Aptos" pitchFamily="34" charset="-122"/>
                 <a:cs typeface="Aptos" pitchFamily="34" charset="-120"/>
               </a:rPr>
-              <a:t>Connect the concept to public health purpose, responsible use, required safeguards, documentation, and the next action a.</a:t>
+              <a:t>Connect the concept to public health purpose, responsible use, required safeguards, documentation, and the next action a department should take.</a:t>
             </a:r>
             <a:endParaRPr lang="en-US" sz="1320" dirty="0"/>
           </a:p>
@@ -7649,11 +8081,11 @@
         <p:spPr>
           <a:xfrm>
             <a:off x="7635240" y="1325880"/>
-            <a:ext cx="3474720" cy="1325880"/>
+            <a:ext cx="3474720" cy="1207008"/>
           </a:xfrm>
           <a:prstGeom prst="roundRect">
             <a:avLst>
-              <a:gd name="adj" fmla="val 8276"/>
+              <a:gd name="adj" fmla="val 9091"/>
             </a:avLst>
           </a:prstGeom>
           <a:solidFill>
@@ -7715,7 +8147,7 @@
         <p:spPr>
           <a:xfrm>
             <a:off x="7799832" y="1801368"/>
-            <a:ext cx="3145536" cy="758952"/>
+            <a:ext cx="3145536" cy="640080"/>
           </a:xfrm>
           <a:prstGeom prst="rect">
             <a:avLst/>
@@ -7755,12 +8187,12 @@
         </p:nvSpPr>
         <p:spPr>
           <a:xfrm>
-            <a:off x="7635240" y="2788920"/>
-            <a:ext cx="3474720" cy="1536192"/>
+            <a:off x="7635240" y="2670048"/>
+            <a:ext cx="3474720" cy="1377086"/>
           </a:xfrm>
           <a:prstGeom prst="roundRect">
             <a:avLst>
-              <a:gd name="adj" fmla="val 7143"/>
+              <a:gd name="adj" fmla="val 7968"/>
             </a:avLst>
           </a:prstGeom>
           <a:solidFill>
@@ -7782,7 +8214,7 @@
         </p:nvSpPr>
         <p:spPr>
           <a:xfrm>
-            <a:off x="7799832" y="2935224"/>
+            <a:off x="7799832" y="2816352"/>
             <a:ext cx="3145536" cy="256032"/>
           </a:xfrm>
           <a:prstGeom prst="rect">
@@ -7821,8 +8253,8 @@
         </p:nvSpPr>
         <p:spPr>
           <a:xfrm>
-            <a:off x="7818120" y="3300984"/>
-            <a:ext cx="3090672" cy="877824"/>
+            <a:off x="7818120" y="3182112"/>
+            <a:ext cx="3090672" cy="718718"/>
           </a:xfrm>
           <a:prstGeom prst="rect">
             <a:avLst/>
@@ -7879,12 +8311,12 @@
         </p:nvSpPr>
         <p:spPr>
           <a:xfrm>
-            <a:off x="7635240" y="4498848"/>
-            <a:ext cx="3474720" cy="1143000"/>
+            <a:off x="7635240" y="4184294"/>
+            <a:ext cx="3474720" cy="1466698"/>
           </a:xfrm>
           <a:prstGeom prst="roundRect">
             <a:avLst>
-              <a:gd name="adj" fmla="val 9600"/>
+              <a:gd name="adj" fmla="val 7481"/>
             </a:avLst>
           </a:prstGeom>
           <a:solidFill>
@@ -7906,7 +8338,7 @@
         </p:nvSpPr>
         <p:spPr>
           <a:xfrm>
-            <a:off x="7799832" y="4645152"/>
+            <a:off x="7799832" y="4330598"/>
             <a:ext cx="3145536" cy="256032"/>
           </a:xfrm>
           <a:prstGeom prst="rect">
@@ -7945,8 +8377,8 @@
         </p:nvSpPr>
         <p:spPr>
           <a:xfrm>
-            <a:off x="7799832" y="4974336"/>
-            <a:ext cx="3145536" cy="576072"/>
+            <a:off x="7799832" y="4659782"/>
+            <a:ext cx="3145536" cy="899770"/>
           </a:xfrm>
           <a:prstGeom prst="rect">
             <a:avLst/>
@@ -7972,7 +8404,7 @@
                 <a:ea typeface="Aptos" pitchFamily="34" charset="-122"/>
                 <a:cs typeface="Aptos" pitchFamily="34" charset="-120"/>
               </a:rPr>
-              <a:t>Connect the concept to public health purpose, responsible use, required safeguards, documentation, and the next action a.</a:t>
+              <a:t>Connect the concept to public health purpose, responsible use, required safeguards, documentation, and the next action a department should take.</a:t>
             </a:r>
             <a:endParaRPr lang="en-US" sz="1320" dirty="0"/>
           </a:p>
@@ -8341,11 +8773,11 @@
         <p:spPr>
           <a:xfrm>
             <a:off x="7635240" y="1325880"/>
-            <a:ext cx="3474720" cy="1325880"/>
+            <a:ext cx="3474720" cy="1255471"/>
           </a:xfrm>
           <a:prstGeom prst="roundRect">
             <a:avLst>
-              <a:gd name="adj" fmla="val 8276"/>
+              <a:gd name="adj" fmla="val 8740"/>
             </a:avLst>
           </a:prstGeom>
           <a:solidFill>
@@ -8407,7 +8839,7 @@
         <p:spPr>
           <a:xfrm>
             <a:off x="7799832" y="1801368"/>
-            <a:ext cx="3145536" cy="758952"/>
+            <a:ext cx="3145536" cy="688543"/>
           </a:xfrm>
           <a:prstGeom prst="rect">
             <a:avLst/>
@@ -8447,12 +8879,12 @@
         </p:nvSpPr>
         <p:spPr>
           <a:xfrm>
-            <a:off x="7635240" y="2788920"/>
-            <a:ext cx="3474720" cy="1536192"/>
+            <a:off x="7635240" y="2718511"/>
+            <a:ext cx="3474720" cy="1328623"/>
           </a:xfrm>
           <a:prstGeom prst="roundRect">
             <a:avLst>
-              <a:gd name="adj" fmla="val 7143"/>
+              <a:gd name="adj" fmla="val 8259"/>
             </a:avLst>
           </a:prstGeom>
           <a:solidFill>
@@ -8474,7 +8906,7 @@
         </p:nvSpPr>
         <p:spPr>
           <a:xfrm>
-            <a:off x="7799832" y="2935224"/>
+            <a:off x="7799832" y="2864815"/>
             <a:ext cx="3145536" cy="256032"/>
           </a:xfrm>
           <a:prstGeom prst="rect">
@@ -8513,8 +8945,8 @@
         </p:nvSpPr>
         <p:spPr>
           <a:xfrm>
-            <a:off x="7818120" y="3300984"/>
-            <a:ext cx="3090672" cy="877824"/>
+            <a:off x="7818120" y="3230575"/>
+            <a:ext cx="3090672" cy="670255"/>
           </a:xfrm>
           <a:prstGeom prst="rect">
             <a:avLst/>
@@ -8588,12 +9020,12 @@
         </p:nvSpPr>
         <p:spPr>
           <a:xfrm>
-            <a:off x="7635240" y="4498848"/>
-            <a:ext cx="3474720" cy="1143000"/>
+            <a:off x="7635240" y="4184294"/>
+            <a:ext cx="3474720" cy="1466698"/>
           </a:xfrm>
           <a:prstGeom prst="roundRect">
             <a:avLst>
-              <a:gd name="adj" fmla="val 9600"/>
+              <a:gd name="adj" fmla="val 7481"/>
             </a:avLst>
           </a:prstGeom>
           <a:solidFill>
@@ -8615,7 +9047,7 @@
         </p:nvSpPr>
         <p:spPr>
           <a:xfrm>
-            <a:off x="7799832" y="4645152"/>
+            <a:off x="7799832" y="4330598"/>
             <a:ext cx="3145536" cy="256032"/>
           </a:xfrm>
           <a:prstGeom prst="rect">
@@ -8654,8 +9086,8 @@
         </p:nvSpPr>
         <p:spPr>
           <a:xfrm>
-            <a:off x="7799832" y="4974336"/>
-            <a:ext cx="3145536" cy="576072"/>
+            <a:off x="7799832" y="4659782"/>
+            <a:ext cx="3145536" cy="899770"/>
           </a:xfrm>
           <a:prstGeom prst="rect">
             <a:avLst/>
@@ -8681,7 +9113,7 @@
                 <a:ea typeface="Aptos" pitchFamily="34" charset="-122"/>
                 <a:cs typeface="Aptos" pitchFamily="34" charset="-120"/>
               </a:rPr>
-              <a:t>Use the assignment to test whether you can explain the concept, apply it to a realistic public health situation, and.</a:t>
+              <a:t>Use the assignment to test whether you can explain the concept, apply it to a realistic public health situation, and identify what would need review before the work moves forward.</a:t>
             </a:r>
             <a:endParaRPr lang="en-US" sz="1320" dirty="0"/>
           </a:p>
@@ -9033,11 +9465,11 @@
         <p:spPr>
           <a:xfrm>
             <a:off x="7635240" y="1325880"/>
-            <a:ext cx="3474720" cy="1325880"/>
+            <a:ext cx="3474720" cy="1207008"/>
           </a:xfrm>
           <a:prstGeom prst="roundRect">
             <a:avLst>
-              <a:gd name="adj" fmla="val 8276"/>
+              <a:gd name="adj" fmla="val 9091"/>
             </a:avLst>
           </a:prstGeom>
           <a:solidFill>
@@ -9099,7 +9531,7 @@
         <p:spPr>
           <a:xfrm>
             <a:off x="7799832" y="1801368"/>
-            <a:ext cx="3145536" cy="758952"/>
+            <a:ext cx="3145536" cy="640080"/>
           </a:xfrm>
           <a:prstGeom prst="rect">
             <a:avLst/>
@@ -9139,12 +9571,12 @@
         </p:nvSpPr>
         <p:spPr>
           <a:xfrm>
-            <a:off x="7635240" y="2788920"/>
-            <a:ext cx="3474720" cy="1536192"/>
+            <a:off x="7635240" y="2670048"/>
+            <a:ext cx="3474720" cy="1377086"/>
           </a:xfrm>
           <a:prstGeom prst="roundRect">
             <a:avLst>
-              <a:gd name="adj" fmla="val 7143"/>
+              <a:gd name="adj" fmla="val 7968"/>
             </a:avLst>
           </a:prstGeom>
           <a:solidFill>
@@ -9166,7 +9598,7 @@
         </p:nvSpPr>
         <p:spPr>
           <a:xfrm>
-            <a:off x="7799832" y="2935224"/>
+            <a:off x="7799832" y="2816352"/>
             <a:ext cx="3145536" cy="256032"/>
           </a:xfrm>
           <a:prstGeom prst="rect">
@@ -9205,8 +9637,8 @@
         </p:nvSpPr>
         <p:spPr>
           <a:xfrm>
-            <a:off x="7818120" y="3300984"/>
-            <a:ext cx="3090672" cy="877824"/>
+            <a:off x="7818120" y="3182112"/>
+            <a:ext cx="3090672" cy="718718"/>
           </a:xfrm>
           <a:prstGeom prst="rect">
             <a:avLst/>
@@ -9263,12 +9695,12 @@
         </p:nvSpPr>
         <p:spPr>
           <a:xfrm>
-            <a:off x="7635240" y="4498848"/>
-            <a:ext cx="3474720" cy="1143000"/>
+            <a:off x="7635240" y="4184294"/>
+            <a:ext cx="3474720" cy="1466698"/>
           </a:xfrm>
           <a:prstGeom prst="roundRect">
             <a:avLst>
-              <a:gd name="adj" fmla="val 9600"/>
+              <a:gd name="adj" fmla="val 7481"/>
             </a:avLst>
           </a:prstGeom>
           <a:solidFill>
@@ -9290,7 +9722,7 @@
         </p:nvSpPr>
         <p:spPr>
           <a:xfrm>
-            <a:off x="7799832" y="4645152"/>
+            <a:off x="7799832" y="4330598"/>
             <a:ext cx="3145536" cy="256032"/>
           </a:xfrm>
           <a:prstGeom prst="rect">
@@ -9329,8 +9761,8 @@
         </p:nvSpPr>
         <p:spPr>
           <a:xfrm>
-            <a:off x="7799832" y="4974336"/>
-            <a:ext cx="3145536" cy="576072"/>
+            <a:off x="7799832" y="4659782"/>
+            <a:ext cx="3145536" cy="899770"/>
           </a:xfrm>
           <a:prstGeom prst="rect">
             <a:avLst/>
@@ -9356,7 +9788,7 @@
                 <a:ea typeface="Aptos" pitchFamily="34" charset="-122"/>
                 <a:cs typeface="Aptos" pitchFamily="34" charset="-120"/>
               </a:rPr>
-              <a:t>Connect the concept to public health purpose, responsible use, required safeguards, documentation, and the next action a.</a:t>
+              <a:t>Connect the concept to public health purpose, responsible use, required safeguards, documentation, and the next action a department should take.</a:t>
             </a:r>
             <a:endParaRPr lang="en-US" sz="1320" dirty="0"/>
           </a:p>
@@ -9691,11 +10123,11 @@
         <p:spPr>
           <a:xfrm>
             <a:off x="7635240" y="1325880"/>
-            <a:ext cx="3474720" cy="1325880"/>
+            <a:ext cx="3474720" cy="1255471"/>
           </a:xfrm>
           <a:prstGeom prst="roundRect">
             <a:avLst>
-              <a:gd name="adj" fmla="val 8276"/>
+              <a:gd name="adj" fmla="val 8740"/>
             </a:avLst>
           </a:prstGeom>
           <a:solidFill>
@@ -9757,7 +10189,7 @@
         <p:spPr>
           <a:xfrm>
             <a:off x="7799832" y="1801368"/>
-            <a:ext cx="3145536" cy="758952"/>
+            <a:ext cx="3145536" cy="688543"/>
           </a:xfrm>
           <a:prstGeom prst="rect">
             <a:avLst/>
@@ -9797,12 +10229,12 @@
         </p:nvSpPr>
         <p:spPr>
           <a:xfrm>
-            <a:off x="7635240" y="2788920"/>
-            <a:ext cx="3474720" cy="1536192"/>
+            <a:off x="7635240" y="2718511"/>
+            <a:ext cx="3474720" cy="1328623"/>
           </a:xfrm>
           <a:prstGeom prst="roundRect">
             <a:avLst>
-              <a:gd name="adj" fmla="val 7143"/>
+              <a:gd name="adj" fmla="val 8259"/>
             </a:avLst>
           </a:prstGeom>
           <a:solidFill>
@@ -9824,7 +10256,7 @@
         </p:nvSpPr>
         <p:spPr>
           <a:xfrm>
-            <a:off x="7799832" y="2935224"/>
+            <a:off x="7799832" y="2864815"/>
             <a:ext cx="3145536" cy="256032"/>
           </a:xfrm>
           <a:prstGeom prst="rect">
@@ -9863,8 +10295,8 @@
         </p:nvSpPr>
         <p:spPr>
           <a:xfrm>
-            <a:off x="7818120" y="3300984"/>
-            <a:ext cx="3090672" cy="877824"/>
+            <a:off x="7818120" y="3230575"/>
+            <a:ext cx="3090672" cy="670255"/>
           </a:xfrm>
           <a:prstGeom prst="rect">
             <a:avLst/>
@@ -9921,12 +10353,12 @@
         </p:nvSpPr>
         <p:spPr>
           <a:xfrm>
-            <a:off x="7635240" y="4498848"/>
-            <a:ext cx="3474720" cy="1143000"/>
+            <a:off x="7635240" y="4184294"/>
+            <a:ext cx="3474720" cy="1466698"/>
           </a:xfrm>
           <a:prstGeom prst="roundRect">
             <a:avLst>
-              <a:gd name="adj" fmla="val 9600"/>
+              <a:gd name="adj" fmla="val 7481"/>
             </a:avLst>
           </a:prstGeom>
           <a:solidFill>
@@ -9948,7 +10380,7 @@
         </p:nvSpPr>
         <p:spPr>
           <a:xfrm>
-            <a:off x="7799832" y="4645152"/>
+            <a:off x="7799832" y="4330598"/>
             <a:ext cx="3145536" cy="256032"/>
           </a:xfrm>
           <a:prstGeom prst="rect">
@@ -9987,8 +10419,8 @@
         </p:nvSpPr>
         <p:spPr>
           <a:xfrm>
-            <a:off x="7799832" y="4974336"/>
-            <a:ext cx="3145536" cy="576072"/>
+            <a:off x="7799832" y="4659782"/>
+            <a:ext cx="3145536" cy="899770"/>
           </a:xfrm>
           <a:prstGeom prst="rect">
             <a:avLst/>
@@ -10014,7 +10446,7 @@
                 <a:ea typeface="Aptos" pitchFamily="34" charset="-122"/>
                 <a:cs typeface="Aptos" pitchFamily="34" charset="-120"/>
               </a:rPr>
-              <a:t>Use the assignment to test whether you can explain the concept, apply it to a realistic public health situation, and.</a:t>
+              <a:t>Use the assignment to test whether you can explain the concept, apply it to a realistic public health situation, and identify what would need review before the work moves forward.</a:t>
             </a:r>
             <a:endParaRPr lang="en-US" sz="1320" dirty="0"/>
           </a:p>
@@ -10985,11 +11417,11 @@
         <p:spPr>
           <a:xfrm>
             <a:off x="7635240" y="1325880"/>
-            <a:ext cx="3474720" cy="1325880"/>
+            <a:ext cx="3474720" cy="1255471"/>
           </a:xfrm>
           <a:prstGeom prst="roundRect">
             <a:avLst>
-              <a:gd name="adj" fmla="val 8276"/>
+              <a:gd name="adj" fmla="val 8740"/>
             </a:avLst>
           </a:prstGeom>
           <a:solidFill>
@@ -11051,7 +11483,7 @@
         <p:spPr>
           <a:xfrm>
             <a:off x="7799832" y="1801368"/>
-            <a:ext cx="3145536" cy="758952"/>
+            <a:ext cx="3145536" cy="688543"/>
           </a:xfrm>
           <a:prstGeom prst="rect">
             <a:avLst/>
@@ -11091,12 +11523,12 @@
         </p:nvSpPr>
         <p:spPr>
           <a:xfrm>
-            <a:off x="7635240" y="2788920"/>
-            <a:ext cx="3474720" cy="1536192"/>
+            <a:off x="7635240" y="2718511"/>
+            <a:ext cx="3474720" cy="1328623"/>
           </a:xfrm>
           <a:prstGeom prst="roundRect">
             <a:avLst>
-              <a:gd name="adj" fmla="val 7143"/>
+              <a:gd name="adj" fmla="val 8259"/>
             </a:avLst>
           </a:prstGeom>
           <a:solidFill>
@@ -11118,7 +11550,7 @@
         </p:nvSpPr>
         <p:spPr>
           <a:xfrm>
-            <a:off x="7799832" y="2935224"/>
+            <a:off x="7799832" y="2864815"/>
             <a:ext cx="3145536" cy="256032"/>
           </a:xfrm>
           <a:prstGeom prst="rect">
@@ -11157,8 +11589,8 @@
         </p:nvSpPr>
         <p:spPr>
           <a:xfrm>
-            <a:off x="7818120" y="3300984"/>
-            <a:ext cx="3090672" cy="877824"/>
+            <a:off x="7818120" y="3230575"/>
+            <a:ext cx="3090672" cy="670255"/>
           </a:xfrm>
           <a:prstGeom prst="rect">
             <a:avLst/>
@@ -11232,12 +11664,12 @@
         </p:nvSpPr>
         <p:spPr>
           <a:xfrm>
-            <a:off x="7635240" y="4498848"/>
-            <a:ext cx="3474720" cy="1143000"/>
+            <a:off x="7635240" y="4184294"/>
+            <a:ext cx="3474720" cy="1466698"/>
           </a:xfrm>
           <a:prstGeom prst="roundRect">
             <a:avLst>
-              <a:gd name="adj" fmla="val 9600"/>
+              <a:gd name="adj" fmla="val 7481"/>
             </a:avLst>
           </a:prstGeom>
           <a:solidFill>
@@ -11259,7 +11691,7 @@
         </p:nvSpPr>
         <p:spPr>
           <a:xfrm>
-            <a:off x="7799832" y="4645152"/>
+            <a:off x="7799832" y="4330598"/>
             <a:ext cx="3145536" cy="256032"/>
           </a:xfrm>
           <a:prstGeom prst="rect">
@@ -11298,8 +11730,8 @@
         </p:nvSpPr>
         <p:spPr>
           <a:xfrm>
-            <a:off x="7799832" y="4974336"/>
-            <a:ext cx="3145536" cy="576072"/>
+            <a:off x="7799832" y="4659782"/>
+            <a:ext cx="3145536" cy="899770"/>
           </a:xfrm>
           <a:prstGeom prst="rect">
             <a:avLst/>
@@ -11325,7 +11757,7 @@
                 <a:ea typeface="Aptos" pitchFamily="34" charset="-122"/>
                 <a:cs typeface="Aptos" pitchFamily="34" charset="-120"/>
               </a:rPr>
-              <a:t>Use the assignment to test whether you can explain the concept, apply it to a realistic public health situation, and.</a:t>
+              <a:t>Use the assignment to test whether you can explain the concept, apply it to a realistic public health situation, and identify what would need review before the work moves forward.</a:t>
             </a:r>
             <a:endParaRPr lang="en-US" sz="1320" dirty="0"/>
           </a:p>
@@ -11694,11 +12126,11 @@
         <p:spPr>
           <a:xfrm>
             <a:off x="7635240" y="1325880"/>
-            <a:ext cx="3474720" cy="1325880"/>
+            <a:ext cx="3474720" cy="1207008"/>
           </a:xfrm>
           <a:prstGeom prst="roundRect">
             <a:avLst>
-              <a:gd name="adj" fmla="val 8276"/>
+              <a:gd name="adj" fmla="val 9091"/>
             </a:avLst>
           </a:prstGeom>
           <a:solidFill>
@@ -11760,7 +12192,7 @@
         <p:spPr>
           <a:xfrm>
             <a:off x="7799832" y="1801368"/>
-            <a:ext cx="3145536" cy="758952"/>
+            <a:ext cx="3145536" cy="640080"/>
           </a:xfrm>
           <a:prstGeom prst="rect">
             <a:avLst/>
@@ -11800,12 +12232,12 @@
         </p:nvSpPr>
         <p:spPr>
           <a:xfrm>
-            <a:off x="7635240" y="2788920"/>
-            <a:ext cx="3474720" cy="1536192"/>
+            <a:off x="7635240" y="2670048"/>
+            <a:ext cx="3474720" cy="1377086"/>
           </a:xfrm>
           <a:prstGeom prst="roundRect">
             <a:avLst>
-              <a:gd name="adj" fmla="val 7143"/>
+              <a:gd name="adj" fmla="val 7968"/>
             </a:avLst>
           </a:prstGeom>
           <a:solidFill>
@@ -11827,7 +12259,7 @@
         </p:nvSpPr>
         <p:spPr>
           <a:xfrm>
-            <a:off x="7799832" y="2935224"/>
+            <a:off x="7799832" y="2816352"/>
             <a:ext cx="3145536" cy="256032"/>
           </a:xfrm>
           <a:prstGeom prst="rect">
@@ -11866,8 +12298,8 @@
         </p:nvSpPr>
         <p:spPr>
           <a:xfrm>
-            <a:off x="7818120" y="3300984"/>
-            <a:ext cx="3090672" cy="877824"/>
+            <a:off x="7818120" y="3182112"/>
+            <a:ext cx="3090672" cy="718718"/>
           </a:xfrm>
           <a:prstGeom prst="rect">
             <a:avLst/>
@@ -11924,12 +12356,12 @@
         </p:nvSpPr>
         <p:spPr>
           <a:xfrm>
-            <a:off x="7635240" y="4498848"/>
-            <a:ext cx="3474720" cy="1143000"/>
+            <a:off x="7635240" y="4184294"/>
+            <a:ext cx="3474720" cy="1466698"/>
           </a:xfrm>
           <a:prstGeom prst="roundRect">
             <a:avLst>
-              <a:gd name="adj" fmla="val 9600"/>
+              <a:gd name="adj" fmla="val 7481"/>
             </a:avLst>
           </a:prstGeom>
           <a:solidFill>
@@ -11951,7 +12383,7 @@
         </p:nvSpPr>
         <p:spPr>
           <a:xfrm>
-            <a:off x="7799832" y="4645152"/>
+            <a:off x="7799832" y="4330598"/>
             <a:ext cx="3145536" cy="256032"/>
           </a:xfrm>
           <a:prstGeom prst="rect">
@@ -11990,8 +12422,8 @@
         </p:nvSpPr>
         <p:spPr>
           <a:xfrm>
-            <a:off x="7799832" y="4974336"/>
-            <a:ext cx="3145536" cy="576072"/>
+            <a:off x="7799832" y="4659782"/>
+            <a:ext cx="3145536" cy="899770"/>
           </a:xfrm>
           <a:prstGeom prst="rect">
             <a:avLst/>
@@ -12017,7 +12449,7 @@
                 <a:ea typeface="Aptos" pitchFamily="34" charset="-122"/>
                 <a:cs typeface="Aptos" pitchFamily="34" charset="-120"/>
               </a:rPr>
-              <a:t>Connect the concept to public health purpose, responsible use, required safeguards, documentation, and the next action a.</a:t>
+              <a:t>Connect the concept to public health purpose, responsible use, required safeguards, documentation, and the next action a department should take.</a:t>
             </a:r>
             <a:endParaRPr lang="en-US" sz="1320" dirty="0"/>
           </a:p>
@@ -12352,11 +12784,11 @@
         <p:spPr>
           <a:xfrm>
             <a:off x="7635240" y="1325880"/>
-            <a:ext cx="3474720" cy="1325880"/>
+            <a:ext cx="3474720" cy="1207008"/>
           </a:xfrm>
           <a:prstGeom prst="roundRect">
             <a:avLst>
-              <a:gd name="adj" fmla="val 8276"/>
+              <a:gd name="adj" fmla="val 9091"/>
             </a:avLst>
           </a:prstGeom>
           <a:solidFill>
@@ -12418,7 +12850,7 @@
         <p:spPr>
           <a:xfrm>
             <a:off x="7799832" y="1801368"/>
-            <a:ext cx="3145536" cy="758952"/>
+            <a:ext cx="3145536" cy="640080"/>
           </a:xfrm>
           <a:prstGeom prst="rect">
             <a:avLst/>
@@ -12444,7 +12876,7 @@
                 <a:ea typeface="Aptos" pitchFamily="34" charset="-122"/>
                 <a:cs typeface="Aptos" pitchFamily="34" charset="-120"/>
               </a:rPr>
-              <a:t>Agency privacy, cybersecurity, data governance, procurement, and records management policies</a:t>
+              <a:t>Agency privacy, cybersecurity, data governance, procurement, and records management.</a:t>
             </a:r>
             <a:endParaRPr lang="en-US" sz="1320" dirty="0"/>
           </a:p>
@@ -12458,12 +12890,12 @@
         </p:nvSpPr>
         <p:spPr>
           <a:xfrm>
-            <a:off x="7635240" y="2788920"/>
-            <a:ext cx="3474720" cy="1536192"/>
+            <a:off x="7635240" y="2670048"/>
+            <a:ext cx="3474720" cy="1377086"/>
           </a:xfrm>
           <a:prstGeom prst="roundRect">
             <a:avLst>
-              <a:gd name="adj" fmla="val 7143"/>
+              <a:gd name="adj" fmla="val 7968"/>
             </a:avLst>
           </a:prstGeom>
           <a:solidFill>
@@ -12485,7 +12917,7 @@
         </p:nvSpPr>
         <p:spPr>
           <a:xfrm>
-            <a:off x="7799832" y="2935224"/>
+            <a:off x="7799832" y="2816352"/>
             <a:ext cx="3145536" cy="256032"/>
           </a:xfrm>
           <a:prstGeom prst="rect">
@@ -12524,8 +12956,8 @@
         </p:nvSpPr>
         <p:spPr>
           <a:xfrm>
-            <a:off x="7818120" y="3300984"/>
-            <a:ext cx="3090672" cy="877824"/>
+            <a:off x="7818120" y="3182112"/>
+            <a:ext cx="3090672" cy="718718"/>
           </a:xfrm>
           <a:prstGeom prst="rect">
             <a:avLst/>
@@ -12565,12 +12997,12 @@
         </p:nvSpPr>
         <p:spPr>
           <a:xfrm>
-            <a:off x="7635240" y="4498848"/>
-            <a:ext cx="3474720" cy="1143000"/>
+            <a:off x="7635240" y="4184294"/>
+            <a:ext cx="3474720" cy="1466698"/>
           </a:xfrm>
           <a:prstGeom prst="roundRect">
             <a:avLst>
-              <a:gd name="adj" fmla="val 9600"/>
+              <a:gd name="adj" fmla="val 7481"/>
             </a:avLst>
           </a:prstGeom>
           <a:solidFill>
@@ -12592,7 +13024,7 @@
         </p:nvSpPr>
         <p:spPr>
           <a:xfrm>
-            <a:off x="7799832" y="4645152"/>
+            <a:off x="7799832" y="4330598"/>
             <a:ext cx="3145536" cy="256032"/>
           </a:xfrm>
           <a:prstGeom prst="rect">
@@ -12631,8 +13063,8 @@
         </p:nvSpPr>
         <p:spPr>
           <a:xfrm>
-            <a:off x="7799832" y="4974336"/>
-            <a:ext cx="3145536" cy="576072"/>
+            <a:off x="7799832" y="4659782"/>
+            <a:ext cx="3145536" cy="899770"/>
           </a:xfrm>
           <a:prstGeom prst="rect">
             <a:avLst/>
@@ -12658,7 +13090,7 @@
                 <a:ea typeface="Aptos" pitchFamily="34" charset="-122"/>
                 <a:cs typeface="Aptos" pitchFamily="34" charset="-120"/>
               </a:rPr>
-              <a:t>Connect the concept to public health purpose, responsible use, required safeguards, documentation, and the next action a.</a:t>
+              <a:t>Connect the concept to public health purpose, responsible use, required safeguards, documentation, and the next action a department should take.</a:t>
             </a:r>
             <a:endParaRPr lang="en-US" sz="1320" dirty="0"/>
           </a:p>
@@ -13136,7 +13568,7 @@
                 <a:ea typeface="Aptos" pitchFamily="34" charset="-122"/>
                 <a:cs typeface="Aptos" pitchFamily="34" charset="-120"/>
               </a:rPr>
-              <a:t>Use the related plays to identify decisions, participants, timing, approvals, and documentation needed for responsible.</a:t>
+              <a:t>Use the related plays to identify decisions, participants, timing, approvals, and documentation needed for responsible implementation.</a:t>
             </a:r>
             <a:endParaRPr lang="en-US" sz="1320" dirty="0"/>
           </a:p>
@@ -13755,7 +14187,7 @@
                 <a:ea typeface="Aptos" pitchFamily="34" charset="-122"/>
                 <a:cs typeface="Aptos" pitchFamily="34" charset="-120"/>
               </a:rPr>
-              <a:t>Use linked tools when your department needs a structured worksheet, template, checklist, review process, or.</a:t>
+              <a:t>Use linked tools when your department needs a structured worksheet, template, checklist, review process, or documentation artifact.</a:t>
             </a:r>
             <a:endParaRPr lang="en-US" sz="1320" dirty="0"/>
           </a:p>
@@ -14265,11 +14697,11 @@
         <p:spPr>
           <a:xfrm>
             <a:off x="7635240" y="1325880"/>
-            <a:ext cx="3474720" cy="1325880"/>
+            <a:ext cx="3474720" cy="1255471"/>
           </a:xfrm>
           <a:prstGeom prst="roundRect">
             <a:avLst>
-              <a:gd name="adj" fmla="val 8276"/>
+              <a:gd name="adj" fmla="val 8740"/>
             </a:avLst>
           </a:prstGeom>
           <a:solidFill>
@@ -14331,7 +14763,7 @@
         <p:spPr>
           <a:xfrm>
             <a:off x="7799832" y="1801368"/>
-            <a:ext cx="3145536" cy="758952"/>
+            <a:ext cx="3145536" cy="688543"/>
           </a:xfrm>
           <a:prstGeom prst="rect">
             <a:avLst/>
@@ -14371,12 +14803,12 @@
         </p:nvSpPr>
         <p:spPr>
           <a:xfrm>
-            <a:off x="7635240" y="2788920"/>
-            <a:ext cx="3474720" cy="1536192"/>
+            <a:off x="7635240" y="2718511"/>
+            <a:ext cx="3474720" cy="1328623"/>
           </a:xfrm>
           <a:prstGeom prst="roundRect">
             <a:avLst>
-              <a:gd name="adj" fmla="val 7143"/>
+              <a:gd name="adj" fmla="val 8259"/>
             </a:avLst>
           </a:prstGeom>
           <a:solidFill>
@@ -14398,7 +14830,7 @@
         </p:nvSpPr>
         <p:spPr>
           <a:xfrm>
-            <a:off x="7799832" y="2935224"/>
+            <a:off x="7799832" y="2864815"/>
             <a:ext cx="3145536" cy="256032"/>
           </a:xfrm>
           <a:prstGeom prst="rect">
@@ -14437,8 +14869,8 @@
         </p:nvSpPr>
         <p:spPr>
           <a:xfrm>
-            <a:off x="7818120" y="3300984"/>
-            <a:ext cx="3090672" cy="877824"/>
+            <a:off x="7818120" y="3230575"/>
+            <a:ext cx="3090672" cy="670255"/>
           </a:xfrm>
           <a:prstGeom prst="rect">
             <a:avLst/>
@@ -14512,12 +14944,12 @@
         </p:nvSpPr>
         <p:spPr>
           <a:xfrm>
-            <a:off x="7635240" y="4498848"/>
-            <a:ext cx="3474720" cy="1143000"/>
+            <a:off x="7635240" y="4184294"/>
+            <a:ext cx="3474720" cy="1466698"/>
           </a:xfrm>
           <a:prstGeom prst="roundRect">
             <a:avLst>
-              <a:gd name="adj" fmla="val 9600"/>
+              <a:gd name="adj" fmla="val 7481"/>
             </a:avLst>
           </a:prstGeom>
           <a:solidFill>
@@ -14539,7 +14971,7 @@
         </p:nvSpPr>
         <p:spPr>
           <a:xfrm>
-            <a:off x="7799832" y="4645152"/>
+            <a:off x="7799832" y="4330598"/>
             <a:ext cx="3145536" cy="256032"/>
           </a:xfrm>
           <a:prstGeom prst="rect">
@@ -14578,8 +15010,8 @@
         </p:nvSpPr>
         <p:spPr>
           <a:xfrm>
-            <a:off x="7799832" y="4974336"/>
-            <a:ext cx="3145536" cy="576072"/>
+            <a:off x="7799832" y="4659782"/>
+            <a:ext cx="3145536" cy="899770"/>
           </a:xfrm>
           <a:prstGeom prst="rect">
             <a:avLst/>
@@ -14605,7 +15037,7 @@
                 <a:ea typeface="Aptos" pitchFamily="34" charset="-122"/>
                 <a:cs typeface="Aptos" pitchFamily="34" charset="-120"/>
               </a:rPr>
-              <a:t>Use the assignment to test whether you can explain the concept, apply it to a realistic public health situation, and.</a:t>
+              <a:t>Use the assignment to test whether you can explain the concept, apply it to a realistic public health situation, and identify what would need review before the work moves forward.</a:t>
             </a:r>
             <a:endParaRPr lang="en-US" sz="1320" dirty="0"/>
           </a:p>
@@ -14940,11 +15372,11 @@
         <p:spPr>
           <a:xfrm>
             <a:off x="7635240" y="1325880"/>
-            <a:ext cx="3474720" cy="1325880"/>
+            <a:ext cx="3474720" cy="1255471"/>
           </a:xfrm>
           <a:prstGeom prst="roundRect">
             <a:avLst>
-              <a:gd name="adj" fmla="val 8276"/>
+              <a:gd name="adj" fmla="val 8740"/>
             </a:avLst>
           </a:prstGeom>
           <a:solidFill>
@@ -15006,7 +15438,7 @@
         <p:spPr>
           <a:xfrm>
             <a:off x="7799832" y="1801368"/>
-            <a:ext cx="3145536" cy="758952"/>
+            <a:ext cx="3145536" cy="688543"/>
           </a:xfrm>
           <a:prstGeom prst="rect">
             <a:avLst/>
@@ -15046,12 +15478,12 @@
         </p:nvSpPr>
         <p:spPr>
           <a:xfrm>
-            <a:off x="7635240" y="2788920"/>
-            <a:ext cx="3474720" cy="1536192"/>
+            <a:off x="7635240" y="2718511"/>
+            <a:ext cx="3474720" cy="1328623"/>
           </a:xfrm>
           <a:prstGeom prst="roundRect">
             <a:avLst>
-              <a:gd name="adj" fmla="val 7143"/>
+              <a:gd name="adj" fmla="val 8259"/>
             </a:avLst>
           </a:prstGeom>
           <a:solidFill>
@@ -15073,7 +15505,7 @@
         </p:nvSpPr>
         <p:spPr>
           <a:xfrm>
-            <a:off x="7799832" y="2935224"/>
+            <a:off x="7799832" y="2864815"/>
             <a:ext cx="3145536" cy="256032"/>
           </a:xfrm>
           <a:prstGeom prst="rect">
@@ -15112,8 +15544,8 @@
         </p:nvSpPr>
         <p:spPr>
           <a:xfrm>
-            <a:off x="7818120" y="3300984"/>
-            <a:ext cx="3090672" cy="877824"/>
+            <a:off x="7818120" y="3230575"/>
+            <a:ext cx="3090672" cy="670255"/>
           </a:xfrm>
           <a:prstGeom prst="rect">
             <a:avLst/>
@@ -15153,12 +15585,12 @@
         </p:nvSpPr>
         <p:spPr>
           <a:xfrm>
-            <a:off x="7635240" y="4498848"/>
-            <a:ext cx="3474720" cy="1143000"/>
+            <a:off x="7635240" y="4184294"/>
+            <a:ext cx="3474720" cy="1466698"/>
           </a:xfrm>
           <a:prstGeom prst="roundRect">
             <a:avLst>
-              <a:gd name="adj" fmla="val 9600"/>
+              <a:gd name="adj" fmla="val 7481"/>
             </a:avLst>
           </a:prstGeom>
           <a:solidFill>
@@ -15180,7 +15612,7 @@
         </p:nvSpPr>
         <p:spPr>
           <a:xfrm>
-            <a:off x="7799832" y="4645152"/>
+            <a:off x="7799832" y="4330598"/>
             <a:ext cx="3145536" cy="256032"/>
           </a:xfrm>
           <a:prstGeom prst="rect">
@@ -15219,8 +15651,8 @@
         </p:nvSpPr>
         <p:spPr>
           <a:xfrm>
-            <a:off x="7799832" y="4974336"/>
-            <a:ext cx="3145536" cy="576072"/>
+            <a:off x="7799832" y="4659782"/>
+            <a:ext cx="3145536" cy="899770"/>
           </a:xfrm>
           <a:prstGeom prst="rect">
             <a:avLst/>
@@ -15246,7 +15678,7 @@
                 <a:ea typeface="Aptos" pitchFamily="34" charset="-122"/>
                 <a:cs typeface="Aptos" pitchFamily="34" charset="-120"/>
               </a:rPr>
-              <a:t>Use the assignment to test whether you can explain the concept, apply it to a realistic public health situation, and.</a:t>
+              <a:t>Use the assignment to test whether you can explain the concept, apply it to a realistic public health situation, and identify what would need review before the work moves forward.</a:t>
             </a:r>
             <a:endParaRPr lang="en-US" sz="1320" dirty="0"/>
           </a:p>
@@ -15615,11 +16047,11 @@
         <p:spPr>
           <a:xfrm>
             <a:off x="7635240" y="1325880"/>
-            <a:ext cx="3474720" cy="1325880"/>
+            <a:ext cx="3474720" cy="1255471"/>
           </a:xfrm>
           <a:prstGeom prst="roundRect">
             <a:avLst>
-              <a:gd name="adj" fmla="val 8276"/>
+              <a:gd name="adj" fmla="val 8740"/>
             </a:avLst>
           </a:prstGeom>
           <a:solidFill>
@@ -15681,7 +16113,7 @@
         <p:spPr>
           <a:xfrm>
             <a:off x="7799832" y="1801368"/>
-            <a:ext cx="3145536" cy="758952"/>
+            <a:ext cx="3145536" cy="688543"/>
           </a:xfrm>
           <a:prstGeom prst="rect">
             <a:avLst/>
@@ -15721,12 +16153,12 @@
         </p:nvSpPr>
         <p:spPr>
           <a:xfrm>
-            <a:off x="7635240" y="2788920"/>
-            <a:ext cx="3474720" cy="1536192"/>
+            <a:off x="7635240" y="2718511"/>
+            <a:ext cx="3474720" cy="1328623"/>
           </a:xfrm>
           <a:prstGeom prst="roundRect">
             <a:avLst>
-              <a:gd name="adj" fmla="val 7143"/>
+              <a:gd name="adj" fmla="val 8259"/>
             </a:avLst>
           </a:prstGeom>
           <a:solidFill>
@@ -15748,7 +16180,7 @@
         </p:nvSpPr>
         <p:spPr>
           <a:xfrm>
-            <a:off x="7799832" y="2935224"/>
+            <a:off x="7799832" y="2864815"/>
             <a:ext cx="3145536" cy="256032"/>
           </a:xfrm>
           <a:prstGeom prst="rect">
@@ -15787,8 +16219,8 @@
         </p:nvSpPr>
         <p:spPr>
           <a:xfrm>
-            <a:off x="7818120" y="3300984"/>
-            <a:ext cx="3090672" cy="877824"/>
+            <a:off x="7818120" y="3230575"/>
+            <a:ext cx="3090672" cy="670255"/>
           </a:xfrm>
           <a:prstGeom prst="rect">
             <a:avLst/>
@@ -15862,12 +16294,12 @@
         </p:nvSpPr>
         <p:spPr>
           <a:xfrm>
-            <a:off x="7635240" y="4498848"/>
-            <a:ext cx="3474720" cy="1143000"/>
+            <a:off x="7635240" y="4184294"/>
+            <a:ext cx="3474720" cy="1466698"/>
           </a:xfrm>
           <a:prstGeom prst="roundRect">
             <a:avLst>
-              <a:gd name="adj" fmla="val 9600"/>
+              <a:gd name="adj" fmla="val 7481"/>
             </a:avLst>
           </a:prstGeom>
           <a:solidFill>
@@ -15889,7 +16321,7 @@
         </p:nvSpPr>
         <p:spPr>
           <a:xfrm>
-            <a:off x="7799832" y="4645152"/>
+            <a:off x="7799832" y="4330598"/>
             <a:ext cx="3145536" cy="256032"/>
           </a:xfrm>
           <a:prstGeom prst="rect">
@@ -15928,8 +16360,8 @@
         </p:nvSpPr>
         <p:spPr>
           <a:xfrm>
-            <a:off x="7799832" y="4974336"/>
-            <a:ext cx="3145536" cy="576072"/>
+            <a:off x="7799832" y="4659782"/>
+            <a:ext cx="3145536" cy="899770"/>
           </a:xfrm>
           <a:prstGeom prst="rect">
             <a:avLst/>
@@ -15955,7 +16387,7 @@
                 <a:ea typeface="Aptos" pitchFamily="34" charset="-122"/>
                 <a:cs typeface="Aptos" pitchFamily="34" charset="-120"/>
               </a:rPr>
-              <a:t>Connect the concept to public health purpose, responsible use, required safeguards, documentation, and the next action a.</a:t>
+              <a:t>Connect the concept to public health purpose, responsible use, required safeguards, documentation, and the next action a department should take.</a:t>
             </a:r>
             <a:endParaRPr lang="en-US" sz="1320" dirty="0"/>
           </a:p>
@@ -16324,11 +16756,11 @@
         <p:spPr>
           <a:xfrm>
             <a:off x="7635240" y="1325880"/>
-            <a:ext cx="3474720" cy="1325880"/>
+            <a:ext cx="3474720" cy="1207008"/>
           </a:xfrm>
           <a:prstGeom prst="roundRect">
             <a:avLst>
-              <a:gd name="adj" fmla="val 8276"/>
+              <a:gd name="adj" fmla="val 9091"/>
             </a:avLst>
           </a:prstGeom>
           <a:solidFill>
@@ -16390,7 +16822,7 @@
         <p:spPr>
           <a:xfrm>
             <a:off x="7799832" y="1801368"/>
-            <a:ext cx="3145536" cy="758952"/>
+            <a:ext cx="3145536" cy="640080"/>
           </a:xfrm>
           <a:prstGeom prst="rect">
             <a:avLst/>
@@ -16430,12 +16862,12 @@
         </p:nvSpPr>
         <p:spPr>
           <a:xfrm>
-            <a:off x="7635240" y="2788920"/>
-            <a:ext cx="3474720" cy="1536192"/>
+            <a:off x="7635240" y="2670048"/>
+            <a:ext cx="3474720" cy="1377086"/>
           </a:xfrm>
           <a:prstGeom prst="roundRect">
             <a:avLst>
-              <a:gd name="adj" fmla="val 7143"/>
+              <a:gd name="adj" fmla="val 7968"/>
             </a:avLst>
           </a:prstGeom>
           <a:solidFill>
@@ -16457,8 +16889,8 @@
         </p:nvSpPr>
         <p:spPr>
           <a:xfrm>
-            <a:off x="7799832" y="2935224"/>
-            <a:ext cx="3145536" cy="256032"/>
+            <a:off x="7799832" y="2798064"/>
+            <a:ext cx="3145536" cy="237744"/>
           </a:xfrm>
           <a:prstGeom prst="rect">
             <a:avLst/>
@@ -16474,7 +16906,7 @@
               <a:buNone/>
             </a:pPr>
             <a:r>
-              <a:rPr lang="en-US" sz="1300" b="1" dirty="0">
+              <a:rPr lang="en-US" sz="1250" b="1" dirty="0">
                 <a:solidFill>
                   <a:srgbClr val="0068B7"/>
                 </a:solidFill>
@@ -16482,101 +16914,317 @@
                 <a:ea typeface="Aptos" pitchFamily="34" charset="-122"/>
                 <a:cs typeface="Aptos" pitchFamily="34" charset="-120"/>
               </a:rPr>
-              <a:t>Concept checkpoints</a:t>
-            </a:r>
-            <a:endParaRPr lang="en-US" sz="1300" dirty="0"/>
-          </a:p>
-        </p:txBody>
-      </p:sp>
-      <p:sp>
-        <p:nvSpPr>
-          <p:cNvPr id="15" name="Text 13"/>
-          <p:cNvSpPr/>
-          <p:nvPr/>
-        </p:nvSpPr>
-        <p:spPr>
-          <a:xfrm>
-            <a:off x="7818120" y="3300984"/>
-            <a:ext cx="3090672" cy="877824"/>
-          </a:xfrm>
-          <a:prstGeom prst="rect">
-            <a:avLst/>
-          </a:prstGeom>
-          <a:noFill/>
-          <a:ln/>
-        </p:spPr>
-        <p:txBody>
-          <a:bodyPr wrap="square" lIns="508" tIns="508" rIns="508" bIns="508" rtlCol="0" anchor="t">
+              <a:t>Governance pathway</a:t>
+            </a:r>
+            <a:endParaRPr lang="en-US" sz="1250" dirty="0"/>
+          </a:p>
+        </p:txBody>
+      </p:sp>
+      <p:sp>
+        <p:nvSpPr>
+          <p:cNvPr id="15" name="Shape 13"/>
+          <p:cNvSpPr/>
+          <p:nvPr/>
+        </p:nvSpPr>
+        <p:spPr>
+          <a:xfrm>
+            <a:off x="8763000" y="3351276"/>
+            <a:ext cx="164592" cy="0"/>
+          </a:xfrm>
+          <a:prstGeom prst="line">
+            <a:avLst/>
+          </a:prstGeom>
+          <a:noFill/>
+          <a:ln w="15240">
+            <a:solidFill>
+              <a:srgbClr val="8ABBD8"/>
+            </a:solidFill>
+            <a:prstDash val="solid"/>
+          </a:ln>
+        </p:spPr>
+      </p:sp>
+      <p:sp>
+        <p:nvSpPr>
+          <p:cNvPr id="16" name="Shape 14"/>
+          <p:cNvSpPr/>
+          <p:nvPr/>
+        </p:nvSpPr>
+        <p:spPr>
+          <a:xfrm>
+            <a:off x="7872984" y="3200400"/>
+            <a:ext cx="890016" cy="301752"/>
+          </a:xfrm>
+          <a:prstGeom prst="roundRect">
+            <a:avLst>
+              <a:gd name="adj" fmla="val 24242"/>
+            </a:avLst>
+          </a:prstGeom>
+          <a:solidFill>
+            <a:srgbClr val="0068B7"/>
+          </a:solidFill>
+          <a:ln w="12700">
+            <a:solidFill>
+              <a:srgbClr val="0068B7"/>
+            </a:solidFill>
+            <a:prstDash val="solid"/>
+          </a:ln>
+        </p:spPr>
+      </p:sp>
+      <p:sp>
+        <p:nvSpPr>
+          <p:cNvPr id="17" name="Text 15"/>
+          <p:cNvSpPr/>
+          <p:nvPr/>
+        </p:nvSpPr>
+        <p:spPr>
+          <a:xfrm>
+            <a:off x="7909560" y="3273552"/>
+            <a:ext cx="816864" cy="146304"/>
+          </a:xfrm>
+          <a:prstGeom prst="rect">
+            <a:avLst/>
+          </a:prstGeom>
+          <a:noFill/>
+          <a:ln/>
+        </p:spPr>
+        <p:txBody>
+          <a:bodyPr wrap="square" lIns="0" tIns="0" rIns="0" bIns="0" rtlCol="0" anchor="ctr">
             <a:normAutofit/>
           </a:bodyPr>
           <a:lstStyle/>
           <a:p>
-            <a:pPr indent="0" marL="0">
-              <a:buNone/>
-            </a:pPr>
-            <a:r>
-              <a:rPr lang="en-US" sz="1220" dirty="0">
-                <a:solidFill>
-                  <a:srgbClr val="17364A"/>
-                </a:solidFill>
-                <a:latin typeface="Aptos" pitchFamily="34" charset="0"/>
-                <a:ea typeface="Aptos" pitchFamily="34" charset="-122"/>
-                <a:cs typeface="Aptos" pitchFamily="34" charset="-120"/>
-              </a:rPr>
-              <a:t>This national-level module is intended for training and planning.</a:t>
-            </a:r>
-            <a:endParaRPr lang="en-US" sz="1220" dirty="0"/>
-          </a:p>
-          <a:p>
-            <a:pPr indent="0" marL="0">
-              <a:buNone/>
-            </a:pPr>
-            <a:r>
-              <a:rPr lang="en-US" sz="1220" dirty="0">
-                <a:solidFill>
-                  <a:srgbClr val="17364A"/>
-                </a:solidFill>
-                <a:latin typeface="Aptos" pitchFamily="34" charset="0"/>
-                <a:ea typeface="Aptos" pitchFamily="34" charset="-122"/>
-                <a:cs typeface="Aptos" pitchFamily="34" charset="-120"/>
-              </a:rPr>
-              <a:t>It does not replace legal, privacy, procurement, civil rights,.</a:t>
-            </a:r>
-            <a:endParaRPr lang="en-US" sz="1220" dirty="0"/>
-          </a:p>
-          <a:p>
-            <a:pPr indent="0" marL="0">
-              <a:buNone/>
-            </a:pPr>
-            <a:r>
-              <a:rPr lang="en-US" sz="1220" dirty="0">
-                <a:solidFill>
-                  <a:srgbClr val="17364A"/>
-                </a:solidFill>
-                <a:latin typeface="Aptos" pitchFamily="34" charset="0"/>
-                <a:ea typeface="Aptos" pitchFamily="34" charset="-122"/>
-                <a:cs typeface="Aptos" pitchFamily="34" charset="-120"/>
-              </a:rPr>
-              <a:t>Learners should confirm applicable requirements in their own.</a:t>
-            </a:r>
-            <a:endParaRPr lang="en-US" sz="1220" dirty="0"/>
-          </a:p>
-        </p:txBody>
-      </p:sp>
-      <p:sp>
-        <p:nvSpPr>
-          <p:cNvPr id="16" name="Shape 14"/>
-          <p:cNvSpPr/>
-          <p:nvPr/>
-        </p:nvSpPr>
-        <p:spPr>
-          <a:xfrm>
-            <a:off x="7635240" y="4498848"/>
-            <a:ext cx="3474720" cy="1143000"/>
+            <a:pPr algn="ctr" indent="0" marL="0">
+              <a:buNone/>
+            </a:pPr>
+            <a:r>
+              <a:rPr lang="en-US" sz="880" b="1" dirty="0">
+                <a:solidFill>
+                  <a:srgbClr val="FFFFFF"/>
+                </a:solidFill>
+                <a:latin typeface="Aptos" pitchFamily="34" charset="0"/>
+                <a:ea typeface="Aptos" pitchFamily="34" charset="-122"/>
+                <a:cs typeface="Aptos" pitchFamily="34" charset="-120"/>
+              </a:rPr>
+              <a:t>Submit</a:t>
+            </a:r>
+            <a:endParaRPr lang="en-US" sz="880" dirty="0"/>
+          </a:p>
+        </p:txBody>
+      </p:sp>
+      <p:sp>
+        <p:nvSpPr>
+          <p:cNvPr id="18" name="Shape 16"/>
+          <p:cNvSpPr/>
+          <p:nvPr/>
+        </p:nvSpPr>
+        <p:spPr>
+          <a:xfrm>
+            <a:off x="9817608" y="3351276"/>
+            <a:ext cx="164592" cy="0"/>
+          </a:xfrm>
+          <a:prstGeom prst="line">
+            <a:avLst/>
+          </a:prstGeom>
+          <a:noFill/>
+          <a:ln w="15240">
+            <a:solidFill>
+              <a:srgbClr val="8ABBD8"/>
+            </a:solidFill>
+            <a:prstDash val="solid"/>
+          </a:ln>
+        </p:spPr>
+      </p:sp>
+      <p:sp>
+        <p:nvSpPr>
+          <p:cNvPr id="19" name="Shape 17"/>
+          <p:cNvSpPr/>
+          <p:nvPr/>
+        </p:nvSpPr>
+        <p:spPr>
+          <a:xfrm>
+            <a:off x="8927592" y="3200400"/>
+            <a:ext cx="890016" cy="301752"/>
           </a:xfrm>
           <a:prstGeom prst="roundRect">
             <a:avLst>
-              <a:gd name="adj" fmla="val 9600"/>
+              <a:gd name="adj" fmla="val 24242"/>
+            </a:avLst>
+          </a:prstGeom>
+          <a:solidFill>
+            <a:srgbClr val="2F8A28"/>
+          </a:solidFill>
+          <a:ln w="12700">
+            <a:solidFill>
+              <a:srgbClr val="2F8A28"/>
+            </a:solidFill>
+            <a:prstDash val="solid"/>
+          </a:ln>
+        </p:spPr>
+      </p:sp>
+      <p:sp>
+        <p:nvSpPr>
+          <p:cNvPr id="20" name="Text 18"/>
+          <p:cNvSpPr/>
+          <p:nvPr/>
+        </p:nvSpPr>
+        <p:spPr>
+          <a:xfrm>
+            <a:off x="8964168" y="3273552"/>
+            <a:ext cx="816864" cy="146304"/>
+          </a:xfrm>
+          <a:prstGeom prst="rect">
+            <a:avLst/>
+          </a:prstGeom>
+          <a:noFill/>
+          <a:ln/>
+        </p:spPr>
+        <p:txBody>
+          <a:bodyPr wrap="square" lIns="0" tIns="0" rIns="0" bIns="0" rtlCol="0" anchor="ctr">
+            <a:normAutofit/>
+          </a:bodyPr>
+          <a:lstStyle/>
+          <a:p>
+            <a:pPr algn="ctr" indent="0" marL="0">
+              <a:buNone/>
+            </a:pPr>
+            <a:r>
+              <a:rPr lang="en-US" sz="880" b="1" dirty="0">
+                <a:solidFill>
+                  <a:srgbClr val="FFFFFF"/>
+                </a:solidFill>
+                <a:latin typeface="Aptos" pitchFamily="34" charset="0"/>
+                <a:ea typeface="Aptos" pitchFamily="34" charset="-122"/>
+                <a:cs typeface="Aptos" pitchFamily="34" charset="-120"/>
+              </a:rPr>
+              <a:t>Review</a:t>
+            </a:r>
+            <a:endParaRPr lang="en-US" sz="880" dirty="0"/>
+          </a:p>
+        </p:txBody>
+      </p:sp>
+      <p:sp>
+        <p:nvSpPr>
+          <p:cNvPr id="21" name="Shape 19"/>
+          <p:cNvSpPr/>
+          <p:nvPr/>
+        </p:nvSpPr>
+        <p:spPr>
+          <a:xfrm>
+            <a:off x="9982200" y="3200400"/>
+            <a:ext cx="890016" cy="301752"/>
+          </a:xfrm>
+          <a:prstGeom prst="roundRect">
+            <a:avLst>
+              <a:gd name="adj" fmla="val 24242"/>
+            </a:avLst>
+          </a:prstGeom>
+          <a:solidFill>
+            <a:srgbClr val="6A4CA3"/>
+          </a:solidFill>
+          <a:ln w="12700">
+            <a:solidFill>
+              <a:srgbClr val="6A4CA3"/>
+            </a:solidFill>
+            <a:prstDash val="solid"/>
+          </a:ln>
+        </p:spPr>
+      </p:sp>
+      <p:sp>
+        <p:nvSpPr>
+          <p:cNvPr id="22" name="Text 20"/>
+          <p:cNvSpPr/>
+          <p:nvPr/>
+        </p:nvSpPr>
+        <p:spPr>
+          <a:xfrm>
+            <a:off x="10018776" y="3273552"/>
+            <a:ext cx="816864" cy="146304"/>
+          </a:xfrm>
+          <a:prstGeom prst="rect">
+            <a:avLst/>
+          </a:prstGeom>
+          <a:noFill/>
+          <a:ln/>
+        </p:spPr>
+        <p:txBody>
+          <a:bodyPr wrap="square" lIns="0" tIns="0" rIns="0" bIns="0" rtlCol="0" anchor="ctr">
+            <a:normAutofit/>
+          </a:bodyPr>
+          <a:lstStyle/>
+          <a:p>
+            <a:pPr algn="ctr" indent="0" marL="0">
+              <a:buNone/>
+            </a:pPr>
+            <a:r>
+              <a:rPr lang="en-US" sz="880" b="1" dirty="0">
+                <a:solidFill>
+                  <a:srgbClr val="FFFFFF"/>
+                </a:solidFill>
+                <a:latin typeface="Aptos" pitchFamily="34" charset="0"/>
+                <a:ea typeface="Aptos" pitchFamily="34" charset="-122"/>
+                <a:cs typeface="Aptos" pitchFamily="34" charset="-120"/>
+              </a:rPr>
+              <a:t>Oversee</a:t>
+            </a:r>
+            <a:endParaRPr lang="en-US" sz="880" dirty="0"/>
+          </a:p>
+        </p:txBody>
+      </p:sp>
+      <p:sp>
+        <p:nvSpPr>
+          <p:cNvPr id="23" name="Text 21"/>
+          <p:cNvSpPr/>
+          <p:nvPr/>
+        </p:nvSpPr>
+        <p:spPr>
+          <a:xfrm>
+            <a:off x="7854696" y="3694176"/>
+            <a:ext cx="3035808" cy="206654"/>
+          </a:xfrm>
+          <a:prstGeom prst="rect">
+            <a:avLst/>
+          </a:prstGeom>
+          <a:noFill/>
+          <a:ln/>
+        </p:spPr>
+        <p:txBody>
+          <a:bodyPr wrap="square" lIns="254" tIns="254" rIns="254" bIns="254" rtlCol="0" anchor="t">
+            <a:normAutofit/>
+          </a:bodyPr>
+          <a:lstStyle/>
+          <a:p>
+            <a:pPr indent="0" marL="0">
+              <a:buNone/>
+            </a:pPr>
+            <a:r>
+              <a:rPr lang="en-US" sz="1120" dirty="0">
+                <a:solidFill>
+                  <a:srgbClr val="17364A"/>
+                </a:solidFill>
+                <a:latin typeface="Aptos" pitchFamily="34" charset="0"/>
+                <a:ea typeface="Aptos" pitchFamily="34" charset="-122"/>
+                <a:cs typeface="Aptos" pitchFamily="34" charset="-120"/>
+              </a:rPr>
+              <a:t>A proposed AI use should move through documented review before it becomes an operational workflow.</a:t>
+            </a:r>
+            <a:endParaRPr lang="en-US" sz="1120" dirty="0"/>
+          </a:p>
+        </p:txBody>
+      </p:sp>
+      <p:sp>
+        <p:nvSpPr>
+          <p:cNvPr id="24" name="Shape 22"/>
+          <p:cNvSpPr/>
+          <p:nvPr/>
+        </p:nvSpPr>
+        <p:spPr>
+          <a:xfrm>
+            <a:off x="7635240" y="4184294"/>
+            <a:ext cx="3474720" cy="1466698"/>
+          </a:xfrm>
+          <a:prstGeom prst="roundRect">
+            <a:avLst>
+              <a:gd name="adj" fmla="val 7481"/>
             </a:avLst>
           </a:prstGeom>
           <a:solidFill>
@@ -16592,13 +17240,13 @@
       </p:sp>
       <p:sp>
         <p:nvSpPr>
-          <p:cNvPr id="17" name="Text 15"/>
-          <p:cNvSpPr/>
-          <p:nvPr/>
-        </p:nvSpPr>
-        <p:spPr>
-          <a:xfrm>
-            <a:off x="7799832" y="4645152"/>
+          <p:cNvPr id="25" name="Text 23"/>
+          <p:cNvSpPr/>
+          <p:nvPr/>
+        </p:nvSpPr>
+        <p:spPr>
+          <a:xfrm>
+            <a:off x="7799832" y="4330598"/>
             <a:ext cx="3145536" cy="256032"/>
           </a:xfrm>
           <a:prstGeom prst="rect">
@@ -16631,14 +17279,14 @@
       </p:sp>
       <p:sp>
         <p:nvSpPr>
-          <p:cNvPr id="18" name="Text 16"/>
-          <p:cNvSpPr/>
-          <p:nvPr/>
-        </p:nvSpPr>
-        <p:spPr>
-          <a:xfrm>
-            <a:off x="7799832" y="4974336"/>
-            <a:ext cx="3145536" cy="576072"/>
+          <p:cNvPr id="26" name="Text 24"/>
+          <p:cNvSpPr/>
+          <p:nvPr/>
+        </p:nvSpPr>
+        <p:spPr>
+          <a:xfrm>
+            <a:off x="7799832" y="4659782"/>
+            <a:ext cx="3145536" cy="899770"/>
           </a:xfrm>
           <a:prstGeom prst="rect">
             <a:avLst/>
@@ -16664,7 +17312,7 @@
                 <a:ea typeface="Aptos" pitchFamily="34" charset="-122"/>
                 <a:cs typeface="Aptos" pitchFamily="34" charset="-120"/>
               </a:rPr>
-              <a:t>Translate this concept into clear decision rights, review steps, documentation expectations, and escalation paths before.</a:t>
+              <a:t>Translate this concept into clear decision rights, review steps, documentation expectations, and escalation paths before an AI-supported workflow is approved.</a:t>
             </a:r>
             <a:endParaRPr lang="en-US" sz="1320" dirty="0"/>
           </a:p>
@@ -17033,11 +17681,11 @@
         <p:spPr>
           <a:xfrm>
             <a:off x="7635240" y="1325880"/>
-            <a:ext cx="3474720" cy="1325880"/>
+            <a:ext cx="3474720" cy="1255471"/>
           </a:xfrm>
           <a:prstGeom prst="roundRect">
             <a:avLst>
-              <a:gd name="adj" fmla="val 8276"/>
+              <a:gd name="adj" fmla="val 8740"/>
             </a:avLst>
           </a:prstGeom>
           <a:solidFill>
@@ -17099,7 +17747,7 @@
         <p:spPr>
           <a:xfrm>
             <a:off x="7799832" y="1801368"/>
-            <a:ext cx="3145536" cy="758952"/>
+            <a:ext cx="3145536" cy="688543"/>
           </a:xfrm>
           <a:prstGeom prst="rect">
             <a:avLst/>
@@ -17139,12 +17787,12 @@
         </p:nvSpPr>
         <p:spPr>
           <a:xfrm>
-            <a:off x="7635240" y="2788920"/>
-            <a:ext cx="3474720" cy="1536192"/>
+            <a:off x="7635240" y="2718511"/>
+            <a:ext cx="3474720" cy="1328623"/>
           </a:xfrm>
           <a:prstGeom prst="roundRect">
             <a:avLst>
-              <a:gd name="adj" fmla="val 7143"/>
+              <a:gd name="adj" fmla="val 8259"/>
             </a:avLst>
           </a:prstGeom>
           <a:solidFill>
@@ -17166,7 +17814,7 @@
         </p:nvSpPr>
         <p:spPr>
           <a:xfrm>
-            <a:off x="7799832" y="2935224"/>
+            <a:off x="7799832" y="2864815"/>
             <a:ext cx="3145536" cy="256032"/>
           </a:xfrm>
           <a:prstGeom prst="rect">
@@ -17205,8 +17853,8 @@
         </p:nvSpPr>
         <p:spPr>
           <a:xfrm>
-            <a:off x="7818120" y="3300984"/>
-            <a:ext cx="3090672" cy="877824"/>
+            <a:off x="7818120" y="3230575"/>
+            <a:ext cx="3090672" cy="670255"/>
           </a:xfrm>
           <a:prstGeom prst="rect">
             <a:avLst/>
@@ -17280,12 +17928,12 @@
         </p:nvSpPr>
         <p:spPr>
           <a:xfrm>
-            <a:off x="7635240" y="4498848"/>
-            <a:ext cx="3474720" cy="1143000"/>
+            <a:off x="7635240" y="4184294"/>
+            <a:ext cx="3474720" cy="1466698"/>
           </a:xfrm>
           <a:prstGeom prst="roundRect">
             <a:avLst>
-              <a:gd name="adj" fmla="val 9600"/>
+              <a:gd name="adj" fmla="val 7481"/>
             </a:avLst>
           </a:prstGeom>
           <a:solidFill>
@@ -17307,7 +17955,7 @@
         </p:nvSpPr>
         <p:spPr>
           <a:xfrm>
-            <a:off x="7799832" y="4645152"/>
+            <a:off x="7799832" y="4330598"/>
             <a:ext cx="3145536" cy="256032"/>
           </a:xfrm>
           <a:prstGeom prst="rect">
@@ -17346,8 +17994,8 @@
         </p:nvSpPr>
         <p:spPr>
           <a:xfrm>
-            <a:off x="7799832" y="4974336"/>
-            <a:ext cx="3145536" cy="576072"/>
+            <a:off x="7799832" y="4659782"/>
+            <a:ext cx="3145536" cy="899770"/>
           </a:xfrm>
           <a:prstGeom prst="rect">
             <a:avLst/>
@@ -17373,7 +18021,7 @@
                 <a:ea typeface="Aptos" pitchFamily="34" charset="-122"/>
                 <a:cs typeface="Aptos" pitchFamily="34" charset="-120"/>
               </a:rPr>
-              <a:t>Connect the concept to public health purpose, responsible use, required safeguards, documentation, and the next action a.</a:t>
+              <a:t>Connect the concept to public health purpose, responsible use, required safeguards, documentation, and the next action a department should take.</a:t>
             </a:r>
             <a:endParaRPr lang="en-US" sz="1320" dirty="0"/>
           </a:p>

--- a/downloads/presentations/modules/arc-330.pptx
+++ b/downloads/presentations/modules/arc-330.pptx
@@ -3336,8 +3336,8 @@
         </p:nvSpPr>
         <p:spPr>
           <a:xfrm>
-            <a:off x="868680" y="1508760"/>
-            <a:ext cx="6309360" cy="4160520"/>
+            <a:off x="822960" y="1463040"/>
+            <a:ext cx="6565392" cy="4343400"/>
           </a:xfrm>
           <a:prstGeom prst="rect">
             <a:avLst/>
@@ -3355,7 +3355,7 @@
               <a:buNone/>
             </a:pPr>
             <a:r>
-              <a:rPr lang="en-US" sz="2100" dirty="0">
+              <a:rPr lang="en-US" sz="1920" dirty="0">
                 <a:solidFill>
                   <a:srgbClr val="003A63"/>
                 </a:solidFill>
@@ -3363,16 +3363,16 @@
                 <a:ea typeface="Aptos" pitchFamily="34" charset="-122"/>
                 <a:cs typeface="Aptos" pitchFamily="34" charset="-120"/>
               </a:rPr>
-              <a:t>• Cloud computing provides remote infrastructure, platforms, and services that can host data.</a:t>
-            </a:r>
-            <a:endParaRPr lang="en-US" sz="2100" dirty="0"/>
-          </a:p>
-          <a:p>
-            <a:pPr indent="0" marL="0">
-              <a:buNone/>
-            </a:pPr>
-            <a:r>
-              <a:rPr lang="en-US" sz="2100" dirty="0">
+              <a:t>• Cloud computing provides remote infrastructure, platforms, and services that.</a:t>
+            </a:r>
+            <a:endParaRPr lang="en-US" sz="1920" dirty="0"/>
+          </a:p>
+          <a:p>
+            <a:pPr indent="0" marL="0">
+              <a:buNone/>
+            </a:pPr>
+            <a:r>
+              <a:rPr lang="en-US" sz="1920" dirty="0">
                 <a:solidFill>
                   <a:srgbClr val="003A63"/>
                 </a:solidFill>
@@ -3380,16 +3380,16 @@
                 <a:ea typeface="Aptos" pitchFamily="34" charset="-122"/>
                 <a:cs typeface="Aptos" pitchFamily="34" charset="-120"/>
               </a:rPr>
-              <a:t>• Cloud deployment can improve scalability and resilience, but only when identity, access,.</a:t>
-            </a:r>
-            <a:endParaRPr lang="en-US" sz="2100" dirty="0"/>
-          </a:p>
-          <a:p>
-            <a:pPr indent="0" marL="0">
-              <a:buNone/>
-            </a:pPr>
-            <a:r>
-              <a:rPr lang="en-US" sz="2100" dirty="0">
+              <a:t>• Cloud deployment can improve scalability and resilience, but only when.</a:t>
+            </a:r>
+            <a:endParaRPr lang="en-US" sz="1920" dirty="0"/>
+          </a:p>
+          <a:p>
+            <a:pPr indent="0" marL="0">
+              <a:buNone/>
+            </a:pPr>
+            <a:r>
+              <a:rPr lang="en-US" sz="1920" dirty="0">
                 <a:solidFill>
                   <a:srgbClr val="003A63"/>
                 </a:solidFill>
@@ -3397,9 +3397,9 @@
                 <a:ea typeface="Aptos" pitchFamily="34" charset="-122"/>
                 <a:cs typeface="Aptos" pitchFamily="34" charset="-120"/>
               </a:rPr>
-              <a:t>• Containers package software and its dependencies so that it can run consistently across.</a:t>
-            </a:r>
-            <a:endParaRPr lang="en-US" sz="2100" dirty="0"/>
+              <a:t>• Containers package software and its dependencies so that it can run.</a:t>
+            </a:r>
+            <a:endParaRPr lang="en-US" sz="1920" dirty="0"/>
           </a:p>
         </p:txBody>
       </p:sp>
@@ -3411,12 +3411,12 @@
         </p:nvSpPr>
         <p:spPr>
           <a:xfrm>
-            <a:off x="7635240" y="1325880"/>
-            <a:ext cx="3474720" cy="1255471"/>
+            <a:off x="7543800" y="1325880"/>
+            <a:ext cx="3611880" cy="1261872"/>
           </a:xfrm>
           <a:prstGeom prst="roundRect">
             <a:avLst>
-              <a:gd name="adj" fmla="val 8740"/>
+              <a:gd name="adj" fmla="val 8696"/>
             </a:avLst>
           </a:prstGeom>
           <a:solidFill>
@@ -3438,8 +3438,8 @@
         </p:nvSpPr>
         <p:spPr>
           <a:xfrm>
-            <a:off x="7799832" y="1472184"/>
-            <a:ext cx="3145536" cy="256032"/>
+            <a:off x="7708392" y="1453896"/>
+            <a:ext cx="3282696" cy="228600"/>
           </a:xfrm>
           <a:prstGeom prst="rect">
             <a:avLst/>
@@ -3455,7 +3455,7 @@
               <a:buNone/>
             </a:pPr>
             <a:r>
-              <a:rPr lang="en-US" sz="1300" b="1" dirty="0">
+              <a:rPr lang="en-US" sz="1220" b="1" dirty="0">
                 <a:solidFill>
                   <a:srgbClr val="0068B7"/>
                 </a:solidFill>
@@ -3465,7 +3465,7 @@
               </a:rPr>
               <a:t>Core concept</a:t>
             </a:r>
-            <a:endParaRPr lang="en-US" sz="1300" dirty="0"/>
+            <a:endParaRPr lang="en-US" sz="1220" dirty="0"/>
           </a:p>
         </p:txBody>
       </p:sp>
@@ -3477,8 +3477,8 @@
         </p:nvSpPr>
         <p:spPr>
           <a:xfrm>
-            <a:off x="7799832" y="1801368"/>
-            <a:ext cx="3145536" cy="688543"/>
+            <a:off x="7708392" y="1764792"/>
+            <a:ext cx="3282696" cy="749808"/>
           </a:xfrm>
           <a:prstGeom prst="rect">
             <a:avLst/>
@@ -3496,7 +3496,7 @@
               <a:buNone/>
             </a:pPr>
             <a:r>
-              <a:rPr lang="en-US" sz="1320" dirty="0">
+              <a:rPr lang="en-US" sz="1220" dirty="0">
                 <a:solidFill>
                   <a:srgbClr val="17364A"/>
                 </a:solidFill>
@@ -3504,9 +3504,9 @@
                 <a:ea typeface="Aptos" pitchFamily="34" charset="-122"/>
                 <a:cs typeface="Aptos" pitchFamily="34" charset="-120"/>
               </a:rPr>
-              <a:t>Cloud computing provides remote infrastructure, platforms, and services that can host data pipelines,.</a:t>
-            </a:r>
-            <a:endParaRPr lang="en-US" sz="1320" dirty="0"/>
+              <a:t>Cloud computing provides remote infrastructure, platforms, and services that can.</a:t>
+            </a:r>
+            <a:endParaRPr lang="en-US" sz="1220" dirty="0"/>
           </a:p>
         </p:txBody>
       </p:sp>
@@ -3518,12 +3518,12 @@
         </p:nvSpPr>
         <p:spPr>
           <a:xfrm>
-            <a:off x="7635240" y="2718511"/>
-            <a:ext cx="3474720" cy="1328623"/>
+            <a:off x="7543800" y="2724912"/>
+            <a:ext cx="3611880" cy="1527048"/>
           </a:xfrm>
           <a:prstGeom prst="roundRect">
             <a:avLst>
-              <a:gd name="adj" fmla="val 8259"/>
+              <a:gd name="adj" fmla="val 7186"/>
             </a:avLst>
           </a:prstGeom>
           <a:solidFill>
@@ -3545,8 +3545,8 @@
         </p:nvSpPr>
         <p:spPr>
           <a:xfrm>
-            <a:off x="7799832" y="2864815"/>
-            <a:ext cx="3145536" cy="256032"/>
+            <a:off x="7708392" y="2852928"/>
+            <a:ext cx="3282696" cy="228600"/>
           </a:xfrm>
           <a:prstGeom prst="rect">
             <a:avLst/>
@@ -3562,7 +3562,7 @@
               <a:buNone/>
             </a:pPr>
             <a:r>
-              <a:rPr lang="en-US" sz="1300" b="1" dirty="0">
+              <a:rPr lang="en-US" sz="1220" b="1" dirty="0">
                 <a:solidFill>
                   <a:srgbClr val="0068B7"/>
                 </a:solidFill>
@@ -3572,7 +3572,7 @@
               </a:rPr>
               <a:t>Concept checkpoints</a:t>
             </a:r>
-            <a:endParaRPr lang="en-US" sz="1300" dirty="0"/>
+            <a:endParaRPr lang="en-US" sz="1220" dirty="0"/>
           </a:p>
         </p:txBody>
       </p:sp>
@@ -3584,8 +3584,8 @@
         </p:nvSpPr>
         <p:spPr>
           <a:xfrm>
-            <a:off x="7818120" y="3230575"/>
-            <a:ext cx="3090672" cy="670255"/>
+            <a:off x="7726680" y="3182112"/>
+            <a:ext cx="3227832" cy="960120"/>
           </a:xfrm>
           <a:prstGeom prst="rect">
             <a:avLst/>
@@ -3603,7 +3603,7 @@
               <a:buNone/>
             </a:pPr>
             <a:r>
-              <a:rPr lang="en-US" sz="1220" dirty="0">
+              <a:rPr lang="en-US" sz="1140" dirty="0">
                 <a:solidFill>
                   <a:srgbClr val="17364A"/>
                 </a:solidFill>
@@ -3611,16 +3611,16 @@
                 <a:ea typeface="Aptos" pitchFamily="34" charset="-122"/>
                 <a:cs typeface="Aptos" pitchFamily="34" charset="-120"/>
               </a:rPr>
-              <a:t>Cloud computing provides remote infrastructure, platforms, and.</a:t>
-            </a:r>
-            <a:endParaRPr lang="en-US" sz="1220" dirty="0"/>
-          </a:p>
-          <a:p>
-            <a:pPr indent="0" marL="0">
-              <a:buNone/>
-            </a:pPr>
-            <a:r>
-              <a:rPr lang="en-US" sz="1220" dirty="0">
+              <a:t>Cloud computing provides remote infrastructure,.</a:t>
+            </a:r>
+            <a:endParaRPr lang="en-US" sz="1140" dirty="0"/>
+          </a:p>
+          <a:p>
+            <a:pPr indent="0" marL="0">
+              <a:buNone/>
+            </a:pPr>
+            <a:r>
+              <a:rPr lang="en-US" sz="1140" dirty="0">
                 <a:solidFill>
                   <a:srgbClr val="17364A"/>
                 </a:solidFill>
@@ -3628,16 +3628,16 @@
                 <a:ea typeface="Aptos" pitchFamily="34" charset="-122"/>
                 <a:cs typeface="Aptos" pitchFamily="34" charset="-120"/>
               </a:rPr>
-              <a:t>Cloud deployment can improve scalability and resilience, but only.</a:t>
-            </a:r>
-            <a:endParaRPr lang="en-US" sz="1220" dirty="0"/>
-          </a:p>
-          <a:p>
-            <a:pPr indent="0" marL="0">
-              <a:buNone/>
-            </a:pPr>
-            <a:r>
-              <a:rPr lang="en-US" sz="1220" dirty="0">
+              <a:t>Cloud deployment can improve scalability and.</a:t>
+            </a:r>
+            <a:endParaRPr lang="en-US" sz="1140" dirty="0"/>
+          </a:p>
+          <a:p>
+            <a:pPr indent="0" marL="0">
+              <a:buNone/>
+            </a:pPr>
+            <a:r>
+              <a:rPr lang="en-US" sz="1140" dirty="0">
                 <a:solidFill>
                   <a:srgbClr val="17364A"/>
                 </a:solidFill>
@@ -3645,9 +3645,9 @@
                 <a:ea typeface="Aptos" pitchFamily="34" charset="-122"/>
                 <a:cs typeface="Aptos" pitchFamily="34" charset="-120"/>
               </a:rPr>
-              <a:t>Containers can improve reproducibility and deployment speed, but.</a:t>
-            </a:r>
-            <a:endParaRPr lang="en-US" sz="1220" dirty="0"/>
+              <a:t>Containers can improve reproducibility and.</a:t>
+            </a:r>
+            <a:endParaRPr lang="en-US" sz="1140" dirty="0"/>
           </a:p>
         </p:txBody>
       </p:sp>
@@ -3659,12 +3659,12 @@
         </p:nvSpPr>
         <p:spPr>
           <a:xfrm>
-            <a:off x="7635240" y="4184294"/>
-            <a:ext cx="3474720" cy="1466698"/>
+            <a:off x="7543800" y="4389120"/>
+            <a:ext cx="3611880" cy="1261872"/>
           </a:xfrm>
           <a:prstGeom prst="roundRect">
             <a:avLst>
-              <a:gd name="adj" fmla="val 7481"/>
+              <a:gd name="adj" fmla="val 8696"/>
             </a:avLst>
           </a:prstGeom>
           <a:solidFill>
@@ -3686,8 +3686,8 @@
         </p:nvSpPr>
         <p:spPr>
           <a:xfrm>
-            <a:off x="7799832" y="4330598"/>
-            <a:ext cx="3145536" cy="256032"/>
+            <a:off x="7708392" y="4517136"/>
+            <a:ext cx="3282696" cy="228600"/>
           </a:xfrm>
           <a:prstGeom prst="rect">
             <a:avLst/>
@@ -3703,7 +3703,7 @@
               <a:buNone/>
             </a:pPr>
             <a:r>
-              <a:rPr lang="en-US" sz="1300" b="1" dirty="0">
+              <a:rPr lang="en-US" sz="1220" b="1" dirty="0">
                 <a:solidFill>
                   <a:srgbClr val="0068B7"/>
                 </a:solidFill>
@@ -3713,7 +3713,7 @@
               </a:rPr>
               <a:t>Apply it</a:t>
             </a:r>
-            <a:endParaRPr lang="en-US" sz="1300" dirty="0"/>
+            <a:endParaRPr lang="en-US" sz="1220" dirty="0"/>
           </a:p>
         </p:txBody>
       </p:sp>
@@ -3725,8 +3725,8 @@
         </p:nvSpPr>
         <p:spPr>
           <a:xfrm>
-            <a:off x="7799832" y="4659782"/>
-            <a:ext cx="3145536" cy="899770"/>
+            <a:off x="7708392" y="4828032"/>
+            <a:ext cx="3282696" cy="749808"/>
           </a:xfrm>
           <a:prstGeom prst="rect">
             <a:avLst/>
@@ -3744,7 +3744,7 @@
               <a:buNone/>
             </a:pPr>
             <a:r>
-              <a:rPr lang="en-US" sz="1320" dirty="0">
+              <a:rPr lang="en-US" sz="1220" dirty="0">
                 <a:solidFill>
                   <a:srgbClr val="17364A"/>
                 </a:solidFill>
@@ -3752,9 +3752,9 @@
                 <a:ea typeface="Aptos" pitchFamily="34" charset="-122"/>
                 <a:cs typeface="Aptos" pitchFamily="34" charset="-120"/>
               </a:rPr>
-              <a:t>Connect the concept to public health purpose, responsible use, required safeguards, documentation, and the next action a department should take.</a:t>
-            </a:r>
-            <a:endParaRPr lang="en-US" sz="1320" dirty="0"/>
+              <a:t>Connect the concept to public health purpose, responsible use, required.</a:t>
+            </a:r>
+            <a:endParaRPr lang="en-US" sz="1220" dirty="0"/>
           </a:p>
         </p:txBody>
       </p:sp>
@@ -4045,8 +4045,8 @@
         </p:nvSpPr>
         <p:spPr>
           <a:xfrm>
-            <a:off x="868680" y="1508760"/>
-            <a:ext cx="6309360" cy="4160520"/>
+            <a:off x="822960" y="1463040"/>
+            <a:ext cx="6565392" cy="4343400"/>
           </a:xfrm>
           <a:prstGeom prst="rect">
             <a:avLst/>
@@ -4064,7 +4064,7 @@
               <a:buNone/>
             </a:pPr>
             <a:r>
-              <a:rPr lang="en-US" sz="2100" dirty="0">
+              <a:rPr lang="en-US" sz="1920" dirty="0">
                 <a:solidFill>
                   <a:srgbClr val="003A63"/>
                 </a:solidFill>
@@ -4072,16 +4072,16 @@
                 <a:ea typeface="Aptos" pitchFamily="34" charset="-122"/>
                 <a:cs typeface="Aptos" pitchFamily="34" charset="-120"/>
               </a:rPr>
-              <a:t>• A public health agency may deploy an internal RAG assistant in a cloud environment so staff.</a:t>
-            </a:r>
-            <a:endParaRPr lang="en-US" sz="2100" dirty="0"/>
-          </a:p>
-          <a:p>
-            <a:pPr indent="0" marL="0">
-              <a:buNone/>
-            </a:pPr>
-            <a:r>
-              <a:rPr lang="en-US" sz="2100" dirty="0">
+              <a:t>• A public health agency may deploy an internal RAG assistant in a cloud.</a:t>
+            </a:r>
+            <a:endParaRPr lang="en-US" sz="1920" dirty="0"/>
+          </a:p>
+          <a:p>
+            <a:pPr indent="0" marL="0">
+              <a:buNone/>
+            </a:pPr>
+            <a:r>
+              <a:rPr lang="en-US" sz="1920" dirty="0">
                 <a:solidFill>
                   <a:srgbClr val="003A63"/>
                 </a:solidFill>
@@ -4089,16 +4089,16 @@
                 <a:ea typeface="Aptos" pitchFamily="34" charset="-122"/>
                 <a:cs typeface="Aptos" pitchFamily="34" charset="-120"/>
               </a:rPr>
-              <a:t>• The tool may be low risk if it uses public documents, but it becomes higher risk if it.</a:t>
-            </a:r>
-            <a:endParaRPr lang="en-US" sz="2100" dirty="0"/>
-          </a:p>
-          <a:p>
-            <a:pPr indent="0" marL="0">
-              <a:buNone/>
-            </a:pPr>
-            <a:r>
-              <a:rPr lang="en-US" sz="2100" dirty="0">
+              <a:t>• The tool may be low risk if it uses public documents, but it becomes higher.</a:t>
+            </a:r>
+            <a:endParaRPr lang="en-US" sz="1920" dirty="0"/>
+          </a:p>
+          <a:p>
+            <a:pPr indent="0" marL="0">
+              <a:buNone/>
+            </a:pPr>
+            <a:r>
+              <a:rPr lang="en-US" sz="1920" dirty="0">
                 <a:solidFill>
                   <a:srgbClr val="003A63"/>
                 </a:solidFill>
@@ -4106,9 +4106,9 @@
                 <a:ea typeface="Aptos" pitchFamily="34" charset="-122"/>
                 <a:cs typeface="Aptos" pitchFamily="34" charset="-120"/>
               </a:rPr>
-              <a:t>• Secure deployment requires access controls, document-level permissions, logging, monitoring,.</a:t>
-            </a:r>
-            <a:endParaRPr lang="en-US" sz="2100" dirty="0"/>
+              <a:t>• Secure deployment requires access controls, document-level permissions,.</a:t>
+            </a:r>
+            <a:endParaRPr lang="en-US" sz="1920" dirty="0"/>
           </a:p>
         </p:txBody>
       </p:sp>
@@ -4120,12 +4120,12 @@
         </p:nvSpPr>
         <p:spPr>
           <a:xfrm>
-            <a:off x="7635240" y="1325880"/>
-            <a:ext cx="3474720" cy="1255471"/>
+            <a:off x="7543800" y="1325880"/>
+            <a:ext cx="3611880" cy="1261872"/>
           </a:xfrm>
           <a:prstGeom prst="roundRect">
             <a:avLst>
-              <a:gd name="adj" fmla="val 8740"/>
+              <a:gd name="adj" fmla="val 8696"/>
             </a:avLst>
           </a:prstGeom>
           <a:solidFill>
@@ -4147,8 +4147,8 @@
         </p:nvSpPr>
         <p:spPr>
           <a:xfrm>
-            <a:off x="7799832" y="1472184"/>
-            <a:ext cx="3145536" cy="256032"/>
+            <a:off x="7708392" y="1453896"/>
+            <a:ext cx="3282696" cy="228600"/>
           </a:xfrm>
           <a:prstGeom prst="rect">
             <a:avLst/>
@@ -4164,7 +4164,7 @@
               <a:buNone/>
             </a:pPr>
             <a:r>
-              <a:rPr lang="en-US" sz="1300" b="1" dirty="0">
+              <a:rPr lang="en-US" sz="1220" b="1" dirty="0">
                 <a:solidFill>
                   <a:srgbClr val="0068B7"/>
                 </a:solidFill>
@@ -4174,7 +4174,7 @@
               </a:rPr>
               <a:t>Core concept</a:t>
             </a:r>
-            <a:endParaRPr lang="en-US" sz="1300" dirty="0"/>
+            <a:endParaRPr lang="en-US" sz="1220" dirty="0"/>
           </a:p>
         </p:txBody>
       </p:sp>
@@ -4186,8 +4186,8 @@
         </p:nvSpPr>
         <p:spPr>
           <a:xfrm>
-            <a:off x="7799832" y="1801368"/>
-            <a:ext cx="3145536" cy="688543"/>
+            <a:off x="7708392" y="1764792"/>
+            <a:ext cx="3282696" cy="749808"/>
           </a:xfrm>
           <a:prstGeom prst="rect">
             <a:avLst/>
@@ -4205,7 +4205,7 @@
               <a:buNone/>
             </a:pPr>
             <a:r>
-              <a:rPr lang="en-US" sz="1320" dirty="0">
+              <a:rPr lang="en-US" sz="1220" dirty="0">
                 <a:solidFill>
                   <a:srgbClr val="17364A"/>
                 </a:solidFill>
@@ -4213,9 +4213,9 @@
                 <a:ea typeface="Aptos" pitchFamily="34" charset="-122"/>
                 <a:cs typeface="Aptos" pitchFamily="34" charset="-120"/>
               </a:rPr>
-              <a:t>A public health agency may deploy an internal RAG assistant in a cloud environment so staff can search.</a:t>
-            </a:r>
-            <a:endParaRPr lang="en-US" sz="1320" dirty="0"/>
+              <a:t>A public health agency may deploy an internal RAG assistant in a cloud.</a:t>
+            </a:r>
+            <a:endParaRPr lang="en-US" sz="1220" dirty="0"/>
           </a:p>
         </p:txBody>
       </p:sp>
@@ -4227,12 +4227,12 @@
         </p:nvSpPr>
         <p:spPr>
           <a:xfrm>
-            <a:off x="7635240" y="2718511"/>
-            <a:ext cx="3474720" cy="1328623"/>
+            <a:off x="7543800" y="2724912"/>
+            <a:ext cx="3611880" cy="1527048"/>
           </a:xfrm>
           <a:prstGeom prst="roundRect">
             <a:avLst>
-              <a:gd name="adj" fmla="val 8259"/>
+              <a:gd name="adj" fmla="val 7186"/>
             </a:avLst>
           </a:prstGeom>
           <a:solidFill>
@@ -4254,8 +4254,8 @@
         </p:nvSpPr>
         <p:spPr>
           <a:xfrm>
-            <a:off x="7799832" y="2864815"/>
-            <a:ext cx="3145536" cy="256032"/>
+            <a:off x="7708392" y="2852928"/>
+            <a:ext cx="3282696" cy="228600"/>
           </a:xfrm>
           <a:prstGeom prst="rect">
             <a:avLst/>
@@ -4271,7 +4271,7 @@
               <a:buNone/>
             </a:pPr>
             <a:r>
-              <a:rPr lang="en-US" sz="1300" b="1" dirty="0">
+              <a:rPr lang="en-US" sz="1220" b="1" dirty="0">
                 <a:solidFill>
                   <a:srgbClr val="0068B7"/>
                 </a:solidFill>
@@ -4281,7 +4281,7 @@
               </a:rPr>
               <a:t>Concept checkpoints</a:t>
             </a:r>
-            <a:endParaRPr lang="en-US" sz="1300" dirty="0"/>
+            <a:endParaRPr lang="en-US" sz="1220" dirty="0"/>
           </a:p>
         </p:txBody>
       </p:sp>
@@ -4293,8 +4293,8 @@
         </p:nvSpPr>
         <p:spPr>
           <a:xfrm>
-            <a:off x="7818120" y="3230575"/>
-            <a:ext cx="3090672" cy="670255"/>
+            <a:off x="7726680" y="3182112"/>
+            <a:ext cx="3227832" cy="960120"/>
           </a:xfrm>
           <a:prstGeom prst="rect">
             <a:avLst/>
@@ -4312,7 +4312,7 @@
               <a:buNone/>
             </a:pPr>
             <a:r>
-              <a:rPr lang="en-US" sz="1220" dirty="0">
+              <a:rPr lang="en-US" sz="1140" dirty="0">
                 <a:solidFill>
                   <a:srgbClr val="17364A"/>
                 </a:solidFill>
@@ -4320,16 +4320,16 @@
                 <a:ea typeface="Aptos" pitchFamily="34" charset="-122"/>
                 <a:cs typeface="Aptos" pitchFamily="34" charset="-120"/>
               </a:rPr>
-              <a:t>A public health agency may deploy an internal RAG assistant in a.</a:t>
-            </a:r>
-            <a:endParaRPr lang="en-US" sz="1220" dirty="0"/>
-          </a:p>
-          <a:p>
-            <a:pPr indent="0" marL="0">
-              <a:buNone/>
-            </a:pPr>
-            <a:r>
-              <a:rPr lang="en-US" sz="1220" dirty="0">
+              <a:t>A public health agency may deploy an internal RAG.</a:t>
+            </a:r>
+            <a:endParaRPr lang="en-US" sz="1140" dirty="0"/>
+          </a:p>
+          <a:p>
+            <a:pPr indent="0" marL="0">
+              <a:buNone/>
+            </a:pPr>
+            <a:r>
+              <a:rPr lang="en-US" sz="1140" dirty="0">
                 <a:solidFill>
                   <a:srgbClr val="17364A"/>
                 </a:solidFill>
@@ -4337,16 +4337,16 @@
                 <a:ea typeface="Aptos" pitchFamily="34" charset="-122"/>
                 <a:cs typeface="Aptos" pitchFamily="34" charset="-120"/>
               </a:rPr>
-              <a:t>The tool may be low risk if it uses public documents, but it.</a:t>
-            </a:r>
-            <a:endParaRPr lang="en-US" sz="1220" dirty="0"/>
-          </a:p>
-          <a:p>
-            <a:pPr indent="0" marL="0">
-              <a:buNone/>
-            </a:pPr>
-            <a:r>
-              <a:rPr lang="en-US" sz="1220" dirty="0">
+              <a:t>The tool may be low risk if it uses public.</a:t>
+            </a:r>
+            <a:endParaRPr lang="en-US" sz="1140" dirty="0"/>
+          </a:p>
+          <a:p>
+            <a:pPr indent="0" marL="0">
+              <a:buNone/>
+            </a:pPr>
+            <a:r>
+              <a:rPr lang="en-US" sz="1140" dirty="0">
                 <a:solidFill>
                   <a:srgbClr val="17364A"/>
                 </a:solidFill>
@@ -4354,9 +4354,9 @@
                 <a:ea typeface="Aptos" pitchFamily="34" charset="-122"/>
                 <a:cs typeface="Aptos" pitchFamily="34" charset="-120"/>
               </a:rPr>
-              <a:t>Secure deployment requires access controls, document-level.</a:t>
-            </a:r>
-            <a:endParaRPr lang="en-US" sz="1220" dirty="0"/>
+              <a:t>Secure deployment requires access controls,.</a:t>
+            </a:r>
+            <a:endParaRPr lang="en-US" sz="1140" dirty="0"/>
           </a:p>
         </p:txBody>
       </p:sp>
@@ -4368,12 +4368,12 @@
         </p:nvSpPr>
         <p:spPr>
           <a:xfrm>
-            <a:off x="7635240" y="4184294"/>
-            <a:ext cx="3474720" cy="1466698"/>
+            <a:off x="7543800" y="4389120"/>
+            <a:ext cx="3611880" cy="1261872"/>
           </a:xfrm>
           <a:prstGeom prst="roundRect">
             <a:avLst>
-              <a:gd name="adj" fmla="val 7481"/>
+              <a:gd name="adj" fmla="val 8696"/>
             </a:avLst>
           </a:prstGeom>
           <a:solidFill>
@@ -4395,8 +4395,8 @@
         </p:nvSpPr>
         <p:spPr>
           <a:xfrm>
-            <a:off x="7799832" y="4330598"/>
-            <a:ext cx="3145536" cy="256032"/>
+            <a:off x="7708392" y="4517136"/>
+            <a:ext cx="3282696" cy="228600"/>
           </a:xfrm>
           <a:prstGeom prst="rect">
             <a:avLst/>
@@ -4412,7 +4412,7 @@
               <a:buNone/>
             </a:pPr>
             <a:r>
-              <a:rPr lang="en-US" sz="1300" b="1" dirty="0">
+              <a:rPr lang="en-US" sz="1220" b="1" dirty="0">
                 <a:solidFill>
                   <a:srgbClr val="0068B7"/>
                 </a:solidFill>
@@ -4422,7 +4422,7 @@
               </a:rPr>
               <a:t>Apply it</a:t>
             </a:r>
-            <a:endParaRPr lang="en-US" sz="1300" dirty="0"/>
+            <a:endParaRPr lang="en-US" sz="1220" dirty="0"/>
           </a:p>
         </p:txBody>
       </p:sp>
@@ -4434,8 +4434,8 @@
         </p:nvSpPr>
         <p:spPr>
           <a:xfrm>
-            <a:off x="7799832" y="4659782"/>
-            <a:ext cx="3145536" cy="899770"/>
+            <a:off x="7708392" y="4828032"/>
+            <a:ext cx="3282696" cy="749808"/>
           </a:xfrm>
           <a:prstGeom prst="rect">
             <a:avLst/>
@@ -4453,7 +4453,7 @@
               <a:buNone/>
             </a:pPr>
             <a:r>
-              <a:rPr lang="en-US" sz="1320" dirty="0">
+              <a:rPr lang="en-US" sz="1220" dirty="0">
                 <a:solidFill>
                   <a:srgbClr val="17364A"/>
                 </a:solidFill>
@@ -4461,9 +4461,9 @@
                 <a:ea typeface="Aptos" pitchFamily="34" charset="-122"/>
                 <a:cs typeface="Aptos" pitchFamily="34" charset="-120"/>
               </a:rPr>
-              <a:t>Connect the concept to public health purpose, responsible use, required safeguards, documentation, and the next action a department should take.</a:t>
-            </a:r>
-            <a:endParaRPr lang="en-US" sz="1320" dirty="0"/>
+              <a:t>Connect the concept to public health purpose, responsible use, required.</a:t>
+            </a:r>
+            <a:endParaRPr lang="en-US" sz="1220" dirty="0"/>
           </a:p>
         </p:txBody>
       </p:sp>
@@ -4754,8 +4754,8 @@
         </p:nvSpPr>
         <p:spPr>
           <a:xfrm>
-            <a:off x="868680" y="1508760"/>
-            <a:ext cx="6309360" cy="4160520"/>
+            <a:off x="822960" y="1463040"/>
+            <a:ext cx="6565392" cy="4343400"/>
           </a:xfrm>
           <a:prstGeom prst="rect">
             <a:avLst/>
@@ -4773,7 +4773,7 @@
               <a:buNone/>
             </a:pPr>
             <a:r>
-              <a:rPr lang="en-US" sz="2100" dirty="0">
+              <a:rPr lang="en-US" sz="1920" dirty="0">
                 <a:solidFill>
                   <a:srgbClr val="003A63"/>
                 </a:solidFill>
@@ -4783,14 +4783,14 @@
               </a:rPr>
               <a:t>• Secure deployment begins with environment separation.</a:t>
             </a:r>
-            <a:endParaRPr lang="en-US" sz="2100" dirty="0"/>
-          </a:p>
-          <a:p>
-            <a:pPr indent="0" marL="0">
-              <a:buNone/>
-            </a:pPr>
-            <a:r>
-              <a:rPr lang="en-US" sz="2100" dirty="0">
+            <a:endParaRPr lang="en-US" sz="1920" dirty="0"/>
+          </a:p>
+          <a:p>
+            <a:pPr indent="0" marL="0">
+              <a:buNone/>
+            </a:pPr>
+            <a:r>
+              <a:rPr lang="en-US" sz="1920" dirty="0">
                 <a:solidFill>
                   <a:srgbClr val="003A63"/>
                 </a:solidFill>
@@ -4798,16 +4798,16 @@
                 <a:ea typeface="Aptos" pitchFamily="34" charset="-122"/>
                 <a:cs typeface="Aptos" pitchFamily="34" charset="-120"/>
               </a:rPr>
-              <a:t>• Development, testing, staging, and production environments should be clearly separated so.</a:t>
-            </a:r>
-            <a:endParaRPr lang="en-US" sz="2100" dirty="0"/>
-          </a:p>
-          <a:p>
-            <a:pPr indent="0" marL="0">
-              <a:buNone/>
-            </a:pPr>
-            <a:r>
-              <a:rPr lang="en-US" sz="2100" dirty="0">
+              <a:t>• Development, testing, staging, and production environments should be clearly.</a:t>
+            </a:r>
+            <a:endParaRPr lang="en-US" sz="1920" dirty="0"/>
+          </a:p>
+          <a:p>
+            <a:pPr indent="0" marL="0">
+              <a:buNone/>
+            </a:pPr>
+            <a:r>
+              <a:rPr lang="en-US" sz="1920" dirty="0">
                 <a:solidFill>
                   <a:srgbClr val="003A63"/>
                 </a:solidFill>
@@ -4815,9 +4815,9 @@
                 <a:ea typeface="Aptos" pitchFamily="34" charset="-122"/>
                 <a:cs typeface="Aptos" pitchFamily="34" charset="-120"/>
               </a:rPr>
-              <a:t>• Sensitive production data should not be copied into lower environments unless approved.</a:t>
-            </a:r>
-            <a:endParaRPr lang="en-US" sz="2100" dirty="0"/>
+              <a:t>• Sensitive production data should not be copied into lower environments.</a:t>
+            </a:r>
+            <a:endParaRPr lang="en-US" sz="1920" dirty="0"/>
           </a:p>
         </p:txBody>
       </p:sp>
@@ -4829,12 +4829,12 @@
         </p:nvSpPr>
         <p:spPr>
           <a:xfrm>
-            <a:off x="7635240" y="1325880"/>
-            <a:ext cx="3474720" cy="1207008"/>
+            <a:off x="7543800" y="1325880"/>
+            <a:ext cx="3611880" cy="1261872"/>
           </a:xfrm>
           <a:prstGeom prst="roundRect">
             <a:avLst>
-              <a:gd name="adj" fmla="val 9091"/>
+              <a:gd name="adj" fmla="val 8696"/>
             </a:avLst>
           </a:prstGeom>
           <a:solidFill>
@@ -4856,8 +4856,8 @@
         </p:nvSpPr>
         <p:spPr>
           <a:xfrm>
-            <a:off x="7799832" y="1472184"/>
-            <a:ext cx="3145536" cy="256032"/>
+            <a:off x="7708392" y="1453896"/>
+            <a:ext cx="3282696" cy="228600"/>
           </a:xfrm>
           <a:prstGeom prst="rect">
             <a:avLst/>
@@ -4873,7 +4873,7 @@
               <a:buNone/>
             </a:pPr>
             <a:r>
-              <a:rPr lang="en-US" sz="1300" b="1" dirty="0">
+              <a:rPr lang="en-US" sz="1220" b="1" dirty="0">
                 <a:solidFill>
                   <a:srgbClr val="0068B7"/>
                 </a:solidFill>
@@ -4883,7 +4883,7 @@
               </a:rPr>
               <a:t>Core concept</a:t>
             </a:r>
-            <a:endParaRPr lang="en-US" sz="1300" dirty="0"/>
+            <a:endParaRPr lang="en-US" sz="1220" dirty="0"/>
           </a:p>
         </p:txBody>
       </p:sp>
@@ -4895,8 +4895,8 @@
         </p:nvSpPr>
         <p:spPr>
           <a:xfrm>
-            <a:off x="7799832" y="1801368"/>
-            <a:ext cx="3145536" cy="640080"/>
+            <a:off x="7708392" y="1764792"/>
+            <a:ext cx="3282696" cy="749808"/>
           </a:xfrm>
           <a:prstGeom prst="rect">
             <a:avLst/>
@@ -4914,7 +4914,7 @@
               <a:buNone/>
             </a:pPr>
             <a:r>
-              <a:rPr lang="en-US" sz="1320" dirty="0">
+              <a:rPr lang="en-US" sz="1220" dirty="0">
                 <a:solidFill>
                   <a:srgbClr val="17364A"/>
                 </a:solidFill>
@@ -4924,7 +4924,7 @@
               </a:rPr>
               <a:t>Secure deployment begins with environment separation.</a:t>
             </a:r>
-            <a:endParaRPr lang="en-US" sz="1320" dirty="0"/>
+            <a:endParaRPr lang="en-US" sz="1220" dirty="0"/>
           </a:p>
         </p:txBody>
       </p:sp>
@@ -4936,12 +4936,12 @@
         </p:nvSpPr>
         <p:spPr>
           <a:xfrm>
-            <a:off x="7635240" y="2670048"/>
-            <a:ext cx="3474720" cy="1377086"/>
+            <a:off x="7543800" y="2724912"/>
+            <a:ext cx="3611880" cy="1527048"/>
           </a:xfrm>
           <a:prstGeom prst="roundRect">
             <a:avLst>
-              <a:gd name="adj" fmla="val 7968"/>
+              <a:gd name="adj" fmla="val 7186"/>
             </a:avLst>
           </a:prstGeom>
           <a:solidFill>
@@ -4963,8 +4963,8 @@
         </p:nvSpPr>
         <p:spPr>
           <a:xfrm>
-            <a:off x="7799832" y="2816352"/>
-            <a:ext cx="3145536" cy="256032"/>
+            <a:off x="7708392" y="2852928"/>
+            <a:ext cx="3282696" cy="228600"/>
           </a:xfrm>
           <a:prstGeom prst="rect">
             <a:avLst/>
@@ -4980,7 +4980,7 @@
               <a:buNone/>
             </a:pPr>
             <a:r>
-              <a:rPr lang="en-US" sz="1300" b="1" dirty="0">
+              <a:rPr lang="en-US" sz="1220" b="1" dirty="0">
                 <a:solidFill>
                   <a:srgbClr val="0068B7"/>
                 </a:solidFill>
@@ -4990,7 +4990,7 @@
               </a:rPr>
               <a:t>Concept checkpoints</a:t>
             </a:r>
-            <a:endParaRPr lang="en-US" sz="1300" dirty="0"/>
+            <a:endParaRPr lang="en-US" sz="1220" dirty="0"/>
           </a:p>
         </p:txBody>
       </p:sp>
@@ -5002,8 +5002,8 @@
         </p:nvSpPr>
         <p:spPr>
           <a:xfrm>
-            <a:off x="7818120" y="3182112"/>
-            <a:ext cx="3090672" cy="718718"/>
+            <a:off x="7726680" y="3182112"/>
+            <a:ext cx="3227832" cy="960120"/>
           </a:xfrm>
           <a:prstGeom prst="rect">
             <a:avLst/>
@@ -5021,7 +5021,7 @@
               <a:buNone/>
             </a:pPr>
             <a:r>
-              <a:rPr lang="en-US" sz="1220" dirty="0">
+              <a:rPr lang="en-US" sz="1140" dirty="0">
                 <a:solidFill>
                   <a:srgbClr val="17364A"/>
                 </a:solidFill>
@@ -5029,16 +5029,16 @@
                 <a:ea typeface="Aptos" pitchFamily="34" charset="-122"/>
                 <a:cs typeface="Aptos" pitchFamily="34" charset="-120"/>
               </a:rPr>
-              <a:t>Development, testing, staging, and production environments should.</a:t>
-            </a:r>
-            <a:endParaRPr lang="en-US" sz="1220" dirty="0"/>
-          </a:p>
-          <a:p>
-            <a:pPr indent="0" marL="0">
-              <a:buNone/>
-            </a:pPr>
-            <a:r>
-              <a:rPr lang="en-US" sz="1220" dirty="0">
+              <a:t>Development, testing, staging, and production.</a:t>
+            </a:r>
+            <a:endParaRPr lang="en-US" sz="1140" dirty="0"/>
+          </a:p>
+          <a:p>
+            <a:pPr indent="0" marL="0">
+              <a:buNone/>
+            </a:pPr>
+            <a:r>
+              <a:rPr lang="en-US" sz="1140" dirty="0">
                 <a:solidFill>
                   <a:srgbClr val="17364A"/>
                 </a:solidFill>
@@ -5046,16 +5046,16 @@
                 <a:ea typeface="Aptos" pitchFamily="34" charset="-122"/>
                 <a:cs typeface="Aptos" pitchFamily="34" charset="-120"/>
               </a:rPr>
-              <a:t>Sensitive production data should not be copied into lower.</a:t>
-            </a:r>
-            <a:endParaRPr lang="en-US" sz="1220" dirty="0"/>
-          </a:p>
-          <a:p>
-            <a:pPr indent="0" marL="0">
-              <a:buNone/>
-            </a:pPr>
-            <a:r>
-              <a:rPr lang="en-US" sz="1220" dirty="0">
+              <a:t>Sensitive production data should not be copied.</a:t>
+            </a:r>
+            <a:endParaRPr lang="en-US" sz="1140" dirty="0"/>
+          </a:p>
+          <a:p>
+            <a:pPr indent="0" marL="0">
+              <a:buNone/>
+            </a:pPr>
+            <a:r>
+              <a:rPr lang="en-US" sz="1140" dirty="0">
                 <a:solidFill>
                   <a:srgbClr val="17364A"/>
                 </a:solidFill>
@@ -5063,9 +5063,9 @@
                 <a:ea typeface="Aptos" pitchFamily="34" charset="-122"/>
                 <a:cs typeface="Aptos" pitchFamily="34" charset="-120"/>
               </a:rPr>
-              <a:t>Logging and monitoring are central to deployment safety.</a:t>
-            </a:r>
-            <a:endParaRPr lang="en-US" sz="1220" dirty="0"/>
+              <a:t>Logging and monitoring are central to deployment.</a:t>
+            </a:r>
+            <a:endParaRPr lang="en-US" sz="1140" dirty="0"/>
           </a:p>
         </p:txBody>
       </p:sp>
@@ -5077,12 +5077,12 @@
         </p:nvSpPr>
         <p:spPr>
           <a:xfrm>
-            <a:off x="7635240" y="4184294"/>
-            <a:ext cx="3474720" cy="1466698"/>
+            <a:off x="7543800" y="4389120"/>
+            <a:ext cx="3611880" cy="1261872"/>
           </a:xfrm>
           <a:prstGeom prst="roundRect">
             <a:avLst>
-              <a:gd name="adj" fmla="val 7481"/>
+              <a:gd name="adj" fmla="val 8696"/>
             </a:avLst>
           </a:prstGeom>
           <a:solidFill>
@@ -5104,8 +5104,8 @@
         </p:nvSpPr>
         <p:spPr>
           <a:xfrm>
-            <a:off x="7799832" y="4330598"/>
-            <a:ext cx="3145536" cy="256032"/>
+            <a:off x="7708392" y="4517136"/>
+            <a:ext cx="3282696" cy="228600"/>
           </a:xfrm>
           <a:prstGeom prst="rect">
             <a:avLst/>
@@ -5121,7 +5121,7 @@
               <a:buNone/>
             </a:pPr>
             <a:r>
-              <a:rPr lang="en-US" sz="1300" b="1" dirty="0">
+              <a:rPr lang="en-US" sz="1220" b="1" dirty="0">
                 <a:solidFill>
                   <a:srgbClr val="0068B7"/>
                 </a:solidFill>
@@ -5131,7 +5131,7 @@
               </a:rPr>
               <a:t>Apply it</a:t>
             </a:r>
-            <a:endParaRPr lang="en-US" sz="1300" dirty="0"/>
+            <a:endParaRPr lang="en-US" sz="1220" dirty="0"/>
           </a:p>
         </p:txBody>
       </p:sp>
@@ -5143,8 +5143,8 @@
         </p:nvSpPr>
         <p:spPr>
           <a:xfrm>
-            <a:off x="7799832" y="4659782"/>
-            <a:ext cx="3145536" cy="899770"/>
+            <a:off x="7708392" y="4828032"/>
+            <a:ext cx="3282696" cy="749808"/>
           </a:xfrm>
           <a:prstGeom prst="rect">
             <a:avLst/>
@@ -5162,7 +5162,7 @@
               <a:buNone/>
             </a:pPr>
             <a:r>
-              <a:rPr lang="en-US" sz="1320" dirty="0">
+              <a:rPr lang="en-US" sz="1220" dirty="0">
                 <a:solidFill>
                   <a:srgbClr val="17364A"/>
                 </a:solidFill>
@@ -5170,9 +5170,9 @@
                 <a:ea typeface="Aptos" pitchFamily="34" charset="-122"/>
                 <a:cs typeface="Aptos" pitchFamily="34" charset="-120"/>
               </a:rPr>
-              <a:t>Connect the concept to public health purpose, responsible use, required safeguards, documentation, and the next action a department should take.</a:t>
-            </a:r>
-            <a:endParaRPr lang="en-US" sz="1320" dirty="0"/>
+              <a:t>Connect the concept to public health purpose, responsible use, required.</a:t>
+            </a:r>
+            <a:endParaRPr lang="en-US" sz="1220" dirty="0"/>
           </a:p>
         </p:txBody>
       </p:sp>
@@ -5463,8 +5463,8 @@
         </p:nvSpPr>
         <p:spPr>
           <a:xfrm>
-            <a:off x="868680" y="1508760"/>
-            <a:ext cx="6309360" cy="4160520"/>
+            <a:off x="822960" y="1463040"/>
+            <a:ext cx="6565392" cy="4343400"/>
           </a:xfrm>
           <a:prstGeom prst="rect">
             <a:avLst/>
@@ -5482,7 +5482,7 @@
               <a:buNone/>
             </a:pPr>
             <a:r>
-              <a:rPr lang="en-US" sz="2100" dirty="0">
+              <a:rPr lang="en-US" sz="1920" dirty="0">
                 <a:solidFill>
                   <a:srgbClr val="003A63"/>
                 </a:solidFill>
@@ -5490,16 +5490,16 @@
                 <a:ea typeface="Aptos" pitchFamily="34" charset="-122"/>
                 <a:cs typeface="Aptos" pitchFamily="34" charset="-120"/>
               </a:rPr>
-              <a:t>• A common failure mode is treating the topic as a technical detail rather than a public health.</a:t>
-            </a:r>
-            <a:endParaRPr lang="en-US" sz="2100" dirty="0"/>
-          </a:p>
-          <a:p>
-            <a:pPr indent="0" marL="0">
-              <a:buNone/>
-            </a:pPr>
-            <a:r>
-              <a:rPr lang="en-US" sz="2100" dirty="0">
+              <a:t>• A common failure mode is treating the topic as a technical detail rather.</a:t>
+            </a:r>
+            <a:endParaRPr lang="en-US" sz="1920" dirty="0"/>
+          </a:p>
+          <a:p>
+            <a:pPr indent="0" marL="0">
+              <a:buNone/>
+            </a:pPr>
+            <a:r>
+              <a:rPr lang="en-US" sz="1920" dirty="0">
                 <a:solidFill>
                   <a:srgbClr val="003A63"/>
                 </a:solidFill>
@@ -5507,16 +5507,16 @@
                 <a:ea typeface="Aptos" pitchFamily="34" charset="-122"/>
                 <a:cs typeface="Aptos" pitchFamily="34" charset="-120"/>
               </a:rPr>
-              <a:t>• When staff do not connect technical decisions to authority, workflow, equity, privacy,.</a:t>
-            </a:r>
-            <a:endParaRPr lang="en-US" sz="2100" dirty="0"/>
-          </a:p>
-          <a:p>
-            <a:pPr indent="0" marL="0">
-              <a:buNone/>
-            </a:pPr>
-            <a:r>
-              <a:rPr lang="en-US" sz="2100" dirty="0">
+              <a:t>• When staff do not connect technical decisions to authority, workflow,.</a:t>
+            </a:r>
+            <a:endParaRPr lang="en-US" sz="1920" dirty="0"/>
+          </a:p>
+          <a:p>
+            <a:pPr indent="0" marL="0">
+              <a:buNone/>
+            </a:pPr>
+            <a:r>
+              <a:rPr lang="en-US" sz="1920" dirty="0">
                 <a:solidFill>
                   <a:srgbClr val="003A63"/>
                 </a:solidFill>
@@ -5526,7 +5526,7 @@
               </a:rPr>
               <a:t>• Another risk is relying on vendor claims without agency-defined evidence.</a:t>
             </a:r>
-            <a:endParaRPr lang="en-US" sz="2100" dirty="0"/>
+            <a:endParaRPr lang="en-US" sz="1920" dirty="0"/>
           </a:p>
         </p:txBody>
       </p:sp>
@@ -5538,12 +5538,12 @@
         </p:nvSpPr>
         <p:spPr>
           <a:xfrm>
-            <a:off x="7635240" y="1325880"/>
-            <a:ext cx="3474720" cy="1255471"/>
+            <a:off x="7543800" y="1325880"/>
+            <a:ext cx="3611880" cy="1261872"/>
           </a:xfrm>
           <a:prstGeom prst="roundRect">
             <a:avLst>
-              <a:gd name="adj" fmla="val 8740"/>
+              <a:gd name="adj" fmla="val 8696"/>
             </a:avLst>
           </a:prstGeom>
           <a:solidFill>
@@ -5565,8 +5565,8 @@
         </p:nvSpPr>
         <p:spPr>
           <a:xfrm>
-            <a:off x="7799832" y="1472184"/>
-            <a:ext cx="3145536" cy="256032"/>
+            <a:off x="7708392" y="1453896"/>
+            <a:ext cx="3282696" cy="228600"/>
           </a:xfrm>
           <a:prstGeom prst="rect">
             <a:avLst/>
@@ -5582,7 +5582,7 @@
               <a:buNone/>
             </a:pPr>
             <a:r>
-              <a:rPr lang="en-US" sz="1300" b="1" dirty="0">
+              <a:rPr lang="en-US" sz="1220" b="1" dirty="0">
                 <a:solidFill>
                   <a:srgbClr val="0068B7"/>
                 </a:solidFill>
@@ -5592,7 +5592,7 @@
               </a:rPr>
               <a:t>Risk check</a:t>
             </a:r>
-            <a:endParaRPr lang="en-US" sz="1300" dirty="0"/>
+            <a:endParaRPr lang="en-US" sz="1220" dirty="0"/>
           </a:p>
         </p:txBody>
       </p:sp>
@@ -5604,8 +5604,8 @@
         </p:nvSpPr>
         <p:spPr>
           <a:xfrm>
-            <a:off x="7799832" y="1801368"/>
-            <a:ext cx="3145536" cy="688543"/>
+            <a:off x="7708392" y="1764792"/>
+            <a:ext cx="3282696" cy="749808"/>
           </a:xfrm>
           <a:prstGeom prst="rect">
             <a:avLst/>
@@ -5623,7 +5623,7 @@
               <a:buNone/>
             </a:pPr>
             <a:r>
-              <a:rPr lang="en-US" sz="1320" dirty="0">
+              <a:rPr lang="en-US" sz="1220" dirty="0">
                 <a:solidFill>
                   <a:srgbClr val="17364A"/>
                 </a:solidFill>
@@ -5631,9 +5631,9 @@
                 <a:ea typeface="Aptos" pitchFamily="34" charset="-122"/>
                 <a:cs typeface="Aptos" pitchFamily="34" charset="-120"/>
               </a:rPr>
-              <a:t>A common failure mode is treating the topic as a technical detail rather than a public health control.</a:t>
-            </a:r>
-            <a:endParaRPr lang="en-US" sz="1320" dirty="0"/>
+              <a:t>A common failure mode is treating the topic as a technical detail rather than a.</a:t>
+            </a:r>
+            <a:endParaRPr lang="en-US" sz="1220" dirty="0"/>
           </a:p>
         </p:txBody>
       </p:sp>
@@ -5645,12 +5645,12 @@
         </p:nvSpPr>
         <p:spPr>
           <a:xfrm>
-            <a:off x="7635240" y="2718511"/>
-            <a:ext cx="3474720" cy="1536192"/>
+            <a:off x="7543800" y="2724912"/>
+            <a:ext cx="3611880" cy="1527048"/>
           </a:xfrm>
           <a:prstGeom prst="roundRect">
             <a:avLst>
-              <a:gd name="adj" fmla="val 7143"/>
+              <a:gd name="adj" fmla="val 7186"/>
             </a:avLst>
           </a:prstGeom>
           <a:solidFill>
@@ -5672,24 +5672,26 @@
         </p:nvSpPr>
         <p:spPr>
           <a:xfrm>
-            <a:off x="7799832" y="2846527"/>
-            <a:ext cx="3145536" cy="237744"/>
-          </a:xfrm>
-          <a:prstGeom prst="rect">
-            <a:avLst/>
-          </a:prstGeom>
-          <a:noFill/>
-          <a:ln/>
-        </p:spPr>
-        <p:txBody>
-          <a:bodyPr wrap="square" lIns="0" tIns="0" rIns="0" bIns="0" rtlCol="0" anchor="ctr"/>
-          <a:lstStyle/>
-          <a:p>
-            <a:pPr indent="0" marL="0">
-              <a:buNone/>
-            </a:pPr>
-            <a:r>
-              <a:rPr lang="en-US" sz="1250" b="1" dirty="0">
+            <a:off x="7708392" y="2852928"/>
+            <a:ext cx="3282696" cy="219456"/>
+          </a:xfrm>
+          <a:prstGeom prst="rect">
+            <a:avLst/>
+          </a:prstGeom>
+          <a:noFill/>
+          <a:ln/>
+        </p:spPr>
+        <p:txBody>
+          <a:bodyPr wrap="square" lIns="0" tIns="0" rIns="0" bIns="0" rtlCol="0" anchor="ctr">
+            <a:normAutofit/>
+          </a:bodyPr>
+          <a:lstStyle/>
+          <a:p>
+            <a:pPr indent="0" marL="0">
+              <a:buNone/>
+            </a:pPr>
+            <a:r>
+              <a:rPr lang="en-US" sz="1160" b="1" dirty="0">
                 <a:solidFill>
                   <a:srgbClr val="0068B7"/>
                 </a:solidFill>
@@ -5699,7 +5701,7 @@
               </a:rPr>
               <a:t>Risk control loop</a:t>
             </a:r>
-            <a:endParaRPr lang="en-US" sz="1250" dirty="0"/>
+            <a:endParaRPr lang="en-US" sz="1160" dirty="0"/>
           </a:p>
         </p:txBody>
       </p:sp>
@@ -5711,7 +5713,7 @@
         </p:nvSpPr>
         <p:spPr>
           <a:xfrm>
-            <a:off x="8763000" y="3399739"/>
+            <a:off x="8717280" y="3406140"/>
             <a:ext cx="164592" cy="0"/>
           </a:xfrm>
           <a:prstGeom prst="line">
@@ -5734,8 +5736,8 @@
         </p:nvSpPr>
         <p:spPr>
           <a:xfrm>
-            <a:off x="7872984" y="3248863"/>
-            <a:ext cx="890016" cy="301752"/>
+            <a:off x="7781544" y="3255264"/>
+            <a:ext cx="935736" cy="301752"/>
           </a:xfrm>
           <a:prstGeom prst="roundRect">
             <a:avLst>
@@ -5761,8 +5763,8 @@
         </p:nvSpPr>
         <p:spPr>
           <a:xfrm>
-            <a:off x="7909560" y="3322015"/>
-            <a:ext cx="816864" cy="146304"/>
+            <a:off x="7818120" y="3328416"/>
+            <a:ext cx="862584" cy="146304"/>
           </a:xfrm>
           <a:prstGeom prst="rect">
             <a:avLst/>
@@ -5802,7 +5804,7 @@
         </p:nvSpPr>
         <p:spPr>
           <a:xfrm>
-            <a:off x="9817608" y="3399739"/>
+            <a:off x="9817608" y="3406140"/>
             <a:ext cx="164592" cy="0"/>
           </a:xfrm>
           <a:prstGeom prst="line">
@@ -5825,8 +5827,8 @@
         </p:nvSpPr>
         <p:spPr>
           <a:xfrm>
-            <a:off x="8927592" y="3248863"/>
-            <a:ext cx="890016" cy="301752"/>
+            <a:off x="8881872" y="3255264"/>
+            <a:ext cx="935736" cy="301752"/>
           </a:xfrm>
           <a:prstGeom prst="roundRect">
             <a:avLst>
@@ -5852,8 +5854,8 @@
         </p:nvSpPr>
         <p:spPr>
           <a:xfrm>
-            <a:off x="8964168" y="3322015"/>
-            <a:ext cx="816864" cy="146304"/>
+            <a:off x="8918448" y="3328416"/>
+            <a:ext cx="862584" cy="146304"/>
           </a:xfrm>
           <a:prstGeom prst="rect">
             <a:avLst/>
@@ -5893,8 +5895,8 @@
         </p:nvSpPr>
         <p:spPr>
           <a:xfrm>
-            <a:off x="9982200" y="3248863"/>
-            <a:ext cx="890016" cy="301752"/>
+            <a:off x="9982200" y="3255264"/>
+            <a:ext cx="935736" cy="301752"/>
           </a:xfrm>
           <a:prstGeom prst="roundRect">
             <a:avLst>
@@ -5920,8 +5922,8 @@
         </p:nvSpPr>
         <p:spPr>
           <a:xfrm>
-            <a:off x="10018776" y="3322015"/>
-            <a:ext cx="816864" cy="146304"/>
+            <a:off x="10018776" y="3328416"/>
+            <a:ext cx="862584" cy="146304"/>
           </a:xfrm>
           <a:prstGeom prst="rect">
             <a:avLst/>
@@ -5961,8 +5963,8 @@
         </p:nvSpPr>
         <p:spPr>
           <a:xfrm>
-            <a:off x="7854696" y="3742639"/>
-            <a:ext cx="3035808" cy="365760"/>
+            <a:off x="7763256" y="3749040"/>
+            <a:ext cx="3172968" cy="356616"/>
           </a:xfrm>
           <a:prstGeom prst="rect">
             <a:avLst/>
@@ -5980,7 +5982,7 @@
               <a:buNone/>
             </a:pPr>
             <a:r>
-              <a:rPr lang="en-US" sz="1120" dirty="0">
+              <a:rPr lang="en-US" sz="1040" dirty="0">
                 <a:solidFill>
                   <a:srgbClr val="17364A"/>
                 </a:solidFill>
@@ -5988,9 +5990,9 @@
                 <a:ea typeface="Aptos" pitchFamily="34" charset="-122"/>
                 <a:cs typeface="Aptos" pitchFamily="34" charset="-120"/>
               </a:rPr>
-              <a:t>Responsible use depends on finding risks early, applying safeguards, and watching for drift or harm over time.</a:t>
-            </a:r>
-            <a:endParaRPr lang="en-US" sz="1120" dirty="0"/>
+              <a:t>Responsible use depends on finding risks early, applying safeguards,.</a:t>
+            </a:r>
+            <a:endParaRPr lang="en-US" sz="1040" dirty="0"/>
           </a:p>
         </p:txBody>
       </p:sp>
@@ -6002,12 +6004,12 @@
         </p:nvSpPr>
         <p:spPr>
           <a:xfrm>
-            <a:off x="7635240" y="4391863"/>
-            <a:ext cx="3474720" cy="1255471"/>
+            <a:off x="7543800" y="4389120"/>
+            <a:ext cx="3611880" cy="1261872"/>
           </a:xfrm>
           <a:prstGeom prst="roundRect">
             <a:avLst>
-              <a:gd name="adj" fmla="val 8740"/>
+              <a:gd name="adj" fmla="val 8696"/>
             </a:avLst>
           </a:prstGeom>
           <a:solidFill>
@@ -6029,8 +6031,8 @@
         </p:nvSpPr>
         <p:spPr>
           <a:xfrm>
-            <a:off x="7799832" y="4538167"/>
-            <a:ext cx="3145536" cy="256032"/>
+            <a:off x="7708392" y="4517136"/>
+            <a:ext cx="3282696" cy="228600"/>
           </a:xfrm>
           <a:prstGeom prst="rect">
             <a:avLst/>
@@ -6046,7 +6048,7 @@
               <a:buNone/>
             </a:pPr>
             <a:r>
-              <a:rPr lang="en-US" sz="1300" b="1" dirty="0">
+              <a:rPr lang="en-US" sz="1220" b="1" dirty="0">
                 <a:solidFill>
                   <a:srgbClr val="0068B7"/>
                 </a:solidFill>
@@ -6056,7 +6058,7 @@
               </a:rPr>
               <a:t>Safeguard to plan</a:t>
             </a:r>
-            <a:endParaRPr lang="en-US" sz="1300" dirty="0"/>
+            <a:endParaRPr lang="en-US" sz="1220" dirty="0"/>
           </a:p>
         </p:txBody>
       </p:sp>
@@ -6068,8 +6070,8 @@
         </p:nvSpPr>
         <p:spPr>
           <a:xfrm>
-            <a:off x="7799832" y="4867351"/>
-            <a:ext cx="3145536" cy="688543"/>
+            <a:off x="7708392" y="4828032"/>
+            <a:ext cx="3282696" cy="749808"/>
           </a:xfrm>
           <a:prstGeom prst="rect">
             <a:avLst/>
@@ -6087,7 +6089,7 @@
               <a:buNone/>
             </a:pPr>
             <a:r>
-              <a:rPr lang="en-US" sz="1320" dirty="0">
+              <a:rPr lang="en-US" sz="1220" dirty="0">
                 <a:solidFill>
                   <a:srgbClr val="17364A"/>
                 </a:solidFill>
@@ -6095,9 +6097,9 @@
                 <a:ea typeface="Aptos" pitchFamily="34" charset="-122"/>
                 <a:cs typeface="Aptos" pitchFamily="34" charset="-120"/>
               </a:rPr>
-              <a:t>Identify what could go wrong, who could be affected, what safeguards are needed, and what evidence should be reviewed before use.</a:t>
-            </a:r>
-            <a:endParaRPr lang="en-US" sz="1320" dirty="0"/>
+              <a:t>Identify what could go wrong, who could be affected, what safeguards are needed,.</a:t>
+            </a:r>
+            <a:endParaRPr lang="en-US" sz="1220" dirty="0"/>
           </a:p>
         </p:txBody>
       </p:sp>
@@ -6388,8 +6390,8 @@
         </p:nvSpPr>
         <p:spPr>
           <a:xfrm>
-            <a:off x="868680" y="1508760"/>
-            <a:ext cx="6309360" cy="4160520"/>
+            <a:off x="822960" y="1463040"/>
+            <a:ext cx="6565392" cy="4343400"/>
           </a:xfrm>
           <a:prstGeom prst="rect">
             <a:avLst/>
@@ -6407,7 +6409,7 @@
               <a:buNone/>
             </a:pPr>
             <a:r>
-              <a:rPr lang="en-US" sz="2100" dirty="0">
+              <a:rPr lang="en-US" sz="1920" dirty="0">
                 <a:solidFill>
                   <a:srgbClr val="003A63"/>
                 </a:solidFill>
@@ -6415,16 +6417,16 @@
                 <a:ea typeface="Aptos" pitchFamily="34" charset="-122"/>
                 <a:cs typeface="Aptos" pitchFamily="34" charset="-120"/>
               </a:rPr>
-              <a:t>• Generative AI, predictive analytics, RAG, automation, and agentic workflows all depend on the.</a:t>
-            </a:r>
-            <a:endParaRPr lang="en-US" sz="2100" dirty="0"/>
-          </a:p>
-          <a:p>
-            <a:pPr indent="0" marL="0">
-              <a:buNone/>
-            </a:pPr>
-            <a:r>
-              <a:rPr lang="en-US" sz="2100" dirty="0">
+              <a:t>• Generative AI, predictive analytics, RAG, automation, and agentic workflows.</a:t>
+            </a:r>
+            <a:endParaRPr lang="en-US" sz="1920" dirty="0"/>
+          </a:p>
+          <a:p>
+            <a:pPr indent="0" marL="0">
+              <a:buNone/>
+            </a:pPr>
+            <a:r>
+              <a:rPr lang="en-US" sz="1920" dirty="0">
                 <a:solidFill>
                   <a:srgbClr val="003A63"/>
                 </a:solidFill>
@@ -6434,14 +6436,14 @@
               </a:rPr>
               <a:t>• The controls should be scaled to the risk of the use case.</a:t>
             </a:r>
-            <a:endParaRPr lang="en-US" sz="2100" dirty="0"/>
-          </a:p>
-          <a:p>
-            <a:pPr indent="0" marL="0">
-              <a:buNone/>
-            </a:pPr>
-            <a:r>
-              <a:rPr lang="en-US" sz="2100" dirty="0">
+            <a:endParaRPr lang="en-US" sz="1920" dirty="0"/>
+          </a:p>
+          <a:p>
+            <a:pPr indent="0" marL="0">
+              <a:buNone/>
+            </a:pPr>
+            <a:r>
+              <a:rPr lang="en-US" sz="1920" dirty="0">
                 <a:solidFill>
                   <a:srgbClr val="003A63"/>
                 </a:solidFill>
@@ -6449,9 +6451,9 @@
                 <a:ea typeface="Aptos" pitchFamily="34" charset="-122"/>
                 <a:cs typeface="Aptos" pitchFamily="34" charset="-120"/>
               </a:rPr>
-              <a:t>• A tool that drafts internal training text may require lighter review than a tool that updates.</a:t>
-            </a:r>
-            <a:endParaRPr lang="en-US" sz="2100" dirty="0"/>
+              <a:t>• A tool that drafts internal training text may require lighter review than a.</a:t>
+            </a:r>
+            <a:endParaRPr lang="en-US" sz="1920" dirty="0"/>
           </a:p>
         </p:txBody>
       </p:sp>
@@ -6463,12 +6465,12 @@
         </p:nvSpPr>
         <p:spPr>
           <a:xfrm>
-            <a:off x="7635240" y="1325880"/>
-            <a:ext cx="3474720" cy="1255471"/>
+            <a:off x="7543800" y="1325880"/>
+            <a:ext cx="3611880" cy="1261872"/>
           </a:xfrm>
           <a:prstGeom prst="roundRect">
             <a:avLst>
-              <a:gd name="adj" fmla="val 8740"/>
+              <a:gd name="adj" fmla="val 8696"/>
             </a:avLst>
           </a:prstGeom>
           <a:solidFill>
@@ -6490,8 +6492,8 @@
         </p:nvSpPr>
         <p:spPr>
           <a:xfrm>
-            <a:off x="7799832" y="1472184"/>
-            <a:ext cx="3145536" cy="256032"/>
+            <a:off x="7708392" y="1453896"/>
+            <a:ext cx="3282696" cy="228600"/>
           </a:xfrm>
           <a:prstGeom prst="rect">
             <a:avLst/>
@@ -6507,7 +6509,7 @@
               <a:buNone/>
             </a:pPr>
             <a:r>
-              <a:rPr lang="en-US" sz="1300" b="1" dirty="0">
+              <a:rPr lang="en-US" sz="1220" b="1" dirty="0">
                 <a:solidFill>
                   <a:srgbClr val="0068B7"/>
                 </a:solidFill>
@@ -6517,7 +6519,7 @@
               </a:rPr>
               <a:t>Implementation cue</a:t>
             </a:r>
-            <a:endParaRPr lang="en-US" sz="1300" dirty="0"/>
+            <a:endParaRPr lang="en-US" sz="1220" dirty="0"/>
           </a:p>
         </p:txBody>
       </p:sp>
@@ -6529,8 +6531,8 @@
         </p:nvSpPr>
         <p:spPr>
           <a:xfrm>
-            <a:off x="7799832" y="1801368"/>
-            <a:ext cx="3145536" cy="688543"/>
+            <a:off x="7708392" y="1764792"/>
+            <a:ext cx="3282696" cy="749808"/>
           </a:xfrm>
           <a:prstGeom prst="rect">
             <a:avLst/>
@@ -6548,7 +6550,7 @@
               <a:buNone/>
             </a:pPr>
             <a:r>
-              <a:rPr lang="en-US" sz="1320" dirty="0">
+              <a:rPr lang="en-US" sz="1220" dirty="0">
                 <a:solidFill>
                   <a:srgbClr val="17364A"/>
                 </a:solidFill>
@@ -6556,9 +6558,9 @@
                 <a:ea typeface="Aptos" pitchFamily="34" charset="-122"/>
                 <a:cs typeface="Aptos" pitchFamily="34" charset="-120"/>
               </a:rPr>
-              <a:t>Generative AI, predictive analytics, RAG, automation, and agentic workflows all depend on the controls.</a:t>
-            </a:r>
-            <a:endParaRPr lang="en-US" sz="1320" dirty="0"/>
+              <a:t>Generative AI, predictive analytics, RAG, automation, and agentic workflows all.</a:t>
+            </a:r>
+            <a:endParaRPr lang="en-US" sz="1220" dirty="0"/>
           </a:p>
         </p:txBody>
       </p:sp>
@@ -6570,12 +6572,12 @@
         </p:nvSpPr>
         <p:spPr>
           <a:xfrm>
-            <a:off x="7635240" y="2718511"/>
-            <a:ext cx="3474720" cy="1328623"/>
+            <a:off x="7543800" y="2724912"/>
+            <a:ext cx="3611880" cy="1527048"/>
           </a:xfrm>
           <a:prstGeom prst="roundRect">
             <a:avLst>
-              <a:gd name="adj" fmla="val 8259"/>
+              <a:gd name="adj" fmla="val 7186"/>
             </a:avLst>
           </a:prstGeom>
           <a:solidFill>
@@ -6597,24 +6599,26 @@
         </p:nvSpPr>
         <p:spPr>
           <a:xfrm>
-            <a:off x="7799832" y="2846527"/>
-            <a:ext cx="3145536" cy="237744"/>
-          </a:xfrm>
-          <a:prstGeom prst="rect">
-            <a:avLst/>
-          </a:prstGeom>
-          <a:noFill/>
-          <a:ln/>
-        </p:spPr>
-        <p:txBody>
-          <a:bodyPr wrap="square" lIns="0" tIns="0" rIns="0" bIns="0" rtlCol="0" anchor="ctr"/>
-          <a:lstStyle/>
-          <a:p>
-            <a:pPr indent="0" marL="0">
-              <a:buNone/>
-            </a:pPr>
-            <a:r>
-              <a:rPr lang="en-US" sz="1250" b="1" dirty="0">
+            <a:off x="7708392" y="2852928"/>
+            <a:ext cx="3282696" cy="219456"/>
+          </a:xfrm>
+          <a:prstGeom prst="rect">
+            <a:avLst/>
+          </a:prstGeom>
+          <a:noFill/>
+          <a:ln/>
+        </p:spPr>
+        <p:txBody>
+          <a:bodyPr wrap="square" lIns="0" tIns="0" rIns="0" bIns="0" rtlCol="0" anchor="ctr">
+            <a:normAutofit/>
+          </a:bodyPr>
+          <a:lstStyle/>
+          <a:p>
+            <a:pPr indent="0" marL="0">
+              <a:buNone/>
+            </a:pPr>
+            <a:r>
+              <a:rPr lang="en-US" sz="1160" b="1" dirty="0">
                 <a:solidFill>
                   <a:srgbClr val="0068B7"/>
                 </a:solidFill>
@@ -6624,7 +6628,7 @@
               </a:rPr>
               <a:t>Implementation path</a:t>
             </a:r>
-            <a:endParaRPr lang="en-US" sz="1250" dirty="0"/>
+            <a:endParaRPr lang="en-US" sz="1160" dirty="0"/>
           </a:p>
         </p:txBody>
       </p:sp>
@@ -6636,7 +6640,7 @@
         </p:nvSpPr>
         <p:spPr>
           <a:xfrm>
-            <a:off x="8763000" y="3399739"/>
+            <a:off x="8717280" y="3406140"/>
             <a:ext cx="164592" cy="0"/>
           </a:xfrm>
           <a:prstGeom prst="line">
@@ -6659,8 +6663,8 @@
         </p:nvSpPr>
         <p:spPr>
           <a:xfrm>
-            <a:off x="7872984" y="3248863"/>
-            <a:ext cx="890016" cy="301752"/>
+            <a:off x="7781544" y="3255264"/>
+            <a:ext cx="935736" cy="301752"/>
           </a:xfrm>
           <a:prstGeom prst="roundRect">
             <a:avLst>
@@ -6686,8 +6690,8 @@
         </p:nvSpPr>
         <p:spPr>
           <a:xfrm>
-            <a:off x="7909560" y="3322015"/>
-            <a:ext cx="816864" cy="146304"/>
+            <a:off x="7818120" y="3328416"/>
+            <a:ext cx="862584" cy="146304"/>
           </a:xfrm>
           <a:prstGeom prst="rect">
             <a:avLst/>
@@ -6727,7 +6731,7 @@
         </p:nvSpPr>
         <p:spPr>
           <a:xfrm>
-            <a:off x="9817608" y="3399739"/>
+            <a:off x="9817608" y="3406140"/>
             <a:ext cx="164592" cy="0"/>
           </a:xfrm>
           <a:prstGeom prst="line">
@@ -6750,8 +6754,8 @@
         </p:nvSpPr>
         <p:spPr>
           <a:xfrm>
-            <a:off x="8927592" y="3248863"/>
-            <a:ext cx="890016" cy="301752"/>
+            <a:off x="8881872" y="3255264"/>
+            <a:ext cx="935736" cy="301752"/>
           </a:xfrm>
           <a:prstGeom prst="roundRect">
             <a:avLst>
@@ -6777,8 +6781,8 @@
         </p:nvSpPr>
         <p:spPr>
           <a:xfrm>
-            <a:off x="8964168" y="3322015"/>
-            <a:ext cx="816864" cy="146304"/>
+            <a:off x="8918448" y="3328416"/>
+            <a:ext cx="862584" cy="146304"/>
           </a:xfrm>
           <a:prstGeom prst="rect">
             <a:avLst/>
@@ -6818,8 +6822,8 @@
         </p:nvSpPr>
         <p:spPr>
           <a:xfrm>
-            <a:off x="9982200" y="3248863"/>
-            <a:ext cx="890016" cy="301752"/>
+            <a:off x="9982200" y="3255264"/>
+            <a:ext cx="935736" cy="301752"/>
           </a:xfrm>
           <a:prstGeom prst="roundRect">
             <a:avLst>
@@ -6845,8 +6849,8 @@
         </p:nvSpPr>
         <p:spPr>
           <a:xfrm>
-            <a:off x="10018776" y="3322015"/>
-            <a:ext cx="816864" cy="146304"/>
+            <a:off x="10018776" y="3328416"/>
+            <a:ext cx="862584" cy="146304"/>
           </a:xfrm>
           <a:prstGeom prst="rect">
             <a:avLst/>
@@ -6886,8 +6890,8 @@
         </p:nvSpPr>
         <p:spPr>
           <a:xfrm>
-            <a:off x="7854696" y="3742639"/>
-            <a:ext cx="3035808" cy="158191"/>
+            <a:off x="7763256" y="3749040"/>
+            <a:ext cx="3172968" cy="356616"/>
           </a:xfrm>
           <a:prstGeom prst="rect">
             <a:avLst/>
@@ -6905,7 +6909,7 @@
               <a:buNone/>
             </a:pPr>
             <a:r>
-              <a:rPr lang="en-US" sz="1120" dirty="0">
+              <a:rPr lang="en-US" sz="1040" dirty="0">
                 <a:solidFill>
                   <a:srgbClr val="17364A"/>
                 </a:solidFill>
@@ -6913,9 +6917,9 @@
                 <a:ea typeface="Aptos" pitchFamily="34" charset="-122"/>
                 <a:cs typeface="Aptos" pitchFamily="34" charset="-120"/>
               </a:rPr>
-              <a:t>Implementation work should make dependencies, approvals, training, and sustainment visible before launch.</a:t>
-            </a:r>
-            <a:endParaRPr lang="en-US" sz="1120" dirty="0"/>
+              <a:t>Implementation work should make dependencies, approvals, training, and.</a:t>
+            </a:r>
+            <a:endParaRPr lang="en-US" sz="1040" dirty="0"/>
           </a:p>
         </p:txBody>
       </p:sp>
@@ -6927,12 +6931,12 @@
         </p:nvSpPr>
         <p:spPr>
           <a:xfrm>
-            <a:off x="7635240" y="4184294"/>
-            <a:ext cx="3474720" cy="1466698"/>
+            <a:off x="7543800" y="4389120"/>
+            <a:ext cx="3611880" cy="1261872"/>
           </a:xfrm>
           <a:prstGeom prst="roundRect">
             <a:avLst>
-              <a:gd name="adj" fmla="val 7481"/>
+              <a:gd name="adj" fmla="val 8696"/>
             </a:avLst>
           </a:prstGeom>
           <a:solidFill>
@@ -6954,8 +6958,8 @@
         </p:nvSpPr>
         <p:spPr>
           <a:xfrm>
-            <a:off x="7799832" y="4330598"/>
-            <a:ext cx="3145536" cy="256032"/>
+            <a:off x="7708392" y="4517136"/>
+            <a:ext cx="3282696" cy="228600"/>
           </a:xfrm>
           <a:prstGeom prst="rect">
             <a:avLst/>
@@ -6971,7 +6975,7 @@
               <a:buNone/>
             </a:pPr>
             <a:r>
-              <a:rPr lang="en-US" sz="1300" b="1" dirty="0">
+              <a:rPr lang="en-US" sz="1220" b="1" dirty="0">
                 <a:solidFill>
                   <a:srgbClr val="0068B7"/>
                 </a:solidFill>
@@ -6981,7 +6985,7 @@
               </a:rPr>
               <a:t>Next action</a:t>
             </a:r>
-            <a:endParaRPr lang="en-US" sz="1300" dirty="0"/>
+            <a:endParaRPr lang="en-US" sz="1220" dirty="0"/>
           </a:p>
         </p:txBody>
       </p:sp>
@@ -6993,8 +6997,8 @@
         </p:nvSpPr>
         <p:spPr>
           <a:xfrm>
-            <a:off x="7799832" y="4659782"/>
-            <a:ext cx="3145536" cy="899770"/>
+            <a:off x="7708392" y="4828032"/>
+            <a:ext cx="3282696" cy="749808"/>
           </a:xfrm>
           <a:prstGeom prst="rect">
             <a:avLst/>
@@ -7012,7 +7016,7 @@
               <a:buNone/>
             </a:pPr>
             <a:r>
-              <a:rPr lang="en-US" sz="1320" dirty="0">
+              <a:rPr lang="en-US" sz="1220" dirty="0">
                 <a:solidFill>
                   <a:srgbClr val="17364A"/>
                 </a:solidFill>
@@ -7020,9 +7024,9 @@
                 <a:ea typeface="Aptos" pitchFamily="34" charset="-122"/>
                 <a:cs typeface="Aptos" pitchFamily="34" charset="-120"/>
               </a:rPr>
-              <a:t>Use the concept to clarify workflow changes, dependencies, staffing, procurement requirements, training needs, and implementation checkpoints.</a:t>
-            </a:r>
-            <a:endParaRPr lang="en-US" sz="1320" dirty="0"/>
+              <a:t>Use the concept to clarify workflow changes, dependencies, staffing, procurement.</a:t>
+            </a:r>
+            <a:endParaRPr lang="en-US" sz="1220" dirty="0"/>
           </a:p>
         </p:txBody>
       </p:sp>
@@ -7313,8 +7317,8 @@
         </p:nvSpPr>
         <p:spPr>
           <a:xfrm>
-            <a:off x="868680" y="1508760"/>
-            <a:ext cx="6309360" cy="4160520"/>
+            <a:off x="822960" y="1463040"/>
+            <a:ext cx="6565392" cy="4343400"/>
           </a:xfrm>
           <a:prstGeom prst="rect">
             <a:avLst/>
@@ -7332,7 +7336,7 @@
               <a:buNone/>
             </a:pPr>
             <a:r>
-              <a:rPr lang="en-US" sz="2100" dirty="0">
+              <a:rPr lang="en-US" sz="1920" dirty="0">
                 <a:solidFill>
                   <a:srgbClr val="003A63"/>
                 </a:solidFill>
@@ -7340,16 +7344,16 @@
                 <a:ea typeface="Aptos" pitchFamily="34" charset="-122"/>
                 <a:cs typeface="Aptos" pitchFamily="34" charset="-120"/>
               </a:rPr>
-              <a:t>• Where does this topic appear in one current or proposed AI workflow in your agency?</a:t>
-            </a:r>
-            <a:endParaRPr lang="en-US" sz="2100" dirty="0"/>
-          </a:p>
-          <a:p>
-            <a:pPr indent="0" marL="0">
-              <a:buNone/>
-            </a:pPr>
-            <a:r>
-              <a:rPr lang="en-US" sz="2100" dirty="0">
+              <a:t>• Where does this topic appear in one current or proposed AI workflow in your.</a:t>
+            </a:r>
+            <a:endParaRPr lang="en-US" sz="1920" dirty="0"/>
+          </a:p>
+          <a:p>
+            <a:pPr indent="0" marL="0">
+              <a:buNone/>
+            </a:pPr>
+            <a:r>
+              <a:rPr lang="en-US" sz="1920" dirty="0">
                 <a:solidFill>
                   <a:srgbClr val="003A63"/>
                 </a:solidFill>
@@ -7357,16 +7361,16 @@
                 <a:ea typeface="Aptos" pitchFamily="34" charset="-122"/>
                 <a:cs typeface="Aptos" pitchFamily="34" charset="-120"/>
               </a:rPr>
-              <a:t>• What decisions, data sources, users, or partners would be affected if this area is poorly.</a:t>
-            </a:r>
-            <a:endParaRPr lang="en-US" sz="2100" dirty="0"/>
-          </a:p>
-          <a:p>
-            <a:pPr indent="0" marL="0">
-              <a:buNone/>
-            </a:pPr>
-            <a:r>
-              <a:rPr lang="en-US" sz="2100" dirty="0">
+              <a:t>• What decisions, data sources, users, or partners would be affected if this.</a:t>
+            </a:r>
+            <a:endParaRPr lang="en-US" sz="1920" dirty="0"/>
+          </a:p>
+          <a:p>
+            <a:pPr indent="0" marL="0">
+              <a:buNone/>
+            </a:pPr>
+            <a:r>
+              <a:rPr lang="en-US" sz="1920" dirty="0">
                 <a:solidFill>
                   <a:srgbClr val="003A63"/>
                 </a:solidFill>
@@ -7376,7 +7380,7 @@
               </a:rPr>
               <a:t>• What evidence would governance reviewers need before approving the workflow?</a:t>
             </a:r>
-            <a:endParaRPr lang="en-US" sz="2100" dirty="0"/>
+            <a:endParaRPr lang="en-US" sz="1920" dirty="0"/>
           </a:p>
         </p:txBody>
       </p:sp>
@@ -7388,12 +7392,12 @@
         </p:nvSpPr>
         <p:spPr>
           <a:xfrm>
-            <a:off x="7635240" y="1325880"/>
-            <a:ext cx="3474720" cy="1207008"/>
+            <a:off x="7543800" y="1325880"/>
+            <a:ext cx="3611880" cy="1261872"/>
           </a:xfrm>
           <a:prstGeom prst="roundRect">
             <a:avLst>
-              <a:gd name="adj" fmla="val 9091"/>
+              <a:gd name="adj" fmla="val 8696"/>
             </a:avLst>
           </a:prstGeom>
           <a:solidFill>
@@ -7415,8 +7419,8 @@
         </p:nvSpPr>
         <p:spPr>
           <a:xfrm>
-            <a:off x="7799832" y="1472184"/>
-            <a:ext cx="3145536" cy="256032"/>
+            <a:off x="7708392" y="1453896"/>
+            <a:ext cx="3282696" cy="228600"/>
           </a:xfrm>
           <a:prstGeom prst="rect">
             <a:avLst/>
@@ -7432,7 +7436,7 @@
               <a:buNone/>
             </a:pPr>
             <a:r>
-              <a:rPr lang="en-US" sz="1300" b="1" dirty="0">
+              <a:rPr lang="en-US" sz="1220" b="1" dirty="0">
                 <a:solidFill>
                   <a:srgbClr val="0068B7"/>
                 </a:solidFill>
@@ -7442,7 +7446,7 @@
               </a:rPr>
               <a:t>Core concept</a:t>
             </a:r>
-            <a:endParaRPr lang="en-US" sz="1300" dirty="0"/>
+            <a:endParaRPr lang="en-US" sz="1220" dirty="0"/>
           </a:p>
         </p:txBody>
       </p:sp>
@@ -7454,8 +7458,8 @@
         </p:nvSpPr>
         <p:spPr>
           <a:xfrm>
-            <a:off x="7799832" y="1801368"/>
-            <a:ext cx="3145536" cy="640080"/>
+            <a:off x="7708392" y="1764792"/>
+            <a:ext cx="3282696" cy="749808"/>
           </a:xfrm>
           <a:prstGeom prst="rect">
             <a:avLst/>
@@ -7473,7 +7477,7 @@
               <a:buNone/>
             </a:pPr>
             <a:r>
-              <a:rPr lang="en-US" sz="1320" dirty="0">
+              <a:rPr lang="en-US" sz="1220" dirty="0">
                 <a:solidFill>
                   <a:srgbClr val="17364A"/>
                 </a:solidFill>
@@ -7481,9 +7485,9 @@
                 <a:ea typeface="Aptos" pitchFamily="34" charset="-122"/>
                 <a:cs typeface="Aptos" pitchFamily="34" charset="-120"/>
               </a:rPr>
-              <a:t>Where does this topic appear in one current or proposed AI workflow in your agency?</a:t>
-            </a:r>
-            <a:endParaRPr lang="en-US" sz="1320" dirty="0"/>
+              <a:t>Where does this topic appear in one current or proposed AI workflow in your.</a:t>
+            </a:r>
+            <a:endParaRPr lang="en-US" sz="1220" dirty="0"/>
           </a:p>
         </p:txBody>
       </p:sp>
@@ -7495,12 +7499,12 @@
         </p:nvSpPr>
         <p:spPr>
           <a:xfrm>
-            <a:off x="7635240" y="2670048"/>
-            <a:ext cx="3474720" cy="1377086"/>
+            <a:off x="7543800" y="2724912"/>
+            <a:ext cx="3611880" cy="1527048"/>
           </a:xfrm>
           <a:prstGeom prst="roundRect">
             <a:avLst>
-              <a:gd name="adj" fmla="val 7968"/>
+              <a:gd name="adj" fmla="val 7186"/>
             </a:avLst>
           </a:prstGeom>
           <a:solidFill>
@@ -7522,8 +7526,8 @@
         </p:nvSpPr>
         <p:spPr>
           <a:xfrm>
-            <a:off x="7799832" y="2816352"/>
-            <a:ext cx="3145536" cy="256032"/>
+            <a:off x="7708392" y="2852928"/>
+            <a:ext cx="3282696" cy="228600"/>
           </a:xfrm>
           <a:prstGeom prst="rect">
             <a:avLst/>
@@ -7539,7 +7543,7 @@
               <a:buNone/>
             </a:pPr>
             <a:r>
-              <a:rPr lang="en-US" sz="1300" b="1" dirty="0">
+              <a:rPr lang="en-US" sz="1220" b="1" dirty="0">
                 <a:solidFill>
                   <a:srgbClr val="0068B7"/>
                 </a:solidFill>
@@ -7549,7 +7553,7 @@
               </a:rPr>
               <a:t>Concept checkpoints</a:t>
             </a:r>
-            <a:endParaRPr lang="en-US" sz="1300" dirty="0"/>
+            <a:endParaRPr lang="en-US" sz="1220" dirty="0"/>
           </a:p>
         </p:txBody>
       </p:sp>
@@ -7561,8 +7565,8 @@
         </p:nvSpPr>
         <p:spPr>
           <a:xfrm>
-            <a:off x="7818120" y="3182112"/>
-            <a:ext cx="3090672" cy="718718"/>
+            <a:off x="7726680" y="3182112"/>
+            <a:ext cx="3227832" cy="960120"/>
           </a:xfrm>
           <a:prstGeom prst="rect">
             <a:avLst/>
@@ -7580,7 +7584,7 @@
               <a:buNone/>
             </a:pPr>
             <a:r>
-              <a:rPr lang="en-US" sz="1220" dirty="0">
+              <a:rPr lang="en-US" sz="1140" dirty="0">
                 <a:solidFill>
                   <a:srgbClr val="17364A"/>
                 </a:solidFill>
@@ -7588,16 +7592,16 @@
                 <a:ea typeface="Aptos" pitchFamily="34" charset="-122"/>
                 <a:cs typeface="Aptos" pitchFamily="34" charset="-120"/>
               </a:rPr>
-              <a:t>Where does this topic appear in one current or proposed AI.</a:t>
-            </a:r>
-            <a:endParaRPr lang="en-US" sz="1220" dirty="0"/>
-          </a:p>
-          <a:p>
-            <a:pPr indent="0" marL="0">
-              <a:buNone/>
-            </a:pPr>
-            <a:r>
-              <a:rPr lang="en-US" sz="1220" dirty="0">
+              <a:t>Where does this topic appear in one current or.</a:t>
+            </a:r>
+            <a:endParaRPr lang="en-US" sz="1140" dirty="0"/>
+          </a:p>
+          <a:p>
+            <a:pPr indent="0" marL="0">
+              <a:buNone/>
+            </a:pPr>
+            <a:r>
+              <a:rPr lang="en-US" sz="1140" dirty="0">
                 <a:solidFill>
                   <a:srgbClr val="17364A"/>
                 </a:solidFill>
@@ -7605,16 +7609,16 @@
                 <a:ea typeface="Aptos" pitchFamily="34" charset="-122"/>
                 <a:cs typeface="Aptos" pitchFamily="34" charset="-120"/>
               </a:rPr>
-              <a:t>What decisions, data sources, users, or partners would be affected.</a:t>
-            </a:r>
-            <a:endParaRPr lang="en-US" sz="1220" dirty="0"/>
-          </a:p>
-          <a:p>
-            <a:pPr indent="0" marL="0">
-              <a:buNone/>
-            </a:pPr>
-            <a:r>
-              <a:rPr lang="en-US" sz="1220" dirty="0">
+              <a:t>What decisions, data sources, users, or partners.</a:t>
+            </a:r>
+            <a:endParaRPr lang="en-US" sz="1140" dirty="0"/>
+          </a:p>
+          <a:p>
+            <a:pPr indent="0" marL="0">
+              <a:buNone/>
+            </a:pPr>
+            <a:r>
+              <a:rPr lang="en-US" sz="1140" dirty="0">
                 <a:solidFill>
                   <a:srgbClr val="17364A"/>
                 </a:solidFill>
@@ -7622,9 +7626,9 @@
                 <a:ea typeface="Aptos" pitchFamily="34" charset="-122"/>
                 <a:cs typeface="Aptos" pitchFamily="34" charset="-120"/>
               </a:rPr>
-              <a:t>What evidence would governance reviewers need before approving the.</a:t>
-            </a:r>
-            <a:endParaRPr lang="en-US" sz="1220" dirty="0"/>
+              <a:t>What evidence would governance reviewers need.</a:t>
+            </a:r>
+            <a:endParaRPr lang="en-US" sz="1140" dirty="0"/>
           </a:p>
         </p:txBody>
       </p:sp>
@@ -7636,12 +7640,12 @@
         </p:nvSpPr>
         <p:spPr>
           <a:xfrm>
-            <a:off x="7635240" y="4184294"/>
-            <a:ext cx="3474720" cy="1466698"/>
+            <a:off x="7543800" y="4389120"/>
+            <a:ext cx="3611880" cy="1261872"/>
           </a:xfrm>
           <a:prstGeom prst="roundRect">
             <a:avLst>
-              <a:gd name="adj" fmla="val 7481"/>
+              <a:gd name="adj" fmla="val 8696"/>
             </a:avLst>
           </a:prstGeom>
           <a:solidFill>
@@ -7663,8 +7667,8 @@
         </p:nvSpPr>
         <p:spPr>
           <a:xfrm>
-            <a:off x="7799832" y="4330598"/>
-            <a:ext cx="3145536" cy="256032"/>
+            <a:off x="7708392" y="4517136"/>
+            <a:ext cx="3282696" cy="228600"/>
           </a:xfrm>
           <a:prstGeom prst="rect">
             <a:avLst/>
@@ -7680,7 +7684,7 @@
               <a:buNone/>
             </a:pPr>
             <a:r>
-              <a:rPr lang="en-US" sz="1300" b="1" dirty="0">
+              <a:rPr lang="en-US" sz="1220" b="1" dirty="0">
                 <a:solidFill>
                   <a:srgbClr val="0068B7"/>
                 </a:solidFill>
@@ -7690,7 +7694,7 @@
               </a:rPr>
               <a:t>Apply it</a:t>
             </a:r>
-            <a:endParaRPr lang="en-US" sz="1300" dirty="0"/>
+            <a:endParaRPr lang="en-US" sz="1220" dirty="0"/>
           </a:p>
         </p:txBody>
       </p:sp>
@@ -7702,8 +7706,8 @@
         </p:nvSpPr>
         <p:spPr>
           <a:xfrm>
-            <a:off x="7799832" y="4659782"/>
-            <a:ext cx="3145536" cy="899770"/>
+            <a:off x="7708392" y="4828032"/>
+            <a:ext cx="3282696" cy="749808"/>
           </a:xfrm>
           <a:prstGeom prst="rect">
             <a:avLst/>
@@ -7721,7 +7725,7 @@
               <a:buNone/>
             </a:pPr>
             <a:r>
-              <a:rPr lang="en-US" sz="1320" dirty="0">
+              <a:rPr lang="en-US" sz="1220" dirty="0">
                 <a:solidFill>
                   <a:srgbClr val="17364A"/>
                 </a:solidFill>
@@ -7729,9 +7733,9 @@
                 <a:ea typeface="Aptos" pitchFamily="34" charset="-122"/>
                 <a:cs typeface="Aptos" pitchFamily="34" charset="-120"/>
               </a:rPr>
-              <a:t>Connect the concept to public health purpose, responsible use, required safeguards, documentation, and the next action a department should take.</a:t>
-            </a:r>
-            <a:endParaRPr lang="en-US" sz="1320" dirty="0"/>
+              <a:t>Connect the concept to public health purpose, responsible use, required.</a:t>
+            </a:r>
+            <a:endParaRPr lang="en-US" sz="1220" dirty="0"/>
           </a:p>
         </p:txBody>
       </p:sp>
@@ -8022,8 +8026,8 @@
         </p:nvSpPr>
         <p:spPr>
           <a:xfrm>
-            <a:off x="868680" y="1508760"/>
-            <a:ext cx="6309360" cy="4160520"/>
+            <a:off x="822960" y="1463040"/>
+            <a:ext cx="6565392" cy="4343400"/>
           </a:xfrm>
           <a:prstGeom prst="rect">
             <a:avLst/>
@@ -8041,7 +8045,7 @@
               <a:buNone/>
             </a:pPr>
             <a:r>
-              <a:rPr lang="en-US" sz="2100" dirty="0">
+              <a:rPr lang="en-US" sz="1920" dirty="0">
                 <a:solidFill>
                   <a:srgbClr val="003A63"/>
                 </a:solidFill>
@@ -8051,14 +8055,14 @@
               </a:rPr>
               <a:t>• Which safeguards should be required before pilot testing?</a:t>
             </a:r>
-            <a:endParaRPr lang="en-US" sz="2100" dirty="0"/>
-          </a:p>
-          <a:p>
-            <a:pPr indent="0" marL="0">
-              <a:buNone/>
-            </a:pPr>
-            <a:r>
-              <a:rPr lang="en-US" sz="2100" dirty="0">
+            <a:endParaRPr lang="en-US" sz="1920" dirty="0"/>
+          </a:p>
+          <a:p>
+            <a:pPr indent="0" marL="0">
+              <a:buNone/>
+            </a:pPr>
+            <a:r>
+              <a:rPr lang="en-US" sz="1920" dirty="0">
                 <a:solidFill>
                   <a:srgbClr val="003A63"/>
                 </a:solidFill>
@@ -8068,7 +8072,7 @@
               </a:rPr>
               <a:t>• Who owns ongoing monitoring and review?</a:t>
             </a:r>
-            <a:endParaRPr lang="en-US" sz="2100" dirty="0"/>
+            <a:endParaRPr lang="en-US" sz="1920" dirty="0"/>
           </a:p>
         </p:txBody>
       </p:sp>
@@ -8080,12 +8084,12 @@
         </p:nvSpPr>
         <p:spPr>
           <a:xfrm>
-            <a:off x="7635240" y="1325880"/>
-            <a:ext cx="3474720" cy="1207008"/>
+            <a:off x="7543800" y="1325880"/>
+            <a:ext cx="3611880" cy="1261872"/>
           </a:xfrm>
           <a:prstGeom prst="roundRect">
             <a:avLst>
-              <a:gd name="adj" fmla="val 9091"/>
+              <a:gd name="adj" fmla="val 8696"/>
             </a:avLst>
           </a:prstGeom>
           <a:solidFill>
@@ -8107,8 +8111,8 @@
         </p:nvSpPr>
         <p:spPr>
           <a:xfrm>
-            <a:off x="7799832" y="1472184"/>
-            <a:ext cx="3145536" cy="256032"/>
+            <a:off x="7708392" y="1453896"/>
+            <a:ext cx="3282696" cy="228600"/>
           </a:xfrm>
           <a:prstGeom prst="rect">
             <a:avLst/>
@@ -8124,7 +8128,7 @@
               <a:buNone/>
             </a:pPr>
             <a:r>
-              <a:rPr lang="en-US" sz="1300" b="1" dirty="0">
+              <a:rPr lang="en-US" sz="1220" b="1" dirty="0">
                 <a:solidFill>
                   <a:srgbClr val="0068B7"/>
                 </a:solidFill>
@@ -8134,7 +8138,7 @@
               </a:rPr>
               <a:t>Core concept</a:t>
             </a:r>
-            <a:endParaRPr lang="en-US" sz="1300" dirty="0"/>
+            <a:endParaRPr lang="en-US" sz="1220" dirty="0"/>
           </a:p>
         </p:txBody>
       </p:sp>
@@ -8146,8 +8150,8 @@
         </p:nvSpPr>
         <p:spPr>
           <a:xfrm>
-            <a:off x="7799832" y="1801368"/>
-            <a:ext cx="3145536" cy="640080"/>
+            <a:off x="7708392" y="1764792"/>
+            <a:ext cx="3282696" cy="749808"/>
           </a:xfrm>
           <a:prstGeom prst="rect">
             <a:avLst/>
@@ -8165,7 +8169,7 @@
               <a:buNone/>
             </a:pPr>
             <a:r>
-              <a:rPr lang="en-US" sz="1320" dirty="0">
+              <a:rPr lang="en-US" sz="1220" dirty="0">
                 <a:solidFill>
                   <a:srgbClr val="17364A"/>
                 </a:solidFill>
@@ -8175,7 +8179,7 @@
               </a:rPr>
               <a:t>Which safeguards should be required before pilot testing?</a:t>
             </a:r>
-            <a:endParaRPr lang="en-US" sz="1320" dirty="0"/>
+            <a:endParaRPr lang="en-US" sz="1220" dirty="0"/>
           </a:p>
         </p:txBody>
       </p:sp>
@@ -8187,12 +8191,12 @@
         </p:nvSpPr>
         <p:spPr>
           <a:xfrm>
-            <a:off x="7635240" y="2670048"/>
-            <a:ext cx="3474720" cy="1377086"/>
+            <a:off x="7543800" y="2724912"/>
+            <a:ext cx="3611880" cy="1527048"/>
           </a:xfrm>
           <a:prstGeom prst="roundRect">
             <a:avLst>
-              <a:gd name="adj" fmla="val 7968"/>
+              <a:gd name="adj" fmla="val 7186"/>
             </a:avLst>
           </a:prstGeom>
           <a:solidFill>
@@ -8214,8 +8218,8 @@
         </p:nvSpPr>
         <p:spPr>
           <a:xfrm>
-            <a:off x="7799832" y="2816352"/>
-            <a:ext cx="3145536" cy="256032"/>
+            <a:off x="7708392" y="2852928"/>
+            <a:ext cx="3282696" cy="228600"/>
           </a:xfrm>
           <a:prstGeom prst="rect">
             <a:avLst/>
@@ -8231,7 +8235,7 @@
               <a:buNone/>
             </a:pPr>
             <a:r>
-              <a:rPr lang="en-US" sz="1300" b="1" dirty="0">
+              <a:rPr lang="en-US" sz="1220" b="1" dirty="0">
                 <a:solidFill>
                   <a:srgbClr val="0068B7"/>
                 </a:solidFill>
@@ -8241,7 +8245,7 @@
               </a:rPr>
               <a:t>Concept checkpoints</a:t>
             </a:r>
-            <a:endParaRPr lang="en-US" sz="1300" dirty="0"/>
+            <a:endParaRPr lang="en-US" sz="1220" dirty="0"/>
           </a:p>
         </p:txBody>
       </p:sp>
@@ -8253,8 +8257,8 @@
         </p:nvSpPr>
         <p:spPr>
           <a:xfrm>
-            <a:off x="7818120" y="3182112"/>
-            <a:ext cx="3090672" cy="718718"/>
+            <a:off x="7726680" y="3182112"/>
+            <a:ext cx="3227832" cy="960120"/>
           </a:xfrm>
           <a:prstGeom prst="rect">
             <a:avLst/>
@@ -8272,7 +8276,7 @@
               <a:buNone/>
             </a:pPr>
             <a:r>
-              <a:rPr lang="en-US" sz="1220" dirty="0">
+              <a:rPr lang="en-US" sz="1140" dirty="0">
                 <a:solidFill>
                   <a:srgbClr val="17364A"/>
                 </a:solidFill>
@@ -8280,16 +8284,16 @@
                 <a:ea typeface="Aptos" pitchFamily="34" charset="-122"/>
                 <a:cs typeface="Aptos" pitchFamily="34" charset="-120"/>
               </a:rPr>
-              <a:t>Which safeguards should be required before pilot testing?</a:t>
-            </a:r>
-            <a:endParaRPr lang="en-US" sz="1220" dirty="0"/>
-          </a:p>
-          <a:p>
-            <a:pPr indent="0" marL="0">
-              <a:buNone/>
-            </a:pPr>
-            <a:r>
-              <a:rPr lang="en-US" sz="1220" dirty="0">
+              <a:t>Which safeguards should be required before pilot.</a:t>
+            </a:r>
+            <a:endParaRPr lang="en-US" sz="1140" dirty="0"/>
+          </a:p>
+          <a:p>
+            <a:pPr indent="0" marL="0">
+              <a:buNone/>
+            </a:pPr>
+            <a:r>
+              <a:rPr lang="en-US" sz="1140" dirty="0">
                 <a:solidFill>
                   <a:srgbClr val="17364A"/>
                 </a:solidFill>
@@ -8299,7 +8303,7 @@
               </a:rPr>
               <a:t>Who owns ongoing monitoring and review?</a:t>
             </a:r>
-            <a:endParaRPr lang="en-US" sz="1220" dirty="0"/>
+            <a:endParaRPr lang="en-US" sz="1140" dirty="0"/>
           </a:p>
         </p:txBody>
       </p:sp>
@@ -8311,12 +8315,12 @@
         </p:nvSpPr>
         <p:spPr>
           <a:xfrm>
-            <a:off x="7635240" y="4184294"/>
-            <a:ext cx="3474720" cy="1466698"/>
+            <a:off x="7543800" y="4389120"/>
+            <a:ext cx="3611880" cy="1261872"/>
           </a:xfrm>
           <a:prstGeom prst="roundRect">
             <a:avLst>
-              <a:gd name="adj" fmla="val 7481"/>
+              <a:gd name="adj" fmla="val 8696"/>
             </a:avLst>
           </a:prstGeom>
           <a:solidFill>
@@ -8338,8 +8342,8 @@
         </p:nvSpPr>
         <p:spPr>
           <a:xfrm>
-            <a:off x="7799832" y="4330598"/>
-            <a:ext cx="3145536" cy="256032"/>
+            <a:off x="7708392" y="4517136"/>
+            <a:ext cx="3282696" cy="228600"/>
           </a:xfrm>
           <a:prstGeom prst="rect">
             <a:avLst/>
@@ -8355,7 +8359,7 @@
               <a:buNone/>
             </a:pPr>
             <a:r>
-              <a:rPr lang="en-US" sz="1300" b="1" dirty="0">
+              <a:rPr lang="en-US" sz="1220" b="1" dirty="0">
                 <a:solidFill>
                   <a:srgbClr val="0068B7"/>
                 </a:solidFill>
@@ -8365,7 +8369,7 @@
               </a:rPr>
               <a:t>Apply it</a:t>
             </a:r>
-            <a:endParaRPr lang="en-US" sz="1300" dirty="0"/>
+            <a:endParaRPr lang="en-US" sz="1220" dirty="0"/>
           </a:p>
         </p:txBody>
       </p:sp>
@@ -8377,8 +8381,8 @@
         </p:nvSpPr>
         <p:spPr>
           <a:xfrm>
-            <a:off x="7799832" y="4659782"/>
-            <a:ext cx="3145536" cy="899770"/>
+            <a:off x="7708392" y="4828032"/>
+            <a:ext cx="3282696" cy="749808"/>
           </a:xfrm>
           <a:prstGeom prst="rect">
             <a:avLst/>
@@ -8396,7 +8400,7 @@
               <a:buNone/>
             </a:pPr>
             <a:r>
-              <a:rPr lang="en-US" sz="1320" dirty="0">
+              <a:rPr lang="en-US" sz="1220" dirty="0">
                 <a:solidFill>
                   <a:srgbClr val="17364A"/>
                 </a:solidFill>
@@ -8404,9 +8408,9 @@
                 <a:ea typeface="Aptos" pitchFamily="34" charset="-122"/>
                 <a:cs typeface="Aptos" pitchFamily="34" charset="-120"/>
               </a:rPr>
-              <a:t>Connect the concept to public health purpose, responsible use, required safeguards, documentation, and the next action a department should take.</a:t>
-            </a:r>
-            <a:endParaRPr lang="en-US" sz="1320" dirty="0"/>
+              <a:t>Connect the concept to public health purpose, responsible use, required.</a:t>
+            </a:r>
+            <a:endParaRPr lang="en-US" sz="1220" dirty="0"/>
           </a:p>
         </p:txBody>
       </p:sp>
@@ -8697,8 +8701,8 @@
         </p:nvSpPr>
         <p:spPr>
           <a:xfrm>
-            <a:off x="868680" y="1508760"/>
-            <a:ext cx="6309360" cy="4160520"/>
+            <a:off x="822960" y="1463040"/>
+            <a:ext cx="6565392" cy="4343400"/>
           </a:xfrm>
           <a:prstGeom prst="rect">
             <a:avLst/>
@@ -8716,7 +8720,7 @@
               <a:buNone/>
             </a:pPr>
             <a:r>
-              <a:rPr lang="en-US" sz="2100" dirty="0">
+              <a:rPr lang="en-US" sz="1920" dirty="0">
                 <a:solidFill>
                   <a:srgbClr val="003A63"/>
                 </a:solidFill>
@@ -8724,16 +8728,16 @@
                 <a:ea typeface="Aptos" pitchFamily="34" charset="-122"/>
                 <a:cs typeface="Aptos" pitchFamily="34" charset="-120"/>
               </a:rPr>
-              <a:t>• Create a secure deployment readiness worksheet for one real or realistic public health AI.</a:t>
-            </a:r>
-            <a:endParaRPr lang="en-US" sz="2100" dirty="0"/>
-          </a:p>
-          <a:p>
-            <a:pPr indent="0" marL="0">
-              <a:buNone/>
-            </a:pPr>
-            <a:r>
-              <a:rPr lang="en-US" sz="2100" dirty="0">
+              <a:t>• Create a secure deployment readiness worksheet for one real or realistic.</a:t>
+            </a:r>
+            <a:endParaRPr lang="en-US" sz="1920" dirty="0"/>
+          </a:p>
+          <a:p>
+            <a:pPr indent="0" marL="0">
+              <a:buNone/>
+            </a:pPr>
+            <a:r>
+              <a:rPr lang="en-US" sz="1920" dirty="0">
                 <a:solidFill>
                   <a:srgbClr val="003A63"/>
                 </a:solidFill>
@@ -8741,16 +8745,16 @@
                 <a:ea typeface="Aptos" pitchFamily="34" charset="-122"/>
                 <a:cs typeface="Aptos" pitchFamily="34" charset="-120"/>
               </a:rPr>
-              <a:t>• The artifact should describe the use case, affected users, data sources, system dependencies,.</a:t>
-            </a:r>
-            <a:endParaRPr lang="en-US" sz="2100" dirty="0"/>
-          </a:p>
-          <a:p>
-            <a:pPr indent="0" marL="0">
-              <a:buNone/>
-            </a:pPr>
-            <a:r>
-              <a:rPr lang="en-US" sz="2100" dirty="0">
+              <a:t>• The artifact should describe the use case, affected users, data sources,.</a:t>
+            </a:r>
+            <a:endParaRPr lang="en-US" sz="1920" dirty="0"/>
+          </a:p>
+          <a:p>
+            <a:pPr indent="0" marL="0">
+              <a:buNone/>
+            </a:pPr>
+            <a:r>
+              <a:rPr lang="en-US" sz="1920" dirty="0">
                 <a:solidFill>
                   <a:srgbClr val="003A63"/>
                 </a:solidFill>
@@ -8758,9 +8762,9 @@
                 <a:ea typeface="Aptos" pitchFamily="34" charset="-122"/>
                 <a:cs typeface="Aptos" pitchFamily="34" charset="-120"/>
               </a:rPr>
-              <a:t>• The exercise should produce a work product that could be used in a governance meeting,.</a:t>
-            </a:r>
-            <a:endParaRPr lang="en-US" sz="2100" dirty="0"/>
+              <a:t>• The exercise should produce a work product that could be used in a.</a:t>
+            </a:r>
+            <a:endParaRPr lang="en-US" sz="1920" dirty="0"/>
           </a:p>
         </p:txBody>
       </p:sp>
@@ -8772,12 +8776,12 @@
         </p:nvSpPr>
         <p:spPr>
           <a:xfrm>
-            <a:off x="7635240" y="1325880"/>
-            <a:ext cx="3474720" cy="1255471"/>
+            <a:off x="7543800" y="1325880"/>
+            <a:ext cx="3611880" cy="1261872"/>
           </a:xfrm>
           <a:prstGeom prst="roundRect">
             <a:avLst>
-              <a:gd name="adj" fmla="val 8740"/>
+              <a:gd name="adj" fmla="val 8696"/>
             </a:avLst>
           </a:prstGeom>
           <a:solidFill>
@@ -8799,8 +8803,8 @@
         </p:nvSpPr>
         <p:spPr>
           <a:xfrm>
-            <a:off x="7799832" y="1472184"/>
-            <a:ext cx="3145536" cy="256032"/>
+            <a:off x="7708392" y="1453896"/>
+            <a:ext cx="3282696" cy="228600"/>
           </a:xfrm>
           <a:prstGeom prst="rect">
             <a:avLst/>
@@ -8816,7 +8820,7 @@
               <a:buNone/>
             </a:pPr>
             <a:r>
-              <a:rPr lang="en-US" sz="1300" b="1" dirty="0">
+              <a:rPr lang="en-US" sz="1220" b="1" dirty="0">
                 <a:solidFill>
                   <a:srgbClr val="0068B7"/>
                 </a:solidFill>
@@ -8826,7 +8830,7 @@
               </a:rPr>
               <a:t>Practice focus</a:t>
             </a:r>
-            <a:endParaRPr lang="en-US" sz="1300" dirty="0"/>
+            <a:endParaRPr lang="en-US" sz="1220" dirty="0"/>
           </a:p>
         </p:txBody>
       </p:sp>
@@ -8838,8 +8842,8 @@
         </p:nvSpPr>
         <p:spPr>
           <a:xfrm>
-            <a:off x="7799832" y="1801368"/>
-            <a:ext cx="3145536" cy="688543"/>
+            <a:off x="7708392" y="1764792"/>
+            <a:ext cx="3282696" cy="749808"/>
           </a:xfrm>
           <a:prstGeom prst="rect">
             <a:avLst/>
@@ -8857,7 +8861,7 @@
               <a:buNone/>
             </a:pPr>
             <a:r>
-              <a:rPr lang="en-US" sz="1320" dirty="0">
+              <a:rPr lang="en-US" sz="1220" dirty="0">
                 <a:solidFill>
                   <a:srgbClr val="17364A"/>
                 </a:solidFill>
@@ -8865,9 +8869,9 @@
                 <a:ea typeface="Aptos" pitchFamily="34" charset="-122"/>
                 <a:cs typeface="Aptos" pitchFamily="34" charset="-120"/>
               </a:rPr>
-              <a:t>Create a secure deployment readiness worksheet for one real or realistic public health AI workflow.</a:t>
-            </a:r>
-            <a:endParaRPr lang="en-US" sz="1320" dirty="0"/>
+              <a:t>Create a secure deployment readiness worksheet for one real or realistic public.</a:t>
+            </a:r>
+            <a:endParaRPr lang="en-US" sz="1220" dirty="0"/>
           </a:p>
         </p:txBody>
       </p:sp>
@@ -8879,12 +8883,12 @@
         </p:nvSpPr>
         <p:spPr>
           <a:xfrm>
-            <a:off x="7635240" y="2718511"/>
-            <a:ext cx="3474720" cy="1328623"/>
+            <a:off x="7543800" y="2724912"/>
+            <a:ext cx="3611880" cy="1527048"/>
           </a:xfrm>
           <a:prstGeom prst="roundRect">
             <a:avLst>
-              <a:gd name="adj" fmla="val 8259"/>
+              <a:gd name="adj" fmla="val 7186"/>
             </a:avLst>
           </a:prstGeom>
           <a:solidFill>
@@ -8906,8 +8910,8 @@
         </p:nvSpPr>
         <p:spPr>
           <a:xfrm>
-            <a:off x="7799832" y="2864815"/>
-            <a:ext cx="3145536" cy="256032"/>
+            <a:off x="7708392" y="2852928"/>
+            <a:ext cx="3282696" cy="228600"/>
           </a:xfrm>
           <a:prstGeom prst="rect">
             <a:avLst/>
@@ -8923,7 +8927,7 @@
               <a:buNone/>
             </a:pPr>
             <a:r>
-              <a:rPr lang="en-US" sz="1300" b="1" dirty="0">
+              <a:rPr lang="en-US" sz="1220" b="1" dirty="0">
                 <a:solidFill>
                   <a:srgbClr val="0068B7"/>
                 </a:solidFill>
@@ -8933,7 +8937,7 @@
               </a:rPr>
               <a:t>Concept checkpoints</a:t>
             </a:r>
-            <a:endParaRPr lang="en-US" sz="1300" dirty="0"/>
+            <a:endParaRPr lang="en-US" sz="1220" dirty="0"/>
           </a:p>
         </p:txBody>
       </p:sp>
@@ -8945,8 +8949,8 @@
         </p:nvSpPr>
         <p:spPr>
           <a:xfrm>
-            <a:off x="7818120" y="3230575"/>
-            <a:ext cx="3090672" cy="670255"/>
+            <a:off x="7726680" y="3182112"/>
+            <a:ext cx="3227832" cy="960120"/>
           </a:xfrm>
           <a:prstGeom prst="rect">
             <a:avLst/>
@@ -8964,7 +8968,7 @@
               <a:buNone/>
             </a:pPr>
             <a:r>
-              <a:rPr lang="en-US" sz="1220" dirty="0">
+              <a:rPr lang="en-US" sz="1140" dirty="0">
                 <a:solidFill>
                   <a:srgbClr val="17364A"/>
                 </a:solidFill>
@@ -8972,16 +8976,16 @@
                 <a:ea typeface="Aptos" pitchFamily="34" charset="-122"/>
                 <a:cs typeface="Aptos" pitchFamily="34" charset="-120"/>
               </a:rPr>
-              <a:t>The artifact should describe the use case, affected users, data.</a:t>
-            </a:r>
-            <a:endParaRPr lang="en-US" sz="1220" dirty="0"/>
-          </a:p>
-          <a:p>
-            <a:pPr indent="0" marL="0">
-              <a:buNone/>
-            </a:pPr>
-            <a:r>
-              <a:rPr lang="en-US" sz="1220" dirty="0">
+              <a:t>The artifact should describe the use case,.</a:t>
+            </a:r>
+            <a:endParaRPr lang="en-US" sz="1140" dirty="0"/>
+          </a:p>
+          <a:p>
+            <a:pPr indent="0" marL="0">
+              <a:buNone/>
+            </a:pPr>
+            <a:r>
+              <a:rPr lang="en-US" sz="1140" dirty="0">
                 <a:solidFill>
                   <a:srgbClr val="17364A"/>
                 </a:solidFill>
@@ -8989,16 +8993,16 @@
                 <a:ea typeface="Aptos" pitchFamily="34" charset="-122"/>
                 <a:cs typeface="Aptos" pitchFamily="34" charset="-120"/>
               </a:rPr>
-              <a:t>The exercise should produce a work product that could be used in a.</a:t>
-            </a:r>
-            <a:endParaRPr lang="en-US" sz="1220" dirty="0"/>
-          </a:p>
-          <a:p>
-            <a:pPr indent="0" marL="0">
-              <a:buNone/>
-            </a:pPr>
-            <a:r>
-              <a:rPr lang="en-US" sz="1220" dirty="0">
+              <a:t>The exercise should produce a work product that.</a:t>
+            </a:r>
+            <a:endParaRPr lang="en-US" sz="1140" dirty="0"/>
+          </a:p>
+          <a:p>
+            <a:pPr indent="0" marL="0">
+              <a:buNone/>
+            </a:pPr>
+            <a:r>
+              <a:rPr lang="en-US" sz="1140" dirty="0">
                 <a:solidFill>
                   <a:srgbClr val="17364A"/>
                 </a:solidFill>
@@ -9006,9 +9010,9 @@
                 <a:ea typeface="Aptos" pitchFamily="34" charset="-122"/>
                 <a:cs typeface="Aptos" pitchFamily="34" charset="-120"/>
               </a:rPr>
-              <a:t>Learners should document assumptions and identify which staff or.</a:t>
-            </a:r>
-            <a:endParaRPr lang="en-US" sz="1220" dirty="0"/>
+              <a:t>Learners should document assumptions and identify.</a:t>
+            </a:r>
+            <a:endParaRPr lang="en-US" sz="1140" dirty="0"/>
           </a:p>
         </p:txBody>
       </p:sp>
@@ -9020,12 +9024,12 @@
         </p:nvSpPr>
         <p:spPr>
           <a:xfrm>
-            <a:off x="7635240" y="4184294"/>
-            <a:ext cx="3474720" cy="1466698"/>
+            <a:off x="7543800" y="4389120"/>
+            <a:ext cx="3611880" cy="1261872"/>
           </a:xfrm>
           <a:prstGeom prst="roundRect">
             <a:avLst>
-              <a:gd name="adj" fmla="val 7481"/>
+              <a:gd name="adj" fmla="val 8696"/>
             </a:avLst>
           </a:prstGeom>
           <a:solidFill>
@@ -9047,8 +9051,8 @@
         </p:nvSpPr>
         <p:spPr>
           <a:xfrm>
-            <a:off x="7799832" y="4330598"/>
-            <a:ext cx="3145536" cy="256032"/>
+            <a:off x="7708392" y="4517136"/>
+            <a:ext cx="3282696" cy="228600"/>
           </a:xfrm>
           <a:prstGeom prst="rect">
             <a:avLst/>
@@ -9064,7 +9068,7 @@
               <a:buNone/>
             </a:pPr>
             <a:r>
-              <a:rPr lang="en-US" sz="1300" b="1" dirty="0">
+              <a:rPr lang="en-US" sz="1220" b="1" dirty="0">
                 <a:solidFill>
                   <a:srgbClr val="0068B7"/>
                 </a:solidFill>
@@ -9074,7 +9078,7 @@
               </a:rPr>
               <a:t>What to produce</a:t>
             </a:r>
-            <a:endParaRPr lang="en-US" sz="1300" dirty="0"/>
+            <a:endParaRPr lang="en-US" sz="1220" dirty="0"/>
           </a:p>
         </p:txBody>
       </p:sp>
@@ -9086,8 +9090,8 @@
         </p:nvSpPr>
         <p:spPr>
           <a:xfrm>
-            <a:off x="7799832" y="4659782"/>
-            <a:ext cx="3145536" cy="899770"/>
+            <a:off x="7708392" y="4828032"/>
+            <a:ext cx="3282696" cy="749808"/>
           </a:xfrm>
           <a:prstGeom prst="rect">
             <a:avLst/>
@@ -9105,7 +9109,7 @@
               <a:buNone/>
             </a:pPr>
             <a:r>
-              <a:rPr lang="en-US" sz="1320" dirty="0">
+              <a:rPr lang="en-US" sz="1220" dirty="0">
                 <a:solidFill>
                   <a:srgbClr val="17364A"/>
                 </a:solidFill>
@@ -9113,9 +9117,9 @@
                 <a:ea typeface="Aptos" pitchFamily="34" charset="-122"/>
                 <a:cs typeface="Aptos" pitchFamily="34" charset="-120"/>
               </a:rPr>
-              <a:t>Use the assignment to test whether you can explain the concept, apply it to a realistic public health situation, and identify what would need review before the work moves forward.</a:t>
-            </a:r>
-            <a:endParaRPr lang="en-US" sz="1320" dirty="0"/>
+              <a:t>Use the assignment to test whether you can explain the concept, apply it to a.</a:t>
+            </a:r>
+            <a:endParaRPr lang="en-US" sz="1220" dirty="0"/>
           </a:p>
         </p:txBody>
       </p:sp>
@@ -9406,8 +9410,8 @@
         </p:nvSpPr>
         <p:spPr>
           <a:xfrm>
-            <a:off x="868680" y="1508760"/>
-            <a:ext cx="6309360" cy="4160520"/>
+            <a:off x="822960" y="1463040"/>
+            <a:ext cx="6565392" cy="4343400"/>
           </a:xfrm>
           <a:prstGeom prst="rect">
             <a:avLst/>
@@ -9425,7 +9429,7 @@
               <a:buNone/>
             </a:pPr>
             <a:r>
-              <a:rPr lang="en-US" sz="2100" dirty="0">
+              <a:rPr lang="en-US" sz="1920" dirty="0">
                 <a:solidFill>
                   <a:srgbClr val="003A63"/>
                 </a:solidFill>
@@ -9435,14 +9439,14 @@
               </a:rPr>
               <a:t>• The expected artifact is a completed secure deployment readiness worksheet.</a:t>
             </a:r>
-            <a:endParaRPr lang="en-US" sz="2100" dirty="0"/>
-          </a:p>
-          <a:p>
-            <a:pPr indent="0" marL="0">
-              <a:buNone/>
-            </a:pPr>
-            <a:r>
-              <a:rPr lang="en-US" sz="2100" dirty="0">
+            <a:endParaRPr lang="en-US" sz="1920" dirty="0"/>
+          </a:p>
+          <a:p>
+            <a:pPr indent="0" marL="0">
+              <a:buNone/>
+            </a:pPr>
+            <a:r>
+              <a:rPr lang="en-US" sz="1920" dirty="0">
                 <a:solidFill>
                   <a:srgbClr val="003A63"/>
                 </a:solidFill>
@@ -9450,9 +9454,9 @@
                 <a:ea typeface="Aptos" pitchFamily="34" charset="-122"/>
                 <a:cs typeface="Aptos" pitchFamily="34" charset="-120"/>
               </a:rPr>
-              <a:t>• It should be specific to a public health workflow and should include technical dependencies,.</a:t>
-            </a:r>
-            <a:endParaRPr lang="en-US" sz="2100" dirty="0"/>
+              <a:t>• It should be specific to a public health workflow and should include.</a:t>
+            </a:r>
+            <a:endParaRPr lang="en-US" sz="1920" dirty="0"/>
           </a:p>
         </p:txBody>
       </p:sp>
@@ -9464,12 +9468,12 @@
         </p:nvSpPr>
         <p:spPr>
           <a:xfrm>
-            <a:off x="7635240" y="1325880"/>
-            <a:ext cx="3474720" cy="1207008"/>
+            <a:off x="7543800" y="1325880"/>
+            <a:ext cx="3611880" cy="1261872"/>
           </a:xfrm>
           <a:prstGeom prst="roundRect">
             <a:avLst>
-              <a:gd name="adj" fmla="val 9091"/>
+              <a:gd name="adj" fmla="val 8696"/>
             </a:avLst>
           </a:prstGeom>
           <a:solidFill>
@@ -9491,8 +9495,8 @@
         </p:nvSpPr>
         <p:spPr>
           <a:xfrm>
-            <a:off x="7799832" y="1472184"/>
-            <a:ext cx="3145536" cy="256032"/>
+            <a:off x="7708392" y="1453896"/>
+            <a:ext cx="3282696" cy="228600"/>
           </a:xfrm>
           <a:prstGeom prst="rect">
             <a:avLst/>
@@ -9508,7 +9512,7 @@
               <a:buNone/>
             </a:pPr>
             <a:r>
-              <a:rPr lang="en-US" sz="1300" b="1" dirty="0">
+              <a:rPr lang="en-US" sz="1220" b="1" dirty="0">
                 <a:solidFill>
                   <a:srgbClr val="0068B7"/>
                 </a:solidFill>
@@ -9518,7 +9522,7 @@
               </a:rPr>
               <a:t>Core concept</a:t>
             </a:r>
-            <a:endParaRPr lang="en-US" sz="1300" dirty="0"/>
+            <a:endParaRPr lang="en-US" sz="1220" dirty="0"/>
           </a:p>
         </p:txBody>
       </p:sp>
@@ -9530,8 +9534,8 @@
         </p:nvSpPr>
         <p:spPr>
           <a:xfrm>
-            <a:off x="7799832" y="1801368"/>
-            <a:ext cx="3145536" cy="640080"/>
+            <a:off x="7708392" y="1764792"/>
+            <a:ext cx="3282696" cy="749808"/>
           </a:xfrm>
           <a:prstGeom prst="rect">
             <a:avLst/>
@@ -9549,7 +9553,7 @@
               <a:buNone/>
             </a:pPr>
             <a:r>
-              <a:rPr lang="en-US" sz="1320" dirty="0">
+              <a:rPr lang="en-US" sz="1220" dirty="0">
                 <a:solidFill>
                   <a:srgbClr val="17364A"/>
                 </a:solidFill>
@@ -9559,7 +9563,7 @@
               </a:rPr>
               <a:t>The expected artifact is a completed secure deployment readiness worksheet.</a:t>
             </a:r>
-            <a:endParaRPr lang="en-US" sz="1320" dirty="0"/>
+            <a:endParaRPr lang="en-US" sz="1220" dirty="0"/>
           </a:p>
         </p:txBody>
       </p:sp>
@@ -9571,12 +9575,12 @@
         </p:nvSpPr>
         <p:spPr>
           <a:xfrm>
-            <a:off x="7635240" y="2670048"/>
-            <a:ext cx="3474720" cy="1377086"/>
+            <a:off x="7543800" y="2724912"/>
+            <a:ext cx="3611880" cy="1527048"/>
           </a:xfrm>
           <a:prstGeom prst="roundRect">
             <a:avLst>
-              <a:gd name="adj" fmla="val 7968"/>
+              <a:gd name="adj" fmla="val 7186"/>
             </a:avLst>
           </a:prstGeom>
           <a:solidFill>
@@ -9598,8 +9602,8 @@
         </p:nvSpPr>
         <p:spPr>
           <a:xfrm>
-            <a:off x="7799832" y="2816352"/>
-            <a:ext cx="3145536" cy="256032"/>
+            <a:off x="7708392" y="2852928"/>
+            <a:ext cx="3282696" cy="228600"/>
           </a:xfrm>
           <a:prstGeom prst="rect">
             <a:avLst/>
@@ -9615,7 +9619,7 @@
               <a:buNone/>
             </a:pPr>
             <a:r>
-              <a:rPr lang="en-US" sz="1300" b="1" dirty="0">
+              <a:rPr lang="en-US" sz="1220" b="1" dirty="0">
                 <a:solidFill>
                   <a:srgbClr val="0068B7"/>
                 </a:solidFill>
@@ -9625,7 +9629,7 @@
               </a:rPr>
               <a:t>Concept checkpoints</a:t>
             </a:r>
-            <a:endParaRPr lang="en-US" sz="1300" dirty="0"/>
+            <a:endParaRPr lang="en-US" sz="1220" dirty="0"/>
           </a:p>
         </p:txBody>
       </p:sp>
@@ -9637,8 +9641,8 @@
         </p:nvSpPr>
         <p:spPr>
           <a:xfrm>
-            <a:off x="7818120" y="3182112"/>
-            <a:ext cx="3090672" cy="718718"/>
+            <a:off x="7726680" y="3182112"/>
+            <a:ext cx="3227832" cy="960120"/>
           </a:xfrm>
           <a:prstGeom prst="rect">
             <a:avLst/>
@@ -9656,7 +9660,7 @@
               <a:buNone/>
             </a:pPr>
             <a:r>
-              <a:rPr lang="en-US" sz="1220" dirty="0">
+              <a:rPr lang="en-US" sz="1140" dirty="0">
                 <a:solidFill>
                   <a:srgbClr val="17364A"/>
                 </a:solidFill>
@@ -9664,16 +9668,16 @@
                 <a:ea typeface="Aptos" pitchFamily="34" charset="-122"/>
                 <a:cs typeface="Aptos" pitchFamily="34" charset="-120"/>
               </a:rPr>
-              <a:t>The expected artifact is a completed secure deployment readiness.</a:t>
-            </a:r>
-            <a:endParaRPr lang="en-US" sz="1220" dirty="0"/>
-          </a:p>
-          <a:p>
-            <a:pPr indent="0" marL="0">
-              <a:buNone/>
-            </a:pPr>
-            <a:r>
-              <a:rPr lang="en-US" sz="1220" dirty="0">
+              <a:t>The expected artifact is a completed secure.</a:t>
+            </a:r>
+            <a:endParaRPr lang="en-US" sz="1140" dirty="0"/>
+          </a:p>
+          <a:p>
+            <a:pPr indent="0" marL="0">
+              <a:buNone/>
+            </a:pPr>
+            <a:r>
+              <a:rPr lang="en-US" sz="1140" dirty="0">
                 <a:solidFill>
                   <a:srgbClr val="17364A"/>
                 </a:solidFill>
@@ -9681,9 +9685,9 @@
                 <a:ea typeface="Aptos" pitchFamily="34" charset="-122"/>
                 <a:cs typeface="Aptos" pitchFamily="34" charset="-120"/>
               </a:rPr>
-              <a:t>It should be specific to a public health workflow and should.</a:t>
-            </a:r>
-            <a:endParaRPr lang="en-US" sz="1220" dirty="0"/>
+              <a:t>It should be specific to a public health workflow.</a:t>
+            </a:r>
+            <a:endParaRPr lang="en-US" sz="1140" dirty="0"/>
           </a:p>
         </p:txBody>
       </p:sp>
@@ -9695,12 +9699,12 @@
         </p:nvSpPr>
         <p:spPr>
           <a:xfrm>
-            <a:off x="7635240" y="4184294"/>
-            <a:ext cx="3474720" cy="1466698"/>
+            <a:off x="7543800" y="4389120"/>
+            <a:ext cx="3611880" cy="1261872"/>
           </a:xfrm>
           <a:prstGeom prst="roundRect">
             <a:avLst>
-              <a:gd name="adj" fmla="val 7481"/>
+              <a:gd name="adj" fmla="val 8696"/>
             </a:avLst>
           </a:prstGeom>
           <a:solidFill>
@@ -9722,8 +9726,8 @@
         </p:nvSpPr>
         <p:spPr>
           <a:xfrm>
-            <a:off x="7799832" y="4330598"/>
-            <a:ext cx="3145536" cy="256032"/>
+            <a:off x="7708392" y="4517136"/>
+            <a:ext cx="3282696" cy="228600"/>
           </a:xfrm>
           <a:prstGeom prst="rect">
             <a:avLst/>
@@ -9739,7 +9743,7 @@
               <a:buNone/>
             </a:pPr>
             <a:r>
-              <a:rPr lang="en-US" sz="1300" b="1" dirty="0">
+              <a:rPr lang="en-US" sz="1220" b="1" dirty="0">
                 <a:solidFill>
                   <a:srgbClr val="0068B7"/>
                 </a:solidFill>
@@ -9749,7 +9753,7 @@
               </a:rPr>
               <a:t>Apply it</a:t>
             </a:r>
-            <a:endParaRPr lang="en-US" sz="1300" dirty="0"/>
+            <a:endParaRPr lang="en-US" sz="1220" dirty="0"/>
           </a:p>
         </p:txBody>
       </p:sp>
@@ -9761,8 +9765,8 @@
         </p:nvSpPr>
         <p:spPr>
           <a:xfrm>
-            <a:off x="7799832" y="4659782"/>
-            <a:ext cx="3145536" cy="899770"/>
+            <a:off x="7708392" y="4828032"/>
+            <a:ext cx="3282696" cy="749808"/>
           </a:xfrm>
           <a:prstGeom prst="rect">
             <a:avLst/>
@@ -9780,7 +9784,7 @@
               <a:buNone/>
             </a:pPr>
             <a:r>
-              <a:rPr lang="en-US" sz="1320" dirty="0">
+              <a:rPr lang="en-US" sz="1220" dirty="0">
                 <a:solidFill>
                   <a:srgbClr val="17364A"/>
                 </a:solidFill>
@@ -9788,9 +9792,9 @@
                 <a:ea typeface="Aptos" pitchFamily="34" charset="-122"/>
                 <a:cs typeface="Aptos" pitchFamily="34" charset="-120"/>
               </a:rPr>
-              <a:t>Connect the concept to public health purpose, responsible use, required safeguards, documentation, and the next action a department should take.</a:t>
-            </a:r>
-            <a:endParaRPr lang="en-US" sz="1320" dirty="0"/>
+              <a:t>Connect the concept to public health purpose, responsible use, required.</a:t>
+            </a:r>
+            <a:endParaRPr lang="en-US" sz="1220" dirty="0"/>
           </a:p>
         </p:txBody>
       </p:sp>
@@ -10081,8 +10085,8 @@
         </p:nvSpPr>
         <p:spPr>
           <a:xfrm>
-            <a:off x="868680" y="1508760"/>
-            <a:ext cx="6309360" cy="4160520"/>
+            <a:off x="822960" y="1463040"/>
+            <a:ext cx="6565392" cy="4343400"/>
           </a:xfrm>
           <a:prstGeom prst="rect">
             <a:avLst/>
@@ -10100,7 +10104,7 @@
               <a:buNone/>
             </a:pPr>
             <a:r>
-              <a:rPr lang="en-US" sz="2100" dirty="0">
+              <a:rPr lang="en-US" sz="1920" dirty="0">
                 <a:solidFill>
                   <a:srgbClr val="003A63"/>
                 </a:solidFill>
@@ -10108,9 +10112,9 @@
                 <a:ea typeface="Aptos" pitchFamily="34" charset="-122"/>
                 <a:cs typeface="Aptos" pitchFamily="34" charset="-120"/>
               </a:rPr>
-              <a:t>• The expected artifact is a completed secure deployment readiness worksheet. It should be.</a:t>
-            </a:r>
-            <a:endParaRPr lang="en-US" sz="2100" dirty="0"/>
+              <a:t>• The expected artifact is a completed secure deployment readiness worksheet..</a:t>
+            </a:r>
+            <a:endParaRPr lang="en-US" sz="1920" dirty="0"/>
           </a:p>
         </p:txBody>
       </p:sp>
@@ -10122,12 +10126,12 @@
         </p:nvSpPr>
         <p:spPr>
           <a:xfrm>
-            <a:off x="7635240" y="1325880"/>
-            <a:ext cx="3474720" cy="1255471"/>
+            <a:off x="7543800" y="1325880"/>
+            <a:ext cx="3611880" cy="1261872"/>
           </a:xfrm>
           <a:prstGeom prst="roundRect">
             <a:avLst>
-              <a:gd name="adj" fmla="val 8740"/>
+              <a:gd name="adj" fmla="val 8696"/>
             </a:avLst>
           </a:prstGeom>
           <a:solidFill>
@@ -10149,8 +10153,8 @@
         </p:nvSpPr>
         <p:spPr>
           <a:xfrm>
-            <a:off x="7799832" y="1472184"/>
-            <a:ext cx="3145536" cy="256032"/>
+            <a:off x="7708392" y="1453896"/>
+            <a:ext cx="3282696" cy="228600"/>
           </a:xfrm>
           <a:prstGeom prst="rect">
             <a:avLst/>
@@ -10166,7 +10170,7 @@
               <a:buNone/>
             </a:pPr>
             <a:r>
-              <a:rPr lang="en-US" sz="1300" b="1" dirty="0">
+              <a:rPr lang="en-US" sz="1220" b="1" dirty="0">
                 <a:solidFill>
                   <a:srgbClr val="0068B7"/>
                 </a:solidFill>
@@ -10176,7 +10180,7 @@
               </a:rPr>
               <a:t>Practice focus</a:t>
             </a:r>
-            <a:endParaRPr lang="en-US" sz="1300" dirty="0"/>
+            <a:endParaRPr lang="en-US" sz="1220" dirty="0"/>
           </a:p>
         </p:txBody>
       </p:sp>
@@ -10188,8 +10192,8 @@
         </p:nvSpPr>
         <p:spPr>
           <a:xfrm>
-            <a:off x="7799832" y="1801368"/>
-            <a:ext cx="3145536" cy="688543"/>
+            <a:off x="7708392" y="1764792"/>
+            <a:ext cx="3282696" cy="749808"/>
           </a:xfrm>
           <a:prstGeom prst="rect">
             <a:avLst/>
@@ -10207,7 +10211,7 @@
               <a:buNone/>
             </a:pPr>
             <a:r>
-              <a:rPr lang="en-US" sz="1320" dirty="0">
+              <a:rPr lang="en-US" sz="1220" dirty="0">
                 <a:solidFill>
                   <a:srgbClr val="17364A"/>
                 </a:solidFill>
@@ -10215,9 +10219,9 @@
                 <a:ea typeface="Aptos" pitchFamily="34" charset="-122"/>
                 <a:cs typeface="Aptos" pitchFamily="34" charset="-120"/>
               </a:rPr>
-              <a:t>The expected artifact is a completed secure deployment readiness worksheet. It should be specific to a.</a:t>
-            </a:r>
-            <a:endParaRPr lang="en-US" sz="1320" dirty="0"/>
+              <a:t>The expected artifact is a completed secure deployment readiness worksheet. It.</a:t>
+            </a:r>
+            <a:endParaRPr lang="en-US" sz="1220" dirty="0"/>
           </a:p>
         </p:txBody>
       </p:sp>
@@ -10229,12 +10233,12 @@
         </p:nvSpPr>
         <p:spPr>
           <a:xfrm>
-            <a:off x="7635240" y="2718511"/>
-            <a:ext cx="3474720" cy="1328623"/>
+            <a:off x="7543800" y="2724912"/>
+            <a:ext cx="3611880" cy="1527048"/>
           </a:xfrm>
           <a:prstGeom prst="roundRect">
             <a:avLst>
-              <a:gd name="adj" fmla="val 8259"/>
+              <a:gd name="adj" fmla="val 7186"/>
             </a:avLst>
           </a:prstGeom>
           <a:solidFill>
@@ -10256,8 +10260,8 @@
         </p:nvSpPr>
         <p:spPr>
           <a:xfrm>
-            <a:off x="7799832" y="2864815"/>
-            <a:ext cx="3145536" cy="256032"/>
+            <a:off x="7708392" y="2852928"/>
+            <a:ext cx="3282696" cy="228600"/>
           </a:xfrm>
           <a:prstGeom prst="rect">
             <a:avLst/>
@@ -10273,7 +10277,7 @@
               <a:buNone/>
             </a:pPr>
             <a:r>
-              <a:rPr lang="en-US" sz="1300" b="1" dirty="0">
+              <a:rPr lang="en-US" sz="1220" b="1" dirty="0">
                 <a:solidFill>
                   <a:srgbClr val="0068B7"/>
                 </a:solidFill>
@@ -10283,7 +10287,7 @@
               </a:rPr>
               <a:t>Concept checkpoints</a:t>
             </a:r>
-            <a:endParaRPr lang="en-US" sz="1300" dirty="0"/>
+            <a:endParaRPr lang="en-US" sz="1220" dirty="0"/>
           </a:p>
         </p:txBody>
       </p:sp>
@@ -10295,8 +10299,8 @@
         </p:nvSpPr>
         <p:spPr>
           <a:xfrm>
-            <a:off x="7818120" y="3230575"/>
-            <a:ext cx="3090672" cy="670255"/>
+            <a:off x="7726680" y="3182112"/>
+            <a:ext cx="3227832" cy="960120"/>
           </a:xfrm>
           <a:prstGeom prst="rect">
             <a:avLst/>
@@ -10314,7 +10318,7 @@
               <a:buNone/>
             </a:pPr>
             <a:r>
-              <a:rPr lang="en-US" sz="1220" dirty="0">
+              <a:rPr lang="en-US" sz="1140" dirty="0">
                 <a:solidFill>
                   <a:srgbClr val="17364A"/>
                 </a:solidFill>
@@ -10322,16 +10326,16 @@
                 <a:ea typeface="Aptos" pitchFamily="34" charset="-122"/>
                 <a:cs typeface="Aptos" pitchFamily="34" charset="-120"/>
               </a:rPr>
-              <a:t>The expected artifact is a completed secure deployment readiness.</a:t>
-            </a:r>
-            <a:endParaRPr lang="en-US" sz="1220" dirty="0"/>
-          </a:p>
-          <a:p>
-            <a:pPr indent="0" marL="0">
-              <a:buNone/>
-            </a:pPr>
-            <a:r>
-              <a:rPr lang="en-US" sz="1220" dirty="0">
+              <a:t>The expected artifact is a completed secure.</a:t>
+            </a:r>
+            <a:endParaRPr lang="en-US" sz="1140" dirty="0"/>
+          </a:p>
+          <a:p>
+            <a:pPr indent="0" marL="0">
+              <a:buNone/>
+            </a:pPr>
+            <a:r>
+              <a:rPr lang="en-US" sz="1140" dirty="0">
                 <a:solidFill>
                   <a:srgbClr val="17364A"/>
                 </a:solidFill>
@@ -10339,9 +10343,9 @@
                 <a:ea typeface="Aptos" pitchFamily="34" charset="-122"/>
                 <a:cs typeface="Aptos" pitchFamily="34" charset="-120"/>
               </a:rPr>
-              <a:t>It should be specific to a public health workflow and should.</a:t>
-            </a:r>
-            <a:endParaRPr lang="en-US" sz="1220" dirty="0"/>
+              <a:t>It should be specific to a public health workflow.</a:t>
+            </a:r>
+            <a:endParaRPr lang="en-US" sz="1140" dirty="0"/>
           </a:p>
         </p:txBody>
       </p:sp>
@@ -10353,12 +10357,12 @@
         </p:nvSpPr>
         <p:spPr>
           <a:xfrm>
-            <a:off x="7635240" y="4184294"/>
-            <a:ext cx="3474720" cy="1466698"/>
+            <a:off x="7543800" y="4389120"/>
+            <a:ext cx="3611880" cy="1261872"/>
           </a:xfrm>
           <a:prstGeom prst="roundRect">
             <a:avLst>
-              <a:gd name="adj" fmla="val 7481"/>
+              <a:gd name="adj" fmla="val 8696"/>
             </a:avLst>
           </a:prstGeom>
           <a:solidFill>
@@ -10380,8 +10384,8 @@
         </p:nvSpPr>
         <p:spPr>
           <a:xfrm>
-            <a:off x="7799832" y="4330598"/>
-            <a:ext cx="3145536" cy="256032"/>
+            <a:off x="7708392" y="4517136"/>
+            <a:ext cx="3282696" cy="228600"/>
           </a:xfrm>
           <a:prstGeom prst="rect">
             <a:avLst/>
@@ -10397,7 +10401,7 @@
               <a:buNone/>
             </a:pPr>
             <a:r>
-              <a:rPr lang="en-US" sz="1300" b="1" dirty="0">
+              <a:rPr lang="en-US" sz="1220" b="1" dirty="0">
                 <a:solidFill>
                   <a:srgbClr val="0068B7"/>
                 </a:solidFill>
@@ -10407,7 +10411,7 @@
               </a:rPr>
               <a:t>What to produce</a:t>
             </a:r>
-            <a:endParaRPr lang="en-US" sz="1300" dirty="0"/>
+            <a:endParaRPr lang="en-US" sz="1220" dirty="0"/>
           </a:p>
         </p:txBody>
       </p:sp>
@@ -10419,8 +10423,8 @@
         </p:nvSpPr>
         <p:spPr>
           <a:xfrm>
-            <a:off x="7799832" y="4659782"/>
-            <a:ext cx="3145536" cy="899770"/>
+            <a:off x="7708392" y="4828032"/>
+            <a:ext cx="3282696" cy="749808"/>
           </a:xfrm>
           <a:prstGeom prst="rect">
             <a:avLst/>
@@ -10438,7 +10442,7 @@
               <a:buNone/>
             </a:pPr>
             <a:r>
-              <a:rPr lang="en-US" sz="1320" dirty="0">
+              <a:rPr lang="en-US" sz="1220" dirty="0">
                 <a:solidFill>
                   <a:srgbClr val="17364A"/>
                 </a:solidFill>
@@ -10446,9 +10450,9 @@
                 <a:ea typeface="Aptos" pitchFamily="34" charset="-122"/>
                 <a:cs typeface="Aptos" pitchFamily="34" charset="-120"/>
               </a:rPr>
-              <a:t>Use the assignment to test whether you can explain the concept, apply it to a realistic public health situation, and identify what would need review before the work moves forward.</a:t>
-            </a:r>
-            <a:endParaRPr lang="en-US" sz="1320" dirty="0"/>
+              <a:t>Use the assignment to test whether you can explain the concept, apply it to a.</a:t>
+            </a:r>
+            <a:endParaRPr lang="en-US" sz="1220" dirty="0"/>
           </a:p>
         </p:txBody>
       </p:sp>
@@ -10766,7 +10770,7 @@
                 <a:ea typeface="Aptos" pitchFamily="34" charset="-122"/>
                 <a:cs typeface="Aptos" pitchFamily="34" charset="-120"/>
               </a:rPr>
-              <a:t>• Many AI tools are deployed in cloud environments or packaged in containers that make.</a:t>
+              <a:t>• Many AI tools are deployed in cloud environments or packaged in containers.</a:t>
             </a:r>
             <a:endParaRPr lang="en-US" sz="2100" dirty="0"/>
           </a:p>
@@ -10783,7 +10787,7 @@
                 <a:ea typeface="Aptos" pitchFamily="34" charset="-122"/>
                 <a:cs typeface="Aptos" pitchFamily="34" charset="-120"/>
               </a:rPr>
-              <a:t>• Public health staff do not need to become cloud engineers, but they need enough technical.</a:t>
+              <a:t>• Public health staff do not need to become cloud engineers, but they need.</a:t>
             </a:r>
             <a:endParaRPr lang="en-US" sz="2100" dirty="0"/>
           </a:p>
@@ -10800,7 +10804,7 @@
                 <a:ea typeface="Aptos" pitchFamily="34" charset="-122"/>
                 <a:cs typeface="Aptos" pitchFamily="34" charset="-120"/>
               </a:rPr>
-              <a:t>• This module connects deployment choices to public health continuity, privacy, cybersecurity,.</a:t>
+              <a:t>• This module connects deployment choices to public health continuity,.</a:t>
             </a:r>
             <a:endParaRPr lang="en-US" sz="2100" dirty="0"/>
           </a:p>
@@ -10841,8 +10845,8 @@
         </p:nvSpPr>
         <p:spPr>
           <a:xfrm>
-            <a:off x="8074152" y="1563624"/>
-            <a:ext cx="2825496" cy="256032"/>
+            <a:off x="8074152" y="1545336"/>
+            <a:ext cx="2825496" cy="228600"/>
           </a:xfrm>
           <a:prstGeom prst="rect">
             <a:avLst/>
@@ -10858,7 +10862,7 @@
               <a:buNone/>
             </a:pPr>
             <a:r>
-              <a:rPr lang="en-US" sz="1300" b="1" dirty="0">
+              <a:rPr lang="en-US" sz="1220" b="1" dirty="0">
                 <a:solidFill>
                   <a:srgbClr val="0068B7"/>
                 </a:solidFill>
@@ -10868,7 +10872,7 @@
               </a:rPr>
               <a:t>Module details</a:t>
             </a:r>
-            <a:endParaRPr lang="en-US" sz="1300" dirty="0"/>
+            <a:endParaRPr lang="en-US" sz="1220" dirty="0"/>
           </a:p>
         </p:txBody>
       </p:sp>
@@ -10880,8 +10884,8 @@
         </p:nvSpPr>
         <p:spPr>
           <a:xfrm>
-            <a:off x="8074152" y="1892808"/>
-            <a:ext cx="2825496" cy="1353312"/>
+            <a:off x="8074152" y="1856232"/>
+            <a:ext cx="2825496" cy="1408176"/>
           </a:xfrm>
           <a:prstGeom prst="rect">
             <a:avLst/>
@@ -10899,7 +10903,7 @@
               <a:buNone/>
             </a:pPr>
             <a:r>
-              <a:rPr lang="en-US" sz="1320" dirty="0">
+              <a:rPr lang="en-US" sz="1220" dirty="0">
                 <a:solidFill>
                   <a:srgbClr val="17364A"/>
                 </a:solidFill>
@@ -10907,9 +10911,9 @@
                 <a:ea typeface="Aptos" pitchFamily="34" charset="-122"/>
                 <a:cs typeface="Aptos" pitchFamily="34" charset="-120"/>
               </a:rPr>
-              <a:t>Level: intermediate/practitioner Primary track: Technical Architecture Track Appears in tracks: operations-data-quality</a:t>
-            </a:r>
-            <a:endParaRPr lang="en-US" sz="1320" dirty="0"/>
+              <a:t>Level: intermediate/practitioner Primary track: Technical Architecture Track.</a:t>
+            </a:r>
+            <a:endParaRPr lang="en-US" sz="1220" dirty="0"/>
           </a:p>
         </p:txBody>
       </p:sp>
@@ -10948,8 +10952,8 @@
         </p:nvSpPr>
         <p:spPr>
           <a:xfrm>
-            <a:off x="8074152" y="3822192"/>
-            <a:ext cx="2825496" cy="256032"/>
+            <a:off x="8074152" y="3803904"/>
+            <a:ext cx="2825496" cy="228600"/>
           </a:xfrm>
           <a:prstGeom prst="rect">
             <a:avLst/>
@@ -10965,7 +10969,7 @@
               <a:buNone/>
             </a:pPr>
             <a:r>
-              <a:rPr lang="en-US" sz="1300" b="1" dirty="0">
+              <a:rPr lang="en-US" sz="1220" b="1" dirty="0">
                 <a:solidFill>
                   <a:srgbClr val="0068B7"/>
                 </a:solidFill>
@@ -10975,7 +10979,7 @@
               </a:rPr>
               <a:t>Learning sequence</a:t>
             </a:r>
-            <a:endParaRPr lang="en-US" sz="1300" dirty="0"/>
+            <a:endParaRPr lang="en-US" sz="1220" dirty="0"/>
           </a:p>
         </p:txBody>
       </p:sp>
@@ -10987,8 +10991,8 @@
         </p:nvSpPr>
         <p:spPr>
           <a:xfrm>
-            <a:off x="8092440" y="4187952"/>
-            <a:ext cx="2770632" cy="1033272"/>
+            <a:off x="8092440" y="4133088"/>
+            <a:ext cx="2770632" cy="1124712"/>
           </a:xfrm>
           <a:prstGeom prst="rect">
             <a:avLst/>
@@ -11006,7 +11010,7 @@
               <a:buNone/>
             </a:pPr>
             <a:r>
-              <a:rPr lang="en-US" sz="1220" dirty="0">
+              <a:rPr lang="en-US" sz="1140" dirty="0">
                 <a:solidFill>
                   <a:srgbClr val="17364A"/>
                 </a:solidFill>
@@ -11016,14 +11020,14 @@
               </a:rPr>
               <a:t>Read the module for shared vocabulary and context.</a:t>
             </a:r>
-            <a:endParaRPr lang="en-US" sz="1220" dirty="0"/>
-          </a:p>
-          <a:p>
-            <a:pPr indent="0" marL="0">
-              <a:buNone/>
-            </a:pPr>
-            <a:r>
-              <a:rPr lang="en-US" sz="1220" dirty="0">
+            <a:endParaRPr lang="en-US" sz="1140" dirty="0"/>
+          </a:p>
+          <a:p>
+            <a:pPr indent="0" marL="0">
+              <a:buNone/>
+            </a:pPr>
+            <a:r>
+              <a:rPr lang="en-US" sz="1140" dirty="0">
                 <a:solidFill>
                   <a:srgbClr val="17364A"/>
                 </a:solidFill>
@@ -11031,16 +11035,16 @@
                 <a:ea typeface="Aptos" pitchFamily="34" charset="-122"/>
                 <a:cs typeface="Aptos" pitchFamily="34" charset="-120"/>
               </a:rPr>
-              <a:t>Complete the practical exercise to apply the concept.</a:t>
-            </a:r>
-            <a:endParaRPr lang="en-US" sz="1220" dirty="0"/>
-          </a:p>
-          <a:p>
-            <a:pPr indent="0" marL="0">
-              <a:buNone/>
-            </a:pPr>
-            <a:r>
-              <a:rPr lang="en-US" sz="1220" dirty="0">
+              <a:t>Complete the practical exercise to apply the.</a:t>
+            </a:r>
+            <a:endParaRPr lang="en-US" sz="1140" dirty="0"/>
+          </a:p>
+          <a:p>
+            <a:pPr indent="0" marL="0">
+              <a:buNone/>
+            </a:pPr>
+            <a:r>
+              <a:rPr lang="en-US" sz="1140" dirty="0">
                 <a:solidFill>
                   <a:srgbClr val="17364A"/>
                 </a:solidFill>
@@ -11050,7 +11054,7 @@
               </a:rPr>
               <a:t>Use the notes and references for deeper review.</a:t>
             </a:r>
-            <a:endParaRPr lang="en-US" sz="1220" dirty="0"/>
+            <a:endParaRPr lang="en-US" sz="1140" dirty="0"/>
           </a:p>
         </p:txBody>
       </p:sp>
@@ -11341,8 +11345,8 @@
         </p:nvSpPr>
         <p:spPr>
           <a:xfrm>
-            <a:off x="868680" y="1508760"/>
-            <a:ext cx="6309360" cy="4160520"/>
+            <a:off x="822960" y="1463040"/>
+            <a:ext cx="6565392" cy="4343400"/>
           </a:xfrm>
           <a:prstGeom prst="rect">
             <a:avLst/>
@@ -11360,7 +11364,7 @@
               <a:buNone/>
             </a:pPr>
             <a:r>
-              <a:rPr lang="en-US" sz="2100" dirty="0">
+              <a:rPr lang="en-US" sz="1920" dirty="0">
                 <a:solidFill>
                   <a:srgbClr val="003A63"/>
                 </a:solidFill>
@@ -11368,16 +11372,16 @@
                 <a:ea typeface="Aptos" pitchFamily="34" charset="-122"/>
                 <a:cs typeface="Aptos" pitchFamily="34" charset="-120"/>
               </a:rPr>
-              <a:t>• 1. What is the best reason to address cloud, containers, and secure deployment basics before.</a:t>
-            </a:r>
-            <a:endParaRPr lang="en-US" sz="2100" dirty="0"/>
-          </a:p>
-          <a:p>
-            <a:pPr indent="0" marL="0">
-              <a:buNone/>
-            </a:pPr>
-            <a:r>
-              <a:rPr lang="en-US" sz="2100" dirty="0">
+              <a:t>• 1. What is the best reason to address cloud, containers, and secure.</a:t>
+            </a:r>
+            <a:endParaRPr lang="en-US" sz="1920" dirty="0"/>
+          </a:p>
+          <a:p>
+            <a:pPr indent="0" marL="0">
+              <a:buNone/>
+            </a:pPr>
+            <a:r>
+              <a:rPr lang="en-US" sz="1920" dirty="0">
                 <a:solidFill>
                   <a:srgbClr val="003A63"/>
                 </a:solidFill>
@@ -11387,14 +11391,14 @@
               </a:rPr>
               <a:t>• 2. Which practice best supports responsible implementation?</a:t>
             </a:r>
-            <a:endParaRPr lang="en-US" sz="2100" dirty="0"/>
-          </a:p>
-          <a:p>
-            <a:pPr indent="0" marL="0">
-              <a:buNone/>
-            </a:pPr>
-            <a:r>
-              <a:rPr lang="en-US" sz="2100" dirty="0">
+            <a:endParaRPr lang="en-US" sz="1920" dirty="0"/>
+          </a:p>
+          <a:p>
+            <a:pPr indent="0" marL="0">
+              <a:buNone/>
+            </a:pPr>
+            <a:r>
+              <a:rPr lang="en-US" sz="1920" dirty="0">
                 <a:solidFill>
                   <a:srgbClr val="003A63"/>
                 </a:solidFill>
@@ -11404,7 +11408,7 @@
               </a:rPr>
               <a:t>• 3. Which statement best describes a common failure mode?</a:t>
             </a:r>
-            <a:endParaRPr lang="en-US" sz="2100" dirty="0"/>
+            <a:endParaRPr lang="en-US" sz="1920" dirty="0"/>
           </a:p>
         </p:txBody>
       </p:sp>
@@ -11416,12 +11420,12 @@
         </p:nvSpPr>
         <p:spPr>
           <a:xfrm>
-            <a:off x="7635240" y="1325880"/>
-            <a:ext cx="3474720" cy="1255471"/>
+            <a:off x="7543800" y="1325880"/>
+            <a:ext cx="3611880" cy="1261872"/>
           </a:xfrm>
           <a:prstGeom prst="roundRect">
             <a:avLst>
-              <a:gd name="adj" fmla="val 8740"/>
+              <a:gd name="adj" fmla="val 8696"/>
             </a:avLst>
           </a:prstGeom>
           <a:solidFill>
@@ -11443,8 +11447,8 @@
         </p:nvSpPr>
         <p:spPr>
           <a:xfrm>
-            <a:off x="7799832" y="1472184"/>
-            <a:ext cx="3145536" cy="256032"/>
+            <a:off x="7708392" y="1453896"/>
+            <a:ext cx="3282696" cy="228600"/>
           </a:xfrm>
           <a:prstGeom prst="rect">
             <a:avLst/>
@@ -11460,7 +11464,7 @@
               <a:buNone/>
             </a:pPr>
             <a:r>
-              <a:rPr lang="en-US" sz="1300" b="1" dirty="0">
+              <a:rPr lang="en-US" sz="1220" b="1" dirty="0">
                 <a:solidFill>
                   <a:srgbClr val="0068B7"/>
                 </a:solidFill>
@@ -11470,7 +11474,7 @@
               </a:rPr>
               <a:t>Practice focus</a:t>
             </a:r>
-            <a:endParaRPr lang="en-US" sz="1300" dirty="0"/>
+            <a:endParaRPr lang="en-US" sz="1220" dirty="0"/>
           </a:p>
         </p:txBody>
       </p:sp>
@@ -11482,8 +11486,8 @@
         </p:nvSpPr>
         <p:spPr>
           <a:xfrm>
-            <a:off x="7799832" y="1801368"/>
-            <a:ext cx="3145536" cy="688543"/>
+            <a:off x="7708392" y="1764792"/>
+            <a:ext cx="3282696" cy="749808"/>
           </a:xfrm>
           <a:prstGeom prst="rect">
             <a:avLst/>
@@ -11501,7 +11505,7 @@
               <a:buNone/>
             </a:pPr>
             <a:r>
-              <a:rPr lang="en-US" sz="1320" dirty="0">
+              <a:rPr lang="en-US" sz="1220" dirty="0">
                 <a:solidFill>
                   <a:srgbClr val="17364A"/>
                 </a:solidFill>
@@ -11509,9 +11513,9 @@
                 <a:ea typeface="Aptos" pitchFamily="34" charset="-122"/>
                 <a:cs typeface="Aptos" pitchFamily="34" charset="-120"/>
               </a:rPr>
-              <a:t>1. What is the best reason to address cloud, containers, and secure deployment basics before deployment?</a:t>
-            </a:r>
-            <a:endParaRPr lang="en-US" sz="1320" dirty="0"/>
+              <a:t>1. What is the best reason to address cloud, containers, and secure deployment.</a:t>
+            </a:r>
+            <a:endParaRPr lang="en-US" sz="1220" dirty="0"/>
           </a:p>
         </p:txBody>
       </p:sp>
@@ -11523,12 +11527,12 @@
         </p:nvSpPr>
         <p:spPr>
           <a:xfrm>
-            <a:off x="7635240" y="2718511"/>
-            <a:ext cx="3474720" cy="1328623"/>
+            <a:off x="7543800" y="2724912"/>
+            <a:ext cx="3611880" cy="1527048"/>
           </a:xfrm>
           <a:prstGeom prst="roundRect">
             <a:avLst>
-              <a:gd name="adj" fmla="val 8259"/>
+              <a:gd name="adj" fmla="val 7186"/>
             </a:avLst>
           </a:prstGeom>
           <a:solidFill>
@@ -11550,8 +11554,8 @@
         </p:nvSpPr>
         <p:spPr>
           <a:xfrm>
-            <a:off x="7799832" y="2864815"/>
-            <a:ext cx="3145536" cy="256032"/>
+            <a:off x="7708392" y="2852928"/>
+            <a:ext cx="3282696" cy="228600"/>
           </a:xfrm>
           <a:prstGeom prst="rect">
             <a:avLst/>
@@ -11567,7 +11571,7 @@
               <a:buNone/>
             </a:pPr>
             <a:r>
-              <a:rPr lang="en-US" sz="1300" b="1" dirty="0">
+              <a:rPr lang="en-US" sz="1220" b="1" dirty="0">
                 <a:solidFill>
                   <a:srgbClr val="0068B7"/>
                 </a:solidFill>
@@ -11577,7 +11581,7 @@
               </a:rPr>
               <a:t>Concept checkpoints</a:t>
             </a:r>
-            <a:endParaRPr lang="en-US" sz="1300" dirty="0"/>
+            <a:endParaRPr lang="en-US" sz="1220" dirty="0"/>
           </a:p>
         </p:txBody>
       </p:sp>
@@ -11589,8 +11593,8 @@
         </p:nvSpPr>
         <p:spPr>
           <a:xfrm>
-            <a:off x="7818120" y="3230575"/>
-            <a:ext cx="3090672" cy="670255"/>
+            <a:off x="7726680" y="3182112"/>
+            <a:ext cx="3227832" cy="960120"/>
           </a:xfrm>
           <a:prstGeom prst="rect">
             <a:avLst/>
@@ -11608,7 +11612,7 @@
               <a:buNone/>
             </a:pPr>
             <a:r>
-              <a:rPr lang="en-US" sz="1220" dirty="0">
+              <a:rPr lang="en-US" sz="1140" dirty="0">
                 <a:solidFill>
                   <a:srgbClr val="17364A"/>
                 </a:solidFill>
@@ -11618,14 +11622,14 @@
               </a:rPr>
               <a:t>1.</a:t>
             </a:r>
-            <a:endParaRPr lang="en-US" sz="1220" dirty="0"/>
-          </a:p>
-          <a:p>
-            <a:pPr indent="0" marL="0">
-              <a:buNone/>
-            </a:pPr>
-            <a:r>
-              <a:rPr lang="en-US" sz="1220" dirty="0">
+            <a:endParaRPr lang="en-US" sz="1140" dirty="0"/>
+          </a:p>
+          <a:p>
+            <a:pPr indent="0" marL="0">
+              <a:buNone/>
+            </a:pPr>
+            <a:r>
+              <a:rPr lang="en-US" sz="1140" dirty="0">
                 <a:solidFill>
                   <a:srgbClr val="17364A"/>
                 </a:solidFill>
@@ -11633,16 +11637,16 @@
                 <a:ea typeface="Aptos" pitchFamily="34" charset="-122"/>
                 <a:cs typeface="Aptos" pitchFamily="34" charset="-120"/>
               </a:rPr>
-              <a:t>What is the best reason to address cloud, containers, and secure.</a:t>
-            </a:r>
-            <a:endParaRPr lang="en-US" sz="1220" dirty="0"/>
-          </a:p>
-          <a:p>
-            <a:pPr indent="0" marL="0">
-              <a:buNone/>
-            </a:pPr>
-            <a:r>
-              <a:rPr lang="en-US" sz="1220" dirty="0">
+              <a:t>What is the best reason to address cloud,.</a:t>
+            </a:r>
+            <a:endParaRPr lang="en-US" sz="1140" dirty="0"/>
+          </a:p>
+          <a:p>
+            <a:pPr indent="0" marL="0">
+              <a:buNone/>
+            </a:pPr>
+            <a:r>
+              <a:rPr lang="en-US" sz="1140" dirty="0">
                 <a:solidFill>
                   <a:srgbClr val="17364A"/>
                 </a:solidFill>
@@ -11652,7 +11656,7 @@
               </a:rPr>
               <a:t>2.</a:t>
             </a:r>
-            <a:endParaRPr lang="en-US" sz="1220" dirty="0"/>
+            <a:endParaRPr lang="en-US" sz="1140" dirty="0"/>
           </a:p>
         </p:txBody>
       </p:sp>
@@ -11664,12 +11668,12 @@
         </p:nvSpPr>
         <p:spPr>
           <a:xfrm>
-            <a:off x="7635240" y="4184294"/>
-            <a:ext cx="3474720" cy="1466698"/>
+            <a:off x="7543800" y="4389120"/>
+            <a:ext cx="3611880" cy="1261872"/>
           </a:xfrm>
           <a:prstGeom prst="roundRect">
             <a:avLst>
-              <a:gd name="adj" fmla="val 7481"/>
+              <a:gd name="adj" fmla="val 8696"/>
             </a:avLst>
           </a:prstGeom>
           <a:solidFill>
@@ -11691,8 +11695,8 @@
         </p:nvSpPr>
         <p:spPr>
           <a:xfrm>
-            <a:off x="7799832" y="4330598"/>
-            <a:ext cx="3145536" cy="256032"/>
+            <a:off x="7708392" y="4517136"/>
+            <a:ext cx="3282696" cy="228600"/>
           </a:xfrm>
           <a:prstGeom prst="rect">
             <a:avLst/>
@@ -11708,7 +11712,7 @@
               <a:buNone/>
             </a:pPr>
             <a:r>
-              <a:rPr lang="en-US" sz="1300" b="1" dirty="0">
+              <a:rPr lang="en-US" sz="1220" b="1" dirty="0">
                 <a:solidFill>
                   <a:srgbClr val="0068B7"/>
                 </a:solidFill>
@@ -11718,7 +11722,7 @@
               </a:rPr>
               <a:t>What to produce</a:t>
             </a:r>
-            <a:endParaRPr lang="en-US" sz="1300" dirty="0"/>
+            <a:endParaRPr lang="en-US" sz="1220" dirty="0"/>
           </a:p>
         </p:txBody>
       </p:sp>
@@ -11730,8 +11734,8 @@
         </p:nvSpPr>
         <p:spPr>
           <a:xfrm>
-            <a:off x="7799832" y="4659782"/>
-            <a:ext cx="3145536" cy="899770"/>
+            <a:off x="7708392" y="4828032"/>
+            <a:ext cx="3282696" cy="749808"/>
           </a:xfrm>
           <a:prstGeom prst="rect">
             <a:avLst/>
@@ -11749,7 +11753,7 @@
               <a:buNone/>
             </a:pPr>
             <a:r>
-              <a:rPr lang="en-US" sz="1320" dirty="0">
+              <a:rPr lang="en-US" sz="1220" dirty="0">
                 <a:solidFill>
                   <a:srgbClr val="17364A"/>
                 </a:solidFill>
@@ -11757,9 +11761,9 @@
                 <a:ea typeface="Aptos" pitchFamily="34" charset="-122"/>
                 <a:cs typeface="Aptos" pitchFamily="34" charset="-120"/>
               </a:rPr>
-              <a:t>Use the assignment to test whether you can explain the concept, apply it to a realistic public health situation, and identify what would need review before the work moves forward.</a:t>
-            </a:r>
-            <a:endParaRPr lang="en-US" sz="1320" dirty="0"/>
+              <a:t>Use the assignment to test whether you can explain the concept, apply it to a.</a:t>
+            </a:r>
+            <a:endParaRPr lang="en-US" sz="1220" dirty="0"/>
           </a:p>
         </p:txBody>
       </p:sp>
@@ -12050,8 +12054,8 @@
         </p:nvSpPr>
         <p:spPr>
           <a:xfrm>
-            <a:off x="868680" y="1508760"/>
-            <a:ext cx="6309360" cy="4160520"/>
+            <a:off x="822960" y="1463040"/>
+            <a:ext cx="6565392" cy="4343400"/>
           </a:xfrm>
           <a:prstGeom prst="rect">
             <a:avLst/>
@@ -12069,7 +12073,7 @@
               <a:buNone/>
             </a:pPr>
             <a:r>
-              <a:rPr lang="en-US" sz="2100" dirty="0">
+              <a:rPr lang="en-US" sz="1920" dirty="0">
                 <a:solidFill>
                   <a:srgbClr val="003A63"/>
                 </a:solidFill>
@@ -12077,16 +12081,16 @@
                 <a:ea typeface="Aptos" pitchFamily="34" charset="-122"/>
                 <a:cs typeface="Aptos" pitchFamily="34" charset="-120"/>
               </a:rPr>
-              <a:t>• NIST AI Risk Management Framework: https://www.nist.gov/itl/ai-risk-management-framework</a:t>
-            </a:r>
-            <a:endParaRPr lang="en-US" sz="2100" dirty="0"/>
-          </a:p>
-          <a:p>
-            <a:pPr indent="0" marL="0">
-              <a:buNone/>
-            </a:pPr>
-            <a:r>
-              <a:rPr lang="en-US" sz="2100" dirty="0">
+              <a:t>• NIST AI Risk Management Framework:.</a:t>
+            </a:r>
+            <a:endParaRPr lang="en-US" sz="1920" dirty="0"/>
+          </a:p>
+          <a:p>
+            <a:pPr indent="0" marL="0">
+              <a:buNone/>
+            </a:pPr>
+            <a:r>
+              <a:rPr lang="en-US" sz="1920" dirty="0">
                 <a:solidFill>
                   <a:srgbClr val="003A63"/>
                 </a:solidFill>
@@ -12096,14 +12100,14 @@
               </a:rPr>
               <a:t>• NIST Cybersecurity Framework and cloud security guidance</a:t>
             </a:r>
-            <a:endParaRPr lang="en-US" sz="2100" dirty="0"/>
-          </a:p>
-          <a:p>
-            <a:pPr indent="0" marL="0">
-              <a:buNone/>
-            </a:pPr>
-            <a:r>
-              <a:rPr lang="en-US" sz="2100" dirty="0">
+            <a:endParaRPr lang="en-US" sz="1920" dirty="0"/>
+          </a:p>
+          <a:p>
+            <a:pPr indent="0" marL="0">
+              <a:buNone/>
+            </a:pPr>
+            <a:r>
+              <a:rPr lang="en-US" sz="1920" dirty="0">
                 <a:solidFill>
                   <a:srgbClr val="003A63"/>
                 </a:solidFill>
@@ -12113,7 +12117,7 @@
               </a:rPr>
               <a:t>• NIST Generative AI Profile:.</a:t>
             </a:r>
-            <a:endParaRPr lang="en-US" sz="2100" dirty="0"/>
+            <a:endParaRPr lang="en-US" sz="1920" dirty="0"/>
           </a:p>
         </p:txBody>
       </p:sp>
@@ -12125,12 +12129,12 @@
         </p:nvSpPr>
         <p:spPr>
           <a:xfrm>
-            <a:off x="7635240" y="1325880"/>
-            <a:ext cx="3474720" cy="1207008"/>
+            <a:off x="7543800" y="1325880"/>
+            <a:ext cx="3611880" cy="1261872"/>
           </a:xfrm>
           <a:prstGeom prst="roundRect">
             <a:avLst>
-              <a:gd name="adj" fmla="val 9091"/>
+              <a:gd name="adj" fmla="val 8696"/>
             </a:avLst>
           </a:prstGeom>
           <a:solidFill>
@@ -12152,8 +12156,8 @@
         </p:nvSpPr>
         <p:spPr>
           <a:xfrm>
-            <a:off x="7799832" y="1472184"/>
-            <a:ext cx="3145536" cy="256032"/>
+            <a:off x="7708392" y="1453896"/>
+            <a:ext cx="3282696" cy="228600"/>
           </a:xfrm>
           <a:prstGeom prst="rect">
             <a:avLst/>
@@ -12169,7 +12173,7 @@
               <a:buNone/>
             </a:pPr>
             <a:r>
-              <a:rPr lang="en-US" sz="1300" b="1" dirty="0">
+              <a:rPr lang="en-US" sz="1220" b="1" dirty="0">
                 <a:solidFill>
                   <a:srgbClr val="0068B7"/>
                 </a:solidFill>
@@ -12179,7 +12183,7 @@
               </a:rPr>
               <a:t>Core concept</a:t>
             </a:r>
-            <a:endParaRPr lang="en-US" sz="1300" dirty="0"/>
+            <a:endParaRPr lang="en-US" sz="1220" dirty="0"/>
           </a:p>
         </p:txBody>
       </p:sp>
@@ -12191,8 +12195,8 @@
         </p:nvSpPr>
         <p:spPr>
           <a:xfrm>
-            <a:off x="7799832" y="1801368"/>
-            <a:ext cx="3145536" cy="640080"/>
+            <a:off x="7708392" y="1764792"/>
+            <a:ext cx="3282696" cy="749808"/>
           </a:xfrm>
           <a:prstGeom prst="rect">
             <a:avLst/>
@@ -12210,7 +12214,7 @@
               <a:buNone/>
             </a:pPr>
             <a:r>
-              <a:rPr lang="en-US" sz="1320" dirty="0">
+              <a:rPr lang="en-US" sz="1220" dirty="0">
                 <a:solidFill>
                   <a:srgbClr val="17364A"/>
                 </a:solidFill>
@@ -12218,9 +12222,9 @@
                 <a:ea typeface="Aptos" pitchFamily="34" charset="-122"/>
                 <a:cs typeface="Aptos" pitchFamily="34" charset="-120"/>
               </a:rPr>
-              <a:t>NIST AI Risk Management Framework: https://www.nist.gov/itl/ai-risk-management-framework</a:t>
-            </a:r>
-            <a:endParaRPr lang="en-US" sz="1320" dirty="0"/>
+              <a:t>NIST AI Risk Management Framework:.</a:t>
+            </a:r>
+            <a:endParaRPr lang="en-US" sz="1220" dirty="0"/>
           </a:p>
         </p:txBody>
       </p:sp>
@@ -12232,12 +12236,12 @@
         </p:nvSpPr>
         <p:spPr>
           <a:xfrm>
-            <a:off x="7635240" y="2670048"/>
-            <a:ext cx="3474720" cy="1377086"/>
+            <a:off x="7543800" y="2724912"/>
+            <a:ext cx="3611880" cy="1527048"/>
           </a:xfrm>
           <a:prstGeom prst="roundRect">
             <a:avLst>
-              <a:gd name="adj" fmla="val 7968"/>
+              <a:gd name="adj" fmla="val 7186"/>
             </a:avLst>
           </a:prstGeom>
           <a:solidFill>
@@ -12259,8 +12263,8 @@
         </p:nvSpPr>
         <p:spPr>
           <a:xfrm>
-            <a:off x="7799832" y="2816352"/>
-            <a:ext cx="3145536" cy="256032"/>
+            <a:off x="7708392" y="2852928"/>
+            <a:ext cx="3282696" cy="228600"/>
           </a:xfrm>
           <a:prstGeom prst="rect">
             <a:avLst/>
@@ -12276,7 +12280,7 @@
               <a:buNone/>
             </a:pPr>
             <a:r>
-              <a:rPr lang="en-US" sz="1300" b="1" dirty="0">
+              <a:rPr lang="en-US" sz="1220" b="1" dirty="0">
                 <a:solidFill>
                   <a:srgbClr val="0068B7"/>
                 </a:solidFill>
@@ -12286,7 +12290,7 @@
               </a:rPr>
               <a:t>Concept checkpoints</a:t>
             </a:r>
-            <a:endParaRPr lang="en-US" sz="1300" dirty="0"/>
+            <a:endParaRPr lang="en-US" sz="1220" dirty="0"/>
           </a:p>
         </p:txBody>
       </p:sp>
@@ -12298,8 +12302,8 @@
         </p:nvSpPr>
         <p:spPr>
           <a:xfrm>
-            <a:off x="7818120" y="3182112"/>
-            <a:ext cx="3090672" cy="718718"/>
+            <a:off x="7726680" y="3182112"/>
+            <a:ext cx="3227832" cy="960120"/>
           </a:xfrm>
           <a:prstGeom prst="rect">
             <a:avLst/>
@@ -12317,7 +12321,7 @@
               <a:buNone/>
             </a:pPr>
             <a:r>
-              <a:rPr lang="en-US" sz="1220" dirty="0">
+              <a:rPr lang="en-US" sz="1140" dirty="0">
                 <a:solidFill>
                   <a:srgbClr val="17364A"/>
                 </a:solidFill>
@@ -12325,16 +12329,16 @@
                 <a:ea typeface="Aptos" pitchFamily="34" charset="-122"/>
                 <a:cs typeface="Aptos" pitchFamily="34" charset="-120"/>
               </a:rPr>
-              <a:t>CDC Public Health Data Strategy and Data Modernization resources:.</a:t>
-            </a:r>
-            <a:endParaRPr lang="en-US" sz="1220" dirty="0"/>
-          </a:p>
-          <a:p>
-            <a:pPr indent="0" marL="0">
-              <a:buNone/>
-            </a:pPr>
-            <a:r>
-              <a:rPr lang="en-US" sz="1220" dirty="0">
+              <a:t>CDC Public Health Data Strategy and Data.</a:t>
+            </a:r>
+            <a:endParaRPr lang="en-US" sz="1140" dirty="0"/>
+          </a:p>
+          <a:p>
+            <a:pPr indent="0" marL="0">
+              <a:buNone/>
+            </a:pPr>
+            <a:r>
+              <a:rPr lang="en-US" sz="1140" dirty="0">
                 <a:solidFill>
                   <a:srgbClr val="17364A"/>
                 </a:solidFill>
@@ -12342,9 +12346,9 @@
                 <a:ea typeface="Aptos" pitchFamily="34" charset="-122"/>
                 <a:cs typeface="Aptos" pitchFamily="34" charset="-120"/>
               </a:rPr>
-              <a:t>OWASP Top 10 for LLM Applications, when security or AI.</a:t>
-            </a:r>
-            <a:endParaRPr lang="en-US" sz="1220" dirty="0"/>
+              <a:t>OWASP Top 10 for LLM Applications, when security.</a:t>
+            </a:r>
+            <a:endParaRPr lang="en-US" sz="1140" dirty="0"/>
           </a:p>
         </p:txBody>
       </p:sp>
@@ -12356,12 +12360,12 @@
         </p:nvSpPr>
         <p:spPr>
           <a:xfrm>
-            <a:off x="7635240" y="4184294"/>
-            <a:ext cx="3474720" cy="1466698"/>
+            <a:off x="7543800" y="4389120"/>
+            <a:ext cx="3611880" cy="1261872"/>
           </a:xfrm>
           <a:prstGeom prst="roundRect">
             <a:avLst>
-              <a:gd name="adj" fmla="val 7481"/>
+              <a:gd name="adj" fmla="val 8696"/>
             </a:avLst>
           </a:prstGeom>
           <a:solidFill>
@@ -12383,8 +12387,8 @@
         </p:nvSpPr>
         <p:spPr>
           <a:xfrm>
-            <a:off x="7799832" y="4330598"/>
-            <a:ext cx="3145536" cy="256032"/>
+            <a:off x="7708392" y="4517136"/>
+            <a:ext cx="3282696" cy="228600"/>
           </a:xfrm>
           <a:prstGeom prst="rect">
             <a:avLst/>
@@ -12400,7 +12404,7 @@
               <a:buNone/>
             </a:pPr>
             <a:r>
-              <a:rPr lang="en-US" sz="1300" b="1" dirty="0">
+              <a:rPr lang="en-US" sz="1220" b="1" dirty="0">
                 <a:solidFill>
                   <a:srgbClr val="0068B7"/>
                 </a:solidFill>
@@ -12410,7 +12414,7 @@
               </a:rPr>
               <a:t>Apply it</a:t>
             </a:r>
-            <a:endParaRPr lang="en-US" sz="1300" dirty="0"/>
+            <a:endParaRPr lang="en-US" sz="1220" dirty="0"/>
           </a:p>
         </p:txBody>
       </p:sp>
@@ -12422,8 +12426,8 @@
         </p:nvSpPr>
         <p:spPr>
           <a:xfrm>
-            <a:off x="7799832" y="4659782"/>
-            <a:ext cx="3145536" cy="899770"/>
+            <a:off x="7708392" y="4828032"/>
+            <a:ext cx="3282696" cy="749808"/>
           </a:xfrm>
           <a:prstGeom prst="rect">
             <a:avLst/>
@@ -12441,7 +12445,7 @@
               <a:buNone/>
             </a:pPr>
             <a:r>
-              <a:rPr lang="en-US" sz="1320" dirty="0">
+              <a:rPr lang="en-US" sz="1220" dirty="0">
                 <a:solidFill>
                   <a:srgbClr val="17364A"/>
                 </a:solidFill>
@@ -12449,9 +12453,9 @@
                 <a:ea typeface="Aptos" pitchFamily="34" charset="-122"/>
                 <a:cs typeface="Aptos" pitchFamily="34" charset="-120"/>
               </a:rPr>
-              <a:t>Connect the concept to public health purpose, responsible use, required safeguards, documentation, and the next action a department should take.</a:t>
-            </a:r>
-            <a:endParaRPr lang="en-US" sz="1320" dirty="0"/>
+              <a:t>Connect the concept to public health purpose, responsible use, required.</a:t>
+            </a:r>
+            <a:endParaRPr lang="en-US" sz="1220" dirty="0"/>
           </a:p>
         </p:txBody>
       </p:sp>
@@ -12742,8 +12746,8 @@
         </p:nvSpPr>
         <p:spPr>
           <a:xfrm>
-            <a:off x="868680" y="1508760"/>
-            <a:ext cx="6309360" cy="4160520"/>
+            <a:off x="822960" y="1463040"/>
+            <a:ext cx="6565392" cy="4343400"/>
           </a:xfrm>
           <a:prstGeom prst="rect">
             <a:avLst/>
@@ -12761,7 +12765,7 @@
               <a:buNone/>
             </a:pPr>
             <a:r>
-              <a:rPr lang="en-US" sz="2100" dirty="0">
+              <a:rPr lang="en-US" sz="1920" dirty="0">
                 <a:solidFill>
                   <a:srgbClr val="003A63"/>
                 </a:solidFill>
@@ -12769,9 +12773,9 @@
                 <a:ea typeface="Aptos" pitchFamily="34" charset="-122"/>
                 <a:cs typeface="Aptos" pitchFamily="34" charset="-120"/>
               </a:rPr>
-              <a:t>• Agency privacy, cybersecurity, data governance, procurement, and records management policies</a:t>
-            </a:r>
-            <a:endParaRPr lang="en-US" sz="2100" dirty="0"/>
+              <a:t>• Agency privacy, cybersecurity, data governance, procurement, and records.</a:t>
+            </a:r>
+            <a:endParaRPr lang="en-US" sz="1920" dirty="0"/>
           </a:p>
         </p:txBody>
       </p:sp>
@@ -12783,12 +12787,12 @@
         </p:nvSpPr>
         <p:spPr>
           <a:xfrm>
-            <a:off x="7635240" y="1325880"/>
-            <a:ext cx="3474720" cy="1207008"/>
+            <a:off x="7543800" y="1325880"/>
+            <a:ext cx="3611880" cy="1261872"/>
           </a:xfrm>
           <a:prstGeom prst="roundRect">
             <a:avLst>
-              <a:gd name="adj" fmla="val 9091"/>
+              <a:gd name="adj" fmla="val 8696"/>
             </a:avLst>
           </a:prstGeom>
           <a:solidFill>
@@ -12810,8 +12814,8 @@
         </p:nvSpPr>
         <p:spPr>
           <a:xfrm>
-            <a:off x="7799832" y="1472184"/>
-            <a:ext cx="3145536" cy="256032"/>
+            <a:off x="7708392" y="1453896"/>
+            <a:ext cx="3282696" cy="228600"/>
           </a:xfrm>
           <a:prstGeom prst="rect">
             <a:avLst/>
@@ -12827,7 +12831,7 @@
               <a:buNone/>
             </a:pPr>
             <a:r>
-              <a:rPr lang="en-US" sz="1300" b="1" dirty="0">
+              <a:rPr lang="en-US" sz="1220" b="1" dirty="0">
                 <a:solidFill>
                   <a:srgbClr val="0068B7"/>
                 </a:solidFill>
@@ -12837,7 +12841,7 @@
               </a:rPr>
               <a:t>Core concept</a:t>
             </a:r>
-            <a:endParaRPr lang="en-US" sz="1300" dirty="0"/>
+            <a:endParaRPr lang="en-US" sz="1220" dirty="0"/>
           </a:p>
         </p:txBody>
       </p:sp>
@@ -12849,8 +12853,8 @@
         </p:nvSpPr>
         <p:spPr>
           <a:xfrm>
-            <a:off x="7799832" y="1801368"/>
-            <a:ext cx="3145536" cy="640080"/>
+            <a:off x="7708392" y="1764792"/>
+            <a:ext cx="3282696" cy="749808"/>
           </a:xfrm>
           <a:prstGeom prst="rect">
             <a:avLst/>
@@ -12868,7 +12872,7 @@
               <a:buNone/>
             </a:pPr>
             <a:r>
-              <a:rPr lang="en-US" sz="1320" dirty="0">
+              <a:rPr lang="en-US" sz="1220" dirty="0">
                 <a:solidFill>
                   <a:srgbClr val="17364A"/>
                 </a:solidFill>
@@ -12876,9 +12880,9 @@
                 <a:ea typeface="Aptos" pitchFamily="34" charset="-122"/>
                 <a:cs typeface="Aptos" pitchFamily="34" charset="-120"/>
               </a:rPr>
-              <a:t>Agency privacy, cybersecurity, data governance, procurement, and records management.</a:t>
-            </a:r>
-            <a:endParaRPr lang="en-US" sz="1320" dirty="0"/>
+              <a:t>Agency privacy, cybersecurity, data governance, procurement, and records.</a:t>
+            </a:r>
+            <a:endParaRPr lang="en-US" sz="1220" dirty="0"/>
           </a:p>
         </p:txBody>
       </p:sp>
@@ -12890,12 +12894,12 @@
         </p:nvSpPr>
         <p:spPr>
           <a:xfrm>
-            <a:off x="7635240" y="2670048"/>
-            <a:ext cx="3474720" cy="1377086"/>
+            <a:off x="7543800" y="2724912"/>
+            <a:ext cx="3611880" cy="1527048"/>
           </a:xfrm>
           <a:prstGeom prst="roundRect">
             <a:avLst>
-              <a:gd name="adj" fmla="val 7968"/>
+              <a:gd name="adj" fmla="val 7186"/>
             </a:avLst>
           </a:prstGeom>
           <a:solidFill>
@@ -12917,8 +12921,8 @@
         </p:nvSpPr>
         <p:spPr>
           <a:xfrm>
-            <a:off x="7799832" y="2816352"/>
-            <a:ext cx="3145536" cy="256032"/>
+            <a:off x="7708392" y="2852928"/>
+            <a:ext cx="3282696" cy="228600"/>
           </a:xfrm>
           <a:prstGeom prst="rect">
             <a:avLst/>
@@ -12934,7 +12938,7 @@
               <a:buNone/>
             </a:pPr>
             <a:r>
-              <a:rPr lang="en-US" sz="1300" b="1" dirty="0">
+              <a:rPr lang="en-US" sz="1220" b="1" dirty="0">
                 <a:solidFill>
                   <a:srgbClr val="0068B7"/>
                 </a:solidFill>
@@ -12944,7 +12948,7 @@
               </a:rPr>
               <a:t>Concept checkpoints</a:t>
             </a:r>
-            <a:endParaRPr lang="en-US" sz="1300" dirty="0"/>
+            <a:endParaRPr lang="en-US" sz="1220" dirty="0"/>
           </a:p>
         </p:txBody>
       </p:sp>
@@ -12956,8 +12960,8 @@
         </p:nvSpPr>
         <p:spPr>
           <a:xfrm>
-            <a:off x="7818120" y="3182112"/>
-            <a:ext cx="3090672" cy="718718"/>
+            <a:off x="7726680" y="3182112"/>
+            <a:ext cx="3227832" cy="960120"/>
           </a:xfrm>
           <a:prstGeom prst="rect">
             <a:avLst/>
@@ -12975,7 +12979,7 @@
               <a:buNone/>
             </a:pPr>
             <a:r>
-              <a:rPr lang="en-US" sz="1220" dirty="0">
+              <a:rPr lang="en-US" sz="1140" dirty="0">
                 <a:solidFill>
                   <a:srgbClr val="17364A"/>
                 </a:solidFill>
@@ -12983,9 +12987,9 @@
                 <a:ea typeface="Aptos" pitchFamily="34" charset="-122"/>
                 <a:cs typeface="Aptos" pitchFamily="34" charset="-120"/>
               </a:rPr>
-              <a:t>Agency privacy, cybersecurity, data governance, procurement, and.</a:t>
-            </a:r>
-            <a:endParaRPr lang="en-US" sz="1220" dirty="0"/>
+              <a:t>Agency privacy, cybersecurity, data governance,.</a:t>
+            </a:r>
+            <a:endParaRPr lang="en-US" sz="1140" dirty="0"/>
           </a:p>
         </p:txBody>
       </p:sp>
@@ -12997,12 +13001,12 @@
         </p:nvSpPr>
         <p:spPr>
           <a:xfrm>
-            <a:off x="7635240" y="4184294"/>
-            <a:ext cx="3474720" cy="1466698"/>
+            <a:off x="7543800" y="4389120"/>
+            <a:ext cx="3611880" cy="1261872"/>
           </a:xfrm>
           <a:prstGeom prst="roundRect">
             <a:avLst>
-              <a:gd name="adj" fmla="val 7481"/>
+              <a:gd name="adj" fmla="val 8696"/>
             </a:avLst>
           </a:prstGeom>
           <a:solidFill>
@@ -13024,8 +13028,8 @@
         </p:nvSpPr>
         <p:spPr>
           <a:xfrm>
-            <a:off x="7799832" y="4330598"/>
-            <a:ext cx="3145536" cy="256032"/>
+            <a:off x="7708392" y="4517136"/>
+            <a:ext cx="3282696" cy="228600"/>
           </a:xfrm>
           <a:prstGeom prst="rect">
             <a:avLst/>
@@ -13041,7 +13045,7 @@
               <a:buNone/>
             </a:pPr>
             <a:r>
-              <a:rPr lang="en-US" sz="1300" b="1" dirty="0">
+              <a:rPr lang="en-US" sz="1220" b="1" dirty="0">
                 <a:solidFill>
                   <a:srgbClr val="0068B7"/>
                 </a:solidFill>
@@ -13051,7 +13055,7 @@
               </a:rPr>
               <a:t>Apply it</a:t>
             </a:r>
-            <a:endParaRPr lang="en-US" sz="1300" dirty="0"/>
+            <a:endParaRPr lang="en-US" sz="1220" dirty="0"/>
           </a:p>
         </p:txBody>
       </p:sp>
@@ -13063,8 +13067,8 @@
         </p:nvSpPr>
         <p:spPr>
           <a:xfrm>
-            <a:off x="7799832" y="4659782"/>
-            <a:ext cx="3145536" cy="899770"/>
+            <a:off x="7708392" y="4828032"/>
+            <a:ext cx="3282696" cy="749808"/>
           </a:xfrm>
           <a:prstGeom prst="rect">
             <a:avLst/>
@@ -13082,7 +13086,7 @@
               <a:buNone/>
             </a:pPr>
             <a:r>
-              <a:rPr lang="en-US" sz="1320" dirty="0">
+              <a:rPr lang="en-US" sz="1220" dirty="0">
                 <a:solidFill>
                   <a:srgbClr val="17364A"/>
                 </a:solidFill>
@@ -13090,9 +13094,9 @@
                 <a:ea typeface="Aptos" pitchFamily="34" charset="-122"/>
                 <a:cs typeface="Aptos" pitchFamily="34" charset="-120"/>
               </a:rPr>
-              <a:t>Connect the concept to public health purpose, responsible use, required safeguards, documentation, and the next action a department should take.</a:t>
-            </a:r>
-            <a:endParaRPr lang="en-US" sz="1320" dirty="0"/>
+              <a:t>Connect the concept to public health purpose, responsible use, required.</a:t>
+            </a:r>
+            <a:endParaRPr lang="en-US" sz="1220" dirty="0"/>
           </a:p>
         </p:txBody>
       </p:sp>
@@ -13410,7 +13414,7 @@
                 <a:ea typeface="Aptos" pitchFamily="34" charset="-122"/>
                 <a:cs typeface="Aptos" pitchFamily="34" charset="-120"/>
               </a:rPr>
-              <a:t>• Play 11: Build and Deploy AI Solutions - This lesson informs Play 11 by helping learners.</a:t>
+              <a:t>• Play 11: Build and Deploy AI Solutions - This lesson informs Play 11 by.</a:t>
             </a:r>
             <a:endParaRPr lang="en-US" sz="1900" dirty="0"/>
           </a:p>
@@ -13427,7 +13431,7 @@
                 <a:ea typeface="Aptos" pitchFamily="34" charset="-122"/>
                 <a:cs typeface="Aptos" pitchFamily="34" charset="-120"/>
               </a:rPr>
-              <a:t>• Play 2: Readiness Assessment - This lesson informs Play 2 by helping learners connect the.</a:t>
+              <a:t>• Play 2: Readiness Assessment - This lesson informs Play 2 by helping.</a:t>
             </a:r>
             <a:endParaRPr lang="en-US" sz="1900" dirty="0"/>
           </a:p>
@@ -13444,7 +13448,7 @@
                 <a:ea typeface="Aptos" pitchFamily="34" charset="-122"/>
                 <a:cs typeface="Aptos" pitchFamily="34" charset="-120"/>
               </a:rPr>
-              <a:t>• Play 3: Establish AI Governance - This lesson informs Play 3 by helping learners connect the.</a:t>
+              <a:t>• Play 3: Establish AI Governance - This lesson informs Play 3 by helping.</a:t>
             </a:r>
             <a:endParaRPr lang="en-US" sz="1900" dirty="0"/>
           </a:p>
@@ -13461,7 +13465,7 @@
                 <a:ea typeface="Aptos" pitchFamily="34" charset="-122"/>
                 <a:cs typeface="Aptos" pitchFamily="34" charset="-120"/>
               </a:rPr>
-              <a:t>• Play 1: Vision &amp; Guardrails - This lesson informs Play 1 by helping learners connect the.</a:t>
+              <a:t>• Play 1: Vision &amp; Guardrails - This lesson informs Play 1 by helping learners.</a:t>
             </a:r>
             <a:endParaRPr lang="en-US" sz="1900" dirty="0"/>
           </a:p>
@@ -13502,8 +13506,8 @@
         </p:nvSpPr>
         <p:spPr>
           <a:xfrm>
-            <a:off x="8211312" y="1563624"/>
-            <a:ext cx="2734056" cy="256032"/>
+            <a:off x="8211312" y="1545336"/>
+            <a:ext cx="2734056" cy="228600"/>
           </a:xfrm>
           <a:prstGeom prst="rect">
             <a:avLst/>
@@ -13519,7 +13523,7 @@
               <a:buNone/>
             </a:pPr>
             <a:r>
-              <a:rPr lang="en-US" sz="1300" b="1" dirty="0">
+              <a:rPr lang="en-US" sz="1220" b="1" dirty="0">
                 <a:solidFill>
                   <a:srgbClr val="0068B7"/>
                 </a:solidFill>
@@ -13529,7 +13533,7 @@
               </a:rPr>
               <a:t>Apply the lesson</a:t>
             </a:r>
-            <a:endParaRPr lang="en-US" sz="1300" dirty="0"/>
+            <a:endParaRPr lang="en-US" sz="1220" dirty="0"/>
           </a:p>
         </p:txBody>
       </p:sp>
@@ -13541,8 +13545,8 @@
         </p:nvSpPr>
         <p:spPr>
           <a:xfrm>
-            <a:off x="8211312" y="1892808"/>
-            <a:ext cx="2734056" cy="1536192"/>
+            <a:off x="8211312" y="1856232"/>
+            <a:ext cx="2734056" cy="1591056"/>
           </a:xfrm>
           <a:prstGeom prst="rect">
             <a:avLst/>
@@ -13560,7 +13564,7 @@
               <a:buNone/>
             </a:pPr>
             <a:r>
-              <a:rPr lang="en-US" sz="1320" dirty="0">
+              <a:rPr lang="en-US" sz="1220" dirty="0">
                 <a:solidFill>
                   <a:srgbClr val="17364A"/>
                 </a:solidFill>
@@ -13568,9 +13572,9 @@
                 <a:ea typeface="Aptos" pitchFamily="34" charset="-122"/>
                 <a:cs typeface="Aptos" pitchFamily="34" charset="-120"/>
               </a:rPr>
-              <a:t>Use the related plays to identify decisions, participants, timing, approvals, and documentation needed for responsible implementation.</a:t>
-            </a:r>
-            <a:endParaRPr lang="en-US" sz="1320" dirty="0"/>
+              <a:t>Use the related plays to identify decisions, participants, timing, approvals,.</a:t>
+            </a:r>
+            <a:endParaRPr lang="en-US" sz="1220" dirty="0"/>
           </a:p>
         </p:txBody>
       </p:sp>
@@ -13609,8 +13613,8 @@
         </p:nvSpPr>
         <p:spPr>
           <a:xfrm>
-            <a:off x="8211312" y="3941064"/>
-            <a:ext cx="2734056" cy="256032"/>
+            <a:off x="8211312" y="3922776"/>
+            <a:ext cx="2734056" cy="228600"/>
           </a:xfrm>
           <a:prstGeom prst="rect">
             <a:avLst/>
@@ -13626,7 +13630,7 @@
               <a:buNone/>
             </a:pPr>
             <a:r>
-              <a:rPr lang="en-US" sz="1300" b="1" dirty="0">
+              <a:rPr lang="en-US" sz="1220" b="1" dirty="0">
                 <a:solidFill>
                   <a:srgbClr val="0068B7"/>
                 </a:solidFill>
@@ -13636,7 +13640,7 @@
               </a:rPr>
               <a:t>Use the play links to</a:t>
             </a:r>
-            <a:endParaRPr lang="en-US" sz="1300" dirty="0"/>
+            <a:endParaRPr lang="en-US" sz="1220" dirty="0"/>
           </a:p>
         </p:txBody>
       </p:sp>
@@ -13648,8 +13652,8 @@
         </p:nvSpPr>
         <p:spPr>
           <a:xfrm>
-            <a:off x="8229600" y="4306824"/>
-            <a:ext cx="2679192" cy="941832"/>
+            <a:off x="8229600" y="4251960"/>
+            <a:ext cx="2679192" cy="1033272"/>
           </a:xfrm>
           <a:prstGeom prst="rect">
             <a:avLst/>
@@ -13667,7 +13671,7 @@
               <a:buNone/>
             </a:pPr>
             <a:r>
-              <a:rPr lang="en-US" sz="1220" dirty="0">
+              <a:rPr lang="en-US" sz="1140" dirty="0">
                 <a:solidFill>
                   <a:srgbClr val="17364A"/>
                 </a:solidFill>
@@ -13677,14 +13681,14 @@
               </a:rPr>
               <a:t>Locate the decision point in the playbook sequence.</a:t>
             </a:r>
-            <a:endParaRPr lang="en-US" sz="1220" dirty="0"/>
-          </a:p>
-          <a:p>
-            <a:pPr indent="0" marL="0">
-              <a:buNone/>
-            </a:pPr>
-            <a:r>
-              <a:rPr lang="en-US" sz="1220" dirty="0">
+            <a:endParaRPr lang="en-US" sz="1140" dirty="0"/>
+          </a:p>
+          <a:p>
+            <a:pPr indent="0" marL="0">
+              <a:buNone/>
+            </a:pPr>
+            <a:r>
+              <a:rPr lang="en-US" sz="1140" dirty="0">
                 <a:solidFill>
                   <a:srgbClr val="17364A"/>
                 </a:solidFill>
@@ -13694,14 +13698,14 @@
               </a:rPr>
               <a:t>Identify who should participate in the work.</a:t>
             </a:r>
-            <a:endParaRPr lang="en-US" sz="1220" dirty="0"/>
-          </a:p>
-          <a:p>
-            <a:pPr indent="0" marL="0">
-              <a:buNone/>
-            </a:pPr>
-            <a:r>
-              <a:rPr lang="en-US" sz="1220" dirty="0">
+            <a:endParaRPr lang="en-US" sz="1140" dirty="0"/>
+          </a:p>
+          <a:p>
+            <a:pPr indent="0" marL="0">
+              <a:buNone/>
+            </a:pPr>
+            <a:r>
+              <a:rPr lang="en-US" sz="1140" dirty="0">
                 <a:solidFill>
                   <a:srgbClr val="17364A"/>
                 </a:solidFill>
@@ -13709,9 +13713,9 @@
                 <a:ea typeface="Aptos" pitchFamily="34" charset="-122"/>
                 <a:cs typeface="Aptos" pitchFamily="34" charset="-120"/>
               </a:rPr>
-              <a:t>Document the review, approval, or implementation step.</a:t>
-            </a:r>
-            <a:endParaRPr lang="en-US" sz="1220" dirty="0"/>
+              <a:t>Document the review, approval, or implementation.</a:t>
+            </a:r>
+            <a:endParaRPr lang="en-US" sz="1140" dirty="0"/>
           </a:p>
         </p:txBody>
       </p:sp>
@@ -14029,7 +14033,7 @@
                 <a:ea typeface="Aptos" pitchFamily="34" charset="-122"/>
                 <a:cs typeface="Aptos" pitchFamily="34" charset="-120"/>
               </a:rPr>
-              <a:t>• Tool 4: AI Policy Landscape Scan (Worksheet) - Use AI Policy Landscape Scan to translate this.</a:t>
+              <a:t>• Tool 4: AI Policy Landscape Scan (Worksheet) - Use AI Policy Landscape Scan.</a:t>
             </a:r>
             <a:endParaRPr lang="en-US" sz="1850" dirty="0"/>
           </a:p>
@@ -14046,7 +14050,7 @@
                 <a:ea typeface="Aptos" pitchFamily="34" charset="-122"/>
                 <a:cs typeface="Aptos" pitchFamily="34" charset="-120"/>
               </a:rPr>
-              <a:t>• Tool 5: AI Environmental and Resource Impact Review (Checklist) - Use this tool to complete or.</a:t>
+              <a:t>• Tool 5: AI Environmental and Resource Impact Review (Checklist) - Use this.</a:t>
             </a:r>
             <a:endParaRPr lang="en-US" sz="1850" dirty="0"/>
           </a:p>
@@ -14063,7 +14067,7 @@
                 <a:ea typeface="Aptos" pitchFamily="34" charset="-122"/>
                 <a:cs typeface="Aptos" pitchFamily="34" charset="-120"/>
               </a:rPr>
-              <a:t>• Tool 6: Human-Centered AI Decision Rule Checklist (Checklist) - Use Human-Centered AI Decision.</a:t>
+              <a:t>• Tool 6: Human-Centered AI Decision Rule Checklist (Checklist) - Use.</a:t>
             </a:r>
             <a:endParaRPr lang="en-US" sz="1850" dirty="0"/>
           </a:p>
@@ -14080,7 +14084,7 @@
                 <a:ea typeface="Aptos" pitchFamily="34" charset="-122"/>
                 <a:cs typeface="Aptos" pitchFamily="34" charset="-120"/>
               </a:rPr>
-              <a:t>• Tool 8: AI Project Charter (Planning) - Use AI Project Charter to translate this lesson into a.</a:t>
+              <a:t>• Tool 8: AI Project Charter (Planning) - Use AI Project Charter to translate.</a:t>
             </a:r>
             <a:endParaRPr lang="en-US" sz="1850" dirty="0"/>
           </a:p>
@@ -14121,8 +14125,8 @@
         </p:nvSpPr>
         <p:spPr>
           <a:xfrm>
-            <a:off x="8211312" y="1563624"/>
-            <a:ext cx="2734056" cy="256032"/>
+            <a:off x="8211312" y="1545336"/>
+            <a:ext cx="2734056" cy="228600"/>
           </a:xfrm>
           <a:prstGeom prst="rect">
             <a:avLst/>
@@ -14138,7 +14142,7 @@
               <a:buNone/>
             </a:pPr>
             <a:r>
-              <a:rPr lang="en-US" sz="1300" b="1" dirty="0">
+              <a:rPr lang="en-US" sz="1220" b="1" dirty="0">
                 <a:solidFill>
                   <a:srgbClr val="0068B7"/>
                 </a:solidFill>
@@ -14148,7 +14152,7 @@
               </a:rPr>
               <a:t>Use the tools</a:t>
             </a:r>
-            <a:endParaRPr lang="en-US" sz="1300" dirty="0"/>
+            <a:endParaRPr lang="en-US" sz="1220" dirty="0"/>
           </a:p>
         </p:txBody>
       </p:sp>
@@ -14160,8 +14164,8 @@
         </p:nvSpPr>
         <p:spPr>
           <a:xfrm>
-            <a:off x="8211312" y="1892808"/>
-            <a:ext cx="2734056" cy="1536192"/>
+            <a:off x="8211312" y="1856232"/>
+            <a:ext cx="2734056" cy="1591056"/>
           </a:xfrm>
           <a:prstGeom prst="rect">
             <a:avLst/>
@@ -14179,7 +14183,7 @@
               <a:buNone/>
             </a:pPr>
             <a:r>
-              <a:rPr lang="en-US" sz="1320" dirty="0">
+              <a:rPr lang="en-US" sz="1220" dirty="0">
                 <a:solidFill>
                   <a:srgbClr val="17364A"/>
                 </a:solidFill>
@@ -14187,9 +14191,9 @@
                 <a:ea typeface="Aptos" pitchFamily="34" charset="-122"/>
                 <a:cs typeface="Aptos" pitchFamily="34" charset="-120"/>
               </a:rPr>
-              <a:t>Use linked tools when your department needs a structured worksheet, template, checklist, review process, or documentation artifact.</a:t>
-            </a:r>
-            <a:endParaRPr lang="en-US" sz="1320" dirty="0"/>
+              <a:t>Use linked tools when your department needs a structured worksheet, template,.</a:t>
+            </a:r>
+            <a:endParaRPr lang="en-US" sz="1220" dirty="0"/>
           </a:p>
         </p:txBody>
       </p:sp>
@@ -14228,8 +14232,8 @@
         </p:nvSpPr>
         <p:spPr>
           <a:xfrm>
-            <a:off x="8211312" y="3941064"/>
-            <a:ext cx="2734056" cy="256032"/>
+            <a:off x="8211312" y="3922776"/>
+            <a:ext cx="2734056" cy="228600"/>
           </a:xfrm>
           <a:prstGeom prst="rect">
             <a:avLst/>
@@ -14245,7 +14249,7 @@
               <a:buNone/>
             </a:pPr>
             <a:r>
-              <a:rPr lang="en-US" sz="1300" b="1" dirty="0">
+              <a:rPr lang="en-US" sz="1220" b="1" dirty="0">
                 <a:solidFill>
                   <a:srgbClr val="0068B7"/>
                 </a:solidFill>
@@ -14255,7 +14259,7 @@
               </a:rPr>
               <a:t>Tool selection cues</a:t>
             </a:r>
-            <a:endParaRPr lang="en-US" sz="1300" dirty="0"/>
+            <a:endParaRPr lang="en-US" sz="1220" dirty="0"/>
           </a:p>
         </p:txBody>
       </p:sp>
@@ -14267,8 +14271,8 @@
         </p:nvSpPr>
         <p:spPr>
           <a:xfrm>
-            <a:off x="8229600" y="4306824"/>
-            <a:ext cx="2679192" cy="941832"/>
+            <a:off x="8229600" y="4251960"/>
+            <a:ext cx="2679192" cy="1033272"/>
           </a:xfrm>
           <a:prstGeom prst="rect">
             <a:avLst/>
@@ -14286,7 +14290,7 @@
               <a:buNone/>
             </a:pPr>
             <a:r>
-              <a:rPr lang="en-US" sz="1220" dirty="0">
+              <a:rPr lang="en-US" sz="1140" dirty="0">
                 <a:solidFill>
                   <a:srgbClr val="17364A"/>
                 </a:solidFill>
@@ -14296,14 +14300,14 @@
               </a:rPr>
               <a:t>Use a tool when no comparable local process exists.</a:t>
             </a:r>
-            <a:endParaRPr lang="en-US" sz="1220" dirty="0"/>
-          </a:p>
-          <a:p>
-            <a:pPr indent="0" marL="0">
-              <a:buNone/>
-            </a:pPr>
-            <a:r>
-              <a:rPr lang="en-US" sz="1220" dirty="0">
+            <a:endParaRPr lang="en-US" sz="1140" dirty="0"/>
+          </a:p>
+          <a:p>
+            <a:pPr indent="0" marL="0">
+              <a:buNone/>
+            </a:pPr>
+            <a:r>
+              <a:rPr lang="en-US" sz="1140" dirty="0">
                 <a:solidFill>
                   <a:srgbClr val="17364A"/>
                 </a:solidFill>
@@ -14311,16 +14315,16 @@
                 <a:ea typeface="Aptos" pitchFamily="34" charset="-122"/>
                 <a:cs typeface="Aptos" pitchFamily="34" charset="-120"/>
               </a:rPr>
-              <a:t>Adapt existing department templates when they already fit the.</a:t>
-            </a:r>
-            <a:endParaRPr lang="en-US" sz="1220" dirty="0"/>
-          </a:p>
-          <a:p>
-            <a:pPr indent="0" marL="0">
-              <a:buNone/>
-            </a:pPr>
-            <a:r>
-              <a:rPr lang="en-US" sz="1220" dirty="0">
+              <a:t>Adapt existing department templates when they.</a:t>
+            </a:r>
+            <a:endParaRPr lang="en-US" sz="1140" dirty="0"/>
+          </a:p>
+          <a:p>
+            <a:pPr indent="0" marL="0">
+              <a:buNone/>
+            </a:pPr>
+            <a:r>
+              <a:rPr lang="en-US" sz="1140" dirty="0">
                 <a:solidFill>
                   <a:srgbClr val="17364A"/>
                 </a:solidFill>
@@ -14328,9 +14332,9 @@
                 <a:ea typeface="Aptos" pitchFamily="34" charset="-122"/>
                 <a:cs typeface="Aptos" pitchFamily="34" charset="-120"/>
               </a:rPr>
-              <a:t>Save the completed artifact as evidence of the decision.</a:t>
-            </a:r>
-            <a:endParaRPr lang="en-US" sz="1220" dirty="0"/>
+              <a:t>Save the completed artifact as evidence of the.</a:t>
+            </a:r>
+            <a:endParaRPr lang="en-US" sz="1140" dirty="0"/>
           </a:p>
         </p:txBody>
       </p:sp>
@@ -14621,8 +14625,8 @@
         </p:nvSpPr>
         <p:spPr>
           <a:xfrm>
-            <a:off x="868680" y="1508760"/>
-            <a:ext cx="6309360" cy="4160520"/>
+            <a:off x="822960" y="1463040"/>
+            <a:ext cx="6565392" cy="4343400"/>
           </a:xfrm>
           <a:prstGeom prst="rect">
             <a:avLst/>
@@ -14640,7 +14644,7 @@
               <a:buNone/>
             </a:pPr>
             <a:r>
-              <a:rPr lang="en-US" sz="2100" dirty="0">
+              <a:rPr lang="en-US" sz="1920" dirty="0">
                 <a:solidFill>
                   <a:srgbClr val="003A63"/>
                 </a:solidFill>
@@ -14648,16 +14652,16 @@
                 <a:ea typeface="Aptos" pitchFamily="34" charset="-122"/>
                 <a:cs typeface="Aptos" pitchFamily="34" charset="-120"/>
               </a:rPr>
-              <a:t>• Explain the purpose of cloud, containers, and secure deployment basics in public health AI work.</a:t>
-            </a:r>
-            <a:endParaRPr lang="en-US" sz="2100" dirty="0"/>
-          </a:p>
-          <a:p>
-            <a:pPr indent="0" marL="0">
-              <a:buNone/>
-            </a:pPr>
-            <a:r>
-              <a:rPr lang="en-US" sz="2100" dirty="0">
+              <a:t>• Explain the purpose of cloud, containers, and secure deployment basics in.</a:t>
+            </a:r>
+            <a:endParaRPr lang="en-US" sz="1920" dirty="0"/>
+          </a:p>
+          <a:p>
+            <a:pPr indent="0" marL="0">
+              <a:buNone/>
+            </a:pPr>
+            <a:r>
+              <a:rPr lang="en-US" sz="1920" dirty="0">
                 <a:solidFill>
                   <a:srgbClr val="003A63"/>
                 </a:solidFill>
@@ -14665,16 +14669,16 @@
                 <a:ea typeface="Aptos" pitchFamily="34" charset="-122"/>
                 <a:cs typeface="Aptos" pitchFamily="34" charset="-120"/>
               </a:rPr>
-              <a:t>• Identify the technical, operational, privacy, security, equity, and governance issues.</a:t>
-            </a:r>
-            <a:endParaRPr lang="en-US" sz="2100" dirty="0"/>
-          </a:p>
-          <a:p>
-            <a:pPr indent="0" marL="0">
-              <a:buNone/>
-            </a:pPr>
-            <a:r>
-              <a:rPr lang="en-US" sz="2100" dirty="0">
+              <a:t>• Identify the technical, operational, privacy, security, equity, and.</a:t>
+            </a:r>
+            <a:endParaRPr lang="en-US" sz="1920" dirty="0"/>
+          </a:p>
+          <a:p>
+            <a:pPr indent="0" marL="0">
+              <a:buNone/>
+            </a:pPr>
+            <a:r>
+              <a:rPr lang="en-US" sz="1920" dirty="0">
                 <a:solidFill>
                   <a:srgbClr val="003A63"/>
                 </a:solidFill>
@@ -14682,9 +14686,9 @@
                 <a:ea typeface="Aptos" pitchFamily="34" charset="-122"/>
                 <a:cs typeface="Aptos" pitchFamily="34" charset="-120"/>
               </a:rPr>
-              <a:t>• Apply the topic to a real or realistic public health workflow, system, or implementation.</a:t>
-            </a:r>
-            <a:endParaRPr lang="en-US" sz="2100" dirty="0"/>
+              <a:t>• Apply the topic to a real or realistic public health workflow, system, or.</a:t>
+            </a:r>
+            <a:endParaRPr lang="en-US" sz="1920" dirty="0"/>
           </a:p>
         </p:txBody>
       </p:sp>
@@ -14696,12 +14700,12 @@
         </p:nvSpPr>
         <p:spPr>
           <a:xfrm>
-            <a:off x="7635240" y="1325880"/>
-            <a:ext cx="3474720" cy="1255471"/>
+            <a:off x="7543800" y="1325880"/>
+            <a:ext cx="3611880" cy="1261872"/>
           </a:xfrm>
           <a:prstGeom prst="roundRect">
             <a:avLst>
-              <a:gd name="adj" fmla="val 8740"/>
+              <a:gd name="adj" fmla="val 8696"/>
             </a:avLst>
           </a:prstGeom>
           <a:solidFill>
@@ -14723,8 +14727,8 @@
         </p:nvSpPr>
         <p:spPr>
           <a:xfrm>
-            <a:off x="7799832" y="1472184"/>
-            <a:ext cx="3145536" cy="256032"/>
+            <a:off x="7708392" y="1453896"/>
+            <a:ext cx="3282696" cy="228600"/>
           </a:xfrm>
           <a:prstGeom prst="rect">
             <a:avLst/>
@@ -14740,7 +14744,7 @@
               <a:buNone/>
             </a:pPr>
             <a:r>
-              <a:rPr lang="en-US" sz="1300" b="1" dirty="0">
+              <a:rPr lang="en-US" sz="1220" b="1" dirty="0">
                 <a:solidFill>
                   <a:srgbClr val="0068B7"/>
                 </a:solidFill>
@@ -14750,7 +14754,7 @@
               </a:rPr>
               <a:t>Practice focus</a:t>
             </a:r>
-            <a:endParaRPr lang="en-US" sz="1300" dirty="0"/>
+            <a:endParaRPr lang="en-US" sz="1220" dirty="0"/>
           </a:p>
         </p:txBody>
       </p:sp>
@@ -14762,8 +14766,8 @@
         </p:nvSpPr>
         <p:spPr>
           <a:xfrm>
-            <a:off x="7799832" y="1801368"/>
-            <a:ext cx="3145536" cy="688543"/>
+            <a:off x="7708392" y="1764792"/>
+            <a:ext cx="3282696" cy="749808"/>
           </a:xfrm>
           <a:prstGeom prst="rect">
             <a:avLst/>
@@ -14781,7 +14785,7 @@
               <a:buNone/>
             </a:pPr>
             <a:r>
-              <a:rPr lang="en-US" sz="1320" dirty="0">
+              <a:rPr lang="en-US" sz="1220" dirty="0">
                 <a:solidFill>
                   <a:srgbClr val="17364A"/>
                 </a:solidFill>
@@ -14789,9 +14793,9 @@
                 <a:ea typeface="Aptos" pitchFamily="34" charset="-122"/>
                 <a:cs typeface="Aptos" pitchFamily="34" charset="-120"/>
               </a:rPr>
-              <a:t>Explain the purpose of cloud, containers, and secure deployment basics in public health AI work.</a:t>
-            </a:r>
-            <a:endParaRPr lang="en-US" sz="1320" dirty="0"/>
+              <a:t>Explain the purpose of cloud, containers, and secure deployment basics in public.</a:t>
+            </a:r>
+            <a:endParaRPr lang="en-US" sz="1220" dirty="0"/>
           </a:p>
         </p:txBody>
       </p:sp>
@@ -14803,12 +14807,12 @@
         </p:nvSpPr>
         <p:spPr>
           <a:xfrm>
-            <a:off x="7635240" y="2718511"/>
-            <a:ext cx="3474720" cy="1328623"/>
+            <a:off x="7543800" y="2724912"/>
+            <a:ext cx="3611880" cy="1527048"/>
           </a:xfrm>
           <a:prstGeom prst="roundRect">
             <a:avLst>
-              <a:gd name="adj" fmla="val 8259"/>
+              <a:gd name="adj" fmla="val 7186"/>
             </a:avLst>
           </a:prstGeom>
           <a:solidFill>
@@ -14830,8 +14834,8 @@
         </p:nvSpPr>
         <p:spPr>
           <a:xfrm>
-            <a:off x="7799832" y="2864815"/>
-            <a:ext cx="3145536" cy="256032"/>
+            <a:off x="7708392" y="2852928"/>
+            <a:ext cx="3282696" cy="228600"/>
           </a:xfrm>
           <a:prstGeom prst="rect">
             <a:avLst/>
@@ -14847,7 +14851,7 @@
               <a:buNone/>
             </a:pPr>
             <a:r>
-              <a:rPr lang="en-US" sz="1300" b="1" dirty="0">
+              <a:rPr lang="en-US" sz="1220" b="1" dirty="0">
                 <a:solidFill>
                   <a:srgbClr val="0068B7"/>
                 </a:solidFill>
@@ -14857,7 +14861,7 @@
               </a:rPr>
               <a:t>Concept checkpoints</a:t>
             </a:r>
-            <a:endParaRPr lang="en-US" sz="1300" dirty="0"/>
+            <a:endParaRPr lang="en-US" sz="1220" dirty="0"/>
           </a:p>
         </p:txBody>
       </p:sp>
@@ -14869,8 +14873,8 @@
         </p:nvSpPr>
         <p:spPr>
           <a:xfrm>
-            <a:off x="7818120" y="3230575"/>
-            <a:ext cx="3090672" cy="670255"/>
+            <a:off x="7726680" y="3182112"/>
+            <a:ext cx="3227832" cy="960120"/>
           </a:xfrm>
           <a:prstGeom prst="rect">
             <a:avLst/>
@@ -14888,7 +14892,7 @@
               <a:buNone/>
             </a:pPr>
             <a:r>
-              <a:rPr lang="en-US" sz="1220" dirty="0">
+              <a:rPr lang="en-US" sz="1140" dirty="0">
                 <a:solidFill>
                   <a:srgbClr val="17364A"/>
                 </a:solidFill>
@@ -14896,16 +14900,16 @@
                 <a:ea typeface="Aptos" pitchFamily="34" charset="-122"/>
                 <a:cs typeface="Aptos" pitchFamily="34" charset="-120"/>
               </a:rPr>
-              <a:t>Identify the technical, operational, privacy, security, equity,.</a:t>
-            </a:r>
-            <a:endParaRPr lang="en-US" sz="1220" dirty="0"/>
-          </a:p>
-          <a:p>
-            <a:pPr indent="0" marL="0">
-              <a:buNone/>
-            </a:pPr>
-            <a:r>
-              <a:rPr lang="en-US" sz="1220" dirty="0">
+              <a:t>Identify the technical, operational, privacy,.</a:t>
+            </a:r>
+            <a:endParaRPr lang="en-US" sz="1140" dirty="0"/>
+          </a:p>
+          <a:p>
+            <a:pPr indent="0" marL="0">
+              <a:buNone/>
+            </a:pPr>
+            <a:r>
+              <a:rPr lang="en-US" sz="1140" dirty="0">
                 <a:solidFill>
                   <a:srgbClr val="17364A"/>
                 </a:solidFill>
@@ -14913,16 +14917,16 @@
                 <a:ea typeface="Aptos" pitchFamily="34" charset="-122"/>
                 <a:cs typeface="Aptos" pitchFamily="34" charset="-120"/>
               </a:rPr>
-              <a:t>Recognize common failure modes that can affect safety, accuracy,.</a:t>
-            </a:r>
-            <a:endParaRPr lang="en-US" sz="1220" dirty="0"/>
-          </a:p>
-          <a:p>
-            <a:pPr indent="0" marL="0">
-              <a:buNone/>
-            </a:pPr>
-            <a:r>
-              <a:rPr lang="en-US" sz="1220" dirty="0">
+              <a:t>Recognize common failure modes that can affect.</a:t>
+            </a:r>
+            <a:endParaRPr lang="en-US" sz="1140" dirty="0"/>
+          </a:p>
+          <a:p>
+            <a:pPr indent="0" marL="0">
+              <a:buNone/>
+            </a:pPr>
+            <a:r>
+              <a:rPr lang="en-US" sz="1140" dirty="0">
                 <a:solidFill>
                   <a:srgbClr val="17364A"/>
                 </a:solidFill>
@@ -14930,9 +14934,9 @@
                 <a:ea typeface="Aptos" pitchFamily="34" charset="-122"/>
                 <a:cs typeface="Aptos" pitchFamily="34" charset="-120"/>
               </a:rPr>
-              <a:t>Identify practical guardrails that should be documented before.</a:t>
-            </a:r>
-            <a:endParaRPr lang="en-US" sz="1220" dirty="0"/>
+              <a:t>Identify practical guardrails that should be.</a:t>
+            </a:r>
+            <a:endParaRPr lang="en-US" sz="1140" dirty="0"/>
           </a:p>
         </p:txBody>
       </p:sp>
@@ -14944,12 +14948,12 @@
         </p:nvSpPr>
         <p:spPr>
           <a:xfrm>
-            <a:off x="7635240" y="4184294"/>
-            <a:ext cx="3474720" cy="1466698"/>
+            <a:off x="7543800" y="4389120"/>
+            <a:ext cx="3611880" cy="1261872"/>
           </a:xfrm>
           <a:prstGeom prst="roundRect">
             <a:avLst>
-              <a:gd name="adj" fmla="val 7481"/>
+              <a:gd name="adj" fmla="val 8696"/>
             </a:avLst>
           </a:prstGeom>
           <a:solidFill>
@@ -14971,8 +14975,8 @@
         </p:nvSpPr>
         <p:spPr>
           <a:xfrm>
-            <a:off x="7799832" y="4330598"/>
-            <a:ext cx="3145536" cy="256032"/>
+            <a:off x="7708392" y="4517136"/>
+            <a:ext cx="3282696" cy="228600"/>
           </a:xfrm>
           <a:prstGeom prst="rect">
             <a:avLst/>
@@ -14988,7 +14992,7 @@
               <a:buNone/>
             </a:pPr>
             <a:r>
-              <a:rPr lang="en-US" sz="1300" b="1" dirty="0">
+              <a:rPr lang="en-US" sz="1220" b="1" dirty="0">
                 <a:solidFill>
                   <a:srgbClr val="0068B7"/>
                 </a:solidFill>
@@ -14998,7 +15002,7 @@
               </a:rPr>
               <a:t>What to produce</a:t>
             </a:r>
-            <a:endParaRPr lang="en-US" sz="1300" dirty="0"/>
+            <a:endParaRPr lang="en-US" sz="1220" dirty="0"/>
           </a:p>
         </p:txBody>
       </p:sp>
@@ -15010,8 +15014,8 @@
         </p:nvSpPr>
         <p:spPr>
           <a:xfrm>
-            <a:off x="7799832" y="4659782"/>
-            <a:ext cx="3145536" cy="899770"/>
+            <a:off x="7708392" y="4828032"/>
+            <a:ext cx="3282696" cy="749808"/>
           </a:xfrm>
           <a:prstGeom prst="rect">
             <a:avLst/>
@@ -15029,7 +15033,7 @@
               <a:buNone/>
             </a:pPr>
             <a:r>
-              <a:rPr lang="en-US" sz="1320" dirty="0">
+              <a:rPr lang="en-US" sz="1220" dirty="0">
                 <a:solidFill>
                   <a:srgbClr val="17364A"/>
                 </a:solidFill>
@@ -15037,9 +15041,9 @@
                 <a:ea typeface="Aptos" pitchFamily="34" charset="-122"/>
                 <a:cs typeface="Aptos" pitchFamily="34" charset="-120"/>
               </a:rPr>
-              <a:t>Use the assignment to test whether you can explain the concept, apply it to a realistic public health situation, and identify what would need review before the work moves forward.</a:t>
-            </a:r>
-            <a:endParaRPr lang="en-US" sz="1320" dirty="0"/>
+              <a:t>Use the assignment to test whether you can explain the concept, apply it to a.</a:t>
+            </a:r>
+            <a:endParaRPr lang="en-US" sz="1220" dirty="0"/>
           </a:p>
         </p:txBody>
       </p:sp>
@@ -15330,8 +15334,8 @@
         </p:nvSpPr>
         <p:spPr>
           <a:xfrm>
-            <a:off x="868680" y="1508760"/>
-            <a:ext cx="6309360" cy="4160520"/>
+            <a:off x="822960" y="1463040"/>
+            <a:ext cx="6565392" cy="4343400"/>
           </a:xfrm>
           <a:prstGeom prst="rect">
             <a:avLst/>
@@ -15349,7 +15353,7 @@
               <a:buNone/>
             </a:pPr>
             <a:r>
-              <a:rPr lang="en-US" sz="2100" dirty="0">
+              <a:rPr lang="en-US" sz="1920" dirty="0">
                 <a:solidFill>
                   <a:srgbClr val="003A63"/>
                 </a:solidFill>
@@ -15357,9 +15361,9 @@
                 <a:ea typeface="Aptos" pitchFamily="34" charset="-122"/>
                 <a:cs typeface="Aptos" pitchFamily="34" charset="-120"/>
               </a:rPr>
-              <a:t>• Produce a secure deployment readiness worksheet that can support readiness assessment,.</a:t>
-            </a:r>
-            <a:endParaRPr lang="en-US" sz="2100" dirty="0"/>
+              <a:t>• Produce a secure deployment readiness worksheet that can support readiness.</a:t>
+            </a:r>
+            <a:endParaRPr lang="en-US" sz="1920" dirty="0"/>
           </a:p>
         </p:txBody>
       </p:sp>
@@ -15371,12 +15375,12 @@
         </p:nvSpPr>
         <p:spPr>
           <a:xfrm>
-            <a:off x="7635240" y="1325880"/>
-            <a:ext cx="3474720" cy="1255471"/>
+            <a:off x="7543800" y="1325880"/>
+            <a:ext cx="3611880" cy="1261872"/>
           </a:xfrm>
           <a:prstGeom prst="roundRect">
             <a:avLst>
-              <a:gd name="adj" fmla="val 8740"/>
+              <a:gd name="adj" fmla="val 8696"/>
             </a:avLst>
           </a:prstGeom>
           <a:solidFill>
@@ -15398,8 +15402,8 @@
         </p:nvSpPr>
         <p:spPr>
           <a:xfrm>
-            <a:off x="7799832" y="1472184"/>
-            <a:ext cx="3145536" cy="256032"/>
+            <a:off x="7708392" y="1453896"/>
+            <a:ext cx="3282696" cy="228600"/>
           </a:xfrm>
           <a:prstGeom prst="rect">
             <a:avLst/>
@@ -15415,7 +15419,7 @@
               <a:buNone/>
             </a:pPr>
             <a:r>
-              <a:rPr lang="en-US" sz="1300" b="1" dirty="0">
+              <a:rPr lang="en-US" sz="1220" b="1" dirty="0">
                 <a:solidFill>
                   <a:srgbClr val="0068B7"/>
                 </a:solidFill>
@@ -15425,7 +15429,7 @@
               </a:rPr>
               <a:t>Practice focus</a:t>
             </a:r>
-            <a:endParaRPr lang="en-US" sz="1300" dirty="0"/>
+            <a:endParaRPr lang="en-US" sz="1220" dirty="0"/>
           </a:p>
         </p:txBody>
       </p:sp>
@@ -15437,8 +15441,8 @@
         </p:nvSpPr>
         <p:spPr>
           <a:xfrm>
-            <a:off x="7799832" y="1801368"/>
-            <a:ext cx="3145536" cy="688543"/>
+            <a:off x="7708392" y="1764792"/>
+            <a:ext cx="3282696" cy="749808"/>
           </a:xfrm>
           <a:prstGeom prst="rect">
             <a:avLst/>
@@ -15456,7 +15460,7 @@
               <a:buNone/>
             </a:pPr>
             <a:r>
-              <a:rPr lang="en-US" sz="1320" dirty="0">
+              <a:rPr lang="en-US" sz="1220" dirty="0">
                 <a:solidFill>
                   <a:srgbClr val="17364A"/>
                 </a:solidFill>
@@ -15464,9 +15468,9 @@
                 <a:ea typeface="Aptos" pitchFamily="34" charset="-122"/>
                 <a:cs typeface="Aptos" pitchFamily="34" charset="-120"/>
               </a:rPr>
-              <a:t>Produce a secure deployment readiness worksheet that can support readiness assessment, governance.</a:t>
-            </a:r>
-            <a:endParaRPr lang="en-US" sz="1320" dirty="0"/>
+              <a:t>Produce a secure deployment readiness worksheet that can support readiness.</a:t>
+            </a:r>
+            <a:endParaRPr lang="en-US" sz="1220" dirty="0"/>
           </a:p>
         </p:txBody>
       </p:sp>
@@ -15478,12 +15482,12 @@
         </p:nvSpPr>
         <p:spPr>
           <a:xfrm>
-            <a:off x="7635240" y="2718511"/>
-            <a:ext cx="3474720" cy="1328623"/>
+            <a:off x="7543800" y="2724912"/>
+            <a:ext cx="3611880" cy="1527048"/>
           </a:xfrm>
           <a:prstGeom prst="roundRect">
             <a:avLst>
-              <a:gd name="adj" fmla="val 8259"/>
+              <a:gd name="adj" fmla="val 7186"/>
             </a:avLst>
           </a:prstGeom>
           <a:solidFill>
@@ -15505,8 +15509,8 @@
         </p:nvSpPr>
         <p:spPr>
           <a:xfrm>
-            <a:off x="7799832" y="2864815"/>
-            <a:ext cx="3145536" cy="256032"/>
+            <a:off x="7708392" y="2852928"/>
+            <a:ext cx="3282696" cy="228600"/>
           </a:xfrm>
           <a:prstGeom prst="rect">
             <a:avLst/>
@@ -15522,7 +15526,7 @@
               <a:buNone/>
             </a:pPr>
             <a:r>
-              <a:rPr lang="en-US" sz="1300" b="1" dirty="0">
+              <a:rPr lang="en-US" sz="1220" b="1" dirty="0">
                 <a:solidFill>
                   <a:srgbClr val="0068B7"/>
                 </a:solidFill>
@@ -15532,7 +15536,7 @@
               </a:rPr>
               <a:t>Concept checkpoints</a:t>
             </a:r>
-            <a:endParaRPr lang="en-US" sz="1300" dirty="0"/>
+            <a:endParaRPr lang="en-US" sz="1220" dirty="0"/>
           </a:p>
         </p:txBody>
       </p:sp>
@@ -15544,8 +15548,8 @@
         </p:nvSpPr>
         <p:spPr>
           <a:xfrm>
-            <a:off x="7818120" y="3230575"/>
-            <a:ext cx="3090672" cy="670255"/>
+            <a:off x="7726680" y="3182112"/>
+            <a:ext cx="3227832" cy="960120"/>
           </a:xfrm>
           <a:prstGeom prst="rect">
             <a:avLst/>
@@ -15563,7 +15567,7 @@
               <a:buNone/>
             </a:pPr>
             <a:r>
-              <a:rPr lang="en-US" sz="1220" dirty="0">
+              <a:rPr lang="en-US" sz="1140" dirty="0">
                 <a:solidFill>
                   <a:srgbClr val="17364A"/>
                 </a:solidFill>
@@ -15571,9 +15575,9 @@
                 <a:ea typeface="Aptos" pitchFamily="34" charset="-122"/>
                 <a:cs typeface="Aptos" pitchFamily="34" charset="-120"/>
               </a:rPr>
-              <a:t>Produce a secure deployment readiness worksheet that can support.</a:t>
-            </a:r>
-            <a:endParaRPr lang="en-US" sz="1220" dirty="0"/>
+              <a:t>Produce a secure deployment readiness worksheet.</a:t>
+            </a:r>
+            <a:endParaRPr lang="en-US" sz="1140" dirty="0"/>
           </a:p>
         </p:txBody>
       </p:sp>
@@ -15585,12 +15589,12 @@
         </p:nvSpPr>
         <p:spPr>
           <a:xfrm>
-            <a:off x="7635240" y="4184294"/>
-            <a:ext cx="3474720" cy="1466698"/>
+            <a:off x="7543800" y="4389120"/>
+            <a:ext cx="3611880" cy="1261872"/>
           </a:xfrm>
           <a:prstGeom prst="roundRect">
             <a:avLst>
-              <a:gd name="adj" fmla="val 7481"/>
+              <a:gd name="adj" fmla="val 8696"/>
             </a:avLst>
           </a:prstGeom>
           <a:solidFill>
@@ -15612,8 +15616,8 @@
         </p:nvSpPr>
         <p:spPr>
           <a:xfrm>
-            <a:off x="7799832" y="4330598"/>
-            <a:ext cx="3145536" cy="256032"/>
+            <a:off x="7708392" y="4517136"/>
+            <a:ext cx="3282696" cy="228600"/>
           </a:xfrm>
           <a:prstGeom prst="rect">
             <a:avLst/>
@@ -15629,7 +15633,7 @@
               <a:buNone/>
             </a:pPr>
             <a:r>
-              <a:rPr lang="en-US" sz="1300" b="1" dirty="0">
+              <a:rPr lang="en-US" sz="1220" b="1" dirty="0">
                 <a:solidFill>
                   <a:srgbClr val="0068B7"/>
                 </a:solidFill>
@@ -15639,7 +15643,7 @@
               </a:rPr>
               <a:t>What to produce</a:t>
             </a:r>
-            <a:endParaRPr lang="en-US" sz="1300" dirty="0"/>
+            <a:endParaRPr lang="en-US" sz="1220" dirty="0"/>
           </a:p>
         </p:txBody>
       </p:sp>
@@ -15651,8 +15655,8 @@
         </p:nvSpPr>
         <p:spPr>
           <a:xfrm>
-            <a:off x="7799832" y="4659782"/>
-            <a:ext cx="3145536" cy="899770"/>
+            <a:off x="7708392" y="4828032"/>
+            <a:ext cx="3282696" cy="749808"/>
           </a:xfrm>
           <a:prstGeom prst="rect">
             <a:avLst/>
@@ -15670,7 +15674,7 @@
               <a:buNone/>
             </a:pPr>
             <a:r>
-              <a:rPr lang="en-US" sz="1320" dirty="0">
+              <a:rPr lang="en-US" sz="1220" dirty="0">
                 <a:solidFill>
                   <a:srgbClr val="17364A"/>
                 </a:solidFill>
@@ -15678,9 +15682,9 @@
                 <a:ea typeface="Aptos" pitchFamily="34" charset="-122"/>
                 <a:cs typeface="Aptos" pitchFamily="34" charset="-120"/>
               </a:rPr>
-              <a:t>Use the assignment to test whether you can explain the concept, apply it to a realistic public health situation, and identify what would need review before the work moves forward.</a:t>
-            </a:r>
-            <a:endParaRPr lang="en-US" sz="1320" dirty="0"/>
+              <a:t>Use the assignment to test whether you can explain the concept, apply it to a.</a:t>
+            </a:r>
+            <a:endParaRPr lang="en-US" sz="1220" dirty="0"/>
           </a:p>
         </p:txBody>
       </p:sp>
@@ -15971,8 +15975,8 @@
         </p:nvSpPr>
         <p:spPr>
           <a:xfrm>
-            <a:off x="868680" y="1508760"/>
-            <a:ext cx="6309360" cy="4160520"/>
+            <a:off x="822960" y="1463040"/>
+            <a:ext cx="6565392" cy="4343400"/>
           </a:xfrm>
           <a:prstGeom prst="rect">
             <a:avLst/>
@@ -15990,7 +15994,7 @@
               <a:buNone/>
             </a:pPr>
             <a:r>
-              <a:rPr lang="en-US" sz="2100" dirty="0">
+              <a:rPr lang="en-US" sz="1920" dirty="0">
                 <a:solidFill>
                   <a:srgbClr val="003A63"/>
                 </a:solidFill>
@@ -15998,16 +16002,16 @@
                 <a:ea typeface="Aptos" pitchFamily="34" charset="-122"/>
                 <a:cs typeface="Aptos" pitchFamily="34" charset="-120"/>
               </a:rPr>
-              <a:t>• Many AI tools are deployed in cloud environments or packaged in containers that make.</a:t>
-            </a:r>
-            <a:endParaRPr lang="en-US" sz="2100" dirty="0"/>
-          </a:p>
-          <a:p>
-            <a:pPr indent="0" marL="0">
-              <a:buNone/>
-            </a:pPr>
-            <a:r>
-              <a:rPr lang="en-US" sz="2100" dirty="0">
+              <a:t>• Many AI tools are deployed in cloud environments or packaged in containers.</a:t>
+            </a:r>
+            <a:endParaRPr lang="en-US" sz="1920" dirty="0"/>
+          </a:p>
+          <a:p>
+            <a:pPr indent="0" marL="0">
+              <a:buNone/>
+            </a:pPr>
+            <a:r>
+              <a:rPr lang="en-US" sz="1920" dirty="0">
                 <a:solidFill>
                   <a:srgbClr val="003A63"/>
                 </a:solidFill>
@@ -16015,16 +16019,16 @@
                 <a:ea typeface="Aptos" pitchFamily="34" charset="-122"/>
                 <a:cs typeface="Aptos" pitchFamily="34" charset="-120"/>
               </a:rPr>
-              <a:t>• Public health staff do not need to become cloud engineers, but they need enough technical.</a:t>
-            </a:r>
-            <a:endParaRPr lang="en-US" sz="2100" dirty="0"/>
-          </a:p>
-          <a:p>
-            <a:pPr indent="0" marL="0">
-              <a:buNone/>
-            </a:pPr>
-            <a:r>
-              <a:rPr lang="en-US" sz="2100" dirty="0">
+              <a:t>• Public health staff do not need to become cloud engineers, but they need.</a:t>
+            </a:r>
+            <a:endParaRPr lang="en-US" sz="1920" dirty="0"/>
+          </a:p>
+          <a:p>
+            <a:pPr indent="0" marL="0">
+              <a:buNone/>
+            </a:pPr>
+            <a:r>
+              <a:rPr lang="en-US" sz="1920" dirty="0">
                 <a:solidFill>
                   <a:srgbClr val="003A63"/>
                 </a:solidFill>
@@ -16032,9 +16036,9 @@
                 <a:ea typeface="Aptos" pitchFamily="34" charset="-122"/>
                 <a:cs typeface="Aptos" pitchFamily="34" charset="-120"/>
               </a:rPr>
-              <a:t>• This module connects deployment choices to public health continuity, privacy, cybersecurity,.</a:t>
-            </a:r>
-            <a:endParaRPr lang="en-US" sz="2100" dirty="0"/>
+              <a:t>• This module connects deployment choices to public health continuity,.</a:t>
+            </a:r>
+            <a:endParaRPr lang="en-US" sz="1920" dirty="0"/>
           </a:p>
         </p:txBody>
       </p:sp>
@@ -16046,12 +16050,12 @@
         </p:nvSpPr>
         <p:spPr>
           <a:xfrm>
-            <a:off x="7635240" y="1325880"/>
-            <a:ext cx="3474720" cy="1255471"/>
+            <a:off x="7543800" y="1325880"/>
+            <a:ext cx="3611880" cy="1261872"/>
           </a:xfrm>
           <a:prstGeom prst="roundRect">
             <a:avLst>
-              <a:gd name="adj" fmla="val 8740"/>
+              <a:gd name="adj" fmla="val 8696"/>
             </a:avLst>
           </a:prstGeom>
           <a:solidFill>
@@ -16073,8 +16077,8 @@
         </p:nvSpPr>
         <p:spPr>
           <a:xfrm>
-            <a:off x="7799832" y="1472184"/>
-            <a:ext cx="3145536" cy="256032"/>
+            <a:off x="7708392" y="1453896"/>
+            <a:ext cx="3282696" cy="228600"/>
           </a:xfrm>
           <a:prstGeom prst="rect">
             <a:avLst/>
@@ -16090,7 +16094,7 @@
               <a:buNone/>
             </a:pPr>
             <a:r>
-              <a:rPr lang="en-US" sz="1300" b="1" dirty="0">
+              <a:rPr lang="en-US" sz="1220" b="1" dirty="0">
                 <a:solidFill>
                   <a:srgbClr val="0068B7"/>
                 </a:solidFill>
@@ -16100,7 +16104,7 @@
               </a:rPr>
               <a:t>Core concept</a:t>
             </a:r>
-            <a:endParaRPr lang="en-US" sz="1300" dirty="0"/>
+            <a:endParaRPr lang="en-US" sz="1220" dirty="0"/>
           </a:p>
         </p:txBody>
       </p:sp>
@@ -16112,8 +16116,8 @@
         </p:nvSpPr>
         <p:spPr>
           <a:xfrm>
-            <a:off x="7799832" y="1801368"/>
-            <a:ext cx="3145536" cy="688543"/>
+            <a:off x="7708392" y="1764792"/>
+            <a:ext cx="3282696" cy="749808"/>
           </a:xfrm>
           <a:prstGeom prst="rect">
             <a:avLst/>
@@ -16131,7 +16135,7 @@
               <a:buNone/>
             </a:pPr>
             <a:r>
-              <a:rPr lang="en-US" sz="1320" dirty="0">
+              <a:rPr lang="en-US" sz="1220" dirty="0">
                 <a:solidFill>
                   <a:srgbClr val="17364A"/>
                 </a:solidFill>
@@ -16139,9 +16143,9 @@
                 <a:ea typeface="Aptos" pitchFamily="34" charset="-122"/>
                 <a:cs typeface="Aptos" pitchFamily="34" charset="-120"/>
               </a:rPr>
-              <a:t>Many AI tools are deployed in cloud environments or packaged in containers that make applications.</a:t>
-            </a:r>
-            <a:endParaRPr lang="en-US" sz="1320" dirty="0"/>
+              <a:t>Many AI tools are deployed in cloud environments or packaged in containers that.</a:t>
+            </a:r>
+            <a:endParaRPr lang="en-US" sz="1220" dirty="0"/>
           </a:p>
         </p:txBody>
       </p:sp>
@@ -16153,12 +16157,12 @@
         </p:nvSpPr>
         <p:spPr>
           <a:xfrm>
-            <a:off x="7635240" y="2718511"/>
-            <a:ext cx="3474720" cy="1328623"/>
+            <a:off x="7543800" y="2724912"/>
+            <a:ext cx="3611880" cy="1527048"/>
           </a:xfrm>
           <a:prstGeom prst="roundRect">
             <a:avLst>
-              <a:gd name="adj" fmla="val 8259"/>
+              <a:gd name="adj" fmla="val 7186"/>
             </a:avLst>
           </a:prstGeom>
           <a:solidFill>
@@ -16180,8 +16184,8 @@
         </p:nvSpPr>
         <p:spPr>
           <a:xfrm>
-            <a:off x="7799832" y="2864815"/>
-            <a:ext cx="3145536" cy="256032"/>
+            <a:off x="7708392" y="2852928"/>
+            <a:ext cx="3282696" cy="228600"/>
           </a:xfrm>
           <a:prstGeom prst="rect">
             <a:avLst/>
@@ -16197,7 +16201,7 @@
               <a:buNone/>
             </a:pPr>
             <a:r>
-              <a:rPr lang="en-US" sz="1300" b="1" dirty="0">
+              <a:rPr lang="en-US" sz="1220" b="1" dirty="0">
                 <a:solidFill>
                   <a:srgbClr val="0068B7"/>
                 </a:solidFill>
@@ -16207,7 +16211,7 @@
               </a:rPr>
               <a:t>Concept checkpoints</a:t>
             </a:r>
-            <a:endParaRPr lang="en-US" sz="1300" dirty="0"/>
+            <a:endParaRPr lang="en-US" sz="1220" dirty="0"/>
           </a:p>
         </p:txBody>
       </p:sp>
@@ -16219,8 +16223,8 @@
         </p:nvSpPr>
         <p:spPr>
           <a:xfrm>
-            <a:off x="7818120" y="3230575"/>
-            <a:ext cx="3090672" cy="670255"/>
+            <a:off x="7726680" y="3182112"/>
+            <a:ext cx="3227832" cy="960120"/>
           </a:xfrm>
           <a:prstGeom prst="rect">
             <a:avLst/>
@@ -16238,7 +16242,7 @@
               <a:buNone/>
             </a:pPr>
             <a:r>
-              <a:rPr lang="en-US" sz="1220" dirty="0">
+              <a:rPr lang="en-US" sz="1140" dirty="0">
                 <a:solidFill>
                   <a:srgbClr val="17364A"/>
                 </a:solidFill>
@@ -16246,16 +16250,16 @@
                 <a:ea typeface="Aptos" pitchFamily="34" charset="-122"/>
                 <a:cs typeface="Aptos" pitchFamily="34" charset="-120"/>
               </a:rPr>
-              <a:t>Many AI tools are deployed in cloud environments or packaged in.</a:t>
-            </a:r>
-            <a:endParaRPr lang="en-US" sz="1220" dirty="0"/>
-          </a:p>
-          <a:p>
-            <a:pPr indent="0" marL="0">
-              <a:buNone/>
-            </a:pPr>
-            <a:r>
-              <a:rPr lang="en-US" sz="1220" dirty="0">
+              <a:t>Many AI tools are deployed in cloud environments.</a:t>
+            </a:r>
+            <a:endParaRPr lang="en-US" sz="1140" dirty="0"/>
+          </a:p>
+          <a:p>
+            <a:pPr indent="0" marL="0">
+              <a:buNone/>
+            </a:pPr>
+            <a:r>
+              <a:rPr lang="en-US" sz="1140" dirty="0">
                 <a:solidFill>
                   <a:srgbClr val="17364A"/>
                 </a:solidFill>
@@ -16263,16 +16267,16 @@
                 <a:ea typeface="Aptos" pitchFamily="34" charset="-122"/>
                 <a:cs typeface="Aptos" pitchFamily="34" charset="-120"/>
               </a:rPr>
-              <a:t>Public health staff do not need to become cloud engineers, but.</a:t>
-            </a:r>
-            <a:endParaRPr lang="en-US" sz="1220" dirty="0"/>
-          </a:p>
-          <a:p>
-            <a:pPr indent="0" marL="0">
-              <a:buNone/>
-            </a:pPr>
-            <a:r>
-              <a:rPr lang="en-US" sz="1220" dirty="0">
+              <a:t>Public health staff do not need to become cloud.</a:t>
+            </a:r>
+            <a:endParaRPr lang="en-US" sz="1140" dirty="0"/>
+          </a:p>
+          <a:p>
+            <a:pPr indent="0" marL="0">
+              <a:buNone/>
+            </a:pPr>
+            <a:r>
+              <a:rPr lang="en-US" sz="1140" dirty="0">
                 <a:solidFill>
                   <a:srgbClr val="17364A"/>
                 </a:solidFill>
@@ -16280,9 +16284,9 @@
                 <a:ea typeface="Aptos" pitchFamily="34" charset="-122"/>
                 <a:cs typeface="Aptos" pitchFamily="34" charset="-120"/>
               </a:rPr>
-              <a:t>This module connects deployment choices to public health.</a:t>
-            </a:r>
-            <a:endParaRPr lang="en-US" sz="1220" dirty="0"/>
+              <a:t>This module connects deployment choices to public.</a:t>
+            </a:r>
+            <a:endParaRPr lang="en-US" sz="1140" dirty="0"/>
           </a:p>
         </p:txBody>
       </p:sp>
@@ -16294,12 +16298,12 @@
         </p:nvSpPr>
         <p:spPr>
           <a:xfrm>
-            <a:off x="7635240" y="4184294"/>
-            <a:ext cx="3474720" cy="1466698"/>
+            <a:off x="7543800" y="4389120"/>
+            <a:ext cx="3611880" cy="1261872"/>
           </a:xfrm>
           <a:prstGeom prst="roundRect">
             <a:avLst>
-              <a:gd name="adj" fmla="val 7481"/>
+              <a:gd name="adj" fmla="val 8696"/>
             </a:avLst>
           </a:prstGeom>
           <a:solidFill>
@@ -16321,8 +16325,8 @@
         </p:nvSpPr>
         <p:spPr>
           <a:xfrm>
-            <a:off x="7799832" y="4330598"/>
-            <a:ext cx="3145536" cy="256032"/>
+            <a:off x="7708392" y="4517136"/>
+            <a:ext cx="3282696" cy="228600"/>
           </a:xfrm>
           <a:prstGeom prst="rect">
             <a:avLst/>
@@ -16338,7 +16342,7 @@
               <a:buNone/>
             </a:pPr>
             <a:r>
-              <a:rPr lang="en-US" sz="1300" b="1" dirty="0">
+              <a:rPr lang="en-US" sz="1220" b="1" dirty="0">
                 <a:solidFill>
                   <a:srgbClr val="0068B7"/>
                 </a:solidFill>
@@ -16348,7 +16352,7 @@
               </a:rPr>
               <a:t>Apply it</a:t>
             </a:r>
-            <a:endParaRPr lang="en-US" sz="1300" dirty="0"/>
+            <a:endParaRPr lang="en-US" sz="1220" dirty="0"/>
           </a:p>
         </p:txBody>
       </p:sp>
@@ -16360,8 +16364,8 @@
         </p:nvSpPr>
         <p:spPr>
           <a:xfrm>
-            <a:off x="7799832" y="4659782"/>
-            <a:ext cx="3145536" cy="899770"/>
+            <a:off x="7708392" y="4828032"/>
+            <a:ext cx="3282696" cy="749808"/>
           </a:xfrm>
           <a:prstGeom prst="rect">
             <a:avLst/>
@@ -16379,7 +16383,7 @@
               <a:buNone/>
             </a:pPr>
             <a:r>
-              <a:rPr lang="en-US" sz="1320" dirty="0">
+              <a:rPr lang="en-US" sz="1220" dirty="0">
                 <a:solidFill>
                   <a:srgbClr val="17364A"/>
                 </a:solidFill>
@@ -16387,9 +16391,9 @@
                 <a:ea typeface="Aptos" pitchFamily="34" charset="-122"/>
                 <a:cs typeface="Aptos" pitchFamily="34" charset="-120"/>
               </a:rPr>
-              <a:t>Connect the concept to public health purpose, responsible use, required safeguards, documentation, and the next action a department should take.</a:t>
-            </a:r>
-            <a:endParaRPr lang="en-US" sz="1320" dirty="0"/>
+              <a:t>Connect the concept to public health purpose, responsible use, required.</a:t>
+            </a:r>
+            <a:endParaRPr lang="en-US" sz="1220" dirty="0"/>
           </a:p>
         </p:txBody>
       </p:sp>
@@ -16680,8 +16684,8 @@
         </p:nvSpPr>
         <p:spPr>
           <a:xfrm>
-            <a:off x="868680" y="1508760"/>
-            <a:ext cx="6309360" cy="4160520"/>
+            <a:off x="822960" y="1463040"/>
+            <a:ext cx="6565392" cy="4343400"/>
           </a:xfrm>
           <a:prstGeom prst="rect">
             <a:avLst/>
@@ -16699,7 +16703,7 @@
               <a:buNone/>
             </a:pPr>
             <a:r>
-              <a:rPr lang="en-US" sz="2100" dirty="0">
+              <a:rPr lang="en-US" sz="1920" dirty="0">
                 <a:solidFill>
                   <a:srgbClr val="003A63"/>
                 </a:solidFill>
@@ -16709,14 +16713,14 @@
               </a:rPr>
               <a:t>• This national-level module is intended for training and planning purposes.</a:t>
             </a:r>
-            <a:endParaRPr lang="en-US" sz="2100" dirty="0"/>
-          </a:p>
-          <a:p>
-            <a:pPr indent="0" marL="0">
-              <a:buNone/>
-            </a:pPr>
-            <a:r>
-              <a:rPr lang="en-US" sz="2100" dirty="0">
+            <a:endParaRPr lang="en-US" sz="1920" dirty="0"/>
+          </a:p>
+          <a:p>
+            <a:pPr indent="0" marL="0">
+              <a:buNone/>
+            </a:pPr>
+            <a:r>
+              <a:rPr lang="en-US" sz="1920" dirty="0">
                 <a:solidFill>
                   <a:srgbClr val="003A63"/>
                 </a:solidFill>
@@ -16724,16 +16728,16 @@
                 <a:ea typeface="Aptos" pitchFamily="34" charset="-122"/>
                 <a:cs typeface="Aptos" pitchFamily="34" charset="-120"/>
               </a:rPr>
-              <a:t>• It does not replace legal, privacy, procurement, civil rights, records, or agency policy review.</a:t>
-            </a:r>
-            <a:endParaRPr lang="en-US" sz="2100" dirty="0"/>
-          </a:p>
-          <a:p>
-            <a:pPr indent="0" marL="0">
-              <a:buNone/>
-            </a:pPr>
-            <a:r>
-              <a:rPr lang="en-US" sz="2100" dirty="0">
+              <a:t>• It does not replace legal, privacy, procurement, civil rights, records, or.</a:t>
+            </a:r>
+            <a:endParaRPr lang="en-US" sz="1920" dirty="0"/>
+          </a:p>
+          <a:p>
+            <a:pPr indent="0" marL="0">
+              <a:buNone/>
+            </a:pPr>
+            <a:r>
+              <a:rPr lang="en-US" sz="1920" dirty="0">
                 <a:solidFill>
                   <a:srgbClr val="003A63"/>
                 </a:solidFill>
@@ -16741,9 +16745,9 @@
                 <a:ea typeface="Aptos" pitchFamily="34" charset="-122"/>
                 <a:cs typeface="Aptos" pitchFamily="34" charset="-120"/>
               </a:rPr>
-              <a:t>• Learners should confirm applicable requirements in their own jurisdiction and organization.</a:t>
-            </a:r>
-            <a:endParaRPr lang="en-US" sz="2100" dirty="0"/>
+              <a:t>• Learners should confirm applicable requirements in their own jurisdiction.</a:t>
+            </a:r>
+            <a:endParaRPr lang="en-US" sz="1920" dirty="0"/>
           </a:p>
         </p:txBody>
       </p:sp>
@@ -16755,12 +16759,12 @@
         </p:nvSpPr>
         <p:spPr>
           <a:xfrm>
-            <a:off x="7635240" y="1325880"/>
-            <a:ext cx="3474720" cy="1207008"/>
+            <a:off x="7543800" y="1325880"/>
+            <a:ext cx="3611880" cy="1261872"/>
           </a:xfrm>
           <a:prstGeom prst="roundRect">
             <a:avLst>
-              <a:gd name="adj" fmla="val 9091"/>
+              <a:gd name="adj" fmla="val 8696"/>
             </a:avLst>
           </a:prstGeom>
           <a:solidFill>
@@ -16782,8 +16786,8 @@
         </p:nvSpPr>
         <p:spPr>
           <a:xfrm>
-            <a:off x="7799832" y="1472184"/>
-            <a:ext cx="3145536" cy="256032"/>
+            <a:off x="7708392" y="1453896"/>
+            <a:ext cx="3282696" cy="228600"/>
           </a:xfrm>
           <a:prstGeom prst="rect">
             <a:avLst/>
@@ -16799,7 +16803,7 @@
               <a:buNone/>
             </a:pPr>
             <a:r>
-              <a:rPr lang="en-US" sz="1300" b="1" dirty="0">
+              <a:rPr lang="en-US" sz="1220" b="1" dirty="0">
                 <a:solidFill>
                   <a:srgbClr val="0068B7"/>
                 </a:solidFill>
@@ -16809,7 +16813,7 @@
               </a:rPr>
               <a:t>Governance lens</a:t>
             </a:r>
-            <a:endParaRPr lang="en-US" sz="1300" dirty="0"/>
+            <a:endParaRPr lang="en-US" sz="1220" dirty="0"/>
           </a:p>
         </p:txBody>
       </p:sp>
@@ -16821,8 +16825,8 @@
         </p:nvSpPr>
         <p:spPr>
           <a:xfrm>
-            <a:off x="7799832" y="1801368"/>
-            <a:ext cx="3145536" cy="640080"/>
+            <a:off x="7708392" y="1764792"/>
+            <a:ext cx="3282696" cy="749808"/>
           </a:xfrm>
           <a:prstGeom prst="rect">
             <a:avLst/>
@@ -16840,7 +16844,7 @@
               <a:buNone/>
             </a:pPr>
             <a:r>
-              <a:rPr lang="en-US" sz="1320" dirty="0">
+              <a:rPr lang="en-US" sz="1220" dirty="0">
                 <a:solidFill>
                   <a:srgbClr val="17364A"/>
                 </a:solidFill>
@@ -16850,7 +16854,7 @@
               </a:rPr>
               <a:t>This national-level module is intended for training and planning purposes.</a:t>
             </a:r>
-            <a:endParaRPr lang="en-US" sz="1320" dirty="0"/>
+            <a:endParaRPr lang="en-US" sz="1220" dirty="0"/>
           </a:p>
         </p:txBody>
       </p:sp>
@@ -16862,12 +16866,12 @@
         </p:nvSpPr>
         <p:spPr>
           <a:xfrm>
-            <a:off x="7635240" y="2670048"/>
-            <a:ext cx="3474720" cy="1377086"/>
+            <a:off x="7543800" y="2724912"/>
+            <a:ext cx="3611880" cy="1527048"/>
           </a:xfrm>
           <a:prstGeom prst="roundRect">
             <a:avLst>
-              <a:gd name="adj" fmla="val 7968"/>
+              <a:gd name="adj" fmla="val 7186"/>
             </a:avLst>
           </a:prstGeom>
           <a:solidFill>
@@ -16889,24 +16893,26 @@
         </p:nvSpPr>
         <p:spPr>
           <a:xfrm>
-            <a:off x="7799832" y="2798064"/>
-            <a:ext cx="3145536" cy="237744"/>
-          </a:xfrm>
-          <a:prstGeom prst="rect">
-            <a:avLst/>
-          </a:prstGeom>
-          <a:noFill/>
-          <a:ln/>
-        </p:spPr>
-        <p:txBody>
-          <a:bodyPr wrap="square" lIns="0" tIns="0" rIns="0" bIns="0" rtlCol="0" anchor="ctr"/>
-          <a:lstStyle/>
-          <a:p>
-            <a:pPr indent="0" marL="0">
-              <a:buNone/>
-            </a:pPr>
-            <a:r>
-              <a:rPr lang="en-US" sz="1250" b="1" dirty="0">
+            <a:off x="7708392" y="2852928"/>
+            <a:ext cx="3282696" cy="219456"/>
+          </a:xfrm>
+          <a:prstGeom prst="rect">
+            <a:avLst/>
+          </a:prstGeom>
+          <a:noFill/>
+          <a:ln/>
+        </p:spPr>
+        <p:txBody>
+          <a:bodyPr wrap="square" lIns="0" tIns="0" rIns="0" bIns="0" rtlCol="0" anchor="ctr">
+            <a:normAutofit/>
+          </a:bodyPr>
+          <a:lstStyle/>
+          <a:p>
+            <a:pPr indent="0" marL="0">
+              <a:buNone/>
+            </a:pPr>
+            <a:r>
+              <a:rPr lang="en-US" sz="1160" b="1" dirty="0">
                 <a:solidFill>
                   <a:srgbClr val="0068B7"/>
                 </a:solidFill>
@@ -16916,7 +16922,7 @@
               </a:rPr>
               <a:t>Governance pathway</a:t>
             </a:r>
-            <a:endParaRPr lang="en-US" sz="1250" dirty="0"/>
+            <a:endParaRPr lang="en-US" sz="1160" dirty="0"/>
           </a:p>
         </p:txBody>
       </p:sp>
@@ -16928,7 +16934,7 @@
         </p:nvSpPr>
         <p:spPr>
           <a:xfrm>
-            <a:off x="8763000" y="3351276"/>
+            <a:off x="8717280" y="3406140"/>
             <a:ext cx="164592" cy="0"/>
           </a:xfrm>
           <a:prstGeom prst="line">
@@ -16951,8 +16957,8 @@
         </p:nvSpPr>
         <p:spPr>
           <a:xfrm>
-            <a:off x="7872984" y="3200400"/>
-            <a:ext cx="890016" cy="301752"/>
+            <a:off x="7781544" y="3255264"/>
+            <a:ext cx="935736" cy="301752"/>
           </a:xfrm>
           <a:prstGeom prst="roundRect">
             <a:avLst>
@@ -16978,8 +16984,8 @@
         </p:nvSpPr>
         <p:spPr>
           <a:xfrm>
-            <a:off x="7909560" y="3273552"/>
-            <a:ext cx="816864" cy="146304"/>
+            <a:off x="7818120" y="3328416"/>
+            <a:ext cx="862584" cy="146304"/>
           </a:xfrm>
           <a:prstGeom prst="rect">
             <a:avLst/>
@@ -17019,7 +17025,7 @@
         </p:nvSpPr>
         <p:spPr>
           <a:xfrm>
-            <a:off x="9817608" y="3351276"/>
+            <a:off x="9817608" y="3406140"/>
             <a:ext cx="164592" cy="0"/>
           </a:xfrm>
           <a:prstGeom prst="line">
@@ -17042,8 +17048,8 @@
         </p:nvSpPr>
         <p:spPr>
           <a:xfrm>
-            <a:off x="8927592" y="3200400"/>
-            <a:ext cx="890016" cy="301752"/>
+            <a:off x="8881872" y="3255264"/>
+            <a:ext cx="935736" cy="301752"/>
           </a:xfrm>
           <a:prstGeom prst="roundRect">
             <a:avLst>
@@ -17069,8 +17075,8 @@
         </p:nvSpPr>
         <p:spPr>
           <a:xfrm>
-            <a:off x="8964168" y="3273552"/>
-            <a:ext cx="816864" cy="146304"/>
+            <a:off x="8918448" y="3328416"/>
+            <a:ext cx="862584" cy="146304"/>
           </a:xfrm>
           <a:prstGeom prst="rect">
             <a:avLst/>
@@ -17110,8 +17116,8 @@
         </p:nvSpPr>
         <p:spPr>
           <a:xfrm>
-            <a:off x="9982200" y="3200400"/>
-            <a:ext cx="890016" cy="301752"/>
+            <a:off x="9982200" y="3255264"/>
+            <a:ext cx="935736" cy="301752"/>
           </a:xfrm>
           <a:prstGeom prst="roundRect">
             <a:avLst>
@@ -17137,8 +17143,8 @@
         </p:nvSpPr>
         <p:spPr>
           <a:xfrm>
-            <a:off x="10018776" y="3273552"/>
-            <a:ext cx="816864" cy="146304"/>
+            <a:off x="10018776" y="3328416"/>
+            <a:ext cx="862584" cy="146304"/>
           </a:xfrm>
           <a:prstGeom prst="rect">
             <a:avLst/>
@@ -17178,8 +17184,8 @@
         </p:nvSpPr>
         <p:spPr>
           <a:xfrm>
-            <a:off x="7854696" y="3694176"/>
-            <a:ext cx="3035808" cy="206654"/>
+            <a:off x="7763256" y="3749040"/>
+            <a:ext cx="3172968" cy="356616"/>
           </a:xfrm>
           <a:prstGeom prst="rect">
             <a:avLst/>
@@ -17197,7 +17203,7 @@
               <a:buNone/>
             </a:pPr>
             <a:r>
-              <a:rPr lang="en-US" sz="1120" dirty="0">
+              <a:rPr lang="en-US" sz="1040" dirty="0">
                 <a:solidFill>
                   <a:srgbClr val="17364A"/>
                 </a:solidFill>
@@ -17205,9 +17211,9 @@
                 <a:ea typeface="Aptos" pitchFamily="34" charset="-122"/>
                 <a:cs typeface="Aptos" pitchFamily="34" charset="-120"/>
               </a:rPr>
-              <a:t>A proposed AI use should move through documented review before it becomes an operational workflow.</a:t>
-            </a:r>
-            <a:endParaRPr lang="en-US" sz="1120" dirty="0"/>
+              <a:t>A proposed AI use should move through documented review before it.</a:t>
+            </a:r>
+            <a:endParaRPr lang="en-US" sz="1040" dirty="0"/>
           </a:p>
         </p:txBody>
       </p:sp>
@@ -17219,12 +17225,12 @@
         </p:nvSpPr>
         <p:spPr>
           <a:xfrm>
-            <a:off x="7635240" y="4184294"/>
-            <a:ext cx="3474720" cy="1466698"/>
+            <a:off x="7543800" y="4389120"/>
+            <a:ext cx="3611880" cy="1261872"/>
           </a:xfrm>
           <a:prstGeom prst="roundRect">
             <a:avLst>
-              <a:gd name="adj" fmla="val 7481"/>
+              <a:gd name="adj" fmla="val 8696"/>
             </a:avLst>
           </a:prstGeom>
           <a:solidFill>
@@ -17246,8 +17252,8 @@
         </p:nvSpPr>
         <p:spPr>
           <a:xfrm>
-            <a:off x="7799832" y="4330598"/>
-            <a:ext cx="3145536" cy="256032"/>
+            <a:off x="7708392" y="4517136"/>
+            <a:ext cx="3282696" cy="228600"/>
           </a:xfrm>
           <a:prstGeom prst="rect">
             <a:avLst/>
@@ -17263,7 +17269,7 @@
               <a:buNone/>
             </a:pPr>
             <a:r>
-              <a:rPr lang="en-US" sz="1300" b="1" dirty="0">
+              <a:rPr lang="en-US" sz="1220" b="1" dirty="0">
                 <a:solidFill>
                   <a:srgbClr val="0068B7"/>
                 </a:solidFill>
@@ -17273,7 +17279,7 @@
               </a:rPr>
               <a:t>What to document</a:t>
             </a:r>
-            <a:endParaRPr lang="en-US" sz="1300" dirty="0"/>
+            <a:endParaRPr lang="en-US" sz="1220" dirty="0"/>
           </a:p>
         </p:txBody>
       </p:sp>
@@ -17285,8 +17291,8 @@
         </p:nvSpPr>
         <p:spPr>
           <a:xfrm>
-            <a:off x="7799832" y="4659782"/>
-            <a:ext cx="3145536" cy="899770"/>
+            <a:off x="7708392" y="4828032"/>
+            <a:ext cx="3282696" cy="749808"/>
           </a:xfrm>
           <a:prstGeom prst="rect">
             <a:avLst/>
@@ -17304,7 +17310,7 @@
               <a:buNone/>
             </a:pPr>
             <a:r>
-              <a:rPr lang="en-US" sz="1320" dirty="0">
+              <a:rPr lang="en-US" sz="1220" dirty="0">
                 <a:solidFill>
                   <a:srgbClr val="17364A"/>
                 </a:solidFill>
@@ -17312,9 +17318,9 @@
                 <a:ea typeface="Aptos" pitchFamily="34" charset="-122"/>
                 <a:cs typeface="Aptos" pitchFamily="34" charset="-120"/>
               </a:rPr>
-              <a:t>Translate this concept into clear decision rights, review steps, documentation expectations, and escalation paths before an AI-supported workflow is approved.</a:t>
-            </a:r>
-            <a:endParaRPr lang="en-US" sz="1320" dirty="0"/>
+              <a:t>Translate this concept into clear decision rights, review steps, documentation.</a:t>
+            </a:r>
+            <a:endParaRPr lang="en-US" sz="1220" dirty="0"/>
           </a:p>
         </p:txBody>
       </p:sp>
@@ -17605,8 +17611,8 @@
         </p:nvSpPr>
         <p:spPr>
           <a:xfrm>
-            <a:off x="868680" y="1508760"/>
-            <a:ext cx="6309360" cy="4160520"/>
+            <a:off x="822960" y="1463040"/>
+            <a:ext cx="6565392" cy="4343400"/>
           </a:xfrm>
           <a:prstGeom prst="rect">
             <a:avLst/>
@@ -17624,7 +17630,7 @@
               <a:buNone/>
             </a:pPr>
             <a:r>
-              <a:rPr lang="en-US" sz="2100" dirty="0">
+              <a:rPr lang="en-US" sz="1920" dirty="0">
                 <a:solidFill>
                   <a:srgbClr val="003A63"/>
                 </a:solidFill>
@@ -17632,16 +17638,16 @@
                 <a:ea typeface="Aptos" pitchFamily="34" charset="-122"/>
                 <a:cs typeface="Aptos" pitchFamily="34" charset="-120"/>
               </a:rPr>
-              <a:t>• Cloud, Containers, and Secure Deployment Basics matters because AI systems are embedded in.</a:t>
-            </a:r>
-            <a:endParaRPr lang="en-US" sz="2100" dirty="0"/>
-          </a:p>
-          <a:p>
-            <a:pPr indent="0" marL="0">
-              <a:buNone/>
-            </a:pPr>
-            <a:r>
-              <a:rPr lang="en-US" sz="2100" dirty="0">
+              <a:t>• Cloud, Containers, and Secure Deployment Basics matters because AI systems.</a:t>
+            </a:r>
+            <a:endParaRPr lang="en-US" sz="1920" dirty="0"/>
+          </a:p>
+          <a:p>
+            <a:pPr indent="0" marL="0">
+              <a:buNone/>
+            </a:pPr>
+            <a:r>
+              <a:rPr lang="en-US" sz="1920" dirty="0">
                 <a:solidFill>
                   <a:srgbClr val="003A63"/>
                 </a:solidFill>
@@ -17649,16 +17655,16 @@
                 <a:ea typeface="Aptos" pitchFamily="34" charset="-122"/>
                 <a:cs typeface="Aptos" pitchFamily="34" charset="-120"/>
               </a:rPr>
-              <a:t>• The topic affects whether AI outputs are accurate, explainable, safe, equitable, secure, and.</a:t>
-            </a:r>
-            <a:endParaRPr lang="en-US" sz="2100" dirty="0"/>
-          </a:p>
-          <a:p>
-            <a:pPr indent="0" marL="0">
-              <a:buNone/>
-            </a:pPr>
-            <a:r>
-              <a:rPr lang="en-US" sz="2100" dirty="0">
+              <a:t>• The topic affects whether AI outputs are accurate, explainable, safe,.</a:t>
+            </a:r>
+            <a:endParaRPr lang="en-US" sz="1920" dirty="0"/>
+          </a:p>
+          <a:p>
+            <a:pPr indent="0" marL="0">
+              <a:buNone/>
+            </a:pPr>
+            <a:r>
+              <a:rPr lang="en-US" sz="1920" dirty="0">
                 <a:solidFill>
                   <a:srgbClr val="003A63"/>
                 </a:solidFill>
@@ -17666,9 +17672,9 @@
                 <a:ea typeface="Aptos" pitchFamily="34" charset="-122"/>
                 <a:cs typeface="Aptos" pitchFamily="34" charset="-120"/>
               </a:rPr>
-              <a:t>• Agencies that ignore this area may create tools that work in a demonstration but fail in.</a:t>
-            </a:r>
-            <a:endParaRPr lang="en-US" sz="2100" dirty="0"/>
+              <a:t>• Agencies that ignore this area may create tools that work in a demonstration.</a:t>
+            </a:r>
+            <a:endParaRPr lang="en-US" sz="1920" dirty="0"/>
           </a:p>
         </p:txBody>
       </p:sp>
@@ -17680,12 +17686,12 @@
         </p:nvSpPr>
         <p:spPr>
           <a:xfrm>
-            <a:off x="7635240" y="1325880"/>
-            <a:ext cx="3474720" cy="1255471"/>
+            <a:off x="7543800" y="1325880"/>
+            <a:ext cx="3611880" cy="1261872"/>
           </a:xfrm>
           <a:prstGeom prst="roundRect">
             <a:avLst>
-              <a:gd name="adj" fmla="val 8740"/>
+              <a:gd name="adj" fmla="val 8696"/>
             </a:avLst>
           </a:prstGeom>
           <a:solidFill>
@@ -17707,8 +17713,8 @@
         </p:nvSpPr>
         <p:spPr>
           <a:xfrm>
-            <a:off x="7799832" y="1472184"/>
-            <a:ext cx="3145536" cy="256032"/>
+            <a:off x="7708392" y="1453896"/>
+            <a:ext cx="3282696" cy="228600"/>
           </a:xfrm>
           <a:prstGeom prst="rect">
             <a:avLst/>
@@ -17724,7 +17730,7 @@
               <a:buNone/>
             </a:pPr>
             <a:r>
-              <a:rPr lang="en-US" sz="1300" b="1" dirty="0">
+              <a:rPr lang="en-US" sz="1220" b="1" dirty="0">
                 <a:solidFill>
                   <a:srgbClr val="0068B7"/>
                 </a:solidFill>
@@ -17734,7 +17740,7 @@
               </a:rPr>
               <a:t>Core concept</a:t>
             </a:r>
-            <a:endParaRPr lang="en-US" sz="1300" dirty="0"/>
+            <a:endParaRPr lang="en-US" sz="1220" dirty="0"/>
           </a:p>
         </p:txBody>
       </p:sp>
@@ -17746,8 +17752,8 @@
         </p:nvSpPr>
         <p:spPr>
           <a:xfrm>
-            <a:off x="7799832" y="1801368"/>
-            <a:ext cx="3145536" cy="688543"/>
+            <a:off x="7708392" y="1764792"/>
+            <a:ext cx="3282696" cy="749808"/>
           </a:xfrm>
           <a:prstGeom prst="rect">
             <a:avLst/>
@@ -17765,7 +17771,7 @@
               <a:buNone/>
             </a:pPr>
             <a:r>
-              <a:rPr lang="en-US" sz="1320" dirty="0">
+              <a:rPr lang="en-US" sz="1220" dirty="0">
                 <a:solidFill>
                   <a:srgbClr val="17364A"/>
                 </a:solidFill>
@@ -17773,9 +17779,9 @@
                 <a:ea typeface="Aptos" pitchFamily="34" charset="-122"/>
                 <a:cs typeface="Aptos" pitchFamily="34" charset="-120"/>
               </a:rPr>
-              <a:t>Cloud, Containers, and Secure Deployment Basics matters because AI systems are embedded in public.</a:t>
-            </a:r>
-            <a:endParaRPr lang="en-US" sz="1320" dirty="0"/>
+              <a:t>Cloud, Containers, and Secure Deployment Basics matters because AI systems are.</a:t>
+            </a:r>
+            <a:endParaRPr lang="en-US" sz="1220" dirty="0"/>
           </a:p>
         </p:txBody>
       </p:sp>
@@ -17787,12 +17793,12 @@
         </p:nvSpPr>
         <p:spPr>
           <a:xfrm>
-            <a:off x="7635240" y="2718511"/>
-            <a:ext cx="3474720" cy="1328623"/>
+            <a:off x="7543800" y="2724912"/>
+            <a:ext cx="3611880" cy="1527048"/>
           </a:xfrm>
           <a:prstGeom prst="roundRect">
             <a:avLst>
-              <a:gd name="adj" fmla="val 8259"/>
+              <a:gd name="adj" fmla="val 7186"/>
             </a:avLst>
           </a:prstGeom>
           <a:solidFill>
@@ -17814,8 +17820,8 @@
         </p:nvSpPr>
         <p:spPr>
           <a:xfrm>
-            <a:off x="7799832" y="2864815"/>
-            <a:ext cx="3145536" cy="256032"/>
+            <a:off x="7708392" y="2852928"/>
+            <a:ext cx="3282696" cy="228600"/>
           </a:xfrm>
           <a:prstGeom prst="rect">
             <a:avLst/>
@@ -17831,7 +17837,7 @@
               <a:buNone/>
             </a:pPr>
             <a:r>
-              <a:rPr lang="en-US" sz="1300" b="1" dirty="0">
+              <a:rPr lang="en-US" sz="1220" b="1" dirty="0">
                 <a:solidFill>
                   <a:srgbClr val="0068B7"/>
                 </a:solidFill>
@@ -17841,7 +17847,7 @@
               </a:rPr>
               <a:t>Concept checkpoints</a:t>
             </a:r>
-            <a:endParaRPr lang="en-US" sz="1300" dirty="0"/>
+            <a:endParaRPr lang="en-US" sz="1220" dirty="0"/>
           </a:p>
         </p:txBody>
       </p:sp>
@@ -17853,8 +17859,8 @@
         </p:nvSpPr>
         <p:spPr>
           <a:xfrm>
-            <a:off x="7818120" y="3230575"/>
-            <a:ext cx="3090672" cy="670255"/>
+            <a:off x="7726680" y="3182112"/>
+            <a:ext cx="3227832" cy="960120"/>
           </a:xfrm>
           <a:prstGeom prst="rect">
             <a:avLst/>
@@ -17872,7 +17878,7 @@
               <a:buNone/>
             </a:pPr>
             <a:r>
-              <a:rPr lang="en-US" sz="1220" dirty="0">
+              <a:rPr lang="en-US" sz="1140" dirty="0">
                 <a:solidFill>
                   <a:srgbClr val="17364A"/>
                 </a:solidFill>
@@ -17880,16 +17886,16 @@
                 <a:ea typeface="Aptos" pitchFamily="34" charset="-122"/>
                 <a:cs typeface="Aptos" pitchFamily="34" charset="-120"/>
               </a:rPr>
-              <a:t>Cloud, Containers, and Secure Deployment Basics matters because AI.</a:t>
-            </a:r>
-            <a:endParaRPr lang="en-US" sz="1220" dirty="0"/>
-          </a:p>
-          <a:p>
-            <a:pPr indent="0" marL="0">
-              <a:buNone/>
-            </a:pPr>
-            <a:r>
-              <a:rPr lang="en-US" sz="1220" dirty="0">
+              <a:t>Cloud, Containers, and Secure Deployment Basics.</a:t>
+            </a:r>
+            <a:endParaRPr lang="en-US" sz="1140" dirty="0"/>
+          </a:p>
+          <a:p>
+            <a:pPr indent="0" marL="0">
+              <a:buNone/>
+            </a:pPr>
+            <a:r>
+              <a:rPr lang="en-US" sz="1140" dirty="0">
                 <a:solidFill>
                   <a:srgbClr val="17364A"/>
                 </a:solidFill>
@@ -17899,14 +17905,14 @@
               </a:rPr>
               <a:t>The topic also affects accountability.</a:t>
             </a:r>
-            <a:endParaRPr lang="en-US" sz="1220" dirty="0"/>
-          </a:p>
-          <a:p>
-            <a:pPr indent="0" marL="0">
-              <a:buNone/>
-            </a:pPr>
-            <a:r>
-              <a:rPr lang="en-US" sz="1220" dirty="0">
+            <a:endParaRPr lang="en-US" sz="1140" dirty="0"/>
+          </a:p>
+          <a:p>
+            <a:pPr indent="0" marL="0">
+              <a:buNone/>
+            </a:pPr>
+            <a:r>
+              <a:rPr lang="en-US" sz="1140" dirty="0">
                 <a:solidFill>
                   <a:srgbClr val="17364A"/>
                 </a:solidFill>
@@ -17914,9 +17920,9 @@
                 <a:ea typeface="Aptos" pitchFamily="34" charset="-122"/>
                 <a:cs typeface="Aptos" pitchFamily="34" charset="-120"/>
               </a:rPr>
-              <a:t>Public health agencies must be able to explain how data are used,.</a:t>
-            </a:r>
-            <a:endParaRPr lang="en-US" sz="1220" dirty="0"/>
+              <a:t>Public health agencies must be able to explain how.</a:t>
+            </a:r>
+            <a:endParaRPr lang="en-US" sz="1140" dirty="0"/>
           </a:p>
         </p:txBody>
       </p:sp>
@@ -17928,12 +17934,12 @@
         </p:nvSpPr>
         <p:spPr>
           <a:xfrm>
-            <a:off x="7635240" y="4184294"/>
-            <a:ext cx="3474720" cy="1466698"/>
+            <a:off x="7543800" y="4389120"/>
+            <a:ext cx="3611880" cy="1261872"/>
           </a:xfrm>
           <a:prstGeom prst="roundRect">
             <a:avLst>
-              <a:gd name="adj" fmla="val 7481"/>
+              <a:gd name="adj" fmla="val 8696"/>
             </a:avLst>
           </a:prstGeom>
           <a:solidFill>
@@ -17955,8 +17961,8 @@
         </p:nvSpPr>
         <p:spPr>
           <a:xfrm>
-            <a:off x="7799832" y="4330598"/>
-            <a:ext cx="3145536" cy="256032"/>
+            <a:off x="7708392" y="4517136"/>
+            <a:ext cx="3282696" cy="228600"/>
           </a:xfrm>
           <a:prstGeom prst="rect">
             <a:avLst/>
@@ -17972,7 +17978,7 @@
               <a:buNone/>
             </a:pPr>
             <a:r>
-              <a:rPr lang="en-US" sz="1300" b="1" dirty="0">
+              <a:rPr lang="en-US" sz="1220" b="1" dirty="0">
                 <a:solidFill>
                   <a:srgbClr val="0068B7"/>
                 </a:solidFill>
@@ -17982,7 +17988,7 @@
               </a:rPr>
               <a:t>Apply it</a:t>
             </a:r>
-            <a:endParaRPr lang="en-US" sz="1300" dirty="0"/>
+            <a:endParaRPr lang="en-US" sz="1220" dirty="0"/>
           </a:p>
         </p:txBody>
       </p:sp>
@@ -17994,8 +18000,8 @@
         </p:nvSpPr>
         <p:spPr>
           <a:xfrm>
-            <a:off x="7799832" y="4659782"/>
-            <a:ext cx="3145536" cy="899770"/>
+            <a:off x="7708392" y="4828032"/>
+            <a:ext cx="3282696" cy="749808"/>
           </a:xfrm>
           <a:prstGeom prst="rect">
             <a:avLst/>
@@ -18013,7 +18019,7 @@
               <a:buNone/>
             </a:pPr>
             <a:r>
-              <a:rPr lang="en-US" sz="1320" dirty="0">
+              <a:rPr lang="en-US" sz="1220" dirty="0">
                 <a:solidFill>
                   <a:srgbClr val="17364A"/>
                 </a:solidFill>
@@ -18021,9 +18027,9 @@
                 <a:ea typeface="Aptos" pitchFamily="34" charset="-122"/>
                 <a:cs typeface="Aptos" pitchFamily="34" charset="-120"/>
               </a:rPr>
-              <a:t>Connect the concept to public health purpose, responsible use, required safeguards, documentation, and the next action a department should take.</a:t>
-            </a:r>
-            <a:endParaRPr lang="en-US" sz="1320" dirty="0"/>
+              <a:t>Connect the concept to public health purpose, responsible use, required.</a:t>
+            </a:r>
+            <a:endParaRPr lang="en-US" sz="1220" dirty="0"/>
           </a:p>
         </p:txBody>
       </p:sp>

--- a/downloads/presentations/modules/arc-330.pptx
+++ b/downloads/presentations/modules/arc-330.pptx
@@ -11372,7 +11372,7 @@
                 <a:ea typeface="Aptos" pitchFamily="34" charset="-122"/>
                 <a:cs typeface="Aptos" pitchFamily="34" charset="-120"/>
               </a:rPr>
-              <a:t>• 1. What is the best reason to address cloud, containers, and secure.</a:t>
+              <a:t>1. What is the best reason to address cloud, containers, and secure.</a:t>
             </a:r>
             <a:endParaRPr lang="en-US" sz="1920" dirty="0"/>
           </a:p>
@@ -11389,7 +11389,7 @@
                 <a:ea typeface="Aptos" pitchFamily="34" charset="-122"/>
                 <a:cs typeface="Aptos" pitchFamily="34" charset="-120"/>
               </a:rPr>
-              <a:t>• 2. Which practice best supports responsible implementation?</a:t>
+              <a:t>2. Which practice best supports responsible implementation?</a:t>
             </a:r>
             <a:endParaRPr lang="en-US" sz="1920" dirty="0"/>
           </a:p>
@@ -11406,7 +11406,7 @@
                 <a:ea typeface="Aptos" pitchFamily="34" charset="-122"/>
                 <a:cs typeface="Aptos" pitchFamily="34" charset="-120"/>
               </a:rPr>
-              <a:t>• 3. Which statement best describes a common failure mode?</a:t>
+              <a:t>3. Which statement best describes a common failure mode?</a:t>
             </a:r>
             <a:endParaRPr lang="en-US" sz="1920" dirty="0"/>
           </a:p>
@@ -11513,7 +11513,7 @@
                 <a:ea typeface="Aptos" pitchFamily="34" charset="-122"/>
                 <a:cs typeface="Aptos" pitchFamily="34" charset="-120"/>
               </a:rPr>
-              <a:t>1. What is the best reason to address cloud, containers, and secure deployment.</a:t>
+              <a:t>What is the best reason to address cloud, containers, and secure deployment.</a:t>
             </a:r>
             <a:endParaRPr lang="en-US" sz="1220" dirty="0"/>
           </a:p>
@@ -11620,41 +11620,7 @@
                 <a:ea typeface="Aptos" pitchFamily="34" charset="-122"/>
                 <a:cs typeface="Aptos" pitchFamily="34" charset="-120"/>
               </a:rPr>
-              <a:t>1.</a:t>
-            </a:r>
-            <a:endParaRPr lang="en-US" sz="1140" dirty="0"/>
-          </a:p>
-          <a:p>
-            <a:pPr indent="0" marL="0">
-              <a:buNone/>
-            </a:pPr>
-            <a:r>
-              <a:rPr lang="en-US" sz="1140" dirty="0">
-                <a:solidFill>
-                  <a:srgbClr val="17364A"/>
-                </a:solidFill>
-                <a:latin typeface="Aptos" pitchFamily="34" charset="0"/>
-                <a:ea typeface="Aptos" pitchFamily="34" charset="-122"/>
-                <a:cs typeface="Aptos" pitchFamily="34" charset="-120"/>
-              </a:rPr>
               <a:t>What is the best reason to address cloud,.</a:t>
-            </a:r>
-            <a:endParaRPr lang="en-US" sz="1140" dirty="0"/>
-          </a:p>
-          <a:p>
-            <a:pPr indent="0" marL="0">
-              <a:buNone/>
-            </a:pPr>
-            <a:r>
-              <a:rPr lang="en-US" sz="1140" dirty="0">
-                <a:solidFill>
-                  <a:srgbClr val="17364A"/>
-                </a:solidFill>
-                <a:latin typeface="Aptos" pitchFamily="34" charset="0"/>
-                <a:ea typeface="Aptos" pitchFamily="34" charset="-122"/>
-                <a:cs typeface="Aptos" pitchFamily="34" charset="-120"/>
-              </a:rPr>
-              <a:t>2.</a:t>
             </a:r>
             <a:endParaRPr lang="en-US" sz="1140" dirty="0"/>
           </a:p>
